--- a/folletos/2026-04/pptx/FIP_VANTRUST_LIQUIDEZ_PLUS.pptx
+++ b/folletos/2026-04/pptx/FIP_VANTRUST_LIQUIDEZ_PLUS.pptx
@@ -2927,7 +2927,7 @@
                 <a:ea typeface="Calibri" pitchFamily="34" charset="-122"/>
                 <a:cs typeface="Calibri" pitchFamily="34" charset="-120"/>
               </a:rPr>
-              <a:t>prueba CLP</a:t>
+              <a:t>prueba 2 CLP</a:t>
             </a:r>
             <a:endParaRPr lang="en-US" sz="800" dirty="0"/>
           </a:p>

--- a/folletos/2026-04/pptx/FIP_VANTRUST_LIQUIDEZ_PLUS.pptx
+++ b/folletos/2026-04/pptx/FIP_VANTRUST_LIQUIDEZ_PLUS.pptx
@@ -5363,7 +5363,7 @@
                 <a:ea typeface="Calibri" pitchFamily="34" charset="-122"/>
                 <a:cs typeface="Calibri" pitchFamily="34" charset="-120"/>
               </a:rPr>
-              <a:t>prueba CLP</a:t>
+              <a:t>prueba 3 CLP</a:t>
             </a:r>
             <a:endParaRPr lang="en-US" sz="800" dirty="0"/>
           </a:p>

--- a/folletos/2026-04/pptx/FIP_VANTRUST_LIQUIDEZ_PLUS.pptx
+++ b/folletos/2026-04/pptx/FIP_VANTRUST_LIQUIDEZ_PLUS.pptx
@@ -6323,7 +6323,7 @@
                 <a:ea typeface="Calibri" pitchFamily="34" charset="-122"/>
                 <a:cs typeface="Calibri" pitchFamily="34" charset="-120"/>
               </a:rPr>
-              <a:t>prueba CLP</a:t>
+              <a:t>prueba 4 CLP</a:t>
             </a:r>
             <a:endParaRPr lang="en-US" sz="800" dirty="0"/>
           </a:p>

--- a/folletos/2026-04/pptx/FIP_VANTRUST_LIQUIDEZ_PLUS.pptx
+++ b/folletos/2026-04/pptx/FIP_VANTRUST_LIQUIDEZ_PLUS.pptx
@@ -6373,7 +6373,7 @@
                 <a:ea typeface="Calibri" pitchFamily="34" charset="-122"/>
                 <a:cs typeface="Calibri" pitchFamily="34" charset="-120"/>
               </a:rPr>
-              <a:t>prueba CLP</a:t>
+              <a:t>prueba 6 CLP</a:t>
             </a:r>
             <a:endParaRPr lang="en-US" sz="800" dirty="0"/>
           </a:p>

--- a/folletos/2026-04/pptx/FIP_VANTRUST_LIQUIDEZ_PLUS.pptx
+++ b/folletos/2026-04/pptx/FIP_VANTRUST_LIQUIDEZ_PLUS.pptx
@@ -6373,7 +6373,7 @@
                 <a:ea typeface="Calibri" pitchFamily="34" charset="-122"/>
                 <a:cs typeface="Calibri" pitchFamily="34" charset="-120"/>
               </a:rPr>
-              <a:t>prueba 6 CLP</a:t>
+              <a:t>prueba CLP</a:t>
             </a:r>
             <a:endParaRPr lang="en-US" sz="800" dirty="0"/>
           </a:p>
@@ -33352,13 +33352,91 @@
       </p:sp>
       <p:sp>
         <p:nvSpPr>
-          <p:cNvPr id="8" name="Shape 6"/>
+          <p:cNvPr id="8" name="Text 6"/>
           <p:cNvSpPr/>
           <p:nvPr/>
         </p:nvSpPr>
         <p:spPr>
           <a:xfrm>
-            <a:off x="118872" y="1810512"/>
+            <a:off x="118872" y="1719072"/>
+            <a:ext cx="1188720" cy="173736"/>
+          </a:xfrm>
+          <a:prstGeom prst="rect">
+            <a:avLst/>
+          </a:prstGeom>
+          <a:noFill/>
+          <a:ln/>
+        </p:spPr>
+        <p:txBody>
+          <a:bodyPr wrap="square" lIns="0" tIns="0" rIns="0" bIns="0" rtlCol="0" anchor="ctr"/>
+          <a:lstStyle/>
+          <a:p>
+            <a:pPr indent="0" marL="0">
+              <a:buNone/>
+            </a:pPr>
+            <a:r>
+              <a:rPr lang="en-US" sz="750" dirty="0">
+                <a:solidFill>
+                  <a:srgbClr val="000000"/>
+                </a:solidFill>
+                <a:latin typeface="Calibri" pitchFamily="34" charset="0"/>
+                <a:ea typeface="Calibri" pitchFamily="34" charset="-122"/>
+                <a:cs typeface="Calibri" pitchFamily="34" charset="-120"/>
+              </a:rPr>
+              <a:t>CLP</a:t>
+            </a:r>
+            <a:endParaRPr lang="en-US" sz="750" dirty="0"/>
+          </a:p>
+        </p:txBody>
+      </p:sp>
+      <p:sp>
+        <p:nvSpPr>
+          <p:cNvPr id="9" name="Text 7"/>
+          <p:cNvSpPr/>
+          <p:nvPr/>
+        </p:nvSpPr>
+        <p:spPr>
+          <a:xfrm>
+            <a:off x="1307592" y="1719072"/>
+            <a:ext cx="1024128" cy="173736"/>
+          </a:xfrm>
+          <a:prstGeom prst="rect">
+            <a:avLst/>
+          </a:prstGeom>
+          <a:noFill/>
+          <a:ln/>
+        </p:spPr>
+        <p:txBody>
+          <a:bodyPr wrap="square" lIns="0" tIns="0" rIns="0" bIns="0" rtlCol="0" anchor="ctr"/>
+          <a:lstStyle/>
+          <a:p>
+            <a:pPr algn="r" indent="0" marL="0">
+              <a:buNone/>
+            </a:pPr>
+            <a:r>
+              <a:rPr lang="en-US" sz="750" b="1" dirty="0">
+                <a:solidFill>
+                  <a:srgbClr val="000000"/>
+                </a:solidFill>
+                <a:latin typeface="Calibri" pitchFamily="34" charset="0"/>
+                <a:ea typeface="Calibri" pitchFamily="34" charset="-122"/>
+                <a:cs typeface="Calibri" pitchFamily="34" charset="-120"/>
+              </a:rPr>
+              <a:t>100,00%</a:t>
+            </a:r>
+            <a:endParaRPr lang="en-US" sz="750" dirty="0"/>
+          </a:p>
+        </p:txBody>
+      </p:sp>
+      <p:sp>
+        <p:nvSpPr>
+          <p:cNvPr id="10" name="Shape 8"/>
+          <p:cNvSpPr/>
+          <p:nvPr/>
+        </p:nvSpPr>
+        <p:spPr>
+          <a:xfrm>
+            <a:off x="118872" y="2002536"/>
             <a:ext cx="2212848" cy="0"/>
           </a:xfrm>
           <a:prstGeom prst="line">
@@ -33375,13 +33453,13 @@
       </p:sp>
       <p:sp>
         <p:nvSpPr>
-          <p:cNvPr id="9" name="Text 7"/>
+          <p:cNvPr id="11" name="Text 9"/>
           <p:cNvSpPr/>
           <p:nvPr/>
         </p:nvSpPr>
         <p:spPr>
           <a:xfrm>
-            <a:off x="118872" y="1901952"/>
+            <a:off x="118872" y="2093976"/>
             <a:ext cx="2212848" cy="164592"/>
           </a:xfrm>
           <a:prstGeom prst="rect">
@@ -33414,13 +33492,13 @@
       </p:sp>
       <p:sp>
         <p:nvSpPr>
-          <p:cNvPr id="10" name="Shape 8"/>
+          <p:cNvPr id="12" name="Shape 10"/>
           <p:cNvSpPr/>
           <p:nvPr/>
         </p:nvSpPr>
         <p:spPr>
           <a:xfrm>
-            <a:off x="118872" y="2084832"/>
+            <a:off x="118872" y="2276856"/>
             <a:ext cx="2212848" cy="0"/>
           </a:xfrm>
           <a:prstGeom prst="line">
@@ -33437,13 +33515,13 @@
       </p:sp>
       <p:sp>
         <p:nvSpPr>
-          <p:cNvPr id="11" name="Text 9"/>
+          <p:cNvPr id="13" name="Text 11"/>
           <p:cNvSpPr/>
           <p:nvPr/>
         </p:nvSpPr>
         <p:spPr>
           <a:xfrm>
-            <a:off x="118872" y="2157984"/>
+            <a:off x="118872" y="2350008"/>
             <a:ext cx="1371600" cy="164592"/>
           </a:xfrm>
           <a:prstGeom prst="rect">
@@ -33476,13 +33554,13 @@
       </p:sp>
       <p:sp>
         <p:nvSpPr>
-          <p:cNvPr id="12" name="Text 10"/>
+          <p:cNvPr id="14" name="Text 12"/>
           <p:cNvSpPr/>
           <p:nvPr/>
         </p:nvSpPr>
         <p:spPr>
           <a:xfrm>
-            <a:off x="1490472" y="2157984"/>
+            <a:off x="1490472" y="2350008"/>
             <a:ext cx="841248" cy="164592"/>
           </a:xfrm>
           <a:prstGeom prst="rect">
@@ -33507,7 +33585,7 @@
                 <a:ea typeface="Calibri" pitchFamily="34" charset="-122"/>
                 <a:cs typeface="Calibri" pitchFamily="34" charset="-120"/>
               </a:rPr>
-              <a:t>100,00%</a:t>
+              <a:t>86,18%</a:t>
             </a:r>
             <a:endParaRPr lang="en-US" sz="700" dirty="0"/>
           </a:p>
@@ -33515,13 +33593,325 @@
       </p:sp>
       <p:sp>
         <p:nvSpPr>
-          <p:cNvPr id="13" name="Shape 11"/>
+          <p:cNvPr id="15" name="Text 13"/>
           <p:cNvSpPr/>
           <p:nvPr/>
         </p:nvSpPr>
         <p:spPr>
           <a:xfrm>
-            <a:off x="118872" y="2423160"/>
+            <a:off x="118872" y="2523744"/>
+            <a:ext cx="1371600" cy="164592"/>
+          </a:xfrm>
+          <a:prstGeom prst="rect">
+            <a:avLst/>
+          </a:prstGeom>
+          <a:noFill/>
+          <a:ln/>
+        </p:spPr>
+        <p:txBody>
+          <a:bodyPr wrap="square" lIns="0" tIns="0" rIns="0" bIns="0" rtlCol="0" anchor="ctr"/>
+          <a:lstStyle/>
+          <a:p>
+            <a:pPr indent="0" marL="0">
+              <a:buNone/>
+            </a:pPr>
+            <a:r>
+              <a:rPr lang="en-US" sz="700" dirty="0">
+                <a:solidFill>
+                  <a:srgbClr val="000000"/>
+                </a:solidFill>
+                <a:latin typeface="Calibri" pitchFamily="34" charset="0"/>
+                <a:ea typeface="Calibri" pitchFamily="34" charset="-122"/>
+                <a:cs typeface="Calibri" pitchFamily="34" charset="-120"/>
+              </a:rPr>
+              <a:t>Inmob</a:t>
+            </a:r>
+            <a:endParaRPr lang="en-US" sz="700" dirty="0"/>
+          </a:p>
+        </p:txBody>
+      </p:sp>
+      <p:sp>
+        <p:nvSpPr>
+          <p:cNvPr id="16" name="Text 14"/>
+          <p:cNvSpPr/>
+          <p:nvPr/>
+        </p:nvSpPr>
+        <p:spPr>
+          <a:xfrm>
+            <a:off x="1490472" y="2523744"/>
+            <a:ext cx="841248" cy="164592"/>
+          </a:xfrm>
+          <a:prstGeom prst="rect">
+            <a:avLst/>
+          </a:prstGeom>
+          <a:noFill/>
+          <a:ln/>
+        </p:spPr>
+        <p:txBody>
+          <a:bodyPr wrap="square" lIns="0" tIns="0" rIns="0" bIns="0" rtlCol="0" anchor="ctr"/>
+          <a:lstStyle/>
+          <a:p>
+            <a:pPr algn="r" indent="0" marL="0">
+              <a:buNone/>
+            </a:pPr>
+            <a:r>
+              <a:rPr lang="en-US" sz="700" b="1" dirty="0">
+                <a:solidFill>
+                  <a:srgbClr val="000000"/>
+                </a:solidFill>
+                <a:latin typeface="Calibri" pitchFamily="34" charset="0"/>
+                <a:ea typeface="Calibri" pitchFamily="34" charset="-122"/>
+                <a:cs typeface="Calibri" pitchFamily="34" charset="-120"/>
+              </a:rPr>
+              <a:t>8,11%</a:t>
+            </a:r>
+            <a:endParaRPr lang="en-US" sz="700" dirty="0"/>
+          </a:p>
+        </p:txBody>
+      </p:sp>
+      <p:sp>
+        <p:nvSpPr>
+          <p:cNvPr id="17" name="Text 15"/>
+          <p:cNvSpPr/>
+          <p:nvPr/>
+        </p:nvSpPr>
+        <p:spPr>
+          <a:xfrm>
+            <a:off x="118872" y="2697480"/>
+            <a:ext cx="1371600" cy="164592"/>
+          </a:xfrm>
+          <a:prstGeom prst="rect">
+            <a:avLst/>
+          </a:prstGeom>
+          <a:noFill/>
+          <a:ln/>
+        </p:spPr>
+        <p:txBody>
+          <a:bodyPr wrap="square" lIns="0" tIns="0" rIns="0" bIns="0" rtlCol="0" anchor="ctr"/>
+          <a:lstStyle/>
+          <a:p>
+            <a:pPr indent="0" marL="0">
+              <a:buNone/>
+            </a:pPr>
+            <a:r>
+              <a:rPr lang="en-US" sz="700" dirty="0">
+                <a:solidFill>
+                  <a:srgbClr val="000000"/>
+                </a:solidFill>
+                <a:latin typeface="Calibri" pitchFamily="34" charset="0"/>
+                <a:ea typeface="Calibri" pitchFamily="34" charset="-122"/>
+                <a:cs typeface="Calibri" pitchFamily="34" charset="-120"/>
+              </a:rPr>
+              <a:t>Revisar</a:t>
+            </a:r>
+            <a:endParaRPr lang="en-US" sz="700" dirty="0"/>
+          </a:p>
+        </p:txBody>
+      </p:sp>
+      <p:sp>
+        <p:nvSpPr>
+          <p:cNvPr id="18" name="Text 16"/>
+          <p:cNvSpPr/>
+          <p:nvPr/>
+        </p:nvSpPr>
+        <p:spPr>
+          <a:xfrm>
+            <a:off x="1490472" y="2697480"/>
+            <a:ext cx="841248" cy="164592"/>
+          </a:xfrm>
+          <a:prstGeom prst="rect">
+            <a:avLst/>
+          </a:prstGeom>
+          <a:noFill/>
+          <a:ln/>
+        </p:spPr>
+        <p:txBody>
+          <a:bodyPr wrap="square" lIns="0" tIns="0" rIns="0" bIns="0" rtlCol="0" anchor="ctr"/>
+          <a:lstStyle/>
+          <a:p>
+            <a:pPr algn="r" indent="0" marL="0">
+              <a:buNone/>
+            </a:pPr>
+            <a:r>
+              <a:rPr lang="en-US" sz="700" b="1" dirty="0">
+                <a:solidFill>
+                  <a:srgbClr val="000000"/>
+                </a:solidFill>
+                <a:latin typeface="Calibri" pitchFamily="34" charset="0"/>
+                <a:ea typeface="Calibri" pitchFamily="34" charset="-122"/>
+                <a:cs typeface="Calibri" pitchFamily="34" charset="-120"/>
+              </a:rPr>
+              <a:t>2,46%</a:t>
+            </a:r>
+            <a:endParaRPr lang="en-US" sz="700" dirty="0"/>
+          </a:p>
+        </p:txBody>
+      </p:sp>
+      <p:sp>
+        <p:nvSpPr>
+          <p:cNvPr id="19" name="Text 17"/>
+          <p:cNvSpPr/>
+          <p:nvPr/>
+        </p:nvSpPr>
+        <p:spPr>
+          <a:xfrm>
+            <a:off x="118872" y="2871216"/>
+            <a:ext cx="1371600" cy="164592"/>
+          </a:xfrm>
+          <a:prstGeom prst="rect">
+            <a:avLst/>
+          </a:prstGeom>
+          <a:noFill/>
+          <a:ln/>
+        </p:spPr>
+        <p:txBody>
+          <a:bodyPr wrap="square" lIns="0" tIns="0" rIns="0" bIns="0" rtlCol="0" anchor="ctr"/>
+          <a:lstStyle/>
+          <a:p>
+            <a:pPr indent="0" marL="0">
+              <a:buNone/>
+            </a:pPr>
+            <a:r>
+              <a:rPr lang="en-US" sz="700" dirty="0">
+                <a:solidFill>
+                  <a:srgbClr val="000000"/>
+                </a:solidFill>
+                <a:latin typeface="Calibri" pitchFamily="34" charset="0"/>
+                <a:ea typeface="Calibri" pitchFamily="34" charset="-122"/>
+                <a:cs typeface="Calibri" pitchFamily="34" charset="-120"/>
+              </a:rPr>
+              <a:t>Garantia</a:t>
+            </a:r>
+            <a:endParaRPr lang="en-US" sz="700" dirty="0"/>
+          </a:p>
+        </p:txBody>
+      </p:sp>
+      <p:sp>
+        <p:nvSpPr>
+          <p:cNvPr id="20" name="Text 18"/>
+          <p:cNvSpPr/>
+          <p:nvPr/>
+        </p:nvSpPr>
+        <p:spPr>
+          <a:xfrm>
+            <a:off x="1490472" y="2871216"/>
+            <a:ext cx="841248" cy="164592"/>
+          </a:xfrm>
+          <a:prstGeom prst="rect">
+            <a:avLst/>
+          </a:prstGeom>
+          <a:noFill/>
+          <a:ln/>
+        </p:spPr>
+        <p:txBody>
+          <a:bodyPr wrap="square" lIns="0" tIns="0" rIns="0" bIns="0" rtlCol="0" anchor="ctr"/>
+          <a:lstStyle/>
+          <a:p>
+            <a:pPr algn="r" indent="0" marL="0">
+              <a:buNone/>
+            </a:pPr>
+            <a:r>
+              <a:rPr lang="en-US" sz="700" b="1" dirty="0">
+                <a:solidFill>
+                  <a:srgbClr val="000000"/>
+                </a:solidFill>
+                <a:latin typeface="Calibri" pitchFamily="34" charset="0"/>
+                <a:ea typeface="Calibri" pitchFamily="34" charset="-122"/>
+                <a:cs typeface="Calibri" pitchFamily="34" charset="-120"/>
+              </a:rPr>
+              <a:t>2,02%</a:t>
+            </a:r>
+            <a:endParaRPr lang="en-US" sz="700" dirty="0"/>
+          </a:p>
+        </p:txBody>
+      </p:sp>
+      <p:sp>
+        <p:nvSpPr>
+          <p:cNvPr id="21" name="Text 19"/>
+          <p:cNvSpPr/>
+          <p:nvPr/>
+        </p:nvSpPr>
+        <p:spPr>
+          <a:xfrm>
+            <a:off x="118872" y="3044952"/>
+            <a:ext cx="1371600" cy="164592"/>
+          </a:xfrm>
+          <a:prstGeom prst="rect">
+            <a:avLst/>
+          </a:prstGeom>
+          <a:noFill/>
+          <a:ln/>
+        </p:spPr>
+        <p:txBody>
+          <a:bodyPr wrap="square" lIns="0" tIns="0" rIns="0" bIns="0" rtlCol="0" anchor="ctr"/>
+          <a:lstStyle/>
+          <a:p>
+            <a:pPr indent="0" marL="0">
+              <a:buNone/>
+            </a:pPr>
+            <a:r>
+              <a:rPr lang="en-US" sz="700" dirty="0">
+                <a:solidFill>
+                  <a:srgbClr val="000000"/>
+                </a:solidFill>
+                <a:latin typeface="Calibri" pitchFamily="34" charset="0"/>
+                <a:ea typeface="Calibri" pitchFamily="34" charset="-122"/>
+                <a:cs typeface="Calibri" pitchFamily="34" charset="-120"/>
+              </a:rPr>
+              <a:t>Nota estructurada</a:t>
+            </a:r>
+            <a:endParaRPr lang="en-US" sz="700" dirty="0"/>
+          </a:p>
+        </p:txBody>
+      </p:sp>
+      <p:sp>
+        <p:nvSpPr>
+          <p:cNvPr id="22" name="Text 20"/>
+          <p:cNvSpPr/>
+          <p:nvPr/>
+        </p:nvSpPr>
+        <p:spPr>
+          <a:xfrm>
+            <a:off x="1490472" y="3044952"/>
+            <a:ext cx="841248" cy="164592"/>
+          </a:xfrm>
+          <a:prstGeom prst="rect">
+            <a:avLst/>
+          </a:prstGeom>
+          <a:noFill/>
+          <a:ln/>
+        </p:spPr>
+        <p:txBody>
+          <a:bodyPr wrap="square" lIns="0" tIns="0" rIns="0" bIns="0" rtlCol="0" anchor="ctr"/>
+          <a:lstStyle/>
+          <a:p>
+            <a:pPr algn="r" indent="0" marL="0">
+              <a:buNone/>
+            </a:pPr>
+            <a:r>
+              <a:rPr lang="en-US" sz="700" b="1" dirty="0">
+                <a:solidFill>
+                  <a:srgbClr val="000000"/>
+                </a:solidFill>
+                <a:latin typeface="Calibri" pitchFamily="34" charset="0"/>
+                <a:ea typeface="Calibri" pitchFamily="34" charset="-122"/>
+                <a:cs typeface="Calibri" pitchFamily="34" charset="-120"/>
+              </a:rPr>
+              <a:t>1,23%</a:t>
+            </a:r>
+            <a:endParaRPr lang="en-US" sz="700" dirty="0"/>
+          </a:p>
+        </p:txBody>
+      </p:sp>
+      <p:sp>
+        <p:nvSpPr>
+          <p:cNvPr id="23" name="Shape 21"/>
+          <p:cNvSpPr/>
+          <p:nvPr/>
+        </p:nvSpPr>
+        <p:spPr>
+          <a:xfrm>
+            <a:off x="118872" y="3310128"/>
             <a:ext cx="2212848" cy="0"/>
           </a:xfrm>
           <a:prstGeom prst="line">
@@ -33538,13 +33928,13 @@
       </p:sp>
       <p:sp>
         <p:nvSpPr>
-          <p:cNvPr id="14" name="Text 12"/>
+          <p:cNvPr id="24" name="Text 22"/>
           <p:cNvSpPr/>
           <p:nvPr/>
         </p:nvSpPr>
         <p:spPr>
           <a:xfrm>
-            <a:off x="118872" y="2514600"/>
+            <a:off x="118872" y="3401568"/>
             <a:ext cx="2212848" cy="164592"/>
           </a:xfrm>
           <a:prstGeom prst="rect">
@@ -33577,13 +33967,13 @@
       </p:sp>
       <p:sp>
         <p:nvSpPr>
-          <p:cNvPr id="15" name="Shape 13"/>
+          <p:cNvPr id="25" name="Shape 23"/>
           <p:cNvSpPr/>
           <p:nvPr/>
         </p:nvSpPr>
         <p:spPr>
           <a:xfrm>
-            <a:off x="118872" y="2697480"/>
+            <a:off x="118872" y="3584448"/>
             <a:ext cx="2212848" cy="0"/>
           </a:xfrm>
           <a:prstGeom prst="line">
@@ -33600,13 +33990,13 @@
       </p:sp>
       <p:sp>
         <p:nvSpPr>
-          <p:cNvPr id="16" name="Text 14"/>
+          <p:cNvPr id="26" name="Text 24"/>
           <p:cNvSpPr/>
           <p:nvPr/>
         </p:nvSpPr>
         <p:spPr>
           <a:xfrm>
-            <a:off x="118872" y="2770632"/>
+            <a:off x="118872" y="3657600"/>
             <a:ext cx="1371600" cy="182880"/>
           </a:xfrm>
           <a:prstGeom prst="rect">
@@ -33639,13 +34029,13 @@
       </p:sp>
       <p:sp>
         <p:nvSpPr>
-          <p:cNvPr id="17" name="Text 15"/>
+          <p:cNvPr id="27" name="Text 25"/>
           <p:cNvSpPr/>
           <p:nvPr/>
         </p:nvSpPr>
         <p:spPr>
           <a:xfrm>
-            <a:off x="1490472" y="2770632"/>
+            <a:off x="1490472" y="3657600"/>
             <a:ext cx="841248" cy="182880"/>
           </a:xfrm>
           <a:prstGeom prst="rect">
@@ -33670,7 +34060,7 @@
                 <a:ea typeface="Calibri" pitchFamily="34" charset="-122"/>
                 <a:cs typeface="Calibri" pitchFamily="34" charset="-120"/>
               </a:rPr>
-              <a:t>63,16%</a:t>
+              <a:t>61,40%</a:t>
             </a:r>
             <a:endParaRPr lang="en-US" sz="750" dirty="0"/>
           </a:p>
@@ -33678,13 +34068,13 @@
       </p:sp>
       <p:sp>
         <p:nvSpPr>
-          <p:cNvPr id="18" name="Text 16"/>
+          <p:cNvPr id="28" name="Text 26"/>
           <p:cNvSpPr/>
           <p:nvPr/>
         </p:nvSpPr>
         <p:spPr>
           <a:xfrm>
-            <a:off x="118872" y="2971800"/>
+            <a:off x="118872" y="3858768"/>
             <a:ext cx="1371600" cy="182880"/>
           </a:xfrm>
           <a:prstGeom prst="rect">
@@ -33717,13 +34107,13 @@
       </p:sp>
       <p:sp>
         <p:nvSpPr>
-          <p:cNvPr id="19" name="Text 17"/>
+          <p:cNvPr id="29" name="Text 27"/>
           <p:cNvSpPr/>
           <p:nvPr/>
         </p:nvSpPr>
         <p:spPr>
           <a:xfrm>
-            <a:off x="1490472" y="2971800"/>
+            <a:off x="1490472" y="3858768"/>
             <a:ext cx="841248" cy="182880"/>
           </a:xfrm>
           <a:prstGeom prst="rect">
@@ -33748,7 +34138,7 @@
                 <a:ea typeface="Calibri" pitchFamily="34" charset="-122"/>
                 <a:cs typeface="Calibri" pitchFamily="34" charset="-120"/>
               </a:rPr>
-              <a:t>28,00%</a:t>
+              <a:t>36,58%</a:t>
             </a:r>
             <a:endParaRPr lang="en-US" sz="750" dirty="0"/>
           </a:p>
@@ -33756,13 +34146,13 @@
       </p:sp>
       <p:sp>
         <p:nvSpPr>
-          <p:cNvPr id="20" name="Text 18"/>
+          <p:cNvPr id="30" name="Text 28"/>
           <p:cNvSpPr/>
           <p:nvPr/>
         </p:nvSpPr>
         <p:spPr>
           <a:xfrm>
-            <a:off x="118872" y="3172968"/>
+            <a:off x="118872" y="4059936"/>
             <a:ext cx="1371600" cy="182880"/>
           </a:xfrm>
           <a:prstGeom prst="rect">
@@ -33795,13 +34185,13 @@
       </p:sp>
       <p:sp>
         <p:nvSpPr>
-          <p:cNvPr id="21" name="Text 19"/>
+          <p:cNvPr id="31" name="Text 29"/>
           <p:cNvSpPr/>
           <p:nvPr/>
         </p:nvSpPr>
         <p:spPr>
           <a:xfrm>
-            <a:off x="1490472" y="3172968"/>
+            <a:off x="1490472" y="4059936"/>
             <a:ext cx="841248" cy="182880"/>
           </a:xfrm>
           <a:prstGeom prst="rect">
@@ -33826,7 +34216,7 @@
                 <a:ea typeface="Calibri" pitchFamily="34" charset="-122"/>
                 <a:cs typeface="Calibri" pitchFamily="34" charset="-120"/>
               </a:rPr>
-              <a:t>8,84%</a:t>
+              <a:t>2,02%</a:t>
             </a:r>
             <a:endParaRPr lang="en-US" sz="750" dirty="0"/>
           </a:p>
@@ -33834,13 +34224,13 @@
       </p:sp>
       <p:sp>
         <p:nvSpPr>
-          <p:cNvPr id="22" name="Text 20"/>
+          <p:cNvPr id="32" name="Text 30"/>
           <p:cNvSpPr/>
           <p:nvPr/>
         </p:nvSpPr>
         <p:spPr>
           <a:xfrm>
-            <a:off x="118872" y="3374136"/>
+            <a:off x="118872" y="4261104"/>
             <a:ext cx="1371600" cy="182880"/>
           </a:xfrm>
           <a:prstGeom prst="rect">
@@ -33873,13 +34263,13 @@
       </p:sp>
       <p:sp>
         <p:nvSpPr>
-          <p:cNvPr id="23" name="Text 21"/>
+          <p:cNvPr id="33" name="Text 31"/>
           <p:cNvSpPr/>
           <p:nvPr/>
         </p:nvSpPr>
         <p:spPr>
           <a:xfrm>
-            <a:off x="1490472" y="3374136"/>
+            <a:off x="1490472" y="4261104"/>
             <a:ext cx="841248" cy="182880"/>
           </a:xfrm>
           <a:prstGeom prst="rect">
@@ -33912,7 +34302,7 @@
       </p:sp>
       <p:sp>
         <p:nvSpPr>
-          <p:cNvPr id="24" name="Text 22"/>
+          <p:cNvPr id="34" name="Text 32"/>
           <p:cNvSpPr/>
           <p:nvPr/>
         </p:nvSpPr>
@@ -33951,7 +34341,7 @@
       </p:sp>
       <p:sp>
         <p:nvSpPr>
-          <p:cNvPr id="25" name="Shape 23"/>
+          <p:cNvPr id="35" name="Shape 33"/>
           <p:cNvSpPr/>
           <p:nvPr/>
         </p:nvSpPr>
@@ -33974,7 +34364,7 @@
       </p:sp>
       <p:sp>
         <p:nvSpPr>
-          <p:cNvPr id="26" name="Text 24"/>
+          <p:cNvPr id="36" name="Text 34"/>
           <p:cNvSpPr/>
           <p:nvPr/>
         </p:nvSpPr>
@@ -34030,7 +34420,7 @@
       </p:sp>
       <p:sp>
         <p:nvSpPr>
-          <p:cNvPr id="27" name="Text 25"/>
+          <p:cNvPr id="37" name="Text 35"/>
           <p:cNvSpPr/>
           <p:nvPr/>
         </p:nvSpPr>
@@ -34086,7 +34476,7 @@
       </p:sp>
       <p:sp>
         <p:nvSpPr>
-          <p:cNvPr id="28" name="Text 26"/>
+          <p:cNvPr id="38" name="Text 36"/>
           <p:cNvSpPr/>
           <p:nvPr/>
         </p:nvSpPr>
@@ -34142,7 +34532,7 @@
       </p:sp>
       <p:sp>
         <p:nvSpPr>
-          <p:cNvPr id="29" name="Text 27"/>
+          <p:cNvPr id="39" name="Text 37"/>
           <p:cNvSpPr/>
           <p:nvPr/>
         </p:nvSpPr>
@@ -34198,7 +34588,7 @@
       </p:sp>
       <p:sp>
         <p:nvSpPr>
-          <p:cNvPr id="30" name="Text 28"/>
+          <p:cNvPr id="40" name="Text 38"/>
           <p:cNvSpPr/>
           <p:nvPr/>
         </p:nvSpPr>
@@ -34254,7 +34644,7 @@
       </p:sp>
       <p:sp>
         <p:nvSpPr>
-          <p:cNvPr id="31" name="Text 29"/>
+          <p:cNvPr id="41" name="Text 39"/>
           <p:cNvSpPr/>
           <p:nvPr/>
         </p:nvSpPr>
@@ -34310,7 +34700,7 @@
       </p:sp>
       <p:sp>
         <p:nvSpPr>
-          <p:cNvPr id="32" name="Text 30"/>
+          <p:cNvPr id="42" name="Text 40"/>
           <p:cNvSpPr/>
           <p:nvPr/>
         </p:nvSpPr>
@@ -34366,7 +34756,7 @@
       </p:sp>
       <p:sp>
         <p:nvSpPr>
-          <p:cNvPr id="33" name="Text 31"/>
+          <p:cNvPr id="43" name="Text 41"/>
           <p:cNvSpPr/>
           <p:nvPr/>
         </p:nvSpPr>
@@ -34422,7 +34812,7 @@
       </p:sp>
       <p:sp>
         <p:nvSpPr>
-          <p:cNvPr id="34" name="Text 32"/>
+          <p:cNvPr id="44" name="Text 42"/>
           <p:cNvSpPr/>
           <p:nvPr/>
         </p:nvSpPr>
@@ -34478,7 +34868,7 @@
       </p:sp>
       <p:sp>
         <p:nvSpPr>
-          <p:cNvPr id="35" name="Shape 33"/>
+          <p:cNvPr id="45" name="Shape 43"/>
           <p:cNvSpPr/>
           <p:nvPr/>
         </p:nvSpPr>
@@ -34501,7 +34891,7 @@
       </p:sp>
       <p:sp>
         <p:nvSpPr>
-          <p:cNvPr id="36" name="Text 34"/>
+          <p:cNvPr id="46" name="Text 44"/>
           <p:cNvSpPr/>
           <p:nvPr/>
         </p:nvSpPr>
@@ -34540,7 +34930,7 @@
       </p:sp>
       <p:sp>
         <p:nvSpPr>
-          <p:cNvPr id="37" name="Shape 35"/>
+          <p:cNvPr id="47" name="Shape 45"/>
           <p:cNvSpPr/>
           <p:nvPr/>
         </p:nvSpPr>
@@ -34563,7 +34953,7 @@
       </p:sp>
       <p:sp>
         <p:nvSpPr>
-          <p:cNvPr id="38" name="Text 36"/>
+          <p:cNvPr id="48" name="Text 46"/>
           <p:cNvSpPr/>
           <p:nvPr/>
         </p:nvSpPr>

--- a/folletos/2026-04/pptx/FIP_VANTRUST_LIQUIDEZ_PLUS.pptx
+++ b/folletos/2026-04/pptx/FIP_VANTRUST_LIQUIDEZ_PLUS.pptx
@@ -6373,7 +6373,7 @@
                 <a:ea typeface="Calibri" pitchFamily="34" charset="-122"/>
                 <a:cs typeface="Calibri" pitchFamily="34" charset="-120"/>
               </a:rPr>
-              <a:t>prueba CLP</a:t>
+              <a:t>prueba 8 CLP</a:t>
             </a:r>
             <a:endParaRPr lang="en-US" sz="800" dirty="0"/>
           </a:p>

--- a/folletos/2026-04/pptx/FIP_VANTRUST_LIQUIDEZ_PLUS.pptx
+++ b/folletos/2026-04/pptx/FIP_VANTRUST_LIQUIDEZ_PLUS.pptx
@@ -3114,7 +3114,7 @@
                 <a:ea typeface="Calibri" pitchFamily="34" charset="-122"/>
                 <a:cs typeface="Calibri" pitchFamily="34" charset="-120"/>
               </a:rPr>
-              <a:t>prueba CLP</a:t>
+              <a:t>prueba 10 CLP</a:t>
             </a:r>
             <a:endParaRPr lang="en-US" sz="800" dirty="0"/>
           </a:p>

--- a/folletos/2026-04/pptx/FIP_VANTRUST_LIQUIDEZ_PLUS.pptx
+++ b/folletos/2026-04/pptx/FIP_VANTRUST_LIQUIDEZ_PLUS.pptx
@@ -3114,7 +3114,7 @@
                 <a:ea typeface="Calibri" pitchFamily="34" charset="-122"/>
                 <a:cs typeface="Calibri" pitchFamily="34" charset="-120"/>
               </a:rPr>
-              <a:t>prueba 10 CLP</a:t>
+              <a:t>prueba 11 CLP</a:t>
             </a:r>
             <a:endParaRPr lang="en-US" sz="800" dirty="0"/>
           </a:p>

--- a/folletos/2026-04/pptx/FIP_VANTRUST_LIQUIDEZ_PLUS.pptx
+++ b/folletos/2026-04/pptx/FIP_VANTRUST_LIQUIDEZ_PLUS.pptx
@@ -3131,7 +3131,7 @@
                 <a:ea typeface="Calibri" pitchFamily="34" charset="-122"/>
                 <a:cs typeface="Calibri" pitchFamily="34" charset="-120"/>
               </a:rPr>
-              <a:t>prueba CLP</a:t>
+              <a:t>prueba 11 CLP</a:t>
             </a:r>
             <a:endParaRPr lang="en-US" sz="800" dirty="0"/>
           </a:p>

--- a/folletos/2026-04/pptx/FIP_VANTRUST_LIQUIDEZ_PLUS.pptx
+++ b/folletos/2026-04/pptx/FIP_VANTRUST_LIQUIDEZ_PLUS.pptx
@@ -3131,7 +3131,7 @@
                 <a:ea typeface="Calibri" pitchFamily="34" charset="-122"/>
                 <a:cs typeface="Calibri" pitchFamily="34" charset="-120"/>
               </a:rPr>
-              <a:t>prueba 11 CLP</a:t>
+              <a:t>prueba 12 CLP</a:t>
             </a:r>
             <a:endParaRPr lang="en-US" sz="800" dirty="0"/>
           </a:p>

--- a/folletos/2026-04/pptx/FIP_VANTRUST_LIQUIDEZ_PLUS.pptx
+++ b/folletos/2026-04/pptx/FIP_VANTRUST_LIQUIDEZ_PLUS.pptx
@@ -189,42 +189,39 @@
           </c:marker>
           <c:cat>
             <c:multiLvlStrRef>
-              <c:f>Sheet1!$A$2:$A$12</c:f>
+              <c:f>Sheet1!$A$2:$A$11</c:f>
               <c:multiLvlStrCache>
-                <c:ptCount val="11"/>
+                <c:ptCount val="10"/>
                 <c:lvl>
                   <c:pt idx="0">
-                    <c:v>2025-07-31</c:v>
+                    <c:v>Jul 2025</c:v>
                   </c:pt>
                   <c:pt idx="1">
-                    <c:v>2025-08-31</c:v>
+                    <c:v>Aug 2025</c:v>
                   </c:pt>
                   <c:pt idx="2">
-                    <c:v>2025-09-30</c:v>
+                    <c:v>Sep 2025</c:v>
                   </c:pt>
                   <c:pt idx="3">
-                    <c:v>2025-10-31</c:v>
+                    <c:v>Oct 2025</c:v>
                   </c:pt>
                   <c:pt idx="4">
-                    <c:v>2025-11-30</c:v>
+                    <c:v>Nov 2025</c:v>
                   </c:pt>
                   <c:pt idx="5">
-                    <c:v>2025-12-31</c:v>
+                    <c:v>Dec 2025</c:v>
                   </c:pt>
                   <c:pt idx="6">
-                    <c:v>2026-01-31</c:v>
+                    <c:v>Jan 2026</c:v>
                   </c:pt>
                   <c:pt idx="7">
-                    <c:v>2026-02-28</c:v>
+                    <c:v>Feb 2026</c:v>
                   </c:pt>
                   <c:pt idx="8">
-                    <c:v>2026-03-31</c:v>
+                    <c:v>Mar 2026</c:v>
                   </c:pt>
                   <c:pt idx="9">
-                    <c:v>2026-04-30</c:v>
-                  </c:pt>
-                  <c:pt idx="10">
-                    <c:v>2026-05-31</c:v>
+                    <c:v>Apr 2026</c:v>
                   </c:pt>
                 </c:lvl>
               </c:multiLvlStrCache>
@@ -232,42 +229,39 @@
           </c:cat>
           <c:val>
             <c:numRef>
-              <c:f>Sheet1!$B$2:$B$12</c:f>
+              <c:f>Sheet1!$B$2:$B$11</c:f>
               <c:numCache>
                 <c:formatCode>General</c:formatCode>
-                <c:ptCount val="11"/>
+                <c:ptCount val="10"/>
                 <c:pt idx="0">
-                  <c:v>519.78</c:v>
+                  <c:v>100</c:v>
                 </c:pt>
                 <c:pt idx="1">
-                  <c:v>522.32</c:v>
+                  <c:v>100.4</c:v>
                 </c:pt>
                 <c:pt idx="2">
-                  <c:v>523.75</c:v>
+                  <c:v>100.79</c:v>
                 </c:pt>
                 <c:pt idx="3">
-                  <c:v>524.58</c:v>
+                  <c:v>101.19</c:v>
                 </c:pt>
                 <c:pt idx="4">
-                  <c:v>525.18</c:v>
+                  <c:v>101.59</c:v>
                 </c:pt>
                 <c:pt idx="5">
-                  <c:v>525.63</c:v>
+                  <c:v>101.98</c:v>
                 </c:pt>
                 <c:pt idx="6">
-                  <c:v>525.88</c:v>
+                  <c:v>102.37</c:v>
                 </c:pt>
                 <c:pt idx="7">
-                  <c:v>526.1</c:v>
+                  <c:v>102.75</c:v>
                 </c:pt>
                 <c:pt idx="8">
-                  <c:v>526.32</c:v>
+                  <c:v>103.14</c:v>
                 </c:pt>
                 <c:pt idx="9">
-                  <c:v>526.54</c:v>
-                </c:pt>
-                <c:pt idx="10">
-                  <c:v>526.76</c:v>
+                  <c:v>103.52</c:v>
                 </c:pt>
               </c:numCache>
             </c:numRef>
@@ -283,7 +277,7 @@
               <c:strCache>
                 <c:ptCount val="1"/>
                 <c:pt idx="0">
-                  <c:v>FIP LIQUIDEZ PLUS</c:v>
+                  <c:v>FIP LIQUIDEZ Plus</c:v>
                 </c:pt>
               </c:strCache>
             </c:strRef>
@@ -345,42 +339,39 @@
           </c:marker>
           <c:cat>
             <c:multiLvlStrRef>
-              <c:f>Sheet1!$A$2:$A$12</c:f>
+              <c:f>Sheet1!$A$2:$A$11</c:f>
               <c:multiLvlStrCache>
-                <c:ptCount val="11"/>
+                <c:ptCount val="10"/>
                 <c:lvl>
                   <c:pt idx="0">
-                    <c:v>2025-07-31</c:v>
+                    <c:v>Jul 2025</c:v>
                   </c:pt>
                   <c:pt idx="1">
-                    <c:v>2025-08-31</c:v>
+                    <c:v>Aug 2025</c:v>
                   </c:pt>
                   <c:pt idx="2">
-                    <c:v>2025-09-30</c:v>
+                    <c:v>Sep 2025</c:v>
                   </c:pt>
                   <c:pt idx="3">
-                    <c:v>2025-10-31</c:v>
+                    <c:v>Oct 2025</c:v>
                   </c:pt>
                   <c:pt idx="4">
-                    <c:v>2025-11-30</c:v>
+                    <c:v>Nov 2025</c:v>
                   </c:pt>
                   <c:pt idx="5">
-                    <c:v>2025-12-31</c:v>
+                    <c:v>Dec 2025</c:v>
                   </c:pt>
                   <c:pt idx="6">
-                    <c:v>2026-01-31</c:v>
+                    <c:v>Jan 2026</c:v>
                   </c:pt>
                   <c:pt idx="7">
-                    <c:v>2026-02-28</c:v>
+                    <c:v>Feb 2026</c:v>
                   </c:pt>
                   <c:pt idx="8">
-                    <c:v>2026-03-31</c:v>
+                    <c:v>Mar 2026</c:v>
                   </c:pt>
                   <c:pt idx="9">
-                    <c:v>2026-04-30</c:v>
-                  </c:pt>
-                  <c:pt idx="10">
-                    <c:v>2026-05-31</c:v>
+                    <c:v>Apr 2026</c:v>
                   </c:pt>
                 </c:lvl>
               </c:multiLvlStrCache>
@@ -388,42 +379,39 @@
           </c:cat>
           <c:val>
             <c:numRef>
-              <c:f>Sheet1!$C$2:$C$12</c:f>
+              <c:f>Sheet1!$C$2:$C$11</c:f>
               <c:numCache>
                 <c:formatCode>General</c:formatCode>
-                <c:ptCount val="11"/>
+                <c:ptCount val="10"/>
                 <c:pt idx="0">
-                  <c:v>1000</c:v>
+                  <c:v>100</c:v>
                 </c:pt>
                 <c:pt idx="1">
-                  <c:v>1006.27</c:v>
+                  <c:v>100.63</c:v>
                 </c:pt>
                 <c:pt idx="2">
-                  <c:v>1012.28</c:v>
+                  <c:v>101.23</c:v>
                 </c:pt>
                 <c:pt idx="3">
-                  <c:v>1018.43</c:v>
+                  <c:v>101.84</c:v>
                 </c:pt>
                 <c:pt idx="4">
-                  <c:v>1024.51</c:v>
+                  <c:v>102.45</c:v>
                 </c:pt>
                 <c:pt idx="5">
-                  <c:v>1030.82</c:v>
+                  <c:v>103.08</c:v>
                 </c:pt>
                 <c:pt idx="6">
-                  <c:v>1037.12</c:v>
+                  <c:v>103.71</c:v>
                 </c:pt>
                 <c:pt idx="7">
-                  <c:v>1043.18</c:v>
+                  <c:v>104.32</c:v>
                 </c:pt>
                 <c:pt idx="8">
-                  <c:v>1049.69</c:v>
+                  <c:v>104.97</c:v>
                 </c:pt>
                 <c:pt idx="9">
-                  <c:v>1056.15</c:v>
-                </c:pt>
-                <c:pt idx="10">
-                  <c:v>1057.17</c:v>
+                  <c:v>105.62</c:v>
                 </c:pt>
               </c:numCache>
             </c:numRef>
@@ -501,42 +489,39 @@
           </c:marker>
           <c:cat>
             <c:multiLvlStrRef>
-              <c:f>Sheet1!$A$2:$A$12</c:f>
+              <c:f>Sheet1!$A$2:$A$11</c:f>
               <c:multiLvlStrCache>
-                <c:ptCount val="11"/>
+                <c:ptCount val="10"/>
                 <c:lvl>
                   <c:pt idx="0">
-                    <c:v>2025-07-31</c:v>
+                    <c:v>Jul 2025</c:v>
                   </c:pt>
                   <c:pt idx="1">
-                    <c:v>2025-08-31</c:v>
+                    <c:v>Aug 2025</c:v>
                   </c:pt>
                   <c:pt idx="2">
-                    <c:v>2025-09-30</c:v>
+                    <c:v>Sep 2025</c:v>
                   </c:pt>
                   <c:pt idx="3">
-                    <c:v>2025-10-31</c:v>
+                    <c:v>Oct 2025</c:v>
                   </c:pt>
                   <c:pt idx="4">
-                    <c:v>2025-11-30</c:v>
+                    <c:v>Nov 2025</c:v>
                   </c:pt>
                   <c:pt idx="5">
-                    <c:v>2025-12-31</c:v>
+                    <c:v>Dec 2025</c:v>
                   </c:pt>
                   <c:pt idx="6">
-                    <c:v>2026-01-31</c:v>
+                    <c:v>Jan 2026</c:v>
                   </c:pt>
                   <c:pt idx="7">
-                    <c:v>2026-02-28</c:v>
+                    <c:v>Feb 2026</c:v>
                   </c:pt>
                   <c:pt idx="8">
-                    <c:v>2026-03-31</c:v>
+                    <c:v>Mar 2026</c:v>
                   </c:pt>
                   <c:pt idx="9">
-                    <c:v>2026-04-30</c:v>
-                  </c:pt>
-                  <c:pt idx="10">
-                    <c:v>2026-05-31</c:v>
+                    <c:v>Apr 2026</c:v>
                   </c:pt>
                 </c:lvl>
               </c:multiLvlStrCache>
@@ -544,42 +529,39 @@
           </c:cat>
           <c:val>
             <c:numRef>
-              <c:f>Sheet1!$D$2:$D$12</c:f>
+              <c:f>Sheet1!$D$2:$D$11</c:f>
               <c:numCache>
                 <c:formatCode>General</c:formatCode>
-                <c:ptCount val="11"/>
+                <c:ptCount val="10"/>
                 <c:pt idx="0">
-                  <c:v>907.63</c:v>
+                  <c:v>100</c:v>
                 </c:pt>
                 <c:pt idx="1">
-                  <c:v>909.53</c:v>
+                  <c:v>100.3</c:v>
                 </c:pt>
                 <c:pt idx="2">
-                  <c:v>913.59</c:v>
+                  <c:v>100.58</c:v>
                 </c:pt>
                 <c:pt idx="3">
-                  <c:v>913.59</c:v>
+                  <c:v>100.87</c:v>
                 </c:pt>
                 <c:pt idx="4">
-                  <c:v>915.24</c:v>
+                  <c:v>101.15</c:v>
                 </c:pt>
                 <c:pt idx="5">
-                  <c:v>917.14</c:v>
+                  <c:v>101.71</c:v>
                 </c:pt>
                 <c:pt idx="6">
-                  <c:v>919.08</c:v>
+                  <c:v>101.71</c:v>
                 </c:pt>
                 <c:pt idx="7">
-                  <c:v>921.04</c:v>
+                  <c:v>101.96</c:v>
                 </c:pt>
                 <c:pt idx="8">
-                  <c:v>923.01</c:v>
+                  <c:v>102.23</c:v>
                 </c:pt>
                 <c:pt idx="9">
-                  <c:v>925.03</c:v>
-                </c:pt>
-                <c:pt idx="10">
-                  <c:v>926.95</c:v>
+                  <c:v>102.5</c:v>
                 </c:pt>
               </c:numCache>
             </c:numRef>
@@ -661,7 +643,7 @@
         <c:axId val="2094734552"/>
         <c:scaling>
           <c:orientation val="minMax"/>
-          <c:min val="504"/>
+          <c:min val="97"/>
         </c:scaling>
         <c:delete val="0"/>
         <c:axPos val="l"/>
@@ -3131,7 +3113,7 @@
                 <a:ea typeface="Calibri" pitchFamily="34" charset="-122"/>
                 <a:cs typeface="Calibri" pitchFamily="34" charset="-120"/>
               </a:rPr>
-              <a:t>prueba 12 CLP</a:t>
+              <a:t>prueba CLP</a:t>
             </a:r>
             <a:endParaRPr lang="en-US" sz="800" dirty="0"/>
           </a:p>
@@ -3663,7 +3645,7 @@
                           <a:ea typeface="Calibri" pitchFamily="34" charset="-122"/>
                           <a:cs typeface="Calibri" pitchFamily="34" charset="-120"/>
                         </a:rPr>
-                        <a:t>2026 (*)</a:t>
+                        <a:t>2026</a:t>
                       </a:r>
                       <a:endParaRPr lang="en-US" sz="750" dirty="0">
                         <a:latin typeface="Calibri" charset="0"/>
@@ -3801,7 +3783,7 @@
                           <a:ea typeface="Calibri" pitchFamily="34" charset="-122"/>
                           <a:cs typeface="Calibri" pitchFamily="34" charset="-120"/>
                         </a:rPr>
-                        <a:t>0,37%</a:t>
+                        <a:t>0.37%</a:t>
                       </a:r>
                       <a:endParaRPr lang="en-US" sz="750" dirty="0">
                         <a:latin typeface="Calibri" charset="0"/>
@@ -3848,7 +3830,7 @@
                       <a:tailEnd type="none" w="med" len="med"/>
                     </a:lnB>
                     <a:solidFill>
-                      <a:srgbClr val="FFFFFF"/>
+                      <a:srgbClr val="F9F9F9"/>
                     </a:solidFill>
                   </a:tcPr>
                 </a:tc>
@@ -3869,7 +3851,7 @@
                           <a:ea typeface="Calibri" pitchFamily="34" charset="-122"/>
                           <a:cs typeface="Calibri" pitchFamily="34" charset="-120"/>
                         </a:rPr>
-                        <a:t>1,13%</a:t>
+                        <a:t>1.13%</a:t>
                       </a:r>
                       <a:endParaRPr lang="en-US" sz="750" dirty="0">
                         <a:latin typeface="Calibri" charset="0"/>
@@ -3916,7 +3898,7 @@
                       <a:tailEnd type="none" w="med" len="med"/>
                     </a:lnB>
                     <a:solidFill>
-                      <a:srgbClr val="FFFFFF"/>
+                      <a:srgbClr val="F9F9F9"/>
                     </a:solidFill>
                   </a:tcPr>
                 </a:tc>
@@ -3937,7 +3919,7 @@
                           <a:ea typeface="Calibri" pitchFamily="34" charset="-122"/>
                           <a:cs typeface="Calibri" pitchFamily="34" charset="-120"/>
                         </a:rPr>
-                        <a:t>2,30%</a:t>
+                        <a:t>2.30%</a:t>
                       </a:r>
                       <a:endParaRPr lang="en-US" sz="750" dirty="0">
                         <a:latin typeface="Calibri" charset="0"/>
@@ -3984,7 +3966,7 @@
                       <a:tailEnd type="none" w="med" len="med"/>
                     </a:lnB>
                     <a:solidFill>
-                      <a:srgbClr val="FFFFFF"/>
+                      <a:srgbClr val="F9F9F9"/>
                     </a:solidFill>
                   </a:tcPr>
                 </a:tc>
@@ -4005,7 +3987,7 @@
                           <a:ea typeface="Calibri" pitchFamily="34" charset="-122"/>
                           <a:cs typeface="Calibri" pitchFamily="34" charset="-120"/>
                         </a:rPr>
-                        <a:t>4,82%</a:t>
+                        <a:t>4.82%</a:t>
                       </a:r>
                       <a:endParaRPr lang="en-US" sz="750" dirty="0">
                         <a:latin typeface="Calibri" charset="0"/>
@@ -4052,7 +4034,7 @@
                       <a:tailEnd type="none" w="med" len="med"/>
                     </a:lnB>
                     <a:solidFill>
-                      <a:srgbClr val="FFFFFF"/>
+                      <a:srgbClr val="F9F9F9"/>
                     </a:solidFill>
                   </a:tcPr>
                 </a:tc>
@@ -4073,7 +4055,7 @@
                           <a:ea typeface="Calibri" pitchFamily="34" charset="-122"/>
                           <a:cs typeface="Calibri" pitchFamily="34" charset="-120"/>
                         </a:rPr>
-                        <a:t>3,39%</a:t>
+                        <a:t>3.39%</a:t>
                       </a:r>
                       <a:endParaRPr lang="en-US" sz="750" dirty="0">
                         <a:latin typeface="Calibri" charset="0"/>
@@ -4120,7 +4102,7 @@
                       <a:tailEnd type="none" w="med" len="med"/>
                     </a:lnB>
                     <a:solidFill>
-                      <a:srgbClr val="FFFFFF"/>
+                      <a:srgbClr val="F9F9F9"/>
                     </a:solidFill>
                   </a:tcPr>
                 </a:tc>
@@ -4211,7 +4193,7 @@
                           <a:ea typeface="Calibri" pitchFamily="34" charset="-122"/>
                           <a:cs typeface="Calibri" pitchFamily="34" charset="-120"/>
                         </a:rPr>
-                        <a:t>0,26%</a:t>
+                        <a:t>0.26%</a:t>
                       </a:r>
                       <a:endParaRPr lang="en-US" sz="750" dirty="0">
                         <a:latin typeface="Calibri" charset="0"/>
@@ -4279,7 +4261,7 @@
                           <a:ea typeface="Calibri" pitchFamily="34" charset="-122"/>
                           <a:cs typeface="Calibri" pitchFamily="34" charset="-120"/>
                         </a:rPr>
-                        <a:t>0,77%</a:t>
+                        <a:t>0.77%</a:t>
                       </a:r>
                       <a:endParaRPr lang="en-US" sz="750" dirty="0">
                         <a:latin typeface="Calibri" charset="0"/>
@@ -4347,7 +4329,7 @@
                           <a:ea typeface="Calibri" pitchFamily="34" charset="-122"/>
                           <a:cs typeface="Calibri" pitchFamily="34" charset="-120"/>
                         </a:rPr>
-                        <a:t>1,62%</a:t>
+                        <a:t>1.62%</a:t>
                       </a:r>
                       <a:endParaRPr lang="en-US" sz="750" dirty="0">
                         <a:latin typeface="Calibri" charset="0"/>
@@ -4415,7 +4397,7 @@
                           <a:ea typeface="Calibri" pitchFamily="34" charset="-122"/>
                           <a:cs typeface="Calibri" pitchFamily="34" charset="-120"/>
                         </a:rPr>
-                        <a:t>3,43%</a:t>
+                        <a:t>3.43%</a:t>
                       </a:r>
                       <a:endParaRPr lang="en-US" sz="750" dirty="0">
                         <a:latin typeface="Calibri" charset="0"/>
@@ -4483,7 +4465,7 @@
                           <a:ea typeface="Calibri" pitchFamily="34" charset="-122"/>
                           <a:cs typeface="Calibri" pitchFamily="34" charset="-120"/>
                         </a:rPr>
-                        <a:t>2,32%</a:t>
+                        <a:t>2.32%</a:t>
                       </a:r>
                       <a:endParaRPr lang="en-US" sz="750" dirty="0">
                         <a:latin typeface="Calibri" charset="0"/>
@@ -4553,7 +4535,7 @@
                           <a:ea typeface="Calibri" pitchFamily="34" charset="-122"/>
                           <a:cs typeface="Calibri" pitchFamily="34" charset="-120"/>
                         </a:rPr>
-                        <a:t>FIP LIQUIDEZ PLUS</a:t>
+                        <a:t>FIP LIQUIDEZ Plus</a:t>
                       </a:r>
                       <a:endParaRPr lang="en-US" sz="750" dirty="0">
                         <a:latin typeface="Calibri" charset="0"/>
@@ -4621,7 +4603,7 @@
                           <a:ea typeface="Calibri" pitchFamily="34" charset="-122"/>
                           <a:cs typeface="Calibri" pitchFamily="34" charset="-120"/>
                         </a:rPr>
-                        <a:t>0,62%</a:t>
+                        <a:t>0.62%</a:t>
                       </a:r>
                       <a:endParaRPr lang="en-US" sz="750" dirty="0">
                         <a:latin typeface="Calibri" charset="0"/>
@@ -4668,7 +4650,7 @@
                       <a:tailEnd type="none" w="med" len="med"/>
                     </a:lnB>
                     <a:solidFill>
-                      <a:srgbClr val="FFFFFF"/>
+                      <a:srgbClr val="F9F9F9"/>
                     </a:solidFill>
                   </a:tcPr>
                 </a:tc>
@@ -4689,7 +4671,7 @@
                           <a:ea typeface="Calibri" pitchFamily="34" charset="-122"/>
                           <a:cs typeface="Calibri" pitchFamily="34" charset="-120"/>
                         </a:rPr>
-                        <a:t>1,84%</a:t>
+                        <a:t>1.84%</a:t>
                       </a:r>
                       <a:endParaRPr lang="en-US" sz="750" dirty="0">
                         <a:latin typeface="Calibri" charset="0"/>
@@ -4736,7 +4718,7 @@
                       <a:tailEnd type="none" w="med" len="med"/>
                     </a:lnB>
                     <a:solidFill>
-                      <a:srgbClr val="FFFFFF"/>
+                      <a:srgbClr val="F9F9F9"/>
                     </a:solidFill>
                   </a:tcPr>
                 </a:tc>
@@ -4757,7 +4739,7 @@
                           <a:ea typeface="Calibri" pitchFamily="34" charset="-122"/>
                           <a:cs typeface="Calibri" pitchFamily="34" charset="-120"/>
                         </a:rPr>
-                        <a:t>3,70%</a:t>
+                        <a:t>3.70%</a:t>
                       </a:r>
                       <a:endParaRPr lang="en-US" sz="750" dirty="0">
                         <a:latin typeface="Calibri" charset="0"/>
@@ -4804,7 +4786,7 @@
                       <a:tailEnd type="none" w="med" len="med"/>
                     </a:lnB>
                     <a:solidFill>
-                      <a:srgbClr val="FFFFFF"/>
+                      <a:srgbClr val="F9F9F9"/>
                     </a:solidFill>
                   </a:tcPr>
                 </a:tc>
@@ -4872,7 +4854,7 @@
                       <a:tailEnd type="none" w="med" len="med"/>
                     </a:lnB>
                     <a:solidFill>
-                      <a:srgbClr val="FFFFFF"/>
+                      <a:srgbClr val="F9F9F9"/>
                     </a:solidFill>
                   </a:tcPr>
                 </a:tc>
@@ -4893,7 +4875,7 @@
                           <a:ea typeface="Calibri" pitchFamily="34" charset="-122"/>
                           <a:cs typeface="Calibri" pitchFamily="34" charset="-120"/>
                         </a:rPr>
-                        <a:t>5,51%</a:t>
+                        <a:t>5.51%</a:t>
                       </a:r>
                       <a:endParaRPr lang="en-US" sz="750" dirty="0">
                         <a:latin typeface="Calibri" charset="0"/>
@@ -4940,7 +4922,7 @@
                       <a:tailEnd type="none" w="med" len="med"/>
                     </a:lnB>
                     <a:solidFill>
-                      <a:srgbClr val="FFFFFF"/>
+                      <a:srgbClr val="F9F9F9"/>
                     </a:solidFill>
                   </a:tcPr>
                 </a:tc>
@@ -5050,7 +5032,7 @@
                 <a:gridCol w="246888"/>
                 <a:gridCol w="283464"/>
               </a:tblGrid>
-              <a:tr h="118872">
+              <a:tr h="123444">
                 <a:tc>
                   <a:txBody>
                     <a:bodyPr/>
@@ -6048,7 +6030,5770 @@
                   </a:tcPr>
                 </a:tc>
               </a:tr>
-              <a:tr h="118872">
+              <a:tr h="123444">
+                <a:tc>
+                  <a:txBody>
+                    <a:bodyPr/>
+                    <a:lstStyle/>
+                    <a:p>
+                      <a:pPr algn="l" indent="0" marL="0">
+                        <a:buNone/>
+                      </a:pPr>
+                      <a:r>
+                        <a:rPr lang="en-US" sz="500" b="1" dirty="0">
+                          <a:solidFill>
+                            <a:srgbClr val="000000"/>
+                          </a:solidFill>
+                          <a:latin typeface="Calibri" pitchFamily="34" charset="0"/>
+                          <a:ea typeface="Calibri" pitchFamily="34" charset="-122"/>
+                          <a:cs typeface="Calibri" pitchFamily="34" charset="-120"/>
+                        </a:rPr>
+                        <a:t>2023</a:t>
+                      </a:r>
+                      <a:endParaRPr lang="en-US" sz="500" dirty="0">
+                        <a:latin typeface="Calibri" charset="0"/>
+                        <a:ea typeface="Calibri" charset="0"/>
+                        <a:cs typeface="Calibri" charset="0"/>
+                      </a:endParaRPr>
+                    </a:p>
+                  </a:txBody>
+                  <a:tcPr marL="91440" marR="91440" marT="45720" marB="45720">
+                    <a:lnL w="2540" cap="flat" cmpd="sng" algn="ctr">
+                      <a:solidFill>
+                        <a:srgbClr val="EEEEEE"/>
+                      </a:solidFill>
+                      <a:prstDash val="solid"/>
+                      <a:round/>
+                      <a:headEnd type="none" w="med" len="med"/>
+                      <a:tailEnd type="none" w="med" len="med"/>
+                    </a:lnL>
+                    <a:lnR w="2540" cap="flat" cmpd="sng" algn="ctr">
+                      <a:solidFill>
+                        <a:srgbClr val="EEEEEE"/>
+                      </a:solidFill>
+                      <a:prstDash val="solid"/>
+                      <a:round/>
+                      <a:headEnd type="none" w="med" len="med"/>
+                      <a:tailEnd type="none" w="med" len="med"/>
+                    </a:lnR>
+                    <a:lnT w="2540" cap="flat" cmpd="sng" algn="ctr">
+                      <a:solidFill>
+                        <a:srgbClr val="EEEEEE"/>
+                      </a:solidFill>
+                      <a:prstDash val="solid"/>
+                      <a:round/>
+                      <a:headEnd type="none" w="med" len="med"/>
+                      <a:tailEnd type="none" w="med" len="med"/>
+                    </a:lnT>
+                    <a:lnB w="2540" cap="flat" cmpd="sng" algn="ctr">
+                      <a:solidFill>
+                        <a:srgbClr val="EEEEEE"/>
+                      </a:solidFill>
+                      <a:prstDash val="solid"/>
+                      <a:round/>
+                      <a:headEnd type="none" w="med" len="med"/>
+                      <a:tailEnd type="none" w="med" len="med"/>
+                    </a:lnB>
+                  </a:tcPr>
+                </a:tc>
+                <a:tc>
+                  <a:txBody>
+                    <a:bodyPr/>
+                    <a:lstStyle/>
+                    <a:p>
+                      <a:pPr algn="l" indent="0" marL="0">
+                        <a:buNone/>
+                      </a:pPr>
+                      <a:r>
+                        <a:rPr lang="en-US" sz="500" dirty="0">
+                          <a:solidFill>
+                            <a:srgbClr val="777777"/>
+                          </a:solidFill>
+                          <a:latin typeface="Calibri" pitchFamily="34" charset="0"/>
+                          <a:ea typeface="Calibri" pitchFamily="34" charset="-122"/>
+                          <a:cs typeface="Calibri" pitchFamily="34" charset="-120"/>
+                        </a:rPr>
+                        <a:t>ICP</a:t>
+                      </a:r>
+                      <a:endParaRPr lang="en-US" sz="500" dirty="0">
+                        <a:latin typeface="Calibri" charset="0"/>
+                        <a:ea typeface="Calibri" charset="0"/>
+                        <a:cs typeface="Calibri" charset="0"/>
+                      </a:endParaRPr>
+                    </a:p>
+                  </a:txBody>
+                  <a:tcPr marL="91440" marR="91440" marT="45720" marB="45720">
+                    <a:lnL w="2540" cap="flat" cmpd="sng" algn="ctr">
+                      <a:solidFill>
+                        <a:srgbClr val="EEEEEE"/>
+                      </a:solidFill>
+                      <a:prstDash val="solid"/>
+                      <a:round/>
+                      <a:headEnd type="none" w="med" len="med"/>
+                      <a:tailEnd type="none" w="med" len="med"/>
+                    </a:lnL>
+                    <a:lnR w="2540" cap="flat" cmpd="sng" algn="ctr">
+                      <a:solidFill>
+                        <a:srgbClr val="EEEEEE"/>
+                      </a:solidFill>
+                      <a:prstDash val="solid"/>
+                      <a:round/>
+                      <a:headEnd type="none" w="med" len="med"/>
+                      <a:tailEnd type="none" w="med" len="med"/>
+                    </a:lnR>
+                    <a:lnT w="2540" cap="flat" cmpd="sng" algn="ctr">
+                      <a:solidFill>
+                        <a:srgbClr val="EEEEEE"/>
+                      </a:solidFill>
+                      <a:prstDash val="solid"/>
+                      <a:round/>
+                      <a:headEnd type="none" w="med" len="med"/>
+                      <a:tailEnd type="none" w="med" len="med"/>
+                    </a:lnT>
+                    <a:lnB w="2540" cap="flat" cmpd="sng" algn="ctr">
+                      <a:solidFill>
+                        <a:srgbClr val="EEEEEE"/>
+                      </a:solidFill>
+                      <a:prstDash val="solid"/>
+                      <a:round/>
+                      <a:headEnd type="none" w="med" len="med"/>
+                      <a:tailEnd type="none" w="med" len="med"/>
+                    </a:lnB>
+                  </a:tcPr>
+                </a:tc>
+                <a:tc>
+                  <a:txBody>
+                    <a:bodyPr/>
+                    <a:lstStyle/>
+                    <a:p>
+                      <a:pPr algn="ctr" indent="0" marL="0">
+                        <a:buNone/>
+                      </a:pPr>
+                      <a:r>
+                        <a:rPr lang="en-US" sz="500" dirty="0">
+                          <a:solidFill>
+                            <a:srgbClr val="777777"/>
+                          </a:solidFill>
+                          <a:latin typeface="Calibri" pitchFamily="34" charset="0"/>
+                          <a:ea typeface="Calibri" pitchFamily="34" charset="-122"/>
+                          <a:cs typeface="Calibri" pitchFamily="34" charset="-120"/>
+                        </a:rPr>
+                        <a:t>0.94%</a:t>
+                      </a:r>
+                      <a:endParaRPr lang="en-US" sz="500" dirty="0">
+                        <a:latin typeface="Calibri" charset="0"/>
+                        <a:ea typeface="Calibri" charset="0"/>
+                        <a:cs typeface="Calibri" charset="0"/>
+                      </a:endParaRPr>
+                    </a:p>
+                  </a:txBody>
+                  <a:tcPr marL="91440" marR="91440" marT="45720" marB="45720">
+                    <a:lnL w="2540" cap="flat" cmpd="sng" algn="ctr">
+                      <a:solidFill>
+                        <a:srgbClr val="EEEEEE"/>
+                      </a:solidFill>
+                      <a:prstDash val="solid"/>
+                      <a:round/>
+                      <a:headEnd type="none" w="med" len="med"/>
+                      <a:tailEnd type="none" w="med" len="med"/>
+                    </a:lnL>
+                    <a:lnR w="2540" cap="flat" cmpd="sng" algn="ctr">
+                      <a:solidFill>
+                        <a:srgbClr val="EEEEEE"/>
+                      </a:solidFill>
+                      <a:prstDash val="solid"/>
+                      <a:round/>
+                      <a:headEnd type="none" w="med" len="med"/>
+                      <a:tailEnd type="none" w="med" len="med"/>
+                    </a:lnR>
+                    <a:lnT w="2540" cap="flat" cmpd="sng" algn="ctr">
+                      <a:solidFill>
+                        <a:srgbClr val="EEEEEE"/>
+                      </a:solidFill>
+                      <a:prstDash val="solid"/>
+                      <a:round/>
+                      <a:headEnd type="none" w="med" len="med"/>
+                      <a:tailEnd type="none" w="med" len="med"/>
+                    </a:lnT>
+                    <a:lnB w="2540" cap="flat" cmpd="sng" algn="ctr">
+                      <a:solidFill>
+                        <a:srgbClr val="EEEEEE"/>
+                      </a:solidFill>
+                      <a:prstDash val="solid"/>
+                      <a:round/>
+                      <a:headEnd type="none" w="med" len="med"/>
+                      <a:tailEnd type="none" w="med" len="med"/>
+                    </a:lnB>
+                  </a:tcPr>
+                </a:tc>
+                <a:tc>
+                  <a:txBody>
+                    <a:bodyPr/>
+                    <a:lstStyle/>
+                    <a:p>
+                      <a:pPr algn="ctr" indent="0" marL="0">
+                        <a:buNone/>
+                      </a:pPr>
+                      <a:r>
+                        <a:rPr lang="en-US" sz="500" dirty="0">
+                          <a:solidFill>
+                            <a:srgbClr val="777777"/>
+                          </a:solidFill>
+                          <a:latin typeface="Calibri" pitchFamily="34" charset="0"/>
+                          <a:ea typeface="Calibri" pitchFamily="34" charset="-122"/>
+                          <a:cs typeface="Calibri" pitchFamily="34" charset="-120"/>
+                        </a:rPr>
+                        <a:t>0.94%</a:t>
+                      </a:r>
+                      <a:endParaRPr lang="en-US" sz="500" dirty="0">
+                        <a:latin typeface="Calibri" charset="0"/>
+                        <a:ea typeface="Calibri" charset="0"/>
+                        <a:cs typeface="Calibri" charset="0"/>
+                      </a:endParaRPr>
+                    </a:p>
+                  </a:txBody>
+                  <a:tcPr marL="91440" marR="91440" marT="45720" marB="45720">
+                    <a:lnL w="2540" cap="flat" cmpd="sng" algn="ctr">
+                      <a:solidFill>
+                        <a:srgbClr val="EEEEEE"/>
+                      </a:solidFill>
+                      <a:prstDash val="solid"/>
+                      <a:round/>
+                      <a:headEnd type="none" w="med" len="med"/>
+                      <a:tailEnd type="none" w="med" len="med"/>
+                    </a:lnL>
+                    <a:lnR w="2540" cap="flat" cmpd="sng" algn="ctr">
+                      <a:solidFill>
+                        <a:srgbClr val="EEEEEE"/>
+                      </a:solidFill>
+                      <a:prstDash val="solid"/>
+                      <a:round/>
+                      <a:headEnd type="none" w="med" len="med"/>
+                      <a:tailEnd type="none" w="med" len="med"/>
+                    </a:lnR>
+                    <a:lnT w="2540" cap="flat" cmpd="sng" algn="ctr">
+                      <a:solidFill>
+                        <a:srgbClr val="EEEEEE"/>
+                      </a:solidFill>
+                      <a:prstDash val="solid"/>
+                      <a:round/>
+                      <a:headEnd type="none" w="med" len="med"/>
+                      <a:tailEnd type="none" w="med" len="med"/>
+                    </a:lnT>
+                    <a:lnB w="2540" cap="flat" cmpd="sng" algn="ctr">
+                      <a:solidFill>
+                        <a:srgbClr val="EEEEEE"/>
+                      </a:solidFill>
+                      <a:prstDash val="solid"/>
+                      <a:round/>
+                      <a:headEnd type="none" w="med" len="med"/>
+                      <a:tailEnd type="none" w="med" len="med"/>
+                    </a:lnB>
+                  </a:tcPr>
+                </a:tc>
+                <a:tc>
+                  <a:txBody>
+                    <a:bodyPr/>
+                    <a:lstStyle/>
+                    <a:p>
+                      <a:pPr algn="ctr" indent="0" marL="0">
+                        <a:buNone/>
+                      </a:pPr>
+                      <a:r>
+                        <a:rPr lang="en-US" sz="500" dirty="0">
+                          <a:solidFill>
+                            <a:srgbClr val="777777"/>
+                          </a:solidFill>
+                          <a:latin typeface="Calibri" pitchFamily="34" charset="0"/>
+                          <a:ea typeface="Calibri" pitchFamily="34" charset="-122"/>
+                          <a:cs typeface="Calibri" pitchFamily="34" charset="-120"/>
+                        </a:rPr>
+                        <a:t>0.94%</a:t>
+                      </a:r>
+                      <a:endParaRPr lang="en-US" sz="500" dirty="0">
+                        <a:latin typeface="Calibri" charset="0"/>
+                        <a:ea typeface="Calibri" charset="0"/>
+                        <a:cs typeface="Calibri" charset="0"/>
+                      </a:endParaRPr>
+                    </a:p>
+                  </a:txBody>
+                  <a:tcPr marL="91440" marR="91440" marT="45720" marB="45720">
+                    <a:lnL w="2540" cap="flat" cmpd="sng" algn="ctr">
+                      <a:solidFill>
+                        <a:srgbClr val="EEEEEE"/>
+                      </a:solidFill>
+                      <a:prstDash val="solid"/>
+                      <a:round/>
+                      <a:headEnd type="none" w="med" len="med"/>
+                      <a:tailEnd type="none" w="med" len="med"/>
+                    </a:lnL>
+                    <a:lnR w="2540" cap="flat" cmpd="sng" algn="ctr">
+                      <a:solidFill>
+                        <a:srgbClr val="EEEEEE"/>
+                      </a:solidFill>
+                      <a:prstDash val="solid"/>
+                      <a:round/>
+                      <a:headEnd type="none" w="med" len="med"/>
+                      <a:tailEnd type="none" w="med" len="med"/>
+                    </a:lnR>
+                    <a:lnT w="2540" cap="flat" cmpd="sng" algn="ctr">
+                      <a:solidFill>
+                        <a:srgbClr val="EEEEEE"/>
+                      </a:solidFill>
+                      <a:prstDash val="solid"/>
+                      <a:round/>
+                      <a:headEnd type="none" w="med" len="med"/>
+                      <a:tailEnd type="none" w="med" len="med"/>
+                    </a:lnT>
+                    <a:lnB w="2540" cap="flat" cmpd="sng" algn="ctr">
+                      <a:solidFill>
+                        <a:srgbClr val="EEEEEE"/>
+                      </a:solidFill>
+                      <a:prstDash val="solid"/>
+                      <a:round/>
+                      <a:headEnd type="none" w="med" len="med"/>
+                      <a:tailEnd type="none" w="med" len="med"/>
+                    </a:lnB>
+                  </a:tcPr>
+                </a:tc>
+                <a:tc>
+                  <a:txBody>
+                    <a:bodyPr/>
+                    <a:lstStyle/>
+                    <a:p>
+                      <a:pPr algn="ctr" indent="0" marL="0">
+                        <a:buNone/>
+                      </a:pPr>
+                      <a:r>
+                        <a:rPr lang="en-US" sz="500" dirty="0">
+                          <a:solidFill>
+                            <a:srgbClr val="777777"/>
+                          </a:solidFill>
+                          <a:latin typeface="Calibri" pitchFamily="34" charset="0"/>
+                          <a:ea typeface="Calibri" pitchFamily="34" charset="-122"/>
+                          <a:cs typeface="Calibri" pitchFamily="34" charset="-120"/>
+                        </a:rPr>
+                        <a:t>0.94%</a:t>
+                      </a:r>
+                      <a:endParaRPr lang="en-US" sz="500" dirty="0">
+                        <a:latin typeface="Calibri" charset="0"/>
+                        <a:ea typeface="Calibri" charset="0"/>
+                        <a:cs typeface="Calibri" charset="0"/>
+                      </a:endParaRPr>
+                    </a:p>
+                  </a:txBody>
+                  <a:tcPr marL="91440" marR="91440" marT="45720" marB="45720">
+                    <a:lnL w="2540" cap="flat" cmpd="sng" algn="ctr">
+                      <a:solidFill>
+                        <a:srgbClr val="EEEEEE"/>
+                      </a:solidFill>
+                      <a:prstDash val="solid"/>
+                      <a:round/>
+                      <a:headEnd type="none" w="med" len="med"/>
+                      <a:tailEnd type="none" w="med" len="med"/>
+                    </a:lnL>
+                    <a:lnR w="2540" cap="flat" cmpd="sng" algn="ctr">
+                      <a:solidFill>
+                        <a:srgbClr val="EEEEEE"/>
+                      </a:solidFill>
+                      <a:prstDash val="solid"/>
+                      <a:round/>
+                      <a:headEnd type="none" w="med" len="med"/>
+                      <a:tailEnd type="none" w="med" len="med"/>
+                    </a:lnR>
+                    <a:lnT w="2540" cap="flat" cmpd="sng" algn="ctr">
+                      <a:solidFill>
+                        <a:srgbClr val="EEEEEE"/>
+                      </a:solidFill>
+                      <a:prstDash val="solid"/>
+                      <a:round/>
+                      <a:headEnd type="none" w="med" len="med"/>
+                      <a:tailEnd type="none" w="med" len="med"/>
+                    </a:lnT>
+                    <a:lnB w="2540" cap="flat" cmpd="sng" algn="ctr">
+                      <a:solidFill>
+                        <a:srgbClr val="EEEEEE"/>
+                      </a:solidFill>
+                      <a:prstDash val="solid"/>
+                      <a:round/>
+                      <a:headEnd type="none" w="med" len="med"/>
+                      <a:tailEnd type="none" w="med" len="med"/>
+                    </a:lnB>
+                  </a:tcPr>
+                </a:tc>
+                <a:tc>
+                  <a:txBody>
+                    <a:bodyPr/>
+                    <a:lstStyle/>
+                    <a:p>
+                      <a:pPr algn="ctr" indent="0" marL="0">
+                        <a:buNone/>
+                      </a:pPr>
+                      <a:r>
+                        <a:rPr lang="en-US" sz="500" dirty="0">
+                          <a:solidFill>
+                            <a:srgbClr val="777777"/>
+                          </a:solidFill>
+                          <a:latin typeface="Calibri" pitchFamily="34" charset="0"/>
+                          <a:ea typeface="Calibri" pitchFamily="34" charset="-122"/>
+                          <a:cs typeface="Calibri" pitchFamily="34" charset="-120"/>
+                        </a:rPr>
+                        <a:t>0.94%</a:t>
+                      </a:r>
+                      <a:endParaRPr lang="en-US" sz="500" dirty="0">
+                        <a:latin typeface="Calibri" charset="0"/>
+                        <a:ea typeface="Calibri" charset="0"/>
+                        <a:cs typeface="Calibri" charset="0"/>
+                      </a:endParaRPr>
+                    </a:p>
+                  </a:txBody>
+                  <a:tcPr marL="91440" marR="91440" marT="45720" marB="45720">
+                    <a:lnL w="2540" cap="flat" cmpd="sng" algn="ctr">
+                      <a:solidFill>
+                        <a:srgbClr val="EEEEEE"/>
+                      </a:solidFill>
+                      <a:prstDash val="solid"/>
+                      <a:round/>
+                      <a:headEnd type="none" w="med" len="med"/>
+                      <a:tailEnd type="none" w="med" len="med"/>
+                    </a:lnL>
+                    <a:lnR w="2540" cap="flat" cmpd="sng" algn="ctr">
+                      <a:solidFill>
+                        <a:srgbClr val="EEEEEE"/>
+                      </a:solidFill>
+                      <a:prstDash val="solid"/>
+                      <a:round/>
+                      <a:headEnd type="none" w="med" len="med"/>
+                      <a:tailEnd type="none" w="med" len="med"/>
+                    </a:lnR>
+                    <a:lnT w="2540" cap="flat" cmpd="sng" algn="ctr">
+                      <a:solidFill>
+                        <a:srgbClr val="EEEEEE"/>
+                      </a:solidFill>
+                      <a:prstDash val="solid"/>
+                      <a:round/>
+                      <a:headEnd type="none" w="med" len="med"/>
+                      <a:tailEnd type="none" w="med" len="med"/>
+                    </a:lnT>
+                    <a:lnB w="2540" cap="flat" cmpd="sng" algn="ctr">
+                      <a:solidFill>
+                        <a:srgbClr val="EEEEEE"/>
+                      </a:solidFill>
+                      <a:prstDash val="solid"/>
+                      <a:round/>
+                      <a:headEnd type="none" w="med" len="med"/>
+                      <a:tailEnd type="none" w="med" len="med"/>
+                    </a:lnB>
+                  </a:tcPr>
+                </a:tc>
+                <a:tc>
+                  <a:txBody>
+                    <a:bodyPr/>
+                    <a:lstStyle/>
+                    <a:p>
+                      <a:pPr algn="ctr" indent="0" marL="0">
+                        <a:buNone/>
+                      </a:pPr>
+                      <a:r>
+                        <a:rPr lang="en-US" sz="500" dirty="0">
+                          <a:solidFill>
+                            <a:srgbClr val="777777"/>
+                          </a:solidFill>
+                          <a:latin typeface="Calibri" pitchFamily="34" charset="0"/>
+                          <a:ea typeface="Calibri" pitchFamily="34" charset="-122"/>
+                          <a:cs typeface="Calibri" pitchFamily="34" charset="-120"/>
+                        </a:rPr>
+                        <a:t>0.94%</a:t>
+                      </a:r>
+                      <a:endParaRPr lang="en-US" sz="500" dirty="0">
+                        <a:latin typeface="Calibri" charset="0"/>
+                        <a:ea typeface="Calibri" charset="0"/>
+                        <a:cs typeface="Calibri" charset="0"/>
+                      </a:endParaRPr>
+                    </a:p>
+                  </a:txBody>
+                  <a:tcPr marL="91440" marR="91440" marT="45720" marB="45720">
+                    <a:lnL w="2540" cap="flat" cmpd="sng" algn="ctr">
+                      <a:solidFill>
+                        <a:srgbClr val="EEEEEE"/>
+                      </a:solidFill>
+                      <a:prstDash val="solid"/>
+                      <a:round/>
+                      <a:headEnd type="none" w="med" len="med"/>
+                      <a:tailEnd type="none" w="med" len="med"/>
+                    </a:lnL>
+                    <a:lnR w="2540" cap="flat" cmpd="sng" algn="ctr">
+                      <a:solidFill>
+                        <a:srgbClr val="EEEEEE"/>
+                      </a:solidFill>
+                      <a:prstDash val="solid"/>
+                      <a:round/>
+                      <a:headEnd type="none" w="med" len="med"/>
+                      <a:tailEnd type="none" w="med" len="med"/>
+                    </a:lnR>
+                    <a:lnT w="2540" cap="flat" cmpd="sng" algn="ctr">
+                      <a:solidFill>
+                        <a:srgbClr val="EEEEEE"/>
+                      </a:solidFill>
+                      <a:prstDash val="solid"/>
+                      <a:round/>
+                      <a:headEnd type="none" w="med" len="med"/>
+                      <a:tailEnd type="none" w="med" len="med"/>
+                    </a:lnT>
+                    <a:lnB w="2540" cap="flat" cmpd="sng" algn="ctr">
+                      <a:solidFill>
+                        <a:srgbClr val="EEEEEE"/>
+                      </a:solidFill>
+                      <a:prstDash val="solid"/>
+                      <a:round/>
+                      <a:headEnd type="none" w="med" len="med"/>
+                      <a:tailEnd type="none" w="med" len="med"/>
+                    </a:lnB>
+                  </a:tcPr>
+                </a:tc>
+                <a:tc>
+                  <a:txBody>
+                    <a:bodyPr/>
+                    <a:lstStyle/>
+                    <a:p>
+                      <a:pPr algn="ctr" indent="0" marL="0">
+                        <a:buNone/>
+                      </a:pPr>
+                      <a:r>
+                        <a:rPr lang="en-US" sz="500" dirty="0">
+                          <a:solidFill>
+                            <a:srgbClr val="777777"/>
+                          </a:solidFill>
+                          <a:latin typeface="Calibri" pitchFamily="34" charset="0"/>
+                          <a:ea typeface="Calibri" pitchFamily="34" charset="-122"/>
+                          <a:cs typeface="Calibri" pitchFamily="34" charset="-120"/>
+                        </a:rPr>
+                        <a:t>0.93%</a:t>
+                      </a:r>
+                      <a:endParaRPr lang="en-US" sz="500" dirty="0">
+                        <a:latin typeface="Calibri" charset="0"/>
+                        <a:ea typeface="Calibri" charset="0"/>
+                        <a:cs typeface="Calibri" charset="0"/>
+                      </a:endParaRPr>
+                    </a:p>
+                  </a:txBody>
+                  <a:tcPr marL="91440" marR="91440" marT="45720" marB="45720">
+                    <a:lnL w="2540" cap="flat" cmpd="sng" algn="ctr">
+                      <a:solidFill>
+                        <a:srgbClr val="EEEEEE"/>
+                      </a:solidFill>
+                      <a:prstDash val="solid"/>
+                      <a:round/>
+                      <a:headEnd type="none" w="med" len="med"/>
+                      <a:tailEnd type="none" w="med" len="med"/>
+                    </a:lnL>
+                    <a:lnR w="2540" cap="flat" cmpd="sng" algn="ctr">
+                      <a:solidFill>
+                        <a:srgbClr val="EEEEEE"/>
+                      </a:solidFill>
+                      <a:prstDash val="solid"/>
+                      <a:round/>
+                      <a:headEnd type="none" w="med" len="med"/>
+                      <a:tailEnd type="none" w="med" len="med"/>
+                    </a:lnR>
+                    <a:lnT w="2540" cap="flat" cmpd="sng" algn="ctr">
+                      <a:solidFill>
+                        <a:srgbClr val="EEEEEE"/>
+                      </a:solidFill>
+                      <a:prstDash val="solid"/>
+                      <a:round/>
+                      <a:headEnd type="none" w="med" len="med"/>
+                      <a:tailEnd type="none" w="med" len="med"/>
+                    </a:lnT>
+                    <a:lnB w="2540" cap="flat" cmpd="sng" algn="ctr">
+                      <a:solidFill>
+                        <a:srgbClr val="EEEEEE"/>
+                      </a:solidFill>
+                      <a:prstDash val="solid"/>
+                      <a:round/>
+                      <a:headEnd type="none" w="med" len="med"/>
+                      <a:tailEnd type="none" w="med" len="med"/>
+                    </a:lnB>
+                  </a:tcPr>
+                </a:tc>
+                <a:tc>
+                  <a:txBody>
+                    <a:bodyPr/>
+                    <a:lstStyle/>
+                    <a:p>
+                      <a:pPr algn="ctr" indent="0" marL="0">
+                        <a:buNone/>
+                      </a:pPr>
+                      <a:r>
+                        <a:rPr lang="en-US" sz="500" dirty="0">
+                          <a:solidFill>
+                            <a:srgbClr val="777777"/>
+                          </a:solidFill>
+                          <a:latin typeface="Calibri" pitchFamily="34" charset="0"/>
+                          <a:ea typeface="Calibri" pitchFamily="34" charset="-122"/>
+                          <a:cs typeface="Calibri" pitchFamily="34" charset="-120"/>
+                        </a:rPr>
+                        <a:t>0.85%</a:t>
+                      </a:r>
+                      <a:endParaRPr lang="en-US" sz="500" dirty="0">
+                        <a:latin typeface="Calibri" charset="0"/>
+                        <a:ea typeface="Calibri" charset="0"/>
+                        <a:cs typeface="Calibri" charset="0"/>
+                      </a:endParaRPr>
+                    </a:p>
+                  </a:txBody>
+                  <a:tcPr marL="91440" marR="91440" marT="45720" marB="45720">
+                    <a:lnL w="2540" cap="flat" cmpd="sng" algn="ctr">
+                      <a:solidFill>
+                        <a:srgbClr val="EEEEEE"/>
+                      </a:solidFill>
+                      <a:prstDash val="solid"/>
+                      <a:round/>
+                      <a:headEnd type="none" w="med" len="med"/>
+                      <a:tailEnd type="none" w="med" len="med"/>
+                    </a:lnL>
+                    <a:lnR w="2540" cap="flat" cmpd="sng" algn="ctr">
+                      <a:solidFill>
+                        <a:srgbClr val="EEEEEE"/>
+                      </a:solidFill>
+                      <a:prstDash val="solid"/>
+                      <a:round/>
+                      <a:headEnd type="none" w="med" len="med"/>
+                      <a:tailEnd type="none" w="med" len="med"/>
+                    </a:lnR>
+                    <a:lnT w="2540" cap="flat" cmpd="sng" algn="ctr">
+                      <a:solidFill>
+                        <a:srgbClr val="EEEEEE"/>
+                      </a:solidFill>
+                      <a:prstDash val="solid"/>
+                      <a:round/>
+                      <a:headEnd type="none" w="med" len="med"/>
+                      <a:tailEnd type="none" w="med" len="med"/>
+                    </a:lnT>
+                    <a:lnB w="2540" cap="flat" cmpd="sng" algn="ctr">
+                      <a:solidFill>
+                        <a:srgbClr val="EEEEEE"/>
+                      </a:solidFill>
+                      <a:prstDash val="solid"/>
+                      <a:round/>
+                      <a:headEnd type="none" w="med" len="med"/>
+                      <a:tailEnd type="none" w="med" len="med"/>
+                    </a:lnB>
+                  </a:tcPr>
+                </a:tc>
+                <a:tc>
+                  <a:txBody>
+                    <a:bodyPr/>
+                    <a:lstStyle/>
+                    <a:p>
+                      <a:pPr algn="ctr" indent="0" marL="0">
+                        <a:buNone/>
+                      </a:pPr>
+                      <a:r>
+                        <a:rPr lang="en-US" sz="500" dirty="0">
+                          <a:solidFill>
+                            <a:srgbClr val="777777"/>
+                          </a:solidFill>
+                          <a:latin typeface="Calibri" pitchFamily="34" charset="0"/>
+                          <a:ea typeface="Calibri" pitchFamily="34" charset="-122"/>
+                          <a:cs typeface="Calibri" pitchFamily="34" charset="-120"/>
+                        </a:rPr>
+                        <a:t>0.80%</a:t>
+                      </a:r>
+                      <a:endParaRPr lang="en-US" sz="500" dirty="0">
+                        <a:latin typeface="Calibri" charset="0"/>
+                        <a:ea typeface="Calibri" charset="0"/>
+                        <a:cs typeface="Calibri" charset="0"/>
+                      </a:endParaRPr>
+                    </a:p>
+                  </a:txBody>
+                  <a:tcPr marL="91440" marR="91440" marT="45720" marB="45720">
+                    <a:lnL w="2540" cap="flat" cmpd="sng" algn="ctr">
+                      <a:solidFill>
+                        <a:srgbClr val="EEEEEE"/>
+                      </a:solidFill>
+                      <a:prstDash val="solid"/>
+                      <a:round/>
+                      <a:headEnd type="none" w="med" len="med"/>
+                      <a:tailEnd type="none" w="med" len="med"/>
+                    </a:lnL>
+                    <a:lnR w="2540" cap="flat" cmpd="sng" algn="ctr">
+                      <a:solidFill>
+                        <a:srgbClr val="EEEEEE"/>
+                      </a:solidFill>
+                      <a:prstDash val="solid"/>
+                      <a:round/>
+                      <a:headEnd type="none" w="med" len="med"/>
+                      <a:tailEnd type="none" w="med" len="med"/>
+                    </a:lnR>
+                    <a:lnT w="2540" cap="flat" cmpd="sng" algn="ctr">
+                      <a:solidFill>
+                        <a:srgbClr val="EEEEEE"/>
+                      </a:solidFill>
+                      <a:prstDash val="solid"/>
+                      <a:round/>
+                      <a:headEnd type="none" w="med" len="med"/>
+                      <a:tailEnd type="none" w="med" len="med"/>
+                    </a:lnT>
+                    <a:lnB w="2540" cap="flat" cmpd="sng" algn="ctr">
+                      <a:solidFill>
+                        <a:srgbClr val="EEEEEE"/>
+                      </a:solidFill>
+                      <a:prstDash val="solid"/>
+                      <a:round/>
+                      <a:headEnd type="none" w="med" len="med"/>
+                      <a:tailEnd type="none" w="med" len="med"/>
+                    </a:lnB>
+                  </a:tcPr>
+                </a:tc>
+                <a:tc>
+                  <a:txBody>
+                    <a:bodyPr/>
+                    <a:lstStyle/>
+                    <a:p>
+                      <a:pPr algn="ctr" indent="0" marL="0">
+                        <a:buNone/>
+                      </a:pPr>
+                      <a:r>
+                        <a:rPr lang="en-US" sz="500" dirty="0">
+                          <a:solidFill>
+                            <a:srgbClr val="777777"/>
+                          </a:solidFill>
+                          <a:latin typeface="Calibri" pitchFamily="34" charset="0"/>
+                          <a:ea typeface="Calibri" pitchFamily="34" charset="-122"/>
+                          <a:cs typeface="Calibri" pitchFamily="34" charset="-120"/>
+                        </a:rPr>
+                        <a:t>0.79%</a:t>
+                      </a:r>
+                      <a:endParaRPr lang="en-US" sz="500" dirty="0">
+                        <a:latin typeface="Calibri" charset="0"/>
+                        <a:ea typeface="Calibri" charset="0"/>
+                        <a:cs typeface="Calibri" charset="0"/>
+                      </a:endParaRPr>
+                    </a:p>
+                  </a:txBody>
+                  <a:tcPr marL="91440" marR="91440" marT="45720" marB="45720">
+                    <a:lnL w="2540" cap="flat" cmpd="sng" algn="ctr">
+                      <a:solidFill>
+                        <a:srgbClr val="EEEEEE"/>
+                      </a:solidFill>
+                      <a:prstDash val="solid"/>
+                      <a:round/>
+                      <a:headEnd type="none" w="med" len="med"/>
+                      <a:tailEnd type="none" w="med" len="med"/>
+                    </a:lnL>
+                    <a:lnR w="2540" cap="flat" cmpd="sng" algn="ctr">
+                      <a:solidFill>
+                        <a:srgbClr val="EEEEEE"/>
+                      </a:solidFill>
+                      <a:prstDash val="solid"/>
+                      <a:round/>
+                      <a:headEnd type="none" w="med" len="med"/>
+                      <a:tailEnd type="none" w="med" len="med"/>
+                    </a:lnR>
+                    <a:lnT w="2540" cap="flat" cmpd="sng" algn="ctr">
+                      <a:solidFill>
+                        <a:srgbClr val="EEEEEE"/>
+                      </a:solidFill>
+                      <a:prstDash val="solid"/>
+                      <a:round/>
+                      <a:headEnd type="none" w="med" len="med"/>
+                      <a:tailEnd type="none" w="med" len="med"/>
+                    </a:lnT>
+                    <a:lnB w="2540" cap="flat" cmpd="sng" algn="ctr">
+                      <a:solidFill>
+                        <a:srgbClr val="EEEEEE"/>
+                      </a:solidFill>
+                      <a:prstDash val="solid"/>
+                      <a:round/>
+                      <a:headEnd type="none" w="med" len="med"/>
+                      <a:tailEnd type="none" w="med" len="med"/>
+                    </a:lnB>
+                  </a:tcPr>
+                </a:tc>
+                <a:tc>
+                  <a:txBody>
+                    <a:bodyPr/>
+                    <a:lstStyle/>
+                    <a:p>
+                      <a:pPr algn="ctr" indent="0" marL="0">
+                        <a:buNone/>
+                      </a:pPr>
+                      <a:r>
+                        <a:rPr lang="en-US" sz="500" dirty="0">
+                          <a:solidFill>
+                            <a:srgbClr val="777777"/>
+                          </a:solidFill>
+                          <a:latin typeface="Calibri" pitchFamily="34" charset="0"/>
+                          <a:ea typeface="Calibri" pitchFamily="34" charset="-122"/>
+                          <a:cs typeface="Calibri" pitchFamily="34" charset="-120"/>
+                        </a:rPr>
+                        <a:t>0.75%</a:t>
+                      </a:r>
+                      <a:endParaRPr lang="en-US" sz="500" dirty="0">
+                        <a:latin typeface="Calibri" charset="0"/>
+                        <a:ea typeface="Calibri" charset="0"/>
+                        <a:cs typeface="Calibri" charset="0"/>
+                      </a:endParaRPr>
+                    </a:p>
+                  </a:txBody>
+                  <a:tcPr marL="91440" marR="91440" marT="45720" marB="45720">
+                    <a:lnL w="2540" cap="flat" cmpd="sng" algn="ctr">
+                      <a:solidFill>
+                        <a:srgbClr val="EEEEEE"/>
+                      </a:solidFill>
+                      <a:prstDash val="solid"/>
+                      <a:round/>
+                      <a:headEnd type="none" w="med" len="med"/>
+                      <a:tailEnd type="none" w="med" len="med"/>
+                    </a:lnL>
+                    <a:lnR w="2540" cap="flat" cmpd="sng" algn="ctr">
+                      <a:solidFill>
+                        <a:srgbClr val="EEEEEE"/>
+                      </a:solidFill>
+                      <a:prstDash val="solid"/>
+                      <a:round/>
+                      <a:headEnd type="none" w="med" len="med"/>
+                      <a:tailEnd type="none" w="med" len="med"/>
+                    </a:lnR>
+                    <a:lnT w="2540" cap="flat" cmpd="sng" algn="ctr">
+                      <a:solidFill>
+                        <a:srgbClr val="EEEEEE"/>
+                      </a:solidFill>
+                      <a:prstDash val="solid"/>
+                      <a:round/>
+                      <a:headEnd type="none" w="med" len="med"/>
+                      <a:tailEnd type="none" w="med" len="med"/>
+                    </a:lnT>
+                    <a:lnB w="2540" cap="flat" cmpd="sng" algn="ctr">
+                      <a:solidFill>
+                        <a:srgbClr val="EEEEEE"/>
+                      </a:solidFill>
+                      <a:prstDash val="solid"/>
+                      <a:round/>
+                      <a:headEnd type="none" w="med" len="med"/>
+                      <a:tailEnd type="none" w="med" len="med"/>
+                    </a:lnB>
+                  </a:tcPr>
+                </a:tc>
+                <a:tc>
+                  <a:txBody>
+                    <a:bodyPr/>
+                    <a:lstStyle/>
+                    <a:p>
+                      <a:pPr algn="ctr" indent="0" marL="0">
+                        <a:buNone/>
+                      </a:pPr>
+                      <a:r>
+                        <a:rPr lang="en-US" sz="500" dirty="0">
+                          <a:solidFill>
+                            <a:srgbClr val="777777"/>
+                          </a:solidFill>
+                          <a:latin typeface="Calibri" pitchFamily="34" charset="0"/>
+                          <a:ea typeface="Calibri" pitchFamily="34" charset="-122"/>
+                          <a:cs typeface="Calibri" pitchFamily="34" charset="-120"/>
+                        </a:rPr>
+                        <a:t>0.73%</a:t>
+                      </a:r>
+                      <a:endParaRPr lang="en-US" sz="500" dirty="0">
+                        <a:latin typeface="Calibri" charset="0"/>
+                        <a:ea typeface="Calibri" charset="0"/>
+                        <a:cs typeface="Calibri" charset="0"/>
+                      </a:endParaRPr>
+                    </a:p>
+                  </a:txBody>
+                  <a:tcPr marL="91440" marR="91440" marT="45720" marB="45720">
+                    <a:lnL w="2540" cap="flat" cmpd="sng" algn="ctr">
+                      <a:solidFill>
+                        <a:srgbClr val="EEEEEE"/>
+                      </a:solidFill>
+                      <a:prstDash val="solid"/>
+                      <a:round/>
+                      <a:headEnd type="none" w="med" len="med"/>
+                      <a:tailEnd type="none" w="med" len="med"/>
+                    </a:lnL>
+                    <a:lnR w="2540" cap="flat" cmpd="sng" algn="ctr">
+                      <a:solidFill>
+                        <a:srgbClr val="EEEEEE"/>
+                      </a:solidFill>
+                      <a:prstDash val="solid"/>
+                      <a:round/>
+                      <a:headEnd type="none" w="med" len="med"/>
+                      <a:tailEnd type="none" w="med" len="med"/>
+                    </a:lnR>
+                    <a:lnT w="2540" cap="flat" cmpd="sng" algn="ctr">
+                      <a:solidFill>
+                        <a:srgbClr val="EEEEEE"/>
+                      </a:solidFill>
+                      <a:prstDash val="solid"/>
+                      <a:round/>
+                      <a:headEnd type="none" w="med" len="med"/>
+                      <a:tailEnd type="none" w="med" len="med"/>
+                    </a:lnT>
+                    <a:lnB w="2540" cap="flat" cmpd="sng" algn="ctr">
+                      <a:solidFill>
+                        <a:srgbClr val="EEEEEE"/>
+                      </a:solidFill>
+                      <a:prstDash val="solid"/>
+                      <a:round/>
+                      <a:headEnd type="none" w="med" len="med"/>
+                      <a:tailEnd type="none" w="med" len="med"/>
+                    </a:lnB>
+                  </a:tcPr>
+                </a:tc>
+                <a:tc>
+                  <a:txBody>
+                    <a:bodyPr/>
+                    <a:lstStyle/>
+                    <a:p>
+                      <a:pPr algn="ctr" indent="0" marL="0">
+                        <a:buNone/>
+                      </a:pPr>
+                      <a:r>
+                        <a:rPr lang="en-US" sz="500" b="1" dirty="0">
+                          <a:solidFill>
+                            <a:srgbClr val="777777"/>
+                          </a:solidFill>
+                          <a:latin typeface="Calibri" pitchFamily="34" charset="0"/>
+                          <a:ea typeface="Calibri" pitchFamily="34" charset="-122"/>
+                          <a:cs typeface="Calibri" pitchFamily="34" charset="-120"/>
+                        </a:rPr>
+                        <a:t>11.00%</a:t>
+                      </a:r>
+                      <a:endParaRPr lang="en-US" sz="500" dirty="0">
+                        <a:latin typeface="Calibri" charset="0"/>
+                        <a:ea typeface="Calibri" charset="0"/>
+                        <a:cs typeface="Calibri" charset="0"/>
+                      </a:endParaRPr>
+                    </a:p>
+                  </a:txBody>
+                  <a:tcPr marL="91440" marR="91440" marT="45720" marB="45720">
+                    <a:lnL w="2540" cap="flat" cmpd="sng" algn="ctr">
+                      <a:solidFill>
+                        <a:srgbClr val="EEEEEE"/>
+                      </a:solidFill>
+                      <a:prstDash val="solid"/>
+                      <a:round/>
+                      <a:headEnd type="none" w="med" len="med"/>
+                      <a:tailEnd type="none" w="med" len="med"/>
+                    </a:lnL>
+                    <a:lnR w="2540" cap="flat" cmpd="sng" algn="ctr">
+                      <a:solidFill>
+                        <a:srgbClr val="EEEEEE"/>
+                      </a:solidFill>
+                      <a:prstDash val="solid"/>
+                      <a:round/>
+                      <a:headEnd type="none" w="med" len="med"/>
+                      <a:tailEnd type="none" w="med" len="med"/>
+                    </a:lnR>
+                    <a:lnT w="2540" cap="flat" cmpd="sng" algn="ctr">
+                      <a:solidFill>
+                        <a:srgbClr val="EEEEEE"/>
+                      </a:solidFill>
+                      <a:prstDash val="solid"/>
+                      <a:round/>
+                      <a:headEnd type="none" w="med" len="med"/>
+                      <a:tailEnd type="none" w="med" len="med"/>
+                    </a:lnT>
+                    <a:lnB w="2540" cap="flat" cmpd="sng" algn="ctr">
+                      <a:solidFill>
+                        <a:srgbClr val="EEEEEE"/>
+                      </a:solidFill>
+                      <a:prstDash val="solid"/>
+                      <a:round/>
+                      <a:headEnd type="none" w="med" len="med"/>
+                      <a:tailEnd type="none" w="med" len="med"/>
+                    </a:lnB>
+                  </a:tcPr>
+                </a:tc>
+              </a:tr>
+              <a:tr h="123444">
+                <a:tc>
+                  <a:txBody>
+                    <a:bodyPr/>
+                    <a:lstStyle/>
+                    <a:p>
+                      <a:pPr algn="l" indent="0" marL="0">
+                        <a:buNone/>
+                      </a:pPr>
+                      <a:endParaRPr lang="en-US" sz="500" dirty="0">
+                        <a:latin typeface="Calibri" charset="0"/>
+                        <a:ea typeface="Calibri" charset="0"/>
+                        <a:cs typeface="Calibri" charset="0"/>
+                      </a:endParaRPr>
+                    </a:p>
+                  </a:txBody>
+                  <a:tcPr marL="91440" marR="91440" marT="45720" marB="45720">
+                    <a:lnL w="2540" cap="flat" cmpd="sng" algn="ctr">
+                      <a:solidFill>
+                        <a:srgbClr val="EEEEEE"/>
+                      </a:solidFill>
+                      <a:prstDash val="solid"/>
+                      <a:round/>
+                      <a:headEnd type="none" w="med" len="med"/>
+                      <a:tailEnd type="none" w="med" len="med"/>
+                    </a:lnL>
+                    <a:lnR w="2540" cap="flat" cmpd="sng" algn="ctr">
+                      <a:solidFill>
+                        <a:srgbClr val="EEEEEE"/>
+                      </a:solidFill>
+                      <a:prstDash val="solid"/>
+                      <a:round/>
+                      <a:headEnd type="none" w="med" len="med"/>
+                      <a:tailEnd type="none" w="med" len="med"/>
+                    </a:lnR>
+                    <a:lnT w="2540" cap="flat" cmpd="sng" algn="ctr">
+                      <a:solidFill>
+                        <a:srgbClr val="EEEEEE"/>
+                      </a:solidFill>
+                      <a:prstDash val="solid"/>
+                      <a:round/>
+                      <a:headEnd type="none" w="med" len="med"/>
+                      <a:tailEnd type="none" w="med" len="med"/>
+                    </a:lnT>
+                    <a:lnB w="2540" cap="flat" cmpd="sng" algn="ctr">
+                      <a:solidFill>
+                        <a:srgbClr val="EEEEEE"/>
+                      </a:solidFill>
+                      <a:prstDash val="solid"/>
+                      <a:round/>
+                      <a:headEnd type="none" w="med" len="med"/>
+                      <a:tailEnd type="none" w="med" len="med"/>
+                    </a:lnB>
+                  </a:tcPr>
+                </a:tc>
+                <a:tc>
+                  <a:txBody>
+                    <a:bodyPr/>
+                    <a:lstStyle/>
+                    <a:p>
+                      <a:pPr algn="l" indent="0" marL="0">
+                        <a:buNone/>
+                      </a:pPr>
+                      <a:r>
+                        <a:rPr lang="en-US" sz="500" dirty="0">
+                          <a:solidFill>
+                            <a:srgbClr val="999999"/>
+                          </a:solidFill>
+                          <a:latin typeface="Calibri" pitchFamily="34" charset="0"/>
+                          <a:ea typeface="Calibri" pitchFamily="34" charset="-122"/>
+                          <a:cs typeface="Calibri" pitchFamily="34" charset="-120"/>
+                        </a:rPr>
+                        <a:t>Competencia</a:t>
+                      </a:r>
+                      <a:endParaRPr lang="en-US" sz="500" dirty="0">
+                        <a:latin typeface="Calibri" charset="0"/>
+                        <a:ea typeface="Calibri" charset="0"/>
+                        <a:cs typeface="Calibri" charset="0"/>
+                      </a:endParaRPr>
+                    </a:p>
+                  </a:txBody>
+                  <a:tcPr marL="91440" marR="91440" marT="45720" marB="45720">
+                    <a:lnL w="2540" cap="flat" cmpd="sng" algn="ctr">
+                      <a:solidFill>
+                        <a:srgbClr val="EEEEEE"/>
+                      </a:solidFill>
+                      <a:prstDash val="solid"/>
+                      <a:round/>
+                      <a:headEnd type="none" w="med" len="med"/>
+                      <a:tailEnd type="none" w="med" len="med"/>
+                    </a:lnL>
+                    <a:lnR w="2540" cap="flat" cmpd="sng" algn="ctr">
+                      <a:solidFill>
+                        <a:srgbClr val="EEEEEE"/>
+                      </a:solidFill>
+                      <a:prstDash val="solid"/>
+                      <a:round/>
+                      <a:headEnd type="none" w="med" len="med"/>
+                      <a:tailEnd type="none" w="med" len="med"/>
+                    </a:lnR>
+                    <a:lnT w="2540" cap="flat" cmpd="sng" algn="ctr">
+                      <a:solidFill>
+                        <a:srgbClr val="EEEEEE"/>
+                      </a:solidFill>
+                      <a:prstDash val="solid"/>
+                      <a:round/>
+                      <a:headEnd type="none" w="med" len="med"/>
+                      <a:tailEnd type="none" w="med" len="med"/>
+                    </a:lnT>
+                    <a:lnB w="2540" cap="flat" cmpd="sng" algn="ctr">
+                      <a:solidFill>
+                        <a:srgbClr val="EEEEEE"/>
+                      </a:solidFill>
+                      <a:prstDash val="solid"/>
+                      <a:round/>
+                      <a:headEnd type="none" w="med" len="med"/>
+                      <a:tailEnd type="none" w="med" len="med"/>
+                    </a:lnB>
+                  </a:tcPr>
+                </a:tc>
+                <a:tc>
+                  <a:txBody>
+                    <a:bodyPr/>
+                    <a:lstStyle/>
+                    <a:p>
+                      <a:pPr algn="ctr" indent="0" marL="0">
+                        <a:buNone/>
+                      </a:pPr>
+                      <a:r>
+                        <a:rPr lang="en-US" sz="500" dirty="0">
+                          <a:solidFill>
+                            <a:srgbClr val="999999"/>
+                          </a:solidFill>
+                          <a:latin typeface="Calibri" pitchFamily="34" charset="0"/>
+                          <a:ea typeface="Calibri" pitchFamily="34" charset="-122"/>
+                          <a:cs typeface="Calibri" pitchFamily="34" charset="-120"/>
+                        </a:rPr>
+                        <a:t>0.00%</a:t>
+                      </a:r>
+                      <a:endParaRPr lang="en-US" sz="500" dirty="0">
+                        <a:latin typeface="Calibri" charset="0"/>
+                        <a:ea typeface="Calibri" charset="0"/>
+                        <a:cs typeface="Calibri" charset="0"/>
+                      </a:endParaRPr>
+                    </a:p>
+                  </a:txBody>
+                  <a:tcPr marL="91440" marR="91440" marT="45720" marB="45720">
+                    <a:lnL w="2540" cap="flat" cmpd="sng" algn="ctr">
+                      <a:solidFill>
+                        <a:srgbClr val="EEEEEE"/>
+                      </a:solidFill>
+                      <a:prstDash val="solid"/>
+                      <a:round/>
+                      <a:headEnd type="none" w="med" len="med"/>
+                      <a:tailEnd type="none" w="med" len="med"/>
+                    </a:lnL>
+                    <a:lnR w="2540" cap="flat" cmpd="sng" algn="ctr">
+                      <a:solidFill>
+                        <a:srgbClr val="EEEEEE"/>
+                      </a:solidFill>
+                      <a:prstDash val="solid"/>
+                      <a:round/>
+                      <a:headEnd type="none" w="med" len="med"/>
+                      <a:tailEnd type="none" w="med" len="med"/>
+                    </a:lnR>
+                    <a:lnT w="2540" cap="flat" cmpd="sng" algn="ctr">
+                      <a:solidFill>
+                        <a:srgbClr val="EEEEEE"/>
+                      </a:solidFill>
+                      <a:prstDash val="solid"/>
+                      <a:round/>
+                      <a:headEnd type="none" w="med" len="med"/>
+                      <a:tailEnd type="none" w="med" len="med"/>
+                    </a:lnT>
+                    <a:lnB w="2540" cap="flat" cmpd="sng" algn="ctr">
+                      <a:solidFill>
+                        <a:srgbClr val="EEEEEE"/>
+                      </a:solidFill>
+                      <a:prstDash val="solid"/>
+                      <a:round/>
+                      <a:headEnd type="none" w="med" len="med"/>
+                      <a:tailEnd type="none" w="med" len="med"/>
+                    </a:lnB>
+                  </a:tcPr>
+                </a:tc>
+                <a:tc>
+                  <a:txBody>
+                    <a:bodyPr/>
+                    <a:lstStyle/>
+                    <a:p>
+                      <a:pPr algn="ctr" indent="0" marL="0">
+                        <a:buNone/>
+                      </a:pPr>
+                      <a:endParaRPr lang="en-US" sz="500" dirty="0">
+                        <a:latin typeface="Calibri" charset="0"/>
+                        <a:ea typeface="Calibri" charset="0"/>
+                        <a:cs typeface="Calibri" charset="0"/>
+                      </a:endParaRPr>
+                    </a:p>
+                  </a:txBody>
+                  <a:tcPr marL="91440" marR="91440" marT="45720" marB="45720">
+                    <a:lnL w="2540" cap="flat" cmpd="sng" algn="ctr">
+                      <a:solidFill>
+                        <a:srgbClr val="EEEEEE"/>
+                      </a:solidFill>
+                      <a:prstDash val="solid"/>
+                      <a:round/>
+                      <a:headEnd type="none" w="med" len="med"/>
+                      <a:tailEnd type="none" w="med" len="med"/>
+                    </a:lnL>
+                    <a:lnR w="2540" cap="flat" cmpd="sng" algn="ctr">
+                      <a:solidFill>
+                        <a:srgbClr val="EEEEEE"/>
+                      </a:solidFill>
+                      <a:prstDash val="solid"/>
+                      <a:round/>
+                      <a:headEnd type="none" w="med" len="med"/>
+                      <a:tailEnd type="none" w="med" len="med"/>
+                    </a:lnR>
+                    <a:lnT w="2540" cap="flat" cmpd="sng" algn="ctr">
+                      <a:solidFill>
+                        <a:srgbClr val="EEEEEE"/>
+                      </a:solidFill>
+                      <a:prstDash val="solid"/>
+                      <a:round/>
+                      <a:headEnd type="none" w="med" len="med"/>
+                      <a:tailEnd type="none" w="med" len="med"/>
+                    </a:lnT>
+                    <a:lnB w="2540" cap="flat" cmpd="sng" algn="ctr">
+                      <a:solidFill>
+                        <a:srgbClr val="EEEEEE"/>
+                      </a:solidFill>
+                      <a:prstDash val="solid"/>
+                      <a:round/>
+                      <a:headEnd type="none" w="med" len="med"/>
+                      <a:tailEnd type="none" w="med" len="med"/>
+                    </a:lnB>
+                  </a:tcPr>
+                </a:tc>
+                <a:tc>
+                  <a:txBody>
+                    <a:bodyPr/>
+                    <a:lstStyle/>
+                    <a:p>
+                      <a:pPr algn="ctr" indent="0" marL="0">
+                        <a:buNone/>
+                      </a:pPr>
+                      <a:endParaRPr lang="en-US" sz="500" dirty="0">
+                        <a:latin typeface="Calibri" charset="0"/>
+                        <a:ea typeface="Calibri" charset="0"/>
+                        <a:cs typeface="Calibri" charset="0"/>
+                      </a:endParaRPr>
+                    </a:p>
+                  </a:txBody>
+                  <a:tcPr marL="91440" marR="91440" marT="45720" marB="45720">
+                    <a:lnL w="2540" cap="flat" cmpd="sng" algn="ctr">
+                      <a:solidFill>
+                        <a:srgbClr val="EEEEEE"/>
+                      </a:solidFill>
+                      <a:prstDash val="solid"/>
+                      <a:round/>
+                      <a:headEnd type="none" w="med" len="med"/>
+                      <a:tailEnd type="none" w="med" len="med"/>
+                    </a:lnL>
+                    <a:lnR w="2540" cap="flat" cmpd="sng" algn="ctr">
+                      <a:solidFill>
+                        <a:srgbClr val="EEEEEE"/>
+                      </a:solidFill>
+                      <a:prstDash val="solid"/>
+                      <a:round/>
+                      <a:headEnd type="none" w="med" len="med"/>
+                      <a:tailEnd type="none" w="med" len="med"/>
+                    </a:lnR>
+                    <a:lnT w="2540" cap="flat" cmpd="sng" algn="ctr">
+                      <a:solidFill>
+                        <a:srgbClr val="EEEEEE"/>
+                      </a:solidFill>
+                      <a:prstDash val="solid"/>
+                      <a:round/>
+                      <a:headEnd type="none" w="med" len="med"/>
+                      <a:tailEnd type="none" w="med" len="med"/>
+                    </a:lnT>
+                    <a:lnB w="2540" cap="flat" cmpd="sng" algn="ctr">
+                      <a:solidFill>
+                        <a:srgbClr val="EEEEEE"/>
+                      </a:solidFill>
+                      <a:prstDash val="solid"/>
+                      <a:round/>
+                      <a:headEnd type="none" w="med" len="med"/>
+                      <a:tailEnd type="none" w="med" len="med"/>
+                    </a:lnB>
+                  </a:tcPr>
+                </a:tc>
+                <a:tc>
+                  <a:txBody>
+                    <a:bodyPr/>
+                    <a:lstStyle/>
+                    <a:p>
+                      <a:pPr algn="ctr" indent="0" marL="0">
+                        <a:buNone/>
+                      </a:pPr>
+                      <a:r>
+                        <a:rPr lang="en-US" sz="500" dirty="0">
+                          <a:solidFill>
+                            <a:srgbClr val="999999"/>
+                          </a:solidFill>
+                          <a:latin typeface="Calibri" pitchFamily="34" charset="0"/>
+                          <a:ea typeface="Calibri" pitchFamily="34" charset="-122"/>
+                          <a:cs typeface="Calibri" pitchFamily="34" charset="-120"/>
+                        </a:rPr>
+                        <a:t>0.01%</a:t>
+                      </a:r>
+                      <a:endParaRPr lang="en-US" sz="500" dirty="0">
+                        <a:latin typeface="Calibri" charset="0"/>
+                        <a:ea typeface="Calibri" charset="0"/>
+                        <a:cs typeface="Calibri" charset="0"/>
+                      </a:endParaRPr>
+                    </a:p>
+                  </a:txBody>
+                  <a:tcPr marL="91440" marR="91440" marT="45720" marB="45720">
+                    <a:lnL w="2540" cap="flat" cmpd="sng" algn="ctr">
+                      <a:solidFill>
+                        <a:srgbClr val="EEEEEE"/>
+                      </a:solidFill>
+                      <a:prstDash val="solid"/>
+                      <a:round/>
+                      <a:headEnd type="none" w="med" len="med"/>
+                      <a:tailEnd type="none" w="med" len="med"/>
+                    </a:lnL>
+                    <a:lnR w="2540" cap="flat" cmpd="sng" algn="ctr">
+                      <a:solidFill>
+                        <a:srgbClr val="EEEEEE"/>
+                      </a:solidFill>
+                      <a:prstDash val="solid"/>
+                      <a:round/>
+                      <a:headEnd type="none" w="med" len="med"/>
+                      <a:tailEnd type="none" w="med" len="med"/>
+                    </a:lnR>
+                    <a:lnT w="2540" cap="flat" cmpd="sng" algn="ctr">
+                      <a:solidFill>
+                        <a:srgbClr val="EEEEEE"/>
+                      </a:solidFill>
+                      <a:prstDash val="solid"/>
+                      <a:round/>
+                      <a:headEnd type="none" w="med" len="med"/>
+                      <a:tailEnd type="none" w="med" len="med"/>
+                    </a:lnT>
+                    <a:lnB w="2540" cap="flat" cmpd="sng" algn="ctr">
+                      <a:solidFill>
+                        <a:srgbClr val="EEEEEE"/>
+                      </a:solidFill>
+                      <a:prstDash val="solid"/>
+                      <a:round/>
+                      <a:headEnd type="none" w="med" len="med"/>
+                      <a:tailEnd type="none" w="med" len="med"/>
+                    </a:lnB>
+                  </a:tcPr>
+                </a:tc>
+                <a:tc>
+                  <a:txBody>
+                    <a:bodyPr/>
+                    <a:lstStyle/>
+                    <a:p>
+                      <a:pPr algn="ctr" indent="0" marL="0">
+                        <a:buNone/>
+                      </a:pPr>
+                      <a:r>
+                        <a:rPr lang="en-US" sz="500" dirty="0">
+                          <a:solidFill>
+                            <a:srgbClr val="999999"/>
+                          </a:solidFill>
+                          <a:latin typeface="Calibri" pitchFamily="34" charset="0"/>
+                          <a:ea typeface="Calibri" pitchFamily="34" charset="-122"/>
+                          <a:cs typeface="Calibri" pitchFamily="34" charset="-120"/>
+                        </a:rPr>
+                        <a:t>0.01%</a:t>
+                      </a:r>
+                      <a:endParaRPr lang="en-US" sz="500" dirty="0">
+                        <a:latin typeface="Calibri" charset="0"/>
+                        <a:ea typeface="Calibri" charset="0"/>
+                        <a:cs typeface="Calibri" charset="0"/>
+                      </a:endParaRPr>
+                    </a:p>
+                  </a:txBody>
+                  <a:tcPr marL="91440" marR="91440" marT="45720" marB="45720">
+                    <a:lnL w="2540" cap="flat" cmpd="sng" algn="ctr">
+                      <a:solidFill>
+                        <a:srgbClr val="EEEEEE"/>
+                      </a:solidFill>
+                      <a:prstDash val="solid"/>
+                      <a:round/>
+                      <a:headEnd type="none" w="med" len="med"/>
+                      <a:tailEnd type="none" w="med" len="med"/>
+                    </a:lnL>
+                    <a:lnR w="2540" cap="flat" cmpd="sng" algn="ctr">
+                      <a:solidFill>
+                        <a:srgbClr val="EEEEEE"/>
+                      </a:solidFill>
+                      <a:prstDash val="solid"/>
+                      <a:round/>
+                      <a:headEnd type="none" w="med" len="med"/>
+                      <a:tailEnd type="none" w="med" len="med"/>
+                    </a:lnR>
+                    <a:lnT w="2540" cap="flat" cmpd="sng" algn="ctr">
+                      <a:solidFill>
+                        <a:srgbClr val="EEEEEE"/>
+                      </a:solidFill>
+                      <a:prstDash val="solid"/>
+                      <a:round/>
+                      <a:headEnd type="none" w="med" len="med"/>
+                      <a:tailEnd type="none" w="med" len="med"/>
+                    </a:lnT>
+                    <a:lnB w="2540" cap="flat" cmpd="sng" algn="ctr">
+                      <a:solidFill>
+                        <a:srgbClr val="EEEEEE"/>
+                      </a:solidFill>
+                      <a:prstDash val="solid"/>
+                      <a:round/>
+                      <a:headEnd type="none" w="med" len="med"/>
+                      <a:tailEnd type="none" w="med" len="med"/>
+                    </a:lnB>
+                  </a:tcPr>
+                </a:tc>
+                <a:tc>
+                  <a:txBody>
+                    <a:bodyPr/>
+                    <a:lstStyle/>
+                    <a:p>
+                      <a:pPr algn="ctr" indent="0" marL="0">
+                        <a:buNone/>
+                      </a:pPr>
+                      <a:r>
+                        <a:rPr lang="en-US" sz="500" dirty="0">
+                          <a:solidFill>
+                            <a:srgbClr val="999999"/>
+                          </a:solidFill>
+                          <a:latin typeface="Calibri" pitchFamily="34" charset="0"/>
+                          <a:ea typeface="Calibri" pitchFamily="34" charset="-122"/>
+                          <a:cs typeface="Calibri" pitchFamily="34" charset="-120"/>
+                        </a:rPr>
+                        <a:t>0.01%</a:t>
+                      </a:r>
+                      <a:endParaRPr lang="en-US" sz="500" dirty="0">
+                        <a:latin typeface="Calibri" charset="0"/>
+                        <a:ea typeface="Calibri" charset="0"/>
+                        <a:cs typeface="Calibri" charset="0"/>
+                      </a:endParaRPr>
+                    </a:p>
+                  </a:txBody>
+                  <a:tcPr marL="91440" marR="91440" marT="45720" marB="45720">
+                    <a:lnL w="2540" cap="flat" cmpd="sng" algn="ctr">
+                      <a:solidFill>
+                        <a:srgbClr val="EEEEEE"/>
+                      </a:solidFill>
+                      <a:prstDash val="solid"/>
+                      <a:round/>
+                      <a:headEnd type="none" w="med" len="med"/>
+                      <a:tailEnd type="none" w="med" len="med"/>
+                    </a:lnL>
+                    <a:lnR w="2540" cap="flat" cmpd="sng" algn="ctr">
+                      <a:solidFill>
+                        <a:srgbClr val="EEEEEE"/>
+                      </a:solidFill>
+                      <a:prstDash val="solid"/>
+                      <a:round/>
+                      <a:headEnd type="none" w="med" len="med"/>
+                      <a:tailEnd type="none" w="med" len="med"/>
+                    </a:lnR>
+                    <a:lnT w="2540" cap="flat" cmpd="sng" algn="ctr">
+                      <a:solidFill>
+                        <a:srgbClr val="EEEEEE"/>
+                      </a:solidFill>
+                      <a:prstDash val="solid"/>
+                      <a:round/>
+                      <a:headEnd type="none" w="med" len="med"/>
+                      <a:tailEnd type="none" w="med" len="med"/>
+                    </a:lnT>
+                    <a:lnB w="2540" cap="flat" cmpd="sng" algn="ctr">
+                      <a:solidFill>
+                        <a:srgbClr val="EEEEEE"/>
+                      </a:solidFill>
+                      <a:prstDash val="solid"/>
+                      <a:round/>
+                      <a:headEnd type="none" w="med" len="med"/>
+                      <a:tailEnd type="none" w="med" len="med"/>
+                    </a:lnB>
+                  </a:tcPr>
+                </a:tc>
+                <a:tc>
+                  <a:txBody>
+                    <a:bodyPr/>
+                    <a:lstStyle/>
+                    <a:p>
+                      <a:pPr algn="ctr" indent="0" marL="0">
+                        <a:buNone/>
+                      </a:pPr>
+                      <a:r>
+                        <a:rPr lang="en-US" sz="500" dirty="0">
+                          <a:solidFill>
+                            <a:srgbClr val="999999"/>
+                          </a:solidFill>
+                          <a:latin typeface="Calibri" pitchFamily="34" charset="0"/>
+                          <a:ea typeface="Calibri" pitchFamily="34" charset="-122"/>
+                          <a:cs typeface="Calibri" pitchFamily="34" charset="-120"/>
+                        </a:rPr>
+                        <a:t>0.01%</a:t>
+                      </a:r>
+                      <a:endParaRPr lang="en-US" sz="500" dirty="0">
+                        <a:latin typeface="Calibri" charset="0"/>
+                        <a:ea typeface="Calibri" charset="0"/>
+                        <a:cs typeface="Calibri" charset="0"/>
+                      </a:endParaRPr>
+                    </a:p>
+                  </a:txBody>
+                  <a:tcPr marL="91440" marR="91440" marT="45720" marB="45720">
+                    <a:lnL w="2540" cap="flat" cmpd="sng" algn="ctr">
+                      <a:solidFill>
+                        <a:srgbClr val="EEEEEE"/>
+                      </a:solidFill>
+                      <a:prstDash val="solid"/>
+                      <a:round/>
+                      <a:headEnd type="none" w="med" len="med"/>
+                      <a:tailEnd type="none" w="med" len="med"/>
+                    </a:lnL>
+                    <a:lnR w="2540" cap="flat" cmpd="sng" algn="ctr">
+                      <a:solidFill>
+                        <a:srgbClr val="EEEEEE"/>
+                      </a:solidFill>
+                      <a:prstDash val="solid"/>
+                      <a:round/>
+                      <a:headEnd type="none" w="med" len="med"/>
+                      <a:tailEnd type="none" w="med" len="med"/>
+                    </a:lnR>
+                    <a:lnT w="2540" cap="flat" cmpd="sng" algn="ctr">
+                      <a:solidFill>
+                        <a:srgbClr val="EEEEEE"/>
+                      </a:solidFill>
+                      <a:prstDash val="solid"/>
+                      <a:round/>
+                      <a:headEnd type="none" w="med" len="med"/>
+                      <a:tailEnd type="none" w="med" len="med"/>
+                    </a:lnT>
+                    <a:lnB w="2540" cap="flat" cmpd="sng" algn="ctr">
+                      <a:solidFill>
+                        <a:srgbClr val="EEEEEE"/>
+                      </a:solidFill>
+                      <a:prstDash val="solid"/>
+                      <a:round/>
+                      <a:headEnd type="none" w="med" len="med"/>
+                      <a:tailEnd type="none" w="med" len="med"/>
+                    </a:lnB>
+                  </a:tcPr>
+                </a:tc>
+                <a:tc>
+                  <a:txBody>
+                    <a:bodyPr/>
+                    <a:lstStyle/>
+                    <a:p>
+                      <a:pPr algn="ctr" indent="0" marL="0">
+                        <a:buNone/>
+                      </a:pPr>
+                      <a:r>
+                        <a:rPr lang="en-US" sz="500" dirty="0">
+                          <a:solidFill>
+                            <a:srgbClr val="999999"/>
+                          </a:solidFill>
+                          <a:latin typeface="Calibri" pitchFamily="34" charset="0"/>
+                          <a:ea typeface="Calibri" pitchFamily="34" charset="-122"/>
+                          <a:cs typeface="Calibri" pitchFamily="34" charset="-120"/>
+                        </a:rPr>
+                        <a:t>0.01%</a:t>
+                      </a:r>
+                      <a:endParaRPr lang="en-US" sz="500" dirty="0">
+                        <a:latin typeface="Calibri" charset="0"/>
+                        <a:ea typeface="Calibri" charset="0"/>
+                        <a:cs typeface="Calibri" charset="0"/>
+                      </a:endParaRPr>
+                    </a:p>
+                  </a:txBody>
+                  <a:tcPr marL="91440" marR="91440" marT="45720" marB="45720">
+                    <a:lnL w="2540" cap="flat" cmpd="sng" algn="ctr">
+                      <a:solidFill>
+                        <a:srgbClr val="EEEEEE"/>
+                      </a:solidFill>
+                      <a:prstDash val="solid"/>
+                      <a:round/>
+                      <a:headEnd type="none" w="med" len="med"/>
+                      <a:tailEnd type="none" w="med" len="med"/>
+                    </a:lnL>
+                    <a:lnR w="2540" cap="flat" cmpd="sng" algn="ctr">
+                      <a:solidFill>
+                        <a:srgbClr val="EEEEEE"/>
+                      </a:solidFill>
+                      <a:prstDash val="solid"/>
+                      <a:round/>
+                      <a:headEnd type="none" w="med" len="med"/>
+                      <a:tailEnd type="none" w="med" len="med"/>
+                    </a:lnR>
+                    <a:lnT w="2540" cap="flat" cmpd="sng" algn="ctr">
+                      <a:solidFill>
+                        <a:srgbClr val="EEEEEE"/>
+                      </a:solidFill>
+                      <a:prstDash val="solid"/>
+                      <a:round/>
+                      <a:headEnd type="none" w="med" len="med"/>
+                      <a:tailEnd type="none" w="med" len="med"/>
+                    </a:lnT>
+                    <a:lnB w="2540" cap="flat" cmpd="sng" algn="ctr">
+                      <a:solidFill>
+                        <a:srgbClr val="EEEEEE"/>
+                      </a:solidFill>
+                      <a:prstDash val="solid"/>
+                      <a:round/>
+                      <a:headEnd type="none" w="med" len="med"/>
+                      <a:tailEnd type="none" w="med" len="med"/>
+                    </a:lnB>
+                  </a:tcPr>
+                </a:tc>
+                <a:tc>
+                  <a:txBody>
+                    <a:bodyPr/>
+                    <a:lstStyle/>
+                    <a:p>
+                      <a:pPr algn="ctr" indent="0" marL="0">
+                        <a:buNone/>
+                      </a:pPr>
+                      <a:r>
+                        <a:rPr lang="en-US" sz="500" dirty="0">
+                          <a:solidFill>
+                            <a:srgbClr val="999999"/>
+                          </a:solidFill>
+                          <a:latin typeface="Calibri" pitchFamily="34" charset="0"/>
+                          <a:ea typeface="Calibri" pitchFamily="34" charset="-122"/>
+                          <a:cs typeface="Calibri" pitchFamily="34" charset="-120"/>
+                        </a:rPr>
+                        <a:t>0.01%</a:t>
+                      </a:r>
+                      <a:endParaRPr lang="en-US" sz="500" dirty="0">
+                        <a:latin typeface="Calibri" charset="0"/>
+                        <a:ea typeface="Calibri" charset="0"/>
+                        <a:cs typeface="Calibri" charset="0"/>
+                      </a:endParaRPr>
+                    </a:p>
+                  </a:txBody>
+                  <a:tcPr marL="91440" marR="91440" marT="45720" marB="45720">
+                    <a:lnL w="2540" cap="flat" cmpd="sng" algn="ctr">
+                      <a:solidFill>
+                        <a:srgbClr val="EEEEEE"/>
+                      </a:solidFill>
+                      <a:prstDash val="solid"/>
+                      <a:round/>
+                      <a:headEnd type="none" w="med" len="med"/>
+                      <a:tailEnd type="none" w="med" len="med"/>
+                    </a:lnL>
+                    <a:lnR w="2540" cap="flat" cmpd="sng" algn="ctr">
+                      <a:solidFill>
+                        <a:srgbClr val="EEEEEE"/>
+                      </a:solidFill>
+                      <a:prstDash val="solid"/>
+                      <a:round/>
+                      <a:headEnd type="none" w="med" len="med"/>
+                      <a:tailEnd type="none" w="med" len="med"/>
+                    </a:lnR>
+                    <a:lnT w="2540" cap="flat" cmpd="sng" algn="ctr">
+                      <a:solidFill>
+                        <a:srgbClr val="EEEEEE"/>
+                      </a:solidFill>
+                      <a:prstDash val="solid"/>
+                      <a:round/>
+                      <a:headEnd type="none" w="med" len="med"/>
+                      <a:tailEnd type="none" w="med" len="med"/>
+                    </a:lnT>
+                    <a:lnB w="2540" cap="flat" cmpd="sng" algn="ctr">
+                      <a:solidFill>
+                        <a:srgbClr val="EEEEEE"/>
+                      </a:solidFill>
+                      <a:prstDash val="solid"/>
+                      <a:round/>
+                      <a:headEnd type="none" w="med" len="med"/>
+                      <a:tailEnd type="none" w="med" len="med"/>
+                    </a:lnB>
+                  </a:tcPr>
+                </a:tc>
+                <a:tc>
+                  <a:txBody>
+                    <a:bodyPr/>
+                    <a:lstStyle/>
+                    <a:p>
+                      <a:pPr algn="ctr" indent="0" marL="0">
+                        <a:buNone/>
+                      </a:pPr>
+                      <a:r>
+                        <a:rPr lang="en-US" sz="500" dirty="0">
+                          <a:solidFill>
+                            <a:srgbClr val="999999"/>
+                          </a:solidFill>
+                          <a:latin typeface="Calibri" pitchFamily="34" charset="0"/>
+                          <a:ea typeface="Calibri" pitchFamily="34" charset="-122"/>
+                          <a:cs typeface="Calibri" pitchFamily="34" charset="-120"/>
+                        </a:rPr>
+                        <a:t>0.01%</a:t>
+                      </a:r>
+                      <a:endParaRPr lang="en-US" sz="500" dirty="0">
+                        <a:latin typeface="Calibri" charset="0"/>
+                        <a:ea typeface="Calibri" charset="0"/>
+                        <a:cs typeface="Calibri" charset="0"/>
+                      </a:endParaRPr>
+                    </a:p>
+                  </a:txBody>
+                  <a:tcPr marL="91440" marR="91440" marT="45720" marB="45720">
+                    <a:lnL w="2540" cap="flat" cmpd="sng" algn="ctr">
+                      <a:solidFill>
+                        <a:srgbClr val="EEEEEE"/>
+                      </a:solidFill>
+                      <a:prstDash val="solid"/>
+                      <a:round/>
+                      <a:headEnd type="none" w="med" len="med"/>
+                      <a:tailEnd type="none" w="med" len="med"/>
+                    </a:lnL>
+                    <a:lnR w="2540" cap="flat" cmpd="sng" algn="ctr">
+                      <a:solidFill>
+                        <a:srgbClr val="EEEEEE"/>
+                      </a:solidFill>
+                      <a:prstDash val="solid"/>
+                      <a:round/>
+                      <a:headEnd type="none" w="med" len="med"/>
+                      <a:tailEnd type="none" w="med" len="med"/>
+                    </a:lnR>
+                    <a:lnT w="2540" cap="flat" cmpd="sng" algn="ctr">
+                      <a:solidFill>
+                        <a:srgbClr val="EEEEEE"/>
+                      </a:solidFill>
+                      <a:prstDash val="solid"/>
+                      <a:round/>
+                      <a:headEnd type="none" w="med" len="med"/>
+                      <a:tailEnd type="none" w="med" len="med"/>
+                    </a:lnT>
+                    <a:lnB w="2540" cap="flat" cmpd="sng" algn="ctr">
+                      <a:solidFill>
+                        <a:srgbClr val="EEEEEE"/>
+                      </a:solidFill>
+                      <a:prstDash val="solid"/>
+                      <a:round/>
+                      <a:headEnd type="none" w="med" len="med"/>
+                      <a:tailEnd type="none" w="med" len="med"/>
+                    </a:lnB>
+                  </a:tcPr>
+                </a:tc>
+                <a:tc>
+                  <a:txBody>
+                    <a:bodyPr/>
+                    <a:lstStyle/>
+                    <a:p>
+                      <a:pPr algn="ctr" indent="0" marL="0">
+                        <a:buNone/>
+                      </a:pPr>
+                      <a:r>
+                        <a:rPr lang="en-US" sz="500" dirty="0">
+                          <a:solidFill>
+                            <a:srgbClr val="999999"/>
+                          </a:solidFill>
+                          <a:latin typeface="Calibri" pitchFamily="34" charset="0"/>
+                          <a:ea typeface="Calibri" pitchFamily="34" charset="-122"/>
+                          <a:cs typeface="Calibri" pitchFamily="34" charset="-120"/>
+                        </a:rPr>
+                        <a:t>0.01%</a:t>
+                      </a:r>
+                      <a:endParaRPr lang="en-US" sz="500" dirty="0">
+                        <a:latin typeface="Calibri" charset="0"/>
+                        <a:ea typeface="Calibri" charset="0"/>
+                        <a:cs typeface="Calibri" charset="0"/>
+                      </a:endParaRPr>
+                    </a:p>
+                  </a:txBody>
+                  <a:tcPr marL="91440" marR="91440" marT="45720" marB="45720">
+                    <a:lnL w="2540" cap="flat" cmpd="sng" algn="ctr">
+                      <a:solidFill>
+                        <a:srgbClr val="EEEEEE"/>
+                      </a:solidFill>
+                      <a:prstDash val="solid"/>
+                      <a:round/>
+                      <a:headEnd type="none" w="med" len="med"/>
+                      <a:tailEnd type="none" w="med" len="med"/>
+                    </a:lnL>
+                    <a:lnR w="2540" cap="flat" cmpd="sng" algn="ctr">
+                      <a:solidFill>
+                        <a:srgbClr val="EEEEEE"/>
+                      </a:solidFill>
+                      <a:prstDash val="solid"/>
+                      <a:round/>
+                      <a:headEnd type="none" w="med" len="med"/>
+                      <a:tailEnd type="none" w="med" len="med"/>
+                    </a:lnR>
+                    <a:lnT w="2540" cap="flat" cmpd="sng" algn="ctr">
+                      <a:solidFill>
+                        <a:srgbClr val="EEEEEE"/>
+                      </a:solidFill>
+                      <a:prstDash val="solid"/>
+                      <a:round/>
+                      <a:headEnd type="none" w="med" len="med"/>
+                      <a:tailEnd type="none" w="med" len="med"/>
+                    </a:lnT>
+                    <a:lnB w="2540" cap="flat" cmpd="sng" algn="ctr">
+                      <a:solidFill>
+                        <a:srgbClr val="EEEEEE"/>
+                      </a:solidFill>
+                      <a:prstDash val="solid"/>
+                      <a:round/>
+                      <a:headEnd type="none" w="med" len="med"/>
+                      <a:tailEnd type="none" w="med" len="med"/>
+                    </a:lnB>
+                  </a:tcPr>
+                </a:tc>
+                <a:tc>
+                  <a:txBody>
+                    <a:bodyPr/>
+                    <a:lstStyle/>
+                    <a:p>
+                      <a:pPr algn="ctr" indent="0" marL="0">
+                        <a:buNone/>
+                      </a:pPr>
+                      <a:r>
+                        <a:rPr lang="en-US" sz="500" dirty="0">
+                          <a:solidFill>
+                            <a:srgbClr val="999999"/>
+                          </a:solidFill>
+                          <a:latin typeface="Calibri" pitchFamily="34" charset="0"/>
+                          <a:ea typeface="Calibri" pitchFamily="34" charset="-122"/>
+                          <a:cs typeface="Calibri" pitchFamily="34" charset="-120"/>
+                        </a:rPr>
+                        <a:t>7.49%</a:t>
+                      </a:r>
+                      <a:endParaRPr lang="en-US" sz="500" dirty="0">
+                        <a:latin typeface="Calibri" charset="0"/>
+                        <a:ea typeface="Calibri" charset="0"/>
+                        <a:cs typeface="Calibri" charset="0"/>
+                      </a:endParaRPr>
+                    </a:p>
+                  </a:txBody>
+                  <a:tcPr marL="91440" marR="91440" marT="45720" marB="45720">
+                    <a:lnL w="2540" cap="flat" cmpd="sng" algn="ctr">
+                      <a:solidFill>
+                        <a:srgbClr val="EEEEEE"/>
+                      </a:solidFill>
+                      <a:prstDash val="solid"/>
+                      <a:round/>
+                      <a:headEnd type="none" w="med" len="med"/>
+                      <a:tailEnd type="none" w="med" len="med"/>
+                    </a:lnL>
+                    <a:lnR w="2540" cap="flat" cmpd="sng" algn="ctr">
+                      <a:solidFill>
+                        <a:srgbClr val="EEEEEE"/>
+                      </a:solidFill>
+                      <a:prstDash val="solid"/>
+                      <a:round/>
+                      <a:headEnd type="none" w="med" len="med"/>
+                      <a:tailEnd type="none" w="med" len="med"/>
+                    </a:lnR>
+                    <a:lnT w="2540" cap="flat" cmpd="sng" algn="ctr">
+                      <a:solidFill>
+                        <a:srgbClr val="EEEEEE"/>
+                      </a:solidFill>
+                      <a:prstDash val="solid"/>
+                      <a:round/>
+                      <a:headEnd type="none" w="med" len="med"/>
+                      <a:tailEnd type="none" w="med" len="med"/>
+                    </a:lnT>
+                    <a:lnB w="2540" cap="flat" cmpd="sng" algn="ctr">
+                      <a:solidFill>
+                        <a:srgbClr val="EEEEEE"/>
+                      </a:solidFill>
+                      <a:prstDash val="solid"/>
+                      <a:round/>
+                      <a:headEnd type="none" w="med" len="med"/>
+                      <a:tailEnd type="none" w="med" len="med"/>
+                    </a:lnB>
+                  </a:tcPr>
+                </a:tc>
+                <a:tc>
+                  <a:txBody>
+                    <a:bodyPr/>
+                    <a:lstStyle/>
+                    <a:p>
+                      <a:pPr algn="ctr" indent="0" marL="0">
+                        <a:buNone/>
+                      </a:pPr>
+                      <a:r>
+                        <a:rPr lang="en-US" sz="500" b="1" dirty="0">
+                          <a:solidFill>
+                            <a:srgbClr val="999999"/>
+                          </a:solidFill>
+                          <a:latin typeface="Calibri" pitchFamily="34" charset="0"/>
+                          <a:ea typeface="Calibri" pitchFamily="34" charset="-122"/>
+                          <a:cs typeface="Calibri" pitchFamily="34" charset="-120"/>
+                        </a:rPr>
+                        <a:t>7.55%</a:t>
+                      </a:r>
+                      <a:endParaRPr lang="en-US" sz="500" dirty="0">
+                        <a:latin typeface="Calibri" charset="0"/>
+                        <a:ea typeface="Calibri" charset="0"/>
+                        <a:cs typeface="Calibri" charset="0"/>
+                      </a:endParaRPr>
+                    </a:p>
+                  </a:txBody>
+                  <a:tcPr marL="91440" marR="91440" marT="45720" marB="45720">
+                    <a:lnL w="2540" cap="flat" cmpd="sng" algn="ctr">
+                      <a:solidFill>
+                        <a:srgbClr val="EEEEEE"/>
+                      </a:solidFill>
+                      <a:prstDash val="solid"/>
+                      <a:round/>
+                      <a:headEnd type="none" w="med" len="med"/>
+                      <a:tailEnd type="none" w="med" len="med"/>
+                    </a:lnL>
+                    <a:lnR w="2540" cap="flat" cmpd="sng" algn="ctr">
+                      <a:solidFill>
+                        <a:srgbClr val="EEEEEE"/>
+                      </a:solidFill>
+                      <a:prstDash val="solid"/>
+                      <a:round/>
+                      <a:headEnd type="none" w="med" len="med"/>
+                      <a:tailEnd type="none" w="med" len="med"/>
+                    </a:lnR>
+                    <a:lnT w="2540" cap="flat" cmpd="sng" algn="ctr">
+                      <a:solidFill>
+                        <a:srgbClr val="EEEEEE"/>
+                      </a:solidFill>
+                      <a:prstDash val="solid"/>
+                      <a:round/>
+                      <a:headEnd type="none" w="med" len="med"/>
+                      <a:tailEnd type="none" w="med" len="med"/>
+                    </a:lnT>
+                    <a:lnB w="2540" cap="flat" cmpd="sng" algn="ctr">
+                      <a:solidFill>
+                        <a:srgbClr val="EEEEEE"/>
+                      </a:solidFill>
+                      <a:prstDash val="solid"/>
+                      <a:round/>
+                      <a:headEnd type="none" w="med" len="med"/>
+                      <a:tailEnd type="none" w="med" len="med"/>
+                    </a:lnB>
+                  </a:tcPr>
+                </a:tc>
+              </a:tr>
+              <a:tr h="123444">
+                <a:tc>
+                  <a:txBody>
+                    <a:bodyPr/>
+                    <a:lstStyle/>
+                    <a:p>
+                      <a:pPr algn="l" indent="0" marL="0">
+                        <a:buNone/>
+                      </a:pPr>
+                      <a:endParaRPr lang="en-US" sz="500" dirty="0">
+                        <a:latin typeface="Calibri" charset="0"/>
+                        <a:ea typeface="Calibri" charset="0"/>
+                        <a:cs typeface="Calibri" charset="0"/>
+                      </a:endParaRPr>
+                    </a:p>
+                  </a:txBody>
+                  <a:tcPr marL="91440" marR="91440" marT="45720" marB="45720">
+                    <a:lnL w="2540" cap="flat" cmpd="sng" algn="ctr">
+                      <a:solidFill>
+                        <a:srgbClr val="EEEEEE"/>
+                      </a:solidFill>
+                      <a:prstDash val="solid"/>
+                      <a:round/>
+                      <a:headEnd type="none" w="med" len="med"/>
+                      <a:tailEnd type="none" w="med" len="med"/>
+                    </a:lnL>
+                    <a:lnR w="2540" cap="flat" cmpd="sng" algn="ctr">
+                      <a:solidFill>
+                        <a:srgbClr val="EEEEEE"/>
+                      </a:solidFill>
+                      <a:prstDash val="solid"/>
+                      <a:round/>
+                      <a:headEnd type="none" w="med" len="med"/>
+                      <a:tailEnd type="none" w="med" len="med"/>
+                    </a:lnR>
+                    <a:lnT w="2540" cap="flat" cmpd="sng" algn="ctr">
+                      <a:solidFill>
+                        <a:srgbClr val="EEEEEE"/>
+                      </a:solidFill>
+                      <a:prstDash val="solid"/>
+                      <a:round/>
+                      <a:headEnd type="none" w="med" len="med"/>
+                      <a:tailEnd type="none" w="med" len="med"/>
+                    </a:lnT>
+                    <a:lnB w="2540" cap="flat" cmpd="sng" algn="ctr">
+                      <a:solidFill>
+                        <a:srgbClr val="EEEEEE"/>
+                      </a:solidFill>
+                      <a:prstDash val="solid"/>
+                      <a:round/>
+                      <a:headEnd type="none" w="med" len="med"/>
+                      <a:tailEnd type="none" w="med" len="med"/>
+                    </a:lnB>
+                  </a:tcPr>
+                </a:tc>
+                <a:tc>
+                  <a:txBody>
+                    <a:bodyPr/>
+                    <a:lstStyle/>
+                    <a:p>
+                      <a:pPr algn="l" indent="0" marL="0">
+                        <a:buNone/>
+                      </a:pPr>
+                      <a:r>
+                        <a:rPr lang="en-US" sz="500" dirty="0">
+                          <a:solidFill>
+                            <a:srgbClr val="000000"/>
+                          </a:solidFill>
+                          <a:latin typeface="Calibri" pitchFamily="34" charset="0"/>
+                          <a:ea typeface="Calibri" pitchFamily="34" charset="-122"/>
+                          <a:cs typeface="Calibri" pitchFamily="34" charset="-120"/>
+                        </a:rPr>
+                        <a:t>FIP LIQUIDEZ Plus</a:t>
+                      </a:r>
+                      <a:endParaRPr lang="en-US" sz="500" dirty="0">
+                        <a:latin typeface="Calibri" charset="0"/>
+                        <a:ea typeface="Calibri" charset="0"/>
+                        <a:cs typeface="Calibri" charset="0"/>
+                      </a:endParaRPr>
+                    </a:p>
+                  </a:txBody>
+                  <a:tcPr marL="91440" marR="91440" marT="45720" marB="45720">
+                    <a:lnL w="2540" cap="flat" cmpd="sng" algn="ctr">
+                      <a:solidFill>
+                        <a:srgbClr val="EEEEEE"/>
+                      </a:solidFill>
+                      <a:prstDash val="solid"/>
+                      <a:round/>
+                      <a:headEnd type="none" w="med" len="med"/>
+                      <a:tailEnd type="none" w="med" len="med"/>
+                    </a:lnL>
+                    <a:lnR w="2540" cap="flat" cmpd="sng" algn="ctr">
+                      <a:solidFill>
+                        <a:srgbClr val="EEEEEE"/>
+                      </a:solidFill>
+                      <a:prstDash val="solid"/>
+                      <a:round/>
+                      <a:headEnd type="none" w="med" len="med"/>
+                      <a:tailEnd type="none" w="med" len="med"/>
+                    </a:lnR>
+                    <a:lnT w="2540" cap="flat" cmpd="sng" algn="ctr">
+                      <a:solidFill>
+                        <a:srgbClr val="EEEEEE"/>
+                      </a:solidFill>
+                      <a:prstDash val="solid"/>
+                      <a:round/>
+                      <a:headEnd type="none" w="med" len="med"/>
+                      <a:tailEnd type="none" w="med" len="med"/>
+                    </a:lnT>
+                    <a:lnB w="2540" cap="flat" cmpd="sng" algn="ctr">
+                      <a:solidFill>
+                        <a:srgbClr val="EEEEEE"/>
+                      </a:solidFill>
+                      <a:prstDash val="solid"/>
+                      <a:round/>
+                      <a:headEnd type="none" w="med" len="med"/>
+                      <a:tailEnd type="none" w="med" len="med"/>
+                    </a:lnB>
+                  </a:tcPr>
+                </a:tc>
+                <a:tc>
+                  <a:txBody>
+                    <a:bodyPr/>
+                    <a:lstStyle/>
+                    <a:p>
+                      <a:pPr algn="ctr" indent="0" marL="0">
+                        <a:buNone/>
+                      </a:pPr>
+                      <a:endParaRPr lang="en-US" sz="500" dirty="0">
+                        <a:latin typeface="Calibri" charset="0"/>
+                        <a:ea typeface="Calibri" charset="0"/>
+                        <a:cs typeface="Calibri" charset="0"/>
+                      </a:endParaRPr>
+                    </a:p>
+                  </a:txBody>
+                  <a:tcPr marL="91440" marR="91440" marT="45720" marB="45720">
+                    <a:lnL w="2540" cap="flat" cmpd="sng" algn="ctr">
+                      <a:solidFill>
+                        <a:srgbClr val="EEEEEE"/>
+                      </a:solidFill>
+                      <a:prstDash val="solid"/>
+                      <a:round/>
+                      <a:headEnd type="none" w="med" len="med"/>
+                      <a:tailEnd type="none" w="med" len="med"/>
+                    </a:lnL>
+                    <a:lnR w="2540" cap="flat" cmpd="sng" algn="ctr">
+                      <a:solidFill>
+                        <a:srgbClr val="EEEEEE"/>
+                      </a:solidFill>
+                      <a:prstDash val="solid"/>
+                      <a:round/>
+                      <a:headEnd type="none" w="med" len="med"/>
+                      <a:tailEnd type="none" w="med" len="med"/>
+                    </a:lnR>
+                    <a:lnT w="2540" cap="flat" cmpd="sng" algn="ctr">
+                      <a:solidFill>
+                        <a:srgbClr val="EEEEEE"/>
+                      </a:solidFill>
+                      <a:prstDash val="solid"/>
+                      <a:round/>
+                      <a:headEnd type="none" w="med" len="med"/>
+                      <a:tailEnd type="none" w="med" len="med"/>
+                    </a:lnT>
+                    <a:lnB w="2540" cap="flat" cmpd="sng" algn="ctr">
+                      <a:solidFill>
+                        <a:srgbClr val="EEEEEE"/>
+                      </a:solidFill>
+                      <a:prstDash val="solid"/>
+                      <a:round/>
+                      <a:headEnd type="none" w="med" len="med"/>
+                      <a:tailEnd type="none" w="med" len="med"/>
+                    </a:lnB>
+                  </a:tcPr>
+                </a:tc>
+                <a:tc>
+                  <a:txBody>
+                    <a:bodyPr/>
+                    <a:lstStyle/>
+                    <a:p>
+                      <a:pPr algn="ctr" indent="0" marL="0">
+                        <a:buNone/>
+                      </a:pPr>
+                      <a:endParaRPr lang="en-US" sz="500" dirty="0">
+                        <a:latin typeface="Calibri" charset="0"/>
+                        <a:ea typeface="Calibri" charset="0"/>
+                        <a:cs typeface="Calibri" charset="0"/>
+                      </a:endParaRPr>
+                    </a:p>
+                  </a:txBody>
+                  <a:tcPr marL="91440" marR="91440" marT="45720" marB="45720">
+                    <a:lnL w="2540" cap="flat" cmpd="sng" algn="ctr">
+                      <a:solidFill>
+                        <a:srgbClr val="EEEEEE"/>
+                      </a:solidFill>
+                      <a:prstDash val="solid"/>
+                      <a:round/>
+                      <a:headEnd type="none" w="med" len="med"/>
+                      <a:tailEnd type="none" w="med" len="med"/>
+                    </a:lnL>
+                    <a:lnR w="2540" cap="flat" cmpd="sng" algn="ctr">
+                      <a:solidFill>
+                        <a:srgbClr val="EEEEEE"/>
+                      </a:solidFill>
+                      <a:prstDash val="solid"/>
+                      <a:round/>
+                      <a:headEnd type="none" w="med" len="med"/>
+                      <a:tailEnd type="none" w="med" len="med"/>
+                    </a:lnR>
+                    <a:lnT w="2540" cap="flat" cmpd="sng" algn="ctr">
+                      <a:solidFill>
+                        <a:srgbClr val="EEEEEE"/>
+                      </a:solidFill>
+                      <a:prstDash val="solid"/>
+                      <a:round/>
+                      <a:headEnd type="none" w="med" len="med"/>
+                      <a:tailEnd type="none" w="med" len="med"/>
+                    </a:lnT>
+                    <a:lnB w="2540" cap="flat" cmpd="sng" algn="ctr">
+                      <a:solidFill>
+                        <a:srgbClr val="EEEEEE"/>
+                      </a:solidFill>
+                      <a:prstDash val="solid"/>
+                      <a:round/>
+                      <a:headEnd type="none" w="med" len="med"/>
+                      <a:tailEnd type="none" w="med" len="med"/>
+                    </a:lnB>
+                  </a:tcPr>
+                </a:tc>
+                <a:tc>
+                  <a:txBody>
+                    <a:bodyPr/>
+                    <a:lstStyle/>
+                    <a:p>
+                      <a:pPr algn="ctr" indent="0" marL="0">
+                        <a:buNone/>
+                      </a:pPr>
+                      <a:endParaRPr lang="en-US" sz="500" dirty="0">
+                        <a:latin typeface="Calibri" charset="0"/>
+                        <a:ea typeface="Calibri" charset="0"/>
+                        <a:cs typeface="Calibri" charset="0"/>
+                      </a:endParaRPr>
+                    </a:p>
+                  </a:txBody>
+                  <a:tcPr marL="91440" marR="91440" marT="45720" marB="45720">
+                    <a:lnL w="2540" cap="flat" cmpd="sng" algn="ctr">
+                      <a:solidFill>
+                        <a:srgbClr val="EEEEEE"/>
+                      </a:solidFill>
+                      <a:prstDash val="solid"/>
+                      <a:round/>
+                      <a:headEnd type="none" w="med" len="med"/>
+                      <a:tailEnd type="none" w="med" len="med"/>
+                    </a:lnL>
+                    <a:lnR w="2540" cap="flat" cmpd="sng" algn="ctr">
+                      <a:solidFill>
+                        <a:srgbClr val="EEEEEE"/>
+                      </a:solidFill>
+                      <a:prstDash val="solid"/>
+                      <a:round/>
+                      <a:headEnd type="none" w="med" len="med"/>
+                      <a:tailEnd type="none" w="med" len="med"/>
+                    </a:lnR>
+                    <a:lnT w="2540" cap="flat" cmpd="sng" algn="ctr">
+                      <a:solidFill>
+                        <a:srgbClr val="EEEEEE"/>
+                      </a:solidFill>
+                      <a:prstDash val="solid"/>
+                      <a:round/>
+                      <a:headEnd type="none" w="med" len="med"/>
+                      <a:tailEnd type="none" w="med" len="med"/>
+                    </a:lnT>
+                    <a:lnB w="2540" cap="flat" cmpd="sng" algn="ctr">
+                      <a:solidFill>
+                        <a:srgbClr val="EEEEEE"/>
+                      </a:solidFill>
+                      <a:prstDash val="solid"/>
+                      <a:round/>
+                      <a:headEnd type="none" w="med" len="med"/>
+                      <a:tailEnd type="none" w="med" len="med"/>
+                    </a:lnB>
+                  </a:tcPr>
+                </a:tc>
+                <a:tc>
+                  <a:txBody>
+                    <a:bodyPr/>
+                    <a:lstStyle/>
+                    <a:p>
+                      <a:pPr algn="ctr" indent="0" marL="0">
+                        <a:buNone/>
+                      </a:pPr>
+                      <a:r>
+                        <a:rPr lang="en-US" sz="500" dirty="0">
+                          <a:solidFill>
+                            <a:srgbClr val="000000"/>
+                          </a:solidFill>
+                          <a:latin typeface="Calibri" pitchFamily="34" charset="0"/>
+                          <a:ea typeface="Calibri" pitchFamily="34" charset="-122"/>
+                          <a:cs typeface="Calibri" pitchFamily="34" charset="-120"/>
+                        </a:rPr>
+                        <a:t>0.01%</a:t>
+                      </a:r>
+                      <a:endParaRPr lang="en-US" sz="500" dirty="0">
+                        <a:latin typeface="Calibri" charset="0"/>
+                        <a:ea typeface="Calibri" charset="0"/>
+                        <a:cs typeface="Calibri" charset="0"/>
+                      </a:endParaRPr>
+                    </a:p>
+                  </a:txBody>
+                  <a:tcPr marL="91440" marR="91440" marT="45720" marB="45720">
+                    <a:lnL w="2540" cap="flat" cmpd="sng" algn="ctr">
+                      <a:solidFill>
+                        <a:srgbClr val="EEEEEE"/>
+                      </a:solidFill>
+                      <a:prstDash val="solid"/>
+                      <a:round/>
+                      <a:headEnd type="none" w="med" len="med"/>
+                      <a:tailEnd type="none" w="med" len="med"/>
+                    </a:lnL>
+                    <a:lnR w="2540" cap="flat" cmpd="sng" algn="ctr">
+                      <a:solidFill>
+                        <a:srgbClr val="EEEEEE"/>
+                      </a:solidFill>
+                      <a:prstDash val="solid"/>
+                      <a:round/>
+                      <a:headEnd type="none" w="med" len="med"/>
+                      <a:tailEnd type="none" w="med" len="med"/>
+                    </a:lnR>
+                    <a:lnT w="2540" cap="flat" cmpd="sng" algn="ctr">
+                      <a:solidFill>
+                        <a:srgbClr val="EEEEEE"/>
+                      </a:solidFill>
+                      <a:prstDash val="solid"/>
+                      <a:round/>
+                      <a:headEnd type="none" w="med" len="med"/>
+                      <a:tailEnd type="none" w="med" len="med"/>
+                    </a:lnT>
+                    <a:lnB w="2540" cap="flat" cmpd="sng" algn="ctr">
+                      <a:solidFill>
+                        <a:srgbClr val="EEEEEE"/>
+                      </a:solidFill>
+                      <a:prstDash val="solid"/>
+                      <a:round/>
+                      <a:headEnd type="none" w="med" len="med"/>
+                      <a:tailEnd type="none" w="med" len="med"/>
+                    </a:lnB>
+                  </a:tcPr>
+                </a:tc>
+                <a:tc>
+                  <a:txBody>
+                    <a:bodyPr/>
+                    <a:lstStyle/>
+                    <a:p>
+                      <a:pPr algn="ctr" indent="0" marL="0">
+                        <a:buNone/>
+                      </a:pPr>
+                      <a:r>
+                        <a:rPr lang="en-US" sz="500" dirty="0">
+                          <a:solidFill>
+                            <a:srgbClr val="000000"/>
+                          </a:solidFill>
+                          <a:latin typeface="Calibri" pitchFamily="34" charset="0"/>
+                          <a:ea typeface="Calibri" pitchFamily="34" charset="-122"/>
+                          <a:cs typeface="Calibri" pitchFamily="34" charset="-120"/>
+                        </a:rPr>
+                        <a:t>0.01%</a:t>
+                      </a:r>
+                      <a:endParaRPr lang="en-US" sz="500" dirty="0">
+                        <a:latin typeface="Calibri" charset="0"/>
+                        <a:ea typeface="Calibri" charset="0"/>
+                        <a:cs typeface="Calibri" charset="0"/>
+                      </a:endParaRPr>
+                    </a:p>
+                  </a:txBody>
+                  <a:tcPr marL="91440" marR="91440" marT="45720" marB="45720">
+                    <a:lnL w="2540" cap="flat" cmpd="sng" algn="ctr">
+                      <a:solidFill>
+                        <a:srgbClr val="EEEEEE"/>
+                      </a:solidFill>
+                      <a:prstDash val="solid"/>
+                      <a:round/>
+                      <a:headEnd type="none" w="med" len="med"/>
+                      <a:tailEnd type="none" w="med" len="med"/>
+                    </a:lnL>
+                    <a:lnR w="2540" cap="flat" cmpd="sng" algn="ctr">
+                      <a:solidFill>
+                        <a:srgbClr val="EEEEEE"/>
+                      </a:solidFill>
+                      <a:prstDash val="solid"/>
+                      <a:round/>
+                      <a:headEnd type="none" w="med" len="med"/>
+                      <a:tailEnd type="none" w="med" len="med"/>
+                    </a:lnR>
+                    <a:lnT w="2540" cap="flat" cmpd="sng" algn="ctr">
+                      <a:solidFill>
+                        <a:srgbClr val="EEEEEE"/>
+                      </a:solidFill>
+                      <a:prstDash val="solid"/>
+                      <a:round/>
+                      <a:headEnd type="none" w="med" len="med"/>
+                      <a:tailEnd type="none" w="med" len="med"/>
+                    </a:lnT>
+                    <a:lnB w="2540" cap="flat" cmpd="sng" algn="ctr">
+                      <a:solidFill>
+                        <a:srgbClr val="EEEEEE"/>
+                      </a:solidFill>
+                      <a:prstDash val="solid"/>
+                      <a:round/>
+                      <a:headEnd type="none" w="med" len="med"/>
+                      <a:tailEnd type="none" w="med" len="med"/>
+                    </a:lnB>
+                  </a:tcPr>
+                </a:tc>
+                <a:tc>
+                  <a:txBody>
+                    <a:bodyPr/>
+                    <a:lstStyle/>
+                    <a:p>
+                      <a:pPr algn="ctr" indent="0" marL="0">
+                        <a:buNone/>
+                      </a:pPr>
+                      <a:r>
+                        <a:rPr lang="en-US" sz="500" dirty="0">
+                          <a:solidFill>
+                            <a:srgbClr val="000000"/>
+                          </a:solidFill>
+                          <a:latin typeface="Calibri" pitchFamily="34" charset="0"/>
+                          <a:ea typeface="Calibri" pitchFamily="34" charset="-122"/>
+                          <a:cs typeface="Calibri" pitchFamily="34" charset="-120"/>
+                        </a:rPr>
+                        <a:t>0.01%</a:t>
+                      </a:r>
+                      <a:endParaRPr lang="en-US" sz="500" dirty="0">
+                        <a:latin typeface="Calibri" charset="0"/>
+                        <a:ea typeface="Calibri" charset="0"/>
+                        <a:cs typeface="Calibri" charset="0"/>
+                      </a:endParaRPr>
+                    </a:p>
+                  </a:txBody>
+                  <a:tcPr marL="91440" marR="91440" marT="45720" marB="45720">
+                    <a:lnL w="2540" cap="flat" cmpd="sng" algn="ctr">
+                      <a:solidFill>
+                        <a:srgbClr val="EEEEEE"/>
+                      </a:solidFill>
+                      <a:prstDash val="solid"/>
+                      <a:round/>
+                      <a:headEnd type="none" w="med" len="med"/>
+                      <a:tailEnd type="none" w="med" len="med"/>
+                    </a:lnL>
+                    <a:lnR w="2540" cap="flat" cmpd="sng" algn="ctr">
+                      <a:solidFill>
+                        <a:srgbClr val="EEEEEE"/>
+                      </a:solidFill>
+                      <a:prstDash val="solid"/>
+                      <a:round/>
+                      <a:headEnd type="none" w="med" len="med"/>
+                      <a:tailEnd type="none" w="med" len="med"/>
+                    </a:lnR>
+                    <a:lnT w="2540" cap="flat" cmpd="sng" algn="ctr">
+                      <a:solidFill>
+                        <a:srgbClr val="EEEEEE"/>
+                      </a:solidFill>
+                      <a:prstDash val="solid"/>
+                      <a:round/>
+                      <a:headEnd type="none" w="med" len="med"/>
+                      <a:tailEnd type="none" w="med" len="med"/>
+                    </a:lnT>
+                    <a:lnB w="2540" cap="flat" cmpd="sng" algn="ctr">
+                      <a:solidFill>
+                        <a:srgbClr val="EEEEEE"/>
+                      </a:solidFill>
+                      <a:prstDash val="solid"/>
+                      <a:round/>
+                      <a:headEnd type="none" w="med" len="med"/>
+                      <a:tailEnd type="none" w="med" len="med"/>
+                    </a:lnB>
+                  </a:tcPr>
+                </a:tc>
+                <a:tc>
+                  <a:txBody>
+                    <a:bodyPr/>
+                    <a:lstStyle/>
+                    <a:p>
+                      <a:pPr algn="ctr" indent="0" marL="0">
+                        <a:buNone/>
+                      </a:pPr>
+                      <a:r>
+                        <a:rPr lang="en-US" sz="500" dirty="0">
+                          <a:solidFill>
+                            <a:srgbClr val="000000"/>
+                          </a:solidFill>
+                          <a:latin typeface="Calibri" pitchFamily="34" charset="0"/>
+                          <a:ea typeface="Calibri" pitchFamily="34" charset="-122"/>
+                          <a:cs typeface="Calibri" pitchFamily="34" charset="-120"/>
+                        </a:rPr>
+                        <a:t>0.01%</a:t>
+                      </a:r>
+                      <a:endParaRPr lang="en-US" sz="500" dirty="0">
+                        <a:latin typeface="Calibri" charset="0"/>
+                        <a:ea typeface="Calibri" charset="0"/>
+                        <a:cs typeface="Calibri" charset="0"/>
+                      </a:endParaRPr>
+                    </a:p>
+                  </a:txBody>
+                  <a:tcPr marL="91440" marR="91440" marT="45720" marB="45720">
+                    <a:lnL w="2540" cap="flat" cmpd="sng" algn="ctr">
+                      <a:solidFill>
+                        <a:srgbClr val="EEEEEE"/>
+                      </a:solidFill>
+                      <a:prstDash val="solid"/>
+                      <a:round/>
+                      <a:headEnd type="none" w="med" len="med"/>
+                      <a:tailEnd type="none" w="med" len="med"/>
+                    </a:lnL>
+                    <a:lnR w="2540" cap="flat" cmpd="sng" algn="ctr">
+                      <a:solidFill>
+                        <a:srgbClr val="EEEEEE"/>
+                      </a:solidFill>
+                      <a:prstDash val="solid"/>
+                      <a:round/>
+                      <a:headEnd type="none" w="med" len="med"/>
+                      <a:tailEnd type="none" w="med" len="med"/>
+                    </a:lnR>
+                    <a:lnT w="2540" cap="flat" cmpd="sng" algn="ctr">
+                      <a:solidFill>
+                        <a:srgbClr val="EEEEEE"/>
+                      </a:solidFill>
+                      <a:prstDash val="solid"/>
+                      <a:round/>
+                      <a:headEnd type="none" w="med" len="med"/>
+                      <a:tailEnd type="none" w="med" len="med"/>
+                    </a:lnT>
+                    <a:lnB w="2540" cap="flat" cmpd="sng" algn="ctr">
+                      <a:solidFill>
+                        <a:srgbClr val="EEEEEE"/>
+                      </a:solidFill>
+                      <a:prstDash val="solid"/>
+                      <a:round/>
+                      <a:headEnd type="none" w="med" len="med"/>
+                      <a:tailEnd type="none" w="med" len="med"/>
+                    </a:lnB>
+                  </a:tcPr>
+                </a:tc>
+                <a:tc>
+                  <a:txBody>
+                    <a:bodyPr/>
+                    <a:lstStyle/>
+                    <a:p>
+                      <a:pPr algn="ctr" indent="0" marL="0">
+                        <a:buNone/>
+                      </a:pPr>
+                      <a:r>
+                        <a:rPr lang="en-US" sz="500" dirty="0">
+                          <a:solidFill>
+                            <a:srgbClr val="000000"/>
+                          </a:solidFill>
+                          <a:latin typeface="Calibri" pitchFamily="34" charset="0"/>
+                          <a:ea typeface="Calibri" pitchFamily="34" charset="-122"/>
+                          <a:cs typeface="Calibri" pitchFamily="34" charset="-120"/>
+                        </a:rPr>
+                        <a:t>0.01%</a:t>
+                      </a:r>
+                      <a:endParaRPr lang="en-US" sz="500" dirty="0">
+                        <a:latin typeface="Calibri" charset="0"/>
+                        <a:ea typeface="Calibri" charset="0"/>
+                        <a:cs typeface="Calibri" charset="0"/>
+                      </a:endParaRPr>
+                    </a:p>
+                  </a:txBody>
+                  <a:tcPr marL="91440" marR="91440" marT="45720" marB="45720">
+                    <a:lnL w="2540" cap="flat" cmpd="sng" algn="ctr">
+                      <a:solidFill>
+                        <a:srgbClr val="EEEEEE"/>
+                      </a:solidFill>
+                      <a:prstDash val="solid"/>
+                      <a:round/>
+                      <a:headEnd type="none" w="med" len="med"/>
+                      <a:tailEnd type="none" w="med" len="med"/>
+                    </a:lnL>
+                    <a:lnR w="2540" cap="flat" cmpd="sng" algn="ctr">
+                      <a:solidFill>
+                        <a:srgbClr val="EEEEEE"/>
+                      </a:solidFill>
+                      <a:prstDash val="solid"/>
+                      <a:round/>
+                      <a:headEnd type="none" w="med" len="med"/>
+                      <a:tailEnd type="none" w="med" len="med"/>
+                    </a:lnR>
+                    <a:lnT w="2540" cap="flat" cmpd="sng" algn="ctr">
+                      <a:solidFill>
+                        <a:srgbClr val="EEEEEE"/>
+                      </a:solidFill>
+                      <a:prstDash val="solid"/>
+                      <a:round/>
+                      <a:headEnd type="none" w="med" len="med"/>
+                      <a:tailEnd type="none" w="med" len="med"/>
+                    </a:lnT>
+                    <a:lnB w="2540" cap="flat" cmpd="sng" algn="ctr">
+                      <a:solidFill>
+                        <a:srgbClr val="EEEEEE"/>
+                      </a:solidFill>
+                      <a:prstDash val="solid"/>
+                      <a:round/>
+                      <a:headEnd type="none" w="med" len="med"/>
+                      <a:tailEnd type="none" w="med" len="med"/>
+                    </a:lnB>
+                  </a:tcPr>
+                </a:tc>
+                <a:tc>
+                  <a:txBody>
+                    <a:bodyPr/>
+                    <a:lstStyle/>
+                    <a:p>
+                      <a:pPr algn="ctr" indent="0" marL="0">
+                        <a:buNone/>
+                      </a:pPr>
+                      <a:r>
+                        <a:rPr lang="en-US" sz="500" dirty="0">
+                          <a:solidFill>
+                            <a:srgbClr val="000000"/>
+                          </a:solidFill>
+                          <a:latin typeface="Calibri" pitchFamily="34" charset="0"/>
+                          <a:ea typeface="Calibri" pitchFamily="34" charset="-122"/>
+                          <a:cs typeface="Calibri" pitchFamily="34" charset="-120"/>
+                        </a:rPr>
+                        <a:t>0.01%</a:t>
+                      </a:r>
+                      <a:endParaRPr lang="en-US" sz="500" dirty="0">
+                        <a:latin typeface="Calibri" charset="0"/>
+                        <a:ea typeface="Calibri" charset="0"/>
+                        <a:cs typeface="Calibri" charset="0"/>
+                      </a:endParaRPr>
+                    </a:p>
+                  </a:txBody>
+                  <a:tcPr marL="91440" marR="91440" marT="45720" marB="45720">
+                    <a:lnL w="2540" cap="flat" cmpd="sng" algn="ctr">
+                      <a:solidFill>
+                        <a:srgbClr val="EEEEEE"/>
+                      </a:solidFill>
+                      <a:prstDash val="solid"/>
+                      <a:round/>
+                      <a:headEnd type="none" w="med" len="med"/>
+                      <a:tailEnd type="none" w="med" len="med"/>
+                    </a:lnL>
+                    <a:lnR w="2540" cap="flat" cmpd="sng" algn="ctr">
+                      <a:solidFill>
+                        <a:srgbClr val="EEEEEE"/>
+                      </a:solidFill>
+                      <a:prstDash val="solid"/>
+                      <a:round/>
+                      <a:headEnd type="none" w="med" len="med"/>
+                      <a:tailEnd type="none" w="med" len="med"/>
+                    </a:lnR>
+                    <a:lnT w="2540" cap="flat" cmpd="sng" algn="ctr">
+                      <a:solidFill>
+                        <a:srgbClr val="EEEEEE"/>
+                      </a:solidFill>
+                      <a:prstDash val="solid"/>
+                      <a:round/>
+                      <a:headEnd type="none" w="med" len="med"/>
+                      <a:tailEnd type="none" w="med" len="med"/>
+                    </a:lnT>
+                    <a:lnB w="2540" cap="flat" cmpd="sng" algn="ctr">
+                      <a:solidFill>
+                        <a:srgbClr val="EEEEEE"/>
+                      </a:solidFill>
+                      <a:prstDash val="solid"/>
+                      <a:round/>
+                      <a:headEnd type="none" w="med" len="med"/>
+                      <a:tailEnd type="none" w="med" len="med"/>
+                    </a:lnB>
+                  </a:tcPr>
+                </a:tc>
+                <a:tc>
+                  <a:txBody>
+                    <a:bodyPr/>
+                    <a:lstStyle/>
+                    <a:p>
+                      <a:pPr algn="ctr" indent="0" marL="0">
+                        <a:buNone/>
+                      </a:pPr>
+                      <a:r>
+                        <a:rPr lang="en-US" sz="500" dirty="0">
+                          <a:solidFill>
+                            <a:srgbClr val="000000"/>
+                          </a:solidFill>
+                          <a:latin typeface="Calibri" pitchFamily="34" charset="0"/>
+                          <a:ea typeface="Calibri" pitchFamily="34" charset="-122"/>
+                          <a:cs typeface="Calibri" pitchFamily="34" charset="-120"/>
+                        </a:rPr>
+                        <a:t>0.01%</a:t>
+                      </a:r>
+                      <a:endParaRPr lang="en-US" sz="500" dirty="0">
+                        <a:latin typeface="Calibri" charset="0"/>
+                        <a:ea typeface="Calibri" charset="0"/>
+                        <a:cs typeface="Calibri" charset="0"/>
+                      </a:endParaRPr>
+                    </a:p>
+                  </a:txBody>
+                  <a:tcPr marL="91440" marR="91440" marT="45720" marB="45720">
+                    <a:lnL w="2540" cap="flat" cmpd="sng" algn="ctr">
+                      <a:solidFill>
+                        <a:srgbClr val="EEEEEE"/>
+                      </a:solidFill>
+                      <a:prstDash val="solid"/>
+                      <a:round/>
+                      <a:headEnd type="none" w="med" len="med"/>
+                      <a:tailEnd type="none" w="med" len="med"/>
+                    </a:lnL>
+                    <a:lnR w="2540" cap="flat" cmpd="sng" algn="ctr">
+                      <a:solidFill>
+                        <a:srgbClr val="EEEEEE"/>
+                      </a:solidFill>
+                      <a:prstDash val="solid"/>
+                      <a:round/>
+                      <a:headEnd type="none" w="med" len="med"/>
+                      <a:tailEnd type="none" w="med" len="med"/>
+                    </a:lnR>
+                    <a:lnT w="2540" cap="flat" cmpd="sng" algn="ctr">
+                      <a:solidFill>
+                        <a:srgbClr val="EEEEEE"/>
+                      </a:solidFill>
+                      <a:prstDash val="solid"/>
+                      <a:round/>
+                      <a:headEnd type="none" w="med" len="med"/>
+                      <a:tailEnd type="none" w="med" len="med"/>
+                    </a:lnT>
+                    <a:lnB w="2540" cap="flat" cmpd="sng" algn="ctr">
+                      <a:solidFill>
+                        <a:srgbClr val="EEEEEE"/>
+                      </a:solidFill>
+                      <a:prstDash val="solid"/>
+                      <a:round/>
+                      <a:headEnd type="none" w="med" len="med"/>
+                      <a:tailEnd type="none" w="med" len="med"/>
+                    </a:lnB>
+                  </a:tcPr>
+                </a:tc>
+                <a:tc>
+                  <a:txBody>
+                    <a:bodyPr/>
+                    <a:lstStyle/>
+                    <a:p>
+                      <a:pPr algn="ctr" indent="0" marL="0">
+                        <a:buNone/>
+                      </a:pPr>
+                      <a:r>
+                        <a:rPr lang="en-US" sz="500" dirty="0">
+                          <a:solidFill>
+                            <a:srgbClr val="000000"/>
+                          </a:solidFill>
+                          <a:latin typeface="Calibri" pitchFamily="34" charset="0"/>
+                          <a:ea typeface="Calibri" pitchFamily="34" charset="-122"/>
+                          <a:cs typeface="Calibri" pitchFamily="34" charset="-120"/>
+                        </a:rPr>
+                        <a:t>0.01%</a:t>
+                      </a:r>
+                      <a:endParaRPr lang="en-US" sz="500" dirty="0">
+                        <a:latin typeface="Calibri" charset="0"/>
+                        <a:ea typeface="Calibri" charset="0"/>
+                        <a:cs typeface="Calibri" charset="0"/>
+                      </a:endParaRPr>
+                    </a:p>
+                  </a:txBody>
+                  <a:tcPr marL="91440" marR="91440" marT="45720" marB="45720">
+                    <a:lnL w="2540" cap="flat" cmpd="sng" algn="ctr">
+                      <a:solidFill>
+                        <a:srgbClr val="EEEEEE"/>
+                      </a:solidFill>
+                      <a:prstDash val="solid"/>
+                      <a:round/>
+                      <a:headEnd type="none" w="med" len="med"/>
+                      <a:tailEnd type="none" w="med" len="med"/>
+                    </a:lnL>
+                    <a:lnR w="2540" cap="flat" cmpd="sng" algn="ctr">
+                      <a:solidFill>
+                        <a:srgbClr val="EEEEEE"/>
+                      </a:solidFill>
+                      <a:prstDash val="solid"/>
+                      <a:round/>
+                      <a:headEnd type="none" w="med" len="med"/>
+                      <a:tailEnd type="none" w="med" len="med"/>
+                    </a:lnR>
+                    <a:lnT w="2540" cap="flat" cmpd="sng" algn="ctr">
+                      <a:solidFill>
+                        <a:srgbClr val="EEEEEE"/>
+                      </a:solidFill>
+                      <a:prstDash val="solid"/>
+                      <a:round/>
+                      <a:headEnd type="none" w="med" len="med"/>
+                      <a:tailEnd type="none" w="med" len="med"/>
+                    </a:lnT>
+                    <a:lnB w="2540" cap="flat" cmpd="sng" algn="ctr">
+                      <a:solidFill>
+                        <a:srgbClr val="EEEEEE"/>
+                      </a:solidFill>
+                      <a:prstDash val="solid"/>
+                      <a:round/>
+                      <a:headEnd type="none" w="med" len="med"/>
+                      <a:tailEnd type="none" w="med" len="med"/>
+                    </a:lnB>
+                  </a:tcPr>
+                </a:tc>
+                <a:tc>
+                  <a:txBody>
+                    <a:bodyPr/>
+                    <a:lstStyle/>
+                    <a:p>
+                      <a:pPr algn="ctr" indent="0" marL="0">
+                        <a:buNone/>
+                      </a:pPr>
+                      <a:r>
+                        <a:rPr lang="en-US" sz="500" dirty="0">
+                          <a:solidFill>
+                            <a:srgbClr val="000000"/>
+                          </a:solidFill>
+                          <a:latin typeface="Calibri" pitchFamily="34" charset="0"/>
+                          <a:ea typeface="Calibri" pitchFamily="34" charset="-122"/>
+                          <a:cs typeface="Calibri" pitchFamily="34" charset="-120"/>
+                        </a:rPr>
+                        <a:t>0.01%</a:t>
+                      </a:r>
+                      <a:endParaRPr lang="en-US" sz="500" dirty="0">
+                        <a:latin typeface="Calibri" charset="0"/>
+                        <a:ea typeface="Calibri" charset="0"/>
+                        <a:cs typeface="Calibri" charset="0"/>
+                      </a:endParaRPr>
+                    </a:p>
+                  </a:txBody>
+                  <a:tcPr marL="91440" marR="91440" marT="45720" marB="45720">
+                    <a:lnL w="2540" cap="flat" cmpd="sng" algn="ctr">
+                      <a:solidFill>
+                        <a:srgbClr val="EEEEEE"/>
+                      </a:solidFill>
+                      <a:prstDash val="solid"/>
+                      <a:round/>
+                      <a:headEnd type="none" w="med" len="med"/>
+                      <a:tailEnd type="none" w="med" len="med"/>
+                    </a:lnL>
+                    <a:lnR w="2540" cap="flat" cmpd="sng" algn="ctr">
+                      <a:solidFill>
+                        <a:srgbClr val="EEEEEE"/>
+                      </a:solidFill>
+                      <a:prstDash val="solid"/>
+                      <a:round/>
+                      <a:headEnd type="none" w="med" len="med"/>
+                      <a:tailEnd type="none" w="med" len="med"/>
+                    </a:lnR>
+                    <a:lnT w="2540" cap="flat" cmpd="sng" algn="ctr">
+                      <a:solidFill>
+                        <a:srgbClr val="EEEEEE"/>
+                      </a:solidFill>
+                      <a:prstDash val="solid"/>
+                      <a:round/>
+                      <a:headEnd type="none" w="med" len="med"/>
+                      <a:tailEnd type="none" w="med" len="med"/>
+                    </a:lnT>
+                    <a:lnB w="2540" cap="flat" cmpd="sng" algn="ctr">
+                      <a:solidFill>
+                        <a:srgbClr val="EEEEEE"/>
+                      </a:solidFill>
+                      <a:prstDash val="solid"/>
+                      <a:round/>
+                      <a:headEnd type="none" w="med" len="med"/>
+                      <a:tailEnd type="none" w="med" len="med"/>
+                    </a:lnB>
+                  </a:tcPr>
+                </a:tc>
+                <a:tc>
+                  <a:txBody>
+                    <a:bodyPr/>
+                    <a:lstStyle/>
+                    <a:p>
+                      <a:pPr algn="ctr" indent="0" marL="0">
+                        <a:buNone/>
+                      </a:pPr>
+                      <a:r>
+                        <a:rPr lang="en-US" sz="500" b="1" dirty="0">
+                          <a:solidFill>
+                            <a:srgbClr val="000000"/>
+                          </a:solidFill>
+                          <a:latin typeface="Calibri" pitchFamily="34" charset="0"/>
+                          <a:ea typeface="Calibri" pitchFamily="34" charset="-122"/>
+                          <a:cs typeface="Calibri" pitchFamily="34" charset="-120"/>
+                        </a:rPr>
+                        <a:t>0.09%</a:t>
+                      </a:r>
+                      <a:endParaRPr lang="en-US" sz="500" dirty="0">
+                        <a:latin typeface="Calibri" charset="0"/>
+                        <a:ea typeface="Calibri" charset="0"/>
+                        <a:cs typeface="Calibri" charset="0"/>
+                      </a:endParaRPr>
+                    </a:p>
+                  </a:txBody>
+                  <a:tcPr marL="91440" marR="91440" marT="45720" marB="45720">
+                    <a:lnL w="2540" cap="flat" cmpd="sng" algn="ctr">
+                      <a:solidFill>
+                        <a:srgbClr val="EEEEEE"/>
+                      </a:solidFill>
+                      <a:prstDash val="solid"/>
+                      <a:round/>
+                      <a:headEnd type="none" w="med" len="med"/>
+                      <a:tailEnd type="none" w="med" len="med"/>
+                    </a:lnL>
+                    <a:lnR w="2540" cap="flat" cmpd="sng" algn="ctr">
+                      <a:solidFill>
+                        <a:srgbClr val="EEEEEE"/>
+                      </a:solidFill>
+                      <a:prstDash val="solid"/>
+                      <a:round/>
+                      <a:headEnd type="none" w="med" len="med"/>
+                      <a:tailEnd type="none" w="med" len="med"/>
+                    </a:lnR>
+                    <a:lnT w="2540" cap="flat" cmpd="sng" algn="ctr">
+                      <a:solidFill>
+                        <a:srgbClr val="EEEEEE"/>
+                      </a:solidFill>
+                      <a:prstDash val="solid"/>
+                      <a:round/>
+                      <a:headEnd type="none" w="med" len="med"/>
+                      <a:tailEnd type="none" w="med" len="med"/>
+                    </a:lnT>
+                    <a:lnB w="2540" cap="flat" cmpd="sng" algn="ctr">
+                      <a:solidFill>
+                        <a:srgbClr val="EEEEEE"/>
+                      </a:solidFill>
+                      <a:prstDash val="solid"/>
+                      <a:round/>
+                      <a:headEnd type="none" w="med" len="med"/>
+                      <a:tailEnd type="none" w="med" len="med"/>
+                    </a:lnB>
+                  </a:tcPr>
+                </a:tc>
+              </a:tr>
+              <a:tr h="123444">
+                <a:tc>
+                  <a:txBody>
+                    <a:bodyPr/>
+                    <a:lstStyle/>
+                    <a:p>
+                      <a:pPr algn="l" indent="0" marL="0">
+                        <a:buNone/>
+                      </a:pPr>
+                      <a:r>
+                        <a:rPr lang="en-US" sz="500" b="1" dirty="0">
+                          <a:solidFill>
+                            <a:srgbClr val="000000"/>
+                          </a:solidFill>
+                          <a:latin typeface="Calibri" pitchFamily="34" charset="0"/>
+                          <a:ea typeface="Calibri" pitchFamily="34" charset="-122"/>
+                          <a:cs typeface="Calibri" pitchFamily="34" charset="-120"/>
+                        </a:rPr>
+                        <a:t>2024</a:t>
+                      </a:r>
+                      <a:endParaRPr lang="en-US" sz="500" dirty="0">
+                        <a:latin typeface="Calibri" charset="0"/>
+                        <a:ea typeface="Calibri" charset="0"/>
+                        <a:cs typeface="Calibri" charset="0"/>
+                      </a:endParaRPr>
+                    </a:p>
+                  </a:txBody>
+                  <a:tcPr marL="91440" marR="91440" marT="45720" marB="45720">
+                    <a:lnL w="2540" cap="flat" cmpd="sng" algn="ctr">
+                      <a:solidFill>
+                        <a:srgbClr val="EEEEEE"/>
+                      </a:solidFill>
+                      <a:prstDash val="solid"/>
+                      <a:round/>
+                      <a:headEnd type="none" w="med" len="med"/>
+                      <a:tailEnd type="none" w="med" len="med"/>
+                    </a:lnL>
+                    <a:lnR w="2540" cap="flat" cmpd="sng" algn="ctr">
+                      <a:solidFill>
+                        <a:srgbClr val="EEEEEE"/>
+                      </a:solidFill>
+                      <a:prstDash val="solid"/>
+                      <a:round/>
+                      <a:headEnd type="none" w="med" len="med"/>
+                      <a:tailEnd type="none" w="med" len="med"/>
+                    </a:lnR>
+                    <a:lnT w="2540" cap="flat" cmpd="sng" algn="ctr">
+                      <a:solidFill>
+                        <a:srgbClr val="EEEEEE"/>
+                      </a:solidFill>
+                      <a:prstDash val="solid"/>
+                      <a:round/>
+                      <a:headEnd type="none" w="med" len="med"/>
+                      <a:tailEnd type="none" w="med" len="med"/>
+                    </a:lnT>
+                    <a:lnB w="2540" cap="flat" cmpd="sng" algn="ctr">
+                      <a:solidFill>
+                        <a:srgbClr val="EEEEEE"/>
+                      </a:solidFill>
+                      <a:prstDash val="solid"/>
+                      <a:round/>
+                      <a:headEnd type="none" w="med" len="med"/>
+                      <a:tailEnd type="none" w="med" len="med"/>
+                    </a:lnB>
+                  </a:tcPr>
+                </a:tc>
+                <a:tc>
+                  <a:txBody>
+                    <a:bodyPr/>
+                    <a:lstStyle/>
+                    <a:p>
+                      <a:pPr algn="l" indent="0" marL="0">
+                        <a:buNone/>
+                      </a:pPr>
+                      <a:r>
+                        <a:rPr lang="en-US" sz="500" dirty="0">
+                          <a:solidFill>
+                            <a:srgbClr val="777777"/>
+                          </a:solidFill>
+                          <a:latin typeface="Calibri" pitchFamily="34" charset="0"/>
+                          <a:ea typeface="Calibri" pitchFamily="34" charset="-122"/>
+                          <a:cs typeface="Calibri" pitchFamily="34" charset="-120"/>
+                        </a:rPr>
+                        <a:t>ICP</a:t>
+                      </a:r>
+                      <a:endParaRPr lang="en-US" sz="500" dirty="0">
+                        <a:latin typeface="Calibri" charset="0"/>
+                        <a:ea typeface="Calibri" charset="0"/>
+                        <a:cs typeface="Calibri" charset="0"/>
+                      </a:endParaRPr>
+                    </a:p>
+                  </a:txBody>
+                  <a:tcPr marL="91440" marR="91440" marT="45720" marB="45720">
+                    <a:lnL w="2540" cap="flat" cmpd="sng" algn="ctr">
+                      <a:solidFill>
+                        <a:srgbClr val="EEEEEE"/>
+                      </a:solidFill>
+                      <a:prstDash val="solid"/>
+                      <a:round/>
+                      <a:headEnd type="none" w="med" len="med"/>
+                      <a:tailEnd type="none" w="med" len="med"/>
+                    </a:lnL>
+                    <a:lnR w="2540" cap="flat" cmpd="sng" algn="ctr">
+                      <a:solidFill>
+                        <a:srgbClr val="EEEEEE"/>
+                      </a:solidFill>
+                      <a:prstDash val="solid"/>
+                      <a:round/>
+                      <a:headEnd type="none" w="med" len="med"/>
+                      <a:tailEnd type="none" w="med" len="med"/>
+                    </a:lnR>
+                    <a:lnT w="2540" cap="flat" cmpd="sng" algn="ctr">
+                      <a:solidFill>
+                        <a:srgbClr val="EEEEEE"/>
+                      </a:solidFill>
+                      <a:prstDash val="solid"/>
+                      <a:round/>
+                      <a:headEnd type="none" w="med" len="med"/>
+                      <a:tailEnd type="none" w="med" len="med"/>
+                    </a:lnT>
+                    <a:lnB w="2540" cap="flat" cmpd="sng" algn="ctr">
+                      <a:solidFill>
+                        <a:srgbClr val="EEEEEE"/>
+                      </a:solidFill>
+                      <a:prstDash val="solid"/>
+                      <a:round/>
+                      <a:headEnd type="none" w="med" len="med"/>
+                      <a:tailEnd type="none" w="med" len="med"/>
+                    </a:lnB>
+                  </a:tcPr>
+                </a:tc>
+                <a:tc>
+                  <a:txBody>
+                    <a:bodyPr/>
+                    <a:lstStyle/>
+                    <a:p>
+                      <a:pPr algn="ctr" indent="0" marL="0">
+                        <a:buNone/>
+                      </a:pPr>
+                      <a:r>
+                        <a:rPr lang="en-US" sz="500" dirty="0">
+                          <a:solidFill>
+                            <a:srgbClr val="777777"/>
+                          </a:solidFill>
+                          <a:latin typeface="Calibri" pitchFamily="34" charset="0"/>
+                          <a:ea typeface="Calibri" pitchFamily="34" charset="-122"/>
+                          <a:cs typeface="Calibri" pitchFamily="34" charset="-120"/>
+                        </a:rPr>
+                        <a:t>0.69%</a:t>
+                      </a:r>
+                      <a:endParaRPr lang="en-US" sz="500" dirty="0">
+                        <a:latin typeface="Calibri" charset="0"/>
+                        <a:ea typeface="Calibri" charset="0"/>
+                        <a:cs typeface="Calibri" charset="0"/>
+                      </a:endParaRPr>
+                    </a:p>
+                  </a:txBody>
+                  <a:tcPr marL="91440" marR="91440" marT="45720" marB="45720">
+                    <a:lnL w="2540" cap="flat" cmpd="sng" algn="ctr">
+                      <a:solidFill>
+                        <a:srgbClr val="EEEEEE"/>
+                      </a:solidFill>
+                      <a:prstDash val="solid"/>
+                      <a:round/>
+                      <a:headEnd type="none" w="med" len="med"/>
+                      <a:tailEnd type="none" w="med" len="med"/>
+                    </a:lnL>
+                    <a:lnR w="2540" cap="flat" cmpd="sng" algn="ctr">
+                      <a:solidFill>
+                        <a:srgbClr val="EEEEEE"/>
+                      </a:solidFill>
+                      <a:prstDash val="solid"/>
+                      <a:round/>
+                      <a:headEnd type="none" w="med" len="med"/>
+                      <a:tailEnd type="none" w="med" len="med"/>
+                    </a:lnR>
+                    <a:lnT w="2540" cap="flat" cmpd="sng" algn="ctr">
+                      <a:solidFill>
+                        <a:srgbClr val="EEEEEE"/>
+                      </a:solidFill>
+                      <a:prstDash val="solid"/>
+                      <a:round/>
+                      <a:headEnd type="none" w="med" len="med"/>
+                      <a:tailEnd type="none" w="med" len="med"/>
+                    </a:lnT>
+                    <a:lnB w="2540" cap="flat" cmpd="sng" algn="ctr">
+                      <a:solidFill>
+                        <a:srgbClr val="EEEEEE"/>
+                      </a:solidFill>
+                      <a:prstDash val="solid"/>
+                      <a:round/>
+                      <a:headEnd type="none" w="med" len="med"/>
+                      <a:tailEnd type="none" w="med" len="med"/>
+                    </a:lnB>
+                  </a:tcPr>
+                </a:tc>
+                <a:tc>
+                  <a:txBody>
+                    <a:bodyPr/>
+                    <a:lstStyle/>
+                    <a:p>
+                      <a:pPr algn="ctr" indent="0" marL="0">
+                        <a:buNone/>
+                      </a:pPr>
+                      <a:r>
+                        <a:rPr lang="en-US" sz="500" dirty="0">
+                          <a:solidFill>
+                            <a:srgbClr val="777777"/>
+                          </a:solidFill>
+                          <a:latin typeface="Calibri" pitchFamily="34" charset="0"/>
+                          <a:ea typeface="Calibri" pitchFamily="34" charset="-122"/>
+                          <a:cs typeface="Calibri" pitchFamily="34" charset="-120"/>
+                        </a:rPr>
+                        <a:t>0.60%</a:t>
+                      </a:r>
+                      <a:endParaRPr lang="en-US" sz="500" dirty="0">
+                        <a:latin typeface="Calibri" charset="0"/>
+                        <a:ea typeface="Calibri" charset="0"/>
+                        <a:cs typeface="Calibri" charset="0"/>
+                      </a:endParaRPr>
+                    </a:p>
+                  </a:txBody>
+                  <a:tcPr marL="91440" marR="91440" marT="45720" marB="45720">
+                    <a:lnL w="2540" cap="flat" cmpd="sng" algn="ctr">
+                      <a:solidFill>
+                        <a:srgbClr val="EEEEEE"/>
+                      </a:solidFill>
+                      <a:prstDash val="solid"/>
+                      <a:round/>
+                      <a:headEnd type="none" w="med" len="med"/>
+                      <a:tailEnd type="none" w="med" len="med"/>
+                    </a:lnL>
+                    <a:lnR w="2540" cap="flat" cmpd="sng" algn="ctr">
+                      <a:solidFill>
+                        <a:srgbClr val="EEEEEE"/>
+                      </a:solidFill>
+                      <a:prstDash val="solid"/>
+                      <a:round/>
+                      <a:headEnd type="none" w="med" len="med"/>
+                      <a:tailEnd type="none" w="med" len="med"/>
+                    </a:lnR>
+                    <a:lnT w="2540" cap="flat" cmpd="sng" algn="ctr">
+                      <a:solidFill>
+                        <a:srgbClr val="EEEEEE"/>
+                      </a:solidFill>
+                      <a:prstDash val="solid"/>
+                      <a:round/>
+                      <a:headEnd type="none" w="med" len="med"/>
+                      <a:tailEnd type="none" w="med" len="med"/>
+                    </a:lnT>
+                    <a:lnB w="2540" cap="flat" cmpd="sng" algn="ctr">
+                      <a:solidFill>
+                        <a:srgbClr val="EEEEEE"/>
+                      </a:solidFill>
+                      <a:prstDash val="solid"/>
+                      <a:round/>
+                      <a:headEnd type="none" w="med" len="med"/>
+                      <a:tailEnd type="none" w="med" len="med"/>
+                    </a:lnB>
+                  </a:tcPr>
+                </a:tc>
+                <a:tc>
+                  <a:txBody>
+                    <a:bodyPr/>
+                    <a:lstStyle/>
+                    <a:p>
+                      <a:pPr algn="ctr" indent="0" marL="0">
+                        <a:buNone/>
+                      </a:pPr>
+                      <a:r>
+                        <a:rPr lang="en-US" sz="500" dirty="0">
+                          <a:solidFill>
+                            <a:srgbClr val="777777"/>
+                          </a:solidFill>
+                          <a:latin typeface="Calibri" pitchFamily="34" charset="0"/>
+                          <a:ea typeface="Calibri" pitchFamily="34" charset="-122"/>
+                          <a:cs typeface="Calibri" pitchFamily="34" charset="-120"/>
+                        </a:rPr>
+                        <a:t>0.60%</a:t>
+                      </a:r>
+                      <a:endParaRPr lang="en-US" sz="500" dirty="0">
+                        <a:latin typeface="Calibri" charset="0"/>
+                        <a:ea typeface="Calibri" charset="0"/>
+                        <a:cs typeface="Calibri" charset="0"/>
+                      </a:endParaRPr>
+                    </a:p>
+                  </a:txBody>
+                  <a:tcPr marL="91440" marR="91440" marT="45720" marB="45720">
+                    <a:lnL w="2540" cap="flat" cmpd="sng" algn="ctr">
+                      <a:solidFill>
+                        <a:srgbClr val="EEEEEE"/>
+                      </a:solidFill>
+                      <a:prstDash val="solid"/>
+                      <a:round/>
+                      <a:headEnd type="none" w="med" len="med"/>
+                      <a:tailEnd type="none" w="med" len="med"/>
+                    </a:lnL>
+                    <a:lnR w="2540" cap="flat" cmpd="sng" algn="ctr">
+                      <a:solidFill>
+                        <a:srgbClr val="EEEEEE"/>
+                      </a:solidFill>
+                      <a:prstDash val="solid"/>
+                      <a:round/>
+                      <a:headEnd type="none" w="med" len="med"/>
+                      <a:tailEnd type="none" w="med" len="med"/>
+                    </a:lnR>
+                    <a:lnT w="2540" cap="flat" cmpd="sng" algn="ctr">
+                      <a:solidFill>
+                        <a:srgbClr val="EEEEEE"/>
+                      </a:solidFill>
+                      <a:prstDash val="solid"/>
+                      <a:round/>
+                      <a:headEnd type="none" w="med" len="med"/>
+                      <a:tailEnd type="none" w="med" len="med"/>
+                    </a:lnT>
+                    <a:lnB w="2540" cap="flat" cmpd="sng" algn="ctr">
+                      <a:solidFill>
+                        <a:srgbClr val="EEEEEE"/>
+                      </a:solidFill>
+                      <a:prstDash val="solid"/>
+                      <a:round/>
+                      <a:headEnd type="none" w="med" len="med"/>
+                      <a:tailEnd type="none" w="med" len="med"/>
+                    </a:lnB>
+                  </a:tcPr>
+                </a:tc>
+                <a:tc>
+                  <a:txBody>
+                    <a:bodyPr/>
+                    <a:lstStyle/>
+                    <a:p>
+                      <a:pPr algn="ctr" indent="0" marL="0">
+                        <a:buNone/>
+                      </a:pPr>
+                      <a:r>
+                        <a:rPr lang="en-US" sz="500" dirty="0">
+                          <a:solidFill>
+                            <a:srgbClr val="777777"/>
+                          </a:solidFill>
+                          <a:latin typeface="Calibri" pitchFamily="34" charset="0"/>
+                          <a:ea typeface="Calibri" pitchFamily="34" charset="-122"/>
+                          <a:cs typeface="Calibri" pitchFamily="34" charset="-120"/>
+                        </a:rPr>
+                        <a:t>0.55%</a:t>
+                      </a:r>
+                      <a:endParaRPr lang="en-US" sz="500" dirty="0">
+                        <a:latin typeface="Calibri" charset="0"/>
+                        <a:ea typeface="Calibri" charset="0"/>
+                        <a:cs typeface="Calibri" charset="0"/>
+                      </a:endParaRPr>
+                    </a:p>
+                  </a:txBody>
+                  <a:tcPr marL="91440" marR="91440" marT="45720" marB="45720">
+                    <a:lnL w="2540" cap="flat" cmpd="sng" algn="ctr">
+                      <a:solidFill>
+                        <a:srgbClr val="EEEEEE"/>
+                      </a:solidFill>
+                      <a:prstDash val="solid"/>
+                      <a:round/>
+                      <a:headEnd type="none" w="med" len="med"/>
+                      <a:tailEnd type="none" w="med" len="med"/>
+                    </a:lnL>
+                    <a:lnR w="2540" cap="flat" cmpd="sng" algn="ctr">
+                      <a:solidFill>
+                        <a:srgbClr val="EEEEEE"/>
+                      </a:solidFill>
+                      <a:prstDash val="solid"/>
+                      <a:round/>
+                      <a:headEnd type="none" w="med" len="med"/>
+                      <a:tailEnd type="none" w="med" len="med"/>
+                    </a:lnR>
+                    <a:lnT w="2540" cap="flat" cmpd="sng" algn="ctr">
+                      <a:solidFill>
+                        <a:srgbClr val="EEEEEE"/>
+                      </a:solidFill>
+                      <a:prstDash val="solid"/>
+                      <a:round/>
+                      <a:headEnd type="none" w="med" len="med"/>
+                      <a:tailEnd type="none" w="med" len="med"/>
+                    </a:lnT>
+                    <a:lnB w="2540" cap="flat" cmpd="sng" algn="ctr">
+                      <a:solidFill>
+                        <a:srgbClr val="EEEEEE"/>
+                      </a:solidFill>
+                      <a:prstDash val="solid"/>
+                      <a:round/>
+                      <a:headEnd type="none" w="med" len="med"/>
+                      <a:tailEnd type="none" w="med" len="med"/>
+                    </a:lnB>
+                  </a:tcPr>
+                </a:tc>
+                <a:tc>
+                  <a:txBody>
+                    <a:bodyPr/>
+                    <a:lstStyle/>
+                    <a:p>
+                      <a:pPr algn="ctr" indent="0" marL="0">
+                        <a:buNone/>
+                      </a:pPr>
+                      <a:r>
+                        <a:rPr lang="en-US" sz="500" dirty="0">
+                          <a:solidFill>
+                            <a:srgbClr val="777777"/>
+                          </a:solidFill>
+                          <a:latin typeface="Calibri" pitchFamily="34" charset="0"/>
+                          <a:ea typeface="Calibri" pitchFamily="34" charset="-122"/>
+                          <a:cs typeface="Calibri" pitchFamily="34" charset="-120"/>
+                        </a:rPr>
+                        <a:t>0.53%</a:t>
+                      </a:r>
+                      <a:endParaRPr lang="en-US" sz="500" dirty="0">
+                        <a:latin typeface="Calibri" charset="0"/>
+                        <a:ea typeface="Calibri" charset="0"/>
+                        <a:cs typeface="Calibri" charset="0"/>
+                      </a:endParaRPr>
+                    </a:p>
+                  </a:txBody>
+                  <a:tcPr marL="91440" marR="91440" marT="45720" marB="45720">
+                    <a:lnL w="2540" cap="flat" cmpd="sng" algn="ctr">
+                      <a:solidFill>
+                        <a:srgbClr val="EEEEEE"/>
+                      </a:solidFill>
+                      <a:prstDash val="solid"/>
+                      <a:round/>
+                      <a:headEnd type="none" w="med" len="med"/>
+                      <a:tailEnd type="none" w="med" len="med"/>
+                    </a:lnL>
+                    <a:lnR w="2540" cap="flat" cmpd="sng" algn="ctr">
+                      <a:solidFill>
+                        <a:srgbClr val="EEEEEE"/>
+                      </a:solidFill>
+                      <a:prstDash val="solid"/>
+                      <a:round/>
+                      <a:headEnd type="none" w="med" len="med"/>
+                      <a:tailEnd type="none" w="med" len="med"/>
+                    </a:lnR>
+                    <a:lnT w="2540" cap="flat" cmpd="sng" algn="ctr">
+                      <a:solidFill>
+                        <a:srgbClr val="EEEEEE"/>
+                      </a:solidFill>
+                      <a:prstDash val="solid"/>
+                      <a:round/>
+                      <a:headEnd type="none" w="med" len="med"/>
+                      <a:tailEnd type="none" w="med" len="med"/>
+                    </a:lnT>
+                    <a:lnB w="2540" cap="flat" cmpd="sng" algn="ctr">
+                      <a:solidFill>
+                        <a:srgbClr val="EEEEEE"/>
+                      </a:solidFill>
+                      <a:prstDash val="solid"/>
+                      <a:round/>
+                      <a:headEnd type="none" w="med" len="med"/>
+                      <a:tailEnd type="none" w="med" len="med"/>
+                    </a:lnB>
+                  </a:tcPr>
+                </a:tc>
+                <a:tc>
+                  <a:txBody>
+                    <a:bodyPr/>
+                    <a:lstStyle/>
+                    <a:p>
+                      <a:pPr algn="ctr" indent="0" marL="0">
+                        <a:buNone/>
+                      </a:pPr>
+                      <a:r>
+                        <a:rPr lang="en-US" sz="500" dirty="0">
+                          <a:solidFill>
+                            <a:srgbClr val="777777"/>
+                          </a:solidFill>
+                          <a:latin typeface="Calibri" pitchFamily="34" charset="0"/>
+                          <a:ea typeface="Calibri" pitchFamily="34" charset="-122"/>
+                          <a:cs typeface="Calibri" pitchFamily="34" charset="-120"/>
+                        </a:rPr>
+                        <a:t>0.49%</a:t>
+                      </a:r>
+                      <a:endParaRPr lang="en-US" sz="500" dirty="0">
+                        <a:latin typeface="Calibri" charset="0"/>
+                        <a:ea typeface="Calibri" charset="0"/>
+                        <a:cs typeface="Calibri" charset="0"/>
+                      </a:endParaRPr>
+                    </a:p>
+                  </a:txBody>
+                  <a:tcPr marL="91440" marR="91440" marT="45720" marB="45720">
+                    <a:lnL w="2540" cap="flat" cmpd="sng" algn="ctr">
+                      <a:solidFill>
+                        <a:srgbClr val="EEEEEE"/>
+                      </a:solidFill>
+                      <a:prstDash val="solid"/>
+                      <a:round/>
+                      <a:headEnd type="none" w="med" len="med"/>
+                      <a:tailEnd type="none" w="med" len="med"/>
+                    </a:lnL>
+                    <a:lnR w="2540" cap="flat" cmpd="sng" algn="ctr">
+                      <a:solidFill>
+                        <a:srgbClr val="EEEEEE"/>
+                      </a:solidFill>
+                      <a:prstDash val="solid"/>
+                      <a:round/>
+                      <a:headEnd type="none" w="med" len="med"/>
+                      <a:tailEnd type="none" w="med" len="med"/>
+                    </a:lnR>
+                    <a:lnT w="2540" cap="flat" cmpd="sng" algn="ctr">
+                      <a:solidFill>
+                        <a:srgbClr val="EEEEEE"/>
+                      </a:solidFill>
+                      <a:prstDash val="solid"/>
+                      <a:round/>
+                      <a:headEnd type="none" w="med" len="med"/>
+                      <a:tailEnd type="none" w="med" len="med"/>
+                    </a:lnT>
+                    <a:lnB w="2540" cap="flat" cmpd="sng" algn="ctr">
+                      <a:solidFill>
+                        <a:srgbClr val="EEEEEE"/>
+                      </a:solidFill>
+                      <a:prstDash val="solid"/>
+                      <a:round/>
+                      <a:headEnd type="none" w="med" len="med"/>
+                      <a:tailEnd type="none" w="med" len="med"/>
+                    </a:lnB>
+                  </a:tcPr>
+                </a:tc>
+                <a:tc>
+                  <a:txBody>
+                    <a:bodyPr/>
+                    <a:lstStyle/>
+                    <a:p>
+                      <a:pPr algn="ctr" indent="0" marL="0">
+                        <a:buNone/>
+                      </a:pPr>
+                      <a:r>
+                        <a:rPr lang="en-US" sz="500" dirty="0">
+                          <a:solidFill>
+                            <a:srgbClr val="777777"/>
+                          </a:solidFill>
+                          <a:latin typeface="Calibri" pitchFamily="34" charset="0"/>
+                          <a:ea typeface="Calibri" pitchFamily="34" charset="-122"/>
+                          <a:cs typeface="Calibri" pitchFamily="34" charset="-120"/>
+                        </a:rPr>
+                        <a:t>0.48%</a:t>
+                      </a:r>
+                      <a:endParaRPr lang="en-US" sz="500" dirty="0">
+                        <a:latin typeface="Calibri" charset="0"/>
+                        <a:ea typeface="Calibri" charset="0"/>
+                        <a:cs typeface="Calibri" charset="0"/>
+                      </a:endParaRPr>
+                    </a:p>
+                  </a:txBody>
+                  <a:tcPr marL="91440" marR="91440" marT="45720" marB="45720">
+                    <a:lnL w="2540" cap="flat" cmpd="sng" algn="ctr">
+                      <a:solidFill>
+                        <a:srgbClr val="EEEEEE"/>
+                      </a:solidFill>
+                      <a:prstDash val="solid"/>
+                      <a:round/>
+                      <a:headEnd type="none" w="med" len="med"/>
+                      <a:tailEnd type="none" w="med" len="med"/>
+                    </a:lnL>
+                    <a:lnR w="2540" cap="flat" cmpd="sng" algn="ctr">
+                      <a:solidFill>
+                        <a:srgbClr val="EEEEEE"/>
+                      </a:solidFill>
+                      <a:prstDash val="solid"/>
+                      <a:round/>
+                      <a:headEnd type="none" w="med" len="med"/>
+                      <a:tailEnd type="none" w="med" len="med"/>
+                    </a:lnR>
+                    <a:lnT w="2540" cap="flat" cmpd="sng" algn="ctr">
+                      <a:solidFill>
+                        <a:srgbClr val="EEEEEE"/>
+                      </a:solidFill>
+                      <a:prstDash val="solid"/>
+                      <a:round/>
+                      <a:headEnd type="none" w="med" len="med"/>
+                      <a:tailEnd type="none" w="med" len="med"/>
+                    </a:lnT>
+                    <a:lnB w="2540" cap="flat" cmpd="sng" algn="ctr">
+                      <a:solidFill>
+                        <a:srgbClr val="EEEEEE"/>
+                      </a:solidFill>
+                      <a:prstDash val="solid"/>
+                      <a:round/>
+                      <a:headEnd type="none" w="med" len="med"/>
+                      <a:tailEnd type="none" w="med" len="med"/>
+                    </a:lnB>
+                  </a:tcPr>
+                </a:tc>
+                <a:tc>
+                  <a:txBody>
+                    <a:bodyPr/>
+                    <a:lstStyle/>
+                    <a:p>
+                      <a:pPr algn="ctr" indent="0" marL="0">
+                        <a:buNone/>
+                      </a:pPr>
+                      <a:r>
+                        <a:rPr lang="en-US" sz="500" dirty="0">
+                          <a:solidFill>
+                            <a:srgbClr val="777777"/>
+                          </a:solidFill>
+                          <a:latin typeface="Calibri" pitchFamily="34" charset="0"/>
+                          <a:ea typeface="Calibri" pitchFamily="34" charset="-122"/>
+                          <a:cs typeface="Calibri" pitchFamily="34" charset="-120"/>
+                        </a:rPr>
+                        <a:t>0.48%</a:t>
+                      </a:r>
+                      <a:endParaRPr lang="en-US" sz="500" dirty="0">
+                        <a:latin typeface="Calibri" charset="0"/>
+                        <a:ea typeface="Calibri" charset="0"/>
+                        <a:cs typeface="Calibri" charset="0"/>
+                      </a:endParaRPr>
+                    </a:p>
+                  </a:txBody>
+                  <a:tcPr marL="91440" marR="91440" marT="45720" marB="45720">
+                    <a:lnL w="2540" cap="flat" cmpd="sng" algn="ctr">
+                      <a:solidFill>
+                        <a:srgbClr val="EEEEEE"/>
+                      </a:solidFill>
+                      <a:prstDash val="solid"/>
+                      <a:round/>
+                      <a:headEnd type="none" w="med" len="med"/>
+                      <a:tailEnd type="none" w="med" len="med"/>
+                    </a:lnL>
+                    <a:lnR w="2540" cap="flat" cmpd="sng" algn="ctr">
+                      <a:solidFill>
+                        <a:srgbClr val="EEEEEE"/>
+                      </a:solidFill>
+                      <a:prstDash val="solid"/>
+                      <a:round/>
+                      <a:headEnd type="none" w="med" len="med"/>
+                      <a:tailEnd type="none" w="med" len="med"/>
+                    </a:lnR>
+                    <a:lnT w="2540" cap="flat" cmpd="sng" algn="ctr">
+                      <a:solidFill>
+                        <a:srgbClr val="EEEEEE"/>
+                      </a:solidFill>
+                      <a:prstDash val="solid"/>
+                      <a:round/>
+                      <a:headEnd type="none" w="med" len="med"/>
+                      <a:tailEnd type="none" w="med" len="med"/>
+                    </a:lnT>
+                    <a:lnB w="2540" cap="flat" cmpd="sng" algn="ctr">
+                      <a:solidFill>
+                        <a:srgbClr val="EEEEEE"/>
+                      </a:solidFill>
+                      <a:prstDash val="solid"/>
+                      <a:round/>
+                      <a:headEnd type="none" w="med" len="med"/>
+                      <a:tailEnd type="none" w="med" len="med"/>
+                    </a:lnB>
+                  </a:tcPr>
+                </a:tc>
+                <a:tc>
+                  <a:txBody>
+                    <a:bodyPr/>
+                    <a:lstStyle/>
+                    <a:p>
+                      <a:pPr algn="ctr" indent="0" marL="0">
+                        <a:buNone/>
+                      </a:pPr>
+                      <a:r>
+                        <a:rPr lang="en-US" sz="500" dirty="0">
+                          <a:solidFill>
+                            <a:srgbClr val="777777"/>
+                          </a:solidFill>
+                          <a:latin typeface="Calibri" pitchFamily="34" charset="0"/>
+                          <a:ea typeface="Calibri" pitchFamily="34" charset="-122"/>
+                          <a:cs typeface="Calibri" pitchFamily="34" charset="-120"/>
+                        </a:rPr>
+                        <a:t>0.46%</a:t>
+                      </a:r>
+                      <a:endParaRPr lang="en-US" sz="500" dirty="0">
+                        <a:latin typeface="Calibri" charset="0"/>
+                        <a:ea typeface="Calibri" charset="0"/>
+                        <a:cs typeface="Calibri" charset="0"/>
+                      </a:endParaRPr>
+                    </a:p>
+                  </a:txBody>
+                  <a:tcPr marL="91440" marR="91440" marT="45720" marB="45720">
+                    <a:lnL w="2540" cap="flat" cmpd="sng" algn="ctr">
+                      <a:solidFill>
+                        <a:srgbClr val="EEEEEE"/>
+                      </a:solidFill>
+                      <a:prstDash val="solid"/>
+                      <a:round/>
+                      <a:headEnd type="none" w="med" len="med"/>
+                      <a:tailEnd type="none" w="med" len="med"/>
+                    </a:lnL>
+                    <a:lnR w="2540" cap="flat" cmpd="sng" algn="ctr">
+                      <a:solidFill>
+                        <a:srgbClr val="EEEEEE"/>
+                      </a:solidFill>
+                      <a:prstDash val="solid"/>
+                      <a:round/>
+                      <a:headEnd type="none" w="med" len="med"/>
+                      <a:tailEnd type="none" w="med" len="med"/>
+                    </a:lnR>
+                    <a:lnT w="2540" cap="flat" cmpd="sng" algn="ctr">
+                      <a:solidFill>
+                        <a:srgbClr val="EEEEEE"/>
+                      </a:solidFill>
+                      <a:prstDash val="solid"/>
+                      <a:round/>
+                      <a:headEnd type="none" w="med" len="med"/>
+                      <a:tailEnd type="none" w="med" len="med"/>
+                    </a:lnT>
+                    <a:lnB w="2540" cap="flat" cmpd="sng" algn="ctr">
+                      <a:solidFill>
+                        <a:srgbClr val="EEEEEE"/>
+                      </a:solidFill>
+                      <a:prstDash val="solid"/>
+                      <a:round/>
+                      <a:headEnd type="none" w="med" len="med"/>
+                      <a:tailEnd type="none" w="med" len="med"/>
+                    </a:lnB>
+                  </a:tcPr>
+                </a:tc>
+                <a:tc>
+                  <a:txBody>
+                    <a:bodyPr/>
+                    <a:lstStyle/>
+                    <a:p>
+                      <a:pPr algn="ctr" indent="0" marL="0">
+                        <a:buNone/>
+                      </a:pPr>
+                      <a:r>
+                        <a:rPr lang="en-US" sz="500" dirty="0">
+                          <a:solidFill>
+                            <a:srgbClr val="777777"/>
+                          </a:solidFill>
+                          <a:latin typeface="Calibri" pitchFamily="34" charset="0"/>
+                          <a:ea typeface="Calibri" pitchFamily="34" charset="-122"/>
+                          <a:cs typeface="Calibri" pitchFamily="34" charset="-120"/>
+                        </a:rPr>
+                        <a:t>0.45%</a:t>
+                      </a:r>
+                      <a:endParaRPr lang="en-US" sz="500" dirty="0">
+                        <a:latin typeface="Calibri" charset="0"/>
+                        <a:ea typeface="Calibri" charset="0"/>
+                        <a:cs typeface="Calibri" charset="0"/>
+                      </a:endParaRPr>
+                    </a:p>
+                  </a:txBody>
+                  <a:tcPr marL="91440" marR="91440" marT="45720" marB="45720">
+                    <a:lnL w="2540" cap="flat" cmpd="sng" algn="ctr">
+                      <a:solidFill>
+                        <a:srgbClr val="EEEEEE"/>
+                      </a:solidFill>
+                      <a:prstDash val="solid"/>
+                      <a:round/>
+                      <a:headEnd type="none" w="med" len="med"/>
+                      <a:tailEnd type="none" w="med" len="med"/>
+                    </a:lnL>
+                    <a:lnR w="2540" cap="flat" cmpd="sng" algn="ctr">
+                      <a:solidFill>
+                        <a:srgbClr val="EEEEEE"/>
+                      </a:solidFill>
+                      <a:prstDash val="solid"/>
+                      <a:round/>
+                      <a:headEnd type="none" w="med" len="med"/>
+                      <a:tailEnd type="none" w="med" len="med"/>
+                    </a:lnR>
+                    <a:lnT w="2540" cap="flat" cmpd="sng" algn="ctr">
+                      <a:solidFill>
+                        <a:srgbClr val="EEEEEE"/>
+                      </a:solidFill>
+                      <a:prstDash val="solid"/>
+                      <a:round/>
+                      <a:headEnd type="none" w="med" len="med"/>
+                      <a:tailEnd type="none" w="med" len="med"/>
+                    </a:lnT>
+                    <a:lnB w="2540" cap="flat" cmpd="sng" algn="ctr">
+                      <a:solidFill>
+                        <a:srgbClr val="EEEEEE"/>
+                      </a:solidFill>
+                      <a:prstDash val="solid"/>
+                      <a:round/>
+                      <a:headEnd type="none" w="med" len="med"/>
+                      <a:tailEnd type="none" w="med" len="med"/>
+                    </a:lnB>
+                  </a:tcPr>
+                </a:tc>
+                <a:tc>
+                  <a:txBody>
+                    <a:bodyPr/>
+                    <a:lstStyle/>
+                    <a:p>
+                      <a:pPr algn="ctr" indent="0" marL="0">
+                        <a:buNone/>
+                      </a:pPr>
+                      <a:r>
+                        <a:rPr lang="en-US" sz="500" dirty="0">
+                          <a:solidFill>
+                            <a:srgbClr val="777777"/>
+                          </a:solidFill>
+                          <a:latin typeface="Calibri" pitchFamily="34" charset="0"/>
+                          <a:ea typeface="Calibri" pitchFamily="34" charset="-122"/>
+                          <a:cs typeface="Calibri" pitchFamily="34" charset="-120"/>
+                        </a:rPr>
+                        <a:t>0.44%</a:t>
+                      </a:r>
+                      <a:endParaRPr lang="en-US" sz="500" dirty="0">
+                        <a:latin typeface="Calibri" charset="0"/>
+                        <a:ea typeface="Calibri" charset="0"/>
+                        <a:cs typeface="Calibri" charset="0"/>
+                      </a:endParaRPr>
+                    </a:p>
+                  </a:txBody>
+                  <a:tcPr marL="91440" marR="91440" marT="45720" marB="45720">
+                    <a:lnL w="2540" cap="flat" cmpd="sng" algn="ctr">
+                      <a:solidFill>
+                        <a:srgbClr val="EEEEEE"/>
+                      </a:solidFill>
+                      <a:prstDash val="solid"/>
+                      <a:round/>
+                      <a:headEnd type="none" w="med" len="med"/>
+                      <a:tailEnd type="none" w="med" len="med"/>
+                    </a:lnL>
+                    <a:lnR w="2540" cap="flat" cmpd="sng" algn="ctr">
+                      <a:solidFill>
+                        <a:srgbClr val="EEEEEE"/>
+                      </a:solidFill>
+                      <a:prstDash val="solid"/>
+                      <a:round/>
+                      <a:headEnd type="none" w="med" len="med"/>
+                      <a:tailEnd type="none" w="med" len="med"/>
+                    </a:lnR>
+                    <a:lnT w="2540" cap="flat" cmpd="sng" algn="ctr">
+                      <a:solidFill>
+                        <a:srgbClr val="EEEEEE"/>
+                      </a:solidFill>
+                      <a:prstDash val="solid"/>
+                      <a:round/>
+                      <a:headEnd type="none" w="med" len="med"/>
+                      <a:tailEnd type="none" w="med" len="med"/>
+                    </a:lnT>
+                    <a:lnB w="2540" cap="flat" cmpd="sng" algn="ctr">
+                      <a:solidFill>
+                        <a:srgbClr val="EEEEEE"/>
+                      </a:solidFill>
+                      <a:prstDash val="solid"/>
+                      <a:round/>
+                      <a:headEnd type="none" w="med" len="med"/>
+                      <a:tailEnd type="none" w="med" len="med"/>
+                    </a:lnB>
+                  </a:tcPr>
+                </a:tc>
+                <a:tc>
+                  <a:txBody>
+                    <a:bodyPr/>
+                    <a:lstStyle/>
+                    <a:p>
+                      <a:pPr algn="ctr" indent="0" marL="0">
+                        <a:buNone/>
+                      </a:pPr>
+                      <a:r>
+                        <a:rPr lang="en-US" sz="500" dirty="0">
+                          <a:solidFill>
+                            <a:srgbClr val="777777"/>
+                          </a:solidFill>
+                          <a:latin typeface="Calibri" pitchFamily="34" charset="0"/>
+                          <a:ea typeface="Calibri" pitchFamily="34" charset="-122"/>
+                          <a:cs typeface="Calibri" pitchFamily="34" charset="-120"/>
+                        </a:rPr>
+                        <a:t>0.43%</a:t>
+                      </a:r>
+                      <a:endParaRPr lang="en-US" sz="500" dirty="0">
+                        <a:latin typeface="Calibri" charset="0"/>
+                        <a:ea typeface="Calibri" charset="0"/>
+                        <a:cs typeface="Calibri" charset="0"/>
+                      </a:endParaRPr>
+                    </a:p>
+                  </a:txBody>
+                  <a:tcPr marL="91440" marR="91440" marT="45720" marB="45720">
+                    <a:lnL w="2540" cap="flat" cmpd="sng" algn="ctr">
+                      <a:solidFill>
+                        <a:srgbClr val="EEEEEE"/>
+                      </a:solidFill>
+                      <a:prstDash val="solid"/>
+                      <a:round/>
+                      <a:headEnd type="none" w="med" len="med"/>
+                      <a:tailEnd type="none" w="med" len="med"/>
+                    </a:lnL>
+                    <a:lnR w="2540" cap="flat" cmpd="sng" algn="ctr">
+                      <a:solidFill>
+                        <a:srgbClr val="EEEEEE"/>
+                      </a:solidFill>
+                      <a:prstDash val="solid"/>
+                      <a:round/>
+                      <a:headEnd type="none" w="med" len="med"/>
+                      <a:tailEnd type="none" w="med" len="med"/>
+                    </a:lnR>
+                    <a:lnT w="2540" cap="flat" cmpd="sng" algn="ctr">
+                      <a:solidFill>
+                        <a:srgbClr val="EEEEEE"/>
+                      </a:solidFill>
+                      <a:prstDash val="solid"/>
+                      <a:round/>
+                      <a:headEnd type="none" w="med" len="med"/>
+                      <a:tailEnd type="none" w="med" len="med"/>
+                    </a:lnT>
+                    <a:lnB w="2540" cap="flat" cmpd="sng" algn="ctr">
+                      <a:solidFill>
+                        <a:srgbClr val="EEEEEE"/>
+                      </a:solidFill>
+                      <a:prstDash val="solid"/>
+                      <a:round/>
+                      <a:headEnd type="none" w="med" len="med"/>
+                      <a:tailEnd type="none" w="med" len="med"/>
+                    </a:lnB>
+                  </a:tcPr>
+                </a:tc>
+                <a:tc>
+                  <a:txBody>
+                    <a:bodyPr/>
+                    <a:lstStyle/>
+                    <a:p>
+                      <a:pPr algn="ctr" indent="0" marL="0">
+                        <a:buNone/>
+                      </a:pPr>
+                      <a:r>
+                        <a:rPr lang="en-US" sz="500" b="1" dirty="0">
+                          <a:solidFill>
+                            <a:srgbClr val="777777"/>
+                          </a:solidFill>
+                          <a:latin typeface="Calibri" pitchFamily="34" charset="0"/>
+                          <a:ea typeface="Calibri" pitchFamily="34" charset="-122"/>
+                          <a:cs typeface="Calibri" pitchFamily="34" charset="-120"/>
+                        </a:rPr>
+                        <a:t>6.38%</a:t>
+                      </a:r>
+                      <a:endParaRPr lang="en-US" sz="500" dirty="0">
+                        <a:latin typeface="Calibri" charset="0"/>
+                        <a:ea typeface="Calibri" charset="0"/>
+                        <a:cs typeface="Calibri" charset="0"/>
+                      </a:endParaRPr>
+                    </a:p>
+                  </a:txBody>
+                  <a:tcPr marL="91440" marR="91440" marT="45720" marB="45720">
+                    <a:lnL w="2540" cap="flat" cmpd="sng" algn="ctr">
+                      <a:solidFill>
+                        <a:srgbClr val="EEEEEE"/>
+                      </a:solidFill>
+                      <a:prstDash val="solid"/>
+                      <a:round/>
+                      <a:headEnd type="none" w="med" len="med"/>
+                      <a:tailEnd type="none" w="med" len="med"/>
+                    </a:lnL>
+                    <a:lnR w="2540" cap="flat" cmpd="sng" algn="ctr">
+                      <a:solidFill>
+                        <a:srgbClr val="EEEEEE"/>
+                      </a:solidFill>
+                      <a:prstDash val="solid"/>
+                      <a:round/>
+                      <a:headEnd type="none" w="med" len="med"/>
+                      <a:tailEnd type="none" w="med" len="med"/>
+                    </a:lnR>
+                    <a:lnT w="2540" cap="flat" cmpd="sng" algn="ctr">
+                      <a:solidFill>
+                        <a:srgbClr val="EEEEEE"/>
+                      </a:solidFill>
+                      <a:prstDash val="solid"/>
+                      <a:round/>
+                      <a:headEnd type="none" w="med" len="med"/>
+                      <a:tailEnd type="none" w="med" len="med"/>
+                    </a:lnT>
+                    <a:lnB w="2540" cap="flat" cmpd="sng" algn="ctr">
+                      <a:solidFill>
+                        <a:srgbClr val="EEEEEE"/>
+                      </a:solidFill>
+                      <a:prstDash val="solid"/>
+                      <a:round/>
+                      <a:headEnd type="none" w="med" len="med"/>
+                      <a:tailEnd type="none" w="med" len="med"/>
+                    </a:lnB>
+                  </a:tcPr>
+                </a:tc>
+              </a:tr>
+              <a:tr h="123444">
+                <a:tc>
+                  <a:txBody>
+                    <a:bodyPr/>
+                    <a:lstStyle/>
+                    <a:p>
+                      <a:pPr algn="l" indent="0" marL="0">
+                        <a:buNone/>
+                      </a:pPr>
+                      <a:endParaRPr lang="en-US" sz="500" dirty="0">
+                        <a:latin typeface="Calibri" charset="0"/>
+                        <a:ea typeface="Calibri" charset="0"/>
+                        <a:cs typeface="Calibri" charset="0"/>
+                      </a:endParaRPr>
+                    </a:p>
+                  </a:txBody>
+                  <a:tcPr marL="91440" marR="91440" marT="45720" marB="45720">
+                    <a:lnL w="2540" cap="flat" cmpd="sng" algn="ctr">
+                      <a:solidFill>
+                        <a:srgbClr val="EEEEEE"/>
+                      </a:solidFill>
+                      <a:prstDash val="solid"/>
+                      <a:round/>
+                      <a:headEnd type="none" w="med" len="med"/>
+                      <a:tailEnd type="none" w="med" len="med"/>
+                    </a:lnL>
+                    <a:lnR w="2540" cap="flat" cmpd="sng" algn="ctr">
+                      <a:solidFill>
+                        <a:srgbClr val="EEEEEE"/>
+                      </a:solidFill>
+                      <a:prstDash val="solid"/>
+                      <a:round/>
+                      <a:headEnd type="none" w="med" len="med"/>
+                      <a:tailEnd type="none" w="med" len="med"/>
+                    </a:lnR>
+                    <a:lnT w="2540" cap="flat" cmpd="sng" algn="ctr">
+                      <a:solidFill>
+                        <a:srgbClr val="EEEEEE"/>
+                      </a:solidFill>
+                      <a:prstDash val="solid"/>
+                      <a:round/>
+                      <a:headEnd type="none" w="med" len="med"/>
+                      <a:tailEnd type="none" w="med" len="med"/>
+                    </a:lnT>
+                    <a:lnB w="2540" cap="flat" cmpd="sng" algn="ctr">
+                      <a:solidFill>
+                        <a:srgbClr val="EEEEEE"/>
+                      </a:solidFill>
+                      <a:prstDash val="solid"/>
+                      <a:round/>
+                      <a:headEnd type="none" w="med" len="med"/>
+                      <a:tailEnd type="none" w="med" len="med"/>
+                    </a:lnB>
+                  </a:tcPr>
+                </a:tc>
+                <a:tc>
+                  <a:txBody>
+                    <a:bodyPr/>
+                    <a:lstStyle/>
+                    <a:p>
+                      <a:pPr algn="l" indent="0" marL="0">
+                        <a:buNone/>
+                      </a:pPr>
+                      <a:r>
+                        <a:rPr lang="en-US" sz="500" dirty="0">
+                          <a:solidFill>
+                            <a:srgbClr val="999999"/>
+                          </a:solidFill>
+                          <a:latin typeface="Calibri" pitchFamily="34" charset="0"/>
+                          <a:ea typeface="Calibri" pitchFamily="34" charset="-122"/>
+                          <a:cs typeface="Calibri" pitchFamily="34" charset="-120"/>
+                        </a:rPr>
+                        <a:t>Competencia</a:t>
+                      </a:r>
+                      <a:endParaRPr lang="en-US" sz="500" dirty="0">
+                        <a:latin typeface="Calibri" charset="0"/>
+                        <a:ea typeface="Calibri" charset="0"/>
+                        <a:cs typeface="Calibri" charset="0"/>
+                      </a:endParaRPr>
+                    </a:p>
+                  </a:txBody>
+                  <a:tcPr marL="91440" marR="91440" marT="45720" marB="45720">
+                    <a:lnL w="2540" cap="flat" cmpd="sng" algn="ctr">
+                      <a:solidFill>
+                        <a:srgbClr val="EEEEEE"/>
+                      </a:solidFill>
+                      <a:prstDash val="solid"/>
+                      <a:round/>
+                      <a:headEnd type="none" w="med" len="med"/>
+                      <a:tailEnd type="none" w="med" len="med"/>
+                    </a:lnL>
+                    <a:lnR w="2540" cap="flat" cmpd="sng" algn="ctr">
+                      <a:solidFill>
+                        <a:srgbClr val="EEEEEE"/>
+                      </a:solidFill>
+                      <a:prstDash val="solid"/>
+                      <a:round/>
+                      <a:headEnd type="none" w="med" len="med"/>
+                      <a:tailEnd type="none" w="med" len="med"/>
+                    </a:lnR>
+                    <a:lnT w="2540" cap="flat" cmpd="sng" algn="ctr">
+                      <a:solidFill>
+                        <a:srgbClr val="EEEEEE"/>
+                      </a:solidFill>
+                      <a:prstDash val="solid"/>
+                      <a:round/>
+                      <a:headEnd type="none" w="med" len="med"/>
+                      <a:tailEnd type="none" w="med" len="med"/>
+                    </a:lnT>
+                    <a:lnB w="2540" cap="flat" cmpd="sng" algn="ctr">
+                      <a:solidFill>
+                        <a:srgbClr val="EEEEEE"/>
+                      </a:solidFill>
+                      <a:prstDash val="solid"/>
+                      <a:round/>
+                      <a:headEnd type="none" w="med" len="med"/>
+                      <a:tailEnd type="none" w="med" len="med"/>
+                    </a:lnB>
+                  </a:tcPr>
+                </a:tc>
+                <a:tc>
+                  <a:txBody>
+                    <a:bodyPr/>
+                    <a:lstStyle/>
+                    <a:p>
+                      <a:pPr algn="ctr" indent="0" marL="0">
+                        <a:buNone/>
+                      </a:pPr>
+                      <a:r>
+                        <a:rPr lang="en-US" sz="500" dirty="0">
+                          <a:solidFill>
+                            <a:srgbClr val="999999"/>
+                          </a:solidFill>
+                          <a:latin typeface="Calibri" pitchFamily="34" charset="0"/>
+                          <a:ea typeface="Calibri" pitchFamily="34" charset="-122"/>
+                          <a:cs typeface="Calibri" pitchFamily="34" charset="-120"/>
+                        </a:rPr>
+                        <a:t>0.00%</a:t>
+                      </a:r>
+                      <a:endParaRPr lang="en-US" sz="500" dirty="0">
+                        <a:latin typeface="Calibri" charset="0"/>
+                        <a:ea typeface="Calibri" charset="0"/>
+                        <a:cs typeface="Calibri" charset="0"/>
+                      </a:endParaRPr>
+                    </a:p>
+                  </a:txBody>
+                  <a:tcPr marL="91440" marR="91440" marT="45720" marB="45720">
+                    <a:lnL w="2540" cap="flat" cmpd="sng" algn="ctr">
+                      <a:solidFill>
+                        <a:srgbClr val="EEEEEE"/>
+                      </a:solidFill>
+                      <a:prstDash val="solid"/>
+                      <a:round/>
+                      <a:headEnd type="none" w="med" len="med"/>
+                      <a:tailEnd type="none" w="med" len="med"/>
+                    </a:lnL>
+                    <a:lnR w="2540" cap="flat" cmpd="sng" algn="ctr">
+                      <a:solidFill>
+                        <a:srgbClr val="EEEEEE"/>
+                      </a:solidFill>
+                      <a:prstDash val="solid"/>
+                      <a:round/>
+                      <a:headEnd type="none" w="med" len="med"/>
+                      <a:tailEnd type="none" w="med" len="med"/>
+                    </a:lnR>
+                    <a:lnT w="2540" cap="flat" cmpd="sng" algn="ctr">
+                      <a:solidFill>
+                        <a:srgbClr val="EEEEEE"/>
+                      </a:solidFill>
+                      <a:prstDash val="solid"/>
+                      <a:round/>
+                      <a:headEnd type="none" w="med" len="med"/>
+                      <a:tailEnd type="none" w="med" len="med"/>
+                    </a:lnT>
+                    <a:lnB w="2540" cap="flat" cmpd="sng" algn="ctr">
+                      <a:solidFill>
+                        <a:srgbClr val="EEEEEE"/>
+                      </a:solidFill>
+                      <a:prstDash val="solid"/>
+                      <a:round/>
+                      <a:headEnd type="none" w="med" len="med"/>
+                      <a:tailEnd type="none" w="med" len="med"/>
+                    </a:lnB>
+                  </a:tcPr>
+                </a:tc>
+                <a:tc>
+                  <a:txBody>
+                    <a:bodyPr/>
+                    <a:lstStyle/>
+                    <a:p>
+                      <a:pPr algn="ctr" indent="0" marL="0">
+                        <a:buNone/>
+                      </a:pPr>
+                      <a:r>
+                        <a:rPr lang="en-US" sz="500" dirty="0">
+                          <a:solidFill>
+                            <a:srgbClr val="999999"/>
+                          </a:solidFill>
+                          <a:latin typeface="Calibri" pitchFamily="34" charset="0"/>
+                          <a:ea typeface="Calibri" pitchFamily="34" charset="-122"/>
+                          <a:cs typeface="Calibri" pitchFamily="34" charset="-120"/>
+                        </a:rPr>
+                        <a:t>0.01%</a:t>
+                      </a:r>
+                      <a:endParaRPr lang="en-US" sz="500" dirty="0">
+                        <a:latin typeface="Calibri" charset="0"/>
+                        <a:ea typeface="Calibri" charset="0"/>
+                        <a:cs typeface="Calibri" charset="0"/>
+                      </a:endParaRPr>
+                    </a:p>
+                  </a:txBody>
+                  <a:tcPr marL="91440" marR="91440" marT="45720" marB="45720">
+                    <a:lnL w="2540" cap="flat" cmpd="sng" algn="ctr">
+                      <a:solidFill>
+                        <a:srgbClr val="EEEEEE"/>
+                      </a:solidFill>
+                      <a:prstDash val="solid"/>
+                      <a:round/>
+                      <a:headEnd type="none" w="med" len="med"/>
+                      <a:tailEnd type="none" w="med" len="med"/>
+                    </a:lnL>
+                    <a:lnR w="2540" cap="flat" cmpd="sng" algn="ctr">
+                      <a:solidFill>
+                        <a:srgbClr val="EEEEEE"/>
+                      </a:solidFill>
+                      <a:prstDash val="solid"/>
+                      <a:round/>
+                      <a:headEnd type="none" w="med" len="med"/>
+                      <a:tailEnd type="none" w="med" len="med"/>
+                    </a:lnR>
+                    <a:lnT w="2540" cap="flat" cmpd="sng" algn="ctr">
+                      <a:solidFill>
+                        <a:srgbClr val="EEEEEE"/>
+                      </a:solidFill>
+                      <a:prstDash val="solid"/>
+                      <a:round/>
+                      <a:headEnd type="none" w="med" len="med"/>
+                      <a:tailEnd type="none" w="med" len="med"/>
+                    </a:lnT>
+                    <a:lnB w="2540" cap="flat" cmpd="sng" algn="ctr">
+                      <a:solidFill>
+                        <a:srgbClr val="EEEEEE"/>
+                      </a:solidFill>
+                      <a:prstDash val="solid"/>
+                      <a:round/>
+                      <a:headEnd type="none" w="med" len="med"/>
+                      <a:tailEnd type="none" w="med" len="med"/>
+                    </a:lnB>
+                  </a:tcPr>
+                </a:tc>
+                <a:tc>
+                  <a:txBody>
+                    <a:bodyPr/>
+                    <a:lstStyle/>
+                    <a:p>
+                      <a:pPr algn="ctr" indent="0" marL="0">
+                        <a:buNone/>
+                      </a:pPr>
+                      <a:r>
+                        <a:rPr lang="en-US" sz="500" dirty="0">
+                          <a:solidFill>
+                            <a:srgbClr val="999999"/>
+                          </a:solidFill>
+                          <a:latin typeface="Calibri" pitchFamily="34" charset="0"/>
+                          <a:ea typeface="Calibri" pitchFamily="34" charset="-122"/>
+                          <a:cs typeface="Calibri" pitchFamily="34" charset="-120"/>
+                        </a:rPr>
+                        <a:t>0.00%</a:t>
+                      </a:r>
+                      <a:endParaRPr lang="en-US" sz="500" dirty="0">
+                        <a:latin typeface="Calibri" charset="0"/>
+                        <a:ea typeface="Calibri" charset="0"/>
+                        <a:cs typeface="Calibri" charset="0"/>
+                      </a:endParaRPr>
+                    </a:p>
+                  </a:txBody>
+                  <a:tcPr marL="91440" marR="91440" marT="45720" marB="45720">
+                    <a:lnL w="2540" cap="flat" cmpd="sng" algn="ctr">
+                      <a:solidFill>
+                        <a:srgbClr val="EEEEEE"/>
+                      </a:solidFill>
+                      <a:prstDash val="solid"/>
+                      <a:round/>
+                      <a:headEnd type="none" w="med" len="med"/>
+                      <a:tailEnd type="none" w="med" len="med"/>
+                    </a:lnL>
+                    <a:lnR w="2540" cap="flat" cmpd="sng" algn="ctr">
+                      <a:solidFill>
+                        <a:srgbClr val="EEEEEE"/>
+                      </a:solidFill>
+                      <a:prstDash val="solid"/>
+                      <a:round/>
+                      <a:headEnd type="none" w="med" len="med"/>
+                      <a:tailEnd type="none" w="med" len="med"/>
+                    </a:lnR>
+                    <a:lnT w="2540" cap="flat" cmpd="sng" algn="ctr">
+                      <a:solidFill>
+                        <a:srgbClr val="EEEEEE"/>
+                      </a:solidFill>
+                      <a:prstDash val="solid"/>
+                      <a:round/>
+                      <a:headEnd type="none" w="med" len="med"/>
+                      <a:tailEnd type="none" w="med" len="med"/>
+                    </a:lnT>
+                    <a:lnB w="2540" cap="flat" cmpd="sng" algn="ctr">
+                      <a:solidFill>
+                        <a:srgbClr val="EEEEEE"/>
+                      </a:solidFill>
+                      <a:prstDash val="solid"/>
+                      <a:round/>
+                      <a:headEnd type="none" w="med" len="med"/>
+                      <a:tailEnd type="none" w="med" len="med"/>
+                    </a:lnB>
+                  </a:tcPr>
+                </a:tc>
+                <a:tc>
+                  <a:txBody>
+                    <a:bodyPr/>
+                    <a:lstStyle/>
+                    <a:p>
+                      <a:pPr algn="ctr" indent="0" marL="0">
+                        <a:buNone/>
+                      </a:pPr>
+                      <a:r>
+                        <a:rPr lang="en-US" sz="500" dirty="0">
+                          <a:solidFill>
+                            <a:srgbClr val="999999"/>
+                          </a:solidFill>
+                          <a:latin typeface="Calibri" pitchFamily="34" charset="0"/>
+                          <a:ea typeface="Calibri" pitchFamily="34" charset="-122"/>
+                          <a:cs typeface="Calibri" pitchFamily="34" charset="-120"/>
+                        </a:rPr>
+                        <a:t>0.00%</a:t>
+                      </a:r>
+                      <a:endParaRPr lang="en-US" sz="500" dirty="0">
+                        <a:latin typeface="Calibri" charset="0"/>
+                        <a:ea typeface="Calibri" charset="0"/>
+                        <a:cs typeface="Calibri" charset="0"/>
+                      </a:endParaRPr>
+                    </a:p>
+                  </a:txBody>
+                  <a:tcPr marL="91440" marR="91440" marT="45720" marB="45720">
+                    <a:lnL w="2540" cap="flat" cmpd="sng" algn="ctr">
+                      <a:solidFill>
+                        <a:srgbClr val="EEEEEE"/>
+                      </a:solidFill>
+                      <a:prstDash val="solid"/>
+                      <a:round/>
+                      <a:headEnd type="none" w="med" len="med"/>
+                      <a:tailEnd type="none" w="med" len="med"/>
+                    </a:lnL>
+                    <a:lnR w="2540" cap="flat" cmpd="sng" algn="ctr">
+                      <a:solidFill>
+                        <a:srgbClr val="EEEEEE"/>
+                      </a:solidFill>
+                      <a:prstDash val="solid"/>
+                      <a:round/>
+                      <a:headEnd type="none" w="med" len="med"/>
+                      <a:tailEnd type="none" w="med" len="med"/>
+                    </a:lnR>
+                    <a:lnT w="2540" cap="flat" cmpd="sng" algn="ctr">
+                      <a:solidFill>
+                        <a:srgbClr val="EEEEEE"/>
+                      </a:solidFill>
+                      <a:prstDash val="solid"/>
+                      <a:round/>
+                      <a:headEnd type="none" w="med" len="med"/>
+                      <a:tailEnd type="none" w="med" len="med"/>
+                    </a:lnT>
+                    <a:lnB w="2540" cap="flat" cmpd="sng" algn="ctr">
+                      <a:solidFill>
+                        <a:srgbClr val="EEEEEE"/>
+                      </a:solidFill>
+                      <a:prstDash val="solid"/>
+                      <a:round/>
+                      <a:headEnd type="none" w="med" len="med"/>
+                      <a:tailEnd type="none" w="med" len="med"/>
+                    </a:lnB>
+                  </a:tcPr>
+                </a:tc>
+                <a:tc>
+                  <a:txBody>
+                    <a:bodyPr/>
+                    <a:lstStyle/>
+                    <a:p>
+                      <a:pPr algn="ctr" indent="0" marL="0">
+                        <a:buNone/>
+                      </a:pPr>
+                      <a:r>
+                        <a:rPr lang="en-US" sz="500" dirty="0">
+                          <a:solidFill>
+                            <a:srgbClr val="999999"/>
+                          </a:solidFill>
+                          <a:latin typeface="Calibri" pitchFamily="34" charset="0"/>
+                          <a:ea typeface="Calibri" pitchFamily="34" charset="-122"/>
+                          <a:cs typeface="Calibri" pitchFamily="34" charset="-120"/>
+                        </a:rPr>
+                        <a:t>0.00%</a:t>
+                      </a:r>
+                      <a:endParaRPr lang="en-US" sz="500" dirty="0">
+                        <a:latin typeface="Calibri" charset="0"/>
+                        <a:ea typeface="Calibri" charset="0"/>
+                        <a:cs typeface="Calibri" charset="0"/>
+                      </a:endParaRPr>
+                    </a:p>
+                  </a:txBody>
+                  <a:tcPr marL="91440" marR="91440" marT="45720" marB="45720">
+                    <a:lnL w="2540" cap="flat" cmpd="sng" algn="ctr">
+                      <a:solidFill>
+                        <a:srgbClr val="EEEEEE"/>
+                      </a:solidFill>
+                      <a:prstDash val="solid"/>
+                      <a:round/>
+                      <a:headEnd type="none" w="med" len="med"/>
+                      <a:tailEnd type="none" w="med" len="med"/>
+                    </a:lnL>
+                    <a:lnR w="2540" cap="flat" cmpd="sng" algn="ctr">
+                      <a:solidFill>
+                        <a:srgbClr val="EEEEEE"/>
+                      </a:solidFill>
+                      <a:prstDash val="solid"/>
+                      <a:round/>
+                      <a:headEnd type="none" w="med" len="med"/>
+                      <a:tailEnd type="none" w="med" len="med"/>
+                    </a:lnR>
+                    <a:lnT w="2540" cap="flat" cmpd="sng" algn="ctr">
+                      <a:solidFill>
+                        <a:srgbClr val="EEEEEE"/>
+                      </a:solidFill>
+                      <a:prstDash val="solid"/>
+                      <a:round/>
+                      <a:headEnd type="none" w="med" len="med"/>
+                      <a:tailEnd type="none" w="med" len="med"/>
+                    </a:lnT>
+                    <a:lnB w="2540" cap="flat" cmpd="sng" algn="ctr">
+                      <a:solidFill>
+                        <a:srgbClr val="EEEEEE"/>
+                      </a:solidFill>
+                      <a:prstDash val="solid"/>
+                      <a:round/>
+                      <a:headEnd type="none" w="med" len="med"/>
+                      <a:tailEnd type="none" w="med" len="med"/>
+                    </a:lnB>
+                  </a:tcPr>
+                </a:tc>
+                <a:tc>
+                  <a:txBody>
+                    <a:bodyPr/>
+                    <a:lstStyle/>
+                    <a:p>
+                      <a:pPr algn="ctr" indent="0" marL="0">
+                        <a:buNone/>
+                      </a:pPr>
+                      <a:r>
+                        <a:rPr lang="en-US" sz="500" dirty="0">
+                          <a:solidFill>
+                            <a:srgbClr val="999999"/>
+                          </a:solidFill>
+                          <a:latin typeface="Calibri" pitchFamily="34" charset="0"/>
+                          <a:ea typeface="Calibri" pitchFamily="34" charset="-122"/>
+                          <a:cs typeface="Calibri" pitchFamily="34" charset="-120"/>
+                        </a:rPr>
+                        <a:t>0.00%</a:t>
+                      </a:r>
+                      <a:endParaRPr lang="en-US" sz="500" dirty="0">
+                        <a:latin typeface="Calibri" charset="0"/>
+                        <a:ea typeface="Calibri" charset="0"/>
+                        <a:cs typeface="Calibri" charset="0"/>
+                      </a:endParaRPr>
+                    </a:p>
+                  </a:txBody>
+                  <a:tcPr marL="91440" marR="91440" marT="45720" marB="45720">
+                    <a:lnL w="2540" cap="flat" cmpd="sng" algn="ctr">
+                      <a:solidFill>
+                        <a:srgbClr val="EEEEEE"/>
+                      </a:solidFill>
+                      <a:prstDash val="solid"/>
+                      <a:round/>
+                      <a:headEnd type="none" w="med" len="med"/>
+                      <a:tailEnd type="none" w="med" len="med"/>
+                    </a:lnL>
+                    <a:lnR w="2540" cap="flat" cmpd="sng" algn="ctr">
+                      <a:solidFill>
+                        <a:srgbClr val="EEEEEE"/>
+                      </a:solidFill>
+                      <a:prstDash val="solid"/>
+                      <a:round/>
+                      <a:headEnd type="none" w="med" len="med"/>
+                      <a:tailEnd type="none" w="med" len="med"/>
+                    </a:lnR>
+                    <a:lnT w="2540" cap="flat" cmpd="sng" algn="ctr">
+                      <a:solidFill>
+                        <a:srgbClr val="EEEEEE"/>
+                      </a:solidFill>
+                      <a:prstDash val="solid"/>
+                      <a:round/>
+                      <a:headEnd type="none" w="med" len="med"/>
+                      <a:tailEnd type="none" w="med" len="med"/>
+                    </a:lnT>
+                    <a:lnB w="2540" cap="flat" cmpd="sng" algn="ctr">
+                      <a:solidFill>
+                        <a:srgbClr val="EEEEEE"/>
+                      </a:solidFill>
+                      <a:prstDash val="solid"/>
+                      <a:round/>
+                      <a:headEnd type="none" w="med" len="med"/>
+                      <a:tailEnd type="none" w="med" len="med"/>
+                    </a:lnB>
+                  </a:tcPr>
+                </a:tc>
+                <a:tc>
+                  <a:txBody>
+                    <a:bodyPr/>
+                    <a:lstStyle/>
+                    <a:p>
+                      <a:pPr algn="ctr" indent="0" marL="0">
+                        <a:buNone/>
+                      </a:pPr>
+                      <a:r>
+                        <a:rPr lang="en-US" sz="500" dirty="0">
+                          <a:solidFill>
+                            <a:srgbClr val="999999"/>
+                          </a:solidFill>
+                          <a:latin typeface="Calibri" pitchFamily="34" charset="0"/>
+                          <a:ea typeface="Calibri" pitchFamily="34" charset="-122"/>
+                          <a:cs typeface="Calibri" pitchFamily="34" charset="-120"/>
+                        </a:rPr>
+                        <a:t>0.00%</a:t>
+                      </a:r>
+                      <a:endParaRPr lang="en-US" sz="500" dirty="0">
+                        <a:latin typeface="Calibri" charset="0"/>
+                        <a:ea typeface="Calibri" charset="0"/>
+                        <a:cs typeface="Calibri" charset="0"/>
+                      </a:endParaRPr>
+                    </a:p>
+                  </a:txBody>
+                  <a:tcPr marL="91440" marR="91440" marT="45720" marB="45720">
+                    <a:lnL w="2540" cap="flat" cmpd="sng" algn="ctr">
+                      <a:solidFill>
+                        <a:srgbClr val="EEEEEE"/>
+                      </a:solidFill>
+                      <a:prstDash val="solid"/>
+                      <a:round/>
+                      <a:headEnd type="none" w="med" len="med"/>
+                      <a:tailEnd type="none" w="med" len="med"/>
+                    </a:lnL>
+                    <a:lnR w="2540" cap="flat" cmpd="sng" algn="ctr">
+                      <a:solidFill>
+                        <a:srgbClr val="EEEEEE"/>
+                      </a:solidFill>
+                      <a:prstDash val="solid"/>
+                      <a:round/>
+                      <a:headEnd type="none" w="med" len="med"/>
+                      <a:tailEnd type="none" w="med" len="med"/>
+                    </a:lnR>
+                    <a:lnT w="2540" cap="flat" cmpd="sng" algn="ctr">
+                      <a:solidFill>
+                        <a:srgbClr val="EEEEEE"/>
+                      </a:solidFill>
+                      <a:prstDash val="solid"/>
+                      <a:round/>
+                      <a:headEnd type="none" w="med" len="med"/>
+                      <a:tailEnd type="none" w="med" len="med"/>
+                    </a:lnT>
+                    <a:lnB w="2540" cap="flat" cmpd="sng" algn="ctr">
+                      <a:solidFill>
+                        <a:srgbClr val="EEEEEE"/>
+                      </a:solidFill>
+                      <a:prstDash val="solid"/>
+                      <a:round/>
+                      <a:headEnd type="none" w="med" len="med"/>
+                      <a:tailEnd type="none" w="med" len="med"/>
+                    </a:lnB>
+                  </a:tcPr>
+                </a:tc>
+                <a:tc>
+                  <a:txBody>
+                    <a:bodyPr/>
+                    <a:lstStyle/>
+                    <a:p>
+                      <a:pPr algn="ctr" indent="0" marL="0">
+                        <a:buNone/>
+                      </a:pPr>
+                      <a:r>
+                        <a:rPr lang="en-US" sz="500" dirty="0">
+                          <a:solidFill>
+                            <a:srgbClr val="999999"/>
+                          </a:solidFill>
+                          <a:latin typeface="Calibri" pitchFamily="34" charset="0"/>
+                          <a:ea typeface="Calibri" pitchFamily="34" charset="-122"/>
+                          <a:cs typeface="Calibri" pitchFamily="34" charset="-120"/>
+                        </a:rPr>
+                        <a:t>0.00%</a:t>
+                      </a:r>
+                      <a:endParaRPr lang="en-US" sz="500" dirty="0">
+                        <a:latin typeface="Calibri" charset="0"/>
+                        <a:ea typeface="Calibri" charset="0"/>
+                        <a:cs typeface="Calibri" charset="0"/>
+                      </a:endParaRPr>
+                    </a:p>
+                  </a:txBody>
+                  <a:tcPr marL="91440" marR="91440" marT="45720" marB="45720">
+                    <a:lnL w="2540" cap="flat" cmpd="sng" algn="ctr">
+                      <a:solidFill>
+                        <a:srgbClr val="EEEEEE"/>
+                      </a:solidFill>
+                      <a:prstDash val="solid"/>
+                      <a:round/>
+                      <a:headEnd type="none" w="med" len="med"/>
+                      <a:tailEnd type="none" w="med" len="med"/>
+                    </a:lnL>
+                    <a:lnR w="2540" cap="flat" cmpd="sng" algn="ctr">
+                      <a:solidFill>
+                        <a:srgbClr val="EEEEEE"/>
+                      </a:solidFill>
+                      <a:prstDash val="solid"/>
+                      <a:round/>
+                      <a:headEnd type="none" w="med" len="med"/>
+                      <a:tailEnd type="none" w="med" len="med"/>
+                    </a:lnR>
+                    <a:lnT w="2540" cap="flat" cmpd="sng" algn="ctr">
+                      <a:solidFill>
+                        <a:srgbClr val="EEEEEE"/>
+                      </a:solidFill>
+                      <a:prstDash val="solid"/>
+                      <a:round/>
+                      <a:headEnd type="none" w="med" len="med"/>
+                      <a:tailEnd type="none" w="med" len="med"/>
+                    </a:lnT>
+                    <a:lnB w="2540" cap="flat" cmpd="sng" algn="ctr">
+                      <a:solidFill>
+                        <a:srgbClr val="EEEEEE"/>
+                      </a:solidFill>
+                      <a:prstDash val="solid"/>
+                      <a:round/>
+                      <a:headEnd type="none" w="med" len="med"/>
+                      <a:tailEnd type="none" w="med" len="med"/>
+                    </a:lnB>
+                  </a:tcPr>
+                </a:tc>
+                <a:tc>
+                  <a:txBody>
+                    <a:bodyPr/>
+                    <a:lstStyle/>
+                    <a:p>
+                      <a:pPr algn="ctr" indent="0" marL="0">
+                        <a:buNone/>
+                      </a:pPr>
+                      <a:r>
+                        <a:rPr lang="en-US" sz="500" dirty="0">
+                          <a:solidFill>
+                            <a:srgbClr val="999999"/>
+                          </a:solidFill>
+                          <a:latin typeface="Calibri" pitchFamily="34" charset="0"/>
+                          <a:ea typeface="Calibri" pitchFamily="34" charset="-122"/>
+                          <a:cs typeface="Calibri" pitchFamily="34" charset="-120"/>
+                        </a:rPr>
+                        <a:t>0.00%</a:t>
+                      </a:r>
+                      <a:endParaRPr lang="en-US" sz="500" dirty="0">
+                        <a:latin typeface="Calibri" charset="0"/>
+                        <a:ea typeface="Calibri" charset="0"/>
+                        <a:cs typeface="Calibri" charset="0"/>
+                      </a:endParaRPr>
+                    </a:p>
+                  </a:txBody>
+                  <a:tcPr marL="91440" marR="91440" marT="45720" marB="45720">
+                    <a:lnL w="2540" cap="flat" cmpd="sng" algn="ctr">
+                      <a:solidFill>
+                        <a:srgbClr val="EEEEEE"/>
+                      </a:solidFill>
+                      <a:prstDash val="solid"/>
+                      <a:round/>
+                      <a:headEnd type="none" w="med" len="med"/>
+                      <a:tailEnd type="none" w="med" len="med"/>
+                    </a:lnL>
+                    <a:lnR w="2540" cap="flat" cmpd="sng" algn="ctr">
+                      <a:solidFill>
+                        <a:srgbClr val="EEEEEE"/>
+                      </a:solidFill>
+                      <a:prstDash val="solid"/>
+                      <a:round/>
+                      <a:headEnd type="none" w="med" len="med"/>
+                      <a:tailEnd type="none" w="med" len="med"/>
+                    </a:lnR>
+                    <a:lnT w="2540" cap="flat" cmpd="sng" algn="ctr">
+                      <a:solidFill>
+                        <a:srgbClr val="EEEEEE"/>
+                      </a:solidFill>
+                      <a:prstDash val="solid"/>
+                      <a:round/>
+                      <a:headEnd type="none" w="med" len="med"/>
+                      <a:tailEnd type="none" w="med" len="med"/>
+                    </a:lnT>
+                    <a:lnB w="2540" cap="flat" cmpd="sng" algn="ctr">
+                      <a:solidFill>
+                        <a:srgbClr val="EEEEEE"/>
+                      </a:solidFill>
+                      <a:prstDash val="solid"/>
+                      <a:round/>
+                      <a:headEnd type="none" w="med" len="med"/>
+                      <a:tailEnd type="none" w="med" len="med"/>
+                    </a:lnB>
+                  </a:tcPr>
+                </a:tc>
+                <a:tc>
+                  <a:txBody>
+                    <a:bodyPr/>
+                    <a:lstStyle/>
+                    <a:p>
+                      <a:pPr algn="ctr" indent="0" marL="0">
+                        <a:buNone/>
+                      </a:pPr>
+                      <a:r>
+                        <a:rPr lang="en-US" sz="500" dirty="0">
+                          <a:solidFill>
+                            <a:srgbClr val="999999"/>
+                          </a:solidFill>
+                          <a:latin typeface="Calibri" pitchFamily="34" charset="0"/>
+                          <a:ea typeface="Calibri" pitchFamily="34" charset="-122"/>
+                          <a:cs typeface="Calibri" pitchFamily="34" charset="-120"/>
+                        </a:rPr>
+                        <a:t>0.00%</a:t>
+                      </a:r>
+                      <a:endParaRPr lang="en-US" sz="500" dirty="0">
+                        <a:latin typeface="Calibri" charset="0"/>
+                        <a:ea typeface="Calibri" charset="0"/>
+                        <a:cs typeface="Calibri" charset="0"/>
+                      </a:endParaRPr>
+                    </a:p>
+                  </a:txBody>
+                  <a:tcPr marL="91440" marR="91440" marT="45720" marB="45720">
+                    <a:lnL w="2540" cap="flat" cmpd="sng" algn="ctr">
+                      <a:solidFill>
+                        <a:srgbClr val="EEEEEE"/>
+                      </a:solidFill>
+                      <a:prstDash val="solid"/>
+                      <a:round/>
+                      <a:headEnd type="none" w="med" len="med"/>
+                      <a:tailEnd type="none" w="med" len="med"/>
+                    </a:lnL>
+                    <a:lnR w="2540" cap="flat" cmpd="sng" algn="ctr">
+                      <a:solidFill>
+                        <a:srgbClr val="EEEEEE"/>
+                      </a:solidFill>
+                      <a:prstDash val="solid"/>
+                      <a:round/>
+                      <a:headEnd type="none" w="med" len="med"/>
+                      <a:tailEnd type="none" w="med" len="med"/>
+                    </a:lnR>
+                    <a:lnT w="2540" cap="flat" cmpd="sng" algn="ctr">
+                      <a:solidFill>
+                        <a:srgbClr val="EEEEEE"/>
+                      </a:solidFill>
+                      <a:prstDash val="solid"/>
+                      <a:round/>
+                      <a:headEnd type="none" w="med" len="med"/>
+                      <a:tailEnd type="none" w="med" len="med"/>
+                    </a:lnT>
+                    <a:lnB w="2540" cap="flat" cmpd="sng" algn="ctr">
+                      <a:solidFill>
+                        <a:srgbClr val="EEEEEE"/>
+                      </a:solidFill>
+                      <a:prstDash val="solid"/>
+                      <a:round/>
+                      <a:headEnd type="none" w="med" len="med"/>
+                      <a:tailEnd type="none" w="med" len="med"/>
+                    </a:lnB>
+                  </a:tcPr>
+                </a:tc>
+                <a:tc>
+                  <a:txBody>
+                    <a:bodyPr/>
+                    <a:lstStyle/>
+                    <a:p>
+                      <a:pPr algn="ctr" indent="0" marL="0">
+                        <a:buNone/>
+                      </a:pPr>
+                      <a:r>
+                        <a:rPr lang="en-US" sz="500" dirty="0">
+                          <a:solidFill>
+                            <a:srgbClr val="999999"/>
+                          </a:solidFill>
+                          <a:latin typeface="Calibri" pitchFamily="34" charset="0"/>
+                          <a:ea typeface="Calibri" pitchFamily="34" charset="-122"/>
+                          <a:cs typeface="Calibri" pitchFamily="34" charset="-120"/>
+                        </a:rPr>
+                        <a:t>0.00%</a:t>
+                      </a:r>
+                      <a:endParaRPr lang="en-US" sz="500" dirty="0">
+                        <a:latin typeface="Calibri" charset="0"/>
+                        <a:ea typeface="Calibri" charset="0"/>
+                        <a:cs typeface="Calibri" charset="0"/>
+                      </a:endParaRPr>
+                    </a:p>
+                  </a:txBody>
+                  <a:tcPr marL="91440" marR="91440" marT="45720" marB="45720">
+                    <a:lnL w="2540" cap="flat" cmpd="sng" algn="ctr">
+                      <a:solidFill>
+                        <a:srgbClr val="EEEEEE"/>
+                      </a:solidFill>
+                      <a:prstDash val="solid"/>
+                      <a:round/>
+                      <a:headEnd type="none" w="med" len="med"/>
+                      <a:tailEnd type="none" w="med" len="med"/>
+                    </a:lnL>
+                    <a:lnR w="2540" cap="flat" cmpd="sng" algn="ctr">
+                      <a:solidFill>
+                        <a:srgbClr val="EEEEEE"/>
+                      </a:solidFill>
+                      <a:prstDash val="solid"/>
+                      <a:round/>
+                      <a:headEnd type="none" w="med" len="med"/>
+                      <a:tailEnd type="none" w="med" len="med"/>
+                    </a:lnR>
+                    <a:lnT w="2540" cap="flat" cmpd="sng" algn="ctr">
+                      <a:solidFill>
+                        <a:srgbClr val="EEEEEE"/>
+                      </a:solidFill>
+                      <a:prstDash val="solid"/>
+                      <a:round/>
+                      <a:headEnd type="none" w="med" len="med"/>
+                      <a:tailEnd type="none" w="med" len="med"/>
+                    </a:lnT>
+                    <a:lnB w="2540" cap="flat" cmpd="sng" algn="ctr">
+                      <a:solidFill>
+                        <a:srgbClr val="EEEEEE"/>
+                      </a:solidFill>
+                      <a:prstDash val="solid"/>
+                      <a:round/>
+                      <a:headEnd type="none" w="med" len="med"/>
+                      <a:tailEnd type="none" w="med" len="med"/>
+                    </a:lnB>
+                  </a:tcPr>
+                </a:tc>
+                <a:tc>
+                  <a:txBody>
+                    <a:bodyPr/>
+                    <a:lstStyle/>
+                    <a:p>
+                      <a:pPr algn="ctr" indent="0" marL="0">
+                        <a:buNone/>
+                      </a:pPr>
+                      <a:r>
+                        <a:rPr lang="en-US" sz="500" dirty="0">
+                          <a:solidFill>
+                            <a:srgbClr val="999999"/>
+                          </a:solidFill>
+                          <a:latin typeface="Calibri" pitchFamily="34" charset="0"/>
+                          <a:ea typeface="Calibri" pitchFamily="34" charset="-122"/>
+                          <a:cs typeface="Calibri" pitchFamily="34" charset="-120"/>
+                        </a:rPr>
+                        <a:t>-2.99%</a:t>
+                      </a:r>
+                      <a:endParaRPr lang="en-US" sz="500" dirty="0">
+                        <a:latin typeface="Calibri" charset="0"/>
+                        <a:ea typeface="Calibri" charset="0"/>
+                        <a:cs typeface="Calibri" charset="0"/>
+                      </a:endParaRPr>
+                    </a:p>
+                  </a:txBody>
+                  <a:tcPr marL="91440" marR="91440" marT="45720" marB="45720">
+                    <a:lnL w="2540" cap="flat" cmpd="sng" algn="ctr">
+                      <a:solidFill>
+                        <a:srgbClr val="EEEEEE"/>
+                      </a:solidFill>
+                      <a:prstDash val="solid"/>
+                      <a:round/>
+                      <a:headEnd type="none" w="med" len="med"/>
+                      <a:tailEnd type="none" w="med" len="med"/>
+                    </a:lnL>
+                    <a:lnR w="2540" cap="flat" cmpd="sng" algn="ctr">
+                      <a:solidFill>
+                        <a:srgbClr val="EEEEEE"/>
+                      </a:solidFill>
+                      <a:prstDash val="solid"/>
+                      <a:round/>
+                      <a:headEnd type="none" w="med" len="med"/>
+                      <a:tailEnd type="none" w="med" len="med"/>
+                    </a:lnR>
+                    <a:lnT w="2540" cap="flat" cmpd="sng" algn="ctr">
+                      <a:solidFill>
+                        <a:srgbClr val="EEEEEE"/>
+                      </a:solidFill>
+                      <a:prstDash val="solid"/>
+                      <a:round/>
+                      <a:headEnd type="none" w="med" len="med"/>
+                      <a:tailEnd type="none" w="med" len="med"/>
+                    </a:lnT>
+                    <a:lnB w="2540" cap="flat" cmpd="sng" algn="ctr">
+                      <a:solidFill>
+                        <a:srgbClr val="EEEEEE"/>
+                      </a:solidFill>
+                      <a:prstDash val="solid"/>
+                      <a:round/>
+                      <a:headEnd type="none" w="med" len="med"/>
+                      <a:tailEnd type="none" w="med" len="med"/>
+                    </a:lnB>
+                  </a:tcPr>
+                </a:tc>
+                <a:tc>
+                  <a:txBody>
+                    <a:bodyPr/>
+                    <a:lstStyle/>
+                    <a:p>
+                      <a:pPr algn="ctr" indent="0" marL="0">
+                        <a:buNone/>
+                      </a:pPr>
+                      <a:r>
+                        <a:rPr lang="en-US" sz="500" b="1" dirty="0">
+                          <a:solidFill>
+                            <a:srgbClr val="999999"/>
+                          </a:solidFill>
+                          <a:latin typeface="Calibri" pitchFamily="34" charset="0"/>
+                          <a:ea typeface="Calibri" pitchFamily="34" charset="-122"/>
+                          <a:cs typeface="Calibri" pitchFamily="34" charset="-120"/>
+                        </a:rPr>
+                        <a:t>-2.95%</a:t>
+                      </a:r>
+                      <a:endParaRPr lang="en-US" sz="500" dirty="0">
+                        <a:latin typeface="Calibri" charset="0"/>
+                        <a:ea typeface="Calibri" charset="0"/>
+                        <a:cs typeface="Calibri" charset="0"/>
+                      </a:endParaRPr>
+                    </a:p>
+                  </a:txBody>
+                  <a:tcPr marL="91440" marR="91440" marT="45720" marB="45720">
+                    <a:lnL w="2540" cap="flat" cmpd="sng" algn="ctr">
+                      <a:solidFill>
+                        <a:srgbClr val="EEEEEE"/>
+                      </a:solidFill>
+                      <a:prstDash val="solid"/>
+                      <a:round/>
+                      <a:headEnd type="none" w="med" len="med"/>
+                      <a:tailEnd type="none" w="med" len="med"/>
+                    </a:lnL>
+                    <a:lnR w="2540" cap="flat" cmpd="sng" algn="ctr">
+                      <a:solidFill>
+                        <a:srgbClr val="EEEEEE"/>
+                      </a:solidFill>
+                      <a:prstDash val="solid"/>
+                      <a:round/>
+                      <a:headEnd type="none" w="med" len="med"/>
+                      <a:tailEnd type="none" w="med" len="med"/>
+                    </a:lnR>
+                    <a:lnT w="2540" cap="flat" cmpd="sng" algn="ctr">
+                      <a:solidFill>
+                        <a:srgbClr val="EEEEEE"/>
+                      </a:solidFill>
+                      <a:prstDash val="solid"/>
+                      <a:round/>
+                      <a:headEnd type="none" w="med" len="med"/>
+                      <a:tailEnd type="none" w="med" len="med"/>
+                    </a:lnT>
+                    <a:lnB w="2540" cap="flat" cmpd="sng" algn="ctr">
+                      <a:solidFill>
+                        <a:srgbClr val="EEEEEE"/>
+                      </a:solidFill>
+                      <a:prstDash val="solid"/>
+                      <a:round/>
+                      <a:headEnd type="none" w="med" len="med"/>
+                      <a:tailEnd type="none" w="med" len="med"/>
+                    </a:lnB>
+                  </a:tcPr>
+                </a:tc>
+              </a:tr>
+              <a:tr h="123444">
+                <a:tc>
+                  <a:txBody>
+                    <a:bodyPr/>
+                    <a:lstStyle/>
+                    <a:p>
+                      <a:pPr algn="l" indent="0" marL="0">
+                        <a:buNone/>
+                      </a:pPr>
+                      <a:endParaRPr lang="en-US" sz="500" dirty="0">
+                        <a:latin typeface="Calibri" charset="0"/>
+                        <a:ea typeface="Calibri" charset="0"/>
+                        <a:cs typeface="Calibri" charset="0"/>
+                      </a:endParaRPr>
+                    </a:p>
+                  </a:txBody>
+                  <a:tcPr marL="91440" marR="91440" marT="45720" marB="45720">
+                    <a:lnL w="2540" cap="flat" cmpd="sng" algn="ctr">
+                      <a:solidFill>
+                        <a:srgbClr val="EEEEEE"/>
+                      </a:solidFill>
+                      <a:prstDash val="solid"/>
+                      <a:round/>
+                      <a:headEnd type="none" w="med" len="med"/>
+                      <a:tailEnd type="none" w="med" len="med"/>
+                    </a:lnL>
+                    <a:lnR w="2540" cap="flat" cmpd="sng" algn="ctr">
+                      <a:solidFill>
+                        <a:srgbClr val="EEEEEE"/>
+                      </a:solidFill>
+                      <a:prstDash val="solid"/>
+                      <a:round/>
+                      <a:headEnd type="none" w="med" len="med"/>
+                      <a:tailEnd type="none" w="med" len="med"/>
+                    </a:lnR>
+                    <a:lnT w="2540" cap="flat" cmpd="sng" algn="ctr">
+                      <a:solidFill>
+                        <a:srgbClr val="EEEEEE"/>
+                      </a:solidFill>
+                      <a:prstDash val="solid"/>
+                      <a:round/>
+                      <a:headEnd type="none" w="med" len="med"/>
+                      <a:tailEnd type="none" w="med" len="med"/>
+                    </a:lnT>
+                    <a:lnB w="2540" cap="flat" cmpd="sng" algn="ctr">
+                      <a:solidFill>
+                        <a:srgbClr val="EEEEEE"/>
+                      </a:solidFill>
+                      <a:prstDash val="solid"/>
+                      <a:round/>
+                      <a:headEnd type="none" w="med" len="med"/>
+                      <a:tailEnd type="none" w="med" len="med"/>
+                    </a:lnB>
+                  </a:tcPr>
+                </a:tc>
+                <a:tc>
+                  <a:txBody>
+                    <a:bodyPr/>
+                    <a:lstStyle/>
+                    <a:p>
+                      <a:pPr algn="l" indent="0" marL="0">
+                        <a:buNone/>
+                      </a:pPr>
+                      <a:r>
+                        <a:rPr lang="en-US" sz="500" dirty="0">
+                          <a:solidFill>
+                            <a:srgbClr val="000000"/>
+                          </a:solidFill>
+                          <a:latin typeface="Calibri" pitchFamily="34" charset="0"/>
+                          <a:ea typeface="Calibri" pitchFamily="34" charset="-122"/>
+                          <a:cs typeface="Calibri" pitchFamily="34" charset="-120"/>
+                        </a:rPr>
+                        <a:t>FIP LIQUIDEZ Plus</a:t>
+                      </a:r>
+                      <a:endParaRPr lang="en-US" sz="500" dirty="0">
+                        <a:latin typeface="Calibri" charset="0"/>
+                        <a:ea typeface="Calibri" charset="0"/>
+                        <a:cs typeface="Calibri" charset="0"/>
+                      </a:endParaRPr>
+                    </a:p>
+                  </a:txBody>
+                  <a:tcPr marL="91440" marR="91440" marT="45720" marB="45720">
+                    <a:lnL w="2540" cap="flat" cmpd="sng" algn="ctr">
+                      <a:solidFill>
+                        <a:srgbClr val="EEEEEE"/>
+                      </a:solidFill>
+                      <a:prstDash val="solid"/>
+                      <a:round/>
+                      <a:headEnd type="none" w="med" len="med"/>
+                      <a:tailEnd type="none" w="med" len="med"/>
+                    </a:lnL>
+                    <a:lnR w="2540" cap="flat" cmpd="sng" algn="ctr">
+                      <a:solidFill>
+                        <a:srgbClr val="EEEEEE"/>
+                      </a:solidFill>
+                      <a:prstDash val="solid"/>
+                      <a:round/>
+                      <a:headEnd type="none" w="med" len="med"/>
+                      <a:tailEnd type="none" w="med" len="med"/>
+                    </a:lnR>
+                    <a:lnT w="2540" cap="flat" cmpd="sng" algn="ctr">
+                      <a:solidFill>
+                        <a:srgbClr val="EEEEEE"/>
+                      </a:solidFill>
+                      <a:prstDash val="solid"/>
+                      <a:round/>
+                      <a:headEnd type="none" w="med" len="med"/>
+                      <a:tailEnd type="none" w="med" len="med"/>
+                    </a:lnT>
+                    <a:lnB w="2540" cap="flat" cmpd="sng" algn="ctr">
+                      <a:solidFill>
+                        <a:srgbClr val="EEEEEE"/>
+                      </a:solidFill>
+                      <a:prstDash val="solid"/>
+                      <a:round/>
+                      <a:headEnd type="none" w="med" len="med"/>
+                      <a:tailEnd type="none" w="med" len="med"/>
+                    </a:lnB>
+                  </a:tcPr>
+                </a:tc>
+                <a:tc>
+                  <a:txBody>
+                    <a:bodyPr/>
+                    <a:lstStyle/>
+                    <a:p>
+                      <a:pPr algn="ctr" indent="0" marL="0">
+                        <a:buNone/>
+                      </a:pPr>
+                      <a:r>
+                        <a:rPr lang="en-US" sz="500" dirty="0">
+                          <a:solidFill>
+                            <a:srgbClr val="000000"/>
+                          </a:solidFill>
+                          <a:latin typeface="Calibri" pitchFamily="34" charset="0"/>
+                          <a:ea typeface="Calibri" pitchFamily="34" charset="-122"/>
+                          <a:cs typeface="Calibri" pitchFamily="34" charset="-120"/>
+                        </a:rPr>
+                        <a:t>0.01%</a:t>
+                      </a:r>
+                      <a:endParaRPr lang="en-US" sz="500" dirty="0">
+                        <a:latin typeface="Calibri" charset="0"/>
+                        <a:ea typeface="Calibri" charset="0"/>
+                        <a:cs typeface="Calibri" charset="0"/>
+                      </a:endParaRPr>
+                    </a:p>
+                  </a:txBody>
+                  <a:tcPr marL="91440" marR="91440" marT="45720" marB="45720">
+                    <a:lnL w="2540" cap="flat" cmpd="sng" algn="ctr">
+                      <a:solidFill>
+                        <a:srgbClr val="EEEEEE"/>
+                      </a:solidFill>
+                      <a:prstDash val="solid"/>
+                      <a:round/>
+                      <a:headEnd type="none" w="med" len="med"/>
+                      <a:tailEnd type="none" w="med" len="med"/>
+                    </a:lnL>
+                    <a:lnR w="2540" cap="flat" cmpd="sng" algn="ctr">
+                      <a:solidFill>
+                        <a:srgbClr val="EEEEEE"/>
+                      </a:solidFill>
+                      <a:prstDash val="solid"/>
+                      <a:round/>
+                      <a:headEnd type="none" w="med" len="med"/>
+                      <a:tailEnd type="none" w="med" len="med"/>
+                    </a:lnR>
+                    <a:lnT w="2540" cap="flat" cmpd="sng" algn="ctr">
+                      <a:solidFill>
+                        <a:srgbClr val="EEEEEE"/>
+                      </a:solidFill>
+                      <a:prstDash val="solid"/>
+                      <a:round/>
+                      <a:headEnd type="none" w="med" len="med"/>
+                      <a:tailEnd type="none" w="med" len="med"/>
+                    </a:lnT>
+                    <a:lnB w="2540" cap="flat" cmpd="sng" algn="ctr">
+                      <a:solidFill>
+                        <a:srgbClr val="EEEEEE"/>
+                      </a:solidFill>
+                      <a:prstDash val="solid"/>
+                      <a:round/>
+                      <a:headEnd type="none" w="med" len="med"/>
+                      <a:tailEnd type="none" w="med" len="med"/>
+                    </a:lnB>
+                  </a:tcPr>
+                </a:tc>
+                <a:tc>
+                  <a:txBody>
+                    <a:bodyPr/>
+                    <a:lstStyle/>
+                    <a:p>
+                      <a:pPr algn="ctr" indent="0" marL="0">
+                        <a:buNone/>
+                      </a:pPr>
+                      <a:r>
+                        <a:rPr lang="en-US" sz="500" dirty="0">
+                          <a:solidFill>
+                            <a:srgbClr val="000000"/>
+                          </a:solidFill>
+                          <a:latin typeface="Calibri" pitchFamily="34" charset="0"/>
+                          <a:ea typeface="Calibri" pitchFamily="34" charset="-122"/>
+                          <a:cs typeface="Calibri" pitchFamily="34" charset="-120"/>
+                        </a:rPr>
+                        <a:t>0.01%</a:t>
+                      </a:r>
+                      <a:endParaRPr lang="en-US" sz="500" dirty="0">
+                        <a:latin typeface="Calibri" charset="0"/>
+                        <a:ea typeface="Calibri" charset="0"/>
+                        <a:cs typeface="Calibri" charset="0"/>
+                      </a:endParaRPr>
+                    </a:p>
+                  </a:txBody>
+                  <a:tcPr marL="91440" marR="91440" marT="45720" marB="45720">
+                    <a:lnL w="2540" cap="flat" cmpd="sng" algn="ctr">
+                      <a:solidFill>
+                        <a:srgbClr val="EEEEEE"/>
+                      </a:solidFill>
+                      <a:prstDash val="solid"/>
+                      <a:round/>
+                      <a:headEnd type="none" w="med" len="med"/>
+                      <a:tailEnd type="none" w="med" len="med"/>
+                    </a:lnL>
+                    <a:lnR w="2540" cap="flat" cmpd="sng" algn="ctr">
+                      <a:solidFill>
+                        <a:srgbClr val="EEEEEE"/>
+                      </a:solidFill>
+                      <a:prstDash val="solid"/>
+                      <a:round/>
+                      <a:headEnd type="none" w="med" len="med"/>
+                      <a:tailEnd type="none" w="med" len="med"/>
+                    </a:lnR>
+                    <a:lnT w="2540" cap="flat" cmpd="sng" algn="ctr">
+                      <a:solidFill>
+                        <a:srgbClr val="EEEEEE"/>
+                      </a:solidFill>
+                      <a:prstDash val="solid"/>
+                      <a:round/>
+                      <a:headEnd type="none" w="med" len="med"/>
+                      <a:tailEnd type="none" w="med" len="med"/>
+                    </a:lnT>
+                    <a:lnB w="2540" cap="flat" cmpd="sng" algn="ctr">
+                      <a:solidFill>
+                        <a:srgbClr val="EEEEEE"/>
+                      </a:solidFill>
+                      <a:prstDash val="solid"/>
+                      <a:round/>
+                      <a:headEnd type="none" w="med" len="med"/>
+                      <a:tailEnd type="none" w="med" len="med"/>
+                    </a:lnB>
+                  </a:tcPr>
+                </a:tc>
+                <a:tc>
+                  <a:txBody>
+                    <a:bodyPr/>
+                    <a:lstStyle/>
+                    <a:p>
+                      <a:pPr algn="ctr" indent="0" marL="0">
+                        <a:buNone/>
+                      </a:pPr>
+                      <a:r>
+                        <a:rPr lang="en-US" sz="500" dirty="0">
+                          <a:solidFill>
+                            <a:srgbClr val="000000"/>
+                          </a:solidFill>
+                          <a:latin typeface="Calibri" pitchFamily="34" charset="0"/>
+                          <a:ea typeface="Calibri" pitchFamily="34" charset="-122"/>
+                          <a:cs typeface="Calibri" pitchFamily="34" charset="-120"/>
+                        </a:rPr>
+                        <a:t>0.01%</a:t>
+                      </a:r>
+                      <a:endParaRPr lang="en-US" sz="500" dirty="0">
+                        <a:latin typeface="Calibri" charset="0"/>
+                        <a:ea typeface="Calibri" charset="0"/>
+                        <a:cs typeface="Calibri" charset="0"/>
+                      </a:endParaRPr>
+                    </a:p>
+                  </a:txBody>
+                  <a:tcPr marL="91440" marR="91440" marT="45720" marB="45720">
+                    <a:lnL w="2540" cap="flat" cmpd="sng" algn="ctr">
+                      <a:solidFill>
+                        <a:srgbClr val="EEEEEE"/>
+                      </a:solidFill>
+                      <a:prstDash val="solid"/>
+                      <a:round/>
+                      <a:headEnd type="none" w="med" len="med"/>
+                      <a:tailEnd type="none" w="med" len="med"/>
+                    </a:lnL>
+                    <a:lnR w="2540" cap="flat" cmpd="sng" algn="ctr">
+                      <a:solidFill>
+                        <a:srgbClr val="EEEEEE"/>
+                      </a:solidFill>
+                      <a:prstDash val="solid"/>
+                      <a:round/>
+                      <a:headEnd type="none" w="med" len="med"/>
+                      <a:tailEnd type="none" w="med" len="med"/>
+                    </a:lnR>
+                    <a:lnT w="2540" cap="flat" cmpd="sng" algn="ctr">
+                      <a:solidFill>
+                        <a:srgbClr val="EEEEEE"/>
+                      </a:solidFill>
+                      <a:prstDash val="solid"/>
+                      <a:round/>
+                      <a:headEnd type="none" w="med" len="med"/>
+                      <a:tailEnd type="none" w="med" len="med"/>
+                    </a:lnT>
+                    <a:lnB w="2540" cap="flat" cmpd="sng" algn="ctr">
+                      <a:solidFill>
+                        <a:srgbClr val="EEEEEE"/>
+                      </a:solidFill>
+                      <a:prstDash val="solid"/>
+                      <a:round/>
+                      <a:headEnd type="none" w="med" len="med"/>
+                      <a:tailEnd type="none" w="med" len="med"/>
+                    </a:lnB>
+                  </a:tcPr>
+                </a:tc>
+                <a:tc>
+                  <a:txBody>
+                    <a:bodyPr/>
+                    <a:lstStyle/>
+                    <a:p>
+                      <a:pPr algn="ctr" indent="0" marL="0">
+                        <a:buNone/>
+                      </a:pPr>
+                      <a:r>
+                        <a:rPr lang="en-US" sz="500" dirty="0">
+                          <a:solidFill>
+                            <a:srgbClr val="000000"/>
+                          </a:solidFill>
+                          <a:latin typeface="Calibri" pitchFamily="34" charset="0"/>
+                          <a:ea typeface="Calibri" pitchFamily="34" charset="-122"/>
+                          <a:cs typeface="Calibri" pitchFamily="34" charset="-120"/>
+                        </a:rPr>
+                        <a:t>0.01%</a:t>
+                      </a:r>
+                      <a:endParaRPr lang="en-US" sz="500" dirty="0">
+                        <a:latin typeface="Calibri" charset="0"/>
+                        <a:ea typeface="Calibri" charset="0"/>
+                        <a:cs typeface="Calibri" charset="0"/>
+                      </a:endParaRPr>
+                    </a:p>
+                  </a:txBody>
+                  <a:tcPr marL="91440" marR="91440" marT="45720" marB="45720">
+                    <a:lnL w="2540" cap="flat" cmpd="sng" algn="ctr">
+                      <a:solidFill>
+                        <a:srgbClr val="EEEEEE"/>
+                      </a:solidFill>
+                      <a:prstDash val="solid"/>
+                      <a:round/>
+                      <a:headEnd type="none" w="med" len="med"/>
+                      <a:tailEnd type="none" w="med" len="med"/>
+                    </a:lnL>
+                    <a:lnR w="2540" cap="flat" cmpd="sng" algn="ctr">
+                      <a:solidFill>
+                        <a:srgbClr val="EEEEEE"/>
+                      </a:solidFill>
+                      <a:prstDash val="solid"/>
+                      <a:round/>
+                      <a:headEnd type="none" w="med" len="med"/>
+                      <a:tailEnd type="none" w="med" len="med"/>
+                    </a:lnR>
+                    <a:lnT w="2540" cap="flat" cmpd="sng" algn="ctr">
+                      <a:solidFill>
+                        <a:srgbClr val="EEEEEE"/>
+                      </a:solidFill>
+                      <a:prstDash val="solid"/>
+                      <a:round/>
+                      <a:headEnd type="none" w="med" len="med"/>
+                      <a:tailEnd type="none" w="med" len="med"/>
+                    </a:lnT>
+                    <a:lnB w="2540" cap="flat" cmpd="sng" algn="ctr">
+                      <a:solidFill>
+                        <a:srgbClr val="EEEEEE"/>
+                      </a:solidFill>
+                      <a:prstDash val="solid"/>
+                      <a:round/>
+                      <a:headEnd type="none" w="med" len="med"/>
+                      <a:tailEnd type="none" w="med" len="med"/>
+                    </a:lnB>
+                  </a:tcPr>
+                </a:tc>
+                <a:tc>
+                  <a:txBody>
+                    <a:bodyPr/>
+                    <a:lstStyle/>
+                    <a:p>
+                      <a:pPr algn="ctr" indent="0" marL="0">
+                        <a:buNone/>
+                      </a:pPr>
+                      <a:r>
+                        <a:rPr lang="en-US" sz="500" dirty="0">
+                          <a:solidFill>
+                            <a:srgbClr val="000000"/>
+                          </a:solidFill>
+                          <a:latin typeface="Calibri" pitchFamily="34" charset="0"/>
+                          <a:ea typeface="Calibri" pitchFamily="34" charset="-122"/>
+                          <a:cs typeface="Calibri" pitchFamily="34" charset="-120"/>
+                        </a:rPr>
+                        <a:t>0.01%</a:t>
+                      </a:r>
+                      <a:endParaRPr lang="en-US" sz="500" dirty="0">
+                        <a:latin typeface="Calibri" charset="0"/>
+                        <a:ea typeface="Calibri" charset="0"/>
+                        <a:cs typeface="Calibri" charset="0"/>
+                      </a:endParaRPr>
+                    </a:p>
+                  </a:txBody>
+                  <a:tcPr marL="91440" marR="91440" marT="45720" marB="45720">
+                    <a:lnL w="2540" cap="flat" cmpd="sng" algn="ctr">
+                      <a:solidFill>
+                        <a:srgbClr val="EEEEEE"/>
+                      </a:solidFill>
+                      <a:prstDash val="solid"/>
+                      <a:round/>
+                      <a:headEnd type="none" w="med" len="med"/>
+                      <a:tailEnd type="none" w="med" len="med"/>
+                    </a:lnL>
+                    <a:lnR w="2540" cap="flat" cmpd="sng" algn="ctr">
+                      <a:solidFill>
+                        <a:srgbClr val="EEEEEE"/>
+                      </a:solidFill>
+                      <a:prstDash val="solid"/>
+                      <a:round/>
+                      <a:headEnd type="none" w="med" len="med"/>
+                      <a:tailEnd type="none" w="med" len="med"/>
+                    </a:lnR>
+                    <a:lnT w="2540" cap="flat" cmpd="sng" algn="ctr">
+                      <a:solidFill>
+                        <a:srgbClr val="EEEEEE"/>
+                      </a:solidFill>
+                      <a:prstDash val="solid"/>
+                      <a:round/>
+                      <a:headEnd type="none" w="med" len="med"/>
+                      <a:tailEnd type="none" w="med" len="med"/>
+                    </a:lnT>
+                    <a:lnB w="2540" cap="flat" cmpd="sng" algn="ctr">
+                      <a:solidFill>
+                        <a:srgbClr val="EEEEEE"/>
+                      </a:solidFill>
+                      <a:prstDash val="solid"/>
+                      <a:round/>
+                      <a:headEnd type="none" w="med" len="med"/>
+                      <a:tailEnd type="none" w="med" len="med"/>
+                    </a:lnB>
+                  </a:tcPr>
+                </a:tc>
+                <a:tc>
+                  <a:txBody>
+                    <a:bodyPr/>
+                    <a:lstStyle/>
+                    <a:p>
+                      <a:pPr algn="ctr" indent="0" marL="0">
+                        <a:buNone/>
+                      </a:pPr>
+                      <a:r>
+                        <a:rPr lang="en-US" sz="500" dirty="0">
+                          <a:solidFill>
+                            <a:srgbClr val="000000"/>
+                          </a:solidFill>
+                          <a:latin typeface="Calibri" pitchFamily="34" charset="0"/>
+                          <a:ea typeface="Calibri" pitchFamily="34" charset="-122"/>
+                          <a:cs typeface="Calibri" pitchFamily="34" charset="-120"/>
+                        </a:rPr>
+                        <a:t>0.01%</a:t>
+                      </a:r>
+                      <a:endParaRPr lang="en-US" sz="500" dirty="0">
+                        <a:latin typeface="Calibri" charset="0"/>
+                        <a:ea typeface="Calibri" charset="0"/>
+                        <a:cs typeface="Calibri" charset="0"/>
+                      </a:endParaRPr>
+                    </a:p>
+                  </a:txBody>
+                  <a:tcPr marL="91440" marR="91440" marT="45720" marB="45720">
+                    <a:lnL w="2540" cap="flat" cmpd="sng" algn="ctr">
+                      <a:solidFill>
+                        <a:srgbClr val="EEEEEE"/>
+                      </a:solidFill>
+                      <a:prstDash val="solid"/>
+                      <a:round/>
+                      <a:headEnd type="none" w="med" len="med"/>
+                      <a:tailEnd type="none" w="med" len="med"/>
+                    </a:lnL>
+                    <a:lnR w="2540" cap="flat" cmpd="sng" algn="ctr">
+                      <a:solidFill>
+                        <a:srgbClr val="EEEEEE"/>
+                      </a:solidFill>
+                      <a:prstDash val="solid"/>
+                      <a:round/>
+                      <a:headEnd type="none" w="med" len="med"/>
+                      <a:tailEnd type="none" w="med" len="med"/>
+                    </a:lnR>
+                    <a:lnT w="2540" cap="flat" cmpd="sng" algn="ctr">
+                      <a:solidFill>
+                        <a:srgbClr val="EEEEEE"/>
+                      </a:solidFill>
+                      <a:prstDash val="solid"/>
+                      <a:round/>
+                      <a:headEnd type="none" w="med" len="med"/>
+                      <a:tailEnd type="none" w="med" len="med"/>
+                    </a:lnT>
+                    <a:lnB w="2540" cap="flat" cmpd="sng" algn="ctr">
+                      <a:solidFill>
+                        <a:srgbClr val="EEEEEE"/>
+                      </a:solidFill>
+                      <a:prstDash val="solid"/>
+                      <a:round/>
+                      <a:headEnd type="none" w="med" len="med"/>
+                      <a:tailEnd type="none" w="med" len="med"/>
+                    </a:lnB>
+                  </a:tcPr>
+                </a:tc>
+                <a:tc>
+                  <a:txBody>
+                    <a:bodyPr/>
+                    <a:lstStyle/>
+                    <a:p>
+                      <a:pPr algn="ctr" indent="0" marL="0">
+                        <a:buNone/>
+                      </a:pPr>
+                      <a:r>
+                        <a:rPr lang="en-US" sz="500" dirty="0">
+                          <a:solidFill>
+                            <a:srgbClr val="000000"/>
+                          </a:solidFill>
+                          <a:latin typeface="Calibri" pitchFamily="34" charset="0"/>
+                          <a:ea typeface="Calibri" pitchFamily="34" charset="-122"/>
+                          <a:cs typeface="Calibri" pitchFamily="34" charset="-120"/>
+                        </a:rPr>
+                        <a:t>0.01%</a:t>
+                      </a:r>
+                      <a:endParaRPr lang="en-US" sz="500" dirty="0">
+                        <a:latin typeface="Calibri" charset="0"/>
+                        <a:ea typeface="Calibri" charset="0"/>
+                        <a:cs typeface="Calibri" charset="0"/>
+                      </a:endParaRPr>
+                    </a:p>
+                  </a:txBody>
+                  <a:tcPr marL="91440" marR="91440" marT="45720" marB="45720">
+                    <a:lnL w="2540" cap="flat" cmpd="sng" algn="ctr">
+                      <a:solidFill>
+                        <a:srgbClr val="EEEEEE"/>
+                      </a:solidFill>
+                      <a:prstDash val="solid"/>
+                      <a:round/>
+                      <a:headEnd type="none" w="med" len="med"/>
+                      <a:tailEnd type="none" w="med" len="med"/>
+                    </a:lnL>
+                    <a:lnR w="2540" cap="flat" cmpd="sng" algn="ctr">
+                      <a:solidFill>
+                        <a:srgbClr val="EEEEEE"/>
+                      </a:solidFill>
+                      <a:prstDash val="solid"/>
+                      <a:round/>
+                      <a:headEnd type="none" w="med" len="med"/>
+                      <a:tailEnd type="none" w="med" len="med"/>
+                    </a:lnR>
+                    <a:lnT w="2540" cap="flat" cmpd="sng" algn="ctr">
+                      <a:solidFill>
+                        <a:srgbClr val="EEEEEE"/>
+                      </a:solidFill>
+                      <a:prstDash val="solid"/>
+                      <a:round/>
+                      <a:headEnd type="none" w="med" len="med"/>
+                      <a:tailEnd type="none" w="med" len="med"/>
+                    </a:lnT>
+                    <a:lnB w="2540" cap="flat" cmpd="sng" algn="ctr">
+                      <a:solidFill>
+                        <a:srgbClr val="EEEEEE"/>
+                      </a:solidFill>
+                      <a:prstDash val="solid"/>
+                      <a:round/>
+                      <a:headEnd type="none" w="med" len="med"/>
+                      <a:tailEnd type="none" w="med" len="med"/>
+                    </a:lnB>
+                  </a:tcPr>
+                </a:tc>
+                <a:tc>
+                  <a:txBody>
+                    <a:bodyPr/>
+                    <a:lstStyle/>
+                    <a:p>
+                      <a:pPr algn="ctr" indent="0" marL="0">
+                        <a:buNone/>
+                      </a:pPr>
+                      <a:r>
+                        <a:rPr lang="en-US" sz="500" dirty="0">
+                          <a:solidFill>
+                            <a:srgbClr val="000000"/>
+                          </a:solidFill>
+                          <a:latin typeface="Calibri" pitchFamily="34" charset="0"/>
+                          <a:ea typeface="Calibri" pitchFamily="34" charset="-122"/>
+                          <a:cs typeface="Calibri" pitchFamily="34" charset="-120"/>
+                        </a:rPr>
+                        <a:t>0.01%</a:t>
+                      </a:r>
+                      <a:endParaRPr lang="en-US" sz="500" dirty="0">
+                        <a:latin typeface="Calibri" charset="0"/>
+                        <a:ea typeface="Calibri" charset="0"/>
+                        <a:cs typeface="Calibri" charset="0"/>
+                      </a:endParaRPr>
+                    </a:p>
+                  </a:txBody>
+                  <a:tcPr marL="91440" marR="91440" marT="45720" marB="45720">
+                    <a:lnL w="2540" cap="flat" cmpd="sng" algn="ctr">
+                      <a:solidFill>
+                        <a:srgbClr val="EEEEEE"/>
+                      </a:solidFill>
+                      <a:prstDash val="solid"/>
+                      <a:round/>
+                      <a:headEnd type="none" w="med" len="med"/>
+                      <a:tailEnd type="none" w="med" len="med"/>
+                    </a:lnL>
+                    <a:lnR w="2540" cap="flat" cmpd="sng" algn="ctr">
+                      <a:solidFill>
+                        <a:srgbClr val="EEEEEE"/>
+                      </a:solidFill>
+                      <a:prstDash val="solid"/>
+                      <a:round/>
+                      <a:headEnd type="none" w="med" len="med"/>
+                      <a:tailEnd type="none" w="med" len="med"/>
+                    </a:lnR>
+                    <a:lnT w="2540" cap="flat" cmpd="sng" algn="ctr">
+                      <a:solidFill>
+                        <a:srgbClr val="EEEEEE"/>
+                      </a:solidFill>
+                      <a:prstDash val="solid"/>
+                      <a:round/>
+                      <a:headEnd type="none" w="med" len="med"/>
+                      <a:tailEnd type="none" w="med" len="med"/>
+                    </a:lnT>
+                    <a:lnB w="2540" cap="flat" cmpd="sng" algn="ctr">
+                      <a:solidFill>
+                        <a:srgbClr val="EEEEEE"/>
+                      </a:solidFill>
+                      <a:prstDash val="solid"/>
+                      <a:round/>
+                      <a:headEnd type="none" w="med" len="med"/>
+                      <a:tailEnd type="none" w="med" len="med"/>
+                    </a:lnB>
+                  </a:tcPr>
+                </a:tc>
+                <a:tc>
+                  <a:txBody>
+                    <a:bodyPr/>
+                    <a:lstStyle/>
+                    <a:p>
+                      <a:pPr algn="ctr" indent="0" marL="0">
+                        <a:buNone/>
+                      </a:pPr>
+                      <a:r>
+                        <a:rPr lang="en-US" sz="500" dirty="0">
+                          <a:solidFill>
+                            <a:srgbClr val="000000"/>
+                          </a:solidFill>
+                          <a:latin typeface="Calibri" pitchFamily="34" charset="0"/>
+                          <a:ea typeface="Calibri" pitchFamily="34" charset="-122"/>
+                          <a:cs typeface="Calibri" pitchFamily="34" charset="-120"/>
+                        </a:rPr>
+                        <a:t>0.00%</a:t>
+                      </a:r>
+                      <a:endParaRPr lang="en-US" sz="500" dirty="0">
+                        <a:latin typeface="Calibri" charset="0"/>
+                        <a:ea typeface="Calibri" charset="0"/>
+                        <a:cs typeface="Calibri" charset="0"/>
+                      </a:endParaRPr>
+                    </a:p>
+                  </a:txBody>
+                  <a:tcPr marL="91440" marR="91440" marT="45720" marB="45720">
+                    <a:lnL w="2540" cap="flat" cmpd="sng" algn="ctr">
+                      <a:solidFill>
+                        <a:srgbClr val="EEEEEE"/>
+                      </a:solidFill>
+                      <a:prstDash val="solid"/>
+                      <a:round/>
+                      <a:headEnd type="none" w="med" len="med"/>
+                      <a:tailEnd type="none" w="med" len="med"/>
+                    </a:lnL>
+                    <a:lnR w="2540" cap="flat" cmpd="sng" algn="ctr">
+                      <a:solidFill>
+                        <a:srgbClr val="EEEEEE"/>
+                      </a:solidFill>
+                      <a:prstDash val="solid"/>
+                      <a:round/>
+                      <a:headEnd type="none" w="med" len="med"/>
+                      <a:tailEnd type="none" w="med" len="med"/>
+                    </a:lnR>
+                    <a:lnT w="2540" cap="flat" cmpd="sng" algn="ctr">
+                      <a:solidFill>
+                        <a:srgbClr val="EEEEEE"/>
+                      </a:solidFill>
+                      <a:prstDash val="solid"/>
+                      <a:round/>
+                      <a:headEnd type="none" w="med" len="med"/>
+                      <a:tailEnd type="none" w="med" len="med"/>
+                    </a:lnT>
+                    <a:lnB w="2540" cap="flat" cmpd="sng" algn="ctr">
+                      <a:solidFill>
+                        <a:srgbClr val="EEEEEE"/>
+                      </a:solidFill>
+                      <a:prstDash val="solid"/>
+                      <a:round/>
+                      <a:headEnd type="none" w="med" len="med"/>
+                      <a:tailEnd type="none" w="med" len="med"/>
+                    </a:lnB>
+                  </a:tcPr>
+                </a:tc>
+                <a:tc>
+                  <a:txBody>
+                    <a:bodyPr/>
+                    <a:lstStyle/>
+                    <a:p>
+                      <a:pPr algn="ctr" indent="0" marL="0">
+                        <a:buNone/>
+                      </a:pPr>
+                      <a:r>
+                        <a:rPr lang="en-US" sz="500" dirty="0">
+                          <a:solidFill>
+                            <a:srgbClr val="000000"/>
+                          </a:solidFill>
+                          <a:latin typeface="Calibri" pitchFamily="34" charset="0"/>
+                          <a:ea typeface="Calibri" pitchFamily="34" charset="-122"/>
+                          <a:cs typeface="Calibri" pitchFamily="34" charset="-120"/>
+                        </a:rPr>
+                        <a:t>0.00%</a:t>
+                      </a:r>
+                      <a:endParaRPr lang="en-US" sz="500" dirty="0">
+                        <a:latin typeface="Calibri" charset="0"/>
+                        <a:ea typeface="Calibri" charset="0"/>
+                        <a:cs typeface="Calibri" charset="0"/>
+                      </a:endParaRPr>
+                    </a:p>
+                  </a:txBody>
+                  <a:tcPr marL="91440" marR="91440" marT="45720" marB="45720">
+                    <a:lnL w="2540" cap="flat" cmpd="sng" algn="ctr">
+                      <a:solidFill>
+                        <a:srgbClr val="EEEEEE"/>
+                      </a:solidFill>
+                      <a:prstDash val="solid"/>
+                      <a:round/>
+                      <a:headEnd type="none" w="med" len="med"/>
+                      <a:tailEnd type="none" w="med" len="med"/>
+                    </a:lnL>
+                    <a:lnR w="2540" cap="flat" cmpd="sng" algn="ctr">
+                      <a:solidFill>
+                        <a:srgbClr val="EEEEEE"/>
+                      </a:solidFill>
+                      <a:prstDash val="solid"/>
+                      <a:round/>
+                      <a:headEnd type="none" w="med" len="med"/>
+                      <a:tailEnd type="none" w="med" len="med"/>
+                    </a:lnR>
+                    <a:lnT w="2540" cap="flat" cmpd="sng" algn="ctr">
+                      <a:solidFill>
+                        <a:srgbClr val="EEEEEE"/>
+                      </a:solidFill>
+                      <a:prstDash val="solid"/>
+                      <a:round/>
+                      <a:headEnd type="none" w="med" len="med"/>
+                      <a:tailEnd type="none" w="med" len="med"/>
+                    </a:lnT>
+                    <a:lnB w="2540" cap="flat" cmpd="sng" algn="ctr">
+                      <a:solidFill>
+                        <a:srgbClr val="EEEEEE"/>
+                      </a:solidFill>
+                      <a:prstDash val="solid"/>
+                      <a:round/>
+                      <a:headEnd type="none" w="med" len="med"/>
+                      <a:tailEnd type="none" w="med" len="med"/>
+                    </a:lnB>
+                  </a:tcPr>
+                </a:tc>
+                <a:tc>
+                  <a:txBody>
+                    <a:bodyPr/>
+                    <a:lstStyle/>
+                    <a:p>
+                      <a:pPr algn="ctr" indent="0" marL="0">
+                        <a:buNone/>
+                      </a:pPr>
+                      <a:r>
+                        <a:rPr lang="en-US" sz="500" dirty="0">
+                          <a:solidFill>
+                            <a:srgbClr val="000000"/>
+                          </a:solidFill>
+                          <a:latin typeface="Calibri" pitchFamily="34" charset="0"/>
+                          <a:ea typeface="Calibri" pitchFamily="34" charset="-122"/>
+                          <a:cs typeface="Calibri" pitchFamily="34" charset="-120"/>
+                        </a:rPr>
+                        <a:t>0.00%</a:t>
+                      </a:r>
+                      <a:endParaRPr lang="en-US" sz="500" dirty="0">
+                        <a:latin typeface="Calibri" charset="0"/>
+                        <a:ea typeface="Calibri" charset="0"/>
+                        <a:cs typeface="Calibri" charset="0"/>
+                      </a:endParaRPr>
+                    </a:p>
+                  </a:txBody>
+                  <a:tcPr marL="91440" marR="91440" marT="45720" marB="45720">
+                    <a:lnL w="2540" cap="flat" cmpd="sng" algn="ctr">
+                      <a:solidFill>
+                        <a:srgbClr val="EEEEEE"/>
+                      </a:solidFill>
+                      <a:prstDash val="solid"/>
+                      <a:round/>
+                      <a:headEnd type="none" w="med" len="med"/>
+                      <a:tailEnd type="none" w="med" len="med"/>
+                    </a:lnL>
+                    <a:lnR w="2540" cap="flat" cmpd="sng" algn="ctr">
+                      <a:solidFill>
+                        <a:srgbClr val="EEEEEE"/>
+                      </a:solidFill>
+                      <a:prstDash val="solid"/>
+                      <a:round/>
+                      <a:headEnd type="none" w="med" len="med"/>
+                      <a:tailEnd type="none" w="med" len="med"/>
+                    </a:lnR>
+                    <a:lnT w="2540" cap="flat" cmpd="sng" algn="ctr">
+                      <a:solidFill>
+                        <a:srgbClr val="EEEEEE"/>
+                      </a:solidFill>
+                      <a:prstDash val="solid"/>
+                      <a:round/>
+                      <a:headEnd type="none" w="med" len="med"/>
+                      <a:tailEnd type="none" w="med" len="med"/>
+                    </a:lnT>
+                    <a:lnB w="2540" cap="flat" cmpd="sng" algn="ctr">
+                      <a:solidFill>
+                        <a:srgbClr val="EEEEEE"/>
+                      </a:solidFill>
+                      <a:prstDash val="solid"/>
+                      <a:round/>
+                      <a:headEnd type="none" w="med" len="med"/>
+                      <a:tailEnd type="none" w="med" len="med"/>
+                    </a:lnB>
+                  </a:tcPr>
+                </a:tc>
+                <a:tc>
+                  <a:txBody>
+                    <a:bodyPr/>
+                    <a:lstStyle/>
+                    <a:p>
+                      <a:pPr algn="ctr" indent="0" marL="0">
+                        <a:buNone/>
+                      </a:pPr>
+                      <a:r>
+                        <a:rPr lang="en-US" sz="500" dirty="0">
+                          <a:solidFill>
+                            <a:srgbClr val="000000"/>
+                          </a:solidFill>
+                          <a:latin typeface="Calibri" pitchFamily="34" charset="0"/>
+                          <a:ea typeface="Calibri" pitchFamily="34" charset="-122"/>
+                          <a:cs typeface="Calibri" pitchFamily="34" charset="-120"/>
+                        </a:rPr>
+                        <a:t>0.00%</a:t>
+                      </a:r>
+                      <a:endParaRPr lang="en-US" sz="500" dirty="0">
+                        <a:latin typeface="Calibri" charset="0"/>
+                        <a:ea typeface="Calibri" charset="0"/>
+                        <a:cs typeface="Calibri" charset="0"/>
+                      </a:endParaRPr>
+                    </a:p>
+                  </a:txBody>
+                  <a:tcPr marL="91440" marR="91440" marT="45720" marB="45720">
+                    <a:lnL w="2540" cap="flat" cmpd="sng" algn="ctr">
+                      <a:solidFill>
+                        <a:srgbClr val="EEEEEE"/>
+                      </a:solidFill>
+                      <a:prstDash val="solid"/>
+                      <a:round/>
+                      <a:headEnd type="none" w="med" len="med"/>
+                      <a:tailEnd type="none" w="med" len="med"/>
+                    </a:lnL>
+                    <a:lnR w="2540" cap="flat" cmpd="sng" algn="ctr">
+                      <a:solidFill>
+                        <a:srgbClr val="EEEEEE"/>
+                      </a:solidFill>
+                      <a:prstDash val="solid"/>
+                      <a:round/>
+                      <a:headEnd type="none" w="med" len="med"/>
+                      <a:tailEnd type="none" w="med" len="med"/>
+                    </a:lnR>
+                    <a:lnT w="2540" cap="flat" cmpd="sng" algn="ctr">
+                      <a:solidFill>
+                        <a:srgbClr val="EEEEEE"/>
+                      </a:solidFill>
+                      <a:prstDash val="solid"/>
+                      <a:round/>
+                      <a:headEnd type="none" w="med" len="med"/>
+                      <a:tailEnd type="none" w="med" len="med"/>
+                    </a:lnT>
+                    <a:lnB w="2540" cap="flat" cmpd="sng" algn="ctr">
+                      <a:solidFill>
+                        <a:srgbClr val="EEEEEE"/>
+                      </a:solidFill>
+                      <a:prstDash val="solid"/>
+                      <a:round/>
+                      <a:headEnd type="none" w="med" len="med"/>
+                      <a:tailEnd type="none" w="med" len="med"/>
+                    </a:lnB>
+                  </a:tcPr>
+                </a:tc>
+                <a:tc>
+                  <a:txBody>
+                    <a:bodyPr/>
+                    <a:lstStyle/>
+                    <a:p>
+                      <a:pPr algn="ctr" indent="0" marL="0">
+                        <a:buNone/>
+                      </a:pPr>
+                      <a:r>
+                        <a:rPr lang="en-US" sz="500" b="1" dirty="0">
+                          <a:solidFill>
+                            <a:srgbClr val="000000"/>
+                          </a:solidFill>
+                          <a:latin typeface="Calibri" pitchFamily="34" charset="0"/>
+                          <a:ea typeface="Calibri" pitchFamily="34" charset="-122"/>
+                          <a:cs typeface="Calibri" pitchFamily="34" charset="-120"/>
+                        </a:rPr>
+                        <a:t>0.07%</a:t>
+                      </a:r>
+                      <a:endParaRPr lang="en-US" sz="500" dirty="0">
+                        <a:latin typeface="Calibri" charset="0"/>
+                        <a:ea typeface="Calibri" charset="0"/>
+                        <a:cs typeface="Calibri" charset="0"/>
+                      </a:endParaRPr>
+                    </a:p>
+                  </a:txBody>
+                  <a:tcPr marL="91440" marR="91440" marT="45720" marB="45720">
+                    <a:lnL w="2540" cap="flat" cmpd="sng" algn="ctr">
+                      <a:solidFill>
+                        <a:srgbClr val="EEEEEE"/>
+                      </a:solidFill>
+                      <a:prstDash val="solid"/>
+                      <a:round/>
+                      <a:headEnd type="none" w="med" len="med"/>
+                      <a:tailEnd type="none" w="med" len="med"/>
+                    </a:lnL>
+                    <a:lnR w="2540" cap="flat" cmpd="sng" algn="ctr">
+                      <a:solidFill>
+                        <a:srgbClr val="EEEEEE"/>
+                      </a:solidFill>
+                      <a:prstDash val="solid"/>
+                      <a:round/>
+                      <a:headEnd type="none" w="med" len="med"/>
+                      <a:tailEnd type="none" w="med" len="med"/>
+                    </a:lnR>
+                    <a:lnT w="2540" cap="flat" cmpd="sng" algn="ctr">
+                      <a:solidFill>
+                        <a:srgbClr val="EEEEEE"/>
+                      </a:solidFill>
+                      <a:prstDash val="solid"/>
+                      <a:round/>
+                      <a:headEnd type="none" w="med" len="med"/>
+                      <a:tailEnd type="none" w="med" len="med"/>
+                    </a:lnT>
+                    <a:lnB w="2540" cap="flat" cmpd="sng" algn="ctr">
+                      <a:solidFill>
+                        <a:srgbClr val="EEEEEE"/>
+                      </a:solidFill>
+                      <a:prstDash val="solid"/>
+                      <a:round/>
+                      <a:headEnd type="none" w="med" len="med"/>
+                      <a:tailEnd type="none" w="med" len="med"/>
+                    </a:lnB>
+                  </a:tcPr>
+                </a:tc>
+              </a:tr>
+              <a:tr h="123444">
                 <a:tc>
                   <a:txBody>
                     <a:bodyPr/>
@@ -7025,7 +12770,7 @@
                   </a:tcPr>
                 </a:tc>
               </a:tr>
-              <a:tr h="118872">
+              <a:tr h="123444">
                 <a:tc>
                   <a:txBody>
                     <a:bodyPr/>
@@ -7162,7 +12907,7 @@
                           <a:ea typeface="Calibri" pitchFamily="34" charset="-122"/>
                           <a:cs typeface="Calibri" pitchFamily="34" charset="-120"/>
                         </a:rPr>
-                        <a:t>-11.28%</a:t>
+                        <a:t>0.00%</a:t>
                       </a:r>
                       <a:endParaRPr lang="en-US" sz="500" dirty="0">
                         <a:latin typeface="Calibri" charset="0"/>
@@ -7877,7 +13622,7 @@
                           <a:ea typeface="Calibri" pitchFamily="34" charset="-122"/>
                           <a:cs typeface="Calibri" pitchFamily="34" charset="-120"/>
                         </a:rPr>
-                        <a:t>0.28%</a:t>
+                        <a:t>0.56%</a:t>
                       </a:r>
                       <a:endParaRPr lang="en-US" sz="500" dirty="0">
                         <a:latin typeface="Calibri" charset="0"/>
@@ -7942,7 +13687,7 @@
                           <a:ea typeface="Calibri" pitchFamily="34" charset="-122"/>
                           <a:cs typeface="Calibri" pitchFamily="34" charset="-120"/>
                         </a:rPr>
-                        <a:t>-8.39%</a:t>
+                        <a:t>3.54%</a:t>
                       </a:r>
                       <a:endParaRPr lang="en-US" sz="500" dirty="0">
                         <a:latin typeface="Calibri" charset="0"/>
@@ -7991,7 +13736,7 @@
                   </a:tcPr>
                 </a:tc>
               </a:tr>
-              <a:tr h="118872">
+              <a:tr h="123444">
                 <a:tc>
                   <a:txBody>
                     <a:bodyPr/>
@@ -8063,7 +13808,7 @@
                           <a:ea typeface="Calibri" pitchFamily="34" charset="-122"/>
                           <a:cs typeface="Calibri" pitchFamily="34" charset="-120"/>
                         </a:rPr>
-                        <a:t>FIP LIQUIDEZ PLUS</a:t>
+                        <a:t>FIP LIQUIDEZ Plus</a:t>
                       </a:r>
                       <a:endParaRPr lang="en-US" sz="500" dirty="0">
                         <a:latin typeface="Calibri" charset="0"/>
@@ -8119,6 +13864,17 @@
                       <a:pPr algn="ctr" indent="0" marL="0">
                         <a:buNone/>
                       </a:pPr>
+                      <a:r>
+                        <a:rPr lang="en-US" sz="500" dirty="0">
+                          <a:solidFill>
+                            <a:srgbClr val="000000"/>
+                          </a:solidFill>
+                          <a:latin typeface="Calibri" pitchFamily="34" charset="0"/>
+                          <a:ea typeface="Calibri" pitchFamily="34" charset="-122"/>
+                          <a:cs typeface="Calibri" pitchFamily="34" charset="-120"/>
+                        </a:rPr>
+                        <a:t>0.00%</a:t>
+                      </a:r>
                       <a:endParaRPr lang="en-US" sz="500" dirty="0">
                         <a:latin typeface="Calibri" charset="0"/>
                         <a:ea typeface="Calibri" charset="0"/>
@@ -8173,6 +13929,17 @@
                       <a:pPr algn="ctr" indent="0" marL="0">
                         <a:buNone/>
                       </a:pPr>
+                      <a:r>
+                        <a:rPr lang="en-US" sz="500" dirty="0">
+                          <a:solidFill>
+                            <a:srgbClr val="000000"/>
+                          </a:solidFill>
+                          <a:latin typeface="Calibri" pitchFamily="34" charset="0"/>
+                          <a:ea typeface="Calibri" pitchFamily="34" charset="-122"/>
+                          <a:cs typeface="Calibri" pitchFamily="34" charset="-120"/>
+                        </a:rPr>
+                        <a:t>0.00%</a:t>
+                      </a:r>
                       <a:endParaRPr lang="en-US" sz="500" dirty="0">
                         <a:latin typeface="Calibri" charset="0"/>
                         <a:ea typeface="Calibri" charset="0"/>
@@ -8227,6 +13994,17 @@
                       <a:pPr algn="ctr" indent="0" marL="0">
                         <a:buNone/>
                       </a:pPr>
+                      <a:r>
+                        <a:rPr lang="en-US" sz="500" dirty="0">
+                          <a:solidFill>
+                            <a:srgbClr val="000000"/>
+                          </a:solidFill>
+                          <a:latin typeface="Calibri" pitchFamily="34" charset="0"/>
+                          <a:ea typeface="Calibri" pitchFamily="34" charset="-122"/>
+                          <a:cs typeface="Calibri" pitchFamily="34" charset="-120"/>
+                        </a:rPr>
+                        <a:t>0.01%</a:t>
+                      </a:r>
                       <a:endParaRPr lang="en-US" sz="500" dirty="0">
                         <a:latin typeface="Calibri" charset="0"/>
                         <a:ea typeface="Calibri" charset="0"/>
@@ -8281,6 +14059,17 @@
                       <a:pPr algn="ctr" indent="0" marL="0">
                         <a:buNone/>
                       </a:pPr>
+                      <a:r>
+                        <a:rPr lang="en-US" sz="500" dirty="0">
+                          <a:solidFill>
+                            <a:srgbClr val="000000"/>
+                          </a:solidFill>
+                          <a:latin typeface="Calibri" pitchFamily="34" charset="0"/>
+                          <a:ea typeface="Calibri" pitchFamily="34" charset="-122"/>
+                          <a:cs typeface="Calibri" pitchFamily="34" charset="-120"/>
+                        </a:rPr>
+                        <a:t>0.01%</a:t>
+                      </a:r>
                       <a:endParaRPr lang="en-US" sz="500" dirty="0">
                         <a:latin typeface="Calibri" charset="0"/>
                         <a:ea typeface="Calibri" charset="0"/>
@@ -8335,6 +14124,17 @@
                       <a:pPr algn="ctr" indent="0" marL="0">
                         <a:buNone/>
                       </a:pPr>
+                      <a:r>
+                        <a:rPr lang="en-US" sz="500" dirty="0">
+                          <a:solidFill>
+                            <a:srgbClr val="000000"/>
+                          </a:solidFill>
+                          <a:latin typeface="Calibri" pitchFamily="34" charset="0"/>
+                          <a:ea typeface="Calibri" pitchFamily="34" charset="-122"/>
+                          <a:cs typeface="Calibri" pitchFamily="34" charset="-120"/>
+                        </a:rPr>
+                        <a:t>0.01%</a:t>
+                      </a:r>
                       <a:endParaRPr lang="en-US" sz="500" dirty="0">
                         <a:latin typeface="Calibri" charset="0"/>
                         <a:ea typeface="Calibri" charset="0"/>
@@ -8389,6 +14189,17 @@
                       <a:pPr algn="ctr" indent="0" marL="0">
                         <a:buNone/>
                       </a:pPr>
+                      <a:r>
+                        <a:rPr lang="en-US" sz="500" dirty="0">
+                          <a:solidFill>
+                            <a:srgbClr val="000000"/>
+                          </a:solidFill>
+                          <a:latin typeface="Calibri" pitchFamily="34" charset="0"/>
+                          <a:ea typeface="Calibri" pitchFamily="34" charset="-122"/>
+                          <a:cs typeface="Calibri" pitchFamily="34" charset="-120"/>
+                        </a:rPr>
+                        <a:t>0.01%</a:t>
+                      </a:r>
                       <a:endParaRPr lang="en-US" sz="500" dirty="0">
                         <a:latin typeface="Calibri" charset="0"/>
                         <a:ea typeface="Calibri" charset="0"/>
@@ -8443,6 +14254,17 @@
                       <a:pPr algn="ctr" indent="0" marL="0">
                         <a:buNone/>
                       </a:pPr>
+                      <a:r>
+                        <a:rPr lang="en-US" sz="500" dirty="0">
+                          <a:solidFill>
+                            <a:srgbClr val="000000"/>
+                          </a:solidFill>
+                          <a:latin typeface="Calibri" pitchFamily="34" charset="0"/>
+                          <a:ea typeface="Calibri" pitchFamily="34" charset="-122"/>
+                          <a:cs typeface="Calibri" pitchFamily="34" charset="-120"/>
+                        </a:rPr>
+                        <a:t>0.01%</a:t>
+                      </a:r>
                       <a:endParaRPr lang="en-US" sz="500" dirty="0">
                         <a:latin typeface="Calibri" charset="0"/>
                         <a:ea typeface="Calibri" charset="0"/>
@@ -8831,7 +14653,7 @@
                           <a:ea typeface="Calibri" pitchFamily="34" charset="-122"/>
                           <a:cs typeface="Calibri" pitchFamily="34" charset="-120"/>
                         </a:rPr>
-                        <a:t>3.08%</a:t>
+                        <a:t>3.12%</a:t>
                       </a:r>
                       <a:endParaRPr lang="en-US" sz="500" dirty="0">
                         <a:latin typeface="Calibri" charset="0"/>
@@ -8880,7 +14702,7 @@
                   </a:tcPr>
                 </a:tc>
               </a:tr>
-              <a:tr h="118872">
+              <a:tr h="123444">
                 <a:tc>
                   <a:txBody>
                     <a:bodyPr/>
@@ -9720,7 +15542,7 @@
                           <a:ea typeface="Calibri" pitchFamily="34" charset="-122"/>
                           <a:cs typeface="Calibri" pitchFamily="34" charset="-120"/>
                         </a:rPr>
-                        <a:t>1.51%</a:t>
+                        <a:t>3.39%</a:t>
                       </a:r>
                       <a:endParaRPr lang="en-US" sz="500" dirty="0">
                         <a:latin typeface="Calibri" charset="0"/>
@@ -9769,7 +15591,7 @@
                   </a:tcPr>
                 </a:tc>
               </a:tr>
-              <a:tr h="118872">
+              <a:tr h="123444">
                 <a:tc>
                   <a:txBody>
                     <a:bodyPr/>
@@ -9906,7 +15728,7 @@
                           <a:ea typeface="Calibri" pitchFamily="34" charset="-122"/>
                           <a:cs typeface="Calibri" pitchFamily="34" charset="-120"/>
                         </a:rPr>
-                        <a:t>0.27%</a:t>
+                        <a:t>0.00%</a:t>
                       </a:r>
                       <a:endParaRPr lang="en-US" sz="500" dirty="0">
                         <a:latin typeface="Calibri" charset="0"/>
@@ -10598,7 +16420,7 @@
                           <a:ea typeface="Calibri" pitchFamily="34" charset="-122"/>
                           <a:cs typeface="Calibri" pitchFamily="34" charset="-120"/>
                         </a:rPr>
-                        <a:t>1.05%</a:t>
+                        <a:t>2.32%</a:t>
                       </a:r>
                       <a:endParaRPr lang="en-US" sz="500" dirty="0">
                         <a:latin typeface="Calibri" charset="0"/>
@@ -10647,7 +16469,7 @@
                   </a:tcPr>
                 </a:tc>
               </a:tr>
-              <a:tr h="118872">
+              <a:tr h="123444">
                 <a:tc>
                   <a:txBody>
                     <a:bodyPr/>
@@ -10719,7 +16541,7 @@
                           <a:ea typeface="Calibri" pitchFamily="34" charset="-122"/>
                           <a:cs typeface="Calibri" pitchFamily="34" charset="-120"/>
                         </a:rPr>
-                        <a:t>FIP LIQUIDEZ PLUS</a:t>
+                        <a:t>FIP LIQUIDEZ Plus</a:t>
                       </a:r>
                       <a:endParaRPr lang="en-US" sz="500" dirty="0">
                         <a:latin typeface="Calibri" charset="0"/>
@@ -11476,7 +17298,7 @@
                           <a:ea typeface="Calibri" pitchFamily="34" charset="-122"/>
                           <a:cs typeface="Calibri" pitchFamily="34" charset="-120"/>
                         </a:rPr>
-                        <a:t>2.46%</a:t>
+                        <a:t>5.38%</a:t>
                       </a:r>
                       <a:endParaRPr lang="en-US" sz="500" dirty="0">
                         <a:latin typeface="Calibri" charset="0"/>

--- a/folletos/2026-04/pptx/FIP_VANTRUST_LIQUIDEZ_PLUS.pptx
+++ b/folletos/2026-04/pptx/FIP_VANTRUST_LIQUIDEZ_PLUS.pptx
@@ -3113,7 +3113,7 @@
                 <a:ea typeface="Calibri" pitchFamily="34" charset="-122"/>
                 <a:cs typeface="Calibri" pitchFamily="34" charset="-120"/>
               </a:rPr>
-              <a:t>prueba CLP</a:t>
+              <a:t>prueba 12 CLP</a:t>
             </a:r>
             <a:endParaRPr lang="en-US" sz="800" dirty="0"/>
           </a:p>

--- a/folletos/2026-04/pptx/FIP_VANTRUST_LIQUIDEZ_PLUS.pptx
+++ b/folletos/2026-04/pptx/FIP_VANTRUST_LIQUIDEZ_PLUS.pptx
@@ -3113,7 +3113,7 @@
                 <a:ea typeface="Calibri" pitchFamily="34" charset="-122"/>
                 <a:cs typeface="Calibri" pitchFamily="34" charset="-120"/>
               </a:rPr>
-              <a:t>prueba 12 CLP</a:t>
+              <a:t>prueba CLP</a:t>
             </a:r>
             <a:endParaRPr lang="en-US" sz="800" dirty="0"/>
           </a:p>
@@ -7317,7 +7317,7 @@
                           <a:ea typeface="Calibri" pitchFamily="34" charset="-122"/>
                           <a:cs typeface="Calibri" pitchFamily="34" charset="-120"/>
                         </a:rPr>
-                        <a:t>0.01%</a:t>
+                        <a:t>0.75%</a:t>
                       </a:r>
                       <a:endParaRPr lang="en-US" sz="500" dirty="0">
                         <a:latin typeface="Calibri" charset="0"/>
@@ -7382,7 +7382,7 @@
                           <a:ea typeface="Calibri" pitchFamily="34" charset="-122"/>
                           <a:cs typeface="Calibri" pitchFamily="34" charset="-120"/>
                         </a:rPr>
-                        <a:t>0.01%</a:t>
+                        <a:t>0.88%</a:t>
                       </a:r>
                       <a:endParaRPr lang="en-US" sz="500" dirty="0">
                         <a:latin typeface="Calibri" charset="0"/>
@@ -7447,7 +7447,7 @@
                           <a:ea typeface="Calibri" pitchFamily="34" charset="-122"/>
                           <a:cs typeface="Calibri" pitchFamily="34" charset="-120"/>
                         </a:rPr>
-                        <a:t>0.01%</a:t>
+                        <a:t>0.80%</a:t>
                       </a:r>
                       <a:endParaRPr lang="en-US" sz="500" dirty="0">
                         <a:latin typeface="Calibri" charset="0"/>
@@ -7512,7 +7512,7 @@
                           <a:ea typeface="Calibri" pitchFamily="34" charset="-122"/>
                           <a:cs typeface="Calibri" pitchFamily="34" charset="-120"/>
                         </a:rPr>
-                        <a:t>0.01%</a:t>
+                        <a:t>0.82%</a:t>
                       </a:r>
                       <a:endParaRPr lang="en-US" sz="500" dirty="0">
                         <a:latin typeface="Calibri" charset="0"/>
@@ -7577,7 +7577,7 @@
                           <a:ea typeface="Calibri" pitchFamily="34" charset="-122"/>
                           <a:cs typeface="Calibri" pitchFamily="34" charset="-120"/>
                         </a:rPr>
-                        <a:t>0.01%</a:t>
+                        <a:t>0.76%</a:t>
                       </a:r>
                       <a:endParaRPr lang="en-US" sz="500" dirty="0">
                         <a:latin typeface="Calibri" charset="0"/>
@@ -7642,7 +7642,7 @@
                           <a:ea typeface="Calibri" pitchFamily="34" charset="-122"/>
                           <a:cs typeface="Calibri" pitchFamily="34" charset="-120"/>
                         </a:rPr>
-                        <a:t>0.01%</a:t>
+                        <a:t>0.68%</a:t>
                       </a:r>
                       <a:endParaRPr lang="en-US" sz="500" dirty="0">
                         <a:latin typeface="Calibri" charset="0"/>
@@ -7707,7 +7707,7 @@
                           <a:ea typeface="Calibri" pitchFamily="34" charset="-122"/>
                           <a:cs typeface="Calibri" pitchFamily="34" charset="-120"/>
                         </a:rPr>
-                        <a:t>0.01%</a:t>
+                        <a:t>0.67%</a:t>
                       </a:r>
                       <a:endParaRPr lang="en-US" sz="500" dirty="0">
                         <a:latin typeface="Calibri" charset="0"/>
@@ -7772,7 +7772,7 @@
                           <a:ea typeface="Calibri" pitchFamily="34" charset="-122"/>
                           <a:cs typeface="Calibri" pitchFamily="34" charset="-120"/>
                         </a:rPr>
-                        <a:t>0.01%</a:t>
+                        <a:t>0.62%</a:t>
                       </a:r>
                       <a:endParaRPr lang="en-US" sz="500" dirty="0">
                         <a:latin typeface="Calibri" charset="0"/>
@@ -7902,7 +7902,7 @@
                           <a:ea typeface="Calibri" pitchFamily="34" charset="-122"/>
                           <a:cs typeface="Calibri" pitchFamily="34" charset="-120"/>
                         </a:rPr>
-                        <a:t>7.55%</a:t>
+                        <a:t>14.07%</a:t>
                       </a:r>
                       <a:endParaRPr lang="en-US" sz="500" dirty="0">
                         <a:latin typeface="Calibri" charset="0"/>
@@ -8250,7 +8250,7 @@
                           <a:ea typeface="Calibri" pitchFamily="34" charset="-122"/>
                           <a:cs typeface="Calibri" pitchFamily="34" charset="-120"/>
                         </a:rPr>
-                        <a:t>0.01%</a:t>
+                        <a:t>1.10%</a:t>
                       </a:r>
                       <a:endParaRPr lang="en-US" sz="500" dirty="0">
                         <a:latin typeface="Calibri" charset="0"/>
@@ -8315,7 +8315,7 @@
                           <a:ea typeface="Calibri" pitchFamily="34" charset="-122"/>
                           <a:cs typeface="Calibri" pitchFamily="34" charset="-120"/>
                         </a:rPr>
-                        <a:t>0.01%</a:t>
+                        <a:t>1.12%</a:t>
                       </a:r>
                       <a:endParaRPr lang="en-US" sz="500" dirty="0">
                         <a:latin typeface="Calibri" charset="0"/>
@@ -8380,7 +8380,7 @@
                           <a:ea typeface="Calibri" pitchFamily="34" charset="-122"/>
                           <a:cs typeface="Calibri" pitchFamily="34" charset="-120"/>
                         </a:rPr>
-                        <a:t>0.01%</a:t>
+                        <a:t>1.03%</a:t>
                       </a:r>
                       <a:endParaRPr lang="en-US" sz="500" dirty="0">
                         <a:latin typeface="Calibri" charset="0"/>
@@ -8445,7 +8445,7 @@
                           <a:ea typeface="Calibri" pitchFamily="34" charset="-122"/>
                           <a:cs typeface="Calibri" pitchFamily="34" charset="-120"/>
                         </a:rPr>
-                        <a:t>0.01%</a:t>
+                        <a:t>1.07%</a:t>
                       </a:r>
                       <a:endParaRPr lang="en-US" sz="500" dirty="0">
                         <a:latin typeface="Calibri" charset="0"/>
@@ -8510,7 +8510,7 @@
                           <a:ea typeface="Calibri" pitchFamily="34" charset="-122"/>
                           <a:cs typeface="Calibri" pitchFamily="34" charset="-120"/>
                         </a:rPr>
-                        <a:t>0.01%</a:t>
+                        <a:t>0.97%</a:t>
                       </a:r>
                       <a:endParaRPr lang="en-US" sz="500" dirty="0">
                         <a:latin typeface="Calibri" charset="0"/>
@@ -8575,7 +8575,7 @@
                           <a:ea typeface="Calibri" pitchFamily="34" charset="-122"/>
                           <a:cs typeface="Calibri" pitchFamily="34" charset="-120"/>
                         </a:rPr>
-                        <a:t>0.01%</a:t>
+                        <a:t>0.93%</a:t>
                       </a:r>
                       <a:endParaRPr lang="en-US" sz="500" dirty="0">
                         <a:latin typeface="Calibri" charset="0"/>
@@ -8640,7 +8640,7 @@
                           <a:ea typeface="Calibri" pitchFamily="34" charset="-122"/>
                           <a:cs typeface="Calibri" pitchFamily="34" charset="-120"/>
                         </a:rPr>
-                        <a:t>0.01%</a:t>
+                        <a:t>0.90%</a:t>
                       </a:r>
                       <a:endParaRPr lang="en-US" sz="500" dirty="0">
                         <a:latin typeface="Calibri" charset="0"/>
@@ -8705,7 +8705,7 @@
                           <a:ea typeface="Calibri" pitchFamily="34" charset="-122"/>
                           <a:cs typeface="Calibri" pitchFamily="34" charset="-120"/>
                         </a:rPr>
-                        <a:t>0.01%</a:t>
+                        <a:t>0.85%</a:t>
                       </a:r>
                       <a:endParaRPr lang="en-US" sz="500" dirty="0">
                         <a:latin typeface="Calibri" charset="0"/>
@@ -8770,7 +8770,7 @@
                           <a:ea typeface="Calibri" pitchFamily="34" charset="-122"/>
                           <a:cs typeface="Calibri" pitchFamily="34" charset="-120"/>
                         </a:rPr>
-                        <a:t>0.01%</a:t>
+                        <a:t>0.86%</a:t>
                       </a:r>
                       <a:endParaRPr lang="en-US" sz="500" dirty="0">
                         <a:latin typeface="Calibri" charset="0"/>
@@ -8835,7 +8835,7 @@
                           <a:ea typeface="Calibri" pitchFamily="34" charset="-122"/>
                           <a:cs typeface="Calibri" pitchFamily="34" charset="-120"/>
                         </a:rPr>
-                        <a:t>0.09%</a:t>
+                        <a:t>9.17%</a:t>
                       </a:r>
                       <a:endParaRPr lang="en-US" sz="500" dirty="0">
                         <a:latin typeface="Calibri" charset="0"/>
@@ -10063,7 +10063,2786 @@
                           <a:ea typeface="Calibri" pitchFamily="34" charset="-122"/>
                           <a:cs typeface="Calibri" pitchFamily="34" charset="-120"/>
                         </a:rPr>
-                        <a:t>0.01%</a:t>
+                        <a:t>0.51%</a:t>
+                      </a:r>
+                      <a:endParaRPr lang="en-US" sz="500" dirty="0">
+                        <a:latin typeface="Calibri" charset="0"/>
+                        <a:ea typeface="Calibri" charset="0"/>
+                        <a:cs typeface="Calibri" charset="0"/>
+                      </a:endParaRPr>
+                    </a:p>
+                  </a:txBody>
+                  <a:tcPr marL="91440" marR="91440" marT="45720" marB="45720">
+                    <a:lnL w="2540" cap="flat" cmpd="sng" algn="ctr">
+                      <a:solidFill>
+                        <a:srgbClr val="EEEEEE"/>
+                      </a:solidFill>
+                      <a:prstDash val="solid"/>
+                      <a:round/>
+                      <a:headEnd type="none" w="med" len="med"/>
+                      <a:tailEnd type="none" w="med" len="med"/>
+                    </a:lnL>
+                    <a:lnR w="2540" cap="flat" cmpd="sng" algn="ctr">
+                      <a:solidFill>
+                        <a:srgbClr val="EEEEEE"/>
+                      </a:solidFill>
+                      <a:prstDash val="solid"/>
+                      <a:round/>
+                      <a:headEnd type="none" w="med" len="med"/>
+                      <a:tailEnd type="none" w="med" len="med"/>
+                    </a:lnR>
+                    <a:lnT w="2540" cap="flat" cmpd="sng" algn="ctr">
+                      <a:solidFill>
+                        <a:srgbClr val="EEEEEE"/>
+                      </a:solidFill>
+                      <a:prstDash val="solid"/>
+                      <a:round/>
+                      <a:headEnd type="none" w="med" len="med"/>
+                      <a:tailEnd type="none" w="med" len="med"/>
+                    </a:lnT>
+                    <a:lnB w="2540" cap="flat" cmpd="sng" algn="ctr">
+                      <a:solidFill>
+                        <a:srgbClr val="EEEEEE"/>
+                      </a:solidFill>
+                      <a:prstDash val="solid"/>
+                      <a:round/>
+                      <a:headEnd type="none" w="med" len="med"/>
+                      <a:tailEnd type="none" w="med" len="med"/>
+                    </a:lnB>
+                  </a:tcPr>
+                </a:tc>
+                <a:tc>
+                  <a:txBody>
+                    <a:bodyPr/>
+                    <a:lstStyle/>
+                    <a:p>
+                      <a:pPr algn="ctr" indent="0" marL="0">
+                        <a:buNone/>
+                      </a:pPr>
+                      <a:r>
+                        <a:rPr lang="en-US" sz="500" dirty="0">
+                          <a:solidFill>
+                            <a:srgbClr val="999999"/>
+                          </a:solidFill>
+                          <a:latin typeface="Calibri" pitchFamily="34" charset="0"/>
+                          <a:ea typeface="Calibri" pitchFamily="34" charset="-122"/>
+                          <a:cs typeface="Calibri" pitchFamily="34" charset="-120"/>
+                        </a:rPr>
+                        <a:t>0.45%</a:t>
+                      </a:r>
+                      <a:endParaRPr lang="en-US" sz="500" dirty="0">
+                        <a:latin typeface="Calibri" charset="0"/>
+                        <a:ea typeface="Calibri" charset="0"/>
+                        <a:cs typeface="Calibri" charset="0"/>
+                      </a:endParaRPr>
+                    </a:p>
+                  </a:txBody>
+                  <a:tcPr marL="91440" marR="91440" marT="45720" marB="45720">
+                    <a:lnL w="2540" cap="flat" cmpd="sng" algn="ctr">
+                      <a:solidFill>
+                        <a:srgbClr val="EEEEEE"/>
+                      </a:solidFill>
+                      <a:prstDash val="solid"/>
+                      <a:round/>
+                      <a:headEnd type="none" w="med" len="med"/>
+                      <a:tailEnd type="none" w="med" len="med"/>
+                    </a:lnL>
+                    <a:lnR w="2540" cap="flat" cmpd="sng" algn="ctr">
+                      <a:solidFill>
+                        <a:srgbClr val="EEEEEE"/>
+                      </a:solidFill>
+                      <a:prstDash val="solid"/>
+                      <a:round/>
+                      <a:headEnd type="none" w="med" len="med"/>
+                      <a:tailEnd type="none" w="med" len="med"/>
+                    </a:lnR>
+                    <a:lnT w="2540" cap="flat" cmpd="sng" algn="ctr">
+                      <a:solidFill>
+                        <a:srgbClr val="EEEEEE"/>
+                      </a:solidFill>
+                      <a:prstDash val="solid"/>
+                      <a:round/>
+                      <a:headEnd type="none" w="med" len="med"/>
+                      <a:tailEnd type="none" w="med" len="med"/>
+                    </a:lnT>
+                    <a:lnB w="2540" cap="flat" cmpd="sng" algn="ctr">
+                      <a:solidFill>
+                        <a:srgbClr val="EEEEEE"/>
+                      </a:solidFill>
+                      <a:prstDash val="solid"/>
+                      <a:round/>
+                      <a:headEnd type="none" w="med" len="med"/>
+                      <a:tailEnd type="none" w="med" len="med"/>
+                    </a:lnB>
+                  </a:tcPr>
+                </a:tc>
+                <a:tc>
+                  <a:txBody>
+                    <a:bodyPr/>
+                    <a:lstStyle/>
+                    <a:p>
+                      <a:pPr algn="ctr" indent="0" marL="0">
+                        <a:buNone/>
+                      </a:pPr>
+                      <a:r>
+                        <a:rPr lang="en-US" sz="500" dirty="0">
+                          <a:solidFill>
+                            <a:srgbClr val="999999"/>
+                          </a:solidFill>
+                          <a:latin typeface="Calibri" pitchFamily="34" charset="0"/>
+                          <a:ea typeface="Calibri" pitchFamily="34" charset="-122"/>
+                          <a:cs typeface="Calibri" pitchFamily="34" charset="-120"/>
+                        </a:rPr>
+                        <a:t>0.47%</a:t>
+                      </a:r>
+                      <a:endParaRPr lang="en-US" sz="500" dirty="0">
+                        <a:latin typeface="Calibri" charset="0"/>
+                        <a:ea typeface="Calibri" charset="0"/>
+                        <a:cs typeface="Calibri" charset="0"/>
+                      </a:endParaRPr>
+                    </a:p>
+                  </a:txBody>
+                  <a:tcPr marL="91440" marR="91440" marT="45720" marB="45720">
+                    <a:lnL w="2540" cap="flat" cmpd="sng" algn="ctr">
+                      <a:solidFill>
+                        <a:srgbClr val="EEEEEE"/>
+                      </a:solidFill>
+                      <a:prstDash val="solid"/>
+                      <a:round/>
+                      <a:headEnd type="none" w="med" len="med"/>
+                      <a:tailEnd type="none" w="med" len="med"/>
+                    </a:lnL>
+                    <a:lnR w="2540" cap="flat" cmpd="sng" algn="ctr">
+                      <a:solidFill>
+                        <a:srgbClr val="EEEEEE"/>
+                      </a:solidFill>
+                      <a:prstDash val="solid"/>
+                      <a:round/>
+                      <a:headEnd type="none" w="med" len="med"/>
+                      <a:tailEnd type="none" w="med" len="med"/>
+                    </a:lnR>
+                    <a:lnT w="2540" cap="flat" cmpd="sng" algn="ctr">
+                      <a:solidFill>
+                        <a:srgbClr val="EEEEEE"/>
+                      </a:solidFill>
+                      <a:prstDash val="solid"/>
+                      <a:round/>
+                      <a:headEnd type="none" w="med" len="med"/>
+                      <a:tailEnd type="none" w="med" len="med"/>
+                    </a:lnT>
+                    <a:lnB w="2540" cap="flat" cmpd="sng" algn="ctr">
+                      <a:solidFill>
+                        <a:srgbClr val="EEEEEE"/>
+                      </a:solidFill>
+                      <a:prstDash val="solid"/>
+                      <a:round/>
+                      <a:headEnd type="none" w="med" len="med"/>
+                      <a:tailEnd type="none" w="med" len="med"/>
+                    </a:lnB>
+                  </a:tcPr>
+                </a:tc>
+                <a:tc>
+                  <a:txBody>
+                    <a:bodyPr/>
+                    <a:lstStyle/>
+                    <a:p>
+                      <a:pPr algn="ctr" indent="0" marL="0">
+                        <a:buNone/>
+                      </a:pPr>
+                      <a:r>
+                        <a:rPr lang="en-US" sz="500" dirty="0">
+                          <a:solidFill>
+                            <a:srgbClr val="999999"/>
+                          </a:solidFill>
+                          <a:latin typeface="Calibri" pitchFamily="34" charset="0"/>
+                          <a:ea typeface="Calibri" pitchFamily="34" charset="-122"/>
+                          <a:cs typeface="Calibri" pitchFamily="34" charset="-120"/>
+                        </a:rPr>
+                        <a:t>0.42%</a:t>
+                      </a:r>
+                      <a:endParaRPr lang="en-US" sz="500" dirty="0">
+                        <a:latin typeface="Calibri" charset="0"/>
+                        <a:ea typeface="Calibri" charset="0"/>
+                        <a:cs typeface="Calibri" charset="0"/>
+                      </a:endParaRPr>
+                    </a:p>
+                  </a:txBody>
+                  <a:tcPr marL="91440" marR="91440" marT="45720" marB="45720">
+                    <a:lnL w="2540" cap="flat" cmpd="sng" algn="ctr">
+                      <a:solidFill>
+                        <a:srgbClr val="EEEEEE"/>
+                      </a:solidFill>
+                      <a:prstDash val="solid"/>
+                      <a:round/>
+                      <a:headEnd type="none" w="med" len="med"/>
+                      <a:tailEnd type="none" w="med" len="med"/>
+                    </a:lnL>
+                    <a:lnR w="2540" cap="flat" cmpd="sng" algn="ctr">
+                      <a:solidFill>
+                        <a:srgbClr val="EEEEEE"/>
+                      </a:solidFill>
+                      <a:prstDash val="solid"/>
+                      <a:round/>
+                      <a:headEnd type="none" w="med" len="med"/>
+                      <a:tailEnd type="none" w="med" len="med"/>
+                    </a:lnR>
+                    <a:lnT w="2540" cap="flat" cmpd="sng" algn="ctr">
+                      <a:solidFill>
+                        <a:srgbClr val="EEEEEE"/>
+                      </a:solidFill>
+                      <a:prstDash val="solid"/>
+                      <a:round/>
+                      <a:headEnd type="none" w="med" len="med"/>
+                      <a:tailEnd type="none" w="med" len="med"/>
+                    </a:lnT>
+                    <a:lnB w="2540" cap="flat" cmpd="sng" algn="ctr">
+                      <a:solidFill>
+                        <a:srgbClr val="EEEEEE"/>
+                      </a:solidFill>
+                      <a:prstDash val="solid"/>
+                      <a:round/>
+                      <a:headEnd type="none" w="med" len="med"/>
+                      <a:tailEnd type="none" w="med" len="med"/>
+                    </a:lnB>
+                  </a:tcPr>
+                </a:tc>
+                <a:tc>
+                  <a:txBody>
+                    <a:bodyPr/>
+                    <a:lstStyle/>
+                    <a:p>
+                      <a:pPr algn="ctr" indent="0" marL="0">
+                        <a:buNone/>
+                      </a:pPr>
+                      <a:r>
+                        <a:rPr lang="en-US" sz="500" dirty="0">
+                          <a:solidFill>
+                            <a:srgbClr val="999999"/>
+                          </a:solidFill>
+                          <a:latin typeface="Calibri" pitchFamily="34" charset="0"/>
+                          <a:ea typeface="Calibri" pitchFamily="34" charset="-122"/>
+                          <a:cs typeface="Calibri" pitchFamily="34" charset="-120"/>
+                        </a:rPr>
+                        <a:t>0.37%</a:t>
+                      </a:r>
+                      <a:endParaRPr lang="en-US" sz="500" dirty="0">
+                        <a:latin typeface="Calibri" charset="0"/>
+                        <a:ea typeface="Calibri" charset="0"/>
+                        <a:cs typeface="Calibri" charset="0"/>
+                      </a:endParaRPr>
+                    </a:p>
+                  </a:txBody>
+                  <a:tcPr marL="91440" marR="91440" marT="45720" marB="45720">
+                    <a:lnL w="2540" cap="flat" cmpd="sng" algn="ctr">
+                      <a:solidFill>
+                        <a:srgbClr val="EEEEEE"/>
+                      </a:solidFill>
+                      <a:prstDash val="solid"/>
+                      <a:round/>
+                      <a:headEnd type="none" w="med" len="med"/>
+                      <a:tailEnd type="none" w="med" len="med"/>
+                    </a:lnL>
+                    <a:lnR w="2540" cap="flat" cmpd="sng" algn="ctr">
+                      <a:solidFill>
+                        <a:srgbClr val="EEEEEE"/>
+                      </a:solidFill>
+                      <a:prstDash val="solid"/>
+                      <a:round/>
+                      <a:headEnd type="none" w="med" len="med"/>
+                      <a:tailEnd type="none" w="med" len="med"/>
+                    </a:lnR>
+                    <a:lnT w="2540" cap="flat" cmpd="sng" algn="ctr">
+                      <a:solidFill>
+                        <a:srgbClr val="EEEEEE"/>
+                      </a:solidFill>
+                      <a:prstDash val="solid"/>
+                      <a:round/>
+                      <a:headEnd type="none" w="med" len="med"/>
+                      <a:tailEnd type="none" w="med" len="med"/>
+                    </a:lnT>
+                    <a:lnB w="2540" cap="flat" cmpd="sng" algn="ctr">
+                      <a:solidFill>
+                        <a:srgbClr val="EEEEEE"/>
+                      </a:solidFill>
+                      <a:prstDash val="solid"/>
+                      <a:round/>
+                      <a:headEnd type="none" w="med" len="med"/>
+                      <a:tailEnd type="none" w="med" len="med"/>
+                    </a:lnB>
+                  </a:tcPr>
+                </a:tc>
+                <a:tc>
+                  <a:txBody>
+                    <a:bodyPr/>
+                    <a:lstStyle/>
+                    <a:p>
+                      <a:pPr algn="ctr" indent="0" marL="0">
+                        <a:buNone/>
+                      </a:pPr>
+                      <a:r>
+                        <a:rPr lang="en-US" sz="500" dirty="0">
+                          <a:solidFill>
+                            <a:srgbClr val="999999"/>
+                          </a:solidFill>
+                          <a:latin typeface="Calibri" pitchFamily="34" charset="0"/>
+                          <a:ea typeface="Calibri" pitchFamily="34" charset="-122"/>
+                          <a:cs typeface="Calibri" pitchFamily="34" charset="-120"/>
+                        </a:rPr>
+                        <a:t>0.36%</a:t>
+                      </a:r>
+                      <a:endParaRPr lang="en-US" sz="500" dirty="0">
+                        <a:latin typeface="Calibri" charset="0"/>
+                        <a:ea typeface="Calibri" charset="0"/>
+                        <a:cs typeface="Calibri" charset="0"/>
+                      </a:endParaRPr>
+                    </a:p>
+                  </a:txBody>
+                  <a:tcPr marL="91440" marR="91440" marT="45720" marB="45720">
+                    <a:lnL w="2540" cap="flat" cmpd="sng" algn="ctr">
+                      <a:solidFill>
+                        <a:srgbClr val="EEEEEE"/>
+                      </a:solidFill>
+                      <a:prstDash val="solid"/>
+                      <a:round/>
+                      <a:headEnd type="none" w="med" len="med"/>
+                      <a:tailEnd type="none" w="med" len="med"/>
+                    </a:lnL>
+                    <a:lnR w="2540" cap="flat" cmpd="sng" algn="ctr">
+                      <a:solidFill>
+                        <a:srgbClr val="EEEEEE"/>
+                      </a:solidFill>
+                      <a:prstDash val="solid"/>
+                      <a:round/>
+                      <a:headEnd type="none" w="med" len="med"/>
+                      <a:tailEnd type="none" w="med" len="med"/>
+                    </a:lnR>
+                    <a:lnT w="2540" cap="flat" cmpd="sng" algn="ctr">
+                      <a:solidFill>
+                        <a:srgbClr val="EEEEEE"/>
+                      </a:solidFill>
+                      <a:prstDash val="solid"/>
+                      <a:round/>
+                      <a:headEnd type="none" w="med" len="med"/>
+                      <a:tailEnd type="none" w="med" len="med"/>
+                    </a:lnT>
+                    <a:lnB w="2540" cap="flat" cmpd="sng" algn="ctr">
+                      <a:solidFill>
+                        <a:srgbClr val="EEEEEE"/>
+                      </a:solidFill>
+                      <a:prstDash val="solid"/>
+                      <a:round/>
+                      <a:headEnd type="none" w="med" len="med"/>
+                      <a:tailEnd type="none" w="med" len="med"/>
+                    </a:lnB>
+                  </a:tcPr>
+                </a:tc>
+                <a:tc>
+                  <a:txBody>
+                    <a:bodyPr/>
+                    <a:lstStyle/>
+                    <a:p>
+                      <a:pPr algn="ctr" indent="0" marL="0">
+                        <a:buNone/>
+                      </a:pPr>
+                      <a:r>
+                        <a:rPr lang="en-US" sz="500" dirty="0">
+                          <a:solidFill>
+                            <a:srgbClr val="999999"/>
+                          </a:solidFill>
+                          <a:latin typeface="Calibri" pitchFamily="34" charset="0"/>
+                          <a:ea typeface="Calibri" pitchFamily="34" charset="-122"/>
+                          <a:cs typeface="Calibri" pitchFamily="34" charset="-120"/>
+                        </a:rPr>
+                        <a:t>0.36%</a:t>
+                      </a:r>
+                      <a:endParaRPr lang="en-US" sz="500" dirty="0">
+                        <a:latin typeface="Calibri" charset="0"/>
+                        <a:ea typeface="Calibri" charset="0"/>
+                        <a:cs typeface="Calibri" charset="0"/>
+                      </a:endParaRPr>
+                    </a:p>
+                  </a:txBody>
+                  <a:tcPr marL="91440" marR="91440" marT="45720" marB="45720">
+                    <a:lnL w="2540" cap="flat" cmpd="sng" algn="ctr">
+                      <a:solidFill>
+                        <a:srgbClr val="EEEEEE"/>
+                      </a:solidFill>
+                      <a:prstDash val="solid"/>
+                      <a:round/>
+                      <a:headEnd type="none" w="med" len="med"/>
+                      <a:tailEnd type="none" w="med" len="med"/>
+                    </a:lnL>
+                    <a:lnR w="2540" cap="flat" cmpd="sng" algn="ctr">
+                      <a:solidFill>
+                        <a:srgbClr val="EEEEEE"/>
+                      </a:solidFill>
+                      <a:prstDash val="solid"/>
+                      <a:round/>
+                      <a:headEnd type="none" w="med" len="med"/>
+                      <a:tailEnd type="none" w="med" len="med"/>
+                    </a:lnR>
+                    <a:lnT w="2540" cap="flat" cmpd="sng" algn="ctr">
+                      <a:solidFill>
+                        <a:srgbClr val="EEEEEE"/>
+                      </a:solidFill>
+                      <a:prstDash val="solid"/>
+                      <a:round/>
+                      <a:headEnd type="none" w="med" len="med"/>
+                      <a:tailEnd type="none" w="med" len="med"/>
+                    </a:lnT>
+                    <a:lnB w="2540" cap="flat" cmpd="sng" algn="ctr">
+                      <a:solidFill>
+                        <a:srgbClr val="EEEEEE"/>
+                      </a:solidFill>
+                      <a:prstDash val="solid"/>
+                      <a:round/>
+                      <a:headEnd type="none" w="med" len="med"/>
+                      <a:tailEnd type="none" w="med" len="med"/>
+                    </a:lnB>
+                  </a:tcPr>
+                </a:tc>
+                <a:tc>
+                  <a:txBody>
+                    <a:bodyPr/>
+                    <a:lstStyle/>
+                    <a:p>
+                      <a:pPr algn="ctr" indent="0" marL="0">
+                        <a:buNone/>
+                      </a:pPr>
+                      <a:r>
+                        <a:rPr lang="en-US" sz="500" dirty="0">
+                          <a:solidFill>
+                            <a:srgbClr val="999999"/>
+                          </a:solidFill>
+                          <a:latin typeface="Calibri" pitchFamily="34" charset="0"/>
+                          <a:ea typeface="Calibri" pitchFamily="34" charset="-122"/>
+                          <a:cs typeface="Calibri" pitchFamily="34" charset="-120"/>
+                        </a:rPr>
+                        <a:t>0.34%</a:t>
+                      </a:r>
+                      <a:endParaRPr lang="en-US" sz="500" dirty="0">
+                        <a:latin typeface="Calibri" charset="0"/>
+                        <a:ea typeface="Calibri" charset="0"/>
+                        <a:cs typeface="Calibri" charset="0"/>
+                      </a:endParaRPr>
+                    </a:p>
+                  </a:txBody>
+                  <a:tcPr marL="91440" marR="91440" marT="45720" marB="45720">
+                    <a:lnL w="2540" cap="flat" cmpd="sng" algn="ctr">
+                      <a:solidFill>
+                        <a:srgbClr val="EEEEEE"/>
+                      </a:solidFill>
+                      <a:prstDash val="solid"/>
+                      <a:round/>
+                      <a:headEnd type="none" w="med" len="med"/>
+                      <a:tailEnd type="none" w="med" len="med"/>
+                    </a:lnL>
+                    <a:lnR w="2540" cap="flat" cmpd="sng" algn="ctr">
+                      <a:solidFill>
+                        <a:srgbClr val="EEEEEE"/>
+                      </a:solidFill>
+                      <a:prstDash val="solid"/>
+                      <a:round/>
+                      <a:headEnd type="none" w="med" len="med"/>
+                      <a:tailEnd type="none" w="med" len="med"/>
+                    </a:lnR>
+                    <a:lnT w="2540" cap="flat" cmpd="sng" algn="ctr">
+                      <a:solidFill>
+                        <a:srgbClr val="EEEEEE"/>
+                      </a:solidFill>
+                      <a:prstDash val="solid"/>
+                      <a:round/>
+                      <a:headEnd type="none" w="med" len="med"/>
+                      <a:tailEnd type="none" w="med" len="med"/>
+                    </a:lnT>
+                    <a:lnB w="2540" cap="flat" cmpd="sng" algn="ctr">
+                      <a:solidFill>
+                        <a:srgbClr val="EEEEEE"/>
+                      </a:solidFill>
+                      <a:prstDash val="solid"/>
+                      <a:round/>
+                      <a:headEnd type="none" w="med" len="med"/>
+                      <a:tailEnd type="none" w="med" len="med"/>
+                    </a:lnB>
+                  </a:tcPr>
+                </a:tc>
+                <a:tc>
+                  <a:txBody>
+                    <a:bodyPr/>
+                    <a:lstStyle/>
+                    <a:p>
+                      <a:pPr algn="ctr" indent="0" marL="0">
+                        <a:buNone/>
+                      </a:pPr>
+                      <a:r>
+                        <a:rPr lang="en-US" sz="500" dirty="0">
+                          <a:solidFill>
+                            <a:srgbClr val="999999"/>
+                          </a:solidFill>
+                          <a:latin typeface="Calibri" pitchFamily="34" charset="0"/>
+                          <a:ea typeface="Calibri" pitchFamily="34" charset="-122"/>
+                          <a:cs typeface="Calibri" pitchFamily="34" charset="-120"/>
+                        </a:rPr>
+                        <a:t>0.34%</a:t>
+                      </a:r>
+                      <a:endParaRPr lang="en-US" sz="500" dirty="0">
+                        <a:latin typeface="Calibri" charset="0"/>
+                        <a:ea typeface="Calibri" charset="0"/>
+                        <a:cs typeface="Calibri" charset="0"/>
+                      </a:endParaRPr>
+                    </a:p>
+                  </a:txBody>
+                  <a:tcPr marL="91440" marR="91440" marT="45720" marB="45720">
+                    <a:lnL w="2540" cap="flat" cmpd="sng" algn="ctr">
+                      <a:solidFill>
+                        <a:srgbClr val="EEEEEE"/>
+                      </a:solidFill>
+                      <a:prstDash val="solid"/>
+                      <a:round/>
+                      <a:headEnd type="none" w="med" len="med"/>
+                      <a:tailEnd type="none" w="med" len="med"/>
+                    </a:lnL>
+                    <a:lnR w="2540" cap="flat" cmpd="sng" algn="ctr">
+                      <a:solidFill>
+                        <a:srgbClr val="EEEEEE"/>
+                      </a:solidFill>
+                      <a:prstDash val="solid"/>
+                      <a:round/>
+                      <a:headEnd type="none" w="med" len="med"/>
+                      <a:tailEnd type="none" w="med" len="med"/>
+                    </a:lnR>
+                    <a:lnT w="2540" cap="flat" cmpd="sng" algn="ctr">
+                      <a:solidFill>
+                        <a:srgbClr val="EEEEEE"/>
+                      </a:solidFill>
+                      <a:prstDash val="solid"/>
+                      <a:round/>
+                      <a:headEnd type="none" w="med" len="med"/>
+                      <a:tailEnd type="none" w="med" len="med"/>
+                    </a:lnT>
+                    <a:lnB w="2540" cap="flat" cmpd="sng" algn="ctr">
+                      <a:solidFill>
+                        <a:srgbClr val="EEEEEE"/>
+                      </a:solidFill>
+                      <a:prstDash val="solid"/>
+                      <a:round/>
+                      <a:headEnd type="none" w="med" len="med"/>
+                      <a:tailEnd type="none" w="med" len="med"/>
+                    </a:lnB>
+                  </a:tcPr>
+                </a:tc>
+                <a:tc>
+                  <a:txBody>
+                    <a:bodyPr/>
+                    <a:lstStyle/>
+                    <a:p>
+                      <a:pPr algn="ctr" indent="0" marL="0">
+                        <a:buNone/>
+                      </a:pPr>
+                      <a:r>
+                        <a:rPr lang="en-US" sz="500" dirty="0">
+                          <a:solidFill>
+                            <a:srgbClr val="999999"/>
+                          </a:solidFill>
+                          <a:latin typeface="Calibri" pitchFamily="34" charset="0"/>
+                          <a:ea typeface="Calibri" pitchFamily="34" charset="-122"/>
+                          <a:cs typeface="Calibri" pitchFamily="34" charset="-120"/>
+                        </a:rPr>
+                        <a:t>0.32%</a:t>
+                      </a:r>
+                      <a:endParaRPr lang="en-US" sz="500" dirty="0">
+                        <a:latin typeface="Calibri" charset="0"/>
+                        <a:ea typeface="Calibri" charset="0"/>
+                        <a:cs typeface="Calibri" charset="0"/>
+                      </a:endParaRPr>
+                    </a:p>
+                  </a:txBody>
+                  <a:tcPr marL="91440" marR="91440" marT="45720" marB="45720">
+                    <a:lnL w="2540" cap="flat" cmpd="sng" algn="ctr">
+                      <a:solidFill>
+                        <a:srgbClr val="EEEEEE"/>
+                      </a:solidFill>
+                      <a:prstDash val="solid"/>
+                      <a:round/>
+                      <a:headEnd type="none" w="med" len="med"/>
+                      <a:tailEnd type="none" w="med" len="med"/>
+                    </a:lnL>
+                    <a:lnR w="2540" cap="flat" cmpd="sng" algn="ctr">
+                      <a:solidFill>
+                        <a:srgbClr val="EEEEEE"/>
+                      </a:solidFill>
+                      <a:prstDash val="solid"/>
+                      <a:round/>
+                      <a:headEnd type="none" w="med" len="med"/>
+                      <a:tailEnd type="none" w="med" len="med"/>
+                    </a:lnR>
+                    <a:lnT w="2540" cap="flat" cmpd="sng" algn="ctr">
+                      <a:solidFill>
+                        <a:srgbClr val="EEEEEE"/>
+                      </a:solidFill>
+                      <a:prstDash val="solid"/>
+                      <a:round/>
+                      <a:headEnd type="none" w="med" len="med"/>
+                      <a:tailEnd type="none" w="med" len="med"/>
+                    </a:lnT>
+                    <a:lnB w="2540" cap="flat" cmpd="sng" algn="ctr">
+                      <a:solidFill>
+                        <a:srgbClr val="EEEEEE"/>
+                      </a:solidFill>
+                      <a:prstDash val="solid"/>
+                      <a:round/>
+                      <a:headEnd type="none" w="med" len="med"/>
+                      <a:tailEnd type="none" w="med" len="med"/>
+                    </a:lnB>
+                  </a:tcPr>
+                </a:tc>
+                <a:tc>
+                  <a:txBody>
+                    <a:bodyPr/>
+                    <a:lstStyle/>
+                    <a:p>
+                      <a:pPr algn="ctr" indent="0" marL="0">
+                        <a:buNone/>
+                      </a:pPr>
+                      <a:r>
+                        <a:rPr lang="en-US" sz="500" dirty="0">
+                          <a:solidFill>
+                            <a:srgbClr val="999999"/>
+                          </a:solidFill>
+                          <a:latin typeface="Calibri" pitchFamily="34" charset="0"/>
+                          <a:ea typeface="Calibri" pitchFamily="34" charset="-122"/>
+                          <a:cs typeface="Calibri" pitchFamily="34" charset="-120"/>
+                        </a:rPr>
+                        <a:t>-2.99%</a:t>
+                      </a:r>
+                      <a:endParaRPr lang="en-US" sz="500" dirty="0">
+                        <a:latin typeface="Calibri" charset="0"/>
+                        <a:ea typeface="Calibri" charset="0"/>
+                        <a:cs typeface="Calibri" charset="0"/>
+                      </a:endParaRPr>
+                    </a:p>
+                  </a:txBody>
+                  <a:tcPr marL="91440" marR="91440" marT="45720" marB="45720">
+                    <a:lnL w="2540" cap="flat" cmpd="sng" algn="ctr">
+                      <a:solidFill>
+                        <a:srgbClr val="EEEEEE"/>
+                      </a:solidFill>
+                      <a:prstDash val="solid"/>
+                      <a:round/>
+                      <a:headEnd type="none" w="med" len="med"/>
+                      <a:tailEnd type="none" w="med" len="med"/>
+                    </a:lnL>
+                    <a:lnR w="2540" cap="flat" cmpd="sng" algn="ctr">
+                      <a:solidFill>
+                        <a:srgbClr val="EEEEEE"/>
+                      </a:solidFill>
+                      <a:prstDash val="solid"/>
+                      <a:round/>
+                      <a:headEnd type="none" w="med" len="med"/>
+                      <a:tailEnd type="none" w="med" len="med"/>
+                    </a:lnR>
+                    <a:lnT w="2540" cap="flat" cmpd="sng" algn="ctr">
+                      <a:solidFill>
+                        <a:srgbClr val="EEEEEE"/>
+                      </a:solidFill>
+                      <a:prstDash val="solid"/>
+                      <a:round/>
+                      <a:headEnd type="none" w="med" len="med"/>
+                      <a:tailEnd type="none" w="med" len="med"/>
+                    </a:lnT>
+                    <a:lnB w="2540" cap="flat" cmpd="sng" algn="ctr">
+                      <a:solidFill>
+                        <a:srgbClr val="EEEEEE"/>
+                      </a:solidFill>
+                      <a:prstDash val="solid"/>
+                      <a:round/>
+                      <a:headEnd type="none" w="med" len="med"/>
+                      <a:tailEnd type="none" w="med" len="med"/>
+                    </a:lnB>
+                  </a:tcPr>
+                </a:tc>
+                <a:tc>
+                  <a:txBody>
+                    <a:bodyPr/>
+                    <a:lstStyle/>
+                    <a:p>
+                      <a:pPr algn="ctr" indent="0" marL="0">
+                        <a:buNone/>
+                      </a:pPr>
+                      <a:r>
+                        <a:rPr lang="en-US" sz="500" b="1" dirty="0">
+                          <a:solidFill>
+                            <a:srgbClr val="999999"/>
+                          </a:solidFill>
+                          <a:latin typeface="Calibri" pitchFamily="34" charset="0"/>
+                          <a:ea typeface="Calibri" pitchFamily="34" charset="-122"/>
+                          <a:cs typeface="Calibri" pitchFamily="34" charset="-120"/>
+                        </a:rPr>
+                        <a:t>0.90%</a:t>
+                      </a:r>
+                      <a:endParaRPr lang="en-US" sz="500" dirty="0">
+                        <a:latin typeface="Calibri" charset="0"/>
+                        <a:ea typeface="Calibri" charset="0"/>
+                        <a:cs typeface="Calibri" charset="0"/>
+                      </a:endParaRPr>
+                    </a:p>
+                  </a:txBody>
+                  <a:tcPr marL="91440" marR="91440" marT="45720" marB="45720">
+                    <a:lnL w="2540" cap="flat" cmpd="sng" algn="ctr">
+                      <a:solidFill>
+                        <a:srgbClr val="EEEEEE"/>
+                      </a:solidFill>
+                      <a:prstDash val="solid"/>
+                      <a:round/>
+                      <a:headEnd type="none" w="med" len="med"/>
+                      <a:tailEnd type="none" w="med" len="med"/>
+                    </a:lnL>
+                    <a:lnR w="2540" cap="flat" cmpd="sng" algn="ctr">
+                      <a:solidFill>
+                        <a:srgbClr val="EEEEEE"/>
+                      </a:solidFill>
+                      <a:prstDash val="solid"/>
+                      <a:round/>
+                      <a:headEnd type="none" w="med" len="med"/>
+                      <a:tailEnd type="none" w="med" len="med"/>
+                    </a:lnR>
+                    <a:lnT w="2540" cap="flat" cmpd="sng" algn="ctr">
+                      <a:solidFill>
+                        <a:srgbClr val="EEEEEE"/>
+                      </a:solidFill>
+                      <a:prstDash val="solid"/>
+                      <a:round/>
+                      <a:headEnd type="none" w="med" len="med"/>
+                      <a:tailEnd type="none" w="med" len="med"/>
+                    </a:lnT>
+                    <a:lnB w="2540" cap="flat" cmpd="sng" algn="ctr">
+                      <a:solidFill>
+                        <a:srgbClr val="EEEEEE"/>
+                      </a:solidFill>
+                      <a:prstDash val="solid"/>
+                      <a:round/>
+                      <a:headEnd type="none" w="med" len="med"/>
+                      <a:tailEnd type="none" w="med" len="med"/>
+                    </a:lnB>
+                  </a:tcPr>
+                </a:tc>
+              </a:tr>
+              <a:tr h="123444">
+                <a:tc>
+                  <a:txBody>
+                    <a:bodyPr/>
+                    <a:lstStyle/>
+                    <a:p>
+                      <a:pPr algn="l" indent="0" marL="0">
+                        <a:buNone/>
+                      </a:pPr>
+                      <a:endParaRPr lang="en-US" sz="500" dirty="0">
+                        <a:latin typeface="Calibri" charset="0"/>
+                        <a:ea typeface="Calibri" charset="0"/>
+                        <a:cs typeface="Calibri" charset="0"/>
+                      </a:endParaRPr>
+                    </a:p>
+                  </a:txBody>
+                  <a:tcPr marL="91440" marR="91440" marT="45720" marB="45720">
+                    <a:lnL w="2540" cap="flat" cmpd="sng" algn="ctr">
+                      <a:solidFill>
+                        <a:srgbClr val="EEEEEE"/>
+                      </a:solidFill>
+                      <a:prstDash val="solid"/>
+                      <a:round/>
+                      <a:headEnd type="none" w="med" len="med"/>
+                      <a:tailEnd type="none" w="med" len="med"/>
+                    </a:lnL>
+                    <a:lnR w="2540" cap="flat" cmpd="sng" algn="ctr">
+                      <a:solidFill>
+                        <a:srgbClr val="EEEEEE"/>
+                      </a:solidFill>
+                      <a:prstDash val="solid"/>
+                      <a:round/>
+                      <a:headEnd type="none" w="med" len="med"/>
+                      <a:tailEnd type="none" w="med" len="med"/>
+                    </a:lnR>
+                    <a:lnT w="2540" cap="flat" cmpd="sng" algn="ctr">
+                      <a:solidFill>
+                        <a:srgbClr val="EEEEEE"/>
+                      </a:solidFill>
+                      <a:prstDash val="solid"/>
+                      <a:round/>
+                      <a:headEnd type="none" w="med" len="med"/>
+                      <a:tailEnd type="none" w="med" len="med"/>
+                    </a:lnT>
+                    <a:lnB w="2540" cap="flat" cmpd="sng" algn="ctr">
+                      <a:solidFill>
+                        <a:srgbClr val="EEEEEE"/>
+                      </a:solidFill>
+                      <a:prstDash val="solid"/>
+                      <a:round/>
+                      <a:headEnd type="none" w="med" len="med"/>
+                      <a:tailEnd type="none" w="med" len="med"/>
+                    </a:lnB>
+                  </a:tcPr>
+                </a:tc>
+                <a:tc>
+                  <a:txBody>
+                    <a:bodyPr/>
+                    <a:lstStyle/>
+                    <a:p>
+                      <a:pPr algn="l" indent="0" marL="0">
+                        <a:buNone/>
+                      </a:pPr>
+                      <a:r>
+                        <a:rPr lang="en-US" sz="500" dirty="0">
+                          <a:solidFill>
+                            <a:srgbClr val="000000"/>
+                          </a:solidFill>
+                          <a:latin typeface="Calibri" pitchFamily="34" charset="0"/>
+                          <a:ea typeface="Calibri" pitchFamily="34" charset="-122"/>
+                          <a:cs typeface="Calibri" pitchFamily="34" charset="-120"/>
+                        </a:rPr>
+                        <a:t>FIP LIQUIDEZ Plus</a:t>
+                      </a:r>
+                      <a:endParaRPr lang="en-US" sz="500" dirty="0">
+                        <a:latin typeface="Calibri" charset="0"/>
+                        <a:ea typeface="Calibri" charset="0"/>
+                        <a:cs typeface="Calibri" charset="0"/>
+                      </a:endParaRPr>
+                    </a:p>
+                  </a:txBody>
+                  <a:tcPr marL="91440" marR="91440" marT="45720" marB="45720">
+                    <a:lnL w="2540" cap="flat" cmpd="sng" algn="ctr">
+                      <a:solidFill>
+                        <a:srgbClr val="EEEEEE"/>
+                      </a:solidFill>
+                      <a:prstDash val="solid"/>
+                      <a:round/>
+                      <a:headEnd type="none" w="med" len="med"/>
+                      <a:tailEnd type="none" w="med" len="med"/>
+                    </a:lnL>
+                    <a:lnR w="2540" cap="flat" cmpd="sng" algn="ctr">
+                      <a:solidFill>
+                        <a:srgbClr val="EEEEEE"/>
+                      </a:solidFill>
+                      <a:prstDash val="solid"/>
+                      <a:round/>
+                      <a:headEnd type="none" w="med" len="med"/>
+                      <a:tailEnd type="none" w="med" len="med"/>
+                    </a:lnR>
+                    <a:lnT w="2540" cap="flat" cmpd="sng" algn="ctr">
+                      <a:solidFill>
+                        <a:srgbClr val="EEEEEE"/>
+                      </a:solidFill>
+                      <a:prstDash val="solid"/>
+                      <a:round/>
+                      <a:headEnd type="none" w="med" len="med"/>
+                      <a:tailEnd type="none" w="med" len="med"/>
+                    </a:lnT>
+                    <a:lnB w="2540" cap="flat" cmpd="sng" algn="ctr">
+                      <a:solidFill>
+                        <a:srgbClr val="EEEEEE"/>
+                      </a:solidFill>
+                      <a:prstDash val="solid"/>
+                      <a:round/>
+                      <a:headEnd type="none" w="med" len="med"/>
+                      <a:tailEnd type="none" w="med" len="med"/>
+                    </a:lnB>
+                  </a:tcPr>
+                </a:tc>
+                <a:tc>
+                  <a:txBody>
+                    <a:bodyPr/>
+                    <a:lstStyle/>
+                    <a:p>
+                      <a:pPr algn="ctr" indent="0" marL="0">
+                        <a:buNone/>
+                      </a:pPr>
+                      <a:r>
+                        <a:rPr lang="en-US" sz="500" dirty="0">
+                          <a:solidFill>
+                            <a:srgbClr val="000000"/>
+                          </a:solidFill>
+                          <a:latin typeface="Calibri" pitchFamily="34" charset="0"/>
+                          <a:ea typeface="Calibri" pitchFamily="34" charset="-122"/>
+                          <a:cs typeface="Calibri" pitchFamily="34" charset="-120"/>
+                        </a:rPr>
+                        <a:t>0.87%</a:t>
+                      </a:r>
+                      <a:endParaRPr lang="en-US" sz="500" dirty="0">
+                        <a:latin typeface="Calibri" charset="0"/>
+                        <a:ea typeface="Calibri" charset="0"/>
+                        <a:cs typeface="Calibri" charset="0"/>
+                      </a:endParaRPr>
+                    </a:p>
+                  </a:txBody>
+                  <a:tcPr marL="91440" marR="91440" marT="45720" marB="45720">
+                    <a:lnL w="2540" cap="flat" cmpd="sng" algn="ctr">
+                      <a:solidFill>
+                        <a:srgbClr val="EEEEEE"/>
+                      </a:solidFill>
+                      <a:prstDash val="solid"/>
+                      <a:round/>
+                      <a:headEnd type="none" w="med" len="med"/>
+                      <a:tailEnd type="none" w="med" len="med"/>
+                    </a:lnL>
+                    <a:lnR w="2540" cap="flat" cmpd="sng" algn="ctr">
+                      <a:solidFill>
+                        <a:srgbClr val="EEEEEE"/>
+                      </a:solidFill>
+                      <a:prstDash val="solid"/>
+                      <a:round/>
+                      <a:headEnd type="none" w="med" len="med"/>
+                      <a:tailEnd type="none" w="med" len="med"/>
+                    </a:lnR>
+                    <a:lnT w="2540" cap="flat" cmpd="sng" algn="ctr">
+                      <a:solidFill>
+                        <a:srgbClr val="EEEEEE"/>
+                      </a:solidFill>
+                      <a:prstDash val="solid"/>
+                      <a:round/>
+                      <a:headEnd type="none" w="med" len="med"/>
+                      <a:tailEnd type="none" w="med" len="med"/>
+                    </a:lnT>
+                    <a:lnB w="2540" cap="flat" cmpd="sng" algn="ctr">
+                      <a:solidFill>
+                        <a:srgbClr val="EEEEEE"/>
+                      </a:solidFill>
+                      <a:prstDash val="solid"/>
+                      <a:round/>
+                      <a:headEnd type="none" w="med" len="med"/>
+                      <a:tailEnd type="none" w="med" len="med"/>
+                    </a:lnB>
+                  </a:tcPr>
+                </a:tc>
+                <a:tc>
+                  <a:txBody>
+                    <a:bodyPr/>
+                    <a:lstStyle/>
+                    <a:p>
+                      <a:pPr algn="ctr" indent="0" marL="0">
+                        <a:buNone/>
+                      </a:pPr>
+                      <a:r>
+                        <a:rPr lang="en-US" sz="500" dirty="0">
+                          <a:solidFill>
+                            <a:srgbClr val="000000"/>
+                          </a:solidFill>
+                          <a:latin typeface="Calibri" pitchFamily="34" charset="0"/>
+                          <a:ea typeface="Calibri" pitchFamily="34" charset="-122"/>
+                          <a:cs typeface="Calibri" pitchFamily="34" charset="-120"/>
+                        </a:rPr>
+                        <a:t>0.68%</a:t>
+                      </a:r>
+                      <a:endParaRPr lang="en-US" sz="500" dirty="0">
+                        <a:latin typeface="Calibri" charset="0"/>
+                        <a:ea typeface="Calibri" charset="0"/>
+                        <a:cs typeface="Calibri" charset="0"/>
+                      </a:endParaRPr>
+                    </a:p>
+                  </a:txBody>
+                  <a:tcPr marL="91440" marR="91440" marT="45720" marB="45720">
+                    <a:lnL w="2540" cap="flat" cmpd="sng" algn="ctr">
+                      <a:solidFill>
+                        <a:srgbClr val="EEEEEE"/>
+                      </a:solidFill>
+                      <a:prstDash val="solid"/>
+                      <a:round/>
+                      <a:headEnd type="none" w="med" len="med"/>
+                      <a:tailEnd type="none" w="med" len="med"/>
+                    </a:lnL>
+                    <a:lnR w="2540" cap="flat" cmpd="sng" algn="ctr">
+                      <a:solidFill>
+                        <a:srgbClr val="EEEEEE"/>
+                      </a:solidFill>
+                      <a:prstDash val="solid"/>
+                      <a:round/>
+                      <a:headEnd type="none" w="med" len="med"/>
+                      <a:tailEnd type="none" w="med" len="med"/>
+                    </a:lnR>
+                    <a:lnT w="2540" cap="flat" cmpd="sng" algn="ctr">
+                      <a:solidFill>
+                        <a:srgbClr val="EEEEEE"/>
+                      </a:solidFill>
+                      <a:prstDash val="solid"/>
+                      <a:round/>
+                      <a:headEnd type="none" w="med" len="med"/>
+                      <a:tailEnd type="none" w="med" len="med"/>
+                    </a:lnT>
+                    <a:lnB w="2540" cap="flat" cmpd="sng" algn="ctr">
+                      <a:solidFill>
+                        <a:srgbClr val="EEEEEE"/>
+                      </a:solidFill>
+                      <a:prstDash val="solid"/>
+                      <a:round/>
+                      <a:headEnd type="none" w="med" len="med"/>
+                      <a:tailEnd type="none" w="med" len="med"/>
+                    </a:lnB>
+                  </a:tcPr>
+                </a:tc>
+                <a:tc>
+                  <a:txBody>
+                    <a:bodyPr/>
+                    <a:lstStyle/>
+                    <a:p>
+                      <a:pPr algn="ctr" indent="0" marL="0">
+                        <a:buNone/>
+                      </a:pPr>
+                      <a:r>
+                        <a:rPr lang="en-US" sz="500" dirty="0">
+                          <a:solidFill>
+                            <a:srgbClr val="000000"/>
+                          </a:solidFill>
+                          <a:latin typeface="Calibri" pitchFamily="34" charset="0"/>
+                          <a:ea typeface="Calibri" pitchFamily="34" charset="-122"/>
+                          <a:cs typeface="Calibri" pitchFamily="34" charset="-120"/>
+                        </a:rPr>
+                        <a:t>0.63%</a:t>
+                      </a:r>
+                      <a:endParaRPr lang="en-US" sz="500" dirty="0">
+                        <a:latin typeface="Calibri" charset="0"/>
+                        <a:ea typeface="Calibri" charset="0"/>
+                        <a:cs typeface="Calibri" charset="0"/>
+                      </a:endParaRPr>
+                    </a:p>
+                  </a:txBody>
+                  <a:tcPr marL="91440" marR="91440" marT="45720" marB="45720">
+                    <a:lnL w="2540" cap="flat" cmpd="sng" algn="ctr">
+                      <a:solidFill>
+                        <a:srgbClr val="EEEEEE"/>
+                      </a:solidFill>
+                      <a:prstDash val="solid"/>
+                      <a:round/>
+                      <a:headEnd type="none" w="med" len="med"/>
+                      <a:tailEnd type="none" w="med" len="med"/>
+                    </a:lnL>
+                    <a:lnR w="2540" cap="flat" cmpd="sng" algn="ctr">
+                      <a:solidFill>
+                        <a:srgbClr val="EEEEEE"/>
+                      </a:solidFill>
+                      <a:prstDash val="solid"/>
+                      <a:round/>
+                      <a:headEnd type="none" w="med" len="med"/>
+                      <a:tailEnd type="none" w="med" len="med"/>
+                    </a:lnR>
+                    <a:lnT w="2540" cap="flat" cmpd="sng" algn="ctr">
+                      <a:solidFill>
+                        <a:srgbClr val="EEEEEE"/>
+                      </a:solidFill>
+                      <a:prstDash val="solid"/>
+                      <a:round/>
+                      <a:headEnd type="none" w="med" len="med"/>
+                      <a:tailEnd type="none" w="med" len="med"/>
+                    </a:lnT>
+                    <a:lnB w="2540" cap="flat" cmpd="sng" algn="ctr">
+                      <a:solidFill>
+                        <a:srgbClr val="EEEEEE"/>
+                      </a:solidFill>
+                      <a:prstDash val="solid"/>
+                      <a:round/>
+                      <a:headEnd type="none" w="med" len="med"/>
+                      <a:tailEnd type="none" w="med" len="med"/>
+                    </a:lnB>
+                  </a:tcPr>
+                </a:tc>
+                <a:tc>
+                  <a:txBody>
+                    <a:bodyPr/>
+                    <a:lstStyle/>
+                    <a:p>
+                      <a:pPr algn="ctr" indent="0" marL="0">
+                        <a:buNone/>
+                      </a:pPr>
+                      <a:r>
+                        <a:rPr lang="en-US" sz="500" dirty="0">
+                          <a:solidFill>
+                            <a:srgbClr val="000000"/>
+                          </a:solidFill>
+                          <a:latin typeface="Calibri" pitchFamily="34" charset="0"/>
+                          <a:ea typeface="Calibri" pitchFamily="34" charset="-122"/>
+                          <a:cs typeface="Calibri" pitchFamily="34" charset="-120"/>
+                        </a:rPr>
+                        <a:t>0.67%</a:t>
+                      </a:r>
+                      <a:endParaRPr lang="en-US" sz="500" dirty="0">
+                        <a:latin typeface="Calibri" charset="0"/>
+                        <a:ea typeface="Calibri" charset="0"/>
+                        <a:cs typeface="Calibri" charset="0"/>
+                      </a:endParaRPr>
+                    </a:p>
+                  </a:txBody>
+                  <a:tcPr marL="91440" marR="91440" marT="45720" marB="45720">
+                    <a:lnL w="2540" cap="flat" cmpd="sng" algn="ctr">
+                      <a:solidFill>
+                        <a:srgbClr val="EEEEEE"/>
+                      </a:solidFill>
+                      <a:prstDash val="solid"/>
+                      <a:round/>
+                      <a:headEnd type="none" w="med" len="med"/>
+                      <a:tailEnd type="none" w="med" len="med"/>
+                    </a:lnL>
+                    <a:lnR w="2540" cap="flat" cmpd="sng" algn="ctr">
+                      <a:solidFill>
+                        <a:srgbClr val="EEEEEE"/>
+                      </a:solidFill>
+                      <a:prstDash val="solid"/>
+                      <a:round/>
+                      <a:headEnd type="none" w="med" len="med"/>
+                      <a:tailEnd type="none" w="med" len="med"/>
+                    </a:lnR>
+                    <a:lnT w="2540" cap="flat" cmpd="sng" algn="ctr">
+                      <a:solidFill>
+                        <a:srgbClr val="EEEEEE"/>
+                      </a:solidFill>
+                      <a:prstDash val="solid"/>
+                      <a:round/>
+                      <a:headEnd type="none" w="med" len="med"/>
+                      <a:tailEnd type="none" w="med" len="med"/>
+                    </a:lnT>
+                    <a:lnB w="2540" cap="flat" cmpd="sng" algn="ctr">
+                      <a:solidFill>
+                        <a:srgbClr val="EEEEEE"/>
+                      </a:solidFill>
+                      <a:prstDash val="solid"/>
+                      <a:round/>
+                      <a:headEnd type="none" w="med" len="med"/>
+                      <a:tailEnd type="none" w="med" len="med"/>
+                    </a:lnB>
+                  </a:tcPr>
+                </a:tc>
+                <a:tc>
+                  <a:txBody>
+                    <a:bodyPr/>
+                    <a:lstStyle/>
+                    <a:p>
+                      <a:pPr algn="ctr" indent="0" marL="0">
+                        <a:buNone/>
+                      </a:pPr>
+                      <a:r>
+                        <a:rPr lang="en-US" sz="500" dirty="0">
+                          <a:solidFill>
+                            <a:srgbClr val="000000"/>
+                          </a:solidFill>
+                          <a:latin typeface="Calibri" pitchFamily="34" charset="0"/>
+                          <a:ea typeface="Calibri" pitchFamily="34" charset="-122"/>
+                          <a:cs typeface="Calibri" pitchFamily="34" charset="-120"/>
+                        </a:rPr>
+                        <a:t>0.65%</a:t>
+                      </a:r>
+                      <a:endParaRPr lang="en-US" sz="500" dirty="0">
+                        <a:latin typeface="Calibri" charset="0"/>
+                        <a:ea typeface="Calibri" charset="0"/>
+                        <a:cs typeface="Calibri" charset="0"/>
+                      </a:endParaRPr>
+                    </a:p>
+                  </a:txBody>
+                  <a:tcPr marL="91440" marR="91440" marT="45720" marB="45720">
+                    <a:lnL w="2540" cap="flat" cmpd="sng" algn="ctr">
+                      <a:solidFill>
+                        <a:srgbClr val="EEEEEE"/>
+                      </a:solidFill>
+                      <a:prstDash val="solid"/>
+                      <a:round/>
+                      <a:headEnd type="none" w="med" len="med"/>
+                      <a:tailEnd type="none" w="med" len="med"/>
+                    </a:lnL>
+                    <a:lnR w="2540" cap="flat" cmpd="sng" algn="ctr">
+                      <a:solidFill>
+                        <a:srgbClr val="EEEEEE"/>
+                      </a:solidFill>
+                      <a:prstDash val="solid"/>
+                      <a:round/>
+                      <a:headEnd type="none" w="med" len="med"/>
+                      <a:tailEnd type="none" w="med" len="med"/>
+                    </a:lnR>
+                    <a:lnT w="2540" cap="flat" cmpd="sng" algn="ctr">
+                      <a:solidFill>
+                        <a:srgbClr val="EEEEEE"/>
+                      </a:solidFill>
+                      <a:prstDash val="solid"/>
+                      <a:round/>
+                      <a:headEnd type="none" w="med" len="med"/>
+                      <a:tailEnd type="none" w="med" len="med"/>
+                    </a:lnT>
+                    <a:lnB w="2540" cap="flat" cmpd="sng" algn="ctr">
+                      <a:solidFill>
+                        <a:srgbClr val="EEEEEE"/>
+                      </a:solidFill>
+                      <a:prstDash val="solid"/>
+                      <a:round/>
+                      <a:headEnd type="none" w="med" len="med"/>
+                      <a:tailEnd type="none" w="med" len="med"/>
+                    </a:lnB>
+                  </a:tcPr>
+                </a:tc>
+                <a:tc>
+                  <a:txBody>
+                    <a:bodyPr/>
+                    <a:lstStyle/>
+                    <a:p>
+                      <a:pPr algn="ctr" indent="0" marL="0">
+                        <a:buNone/>
+                      </a:pPr>
+                      <a:r>
+                        <a:rPr lang="en-US" sz="500" dirty="0">
+                          <a:solidFill>
+                            <a:srgbClr val="000000"/>
+                          </a:solidFill>
+                          <a:latin typeface="Calibri" pitchFamily="34" charset="0"/>
+                          <a:ea typeface="Calibri" pitchFamily="34" charset="-122"/>
+                          <a:cs typeface="Calibri" pitchFamily="34" charset="-120"/>
+                        </a:rPr>
+                        <a:t>0.59%</a:t>
+                      </a:r>
+                      <a:endParaRPr lang="en-US" sz="500" dirty="0">
+                        <a:latin typeface="Calibri" charset="0"/>
+                        <a:ea typeface="Calibri" charset="0"/>
+                        <a:cs typeface="Calibri" charset="0"/>
+                      </a:endParaRPr>
+                    </a:p>
+                  </a:txBody>
+                  <a:tcPr marL="91440" marR="91440" marT="45720" marB="45720">
+                    <a:lnL w="2540" cap="flat" cmpd="sng" algn="ctr">
+                      <a:solidFill>
+                        <a:srgbClr val="EEEEEE"/>
+                      </a:solidFill>
+                      <a:prstDash val="solid"/>
+                      <a:round/>
+                      <a:headEnd type="none" w="med" len="med"/>
+                      <a:tailEnd type="none" w="med" len="med"/>
+                    </a:lnL>
+                    <a:lnR w="2540" cap="flat" cmpd="sng" algn="ctr">
+                      <a:solidFill>
+                        <a:srgbClr val="EEEEEE"/>
+                      </a:solidFill>
+                      <a:prstDash val="solid"/>
+                      <a:round/>
+                      <a:headEnd type="none" w="med" len="med"/>
+                      <a:tailEnd type="none" w="med" len="med"/>
+                    </a:lnR>
+                    <a:lnT w="2540" cap="flat" cmpd="sng" algn="ctr">
+                      <a:solidFill>
+                        <a:srgbClr val="EEEEEE"/>
+                      </a:solidFill>
+                      <a:prstDash val="solid"/>
+                      <a:round/>
+                      <a:headEnd type="none" w="med" len="med"/>
+                      <a:tailEnd type="none" w="med" len="med"/>
+                    </a:lnT>
+                    <a:lnB w="2540" cap="flat" cmpd="sng" algn="ctr">
+                      <a:solidFill>
+                        <a:srgbClr val="EEEEEE"/>
+                      </a:solidFill>
+                      <a:prstDash val="solid"/>
+                      <a:round/>
+                      <a:headEnd type="none" w="med" len="med"/>
+                      <a:tailEnd type="none" w="med" len="med"/>
+                    </a:lnB>
+                  </a:tcPr>
+                </a:tc>
+                <a:tc>
+                  <a:txBody>
+                    <a:bodyPr/>
+                    <a:lstStyle/>
+                    <a:p>
+                      <a:pPr algn="ctr" indent="0" marL="0">
+                        <a:buNone/>
+                      </a:pPr>
+                      <a:r>
+                        <a:rPr lang="en-US" sz="500" dirty="0">
+                          <a:solidFill>
+                            <a:srgbClr val="000000"/>
+                          </a:solidFill>
+                          <a:latin typeface="Calibri" pitchFamily="34" charset="0"/>
+                          <a:ea typeface="Calibri" pitchFamily="34" charset="-122"/>
+                          <a:cs typeface="Calibri" pitchFamily="34" charset="-120"/>
+                        </a:rPr>
+                        <a:t>0.54%</a:t>
+                      </a:r>
+                      <a:endParaRPr lang="en-US" sz="500" dirty="0">
+                        <a:latin typeface="Calibri" charset="0"/>
+                        <a:ea typeface="Calibri" charset="0"/>
+                        <a:cs typeface="Calibri" charset="0"/>
+                      </a:endParaRPr>
+                    </a:p>
+                  </a:txBody>
+                  <a:tcPr marL="91440" marR="91440" marT="45720" marB="45720">
+                    <a:lnL w="2540" cap="flat" cmpd="sng" algn="ctr">
+                      <a:solidFill>
+                        <a:srgbClr val="EEEEEE"/>
+                      </a:solidFill>
+                      <a:prstDash val="solid"/>
+                      <a:round/>
+                      <a:headEnd type="none" w="med" len="med"/>
+                      <a:tailEnd type="none" w="med" len="med"/>
+                    </a:lnL>
+                    <a:lnR w="2540" cap="flat" cmpd="sng" algn="ctr">
+                      <a:solidFill>
+                        <a:srgbClr val="EEEEEE"/>
+                      </a:solidFill>
+                      <a:prstDash val="solid"/>
+                      <a:round/>
+                      <a:headEnd type="none" w="med" len="med"/>
+                      <a:tailEnd type="none" w="med" len="med"/>
+                    </a:lnR>
+                    <a:lnT w="2540" cap="flat" cmpd="sng" algn="ctr">
+                      <a:solidFill>
+                        <a:srgbClr val="EEEEEE"/>
+                      </a:solidFill>
+                      <a:prstDash val="solid"/>
+                      <a:round/>
+                      <a:headEnd type="none" w="med" len="med"/>
+                      <a:tailEnd type="none" w="med" len="med"/>
+                    </a:lnT>
+                    <a:lnB w="2540" cap="flat" cmpd="sng" algn="ctr">
+                      <a:solidFill>
+                        <a:srgbClr val="EEEEEE"/>
+                      </a:solidFill>
+                      <a:prstDash val="solid"/>
+                      <a:round/>
+                      <a:headEnd type="none" w="med" len="med"/>
+                      <a:tailEnd type="none" w="med" len="med"/>
+                    </a:lnB>
+                  </a:tcPr>
+                </a:tc>
+                <a:tc>
+                  <a:txBody>
+                    <a:bodyPr/>
+                    <a:lstStyle/>
+                    <a:p>
+                      <a:pPr algn="ctr" indent="0" marL="0">
+                        <a:buNone/>
+                      </a:pPr>
+                      <a:r>
+                        <a:rPr lang="en-US" sz="500" dirty="0">
+                          <a:solidFill>
+                            <a:srgbClr val="000000"/>
+                          </a:solidFill>
+                          <a:latin typeface="Calibri" pitchFamily="34" charset="0"/>
+                          <a:ea typeface="Calibri" pitchFamily="34" charset="-122"/>
+                          <a:cs typeface="Calibri" pitchFamily="34" charset="-120"/>
+                        </a:rPr>
+                        <a:t>0.55%</a:t>
+                      </a:r>
+                      <a:endParaRPr lang="en-US" sz="500" dirty="0">
+                        <a:latin typeface="Calibri" charset="0"/>
+                        <a:ea typeface="Calibri" charset="0"/>
+                        <a:cs typeface="Calibri" charset="0"/>
+                      </a:endParaRPr>
+                    </a:p>
+                  </a:txBody>
+                  <a:tcPr marL="91440" marR="91440" marT="45720" marB="45720">
+                    <a:lnL w="2540" cap="flat" cmpd="sng" algn="ctr">
+                      <a:solidFill>
+                        <a:srgbClr val="EEEEEE"/>
+                      </a:solidFill>
+                      <a:prstDash val="solid"/>
+                      <a:round/>
+                      <a:headEnd type="none" w="med" len="med"/>
+                      <a:tailEnd type="none" w="med" len="med"/>
+                    </a:lnL>
+                    <a:lnR w="2540" cap="flat" cmpd="sng" algn="ctr">
+                      <a:solidFill>
+                        <a:srgbClr val="EEEEEE"/>
+                      </a:solidFill>
+                      <a:prstDash val="solid"/>
+                      <a:round/>
+                      <a:headEnd type="none" w="med" len="med"/>
+                      <a:tailEnd type="none" w="med" len="med"/>
+                    </a:lnR>
+                    <a:lnT w="2540" cap="flat" cmpd="sng" algn="ctr">
+                      <a:solidFill>
+                        <a:srgbClr val="EEEEEE"/>
+                      </a:solidFill>
+                      <a:prstDash val="solid"/>
+                      <a:round/>
+                      <a:headEnd type="none" w="med" len="med"/>
+                      <a:tailEnd type="none" w="med" len="med"/>
+                    </a:lnT>
+                    <a:lnB w="2540" cap="flat" cmpd="sng" algn="ctr">
+                      <a:solidFill>
+                        <a:srgbClr val="EEEEEE"/>
+                      </a:solidFill>
+                      <a:prstDash val="solid"/>
+                      <a:round/>
+                      <a:headEnd type="none" w="med" len="med"/>
+                      <a:tailEnd type="none" w="med" len="med"/>
+                    </a:lnB>
+                  </a:tcPr>
+                </a:tc>
+                <a:tc>
+                  <a:txBody>
+                    <a:bodyPr/>
+                    <a:lstStyle/>
+                    <a:p>
+                      <a:pPr algn="ctr" indent="0" marL="0">
+                        <a:buNone/>
+                      </a:pPr>
+                      <a:r>
+                        <a:rPr lang="en-US" sz="500" dirty="0">
+                          <a:solidFill>
+                            <a:srgbClr val="000000"/>
+                          </a:solidFill>
+                          <a:latin typeface="Calibri" pitchFamily="34" charset="0"/>
+                          <a:ea typeface="Calibri" pitchFamily="34" charset="-122"/>
+                          <a:cs typeface="Calibri" pitchFamily="34" charset="-120"/>
+                        </a:rPr>
+                        <a:t>0.50%</a:t>
+                      </a:r>
+                      <a:endParaRPr lang="en-US" sz="500" dirty="0">
+                        <a:latin typeface="Calibri" charset="0"/>
+                        <a:ea typeface="Calibri" charset="0"/>
+                        <a:cs typeface="Calibri" charset="0"/>
+                      </a:endParaRPr>
+                    </a:p>
+                  </a:txBody>
+                  <a:tcPr marL="91440" marR="91440" marT="45720" marB="45720">
+                    <a:lnL w="2540" cap="flat" cmpd="sng" algn="ctr">
+                      <a:solidFill>
+                        <a:srgbClr val="EEEEEE"/>
+                      </a:solidFill>
+                      <a:prstDash val="solid"/>
+                      <a:round/>
+                      <a:headEnd type="none" w="med" len="med"/>
+                      <a:tailEnd type="none" w="med" len="med"/>
+                    </a:lnL>
+                    <a:lnR w="2540" cap="flat" cmpd="sng" algn="ctr">
+                      <a:solidFill>
+                        <a:srgbClr val="EEEEEE"/>
+                      </a:solidFill>
+                      <a:prstDash val="solid"/>
+                      <a:round/>
+                      <a:headEnd type="none" w="med" len="med"/>
+                      <a:tailEnd type="none" w="med" len="med"/>
+                    </a:lnR>
+                    <a:lnT w="2540" cap="flat" cmpd="sng" algn="ctr">
+                      <a:solidFill>
+                        <a:srgbClr val="EEEEEE"/>
+                      </a:solidFill>
+                      <a:prstDash val="solid"/>
+                      <a:round/>
+                      <a:headEnd type="none" w="med" len="med"/>
+                      <a:tailEnd type="none" w="med" len="med"/>
+                    </a:lnT>
+                    <a:lnB w="2540" cap="flat" cmpd="sng" algn="ctr">
+                      <a:solidFill>
+                        <a:srgbClr val="EEEEEE"/>
+                      </a:solidFill>
+                      <a:prstDash val="solid"/>
+                      <a:round/>
+                      <a:headEnd type="none" w="med" len="med"/>
+                      <a:tailEnd type="none" w="med" len="med"/>
+                    </a:lnB>
+                  </a:tcPr>
+                </a:tc>
+                <a:tc>
+                  <a:txBody>
+                    <a:bodyPr/>
+                    <a:lstStyle/>
+                    <a:p>
+                      <a:pPr algn="ctr" indent="0" marL="0">
+                        <a:buNone/>
+                      </a:pPr>
+                      <a:r>
+                        <a:rPr lang="en-US" sz="500" dirty="0">
+                          <a:solidFill>
+                            <a:srgbClr val="000000"/>
+                          </a:solidFill>
+                          <a:latin typeface="Calibri" pitchFamily="34" charset="0"/>
+                          <a:ea typeface="Calibri" pitchFamily="34" charset="-122"/>
+                          <a:cs typeface="Calibri" pitchFamily="34" charset="-120"/>
+                        </a:rPr>
+                        <a:t>0.46%</a:t>
+                      </a:r>
+                      <a:endParaRPr lang="en-US" sz="500" dirty="0">
+                        <a:latin typeface="Calibri" charset="0"/>
+                        <a:ea typeface="Calibri" charset="0"/>
+                        <a:cs typeface="Calibri" charset="0"/>
+                      </a:endParaRPr>
+                    </a:p>
+                  </a:txBody>
+                  <a:tcPr marL="91440" marR="91440" marT="45720" marB="45720">
+                    <a:lnL w="2540" cap="flat" cmpd="sng" algn="ctr">
+                      <a:solidFill>
+                        <a:srgbClr val="EEEEEE"/>
+                      </a:solidFill>
+                      <a:prstDash val="solid"/>
+                      <a:round/>
+                      <a:headEnd type="none" w="med" len="med"/>
+                      <a:tailEnd type="none" w="med" len="med"/>
+                    </a:lnL>
+                    <a:lnR w="2540" cap="flat" cmpd="sng" algn="ctr">
+                      <a:solidFill>
+                        <a:srgbClr val="EEEEEE"/>
+                      </a:solidFill>
+                      <a:prstDash val="solid"/>
+                      <a:round/>
+                      <a:headEnd type="none" w="med" len="med"/>
+                      <a:tailEnd type="none" w="med" len="med"/>
+                    </a:lnR>
+                    <a:lnT w="2540" cap="flat" cmpd="sng" algn="ctr">
+                      <a:solidFill>
+                        <a:srgbClr val="EEEEEE"/>
+                      </a:solidFill>
+                      <a:prstDash val="solid"/>
+                      <a:round/>
+                      <a:headEnd type="none" w="med" len="med"/>
+                      <a:tailEnd type="none" w="med" len="med"/>
+                    </a:lnT>
+                    <a:lnB w="2540" cap="flat" cmpd="sng" algn="ctr">
+                      <a:solidFill>
+                        <a:srgbClr val="EEEEEE"/>
+                      </a:solidFill>
+                      <a:prstDash val="solid"/>
+                      <a:round/>
+                      <a:headEnd type="none" w="med" len="med"/>
+                      <a:tailEnd type="none" w="med" len="med"/>
+                    </a:lnB>
+                  </a:tcPr>
+                </a:tc>
+                <a:tc>
+                  <a:txBody>
+                    <a:bodyPr/>
+                    <a:lstStyle/>
+                    <a:p>
+                      <a:pPr algn="ctr" indent="0" marL="0">
+                        <a:buNone/>
+                      </a:pPr>
+                      <a:r>
+                        <a:rPr lang="en-US" sz="500" dirty="0">
+                          <a:solidFill>
+                            <a:srgbClr val="000000"/>
+                          </a:solidFill>
+                          <a:latin typeface="Calibri" pitchFamily="34" charset="0"/>
+                          <a:ea typeface="Calibri" pitchFamily="34" charset="-122"/>
+                          <a:cs typeface="Calibri" pitchFamily="34" charset="-120"/>
+                        </a:rPr>
+                        <a:t>0.45%</a:t>
+                      </a:r>
+                      <a:endParaRPr lang="en-US" sz="500" dirty="0">
+                        <a:latin typeface="Calibri" charset="0"/>
+                        <a:ea typeface="Calibri" charset="0"/>
+                        <a:cs typeface="Calibri" charset="0"/>
+                      </a:endParaRPr>
+                    </a:p>
+                  </a:txBody>
+                  <a:tcPr marL="91440" marR="91440" marT="45720" marB="45720">
+                    <a:lnL w="2540" cap="flat" cmpd="sng" algn="ctr">
+                      <a:solidFill>
+                        <a:srgbClr val="EEEEEE"/>
+                      </a:solidFill>
+                      <a:prstDash val="solid"/>
+                      <a:round/>
+                      <a:headEnd type="none" w="med" len="med"/>
+                      <a:tailEnd type="none" w="med" len="med"/>
+                    </a:lnL>
+                    <a:lnR w="2540" cap="flat" cmpd="sng" algn="ctr">
+                      <a:solidFill>
+                        <a:srgbClr val="EEEEEE"/>
+                      </a:solidFill>
+                      <a:prstDash val="solid"/>
+                      <a:round/>
+                      <a:headEnd type="none" w="med" len="med"/>
+                      <a:tailEnd type="none" w="med" len="med"/>
+                    </a:lnR>
+                    <a:lnT w="2540" cap="flat" cmpd="sng" algn="ctr">
+                      <a:solidFill>
+                        <a:srgbClr val="EEEEEE"/>
+                      </a:solidFill>
+                      <a:prstDash val="solid"/>
+                      <a:round/>
+                      <a:headEnd type="none" w="med" len="med"/>
+                      <a:tailEnd type="none" w="med" len="med"/>
+                    </a:lnT>
+                    <a:lnB w="2540" cap="flat" cmpd="sng" algn="ctr">
+                      <a:solidFill>
+                        <a:srgbClr val="EEEEEE"/>
+                      </a:solidFill>
+                      <a:prstDash val="solid"/>
+                      <a:round/>
+                      <a:headEnd type="none" w="med" len="med"/>
+                      <a:tailEnd type="none" w="med" len="med"/>
+                    </a:lnB>
+                  </a:tcPr>
+                </a:tc>
+                <a:tc>
+                  <a:txBody>
+                    <a:bodyPr/>
+                    <a:lstStyle/>
+                    <a:p>
+                      <a:pPr algn="ctr" indent="0" marL="0">
+                        <a:buNone/>
+                      </a:pPr>
+                      <a:r>
+                        <a:rPr lang="en-US" sz="500" dirty="0">
+                          <a:solidFill>
+                            <a:srgbClr val="000000"/>
+                          </a:solidFill>
+                          <a:latin typeface="Calibri" pitchFamily="34" charset="0"/>
+                          <a:ea typeface="Calibri" pitchFamily="34" charset="-122"/>
+                          <a:cs typeface="Calibri" pitchFamily="34" charset="-120"/>
+                        </a:rPr>
+                        <a:t>0.39%</a:t>
+                      </a:r>
+                      <a:endParaRPr lang="en-US" sz="500" dirty="0">
+                        <a:latin typeface="Calibri" charset="0"/>
+                        <a:ea typeface="Calibri" charset="0"/>
+                        <a:cs typeface="Calibri" charset="0"/>
+                      </a:endParaRPr>
+                    </a:p>
+                  </a:txBody>
+                  <a:tcPr marL="91440" marR="91440" marT="45720" marB="45720">
+                    <a:lnL w="2540" cap="flat" cmpd="sng" algn="ctr">
+                      <a:solidFill>
+                        <a:srgbClr val="EEEEEE"/>
+                      </a:solidFill>
+                      <a:prstDash val="solid"/>
+                      <a:round/>
+                      <a:headEnd type="none" w="med" len="med"/>
+                      <a:tailEnd type="none" w="med" len="med"/>
+                    </a:lnL>
+                    <a:lnR w="2540" cap="flat" cmpd="sng" algn="ctr">
+                      <a:solidFill>
+                        <a:srgbClr val="EEEEEE"/>
+                      </a:solidFill>
+                      <a:prstDash val="solid"/>
+                      <a:round/>
+                      <a:headEnd type="none" w="med" len="med"/>
+                      <a:tailEnd type="none" w="med" len="med"/>
+                    </a:lnR>
+                    <a:lnT w="2540" cap="flat" cmpd="sng" algn="ctr">
+                      <a:solidFill>
+                        <a:srgbClr val="EEEEEE"/>
+                      </a:solidFill>
+                      <a:prstDash val="solid"/>
+                      <a:round/>
+                      <a:headEnd type="none" w="med" len="med"/>
+                      <a:tailEnd type="none" w="med" len="med"/>
+                    </a:lnT>
+                    <a:lnB w="2540" cap="flat" cmpd="sng" algn="ctr">
+                      <a:solidFill>
+                        <a:srgbClr val="EEEEEE"/>
+                      </a:solidFill>
+                      <a:prstDash val="solid"/>
+                      <a:round/>
+                      <a:headEnd type="none" w="med" len="med"/>
+                      <a:tailEnd type="none" w="med" len="med"/>
+                    </a:lnB>
+                  </a:tcPr>
+                </a:tc>
+                <a:tc>
+                  <a:txBody>
+                    <a:bodyPr/>
+                    <a:lstStyle/>
+                    <a:p>
+                      <a:pPr algn="ctr" indent="0" marL="0">
+                        <a:buNone/>
+                      </a:pPr>
+                      <a:r>
+                        <a:rPr lang="en-US" sz="500" b="1" dirty="0">
+                          <a:solidFill>
+                            <a:srgbClr val="000000"/>
+                          </a:solidFill>
+                          <a:latin typeface="Calibri" pitchFamily="34" charset="0"/>
+                          <a:ea typeface="Calibri" pitchFamily="34" charset="-122"/>
+                          <a:cs typeface="Calibri" pitchFamily="34" charset="-120"/>
+                        </a:rPr>
+                        <a:t>7.21%</a:t>
+                      </a:r>
+                      <a:endParaRPr lang="en-US" sz="500" dirty="0">
+                        <a:latin typeface="Calibri" charset="0"/>
+                        <a:ea typeface="Calibri" charset="0"/>
+                        <a:cs typeface="Calibri" charset="0"/>
+                      </a:endParaRPr>
+                    </a:p>
+                  </a:txBody>
+                  <a:tcPr marL="91440" marR="91440" marT="45720" marB="45720">
+                    <a:lnL w="2540" cap="flat" cmpd="sng" algn="ctr">
+                      <a:solidFill>
+                        <a:srgbClr val="EEEEEE"/>
+                      </a:solidFill>
+                      <a:prstDash val="solid"/>
+                      <a:round/>
+                      <a:headEnd type="none" w="med" len="med"/>
+                      <a:tailEnd type="none" w="med" len="med"/>
+                    </a:lnL>
+                    <a:lnR w="2540" cap="flat" cmpd="sng" algn="ctr">
+                      <a:solidFill>
+                        <a:srgbClr val="EEEEEE"/>
+                      </a:solidFill>
+                      <a:prstDash val="solid"/>
+                      <a:round/>
+                      <a:headEnd type="none" w="med" len="med"/>
+                      <a:tailEnd type="none" w="med" len="med"/>
+                    </a:lnR>
+                    <a:lnT w="2540" cap="flat" cmpd="sng" algn="ctr">
+                      <a:solidFill>
+                        <a:srgbClr val="EEEEEE"/>
+                      </a:solidFill>
+                      <a:prstDash val="solid"/>
+                      <a:round/>
+                      <a:headEnd type="none" w="med" len="med"/>
+                      <a:tailEnd type="none" w="med" len="med"/>
+                    </a:lnT>
+                    <a:lnB w="2540" cap="flat" cmpd="sng" algn="ctr">
+                      <a:solidFill>
+                        <a:srgbClr val="EEEEEE"/>
+                      </a:solidFill>
+                      <a:prstDash val="solid"/>
+                      <a:round/>
+                      <a:headEnd type="none" w="med" len="med"/>
+                      <a:tailEnd type="none" w="med" len="med"/>
+                    </a:lnB>
+                  </a:tcPr>
+                </a:tc>
+              </a:tr>
+              <a:tr h="123444">
+                <a:tc>
+                  <a:txBody>
+                    <a:bodyPr/>
+                    <a:lstStyle/>
+                    <a:p>
+                      <a:pPr algn="l" indent="0" marL="0">
+                        <a:buNone/>
+                      </a:pPr>
+                      <a:r>
+                        <a:rPr lang="en-US" sz="500" b="1" dirty="0">
+                          <a:solidFill>
+                            <a:srgbClr val="000000"/>
+                          </a:solidFill>
+                          <a:latin typeface="Calibri" pitchFamily="34" charset="0"/>
+                          <a:ea typeface="Calibri" pitchFamily="34" charset="-122"/>
+                          <a:cs typeface="Calibri" pitchFamily="34" charset="-120"/>
+                        </a:rPr>
+                        <a:t>2025</a:t>
+                      </a:r>
+                      <a:endParaRPr lang="en-US" sz="500" dirty="0">
+                        <a:latin typeface="Calibri" charset="0"/>
+                        <a:ea typeface="Calibri" charset="0"/>
+                        <a:cs typeface="Calibri" charset="0"/>
+                      </a:endParaRPr>
+                    </a:p>
+                  </a:txBody>
+                  <a:tcPr marL="91440" marR="91440" marT="45720" marB="45720">
+                    <a:lnL w="2540" cap="flat" cmpd="sng" algn="ctr">
+                      <a:solidFill>
+                        <a:srgbClr val="EEEEEE"/>
+                      </a:solidFill>
+                      <a:prstDash val="solid"/>
+                      <a:round/>
+                      <a:headEnd type="none" w="med" len="med"/>
+                      <a:tailEnd type="none" w="med" len="med"/>
+                    </a:lnL>
+                    <a:lnR w="2540" cap="flat" cmpd="sng" algn="ctr">
+                      <a:solidFill>
+                        <a:srgbClr val="EEEEEE"/>
+                      </a:solidFill>
+                      <a:prstDash val="solid"/>
+                      <a:round/>
+                      <a:headEnd type="none" w="med" len="med"/>
+                      <a:tailEnd type="none" w="med" len="med"/>
+                    </a:lnR>
+                    <a:lnT w="2540" cap="flat" cmpd="sng" algn="ctr">
+                      <a:solidFill>
+                        <a:srgbClr val="EEEEEE"/>
+                      </a:solidFill>
+                      <a:prstDash val="solid"/>
+                      <a:round/>
+                      <a:headEnd type="none" w="med" len="med"/>
+                      <a:tailEnd type="none" w="med" len="med"/>
+                    </a:lnT>
+                    <a:lnB w="2540" cap="flat" cmpd="sng" algn="ctr">
+                      <a:solidFill>
+                        <a:srgbClr val="EEEEEE"/>
+                      </a:solidFill>
+                      <a:prstDash val="solid"/>
+                      <a:round/>
+                      <a:headEnd type="none" w="med" len="med"/>
+                      <a:tailEnd type="none" w="med" len="med"/>
+                    </a:lnB>
+                  </a:tcPr>
+                </a:tc>
+                <a:tc>
+                  <a:txBody>
+                    <a:bodyPr/>
+                    <a:lstStyle/>
+                    <a:p>
+                      <a:pPr algn="l" indent="0" marL="0">
+                        <a:buNone/>
+                      </a:pPr>
+                      <a:r>
+                        <a:rPr lang="en-US" sz="500" dirty="0">
+                          <a:solidFill>
+                            <a:srgbClr val="777777"/>
+                          </a:solidFill>
+                          <a:latin typeface="Calibri" pitchFamily="34" charset="0"/>
+                          <a:ea typeface="Calibri" pitchFamily="34" charset="-122"/>
+                          <a:cs typeface="Calibri" pitchFamily="34" charset="-120"/>
+                        </a:rPr>
+                        <a:t>ICP</a:t>
+                      </a:r>
+                      <a:endParaRPr lang="en-US" sz="500" dirty="0">
+                        <a:latin typeface="Calibri" charset="0"/>
+                        <a:ea typeface="Calibri" charset="0"/>
+                        <a:cs typeface="Calibri" charset="0"/>
+                      </a:endParaRPr>
+                    </a:p>
+                  </a:txBody>
+                  <a:tcPr marL="91440" marR="91440" marT="45720" marB="45720">
+                    <a:lnL w="2540" cap="flat" cmpd="sng" algn="ctr">
+                      <a:solidFill>
+                        <a:srgbClr val="EEEEEE"/>
+                      </a:solidFill>
+                      <a:prstDash val="solid"/>
+                      <a:round/>
+                      <a:headEnd type="none" w="med" len="med"/>
+                      <a:tailEnd type="none" w="med" len="med"/>
+                    </a:lnL>
+                    <a:lnR w="2540" cap="flat" cmpd="sng" algn="ctr">
+                      <a:solidFill>
+                        <a:srgbClr val="EEEEEE"/>
+                      </a:solidFill>
+                      <a:prstDash val="solid"/>
+                      <a:round/>
+                      <a:headEnd type="none" w="med" len="med"/>
+                      <a:tailEnd type="none" w="med" len="med"/>
+                    </a:lnR>
+                    <a:lnT w="2540" cap="flat" cmpd="sng" algn="ctr">
+                      <a:solidFill>
+                        <a:srgbClr val="EEEEEE"/>
+                      </a:solidFill>
+                      <a:prstDash val="solid"/>
+                      <a:round/>
+                      <a:headEnd type="none" w="med" len="med"/>
+                      <a:tailEnd type="none" w="med" len="med"/>
+                    </a:lnT>
+                    <a:lnB w="2540" cap="flat" cmpd="sng" algn="ctr">
+                      <a:solidFill>
+                        <a:srgbClr val="EEEEEE"/>
+                      </a:solidFill>
+                      <a:prstDash val="solid"/>
+                      <a:round/>
+                      <a:headEnd type="none" w="med" len="med"/>
+                      <a:tailEnd type="none" w="med" len="med"/>
+                    </a:lnB>
+                  </a:tcPr>
+                </a:tc>
+                <a:tc>
+                  <a:txBody>
+                    <a:bodyPr/>
+                    <a:lstStyle/>
+                    <a:p>
+                      <a:pPr algn="ctr" indent="0" marL="0">
+                        <a:buNone/>
+                      </a:pPr>
+                      <a:r>
+                        <a:rPr lang="en-US" sz="500" dirty="0">
+                          <a:solidFill>
+                            <a:srgbClr val="777777"/>
+                          </a:solidFill>
+                          <a:latin typeface="Calibri" pitchFamily="34" charset="0"/>
+                          <a:ea typeface="Calibri" pitchFamily="34" charset="-122"/>
+                          <a:cs typeface="Calibri" pitchFamily="34" charset="-120"/>
+                        </a:rPr>
+                        <a:t>0.42%</a:t>
+                      </a:r>
+                      <a:endParaRPr lang="en-US" sz="500" dirty="0">
+                        <a:latin typeface="Calibri" charset="0"/>
+                        <a:ea typeface="Calibri" charset="0"/>
+                        <a:cs typeface="Calibri" charset="0"/>
+                      </a:endParaRPr>
+                    </a:p>
+                  </a:txBody>
+                  <a:tcPr marL="91440" marR="91440" marT="45720" marB="45720">
+                    <a:lnL w="2540" cap="flat" cmpd="sng" algn="ctr">
+                      <a:solidFill>
+                        <a:srgbClr val="EEEEEE"/>
+                      </a:solidFill>
+                      <a:prstDash val="solid"/>
+                      <a:round/>
+                      <a:headEnd type="none" w="med" len="med"/>
+                      <a:tailEnd type="none" w="med" len="med"/>
+                    </a:lnL>
+                    <a:lnR w="2540" cap="flat" cmpd="sng" algn="ctr">
+                      <a:solidFill>
+                        <a:srgbClr val="EEEEEE"/>
+                      </a:solidFill>
+                      <a:prstDash val="solid"/>
+                      <a:round/>
+                      <a:headEnd type="none" w="med" len="med"/>
+                      <a:tailEnd type="none" w="med" len="med"/>
+                    </a:lnR>
+                    <a:lnT w="2540" cap="flat" cmpd="sng" algn="ctr">
+                      <a:solidFill>
+                        <a:srgbClr val="EEEEEE"/>
+                      </a:solidFill>
+                      <a:prstDash val="solid"/>
+                      <a:round/>
+                      <a:headEnd type="none" w="med" len="med"/>
+                      <a:tailEnd type="none" w="med" len="med"/>
+                    </a:lnT>
+                    <a:lnB w="2540" cap="flat" cmpd="sng" algn="ctr">
+                      <a:solidFill>
+                        <a:srgbClr val="EEEEEE"/>
+                      </a:solidFill>
+                      <a:prstDash val="solid"/>
+                      <a:round/>
+                      <a:headEnd type="none" w="med" len="med"/>
+                      <a:tailEnd type="none" w="med" len="med"/>
+                    </a:lnB>
+                  </a:tcPr>
+                </a:tc>
+                <a:tc>
+                  <a:txBody>
+                    <a:bodyPr/>
+                    <a:lstStyle/>
+                    <a:p>
+                      <a:pPr algn="ctr" indent="0" marL="0">
+                        <a:buNone/>
+                      </a:pPr>
+                      <a:r>
+                        <a:rPr lang="en-US" sz="500" dirty="0">
+                          <a:solidFill>
+                            <a:srgbClr val="777777"/>
+                          </a:solidFill>
+                          <a:latin typeface="Calibri" pitchFamily="34" charset="0"/>
+                          <a:ea typeface="Calibri" pitchFamily="34" charset="-122"/>
+                          <a:cs typeface="Calibri" pitchFamily="34" charset="-120"/>
+                        </a:rPr>
+                        <a:t>0.42%</a:t>
+                      </a:r>
+                      <a:endParaRPr lang="en-US" sz="500" dirty="0">
+                        <a:latin typeface="Calibri" charset="0"/>
+                        <a:ea typeface="Calibri" charset="0"/>
+                        <a:cs typeface="Calibri" charset="0"/>
+                      </a:endParaRPr>
+                    </a:p>
+                  </a:txBody>
+                  <a:tcPr marL="91440" marR="91440" marT="45720" marB="45720">
+                    <a:lnL w="2540" cap="flat" cmpd="sng" algn="ctr">
+                      <a:solidFill>
+                        <a:srgbClr val="EEEEEE"/>
+                      </a:solidFill>
+                      <a:prstDash val="solid"/>
+                      <a:round/>
+                      <a:headEnd type="none" w="med" len="med"/>
+                      <a:tailEnd type="none" w="med" len="med"/>
+                    </a:lnL>
+                    <a:lnR w="2540" cap="flat" cmpd="sng" algn="ctr">
+                      <a:solidFill>
+                        <a:srgbClr val="EEEEEE"/>
+                      </a:solidFill>
+                      <a:prstDash val="solid"/>
+                      <a:round/>
+                      <a:headEnd type="none" w="med" len="med"/>
+                      <a:tailEnd type="none" w="med" len="med"/>
+                    </a:lnR>
+                    <a:lnT w="2540" cap="flat" cmpd="sng" algn="ctr">
+                      <a:solidFill>
+                        <a:srgbClr val="EEEEEE"/>
+                      </a:solidFill>
+                      <a:prstDash val="solid"/>
+                      <a:round/>
+                      <a:headEnd type="none" w="med" len="med"/>
+                      <a:tailEnd type="none" w="med" len="med"/>
+                    </a:lnT>
+                    <a:lnB w="2540" cap="flat" cmpd="sng" algn="ctr">
+                      <a:solidFill>
+                        <a:srgbClr val="EEEEEE"/>
+                      </a:solidFill>
+                      <a:prstDash val="solid"/>
+                      <a:round/>
+                      <a:headEnd type="none" w="med" len="med"/>
+                      <a:tailEnd type="none" w="med" len="med"/>
+                    </a:lnB>
+                  </a:tcPr>
+                </a:tc>
+                <a:tc>
+                  <a:txBody>
+                    <a:bodyPr/>
+                    <a:lstStyle/>
+                    <a:p>
+                      <a:pPr algn="ctr" indent="0" marL="0">
+                        <a:buNone/>
+                      </a:pPr>
+                      <a:r>
+                        <a:rPr lang="en-US" sz="500" dirty="0">
+                          <a:solidFill>
+                            <a:srgbClr val="777777"/>
+                          </a:solidFill>
+                          <a:latin typeface="Calibri" pitchFamily="34" charset="0"/>
+                          <a:ea typeface="Calibri" pitchFamily="34" charset="-122"/>
+                          <a:cs typeface="Calibri" pitchFamily="34" charset="-120"/>
+                        </a:rPr>
+                        <a:t>0.42%</a:t>
+                      </a:r>
+                      <a:endParaRPr lang="en-US" sz="500" dirty="0">
+                        <a:latin typeface="Calibri" charset="0"/>
+                        <a:ea typeface="Calibri" charset="0"/>
+                        <a:cs typeface="Calibri" charset="0"/>
+                      </a:endParaRPr>
+                    </a:p>
+                  </a:txBody>
+                  <a:tcPr marL="91440" marR="91440" marT="45720" marB="45720">
+                    <a:lnL w="2540" cap="flat" cmpd="sng" algn="ctr">
+                      <a:solidFill>
+                        <a:srgbClr val="EEEEEE"/>
+                      </a:solidFill>
+                      <a:prstDash val="solid"/>
+                      <a:round/>
+                      <a:headEnd type="none" w="med" len="med"/>
+                      <a:tailEnd type="none" w="med" len="med"/>
+                    </a:lnL>
+                    <a:lnR w="2540" cap="flat" cmpd="sng" algn="ctr">
+                      <a:solidFill>
+                        <a:srgbClr val="EEEEEE"/>
+                      </a:solidFill>
+                      <a:prstDash val="solid"/>
+                      <a:round/>
+                      <a:headEnd type="none" w="med" len="med"/>
+                      <a:tailEnd type="none" w="med" len="med"/>
+                    </a:lnR>
+                    <a:lnT w="2540" cap="flat" cmpd="sng" algn="ctr">
+                      <a:solidFill>
+                        <a:srgbClr val="EEEEEE"/>
+                      </a:solidFill>
+                      <a:prstDash val="solid"/>
+                      <a:round/>
+                      <a:headEnd type="none" w="med" len="med"/>
+                      <a:tailEnd type="none" w="med" len="med"/>
+                    </a:lnT>
+                    <a:lnB w="2540" cap="flat" cmpd="sng" algn="ctr">
+                      <a:solidFill>
+                        <a:srgbClr val="EEEEEE"/>
+                      </a:solidFill>
+                      <a:prstDash val="solid"/>
+                      <a:round/>
+                      <a:headEnd type="none" w="med" len="med"/>
+                      <a:tailEnd type="none" w="med" len="med"/>
+                    </a:lnB>
+                  </a:tcPr>
+                </a:tc>
+                <a:tc>
+                  <a:txBody>
+                    <a:bodyPr/>
+                    <a:lstStyle/>
+                    <a:p>
+                      <a:pPr algn="ctr" indent="0" marL="0">
+                        <a:buNone/>
+                      </a:pPr>
+                      <a:r>
+                        <a:rPr lang="en-US" sz="500" dirty="0">
+                          <a:solidFill>
+                            <a:srgbClr val="777777"/>
+                          </a:solidFill>
+                          <a:latin typeface="Calibri" pitchFamily="34" charset="0"/>
+                          <a:ea typeface="Calibri" pitchFamily="34" charset="-122"/>
+                          <a:cs typeface="Calibri" pitchFamily="34" charset="-120"/>
+                        </a:rPr>
+                        <a:t>0.42%</a:t>
+                      </a:r>
+                      <a:endParaRPr lang="en-US" sz="500" dirty="0">
+                        <a:latin typeface="Calibri" charset="0"/>
+                        <a:ea typeface="Calibri" charset="0"/>
+                        <a:cs typeface="Calibri" charset="0"/>
+                      </a:endParaRPr>
+                    </a:p>
+                  </a:txBody>
+                  <a:tcPr marL="91440" marR="91440" marT="45720" marB="45720">
+                    <a:lnL w="2540" cap="flat" cmpd="sng" algn="ctr">
+                      <a:solidFill>
+                        <a:srgbClr val="EEEEEE"/>
+                      </a:solidFill>
+                      <a:prstDash val="solid"/>
+                      <a:round/>
+                      <a:headEnd type="none" w="med" len="med"/>
+                      <a:tailEnd type="none" w="med" len="med"/>
+                    </a:lnL>
+                    <a:lnR w="2540" cap="flat" cmpd="sng" algn="ctr">
+                      <a:solidFill>
+                        <a:srgbClr val="EEEEEE"/>
+                      </a:solidFill>
+                      <a:prstDash val="solid"/>
+                      <a:round/>
+                      <a:headEnd type="none" w="med" len="med"/>
+                      <a:tailEnd type="none" w="med" len="med"/>
+                    </a:lnR>
+                    <a:lnT w="2540" cap="flat" cmpd="sng" algn="ctr">
+                      <a:solidFill>
+                        <a:srgbClr val="EEEEEE"/>
+                      </a:solidFill>
+                      <a:prstDash val="solid"/>
+                      <a:round/>
+                      <a:headEnd type="none" w="med" len="med"/>
+                      <a:tailEnd type="none" w="med" len="med"/>
+                    </a:lnT>
+                    <a:lnB w="2540" cap="flat" cmpd="sng" algn="ctr">
+                      <a:solidFill>
+                        <a:srgbClr val="EEEEEE"/>
+                      </a:solidFill>
+                      <a:prstDash val="solid"/>
+                      <a:round/>
+                      <a:headEnd type="none" w="med" len="med"/>
+                      <a:tailEnd type="none" w="med" len="med"/>
+                    </a:lnB>
+                  </a:tcPr>
+                </a:tc>
+                <a:tc>
+                  <a:txBody>
+                    <a:bodyPr/>
+                    <a:lstStyle/>
+                    <a:p>
+                      <a:pPr algn="ctr" indent="0" marL="0">
+                        <a:buNone/>
+                      </a:pPr>
+                      <a:r>
+                        <a:rPr lang="en-US" sz="500" dirty="0">
+                          <a:solidFill>
+                            <a:srgbClr val="777777"/>
+                          </a:solidFill>
+                          <a:latin typeface="Calibri" pitchFamily="34" charset="0"/>
+                          <a:ea typeface="Calibri" pitchFamily="34" charset="-122"/>
+                          <a:cs typeface="Calibri" pitchFamily="34" charset="-120"/>
+                        </a:rPr>
+                        <a:t>0.42%</a:t>
+                      </a:r>
+                      <a:endParaRPr lang="en-US" sz="500" dirty="0">
+                        <a:latin typeface="Calibri" charset="0"/>
+                        <a:ea typeface="Calibri" charset="0"/>
+                        <a:cs typeface="Calibri" charset="0"/>
+                      </a:endParaRPr>
+                    </a:p>
+                  </a:txBody>
+                  <a:tcPr marL="91440" marR="91440" marT="45720" marB="45720">
+                    <a:lnL w="2540" cap="flat" cmpd="sng" algn="ctr">
+                      <a:solidFill>
+                        <a:srgbClr val="EEEEEE"/>
+                      </a:solidFill>
+                      <a:prstDash val="solid"/>
+                      <a:round/>
+                      <a:headEnd type="none" w="med" len="med"/>
+                      <a:tailEnd type="none" w="med" len="med"/>
+                    </a:lnL>
+                    <a:lnR w="2540" cap="flat" cmpd="sng" algn="ctr">
+                      <a:solidFill>
+                        <a:srgbClr val="EEEEEE"/>
+                      </a:solidFill>
+                      <a:prstDash val="solid"/>
+                      <a:round/>
+                      <a:headEnd type="none" w="med" len="med"/>
+                      <a:tailEnd type="none" w="med" len="med"/>
+                    </a:lnR>
+                    <a:lnT w="2540" cap="flat" cmpd="sng" algn="ctr">
+                      <a:solidFill>
+                        <a:srgbClr val="EEEEEE"/>
+                      </a:solidFill>
+                      <a:prstDash val="solid"/>
+                      <a:round/>
+                      <a:headEnd type="none" w="med" len="med"/>
+                      <a:tailEnd type="none" w="med" len="med"/>
+                    </a:lnT>
+                    <a:lnB w="2540" cap="flat" cmpd="sng" algn="ctr">
+                      <a:solidFill>
+                        <a:srgbClr val="EEEEEE"/>
+                      </a:solidFill>
+                      <a:prstDash val="solid"/>
+                      <a:round/>
+                      <a:headEnd type="none" w="med" len="med"/>
+                      <a:tailEnd type="none" w="med" len="med"/>
+                    </a:lnB>
+                  </a:tcPr>
+                </a:tc>
+                <a:tc>
+                  <a:txBody>
+                    <a:bodyPr/>
+                    <a:lstStyle/>
+                    <a:p>
+                      <a:pPr algn="ctr" indent="0" marL="0">
+                        <a:buNone/>
+                      </a:pPr>
+                      <a:r>
+                        <a:rPr lang="en-US" sz="500" dirty="0">
+                          <a:solidFill>
+                            <a:srgbClr val="777777"/>
+                          </a:solidFill>
+                          <a:latin typeface="Calibri" pitchFamily="34" charset="0"/>
+                          <a:ea typeface="Calibri" pitchFamily="34" charset="-122"/>
+                          <a:cs typeface="Calibri" pitchFamily="34" charset="-120"/>
+                        </a:rPr>
+                        <a:t>0.42%</a:t>
+                      </a:r>
+                      <a:endParaRPr lang="en-US" sz="500" dirty="0">
+                        <a:latin typeface="Calibri" charset="0"/>
+                        <a:ea typeface="Calibri" charset="0"/>
+                        <a:cs typeface="Calibri" charset="0"/>
+                      </a:endParaRPr>
+                    </a:p>
+                  </a:txBody>
+                  <a:tcPr marL="91440" marR="91440" marT="45720" marB="45720">
+                    <a:lnL w="2540" cap="flat" cmpd="sng" algn="ctr">
+                      <a:solidFill>
+                        <a:srgbClr val="EEEEEE"/>
+                      </a:solidFill>
+                      <a:prstDash val="solid"/>
+                      <a:round/>
+                      <a:headEnd type="none" w="med" len="med"/>
+                      <a:tailEnd type="none" w="med" len="med"/>
+                    </a:lnL>
+                    <a:lnR w="2540" cap="flat" cmpd="sng" algn="ctr">
+                      <a:solidFill>
+                        <a:srgbClr val="EEEEEE"/>
+                      </a:solidFill>
+                      <a:prstDash val="solid"/>
+                      <a:round/>
+                      <a:headEnd type="none" w="med" len="med"/>
+                      <a:tailEnd type="none" w="med" len="med"/>
+                    </a:lnR>
+                    <a:lnT w="2540" cap="flat" cmpd="sng" algn="ctr">
+                      <a:solidFill>
+                        <a:srgbClr val="EEEEEE"/>
+                      </a:solidFill>
+                      <a:prstDash val="solid"/>
+                      <a:round/>
+                      <a:headEnd type="none" w="med" len="med"/>
+                      <a:tailEnd type="none" w="med" len="med"/>
+                    </a:lnT>
+                    <a:lnB w="2540" cap="flat" cmpd="sng" algn="ctr">
+                      <a:solidFill>
+                        <a:srgbClr val="EEEEEE"/>
+                      </a:solidFill>
+                      <a:prstDash val="solid"/>
+                      <a:round/>
+                      <a:headEnd type="none" w="med" len="med"/>
+                      <a:tailEnd type="none" w="med" len="med"/>
+                    </a:lnB>
+                  </a:tcPr>
+                </a:tc>
+                <a:tc>
+                  <a:txBody>
+                    <a:bodyPr/>
+                    <a:lstStyle/>
+                    <a:p>
+                      <a:pPr algn="ctr" indent="0" marL="0">
+                        <a:buNone/>
+                      </a:pPr>
+                      <a:r>
+                        <a:rPr lang="en-US" sz="500" dirty="0">
+                          <a:solidFill>
+                            <a:srgbClr val="777777"/>
+                          </a:solidFill>
+                          <a:latin typeface="Calibri" pitchFamily="34" charset="0"/>
+                          <a:ea typeface="Calibri" pitchFamily="34" charset="-122"/>
+                          <a:cs typeface="Calibri" pitchFamily="34" charset="-120"/>
+                        </a:rPr>
+                        <a:t>0.41%</a:t>
+                      </a:r>
+                      <a:endParaRPr lang="en-US" sz="500" dirty="0">
+                        <a:latin typeface="Calibri" charset="0"/>
+                        <a:ea typeface="Calibri" charset="0"/>
+                        <a:cs typeface="Calibri" charset="0"/>
+                      </a:endParaRPr>
+                    </a:p>
+                  </a:txBody>
+                  <a:tcPr marL="91440" marR="91440" marT="45720" marB="45720">
+                    <a:lnL w="2540" cap="flat" cmpd="sng" algn="ctr">
+                      <a:solidFill>
+                        <a:srgbClr val="EEEEEE"/>
+                      </a:solidFill>
+                      <a:prstDash val="solid"/>
+                      <a:round/>
+                      <a:headEnd type="none" w="med" len="med"/>
+                      <a:tailEnd type="none" w="med" len="med"/>
+                    </a:lnL>
+                    <a:lnR w="2540" cap="flat" cmpd="sng" algn="ctr">
+                      <a:solidFill>
+                        <a:srgbClr val="EEEEEE"/>
+                      </a:solidFill>
+                      <a:prstDash val="solid"/>
+                      <a:round/>
+                      <a:headEnd type="none" w="med" len="med"/>
+                      <a:tailEnd type="none" w="med" len="med"/>
+                    </a:lnR>
+                    <a:lnT w="2540" cap="flat" cmpd="sng" algn="ctr">
+                      <a:solidFill>
+                        <a:srgbClr val="EEEEEE"/>
+                      </a:solidFill>
+                      <a:prstDash val="solid"/>
+                      <a:round/>
+                      <a:headEnd type="none" w="med" len="med"/>
+                      <a:tailEnd type="none" w="med" len="med"/>
+                    </a:lnT>
+                    <a:lnB w="2540" cap="flat" cmpd="sng" algn="ctr">
+                      <a:solidFill>
+                        <a:srgbClr val="EEEEEE"/>
+                      </a:solidFill>
+                      <a:prstDash val="solid"/>
+                      <a:round/>
+                      <a:headEnd type="none" w="med" len="med"/>
+                      <a:tailEnd type="none" w="med" len="med"/>
+                    </a:lnB>
+                  </a:tcPr>
+                </a:tc>
+                <a:tc>
+                  <a:txBody>
+                    <a:bodyPr/>
+                    <a:lstStyle/>
+                    <a:p>
+                      <a:pPr algn="ctr" indent="0" marL="0">
+                        <a:buNone/>
+                      </a:pPr>
+                      <a:r>
+                        <a:rPr lang="en-US" sz="500" dirty="0">
+                          <a:solidFill>
+                            <a:srgbClr val="777777"/>
+                          </a:solidFill>
+                          <a:latin typeface="Calibri" pitchFamily="34" charset="0"/>
+                          <a:ea typeface="Calibri" pitchFamily="34" charset="-122"/>
+                          <a:cs typeface="Calibri" pitchFamily="34" charset="-120"/>
+                        </a:rPr>
+                        <a:t>0.40%</a:t>
+                      </a:r>
+                      <a:endParaRPr lang="en-US" sz="500" dirty="0">
+                        <a:latin typeface="Calibri" charset="0"/>
+                        <a:ea typeface="Calibri" charset="0"/>
+                        <a:cs typeface="Calibri" charset="0"/>
+                      </a:endParaRPr>
+                    </a:p>
+                  </a:txBody>
+                  <a:tcPr marL="91440" marR="91440" marT="45720" marB="45720">
+                    <a:lnL w="2540" cap="flat" cmpd="sng" algn="ctr">
+                      <a:solidFill>
+                        <a:srgbClr val="EEEEEE"/>
+                      </a:solidFill>
+                      <a:prstDash val="solid"/>
+                      <a:round/>
+                      <a:headEnd type="none" w="med" len="med"/>
+                      <a:tailEnd type="none" w="med" len="med"/>
+                    </a:lnL>
+                    <a:lnR w="2540" cap="flat" cmpd="sng" algn="ctr">
+                      <a:solidFill>
+                        <a:srgbClr val="EEEEEE"/>
+                      </a:solidFill>
+                      <a:prstDash val="solid"/>
+                      <a:round/>
+                      <a:headEnd type="none" w="med" len="med"/>
+                      <a:tailEnd type="none" w="med" len="med"/>
+                    </a:lnR>
+                    <a:lnT w="2540" cap="flat" cmpd="sng" algn="ctr">
+                      <a:solidFill>
+                        <a:srgbClr val="EEEEEE"/>
+                      </a:solidFill>
+                      <a:prstDash val="solid"/>
+                      <a:round/>
+                      <a:headEnd type="none" w="med" len="med"/>
+                      <a:tailEnd type="none" w="med" len="med"/>
+                    </a:lnT>
+                    <a:lnB w="2540" cap="flat" cmpd="sng" algn="ctr">
+                      <a:solidFill>
+                        <a:srgbClr val="EEEEEE"/>
+                      </a:solidFill>
+                      <a:prstDash val="solid"/>
+                      <a:round/>
+                      <a:headEnd type="none" w="med" len="med"/>
+                      <a:tailEnd type="none" w="med" len="med"/>
+                    </a:lnB>
+                  </a:tcPr>
+                </a:tc>
+                <a:tc>
+                  <a:txBody>
+                    <a:bodyPr/>
+                    <a:lstStyle/>
+                    <a:p>
+                      <a:pPr algn="ctr" indent="0" marL="0">
+                        <a:buNone/>
+                      </a:pPr>
+                      <a:r>
+                        <a:rPr lang="en-US" sz="500" dirty="0">
+                          <a:solidFill>
+                            <a:srgbClr val="777777"/>
+                          </a:solidFill>
+                          <a:latin typeface="Calibri" pitchFamily="34" charset="0"/>
+                          <a:ea typeface="Calibri" pitchFamily="34" charset="-122"/>
+                          <a:cs typeface="Calibri" pitchFamily="34" charset="-120"/>
+                        </a:rPr>
+                        <a:t>0.40%</a:t>
+                      </a:r>
+                      <a:endParaRPr lang="en-US" sz="500" dirty="0">
+                        <a:latin typeface="Calibri" charset="0"/>
+                        <a:ea typeface="Calibri" charset="0"/>
+                        <a:cs typeface="Calibri" charset="0"/>
+                      </a:endParaRPr>
+                    </a:p>
+                  </a:txBody>
+                  <a:tcPr marL="91440" marR="91440" marT="45720" marB="45720">
+                    <a:lnL w="2540" cap="flat" cmpd="sng" algn="ctr">
+                      <a:solidFill>
+                        <a:srgbClr val="EEEEEE"/>
+                      </a:solidFill>
+                      <a:prstDash val="solid"/>
+                      <a:round/>
+                      <a:headEnd type="none" w="med" len="med"/>
+                      <a:tailEnd type="none" w="med" len="med"/>
+                    </a:lnL>
+                    <a:lnR w="2540" cap="flat" cmpd="sng" algn="ctr">
+                      <a:solidFill>
+                        <a:srgbClr val="EEEEEE"/>
+                      </a:solidFill>
+                      <a:prstDash val="solid"/>
+                      <a:round/>
+                      <a:headEnd type="none" w="med" len="med"/>
+                      <a:tailEnd type="none" w="med" len="med"/>
+                    </a:lnR>
+                    <a:lnT w="2540" cap="flat" cmpd="sng" algn="ctr">
+                      <a:solidFill>
+                        <a:srgbClr val="EEEEEE"/>
+                      </a:solidFill>
+                      <a:prstDash val="solid"/>
+                      <a:round/>
+                      <a:headEnd type="none" w="med" len="med"/>
+                      <a:tailEnd type="none" w="med" len="med"/>
+                    </a:lnT>
+                    <a:lnB w="2540" cap="flat" cmpd="sng" algn="ctr">
+                      <a:solidFill>
+                        <a:srgbClr val="EEEEEE"/>
+                      </a:solidFill>
+                      <a:prstDash val="solid"/>
+                      <a:round/>
+                      <a:headEnd type="none" w="med" len="med"/>
+                      <a:tailEnd type="none" w="med" len="med"/>
+                    </a:lnB>
+                  </a:tcPr>
+                </a:tc>
+                <a:tc>
+                  <a:txBody>
+                    <a:bodyPr/>
+                    <a:lstStyle/>
+                    <a:p>
+                      <a:pPr algn="ctr" indent="0" marL="0">
+                        <a:buNone/>
+                      </a:pPr>
+                      <a:r>
+                        <a:rPr lang="en-US" sz="500" dirty="0">
+                          <a:solidFill>
+                            <a:srgbClr val="777777"/>
+                          </a:solidFill>
+                          <a:latin typeface="Calibri" pitchFamily="34" charset="0"/>
+                          <a:ea typeface="Calibri" pitchFamily="34" charset="-122"/>
+                          <a:cs typeface="Calibri" pitchFamily="34" charset="-120"/>
+                        </a:rPr>
+                        <a:t>0.40%</a:t>
+                      </a:r>
+                      <a:endParaRPr lang="en-US" sz="500" dirty="0">
+                        <a:latin typeface="Calibri" charset="0"/>
+                        <a:ea typeface="Calibri" charset="0"/>
+                        <a:cs typeface="Calibri" charset="0"/>
+                      </a:endParaRPr>
+                    </a:p>
+                  </a:txBody>
+                  <a:tcPr marL="91440" marR="91440" marT="45720" marB="45720">
+                    <a:lnL w="2540" cap="flat" cmpd="sng" algn="ctr">
+                      <a:solidFill>
+                        <a:srgbClr val="EEEEEE"/>
+                      </a:solidFill>
+                      <a:prstDash val="solid"/>
+                      <a:round/>
+                      <a:headEnd type="none" w="med" len="med"/>
+                      <a:tailEnd type="none" w="med" len="med"/>
+                    </a:lnL>
+                    <a:lnR w="2540" cap="flat" cmpd="sng" algn="ctr">
+                      <a:solidFill>
+                        <a:srgbClr val="EEEEEE"/>
+                      </a:solidFill>
+                      <a:prstDash val="solid"/>
+                      <a:round/>
+                      <a:headEnd type="none" w="med" len="med"/>
+                      <a:tailEnd type="none" w="med" len="med"/>
+                    </a:lnR>
+                    <a:lnT w="2540" cap="flat" cmpd="sng" algn="ctr">
+                      <a:solidFill>
+                        <a:srgbClr val="EEEEEE"/>
+                      </a:solidFill>
+                      <a:prstDash val="solid"/>
+                      <a:round/>
+                      <a:headEnd type="none" w="med" len="med"/>
+                      <a:tailEnd type="none" w="med" len="med"/>
+                    </a:lnT>
+                    <a:lnB w="2540" cap="flat" cmpd="sng" algn="ctr">
+                      <a:solidFill>
+                        <a:srgbClr val="EEEEEE"/>
+                      </a:solidFill>
+                      <a:prstDash val="solid"/>
+                      <a:round/>
+                      <a:headEnd type="none" w="med" len="med"/>
+                      <a:tailEnd type="none" w="med" len="med"/>
+                    </a:lnB>
+                  </a:tcPr>
+                </a:tc>
+                <a:tc>
+                  <a:txBody>
+                    <a:bodyPr/>
+                    <a:lstStyle/>
+                    <a:p>
+                      <a:pPr algn="ctr" indent="0" marL="0">
+                        <a:buNone/>
+                      </a:pPr>
+                      <a:r>
+                        <a:rPr lang="en-US" sz="500" dirty="0">
+                          <a:solidFill>
+                            <a:srgbClr val="777777"/>
+                          </a:solidFill>
+                          <a:latin typeface="Calibri" pitchFamily="34" charset="0"/>
+                          <a:ea typeface="Calibri" pitchFamily="34" charset="-122"/>
+                          <a:cs typeface="Calibri" pitchFamily="34" charset="-120"/>
+                        </a:rPr>
+                        <a:t>0.40%</a:t>
+                      </a:r>
+                      <a:endParaRPr lang="en-US" sz="500" dirty="0">
+                        <a:latin typeface="Calibri" charset="0"/>
+                        <a:ea typeface="Calibri" charset="0"/>
+                        <a:cs typeface="Calibri" charset="0"/>
+                      </a:endParaRPr>
+                    </a:p>
+                  </a:txBody>
+                  <a:tcPr marL="91440" marR="91440" marT="45720" marB="45720">
+                    <a:lnL w="2540" cap="flat" cmpd="sng" algn="ctr">
+                      <a:solidFill>
+                        <a:srgbClr val="EEEEEE"/>
+                      </a:solidFill>
+                      <a:prstDash val="solid"/>
+                      <a:round/>
+                      <a:headEnd type="none" w="med" len="med"/>
+                      <a:tailEnd type="none" w="med" len="med"/>
+                    </a:lnL>
+                    <a:lnR w="2540" cap="flat" cmpd="sng" algn="ctr">
+                      <a:solidFill>
+                        <a:srgbClr val="EEEEEE"/>
+                      </a:solidFill>
+                      <a:prstDash val="solid"/>
+                      <a:round/>
+                      <a:headEnd type="none" w="med" len="med"/>
+                      <a:tailEnd type="none" w="med" len="med"/>
+                    </a:lnR>
+                    <a:lnT w="2540" cap="flat" cmpd="sng" algn="ctr">
+                      <a:solidFill>
+                        <a:srgbClr val="EEEEEE"/>
+                      </a:solidFill>
+                      <a:prstDash val="solid"/>
+                      <a:round/>
+                      <a:headEnd type="none" w="med" len="med"/>
+                      <a:tailEnd type="none" w="med" len="med"/>
+                    </a:lnT>
+                    <a:lnB w="2540" cap="flat" cmpd="sng" algn="ctr">
+                      <a:solidFill>
+                        <a:srgbClr val="EEEEEE"/>
+                      </a:solidFill>
+                      <a:prstDash val="solid"/>
+                      <a:round/>
+                      <a:headEnd type="none" w="med" len="med"/>
+                      <a:tailEnd type="none" w="med" len="med"/>
+                    </a:lnB>
+                  </a:tcPr>
+                </a:tc>
+                <a:tc>
+                  <a:txBody>
+                    <a:bodyPr/>
+                    <a:lstStyle/>
+                    <a:p>
+                      <a:pPr algn="ctr" indent="0" marL="0">
+                        <a:buNone/>
+                      </a:pPr>
+                      <a:r>
+                        <a:rPr lang="en-US" sz="500" dirty="0">
+                          <a:solidFill>
+                            <a:srgbClr val="777777"/>
+                          </a:solidFill>
+                          <a:latin typeface="Calibri" pitchFamily="34" charset="0"/>
+                          <a:ea typeface="Calibri" pitchFamily="34" charset="-122"/>
+                          <a:cs typeface="Calibri" pitchFamily="34" charset="-120"/>
+                        </a:rPr>
+                        <a:t>0.39%</a:t>
+                      </a:r>
+                      <a:endParaRPr lang="en-US" sz="500" dirty="0">
+                        <a:latin typeface="Calibri" charset="0"/>
+                        <a:ea typeface="Calibri" charset="0"/>
+                        <a:cs typeface="Calibri" charset="0"/>
+                      </a:endParaRPr>
+                    </a:p>
+                  </a:txBody>
+                  <a:tcPr marL="91440" marR="91440" marT="45720" marB="45720">
+                    <a:lnL w="2540" cap="flat" cmpd="sng" algn="ctr">
+                      <a:solidFill>
+                        <a:srgbClr val="EEEEEE"/>
+                      </a:solidFill>
+                      <a:prstDash val="solid"/>
+                      <a:round/>
+                      <a:headEnd type="none" w="med" len="med"/>
+                      <a:tailEnd type="none" w="med" len="med"/>
+                    </a:lnL>
+                    <a:lnR w="2540" cap="flat" cmpd="sng" algn="ctr">
+                      <a:solidFill>
+                        <a:srgbClr val="EEEEEE"/>
+                      </a:solidFill>
+                      <a:prstDash val="solid"/>
+                      <a:round/>
+                      <a:headEnd type="none" w="med" len="med"/>
+                      <a:tailEnd type="none" w="med" len="med"/>
+                    </a:lnR>
+                    <a:lnT w="2540" cap="flat" cmpd="sng" algn="ctr">
+                      <a:solidFill>
+                        <a:srgbClr val="EEEEEE"/>
+                      </a:solidFill>
+                      <a:prstDash val="solid"/>
+                      <a:round/>
+                      <a:headEnd type="none" w="med" len="med"/>
+                      <a:tailEnd type="none" w="med" len="med"/>
+                    </a:lnT>
+                    <a:lnB w="2540" cap="flat" cmpd="sng" algn="ctr">
+                      <a:solidFill>
+                        <a:srgbClr val="EEEEEE"/>
+                      </a:solidFill>
+                      <a:prstDash val="solid"/>
+                      <a:round/>
+                      <a:headEnd type="none" w="med" len="med"/>
+                      <a:tailEnd type="none" w="med" len="med"/>
+                    </a:lnB>
+                  </a:tcPr>
+                </a:tc>
+                <a:tc>
+                  <a:txBody>
+                    <a:bodyPr/>
+                    <a:lstStyle/>
+                    <a:p>
+                      <a:pPr algn="ctr" indent="0" marL="0">
+                        <a:buNone/>
+                      </a:pPr>
+                      <a:r>
+                        <a:rPr lang="en-US" sz="500" b="1" dirty="0">
+                          <a:solidFill>
+                            <a:srgbClr val="777777"/>
+                          </a:solidFill>
+                          <a:latin typeface="Calibri" pitchFamily="34" charset="0"/>
+                          <a:ea typeface="Calibri" pitchFamily="34" charset="-122"/>
+                          <a:cs typeface="Calibri" pitchFamily="34" charset="-120"/>
+                        </a:rPr>
+                        <a:t>4.99%</a:t>
+                      </a:r>
+                      <a:endParaRPr lang="en-US" sz="500" dirty="0">
+                        <a:latin typeface="Calibri" charset="0"/>
+                        <a:ea typeface="Calibri" charset="0"/>
+                        <a:cs typeface="Calibri" charset="0"/>
+                      </a:endParaRPr>
+                    </a:p>
+                  </a:txBody>
+                  <a:tcPr marL="91440" marR="91440" marT="45720" marB="45720">
+                    <a:lnL w="2540" cap="flat" cmpd="sng" algn="ctr">
+                      <a:solidFill>
+                        <a:srgbClr val="EEEEEE"/>
+                      </a:solidFill>
+                      <a:prstDash val="solid"/>
+                      <a:round/>
+                      <a:headEnd type="none" w="med" len="med"/>
+                      <a:tailEnd type="none" w="med" len="med"/>
+                    </a:lnL>
+                    <a:lnR w="2540" cap="flat" cmpd="sng" algn="ctr">
+                      <a:solidFill>
+                        <a:srgbClr val="EEEEEE"/>
+                      </a:solidFill>
+                      <a:prstDash val="solid"/>
+                      <a:round/>
+                      <a:headEnd type="none" w="med" len="med"/>
+                      <a:tailEnd type="none" w="med" len="med"/>
+                    </a:lnR>
+                    <a:lnT w="2540" cap="flat" cmpd="sng" algn="ctr">
+                      <a:solidFill>
+                        <a:srgbClr val="EEEEEE"/>
+                      </a:solidFill>
+                      <a:prstDash val="solid"/>
+                      <a:round/>
+                      <a:headEnd type="none" w="med" len="med"/>
+                      <a:tailEnd type="none" w="med" len="med"/>
+                    </a:lnT>
+                    <a:lnB w="2540" cap="flat" cmpd="sng" algn="ctr">
+                      <a:solidFill>
+                        <a:srgbClr val="EEEEEE"/>
+                      </a:solidFill>
+                      <a:prstDash val="solid"/>
+                      <a:round/>
+                      <a:headEnd type="none" w="med" len="med"/>
+                      <a:tailEnd type="none" w="med" len="med"/>
+                    </a:lnB>
+                  </a:tcPr>
+                </a:tc>
+              </a:tr>
+              <a:tr h="123444">
+                <a:tc>
+                  <a:txBody>
+                    <a:bodyPr/>
+                    <a:lstStyle/>
+                    <a:p>
+                      <a:pPr algn="l" indent="0" marL="0">
+                        <a:buNone/>
+                      </a:pPr>
+                      <a:endParaRPr lang="en-US" sz="500" dirty="0">
+                        <a:latin typeface="Calibri" charset="0"/>
+                        <a:ea typeface="Calibri" charset="0"/>
+                        <a:cs typeface="Calibri" charset="0"/>
+                      </a:endParaRPr>
+                    </a:p>
+                  </a:txBody>
+                  <a:tcPr marL="91440" marR="91440" marT="45720" marB="45720">
+                    <a:lnL w="2540" cap="flat" cmpd="sng" algn="ctr">
+                      <a:solidFill>
+                        <a:srgbClr val="EEEEEE"/>
+                      </a:solidFill>
+                      <a:prstDash val="solid"/>
+                      <a:round/>
+                      <a:headEnd type="none" w="med" len="med"/>
+                      <a:tailEnd type="none" w="med" len="med"/>
+                    </a:lnL>
+                    <a:lnR w="2540" cap="flat" cmpd="sng" algn="ctr">
+                      <a:solidFill>
+                        <a:srgbClr val="EEEEEE"/>
+                      </a:solidFill>
+                      <a:prstDash val="solid"/>
+                      <a:round/>
+                      <a:headEnd type="none" w="med" len="med"/>
+                      <a:tailEnd type="none" w="med" len="med"/>
+                    </a:lnR>
+                    <a:lnT w="2540" cap="flat" cmpd="sng" algn="ctr">
+                      <a:solidFill>
+                        <a:srgbClr val="EEEEEE"/>
+                      </a:solidFill>
+                      <a:prstDash val="solid"/>
+                      <a:round/>
+                      <a:headEnd type="none" w="med" len="med"/>
+                      <a:tailEnd type="none" w="med" len="med"/>
+                    </a:lnT>
+                    <a:lnB w="2540" cap="flat" cmpd="sng" algn="ctr">
+                      <a:solidFill>
+                        <a:srgbClr val="EEEEEE"/>
+                      </a:solidFill>
+                      <a:prstDash val="solid"/>
+                      <a:round/>
+                      <a:headEnd type="none" w="med" len="med"/>
+                      <a:tailEnd type="none" w="med" len="med"/>
+                    </a:lnB>
+                  </a:tcPr>
+                </a:tc>
+                <a:tc>
+                  <a:txBody>
+                    <a:bodyPr/>
+                    <a:lstStyle/>
+                    <a:p>
+                      <a:pPr algn="l" indent="0" marL="0">
+                        <a:buNone/>
+                      </a:pPr>
+                      <a:r>
+                        <a:rPr lang="en-US" sz="500" dirty="0">
+                          <a:solidFill>
+                            <a:srgbClr val="999999"/>
+                          </a:solidFill>
+                          <a:latin typeface="Calibri" pitchFamily="34" charset="0"/>
+                          <a:ea typeface="Calibri" pitchFamily="34" charset="-122"/>
+                          <a:cs typeface="Calibri" pitchFamily="34" charset="-120"/>
+                        </a:rPr>
+                        <a:t>Competencia</a:t>
                       </a:r>
                       <a:endParaRPr lang="en-US" sz="500" dirty="0">
                         <a:latin typeface="Calibri" charset="0"/>
@@ -10193,7 +12972,7 @@
                           <a:ea typeface="Calibri" pitchFamily="34" charset="-122"/>
                           <a:cs typeface="Calibri" pitchFamily="34" charset="-120"/>
                         </a:rPr>
-                        <a:t>0.00%</a:t>
+                        <a:t>0.28%</a:t>
                       </a:r>
                       <a:endParaRPr lang="en-US" sz="500" dirty="0">
                         <a:latin typeface="Calibri" charset="0"/>
@@ -10258,7 +13037,7 @@
                           <a:ea typeface="Calibri" pitchFamily="34" charset="-122"/>
                           <a:cs typeface="Calibri" pitchFamily="34" charset="-120"/>
                         </a:rPr>
-                        <a:t>0.00%</a:t>
+                        <a:t>0.31%</a:t>
                       </a:r>
                       <a:endParaRPr lang="en-US" sz="500" dirty="0">
                         <a:latin typeface="Calibri" charset="0"/>
@@ -10323,7 +13102,7 @@
                           <a:ea typeface="Calibri" pitchFamily="34" charset="-122"/>
                           <a:cs typeface="Calibri" pitchFamily="34" charset="-120"/>
                         </a:rPr>
-                        <a:t>0.00%</a:t>
+                        <a:t>0.30%</a:t>
                       </a:r>
                       <a:endParaRPr lang="en-US" sz="500" dirty="0">
                         <a:latin typeface="Calibri" charset="0"/>
@@ -10388,7 +13167,7 @@
                           <a:ea typeface="Calibri" pitchFamily="34" charset="-122"/>
                           <a:cs typeface="Calibri" pitchFamily="34" charset="-120"/>
                         </a:rPr>
-                        <a:t>0.00%</a:t>
+                        <a:t>0.31%</a:t>
                       </a:r>
                       <a:endParaRPr lang="en-US" sz="500" dirty="0">
                         <a:latin typeface="Calibri" charset="0"/>
@@ -10453,7 +13232,7 @@
                           <a:ea typeface="Calibri" pitchFamily="34" charset="-122"/>
                           <a:cs typeface="Calibri" pitchFamily="34" charset="-120"/>
                         </a:rPr>
-                        <a:t>0.00%</a:t>
+                        <a:t>0.30%</a:t>
                       </a:r>
                       <a:endParaRPr lang="en-US" sz="500" dirty="0">
                         <a:latin typeface="Calibri" charset="0"/>
@@ -10518,7 +13297,7 @@
                           <a:ea typeface="Calibri" pitchFamily="34" charset="-122"/>
                           <a:cs typeface="Calibri" pitchFamily="34" charset="-120"/>
                         </a:rPr>
-                        <a:t>0.00%</a:t>
+                        <a:t>0.30%</a:t>
                       </a:r>
                       <a:endParaRPr lang="en-US" sz="500" dirty="0">
                         <a:latin typeface="Calibri" charset="0"/>
@@ -10583,7 +13362,7 @@
                           <a:ea typeface="Calibri" pitchFamily="34" charset="-122"/>
                           <a:cs typeface="Calibri" pitchFamily="34" charset="-120"/>
                         </a:rPr>
-                        <a:t>0.00%</a:t>
+                        <a:t>0.30%</a:t>
                       </a:r>
                       <a:endParaRPr lang="en-US" sz="500" dirty="0">
                         <a:latin typeface="Calibri" charset="0"/>
@@ -10648,7 +13427,7 @@
                           <a:ea typeface="Calibri" pitchFamily="34" charset="-122"/>
                           <a:cs typeface="Calibri" pitchFamily="34" charset="-120"/>
                         </a:rPr>
-                        <a:t>0.00%</a:t>
+                        <a:t>0.28%</a:t>
                       </a:r>
                       <a:endParaRPr lang="en-US" sz="500" dirty="0">
                         <a:latin typeface="Calibri" charset="0"/>
@@ -10713,7 +13492,137 @@
                           <a:ea typeface="Calibri" pitchFamily="34" charset="-122"/>
                           <a:cs typeface="Calibri" pitchFamily="34" charset="-120"/>
                         </a:rPr>
-                        <a:t>-2.99%</a:t>
+                        <a:t>0.29%</a:t>
+                      </a:r>
+                      <a:endParaRPr lang="en-US" sz="500" dirty="0">
+                        <a:latin typeface="Calibri" charset="0"/>
+                        <a:ea typeface="Calibri" charset="0"/>
+                        <a:cs typeface="Calibri" charset="0"/>
+                      </a:endParaRPr>
+                    </a:p>
+                  </a:txBody>
+                  <a:tcPr marL="91440" marR="91440" marT="45720" marB="45720">
+                    <a:lnL w="2540" cap="flat" cmpd="sng" algn="ctr">
+                      <a:solidFill>
+                        <a:srgbClr val="EEEEEE"/>
+                      </a:solidFill>
+                      <a:prstDash val="solid"/>
+                      <a:round/>
+                      <a:headEnd type="none" w="med" len="med"/>
+                      <a:tailEnd type="none" w="med" len="med"/>
+                    </a:lnL>
+                    <a:lnR w="2540" cap="flat" cmpd="sng" algn="ctr">
+                      <a:solidFill>
+                        <a:srgbClr val="EEEEEE"/>
+                      </a:solidFill>
+                      <a:prstDash val="solid"/>
+                      <a:round/>
+                      <a:headEnd type="none" w="med" len="med"/>
+                      <a:tailEnd type="none" w="med" len="med"/>
+                    </a:lnR>
+                    <a:lnT w="2540" cap="flat" cmpd="sng" algn="ctr">
+                      <a:solidFill>
+                        <a:srgbClr val="EEEEEE"/>
+                      </a:solidFill>
+                      <a:prstDash val="solid"/>
+                      <a:round/>
+                      <a:headEnd type="none" w="med" len="med"/>
+                      <a:tailEnd type="none" w="med" len="med"/>
+                    </a:lnT>
+                    <a:lnB w="2540" cap="flat" cmpd="sng" algn="ctr">
+                      <a:solidFill>
+                        <a:srgbClr val="EEEEEE"/>
+                      </a:solidFill>
+                      <a:prstDash val="solid"/>
+                      <a:round/>
+                      <a:headEnd type="none" w="med" len="med"/>
+                      <a:tailEnd type="none" w="med" len="med"/>
+                    </a:lnB>
+                  </a:tcPr>
+                </a:tc>
+                <a:tc>
+                  <a:txBody>
+                    <a:bodyPr/>
+                    <a:lstStyle/>
+                    <a:p>
+                      <a:pPr algn="ctr" indent="0" marL="0">
+                        <a:buNone/>
+                      </a:pPr>
+                      <a:r>
+                        <a:rPr lang="en-US" sz="500" dirty="0">
+                          <a:solidFill>
+                            <a:srgbClr val="999999"/>
+                          </a:solidFill>
+                          <a:latin typeface="Calibri" pitchFamily="34" charset="0"/>
+                          <a:ea typeface="Calibri" pitchFamily="34" charset="-122"/>
+                          <a:cs typeface="Calibri" pitchFamily="34" charset="-120"/>
+                        </a:rPr>
+                        <a:t>0.28%</a:t>
+                      </a:r>
+                      <a:endParaRPr lang="en-US" sz="500" dirty="0">
+                        <a:latin typeface="Calibri" charset="0"/>
+                        <a:ea typeface="Calibri" charset="0"/>
+                        <a:cs typeface="Calibri" charset="0"/>
+                      </a:endParaRPr>
+                    </a:p>
+                  </a:txBody>
+                  <a:tcPr marL="91440" marR="91440" marT="45720" marB="45720">
+                    <a:lnL w="2540" cap="flat" cmpd="sng" algn="ctr">
+                      <a:solidFill>
+                        <a:srgbClr val="EEEEEE"/>
+                      </a:solidFill>
+                      <a:prstDash val="solid"/>
+                      <a:round/>
+                      <a:headEnd type="none" w="med" len="med"/>
+                      <a:tailEnd type="none" w="med" len="med"/>
+                    </a:lnL>
+                    <a:lnR w="2540" cap="flat" cmpd="sng" algn="ctr">
+                      <a:solidFill>
+                        <a:srgbClr val="EEEEEE"/>
+                      </a:solidFill>
+                      <a:prstDash val="solid"/>
+                      <a:round/>
+                      <a:headEnd type="none" w="med" len="med"/>
+                      <a:tailEnd type="none" w="med" len="med"/>
+                    </a:lnR>
+                    <a:lnT w="2540" cap="flat" cmpd="sng" algn="ctr">
+                      <a:solidFill>
+                        <a:srgbClr val="EEEEEE"/>
+                      </a:solidFill>
+                      <a:prstDash val="solid"/>
+                      <a:round/>
+                      <a:headEnd type="none" w="med" len="med"/>
+                      <a:tailEnd type="none" w="med" len="med"/>
+                    </a:lnT>
+                    <a:lnB w="2540" cap="flat" cmpd="sng" algn="ctr">
+                      <a:solidFill>
+                        <a:srgbClr val="EEEEEE"/>
+                      </a:solidFill>
+                      <a:prstDash val="solid"/>
+                      <a:round/>
+                      <a:headEnd type="none" w="med" len="med"/>
+                      <a:tailEnd type="none" w="med" len="med"/>
+                    </a:lnB>
+                  </a:tcPr>
+                </a:tc>
+                <a:tc>
+                  <a:txBody>
+                    <a:bodyPr/>
+                    <a:lstStyle/>
+                    <a:p>
+                      <a:pPr algn="ctr" indent="0" marL="0">
+                        <a:buNone/>
+                      </a:pPr>
+                      <a:r>
+                        <a:rPr lang="en-US" sz="500" dirty="0">
+                          <a:solidFill>
+                            <a:srgbClr val="999999"/>
+                          </a:solidFill>
+                          <a:latin typeface="Calibri" pitchFamily="34" charset="0"/>
+                          <a:ea typeface="Calibri" pitchFamily="34" charset="-122"/>
+                          <a:cs typeface="Calibri" pitchFamily="34" charset="-120"/>
+                        </a:rPr>
+                        <a:t>0.56%</a:t>
                       </a:r>
                       <a:endParaRPr lang="en-US" sz="500" dirty="0">
                         <a:latin typeface="Calibri" charset="0"/>
@@ -10778,7 +13687,7 @@
                           <a:ea typeface="Calibri" pitchFamily="34" charset="-122"/>
                           <a:cs typeface="Calibri" pitchFamily="34" charset="-120"/>
                         </a:rPr>
-                        <a:t>-2.95%</a:t>
+                        <a:t>3.54%</a:t>
                       </a:r>
                       <a:endParaRPr lang="en-US" sz="500" dirty="0">
                         <a:latin typeface="Calibri" charset="0"/>
@@ -10964,7 +13873,7 @@
                           <a:ea typeface="Calibri" pitchFamily="34" charset="-122"/>
                           <a:cs typeface="Calibri" pitchFamily="34" charset="-120"/>
                         </a:rPr>
-                        <a:t>0.01%</a:t>
+                        <a:t>0.43%</a:t>
                       </a:r>
                       <a:endParaRPr lang="en-US" sz="500" dirty="0">
                         <a:latin typeface="Calibri" charset="0"/>
@@ -11029,7 +13938,7 @@
                           <a:ea typeface="Calibri" pitchFamily="34" charset="-122"/>
                           <a:cs typeface="Calibri" pitchFamily="34" charset="-120"/>
                         </a:rPr>
-                        <a:t>0.01%</a:t>
+                        <a:t>0.49%</a:t>
                       </a:r>
                       <a:endParaRPr lang="en-US" sz="500" dirty="0">
                         <a:latin typeface="Calibri" charset="0"/>
@@ -11094,7 +14003,7 @@
                           <a:ea typeface="Calibri" pitchFamily="34" charset="-122"/>
                           <a:cs typeface="Calibri" pitchFamily="34" charset="-120"/>
                         </a:rPr>
-                        <a:t>0.01%</a:t>
+                        <a:t>0.50%</a:t>
                       </a:r>
                       <a:endParaRPr lang="en-US" sz="500" dirty="0">
                         <a:latin typeface="Calibri" charset="0"/>
@@ -11159,7 +14068,7 @@
                           <a:ea typeface="Calibri" pitchFamily="34" charset="-122"/>
                           <a:cs typeface="Calibri" pitchFamily="34" charset="-120"/>
                         </a:rPr>
-                        <a:t>0.01%</a:t>
+                        <a:t>0.68%</a:t>
                       </a:r>
                       <a:endParaRPr lang="en-US" sz="500" dirty="0">
                         <a:latin typeface="Calibri" charset="0"/>
@@ -11224,7 +14133,7 @@
                           <a:ea typeface="Calibri" pitchFamily="34" charset="-122"/>
                           <a:cs typeface="Calibri" pitchFamily="34" charset="-120"/>
                         </a:rPr>
-                        <a:t>0.01%</a:t>
+                        <a:t>0.59%</a:t>
                       </a:r>
                       <a:endParaRPr lang="en-US" sz="500" dirty="0">
                         <a:latin typeface="Calibri" charset="0"/>
@@ -11289,7 +14198,7 @@
                           <a:ea typeface="Calibri" pitchFamily="34" charset="-122"/>
                           <a:cs typeface="Calibri" pitchFamily="34" charset="-120"/>
                         </a:rPr>
-                        <a:t>0.01%</a:t>
+                        <a:t>0.60%</a:t>
                       </a:r>
                       <a:endParaRPr lang="en-US" sz="500" dirty="0">
                         <a:latin typeface="Calibri" charset="0"/>
@@ -11354,2916 +14263,7 @@
                           <a:ea typeface="Calibri" pitchFamily="34" charset="-122"/>
                           <a:cs typeface="Calibri" pitchFamily="34" charset="-120"/>
                         </a:rPr>
-                        <a:t>0.01%</a:t>
-                      </a:r>
-                      <a:endParaRPr lang="en-US" sz="500" dirty="0">
-                        <a:latin typeface="Calibri" charset="0"/>
-                        <a:ea typeface="Calibri" charset="0"/>
-                        <a:cs typeface="Calibri" charset="0"/>
-                      </a:endParaRPr>
-                    </a:p>
-                  </a:txBody>
-                  <a:tcPr marL="91440" marR="91440" marT="45720" marB="45720">
-                    <a:lnL w="2540" cap="flat" cmpd="sng" algn="ctr">
-                      <a:solidFill>
-                        <a:srgbClr val="EEEEEE"/>
-                      </a:solidFill>
-                      <a:prstDash val="solid"/>
-                      <a:round/>
-                      <a:headEnd type="none" w="med" len="med"/>
-                      <a:tailEnd type="none" w="med" len="med"/>
-                    </a:lnL>
-                    <a:lnR w="2540" cap="flat" cmpd="sng" algn="ctr">
-                      <a:solidFill>
-                        <a:srgbClr val="EEEEEE"/>
-                      </a:solidFill>
-                      <a:prstDash val="solid"/>
-                      <a:round/>
-                      <a:headEnd type="none" w="med" len="med"/>
-                      <a:tailEnd type="none" w="med" len="med"/>
-                    </a:lnR>
-                    <a:lnT w="2540" cap="flat" cmpd="sng" algn="ctr">
-                      <a:solidFill>
-                        <a:srgbClr val="EEEEEE"/>
-                      </a:solidFill>
-                      <a:prstDash val="solid"/>
-                      <a:round/>
-                      <a:headEnd type="none" w="med" len="med"/>
-                      <a:tailEnd type="none" w="med" len="med"/>
-                    </a:lnT>
-                    <a:lnB w="2540" cap="flat" cmpd="sng" algn="ctr">
-                      <a:solidFill>
-                        <a:srgbClr val="EEEEEE"/>
-                      </a:solidFill>
-                      <a:prstDash val="solid"/>
-                      <a:round/>
-                      <a:headEnd type="none" w="med" len="med"/>
-                      <a:tailEnd type="none" w="med" len="med"/>
-                    </a:lnB>
-                  </a:tcPr>
-                </a:tc>
-                <a:tc>
-                  <a:txBody>
-                    <a:bodyPr/>
-                    <a:lstStyle/>
-                    <a:p>
-                      <a:pPr algn="ctr" indent="0" marL="0">
-                        <a:buNone/>
-                      </a:pPr>
-                      <a:r>
-                        <a:rPr lang="en-US" sz="500" dirty="0">
-                          <a:solidFill>
-                            <a:srgbClr val="000000"/>
-                          </a:solidFill>
-                          <a:latin typeface="Calibri" pitchFamily="34" charset="0"/>
-                          <a:ea typeface="Calibri" pitchFamily="34" charset="-122"/>
-                          <a:cs typeface="Calibri" pitchFamily="34" charset="-120"/>
-                        </a:rPr>
-                        <a:t>0.01%</a:t>
-                      </a:r>
-                      <a:endParaRPr lang="en-US" sz="500" dirty="0">
-                        <a:latin typeface="Calibri" charset="0"/>
-                        <a:ea typeface="Calibri" charset="0"/>
-                        <a:cs typeface="Calibri" charset="0"/>
-                      </a:endParaRPr>
-                    </a:p>
-                  </a:txBody>
-                  <a:tcPr marL="91440" marR="91440" marT="45720" marB="45720">
-                    <a:lnL w="2540" cap="flat" cmpd="sng" algn="ctr">
-                      <a:solidFill>
-                        <a:srgbClr val="EEEEEE"/>
-                      </a:solidFill>
-                      <a:prstDash val="solid"/>
-                      <a:round/>
-                      <a:headEnd type="none" w="med" len="med"/>
-                      <a:tailEnd type="none" w="med" len="med"/>
-                    </a:lnL>
-                    <a:lnR w="2540" cap="flat" cmpd="sng" algn="ctr">
-                      <a:solidFill>
-                        <a:srgbClr val="EEEEEE"/>
-                      </a:solidFill>
-                      <a:prstDash val="solid"/>
-                      <a:round/>
-                      <a:headEnd type="none" w="med" len="med"/>
-                      <a:tailEnd type="none" w="med" len="med"/>
-                    </a:lnR>
-                    <a:lnT w="2540" cap="flat" cmpd="sng" algn="ctr">
-                      <a:solidFill>
-                        <a:srgbClr val="EEEEEE"/>
-                      </a:solidFill>
-                      <a:prstDash val="solid"/>
-                      <a:round/>
-                      <a:headEnd type="none" w="med" len="med"/>
-                      <a:tailEnd type="none" w="med" len="med"/>
-                    </a:lnT>
-                    <a:lnB w="2540" cap="flat" cmpd="sng" algn="ctr">
-                      <a:solidFill>
-                        <a:srgbClr val="EEEEEE"/>
-                      </a:solidFill>
-                      <a:prstDash val="solid"/>
-                      <a:round/>
-                      <a:headEnd type="none" w="med" len="med"/>
-                      <a:tailEnd type="none" w="med" len="med"/>
-                    </a:lnB>
-                  </a:tcPr>
-                </a:tc>
-                <a:tc>
-                  <a:txBody>
-                    <a:bodyPr/>
-                    <a:lstStyle/>
-                    <a:p>
-                      <a:pPr algn="ctr" indent="0" marL="0">
-                        <a:buNone/>
-                      </a:pPr>
-                      <a:r>
-                        <a:rPr lang="en-US" sz="500" dirty="0">
-                          <a:solidFill>
-                            <a:srgbClr val="000000"/>
-                          </a:solidFill>
-                          <a:latin typeface="Calibri" pitchFamily="34" charset="0"/>
-                          <a:ea typeface="Calibri" pitchFamily="34" charset="-122"/>
-                          <a:cs typeface="Calibri" pitchFamily="34" charset="-120"/>
-                        </a:rPr>
-                        <a:t>0.00%</a:t>
-                      </a:r>
-                      <a:endParaRPr lang="en-US" sz="500" dirty="0">
-                        <a:latin typeface="Calibri" charset="0"/>
-                        <a:ea typeface="Calibri" charset="0"/>
-                        <a:cs typeface="Calibri" charset="0"/>
-                      </a:endParaRPr>
-                    </a:p>
-                  </a:txBody>
-                  <a:tcPr marL="91440" marR="91440" marT="45720" marB="45720">
-                    <a:lnL w="2540" cap="flat" cmpd="sng" algn="ctr">
-                      <a:solidFill>
-                        <a:srgbClr val="EEEEEE"/>
-                      </a:solidFill>
-                      <a:prstDash val="solid"/>
-                      <a:round/>
-                      <a:headEnd type="none" w="med" len="med"/>
-                      <a:tailEnd type="none" w="med" len="med"/>
-                    </a:lnL>
-                    <a:lnR w="2540" cap="flat" cmpd="sng" algn="ctr">
-                      <a:solidFill>
-                        <a:srgbClr val="EEEEEE"/>
-                      </a:solidFill>
-                      <a:prstDash val="solid"/>
-                      <a:round/>
-                      <a:headEnd type="none" w="med" len="med"/>
-                      <a:tailEnd type="none" w="med" len="med"/>
-                    </a:lnR>
-                    <a:lnT w="2540" cap="flat" cmpd="sng" algn="ctr">
-                      <a:solidFill>
-                        <a:srgbClr val="EEEEEE"/>
-                      </a:solidFill>
-                      <a:prstDash val="solid"/>
-                      <a:round/>
-                      <a:headEnd type="none" w="med" len="med"/>
-                      <a:tailEnd type="none" w="med" len="med"/>
-                    </a:lnT>
-                    <a:lnB w="2540" cap="flat" cmpd="sng" algn="ctr">
-                      <a:solidFill>
-                        <a:srgbClr val="EEEEEE"/>
-                      </a:solidFill>
-                      <a:prstDash val="solid"/>
-                      <a:round/>
-                      <a:headEnd type="none" w="med" len="med"/>
-                      <a:tailEnd type="none" w="med" len="med"/>
-                    </a:lnB>
-                  </a:tcPr>
-                </a:tc>
-                <a:tc>
-                  <a:txBody>
-                    <a:bodyPr/>
-                    <a:lstStyle/>
-                    <a:p>
-                      <a:pPr algn="ctr" indent="0" marL="0">
-                        <a:buNone/>
-                      </a:pPr>
-                      <a:r>
-                        <a:rPr lang="en-US" sz="500" dirty="0">
-                          <a:solidFill>
-                            <a:srgbClr val="000000"/>
-                          </a:solidFill>
-                          <a:latin typeface="Calibri" pitchFamily="34" charset="0"/>
-                          <a:ea typeface="Calibri" pitchFamily="34" charset="-122"/>
-                          <a:cs typeface="Calibri" pitchFamily="34" charset="-120"/>
-                        </a:rPr>
-                        <a:t>0.00%</a:t>
-                      </a:r>
-                      <a:endParaRPr lang="en-US" sz="500" dirty="0">
-                        <a:latin typeface="Calibri" charset="0"/>
-                        <a:ea typeface="Calibri" charset="0"/>
-                        <a:cs typeface="Calibri" charset="0"/>
-                      </a:endParaRPr>
-                    </a:p>
-                  </a:txBody>
-                  <a:tcPr marL="91440" marR="91440" marT="45720" marB="45720">
-                    <a:lnL w="2540" cap="flat" cmpd="sng" algn="ctr">
-                      <a:solidFill>
-                        <a:srgbClr val="EEEEEE"/>
-                      </a:solidFill>
-                      <a:prstDash val="solid"/>
-                      <a:round/>
-                      <a:headEnd type="none" w="med" len="med"/>
-                      <a:tailEnd type="none" w="med" len="med"/>
-                    </a:lnL>
-                    <a:lnR w="2540" cap="flat" cmpd="sng" algn="ctr">
-                      <a:solidFill>
-                        <a:srgbClr val="EEEEEE"/>
-                      </a:solidFill>
-                      <a:prstDash val="solid"/>
-                      <a:round/>
-                      <a:headEnd type="none" w="med" len="med"/>
-                      <a:tailEnd type="none" w="med" len="med"/>
-                    </a:lnR>
-                    <a:lnT w="2540" cap="flat" cmpd="sng" algn="ctr">
-                      <a:solidFill>
-                        <a:srgbClr val="EEEEEE"/>
-                      </a:solidFill>
-                      <a:prstDash val="solid"/>
-                      <a:round/>
-                      <a:headEnd type="none" w="med" len="med"/>
-                      <a:tailEnd type="none" w="med" len="med"/>
-                    </a:lnT>
-                    <a:lnB w="2540" cap="flat" cmpd="sng" algn="ctr">
-                      <a:solidFill>
-                        <a:srgbClr val="EEEEEE"/>
-                      </a:solidFill>
-                      <a:prstDash val="solid"/>
-                      <a:round/>
-                      <a:headEnd type="none" w="med" len="med"/>
-                      <a:tailEnd type="none" w="med" len="med"/>
-                    </a:lnB>
-                  </a:tcPr>
-                </a:tc>
-                <a:tc>
-                  <a:txBody>
-                    <a:bodyPr/>
-                    <a:lstStyle/>
-                    <a:p>
-                      <a:pPr algn="ctr" indent="0" marL="0">
-                        <a:buNone/>
-                      </a:pPr>
-                      <a:r>
-                        <a:rPr lang="en-US" sz="500" dirty="0">
-                          <a:solidFill>
-                            <a:srgbClr val="000000"/>
-                          </a:solidFill>
-                          <a:latin typeface="Calibri" pitchFamily="34" charset="0"/>
-                          <a:ea typeface="Calibri" pitchFamily="34" charset="-122"/>
-                          <a:cs typeface="Calibri" pitchFamily="34" charset="-120"/>
-                        </a:rPr>
-                        <a:t>0.00%</a:t>
-                      </a:r>
-                      <a:endParaRPr lang="en-US" sz="500" dirty="0">
-                        <a:latin typeface="Calibri" charset="0"/>
-                        <a:ea typeface="Calibri" charset="0"/>
-                        <a:cs typeface="Calibri" charset="0"/>
-                      </a:endParaRPr>
-                    </a:p>
-                  </a:txBody>
-                  <a:tcPr marL="91440" marR="91440" marT="45720" marB="45720">
-                    <a:lnL w="2540" cap="flat" cmpd="sng" algn="ctr">
-                      <a:solidFill>
-                        <a:srgbClr val="EEEEEE"/>
-                      </a:solidFill>
-                      <a:prstDash val="solid"/>
-                      <a:round/>
-                      <a:headEnd type="none" w="med" len="med"/>
-                      <a:tailEnd type="none" w="med" len="med"/>
-                    </a:lnL>
-                    <a:lnR w="2540" cap="flat" cmpd="sng" algn="ctr">
-                      <a:solidFill>
-                        <a:srgbClr val="EEEEEE"/>
-                      </a:solidFill>
-                      <a:prstDash val="solid"/>
-                      <a:round/>
-                      <a:headEnd type="none" w="med" len="med"/>
-                      <a:tailEnd type="none" w="med" len="med"/>
-                    </a:lnR>
-                    <a:lnT w="2540" cap="flat" cmpd="sng" algn="ctr">
-                      <a:solidFill>
-                        <a:srgbClr val="EEEEEE"/>
-                      </a:solidFill>
-                      <a:prstDash val="solid"/>
-                      <a:round/>
-                      <a:headEnd type="none" w="med" len="med"/>
-                      <a:tailEnd type="none" w="med" len="med"/>
-                    </a:lnT>
-                    <a:lnB w="2540" cap="flat" cmpd="sng" algn="ctr">
-                      <a:solidFill>
-                        <a:srgbClr val="EEEEEE"/>
-                      </a:solidFill>
-                      <a:prstDash val="solid"/>
-                      <a:round/>
-                      <a:headEnd type="none" w="med" len="med"/>
-                      <a:tailEnd type="none" w="med" len="med"/>
-                    </a:lnB>
-                  </a:tcPr>
-                </a:tc>
-                <a:tc>
-                  <a:txBody>
-                    <a:bodyPr/>
-                    <a:lstStyle/>
-                    <a:p>
-                      <a:pPr algn="ctr" indent="0" marL="0">
-                        <a:buNone/>
-                      </a:pPr>
-                      <a:r>
-                        <a:rPr lang="en-US" sz="500" dirty="0">
-                          <a:solidFill>
-                            <a:srgbClr val="000000"/>
-                          </a:solidFill>
-                          <a:latin typeface="Calibri" pitchFamily="34" charset="0"/>
-                          <a:ea typeface="Calibri" pitchFamily="34" charset="-122"/>
-                          <a:cs typeface="Calibri" pitchFamily="34" charset="-120"/>
-                        </a:rPr>
-                        <a:t>0.00%</a:t>
-                      </a:r>
-                      <a:endParaRPr lang="en-US" sz="500" dirty="0">
-                        <a:latin typeface="Calibri" charset="0"/>
-                        <a:ea typeface="Calibri" charset="0"/>
-                        <a:cs typeface="Calibri" charset="0"/>
-                      </a:endParaRPr>
-                    </a:p>
-                  </a:txBody>
-                  <a:tcPr marL="91440" marR="91440" marT="45720" marB="45720">
-                    <a:lnL w="2540" cap="flat" cmpd="sng" algn="ctr">
-                      <a:solidFill>
-                        <a:srgbClr val="EEEEEE"/>
-                      </a:solidFill>
-                      <a:prstDash val="solid"/>
-                      <a:round/>
-                      <a:headEnd type="none" w="med" len="med"/>
-                      <a:tailEnd type="none" w="med" len="med"/>
-                    </a:lnL>
-                    <a:lnR w="2540" cap="flat" cmpd="sng" algn="ctr">
-                      <a:solidFill>
-                        <a:srgbClr val="EEEEEE"/>
-                      </a:solidFill>
-                      <a:prstDash val="solid"/>
-                      <a:round/>
-                      <a:headEnd type="none" w="med" len="med"/>
-                      <a:tailEnd type="none" w="med" len="med"/>
-                    </a:lnR>
-                    <a:lnT w="2540" cap="flat" cmpd="sng" algn="ctr">
-                      <a:solidFill>
-                        <a:srgbClr val="EEEEEE"/>
-                      </a:solidFill>
-                      <a:prstDash val="solid"/>
-                      <a:round/>
-                      <a:headEnd type="none" w="med" len="med"/>
-                      <a:tailEnd type="none" w="med" len="med"/>
-                    </a:lnT>
-                    <a:lnB w="2540" cap="flat" cmpd="sng" algn="ctr">
-                      <a:solidFill>
-                        <a:srgbClr val="EEEEEE"/>
-                      </a:solidFill>
-                      <a:prstDash val="solid"/>
-                      <a:round/>
-                      <a:headEnd type="none" w="med" len="med"/>
-                      <a:tailEnd type="none" w="med" len="med"/>
-                    </a:lnB>
-                  </a:tcPr>
-                </a:tc>
-                <a:tc>
-                  <a:txBody>
-                    <a:bodyPr/>
-                    <a:lstStyle/>
-                    <a:p>
-                      <a:pPr algn="ctr" indent="0" marL="0">
-                        <a:buNone/>
-                      </a:pPr>
-                      <a:r>
-                        <a:rPr lang="en-US" sz="500" b="1" dirty="0">
-                          <a:solidFill>
-                            <a:srgbClr val="000000"/>
-                          </a:solidFill>
-                          <a:latin typeface="Calibri" pitchFamily="34" charset="0"/>
-                          <a:ea typeface="Calibri" pitchFamily="34" charset="-122"/>
-                          <a:cs typeface="Calibri" pitchFamily="34" charset="-120"/>
-                        </a:rPr>
-                        <a:t>0.07%</a:t>
-                      </a:r>
-                      <a:endParaRPr lang="en-US" sz="500" dirty="0">
-                        <a:latin typeface="Calibri" charset="0"/>
-                        <a:ea typeface="Calibri" charset="0"/>
-                        <a:cs typeface="Calibri" charset="0"/>
-                      </a:endParaRPr>
-                    </a:p>
-                  </a:txBody>
-                  <a:tcPr marL="91440" marR="91440" marT="45720" marB="45720">
-                    <a:lnL w="2540" cap="flat" cmpd="sng" algn="ctr">
-                      <a:solidFill>
-                        <a:srgbClr val="EEEEEE"/>
-                      </a:solidFill>
-                      <a:prstDash val="solid"/>
-                      <a:round/>
-                      <a:headEnd type="none" w="med" len="med"/>
-                      <a:tailEnd type="none" w="med" len="med"/>
-                    </a:lnL>
-                    <a:lnR w="2540" cap="flat" cmpd="sng" algn="ctr">
-                      <a:solidFill>
-                        <a:srgbClr val="EEEEEE"/>
-                      </a:solidFill>
-                      <a:prstDash val="solid"/>
-                      <a:round/>
-                      <a:headEnd type="none" w="med" len="med"/>
-                      <a:tailEnd type="none" w="med" len="med"/>
-                    </a:lnR>
-                    <a:lnT w="2540" cap="flat" cmpd="sng" algn="ctr">
-                      <a:solidFill>
-                        <a:srgbClr val="EEEEEE"/>
-                      </a:solidFill>
-                      <a:prstDash val="solid"/>
-                      <a:round/>
-                      <a:headEnd type="none" w="med" len="med"/>
-                      <a:tailEnd type="none" w="med" len="med"/>
-                    </a:lnT>
-                    <a:lnB w="2540" cap="flat" cmpd="sng" algn="ctr">
-                      <a:solidFill>
-                        <a:srgbClr val="EEEEEE"/>
-                      </a:solidFill>
-                      <a:prstDash val="solid"/>
-                      <a:round/>
-                      <a:headEnd type="none" w="med" len="med"/>
-                      <a:tailEnd type="none" w="med" len="med"/>
-                    </a:lnB>
-                  </a:tcPr>
-                </a:tc>
-              </a:tr>
-              <a:tr h="123444">
-                <a:tc>
-                  <a:txBody>
-                    <a:bodyPr/>
-                    <a:lstStyle/>
-                    <a:p>
-                      <a:pPr algn="l" indent="0" marL="0">
-                        <a:buNone/>
-                      </a:pPr>
-                      <a:r>
-                        <a:rPr lang="en-US" sz="500" b="1" dirty="0">
-                          <a:solidFill>
-                            <a:srgbClr val="000000"/>
-                          </a:solidFill>
-                          <a:latin typeface="Calibri" pitchFamily="34" charset="0"/>
-                          <a:ea typeface="Calibri" pitchFamily="34" charset="-122"/>
-                          <a:cs typeface="Calibri" pitchFamily="34" charset="-120"/>
-                        </a:rPr>
-                        <a:t>2025</a:t>
-                      </a:r>
-                      <a:endParaRPr lang="en-US" sz="500" dirty="0">
-                        <a:latin typeface="Calibri" charset="0"/>
-                        <a:ea typeface="Calibri" charset="0"/>
-                        <a:cs typeface="Calibri" charset="0"/>
-                      </a:endParaRPr>
-                    </a:p>
-                  </a:txBody>
-                  <a:tcPr marL="91440" marR="91440" marT="45720" marB="45720">
-                    <a:lnL w="2540" cap="flat" cmpd="sng" algn="ctr">
-                      <a:solidFill>
-                        <a:srgbClr val="EEEEEE"/>
-                      </a:solidFill>
-                      <a:prstDash val="solid"/>
-                      <a:round/>
-                      <a:headEnd type="none" w="med" len="med"/>
-                      <a:tailEnd type="none" w="med" len="med"/>
-                    </a:lnL>
-                    <a:lnR w="2540" cap="flat" cmpd="sng" algn="ctr">
-                      <a:solidFill>
-                        <a:srgbClr val="EEEEEE"/>
-                      </a:solidFill>
-                      <a:prstDash val="solid"/>
-                      <a:round/>
-                      <a:headEnd type="none" w="med" len="med"/>
-                      <a:tailEnd type="none" w="med" len="med"/>
-                    </a:lnR>
-                    <a:lnT w="2540" cap="flat" cmpd="sng" algn="ctr">
-                      <a:solidFill>
-                        <a:srgbClr val="EEEEEE"/>
-                      </a:solidFill>
-                      <a:prstDash val="solid"/>
-                      <a:round/>
-                      <a:headEnd type="none" w="med" len="med"/>
-                      <a:tailEnd type="none" w="med" len="med"/>
-                    </a:lnT>
-                    <a:lnB w="2540" cap="flat" cmpd="sng" algn="ctr">
-                      <a:solidFill>
-                        <a:srgbClr val="EEEEEE"/>
-                      </a:solidFill>
-                      <a:prstDash val="solid"/>
-                      <a:round/>
-                      <a:headEnd type="none" w="med" len="med"/>
-                      <a:tailEnd type="none" w="med" len="med"/>
-                    </a:lnB>
-                  </a:tcPr>
-                </a:tc>
-                <a:tc>
-                  <a:txBody>
-                    <a:bodyPr/>
-                    <a:lstStyle/>
-                    <a:p>
-                      <a:pPr algn="l" indent="0" marL="0">
-                        <a:buNone/>
-                      </a:pPr>
-                      <a:r>
-                        <a:rPr lang="en-US" sz="500" dirty="0">
-                          <a:solidFill>
-                            <a:srgbClr val="777777"/>
-                          </a:solidFill>
-                          <a:latin typeface="Calibri" pitchFamily="34" charset="0"/>
-                          <a:ea typeface="Calibri" pitchFamily="34" charset="-122"/>
-                          <a:cs typeface="Calibri" pitchFamily="34" charset="-120"/>
-                        </a:rPr>
-                        <a:t>ICP</a:t>
-                      </a:r>
-                      <a:endParaRPr lang="en-US" sz="500" dirty="0">
-                        <a:latin typeface="Calibri" charset="0"/>
-                        <a:ea typeface="Calibri" charset="0"/>
-                        <a:cs typeface="Calibri" charset="0"/>
-                      </a:endParaRPr>
-                    </a:p>
-                  </a:txBody>
-                  <a:tcPr marL="91440" marR="91440" marT="45720" marB="45720">
-                    <a:lnL w="2540" cap="flat" cmpd="sng" algn="ctr">
-                      <a:solidFill>
-                        <a:srgbClr val="EEEEEE"/>
-                      </a:solidFill>
-                      <a:prstDash val="solid"/>
-                      <a:round/>
-                      <a:headEnd type="none" w="med" len="med"/>
-                      <a:tailEnd type="none" w="med" len="med"/>
-                    </a:lnL>
-                    <a:lnR w="2540" cap="flat" cmpd="sng" algn="ctr">
-                      <a:solidFill>
-                        <a:srgbClr val="EEEEEE"/>
-                      </a:solidFill>
-                      <a:prstDash val="solid"/>
-                      <a:round/>
-                      <a:headEnd type="none" w="med" len="med"/>
-                      <a:tailEnd type="none" w="med" len="med"/>
-                    </a:lnR>
-                    <a:lnT w="2540" cap="flat" cmpd="sng" algn="ctr">
-                      <a:solidFill>
-                        <a:srgbClr val="EEEEEE"/>
-                      </a:solidFill>
-                      <a:prstDash val="solid"/>
-                      <a:round/>
-                      <a:headEnd type="none" w="med" len="med"/>
-                      <a:tailEnd type="none" w="med" len="med"/>
-                    </a:lnT>
-                    <a:lnB w="2540" cap="flat" cmpd="sng" algn="ctr">
-                      <a:solidFill>
-                        <a:srgbClr val="EEEEEE"/>
-                      </a:solidFill>
-                      <a:prstDash val="solid"/>
-                      <a:round/>
-                      <a:headEnd type="none" w="med" len="med"/>
-                      <a:tailEnd type="none" w="med" len="med"/>
-                    </a:lnB>
-                  </a:tcPr>
-                </a:tc>
-                <a:tc>
-                  <a:txBody>
-                    <a:bodyPr/>
-                    <a:lstStyle/>
-                    <a:p>
-                      <a:pPr algn="ctr" indent="0" marL="0">
-                        <a:buNone/>
-                      </a:pPr>
-                      <a:r>
-                        <a:rPr lang="en-US" sz="500" dirty="0">
-                          <a:solidFill>
-                            <a:srgbClr val="777777"/>
-                          </a:solidFill>
-                          <a:latin typeface="Calibri" pitchFamily="34" charset="0"/>
-                          <a:ea typeface="Calibri" pitchFamily="34" charset="-122"/>
-                          <a:cs typeface="Calibri" pitchFamily="34" charset="-120"/>
-                        </a:rPr>
-                        <a:t>0.42%</a:t>
-                      </a:r>
-                      <a:endParaRPr lang="en-US" sz="500" dirty="0">
-                        <a:latin typeface="Calibri" charset="0"/>
-                        <a:ea typeface="Calibri" charset="0"/>
-                        <a:cs typeface="Calibri" charset="0"/>
-                      </a:endParaRPr>
-                    </a:p>
-                  </a:txBody>
-                  <a:tcPr marL="91440" marR="91440" marT="45720" marB="45720">
-                    <a:lnL w="2540" cap="flat" cmpd="sng" algn="ctr">
-                      <a:solidFill>
-                        <a:srgbClr val="EEEEEE"/>
-                      </a:solidFill>
-                      <a:prstDash val="solid"/>
-                      <a:round/>
-                      <a:headEnd type="none" w="med" len="med"/>
-                      <a:tailEnd type="none" w="med" len="med"/>
-                    </a:lnL>
-                    <a:lnR w="2540" cap="flat" cmpd="sng" algn="ctr">
-                      <a:solidFill>
-                        <a:srgbClr val="EEEEEE"/>
-                      </a:solidFill>
-                      <a:prstDash val="solid"/>
-                      <a:round/>
-                      <a:headEnd type="none" w="med" len="med"/>
-                      <a:tailEnd type="none" w="med" len="med"/>
-                    </a:lnR>
-                    <a:lnT w="2540" cap="flat" cmpd="sng" algn="ctr">
-                      <a:solidFill>
-                        <a:srgbClr val="EEEEEE"/>
-                      </a:solidFill>
-                      <a:prstDash val="solid"/>
-                      <a:round/>
-                      <a:headEnd type="none" w="med" len="med"/>
-                      <a:tailEnd type="none" w="med" len="med"/>
-                    </a:lnT>
-                    <a:lnB w="2540" cap="flat" cmpd="sng" algn="ctr">
-                      <a:solidFill>
-                        <a:srgbClr val="EEEEEE"/>
-                      </a:solidFill>
-                      <a:prstDash val="solid"/>
-                      <a:round/>
-                      <a:headEnd type="none" w="med" len="med"/>
-                      <a:tailEnd type="none" w="med" len="med"/>
-                    </a:lnB>
-                  </a:tcPr>
-                </a:tc>
-                <a:tc>
-                  <a:txBody>
-                    <a:bodyPr/>
-                    <a:lstStyle/>
-                    <a:p>
-                      <a:pPr algn="ctr" indent="0" marL="0">
-                        <a:buNone/>
-                      </a:pPr>
-                      <a:r>
-                        <a:rPr lang="en-US" sz="500" dirty="0">
-                          <a:solidFill>
-                            <a:srgbClr val="777777"/>
-                          </a:solidFill>
-                          <a:latin typeface="Calibri" pitchFamily="34" charset="0"/>
-                          <a:ea typeface="Calibri" pitchFamily="34" charset="-122"/>
-                          <a:cs typeface="Calibri" pitchFamily="34" charset="-120"/>
-                        </a:rPr>
-                        <a:t>0.42%</a:t>
-                      </a:r>
-                      <a:endParaRPr lang="en-US" sz="500" dirty="0">
-                        <a:latin typeface="Calibri" charset="0"/>
-                        <a:ea typeface="Calibri" charset="0"/>
-                        <a:cs typeface="Calibri" charset="0"/>
-                      </a:endParaRPr>
-                    </a:p>
-                  </a:txBody>
-                  <a:tcPr marL="91440" marR="91440" marT="45720" marB="45720">
-                    <a:lnL w="2540" cap="flat" cmpd="sng" algn="ctr">
-                      <a:solidFill>
-                        <a:srgbClr val="EEEEEE"/>
-                      </a:solidFill>
-                      <a:prstDash val="solid"/>
-                      <a:round/>
-                      <a:headEnd type="none" w="med" len="med"/>
-                      <a:tailEnd type="none" w="med" len="med"/>
-                    </a:lnL>
-                    <a:lnR w="2540" cap="flat" cmpd="sng" algn="ctr">
-                      <a:solidFill>
-                        <a:srgbClr val="EEEEEE"/>
-                      </a:solidFill>
-                      <a:prstDash val="solid"/>
-                      <a:round/>
-                      <a:headEnd type="none" w="med" len="med"/>
-                      <a:tailEnd type="none" w="med" len="med"/>
-                    </a:lnR>
-                    <a:lnT w="2540" cap="flat" cmpd="sng" algn="ctr">
-                      <a:solidFill>
-                        <a:srgbClr val="EEEEEE"/>
-                      </a:solidFill>
-                      <a:prstDash val="solid"/>
-                      <a:round/>
-                      <a:headEnd type="none" w="med" len="med"/>
-                      <a:tailEnd type="none" w="med" len="med"/>
-                    </a:lnT>
-                    <a:lnB w="2540" cap="flat" cmpd="sng" algn="ctr">
-                      <a:solidFill>
-                        <a:srgbClr val="EEEEEE"/>
-                      </a:solidFill>
-                      <a:prstDash val="solid"/>
-                      <a:round/>
-                      <a:headEnd type="none" w="med" len="med"/>
-                      <a:tailEnd type="none" w="med" len="med"/>
-                    </a:lnB>
-                  </a:tcPr>
-                </a:tc>
-                <a:tc>
-                  <a:txBody>
-                    <a:bodyPr/>
-                    <a:lstStyle/>
-                    <a:p>
-                      <a:pPr algn="ctr" indent="0" marL="0">
-                        <a:buNone/>
-                      </a:pPr>
-                      <a:r>
-                        <a:rPr lang="en-US" sz="500" dirty="0">
-                          <a:solidFill>
-                            <a:srgbClr val="777777"/>
-                          </a:solidFill>
-                          <a:latin typeface="Calibri" pitchFamily="34" charset="0"/>
-                          <a:ea typeface="Calibri" pitchFamily="34" charset="-122"/>
-                          <a:cs typeface="Calibri" pitchFamily="34" charset="-120"/>
-                        </a:rPr>
-                        <a:t>0.42%</a:t>
-                      </a:r>
-                      <a:endParaRPr lang="en-US" sz="500" dirty="0">
-                        <a:latin typeface="Calibri" charset="0"/>
-                        <a:ea typeface="Calibri" charset="0"/>
-                        <a:cs typeface="Calibri" charset="0"/>
-                      </a:endParaRPr>
-                    </a:p>
-                  </a:txBody>
-                  <a:tcPr marL="91440" marR="91440" marT="45720" marB="45720">
-                    <a:lnL w="2540" cap="flat" cmpd="sng" algn="ctr">
-                      <a:solidFill>
-                        <a:srgbClr val="EEEEEE"/>
-                      </a:solidFill>
-                      <a:prstDash val="solid"/>
-                      <a:round/>
-                      <a:headEnd type="none" w="med" len="med"/>
-                      <a:tailEnd type="none" w="med" len="med"/>
-                    </a:lnL>
-                    <a:lnR w="2540" cap="flat" cmpd="sng" algn="ctr">
-                      <a:solidFill>
-                        <a:srgbClr val="EEEEEE"/>
-                      </a:solidFill>
-                      <a:prstDash val="solid"/>
-                      <a:round/>
-                      <a:headEnd type="none" w="med" len="med"/>
-                      <a:tailEnd type="none" w="med" len="med"/>
-                    </a:lnR>
-                    <a:lnT w="2540" cap="flat" cmpd="sng" algn="ctr">
-                      <a:solidFill>
-                        <a:srgbClr val="EEEEEE"/>
-                      </a:solidFill>
-                      <a:prstDash val="solid"/>
-                      <a:round/>
-                      <a:headEnd type="none" w="med" len="med"/>
-                      <a:tailEnd type="none" w="med" len="med"/>
-                    </a:lnT>
-                    <a:lnB w="2540" cap="flat" cmpd="sng" algn="ctr">
-                      <a:solidFill>
-                        <a:srgbClr val="EEEEEE"/>
-                      </a:solidFill>
-                      <a:prstDash val="solid"/>
-                      <a:round/>
-                      <a:headEnd type="none" w="med" len="med"/>
-                      <a:tailEnd type="none" w="med" len="med"/>
-                    </a:lnB>
-                  </a:tcPr>
-                </a:tc>
-                <a:tc>
-                  <a:txBody>
-                    <a:bodyPr/>
-                    <a:lstStyle/>
-                    <a:p>
-                      <a:pPr algn="ctr" indent="0" marL="0">
-                        <a:buNone/>
-                      </a:pPr>
-                      <a:r>
-                        <a:rPr lang="en-US" sz="500" dirty="0">
-                          <a:solidFill>
-                            <a:srgbClr val="777777"/>
-                          </a:solidFill>
-                          <a:latin typeface="Calibri" pitchFamily="34" charset="0"/>
-                          <a:ea typeface="Calibri" pitchFamily="34" charset="-122"/>
-                          <a:cs typeface="Calibri" pitchFamily="34" charset="-120"/>
-                        </a:rPr>
-                        <a:t>0.42%</a:t>
-                      </a:r>
-                      <a:endParaRPr lang="en-US" sz="500" dirty="0">
-                        <a:latin typeface="Calibri" charset="0"/>
-                        <a:ea typeface="Calibri" charset="0"/>
-                        <a:cs typeface="Calibri" charset="0"/>
-                      </a:endParaRPr>
-                    </a:p>
-                  </a:txBody>
-                  <a:tcPr marL="91440" marR="91440" marT="45720" marB="45720">
-                    <a:lnL w="2540" cap="flat" cmpd="sng" algn="ctr">
-                      <a:solidFill>
-                        <a:srgbClr val="EEEEEE"/>
-                      </a:solidFill>
-                      <a:prstDash val="solid"/>
-                      <a:round/>
-                      <a:headEnd type="none" w="med" len="med"/>
-                      <a:tailEnd type="none" w="med" len="med"/>
-                    </a:lnL>
-                    <a:lnR w="2540" cap="flat" cmpd="sng" algn="ctr">
-                      <a:solidFill>
-                        <a:srgbClr val="EEEEEE"/>
-                      </a:solidFill>
-                      <a:prstDash val="solid"/>
-                      <a:round/>
-                      <a:headEnd type="none" w="med" len="med"/>
-                      <a:tailEnd type="none" w="med" len="med"/>
-                    </a:lnR>
-                    <a:lnT w="2540" cap="flat" cmpd="sng" algn="ctr">
-                      <a:solidFill>
-                        <a:srgbClr val="EEEEEE"/>
-                      </a:solidFill>
-                      <a:prstDash val="solid"/>
-                      <a:round/>
-                      <a:headEnd type="none" w="med" len="med"/>
-                      <a:tailEnd type="none" w="med" len="med"/>
-                    </a:lnT>
-                    <a:lnB w="2540" cap="flat" cmpd="sng" algn="ctr">
-                      <a:solidFill>
-                        <a:srgbClr val="EEEEEE"/>
-                      </a:solidFill>
-                      <a:prstDash val="solid"/>
-                      <a:round/>
-                      <a:headEnd type="none" w="med" len="med"/>
-                      <a:tailEnd type="none" w="med" len="med"/>
-                    </a:lnB>
-                  </a:tcPr>
-                </a:tc>
-                <a:tc>
-                  <a:txBody>
-                    <a:bodyPr/>
-                    <a:lstStyle/>
-                    <a:p>
-                      <a:pPr algn="ctr" indent="0" marL="0">
-                        <a:buNone/>
-                      </a:pPr>
-                      <a:r>
-                        <a:rPr lang="en-US" sz="500" dirty="0">
-                          <a:solidFill>
-                            <a:srgbClr val="777777"/>
-                          </a:solidFill>
-                          <a:latin typeface="Calibri" pitchFamily="34" charset="0"/>
-                          <a:ea typeface="Calibri" pitchFamily="34" charset="-122"/>
-                          <a:cs typeface="Calibri" pitchFamily="34" charset="-120"/>
-                        </a:rPr>
-                        <a:t>0.42%</a:t>
-                      </a:r>
-                      <a:endParaRPr lang="en-US" sz="500" dirty="0">
-                        <a:latin typeface="Calibri" charset="0"/>
-                        <a:ea typeface="Calibri" charset="0"/>
-                        <a:cs typeface="Calibri" charset="0"/>
-                      </a:endParaRPr>
-                    </a:p>
-                  </a:txBody>
-                  <a:tcPr marL="91440" marR="91440" marT="45720" marB="45720">
-                    <a:lnL w="2540" cap="flat" cmpd="sng" algn="ctr">
-                      <a:solidFill>
-                        <a:srgbClr val="EEEEEE"/>
-                      </a:solidFill>
-                      <a:prstDash val="solid"/>
-                      <a:round/>
-                      <a:headEnd type="none" w="med" len="med"/>
-                      <a:tailEnd type="none" w="med" len="med"/>
-                    </a:lnL>
-                    <a:lnR w="2540" cap="flat" cmpd="sng" algn="ctr">
-                      <a:solidFill>
-                        <a:srgbClr val="EEEEEE"/>
-                      </a:solidFill>
-                      <a:prstDash val="solid"/>
-                      <a:round/>
-                      <a:headEnd type="none" w="med" len="med"/>
-                      <a:tailEnd type="none" w="med" len="med"/>
-                    </a:lnR>
-                    <a:lnT w="2540" cap="flat" cmpd="sng" algn="ctr">
-                      <a:solidFill>
-                        <a:srgbClr val="EEEEEE"/>
-                      </a:solidFill>
-                      <a:prstDash val="solid"/>
-                      <a:round/>
-                      <a:headEnd type="none" w="med" len="med"/>
-                      <a:tailEnd type="none" w="med" len="med"/>
-                    </a:lnT>
-                    <a:lnB w="2540" cap="flat" cmpd="sng" algn="ctr">
-                      <a:solidFill>
-                        <a:srgbClr val="EEEEEE"/>
-                      </a:solidFill>
-                      <a:prstDash val="solid"/>
-                      <a:round/>
-                      <a:headEnd type="none" w="med" len="med"/>
-                      <a:tailEnd type="none" w="med" len="med"/>
-                    </a:lnB>
-                  </a:tcPr>
-                </a:tc>
-                <a:tc>
-                  <a:txBody>
-                    <a:bodyPr/>
-                    <a:lstStyle/>
-                    <a:p>
-                      <a:pPr algn="ctr" indent="0" marL="0">
-                        <a:buNone/>
-                      </a:pPr>
-                      <a:r>
-                        <a:rPr lang="en-US" sz="500" dirty="0">
-                          <a:solidFill>
-                            <a:srgbClr val="777777"/>
-                          </a:solidFill>
-                          <a:latin typeface="Calibri" pitchFamily="34" charset="0"/>
-                          <a:ea typeface="Calibri" pitchFamily="34" charset="-122"/>
-                          <a:cs typeface="Calibri" pitchFamily="34" charset="-120"/>
-                        </a:rPr>
-                        <a:t>0.42%</a:t>
-                      </a:r>
-                      <a:endParaRPr lang="en-US" sz="500" dirty="0">
-                        <a:latin typeface="Calibri" charset="0"/>
-                        <a:ea typeface="Calibri" charset="0"/>
-                        <a:cs typeface="Calibri" charset="0"/>
-                      </a:endParaRPr>
-                    </a:p>
-                  </a:txBody>
-                  <a:tcPr marL="91440" marR="91440" marT="45720" marB="45720">
-                    <a:lnL w="2540" cap="flat" cmpd="sng" algn="ctr">
-                      <a:solidFill>
-                        <a:srgbClr val="EEEEEE"/>
-                      </a:solidFill>
-                      <a:prstDash val="solid"/>
-                      <a:round/>
-                      <a:headEnd type="none" w="med" len="med"/>
-                      <a:tailEnd type="none" w="med" len="med"/>
-                    </a:lnL>
-                    <a:lnR w="2540" cap="flat" cmpd="sng" algn="ctr">
-                      <a:solidFill>
-                        <a:srgbClr val="EEEEEE"/>
-                      </a:solidFill>
-                      <a:prstDash val="solid"/>
-                      <a:round/>
-                      <a:headEnd type="none" w="med" len="med"/>
-                      <a:tailEnd type="none" w="med" len="med"/>
-                    </a:lnR>
-                    <a:lnT w="2540" cap="flat" cmpd="sng" algn="ctr">
-                      <a:solidFill>
-                        <a:srgbClr val="EEEEEE"/>
-                      </a:solidFill>
-                      <a:prstDash val="solid"/>
-                      <a:round/>
-                      <a:headEnd type="none" w="med" len="med"/>
-                      <a:tailEnd type="none" w="med" len="med"/>
-                    </a:lnT>
-                    <a:lnB w="2540" cap="flat" cmpd="sng" algn="ctr">
-                      <a:solidFill>
-                        <a:srgbClr val="EEEEEE"/>
-                      </a:solidFill>
-                      <a:prstDash val="solid"/>
-                      <a:round/>
-                      <a:headEnd type="none" w="med" len="med"/>
-                      <a:tailEnd type="none" w="med" len="med"/>
-                    </a:lnB>
-                  </a:tcPr>
-                </a:tc>
-                <a:tc>
-                  <a:txBody>
-                    <a:bodyPr/>
-                    <a:lstStyle/>
-                    <a:p>
-                      <a:pPr algn="ctr" indent="0" marL="0">
-                        <a:buNone/>
-                      </a:pPr>
-                      <a:r>
-                        <a:rPr lang="en-US" sz="500" dirty="0">
-                          <a:solidFill>
-                            <a:srgbClr val="777777"/>
-                          </a:solidFill>
-                          <a:latin typeface="Calibri" pitchFamily="34" charset="0"/>
-                          <a:ea typeface="Calibri" pitchFamily="34" charset="-122"/>
-                          <a:cs typeface="Calibri" pitchFamily="34" charset="-120"/>
-                        </a:rPr>
-                        <a:t>0.41%</a:t>
-                      </a:r>
-                      <a:endParaRPr lang="en-US" sz="500" dirty="0">
-                        <a:latin typeface="Calibri" charset="0"/>
-                        <a:ea typeface="Calibri" charset="0"/>
-                        <a:cs typeface="Calibri" charset="0"/>
-                      </a:endParaRPr>
-                    </a:p>
-                  </a:txBody>
-                  <a:tcPr marL="91440" marR="91440" marT="45720" marB="45720">
-                    <a:lnL w="2540" cap="flat" cmpd="sng" algn="ctr">
-                      <a:solidFill>
-                        <a:srgbClr val="EEEEEE"/>
-                      </a:solidFill>
-                      <a:prstDash val="solid"/>
-                      <a:round/>
-                      <a:headEnd type="none" w="med" len="med"/>
-                      <a:tailEnd type="none" w="med" len="med"/>
-                    </a:lnL>
-                    <a:lnR w="2540" cap="flat" cmpd="sng" algn="ctr">
-                      <a:solidFill>
-                        <a:srgbClr val="EEEEEE"/>
-                      </a:solidFill>
-                      <a:prstDash val="solid"/>
-                      <a:round/>
-                      <a:headEnd type="none" w="med" len="med"/>
-                      <a:tailEnd type="none" w="med" len="med"/>
-                    </a:lnR>
-                    <a:lnT w="2540" cap="flat" cmpd="sng" algn="ctr">
-                      <a:solidFill>
-                        <a:srgbClr val="EEEEEE"/>
-                      </a:solidFill>
-                      <a:prstDash val="solid"/>
-                      <a:round/>
-                      <a:headEnd type="none" w="med" len="med"/>
-                      <a:tailEnd type="none" w="med" len="med"/>
-                    </a:lnT>
-                    <a:lnB w="2540" cap="flat" cmpd="sng" algn="ctr">
-                      <a:solidFill>
-                        <a:srgbClr val="EEEEEE"/>
-                      </a:solidFill>
-                      <a:prstDash val="solid"/>
-                      <a:round/>
-                      <a:headEnd type="none" w="med" len="med"/>
-                      <a:tailEnd type="none" w="med" len="med"/>
-                    </a:lnB>
-                  </a:tcPr>
-                </a:tc>
-                <a:tc>
-                  <a:txBody>
-                    <a:bodyPr/>
-                    <a:lstStyle/>
-                    <a:p>
-                      <a:pPr algn="ctr" indent="0" marL="0">
-                        <a:buNone/>
-                      </a:pPr>
-                      <a:r>
-                        <a:rPr lang="en-US" sz="500" dirty="0">
-                          <a:solidFill>
-                            <a:srgbClr val="777777"/>
-                          </a:solidFill>
-                          <a:latin typeface="Calibri" pitchFamily="34" charset="0"/>
-                          <a:ea typeface="Calibri" pitchFamily="34" charset="-122"/>
-                          <a:cs typeface="Calibri" pitchFamily="34" charset="-120"/>
-                        </a:rPr>
-                        <a:t>0.40%</a:t>
-                      </a:r>
-                      <a:endParaRPr lang="en-US" sz="500" dirty="0">
-                        <a:latin typeface="Calibri" charset="0"/>
-                        <a:ea typeface="Calibri" charset="0"/>
-                        <a:cs typeface="Calibri" charset="0"/>
-                      </a:endParaRPr>
-                    </a:p>
-                  </a:txBody>
-                  <a:tcPr marL="91440" marR="91440" marT="45720" marB="45720">
-                    <a:lnL w="2540" cap="flat" cmpd="sng" algn="ctr">
-                      <a:solidFill>
-                        <a:srgbClr val="EEEEEE"/>
-                      </a:solidFill>
-                      <a:prstDash val="solid"/>
-                      <a:round/>
-                      <a:headEnd type="none" w="med" len="med"/>
-                      <a:tailEnd type="none" w="med" len="med"/>
-                    </a:lnL>
-                    <a:lnR w="2540" cap="flat" cmpd="sng" algn="ctr">
-                      <a:solidFill>
-                        <a:srgbClr val="EEEEEE"/>
-                      </a:solidFill>
-                      <a:prstDash val="solid"/>
-                      <a:round/>
-                      <a:headEnd type="none" w="med" len="med"/>
-                      <a:tailEnd type="none" w="med" len="med"/>
-                    </a:lnR>
-                    <a:lnT w="2540" cap="flat" cmpd="sng" algn="ctr">
-                      <a:solidFill>
-                        <a:srgbClr val="EEEEEE"/>
-                      </a:solidFill>
-                      <a:prstDash val="solid"/>
-                      <a:round/>
-                      <a:headEnd type="none" w="med" len="med"/>
-                      <a:tailEnd type="none" w="med" len="med"/>
-                    </a:lnT>
-                    <a:lnB w="2540" cap="flat" cmpd="sng" algn="ctr">
-                      <a:solidFill>
-                        <a:srgbClr val="EEEEEE"/>
-                      </a:solidFill>
-                      <a:prstDash val="solid"/>
-                      <a:round/>
-                      <a:headEnd type="none" w="med" len="med"/>
-                      <a:tailEnd type="none" w="med" len="med"/>
-                    </a:lnB>
-                  </a:tcPr>
-                </a:tc>
-                <a:tc>
-                  <a:txBody>
-                    <a:bodyPr/>
-                    <a:lstStyle/>
-                    <a:p>
-                      <a:pPr algn="ctr" indent="0" marL="0">
-                        <a:buNone/>
-                      </a:pPr>
-                      <a:r>
-                        <a:rPr lang="en-US" sz="500" dirty="0">
-                          <a:solidFill>
-                            <a:srgbClr val="777777"/>
-                          </a:solidFill>
-                          <a:latin typeface="Calibri" pitchFamily="34" charset="0"/>
-                          <a:ea typeface="Calibri" pitchFamily="34" charset="-122"/>
-                          <a:cs typeface="Calibri" pitchFamily="34" charset="-120"/>
-                        </a:rPr>
-                        <a:t>0.40%</a:t>
-                      </a:r>
-                      <a:endParaRPr lang="en-US" sz="500" dirty="0">
-                        <a:latin typeface="Calibri" charset="0"/>
-                        <a:ea typeface="Calibri" charset="0"/>
-                        <a:cs typeface="Calibri" charset="0"/>
-                      </a:endParaRPr>
-                    </a:p>
-                  </a:txBody>
-                  <a:tcPr marL="91440" marR="91440" marT="45720" marB="45720">
-                    <a:lnL w="2540" cap="flat" cmpd="sng" algn="ctr">
-                      <a:solidFill>
-                        <a:srgbClr val="EEEEEE"/>
-                      </a:solidFill>
-                      <a:prstDash val="solid"/>
-                      <a:round/>
-                      <a:headEnd type="none" w="med" len="med"/>
-                      <a:tailEnd type="none" w="med" len="med"/>
-                    </a:lnL>
-                    <a:lnR w="2540" cap="flat" cmpd="sng" algn="ctr">
-                      <a:solidFill>
-                        <a:srgbClr val="EEEEEE"/>
-                      </a:solidFill>
-                      <a:prstDash val="solid"/>
-                      <a:round/>
-                      <a:headEnd type="none" w="med" len="med"/>
-                      <a:tailEnd type="none" w="med" len="med"/>
-                    </a:lnR>
-                    <a:lnT w="2540" cap="flat" cmpd="sng" algn="ctr">
-                      <a:solidFill>
-                        <a:srgbClr val="EEEEEE"/>
-                      </a:solidFill>
-                      <a:prstDash val="solid"/>
-                      <a:round/>
-                      <a:headEnd type="none" w="med" len="med"/>
-                      <a:tailEnd type="none" w="med" len="med"/>
-                    </a:lnT>
-                    <a:lnB w="2540" cap="flat" cmpd="sng" algn="ctr">
-                      <a:solidFill>
-                        <a:srgbClr val="EEEEEE"/>
-                      </a:solidFill>
-                      <a:prstDash val="solid"/>
-                      <a:round/>
-                      <a:headEnd type="none" w="med" len="med"/>
-                      <a:tailEnd type="none" w="med" len="med"/>
-                    </a:lnB>
-                  </a:tcPr>
-                </a:tc>
-                <a:tc>
-                  <a:txBody>
-                    <a:bodyPr/>
-                    <a:lstStyle/>
-                    <a:p>
-                      <a:pPr algn="ctr" indent="0" marL="0">
-                        <a:buNone/>
-                      </a:pPr>
-                      <a:r>
-                        <a:rPr lang="en-US" sz="500" dirty="0">
-                          <a:solidFill>
-                            <a:srgbClr val="777777"/>
-                          </a:solidFill>
-                          <a:latin typeface="Calibri" pitchFamily="34" charset="0"/>
-                          <a:ea typeface="Calibri" pitchFamily="34" charset="-122"/>
-                          <a:cs typeface="Calibri" pitchFamily="34" charset="-120"/>
-                        </a:rPr>
-                        <a:t>0.40%</a:t>
-                      </a:r>
-                      <a:endParaRPr lang="en-US" sz="500" dirty="0">
-                        <a:latin typeface="Calibri" charset="0"/>
-                        <a:ea typeface="Calibri" charset="0"/>
-                        <a:cs typeface="Calibri" charset="0"/>
-                      </a:endParaRPr>
-                    </a:p>
-                  </a:txBody>
-                  <a:tcPr marL="91440" marR="91440" marT="45720" marB="45720">
-                    <a:lnL w="2540" cap="flat" cmpd="sng" algn="ctr">
-                      <a:solidFill>
-                        <a:srgbClr val="EEEEEE"/>
-                      </a:solidFill>
-                      <a:prstDash val="solid"/>
-                      <a:round/>
-                      <a:headEnd type="none" w="med" len="med"/>
-                      <a:tailEnd type="none" w="med" len="med"/>
-                    </a:lnL>
-                    <a:lnR w="2540" cap="flat" cmpd="sng" algn="ctr">
-                      <a:solidFill>
-                        <a:srgbClr val="EEEEEE"/>
-                      </a:solidFill>
-                      <a:prstDash val="solid"/>
-                      <a:round/>
-                      <a:headEnd type="none" w="med" len="med"/>
-                      <a:tailEnd type="none" w="med" len="med"/>
-                    </a:lnR>
-                    <a:lnT w="2540" cap="flat" cmpd="sng" algn="ctr">
-                      <a:solidFill>
-                        <a:srgbClr val="EEEEEE"/>
-                      </a:solidFill>
-                      <a:prstDash val="solid"/>
-                      <a:round/>
-                      <a:headEnd type="none" w="med" len="med"/>
-                      <a:tailEnd type="none" w="med" len="med"/>
-                    </a:lnT>
-                    <a:lnB w="2540" cap="flat" cmpd="sng" algn="ctr">
-                      <a:solidFill>
-                        <a:srgbClr val="EEEEEE"/>
-                      </a:solidFill>
-                      <a:prstDash val="solid"/>
-                      <a:round/>
-                      <a:headEnd type="none" w="med" len="med"/>
-                      <a:tailEnd type="none" w="med" len="med"/>
-                    </a:lnB>
-                  </a:tcPr>
-                </a:tc>
-                <a:tc>
-                  <a:txBody>
-                    <a:bodyPr/>
-                    <a:lstStyle/>
-                    <a:p>
-                      <a:pPr algn="ctr" indent="0" marL="0">
-                        <a:buNone/>
-                      </a:pPr>
-                      <a:r>
-                        <a:rPr lang="en-US" sz="500" dirty="0">
-                          <a:solidFill>
-                            <a:srgbClr val="777777"/>
-                          </a:solidFill>
-                          <a:latin typeface="Calibri" pitchFamily="34" charset="0"/>
-                          <a:ea typeface="Calibri" pitchFamily="34" charset="-122"/>
-                          <a:cs typeface="Calibri" pitchFamily="34" charset="-120"/>
-                        </a:rPr>
-                        <a:t>0.40%</a:t>
-                      </a:r>
-                      <a:endParaRPr lang="en-US" sz="500" dirty="0">
-                        <a:latin typeface="Calibri" charset="0"/>
-                        <a:ea typeface="Calibri" charset="0"/>
-                        <a:cs typeface="Calibri" charset="0"/>
-                      </a:endParaRPr>
-                    </a:p>
-                  </a:txBody>
-                  <a:tcPr marL="91440" marR="91440" marT="45720" marB="45720">
-                    <a:lnL w="2540" cap="flat" cmpd="sng" algn="ctr">
-                      <a:solidFill>
-                        <a:srgbClr val="EEEEEE"/>
-                      </a:solidFill>
-                      <a:prstDash val="solid"/>
-                      <a:round/>
-                      <a:headEnd type="none" w="med" len="med"/>
-                      <a:tailEnd type="none" w="med" len="med"/>
-                    </a:lnL>
-                    <a:lnR w="2540" cap="flat" cmpd="sng" algn="ctr">
-                      <a:solidFill>
-                        <a:srgbClr val="EEEEEE"/>
-                      </a:solidFill>
-                      <a:prstDash val="solid"/>
-                      <a:round/>
-                      <a:headEnd type="none" w="med" len="med"/>
-                      <a:tailEnd type="none" w="med" len="med"/>
-                    </a:lnR>
-                    <a:lnT w="2540" cap="flat" cmpd="sng" algn="ctr">
-                      <a:solidFill>
-                        <a:srgbClr val="EEEEEE"/>
-                      </a:solidFill>
-                      <a:prstDash val="solid"/>
-                      <a:round/>
-                      <a:headEnd type="none" w="med" len="med"/>
-                      <a:tailEnd type="none" w="med" len="med"/>
-                    </a:lnT>
-                    <a:lnB w="2540" cap="flat" cmpd="sng" algn="ctr">
-                      <a:solidFill>
-                        <a:srgbClr val="EEEEEE"/>
-                      </a:solidFill>
-                      <a:prstDash val="solid"/>
-                      <a:round/>
-                      <a:headEnd type="none" w="med" len="med"/>
-                      <a:tailEnd type="none" w="med" len="med"/>
-                    </a:lnB>
-                  </a:tcPr>
-                </a:tc>
-                <a:tc>
-                  <a:txBody>
-                    <a:bodyPr/>
-                    <a:lstStyle/>
-                    <a:p>
-                      <a:pPr algn="ctr" indent="0" marL="0">
-                        <a:buNone/>
-                      </a:pPr>
-                      <a:r>
-                        <a:rPr lang="en-US" sz="500" dirty="0">
-                          <a:solidFill>
-                            <a:srgbClr val="777777"/>
-                          </a:solidFill>
-                          <a:latin typeface="Calibri" pitchFamily="34" charset="0"/>
-                          <a:ea typeface="Calibri" pitchFamily="34" charset="-122"/>
-                          <a:cs typeface="Calibri" pitchFamily="34" charset="-120"/>
-                        </a:rPr>
-                        <a:t>0.39%</a:t>
-                      </a:r>
-                      <a:endParaRPr lang="en-US" sz="500" dirty="0">
-                        <a:latin typeface="Calibri" charset="0"/>
-                        <a:ea typeface="Calibri" charset="0"/>
-                        <a:cs typeface="Calibri" charset="0"/>
-                      </a:endParaRPr>
-                    </a:p>
-                  </a:txBody>
-                  <a:tcPr marL="91440" marR="91440" marT="45720" marB="45720">
-                    <a:lnL w="2540" cap="flat" cmpd="sng" algn="ctr">
-                      <a:solidFill>
-                        <a:srgbClr val="EEEEEE"/>
-                      </a:solidFill>
-                      <a:prstDash val="solid"/>
-                      <a:round/>
-                      <a:headEnd type="none" w="med" len="med"/>
-                      <a:tailEnd type="none" w="med" len="med"/>
-                    </a:lnL>
-                    <a:lnR w="2540" cap="flat" cmpd="sng" algn="ctr">
-                      <a:solidFill>
-                        <a:srgbClr val="EEEEEE"/>
-                      </a:solidFill>
-                      <a:prstDash val="solid"/>
-                      <a:round/>
-                      <a:headEnd type="none" w="med" len="med"/>
-                      <a:tailEnd type="none" w="med" len="med"/>
-                    </a:lnR>
-                    <a:lnT w="2540" cap="flat" cmpd="sng" algn="ctr">
-                      <a:solidFill>
-                        <a:srgbClr val="EEEEEE"/>
-                      </a:solidFill>
-                      <a:prstDash val="solid"/>
-                      <a:round/>
-                      <a:headEnd type="none" w="med" len="med"/>
-                      <a:tailEnd type="none" w="med" len="med"/>
-                    </a:lnT>
-                    <a:lnB w="2540" cap="flat" cmpd="sng" algn="ctr">
-                      <a:solidFill>
-                        <a:srgbClr val="EEEEEE"/>
-                      </a:solidFill>
-                      <a:prstDash val="solid"/>
-                      <a:round/>
-                      <a:headEnd type="none" w="med" len="med"/>
-                      <a:tailEnd type="none" w="med" len="med"/>
-                    </a:lnB>
-                  </a:tcPr>
-                </a:tc>
-                <a:tc>
-                  <a:txBody>
-                    <a:bodyPr/>
-                    <a:lstStyle/>
-                    <a:p>
-                      <a:pPr algn="ctr" indent="0" marL="0">
-                        <a:buNone/>
-                      </a:pPr>
-                      <a:r>
-                        <a:rPr lang="en-US" sz="500" b="1" dirty="0">
-                          <a:solidFill>
-                            <a:srgbClr val="777777"/>
-                          </a:solidFill>
-                          <a:latin typeface="Calibri" pitchFamily="34" charset="0"/>
-                          <a:ea typeface="Calibri" pitchFamily="34" charset="-122"/>
-                          <a:cs typeface="Calibri" pitchFamily="34" charset="-120"/>
-                        </a:rPr>
-                        <a:t>4.99%</a:t>
-                      </a:r>
-                      <a:endParaRPr lang="en-US" sz="500" dirty="0">
-                        <a:latin typeface="Calibri" charset="0"/>
-                        <a:ea typeface="Calibri" charset="0"/>
-                        <a:cs typeface="Calibri" charset="0"/>
-                      </a:endParaRPr>
-                    </a:p>
-                  </a:txBody>
-                  <a:tcPr marL="91440" marR="91440" marT="45720" marB="45720">
-                    <a:lnL w="2540" cap="flat" cmpd="sng" algn="ctr">
-                      <a:solidFill>
-                        <a:srgbClr val="EEEEEE"/>
-                      </a:solidFill>
-                      <a:prstDash val="solid"/>
-                      <a:round/>
-                      <a:headEnd type="none" w="med" len="med"/>
-                      <a:tailEnd type="none" w="med" len="med"/>
-                    </a:lnL>
-                    <a:lnR w="2540" cap="flat" cmpd="sng" algn="ctr">
-                      <a:solidFill>
-                        <a:srgbClr val="EEEEEE"/>
-                      </a:solidFill>
-                      <a:prstDash val="solid"/>
-                      <a:round/>
-                      <a:headEnd type="none" w="med" len="med"/>
-                      <a:tailEnd type="none" w="med" len="med"/>
-                    </a:lnR>
-                    <a:lnT w="2540" cap="flat" cmpd="sng" algn="ctr">
-                      <a:solidFill>
-                        <a:srgbClr val="EEEEEE"/>
-                      </a:solidFill>
-                      <a:prstDash val="solid"/>
-                      <a:round/>
-                      <a:headEnd type="none" w="med" len="med"/>
-                      <a:tailEnd type="none" w="med" len="med"/>
-                    </a:lnT>
-                    <a:lnB w="2540" cap="flat" cmpd="sng" algn="ctr">
-                      <a:solidFill>
-                        <a:srgbClr val="EEEEEE"/>
-                      </a:solidFill>
-                      <a:prstDash val="solid"/>
-                      <a:round/>
-                      <a:headEnd type="none" w="med" len="med"/>
-                      <a:tailEnd type="none" w="med" len="med"/>
-                    </a:lnB>
-                  </a:tcPr>
-                </a:tc>
-              </a:tr>
-              <a:tr h="123444">
-                <a:tc>
-                  <a:txBody>
-                    <a:bodyPr/>
-                    <a:lstStyle/>
-                    <a:p>
-                      <a:pPr algn="l" indent="0" marL="0">
-                        <a:buNone/>
-                      </a:pPr>
-                      <a:endParaRPr lang="en-US" sz="500" dirty="0">
-                        <a:latin typeface="Calibri" charset="0"/>
-                        <a:ea typeface="Calibri" charset="0"/>
-                        <a:cs typeface="Calibri" charset="0"/>
-                      </a:endParaRPr>
-                    </a:p>
-                  </a:txBody>
-                  <a:tcPr marL="91440" marR="91440" marT="45720" marB="45720">
-                    <a:lnL w="2540" cap="flat" cmpd="sng" algn="ctr">
-                      <a:solidFill>
-                        <a:srgbClr val="EEEEEE"/>
-                      </a:solidFill>
-                      <a:prstDash val="solid"/>
-                      <a:round/>
-                      <a:headEnd type="none" w="med" len="med"/>
-                      <a:tailEnd type="none" w="med" len="med"/>
-                    </a:lnL>
-                    <a:lnR w="2540" cap="flat" cmpd="sng" algn="ctr">
-                      <a:solidFill>
-                        <a:srgbClr val="EEEEEE"/>
-                      </a:solidFill>
-                      <a:prstDash val="solid"/>
-                      <a:round/>
-                      <a:headEnd type="none" w="med" len="med"/>
-                      <a:tailEnd type="none" w="med" len="med"/>
-                    </a:lnR>
-                    <a:lnT w="2540" cap="flat" cmpd="sng" algn="ctr">
-                      <a:solidFill>
-                        <a:srgbClr val="EEEEEE"/>
-                      </a:solidFill>
-                      <a:prstDash val="solid"/>
-                      <a:round/>
-                      <a:headEnd type="none" w="med" len="med"/>
-                      <a:tailEnd type="none" w="med" len="med"/>
-                    </a:lnT>
-                    <a:lnB w="2540" cap="flat" cmpd="sng" algn="ctr">
-                      <a:solidFill>
-                        <a:srgbClr val="EEEEEE"/>
-                      </a:solidFill>
-                      <a:prstDash val="solid"/>
-                      <a:round/>
-                      <a:headEnd type="none" w="med" len="med"/>
-                      <a:tailEnd type="none" w="med" len="med"/>
-                    </a:lnB>
-                  </a:tcPr>
-                </a:tc>
-                <a:tc>
-                  <a:txBody>
-                    <a:bodyPr/>
-                    <a:lstStyle/>
-                    <a:p>
-                      <a:pPr algn="l" indent="0" marL="0">
-                        <a:buNone/>
-                      </a:pPr>
-                      <a:r>
-                        <a:rPr lang="en-US" sz="500" dirty="0">
-                          <a:solidFill>
-                            <a:srgbClr val="999999"/>
-                          </a:solidFill>
-                          <a:latin typeface="Calibri" pitchFamily="34" charset="0"/>
-                          <a:ea typeface="Calibri" pitchFamily="34" charset="-122"/>
-                          <a:cs typeface="Calibri" pitchFamily="34" charset="-120"/>
-                        </a:rPr>
-                        <a:t>Competencia</a:t>
-                      </a:r>
-                      <a:endParaRPr lang="en-US" sz="500" dirty="0">
-                        <a:latin typeface="Calibri" charset="0"/>
-                        <a:ea typeface="Calibri" charset="0"/>
-                        <a:cs typeface="Calibri" charset="0"/>
-                      </a:endParaRPr>
-                    </a:p>
-                  </a:txBody>
-                  <a:tcPr marL="91440" marR="91440" marT="45720" marB="45720">
-                    <a:lnL w="2540" cap="flat" cmpd="sng" algn="ctr">
-                      <a:solidFill>
-                        <a:srgbClr val="EEEEEE"/>
-                      </a:solidFill>
-                      <a:prstDash val="solid"/>
-                      <a:round/>
-                      <a:headEnd type="none" w="med" len="med"/>
-                      <a:tailEnd type="none" w="med" len="med"/>
-                    </a:lnL>
-                    <a:lnR w="2540" cap="flat" cmpd="sng" algn="ctr">
-                      <a:solidFill>
-                        <a:srgbClr val="EEEEEE"/>
-                      </a:solidFill>
-                      <a:prstDash val="solid"/>
-                      <a:round/>
-                      <a:headEnd type="none" w="med" len="med"/>
-                      <a:tailEnd type="none" w="med" len="med"/>
-                    </a:lnR>
-                    <a:lnT w="2540" cap="flat" cmpd="sng" algn="ctr">
-                      <a:solidFill>
-                        <a:srgbClr val="EEEEEE"/>
-                      </a:solidFill>
-                      <a:prstDash val="solid"/>
-                      <a:round/>
-                      <a:headEnd type="none" w="med" len="med"/>
-                      <a:tailEnd type="none" w="med" len="med"/>
-                    </a:lnT>
-                    <a:lnB w="2540" cap="flat" cmpd="sng" algn="ctr">
-                      <a:solidFill>
-                        <a:srgbClr val="EEEEEE"/>
-                      </a:solidFill>
-                      <a:prstDash val="solid"/>
-                      <a:round/>
-                      <a:headEnd type="none" w="med" len="med"/>
-                      <a:tailEnd type="none" w="med" len="med"/>
-                    </a:lnB>
-                  </a:tcPr>
-                </a:tc>
-                <a:tc>
-                  <a:txBody>
-                    <a:bodyPr/>
-                    <a:lstStyle/>
-                    <a:p>
-                      <a:pPr algn="ctr" indent="0" marL="0">
-                        <a:buNone/>
-                      </a:pPr>
-                      <a:r>
-                        <a:rPr lang="en-US" sz="500" dirty="0">
-                          <a:solidFill>
-                            <a:srgbClr val="999999"/>
-                          </a:solidFill>
-                          <a:latin typeface="Calibri" pitchFamily="34" charset="0"/>
-                          <a:ea typeface="Calibri" pitchFamily="34" charset="-122"/>
-                          <a:cs typeface="Calibri" pitchFamily="34" charset="-120"/>
-                        </a:rPr>
-                        <a:t>0.00%</a:t>
-                      </a:r>
-                      <a:endParaRPr lang="en-US" sz="500" dirty="0">
-                        <a:latin typeface="Calibri" charset="0"/>
-                        <a:ea typeface="Calibri" charset="0"/>
-                        <a:cs typeface="Calibri" charset="0"/>
-                      </a:endParaRPr>
-                    </a:p>
-                  </a:txBody>
-                  <a:tcPr marL="91440" marR="91440" marT="45720" marB="45720">
-                    <a:lnL w="2540" cap="flat" cmpd="sng" algn="ctr">
-                      <a:solidFill>
-                        <a:srgbClr val="EEEEEE"/>
-                      </a:solidFill>
-                      <a:prstDash val="solid"/>
-                      <a:round/>
-                      <a:headEnd type="none" w="med" len="med"/>
-                      <a:tailEnd type="none" w="med" len="med"/>
-                    </a:lnL>
-                    <a:lnR w="2540" cap="flat" cmpd="sng" algn="ctr">
-                      <a:solidFill>
-                        <a:srgbClr val="EEEEEE"/>
-                      </a:solidFill>
-                      <a:prstDash val="solid"/>
-                      <a:round/>
-                      <a:headEnd type="none" w="med" len="med"/>
-                      <a:tailEnd type="none" w="med" len="med"/>
-                    </a:lnR>
-                    <a:lnT w="2540" cap="flat" cmpd="sng" algn="ctr">
-                      <a:solidFill>
-                        <a:srgbClr val="EEEEEE"/>
-                      </a:solidFill>
-                      <a:prstDash val="solid"/>
-                      <a:round/>
-                      <a:headEnd type="none" w="med" len="med"/>
-                      <a:tailEnd type="none" w="med" len="med"/>
-                    </a:lnT>
-                    <a:lnB w="2540" cap="flat" cmpd="sng" algn="ctr">
-                      <a:solidFill>
-                        <a:srgbClr val="EEEEEE"/>
-                      </a:solidFill>
-                      <a:prstDash val="solid"/>
-                      <a:round/>
-                      <a:headEnd type="none" w="med" len="med"/>
-                      <a:tailEnd type="none" w="med" len="med"/>
-                    </a:lnB>
-                  </a:tcPr>
-                </a:tc>
-                <a:tc>
-                  <a:txBody>
-                    <a:bodyPr/>
-                    <a:lstStyle/>
-                    <a:p>
-                      <a:pPr algn="ctr" indent="0" marL="0">
-                        <a:buNone/>
-                      </a:pPr>
-                      <a:r>
-                        <a:rPr lang="en-US" sz="500" dirty="0">
-                          <a:solidFill>
-                            <a:srgbClr val="999999"/>
-                          </a:solidFill>
-                          <a:latin typeface="Calibri" pitchFamily="34" charset="0"/>
-                          <a:ea typeface="Calibri" pitchFamily="34" charset="-122"/>
-                          <a:cs typeface="Calibri" pitchFamily="34" charset="-120"/>
-                        </a:rPr>
-                        <a:t>0.28%</a:t>
-                      </a:r>
-                      <a:endParaRPr lang="en-US" sz="500" dirty="0">
-                        <a:latin typeface="Calibri" charset="0"/>
-                        <a:ea typeface="Calibri" charset="0"/>
-                        <a:cs typeface="Calibri" charset="0"/>
-                      </a:endParaRPr>
-                    </a:p>
-                  </a:txBody>
-                  <a:tcPr marL="91440" marR="91440" marT="45720" marB="45720">
-                    <a:lnL w="2540" cap="flat" cmpd="sng" algn="ctr">
-                      <a:solidFill>
-                        <a:srgbClr val="EEEEEE"/>
-                      </a:solidFill>
-                      <a:prstDash val="solid"/>
-                      <a:round/>
-                      <a:headEnd type="none" w="med" len="med"/>
-                      <a:tailEnd type="none" w="med" len="med"/>
-                    </a:lnL>
-                    <a:lnR w="2540" cap="flat" cmpd="sng" algn="ctr">
-                      <a:solidFill>
-                        <a:srgbClr val="EEEEEE"/>
-                      </a:solidFill>
-                      <a:prstDash val="solid"/>
-                      <a:round/>
-                      <a:headEnd type="none" w="med" len="med"/>
-                      <a:tailEnd type="none" w="med" len="med"/>
-                    </a:lnR>
-                    <a:lnT w="2540" cap="flat" cmpd="sng" algn="ctr">
-                      <a:solidFill>
-                        <a:srgbClr val="EEEEEE"/>
-                      </a:solidFill>
-                      <a:prstDash val="solid"/>
-                      <a:round/>
-                      <a:headEnd type="none" w="med" len="med"/>
-                      <a:tailEnd type="none" w="med" len="med"/>
-                    </a:lnT>
-                    <a:lnB w="2540" cap="flat" cmpd="sng" algn="ctr">
-                      <a:solidFill>
-                        <a:srgbClr val="EEEEEE"/>
-                      </a:solidFill>
-                      <a:prstDash val="solid"/>
-                      <a:round/>
-                      <a:headEnd type="none" w="med" len="med"/>
-                      <a:tailEnd type="none" w="med" len="med"/>
-                    </a:lnB>
-                  </a:tcPr>
-                </a:tc>
-                <a:tc>
-                  <a:txBody>
-                    <a:bodyPr/>
-                    <a:lstStyle/>
-                    <a:p>
-                      <a:pPr algn="ctr" indent="0" marL="0">
-                        <a:buNone/>
-                      </a:pPr>
-                      <a:r>
-                        <a:rPr lang="en-US" sz="500" dirty="0">
-                          <a:solidFill>
-                            <a:srgbClr val="999999"/>
-                          </a:solidFill>
-                          <a:latin typeface="Calibri" pitchFamily="34" charset="0"/>
-                          <a:ea typeface="Calibri" pitchFamily="34" charset="-122"/>
-                          <a:cs typeface="Calibri" pitchFamily="34" charset="-120"/>
-                        </a:rPr>
-                        <a:t>0.31%</a:t>
-                      </a:r>
-                      <a:endParaRPr lang="en-US" sz="500" dirty="0">
-                        <a:latin typeface="Calibri" charset="0"/>
-                        <a:ea typeface="Calibri" charset="0"/>
-                        <a:cs typeface="Calibri" charset="0"/>
-                      </a:endParaRPr>
-                    </a:p>
-                  </a:txBody>
-                  <a:tcPr marL="91440" marR="91440" marT="45720" marB="45720">
-                    <a:lnL w="2540" cap="flat" cmpd="sng" algn="ctr">
-                      <a:solidFill>
-                        <a:srgbClr val="EEEEEE"/>
-                      </a:solidFill>
-                      <a:prstDash val="solid"/>
-                      <a:round/>
-                      <a:headEnd type="none" w="med" len="med"/>
-                      <a:tailEnd type="none" w="med" len="med"/>
-                    </a:lnL>
-                    <a:lnR w="2540" cap="flat" cmpd="sng" algn="ctr">
-                      <a:solidFill>
-                        <a:srgbClr val="EEEEEE"/>
-                      </a:solidFill>
-                      <a:prstDash val="solid"/>
-                      <a:round/>
-                      <a:headEnd type="none" w="med" len="med"/>
-                      <a:tailEnd type="none" w="med" len="med"/>
-                    </a:lnR>
-                    <a:lnT w="2540" cap="flat" cmpd="sng" algn="ctr">
-                      <a:solidFill>
-                        <a:srgbClr val="EEEEEE"/>
-                      </a:solidFill>
-                      <a:prstDash val="solid"/>
-                      <a:round/>
-                      <a:headEnd type="none" w="med" len="med"/>
-                      <a:tailEnd type="none" w="med" len="med"/>
-                    </a:lnT>
-                    <a:lnB w="2540" cap="flat" cmpd="sng" algn="ctr">
-                      <a:solidFill>
-                        <a:srgbClr val="EEEEEE"/>
-                      </a:solidFill>
-                      <a:prstDash val="solid"/>
-                      <a:round/>
-                      <a:headEnd type="none" w="med" len="med"/>
-                      <a:tailEnd type="none" w="med" len="med"/>
-                    </a:lnB>
-                  </a:tcPr>
-                </a:tc>
-                <a:tc>
-                  <a:txBody>
-                    <a:bodyPr/>
-                    <a:lstStyle/>
-                    <a:p>
-                      <a:pPr algn="ctr" indent="0" marL="0">
-                        <a:buNone/>
-                      </a:pPr>
-                      <a:r>
-                        <a:rPr lang="en-US" sz="500" dirty="0">
-                          <a:solidFill>
-                            <a:srgbClr val="999999"/>
-                          </a:solidFill>
-                          <a:latin typeface="Calibri" pitchFamily="34" charset="0"/>
-                          <a:ea typeface="Calibri" pitchFamily="34" charset="-122"/>
-                          <a:cs typeface="Calibri" pitchFamily="34" charset="-120"/>
-                        </a:rPr>
-                        <a:t>0.30%</a:t>
-                      </a:r>
-                      <a:endParaRPr lang="en-US" sz="500" dirty="0">
-                        <a:latin typeface="Calibri" charset="0"/>
-                        <a:ea typeface="Calibri" charset="0"/>
-                        <a:cs typeface="Calibri" charset="0"/>
-                      </a:endParaRPr>
-                    </a:p>
-                  </a:txBody>
-                  <a:tcPr marL="91440" marR="91440" marT="45720" marB="45720">
-                    <a:lnL w="2540" cap="flat" cmpd="sng" algn="ctr">
-                      <a:solidFill>
-                        <a:srgbClr val="EEEEEE"/>
-                      </a:solidFill>
-                      <a:prstDash val="solid"/>
-                      <a:round/>
-                      <a:headEnd type="none" w="med" len="med"/>
-                      <a:tailEnd type="none" w="med" len="med"/>
-                    </a:lnL>
-                    <a:lnR w="2540" cap="flat" cmpd="sng" algn="ctr">
-                      <a:solidFill>
-                        <a:srgbClr val="EEEEEE"/>
-                      </a:solidFill>
-                      <a:prstDash val="solid"/>
-                      <a:round/>
-                      <a:headEnd type="none" w="med" len="med"/>
-                      <a:tailEnd type="none" w="med" len="med"/>
-                    </a:lnR>
-                    <a:lnT w="2540" cap="flat" cmpd="sng" algn="ctr">
-                      <a:solidFill>
-                        <a:srgbClr val="EEEEEE"/>
-                      </a:solidFill>
-                      <a:prstDash val="solid"/>
-                      <a:round/>
-                      <a:headEnd type="none" w="med" len="med"/>
-                      <a:tailEnd type="none" w="med" len="med"/>
-                    </a:lnT>
-                    <a:lnB w="2540" cap="flat" cmpd="sng" algn="ctr">
-                      <a:solidFill>
-                        <a:srgbClr val="EEEEEE"/>
-                      </a:solidFill>
-                      <a:prstDash val="solid"/>
-                      <a:round/>
-                      <a:headEnd type="none" w="med" len="med"/>
-                      <a:tailEnd type="none" w="med" len="med"/>
-                    </a:lnB>
-                  </a:tcPr>
-                </a:tc>
-                <a:tc>
-                  <a:txBody>
-                    <a:bodyPr/>
-                    <a:lstStyle/>
-                    <a:p>
-                      <a:pPr algn="ctr" indent="0" marL="0">
-                        <a:buNone/>
-                      </a:pPr>
-                      <a:r>
-                        <a:rPr lang="en-US" sz="500" dirty="0">
-                          <a:solidFill>
-                            <a:srgbClr val="999999"/>
-                          </a:solidFill>
-                          <a:latin typeface="Calibri" pitchFamily="34" charset="0"/>
-                          <a:ea typeface="Calibri" pitchFamily="34" charset="-122"/>
-                          <a:cs typeface="Calibri" pitchFamily="34" charset="-120"/>
-                        </a:rPr>
-                        <a:t>0.31%</a:t>
-                      </a:r>
-                      <a:endParaRPr lang="en-US" sz="500" dirty="0">
-                        <a:latin typeface="Calibri" charset="0"/>
-                        <a:ea typeface="Calibri" charset="0"/>
-                        <a:cs typeface="Calibri" charset="0"/>
-                      </a:endParaRPr>
-                    </a:p>
-                  </a:txBody>
-                  <a:tcPr marL="91440" marR="91440" marT="45720" marB="45720">
-                    <a:lnL w="2540" cap="flat" cmpd="sng" algn="ctr">
-                      <a:solidFill>
-                        <a:srgbClr val="EEEEEE"/>
-                      </a:solidFill>
-                      <a:prstDash val="solid"/>
-                      <a:round/>
-                      <a:headEnd type="none" w="med" len="med"/>
-                      <a:tailEnd type="none" w="med" len="med"/>
-                    </a:lnL>
-                    <a:lnR w="2540" cap="flat" cmpd="sng" algn="ctr">
-                      <a:solidFill>
-                        <a:srgbClr val="EEEEEE"/>
-                      </a:solidFill>
-                      <a:prstDash val="solid"/>
-                      <a:round/>
-                      <a:headEnd type="none" w="med" len="med"/>
-                      <a:tailEnd type="none" w="med" len="med"/>
-                    </a:lnR>
-                    <a:lnT w="2540" cap="flat" cmpd="sng" algn="ctr">
-                      <a:solidFill>
-                        <a:srgbClr val="EEEEEE"/>
-                      </a:solidFill>
-                      <a:prstDash val="solid"/>
-                      <a:round/>
-                      <a:headEnd type="none" w="med" len="med"/>
-                      <a:tailEnd type="none" w="med" len="med"/>
-                    </a:lnT>
-                    <a:lnB w="2540" cap="flat" cmpd="sng" algn="ctr">
-                      <a:solidFill>
-                        <a:srgbClr val="EEEEEE"/>
-                      </a:solidFill>
-                      <a:prstDash val="solid"/>
-                      <a:round/>
-                      <a:headEnd type="none" w="med" len="med"/>
-                      <a:tailEnd type="none" w="med" len="med"/>
-                    </a:lnB>
-                  </a:tcPr>
-                </a:tc>
-                <a:tc>
-                  <a:txBody>
-                    <a:bodyPr/>
-                    <a:lstStyle/>
-                    <a:p>
-                      <a:pPr algn="ctr" indent="0" marL="0">
-                        <a:buNone/>
-                      </a:pPr>
-                      <a:r>
-                        <a:rPr lang="en-US" sz="500" dirty="0">
-                          <a:solidFill>
-                            <a:srgbClr val="999999"/>
-                          </a:solidFill>
-                          <a:latin typeface="Calibri" pitchFamily="34" charset="0"/>
-                          <a:ea typeface="Calibri" pitchFamily="34" charset="-122"/>
-                          <a:cs typeface="Calibri" pitchFamily="34" charset="-120"/>
-                        </a:rPr>
-                        <a:t>0.30%</a:t>
-                      </a:r>
-                      <a:endParaRPr lang="en-US" sz="500" dirty="0">
-                        <a:latin typeface="Calibri" charset="0"/>
-                        <a:ea typeface="Calibri" charset="0"/>
-                        <a:cs typeface="Calibri" charset="0"/>
-                      </a:endParaRPr>
-                    </a:p>
-                  </a:txBody>
-                  <a:tcPr marL="91440" marR="91440" marT="45720" marB="45720">
-                    <a:lnL w="2540" cap="flat" cmpd="sng" algn="ctr">
-                      <a:solidFill>
-                        <a:srgbClr val="EEEEEE"/>
-                      </a:solidFill>
-                      <a:prstDash val="solid"/>
-                      <a:round/>
-                      <a:headEnd type="none" w="med" len="med"/>
-                      <a:tailEnd type="none" w="med" len="med"/>
-                    </a:lnL>
-                    <a:lnR w="2540" cap="flat" cmpd="sng" algn="ctr">
-                      <a:solidFill>
-                        <a:srgbClr val="EEEEEE"/>
-                      </a:solidFill>
-                      <a:prstDash val="solid"/>
-                      <a:round/>
-                      <a:headEnd type="none" w="med" len="med"/>
-                      <a:tailEnd type="none" w="med" len="med"/>
-                    </a:lnR>
-                    <a:lnT w="2540" cap="flat" cmpd="sng" algn="ctr">
-                      <a:solidFill>
-                        <a:srgbClr val="EEEEEE"/>
-                      </a:solidFill>
-                      <a:prstDash val="solid"/>
-                      <a:round/>
-                      <a:headEnd type="none" w="med" len="med"/>
-                      <a:tailEnd type="none" w="med" len="med"/>
-                    </a:lnT>
-                    <a:lnB w="2540" cap="flat" cmpd="sng" algn="ctr">
-                      <a:solidFill>
-                        <a:srgbClr val="EEEEEE"/>
-                      </a:solidFill>
-                      <a:prstDash val="solid"/>
-                      <a:round/>
-                      <a:headEnd type="none" w="med" len="med"/>
-                      <a:tailEnd type="none" w="med" len="med"/>
-                    </a:lnB>
-                  </a:tcPr>
-                </a:tc>
-                <a:tc>
-                  <a:txBody>
-                    <a:bodyPr/>
-                    <a:lstStyle/>
-                    <a:p>
-                      <a:pPr algn="ctr" indent="0" marL="0">
-                        <a:buNone/>
-                      </a:pPr>
-                      <a:r>
-                        <a:rPr lang="en-US" sz="500" dirty="0">
-                          <a:solidFill>
-                            <a:srgbClr val="999999"/>
-                          </a:solidFill>
-                          <a:latin typeface="Calibri" pitchFamily="34" charset="0"/>
-                          <a:ea typeface="Calibri" pitchFamily="34" charset="-122"/>
-                          <a:cs typeface="Calibri" pitchFamily="34" charset="-120"/>
-                        </a:rPr>
-                        <a:t>0.30%</a:t>
-                      </a:r>
-                      <a:endParaRPr lang="en-US" sz="500" dirty="0">
-                        <a:latin typeface="Calibri" charset="0"/>
-                        <a:ea typeface="Calibri" charset="0"/>
-                        <a:cs typeface="Calibri" charset="0"/>
-                      </a:endParaRPr>
-                    </a:p>
-                  </a:txBody>
-                  <a:tcPr marL="91440" marR="91440" marT="45720" marB="45720">
-                    <a:lnL w="2540" cap="flat" cmpd="sng" algn="ctr">
-                      <a:solidFill>
-                        <a:srgbClr val="EEEEEE"/>
-                      </a:solidFill>
-                      <a:prstDash val="solid"/>
-                      <a:round/>
-                      <a:headEnd type="none" w="med" len="med"/>
-                      <a:tailEnd type="none" w="med" len="med"/>
-                    </a:lnL>
-                    <a:lnR w="2540" cap="flat" cmpd="sng" algn="ctr">
-                      <a:solidFill>
-                        <a:srgbClr val="EEEEEE"/>
-                      </a:solidFill>
-                      <a:prstDash val="solid"/>
-                      <a:round/>
-                      <a:headEnd type="none" w="med" len="med"/>
-                      <a:tailEnd type="none" w="med" len="med"/>
-                    </a:lnR>
-                    <a:lnT w="2540" cap="flat" cmpd="sng" algn="ctr">
-                      <a:solidFill>
-                        <a:srgbClr val="EEEEEE"/>
-                      </a:solidFill>
-                      <a:prstDash val="solid"/>
-                      <a:round/>
-                      <a:headEnd type="none" w="med" len="med"/>
-                      <a:tailEnd type="none" w="med" len="med"/>
-                    </a:lnT>
-                    <a:lnB w="2540" cap="flat" cmpd="sng" algn="ctr">
-                      <a:solidFill>
-                        <a:srgbClr val="EEEEEE"/>
-                      </a:solidFill>
-                      <a:prstDash val="solid"/>
-                      <a:round/>
-                      <a:headEnd type="none" w="med" len="med"/>
-                      <a:tailEnd type="none" w="med" len="med"/>
-                    </a:lnB>
-                  </a:tcPr>
-                </a:tc>
-                <a:tc>
-                  <a:txBody>
-                    <a:bodyPr/>
-                    <a:lstStyle/>
-                    <a:p>
-                      <a:pPr algn="ctr" indent="0" marL="0">
-                        <a:buNone/>
-                      </a:pPr>
-                      <a:r>
-                        <a:rPr lang="en-US" sz="500" dirty="0">
-                          <a:solidFill>
-                            <a:srgbClr val="999999"/>
-                          </a:solidFill>
-                          <a:latin typeface="Calibri" pitchFamily="34" charset="0"/>
-                          <a:ea typeface="Calibri" pitchFamily="34" charset="-122"/>
-                          <a:cs typeface="Calibri" pitchFamily="34" charset="-120"/>
-                        </a:rPr>
-                        <a:t>0.30%</a:t>
-                      </a:r>
-                      <a:endParaRPr lang="en-US" sz="500" dirty="0">
-                        <a:latin typeface="Calibri" charset="0"/>
-                        <a:ea typeface="Calibri" charset="0"/>
-                        <a:cs typeface="Calibri" charset="0"/>
-                      </a:endParaRPr>
-                    </a:p>
-                  </a:txBody>
-                  <a:tcPr marL="91440" marR="91440" marT="45720" marB="45720">
-                    <a:lnL w="2540" cap="flat" cmpd="sng" algn="ctr">
-                      <a:solidFill>
-                        <a:srgbClr val="EEEEEE"/>
-                      </a:solidFill>
-                      <a:prstDash val="solid"/>
-                      <a:round/>
-                      <a:headEnd type="none" w="med" len="med"/>
-                      <a:tailEnd type="none" w="med" len="med"/>
-                    </a:lnL>
-                    <a:lnR w="2540" cap="flat" cmpd="sng" algn="ctr">
-                      <a:solidFill>
-                        <a:srgbClr val="EEEEEE"/>
-                      </a:solidFill>
-                      <a:prstDash val="solid"/>
-                      <a:round/>
-                      <a:headEnd type="none" w="med" len="med"/>
-                      <a:tailEnd type="none" w="med" len="med"/>
-                    </a:lnR>
-                    <a:lnT w="2540" cap="flat" cmpd="sng" algn="ctr">
-                      <a:solidFill>
-                        <a:srgbClr val="EEEEEE"/>
-                      </a:solidFill>
-                      <a:prstDash val="solid"/>
-                      <a:round/>
-                      <a:headEnd type="none" w="med" len="med"/>
-                      <a:tailEnd type="none" w="med" len="med"/>
-                    </a:lnT>
-                    <a:lnB w="2540" cap="flat" cmpd="sng" algn="ctr">
-                      <a:solidFill>
-                        <a:srgbClr val="EEEEEE"/>
-                      </a:solidFill>
-                      <a:prstDash val="solid"/>
-                      <a:round/>
-                      <a:headEnd type="none" w="med" len="med"/>
-                      <a:tailEnd type="none" w="med" len="med"/>
-                    </a:lnB>
-                  </a:tcPr>
-                </a:tc>
-                <a:tc>
-                  <a:txBody>
-                    <a:bodyPr/>
-                    <a:lstStyle/>
-                    <a:p>
-                      <a:pPr algn="ctr" indent="0" marL="0">
-                        <a:buNone/>
-                      </a:pPr>
-                      <a:r>
-                        <a:rPr lang="en-US" sz="500" dirty="0">
-                          <a:solidFill>
-                            <a:srgbClr val="999999"/>
-                          </a:solidFill>
-                          <a:latin typeface="Calibri" pitchFamily="34" charset="0"/>
-                          <a:ea typeface="Calibri" pitchFamily="34" charset="-122"/>
-                          <a:cs typeface="Calibri" pitchFamily="34" charset="-120"/>
-                        </a:rPr>
-                        <a:t>0.28%</a:t>
-                      </a:r>
-                      <a:endParaRPr lang="en-US" sz="500" dirty="0">
-                        <a:latin typeface="Calibri" charset="0"/>
-                        <a:ea typeface="Calibri" charset="0"/>
-                        <a:cs typeface="Calibri" charset="0"/>
-                      </a:endParaRPr>
-                    </a:p>
-                  </a:txBody>
-                  <a:tcPr marL="91440" marR="91440" marT="45720" marB="45720">
-                    <a:lnL w="2540" cap="flat" cmpd="sng" algn="ctr">
-                      <a:solidFill>
-                        <a:srgbClr val="EEEEEE"/>
-                      </a:solidFill>
-                      <a:prstDash val="solid"/>
-                      <a:round/>
-                      <a:headEnd type="none" w="med" len="med"/>
-                      <a:tailEnd type="none" w="med" len="med"/>
-                    </a:lnL>
-                    <a:lnR w="2540" cap="flat" cmpd="sng" algn="ctr">
-                      <a:solidFill>
-                        <a:srgbClr val="EEEEEE"/>
-                      </a:solidFill>
-                      <a:prstDash val="solid"/>
-                      <a:round/>
-                      <a:headEnd type="none" w="med" len="med"/>
-                      <a:tailEnd type="none" w="med" len="med"/>
-                    </a:lnR>
-                    <a:lnT w="2540" cap="flat" cmpd="sng" algn="ctr">
-                      <a:solidFill>
-                        <a:srgbClr val="EEEEEE"/>
-                      </a:solidFill>
-                      <a:prstDash val="solid"/>
-                      <a:round/>
-                      <a:headEnd type="none" w="med" len="med"/>
-                      <a:tailEnd type="none" w="med" len="med"/>
-                    </a:lnT>
-                    <a:lnB w="2540" cap="flat" cmpd="sng" algn="ctr">
-                      <a:solidFill>
-                        <a:srgbClr val="EEEEEE"/>
-                      </a:solidFill>
-                      <a:prstDash val="solid"/>
-                      <a:round/>
-                      <a:headEnd type="none" w="med" len="med"/>
-                      <a:tailEnd type="none" w="med" len="med"/>
-                    </a:lnB>
-                  </a:tcPr>
-                </a:tc>
-                <a:tc>
-                  <a:txBody>
-                    <a:bodyPr/>
-                    <a:lstStyle/>
-                    <a:p>
-                      <a:pPr algn="ctr" indent="0" marL="0">
-                        <a:buNone/>
-                      </a:pPr>
-                      <a:r>
-                        <a:rPr lang="en-US" sz="500" dirty="0">
-                          <a:solidFill>
-                            <a:srgbClr val="999999"/>
-                          </a:solidFill>
-                          <a:latin typeface="Calibri" pitchFamily="34" charset="0"/>
-                          <a:ea typeface="Calibri" pitchFamily="34" charset="-122"/>
-                          <a:cs typeface="Calibri" pitchFamily="34" charset="-120"/>
-                        </a:rPr>
-                        <a:t>0.29%</a:t>
-                      </a:r>
-                      <a:endParaRPr lang="en-US" sz="500" dirty="0">
-                        <a:latin typeface="Calibri" charset="0"/>
-                        <a:ea typeface="Calibri" charset="0"/>
-                        <a:cs typeface="Calibri" charset="0"/>
-                      </a:endParaRPr>
-                    </a:p>
-                  </a:txBody>
-                  <a:tcPr marL="91440" marR="91440" marT="45720" marB="45720">
-                    <a:lnL w="2540" cap="flat" cmpd="sng" algn="ctr">
-                      <a:solidFill>
-                        <a:srgbClr val="EEEEEE"/>
-                      </a:solidFill>
-                      <a:prstDash val="solid"/>
-                      <a:round/>
-                      <a:headEnd type="none" w="med" len="med"/>
-                      <a:tailEnd type="none" w="med" len="med"/>
-                    </a:lnL>
-                    <a:lnR w="2540" cap="flat" cmpd="sng" algn="ctr">
-                      <a:solidFill>
-                        <a:srgbClr val="EEEEEE"/>
-                      </a:solidFill>
-                      <a:prstDash val="solid"/>
-                      <a:round/>
-                      <a:headEnd type="none" w="med" len="med"/>
-                      <a:tailEnd type="none" w="med" len="med"/>
-                    </a:lnR>
-                    <a:lnT w="2540" cap="flat" cmpd="sng" algn="ctr">
-                      <a:solidFill>
-                        <a:srgbClr val="EEEEEE"/>
-                      </a:solidFill>
-                      <a:prstDash val="solid"/>
-                      <a:round/>
-                      <a:headEnd type="none" w="med" len="med"/>
-                      <a:tailEnd type="none" w="med" len="med"/>
-                    </a:lnT>
-                    <a:lnB w="2540" cap="flat" cmpd="sng" algn="ctr">
-                      <a:solidFill>
-                        <a:srgbClr val="EEEEEE"/>
-                      </a:solidFill>
-                      <a:prstDash val="solid"/>
-                      <a:round/>
-                      <a:headEnd type="none" w="med" len="med"/>
-                      <a:tailEnd type="none" w="med" len="med"/>
-                    </a:lnB>
-                  </a:tcPr>
-                </a:tc>
-                <a:tc>
-                  <a:txBody>
-                    <a:bodyPr/>
-                    <a:lstStyle/>
-                    <a:p>
-                      <a:pPr algn="ctr" indent="0" marL="0">
-                        <a:buNone/>
-                      </a:pPr>
-                      <a:r>
-                        <a:rPr lang="en-US" sz="500" dirty="0">
-                          <a:solidFill>
-                            <a:srgbClr val="999999"/>
-                          </a:solidFill>
-                          <a:latin typeface="Calibri" pitchFamily="34" charset="0"/>
-                          <a:ea typeface="Calibri" pitchFamily="34" charset="-122"/>
-                          <a:cs typeface="Calibri" pitchFamily="34" charset="-120"/>
-                        </a:rPr>
-                        <a:t>0.28%</a:t>
-                      </a:r>
-                      <a:endParaRPr lang="en-US" sz="500" dirty="0">
-                        <a:latin typeface="Calibri" charset="0"/>
-                        <a:ea typeface="Calibri" charset="0"/>
-                        <a:cs typeface="Calibri" charset="0"/>
-                      </a:endParaRPr>
-                    </a:p>
-                  </a:txBody>
-                  <a:tcPr marL="91440" marR="91440" marT="45720" marB="45720">
-                    <a:lnL w="2540" cap="flat" cmpd="sng" algn="ctr">
-                      <a:solidFill>
-                        <a:srgbClr val="EEEEEE"/>
-                      </a:solidFill>
-                      <a:prstDash val="solid"/>
-                      <a:round/>
-                      <a:headEnd type="none" w="med" len="med"/>
-                      <a:tailEnd type="none" w="med" len="med"/>
-                    </a:lnL>
-                    <a:lnR w="2540" cap="flat" cmpd="sng" algn="ctr">
-                      <a:solidFill>
-                        <a:srgbClr val="EEEEEE"/>
-                      </a:solidFill>
-                      <a:prstDash val="solid"/>
-                      <a:round/>
-                      <a:headEnd type="none" w="med" len="med"/>
-                      <a:tailEnd type="none" w="med" len="med"/>
-                    </a:lnR>
-                    <a:lnT w="2540" cap="flat" cmpd="sng" algn="ctr">
-                      <a:solidFill>
-                        <a:srgbClr val="EEEEEE"/>
-                      </a:solidFill>
-                      <a:prstDash val="solid"/>
-                      <a:round/>
-                      <a:headEnd type="none" w="med" len="med"/>
-                      <a:tailEnd type="none" w="med" len="med"/>
-                    </a:lnT>
-                    <a:lnB w="2540" cap="flat" cmpd="sng" algn="ctr">
-                      <a:solidFill>
-                        <a:srgbClr val="EEEEEE"/>
-                      </a:solidFill>
-                      <a:prstDash val="solid"/>
-                      <a:round/>
-                      <a:headEnd type="none" w="med" len="med"/>
-                      <a:tailEnd type="none" w="med" len="med"/>
-                    </a:lnB>
-                  </a:tcPr>
-                </a:tc>
-                <a:tc>
-                  <a:txBody>
-                    <a:bodyPr/>
-                    <a:lstStyle/>
-                    <a:p>
-                      <a:pPr algn="ctr" indent="0" marL="0">
-                        <a:buNone/>
-                      </a:pPr>
-                      <a:r>
-                        <a:rPr lang="en-US" sz="500" dirty="0">
-                          <a:solidFill>
-                            <a:srgbClr val="999999"/>
-                          </a:solidFill>
-                          <a:latin typeface="Calibri" pitchFamily="34" charset="0"/>
-                          <a:ea typeface="Calibri" pitchFamily="34" charset="-122"/>
-                          <a:cs typeface="Calibri" pitchFamily="34" charset="-120"/>
-                        </a:rPr>
-                        <a:t>0.56%</a:t>
-                      </a:r>
-                      <a:endParaRPr lang="en-US" sz="500" dirty="0">
-                        <a:latin typeface="Calibri" charset="0"/>
-                        <a:ea typeface="Calibri" charset="0"/>
-                        <a:cs typeface="Calibri" charset="0"/>
-                      </a:endParaRPr>
-                    </a:p>
-                  </a:txBody>
-                  <a:tcPr marL="91440" marR="91440" marT="45720" marB="45720">
-                    <a:lnL w="2540" cap="flat" cmpd="sng" algn="ctr">
-                      <a:solidFill>
-                        <a:srgbClr val="EEEEEE"/>
-                      </a:solidFill>
-                      <a:prstDash val="solid"/>
-                      <a:round/>
-                      <a:headEnd type="none" w="med" len="med"/>
-                      <a:tailEnd type="none" w="med" len="med"/>
-                    </a:lnL>
-                    <a:lnR w="2540" cap="flat" cmpd="sng" algn="ctr">
-                      <a:solidFill>
-                        <a:srgbClr val="EEEEEE"/>
-                      </a:solidFill>
-                      <a:prstDash val="solid"/>
-                      <a:round/>
-                      <a:headEnd type="none" w="med" len="med"/>
-                      <a:tailEnd type="none" w="med" len="med"/>
-                    </a:lnR>
-                    <a:lnT w="2540" cap="flat" cmpd="sng" algn="ctr">
-                      <a:solidFill>
-                        <a:srgbClr val="EEEEEE"/>
-                      </a:solidFill>
-                      <a:prstDash val="solid"/>
-                      <a:round/>
-                      <a:headEnd type="none" w="med" len="med"/>
-                      <a:tailEnd type="none" w="med" len="med"/>
-                    </a:lnT>
-                    <a:lnB w="2540" cap="flat" cmpd="sng" algn="ctr">
-                      <a:solidFill>
-                        <a:srgbClr val="EEEEEE"/>
-                      </a:solidFill>
-                      <a:prstDash val="solid"/>
-                      <a:round/>
-                      <a:headEnd type="none" w="med" len="med"/>
-                      <a:tailEnd type="none" w="med" len="med"/>
-                    </a:lnB>
-                  </a:tcPr>
-                </a:tc>
-                <a:tc>
-                  <a:txBody>
-                    <a:bodyPr/>
-                    <a:lstStyle/>
-                    <a:p>
-                      <a:pPr algn="ctr" indent="0" marL="0">
-                        <a:buNone/>
-                      </a:pPr>
-                      <a:r>
-                        <a:rPr lang="en-US" sz="500" b="1" dirty="0">
-                          <a:solidFill>
-                            <a:srgbClr val="999999"/>
-                          </a:solidFill>
-                          <a:latin typeface="Calibri" pitchFamily="34" charset="0"/>
-                          <a:ea typeface="Calibri" pitchFamily="34" charset="-122"/>
-                          <a:cs typeface="Calibri" pitchFamily="34" charset="-120"/>
-                        </a:rPr>
-                        <a:t>3.54%</a:t>
-                      </a:r>
-                      <a:endParaRPr lang="en-US" sz="500" dirty="0">
-                        <a:latin typeface="Calibri" charset="0"/>
-                        <a:ea typeface="Calibri" charset="0"/>
-                        <a:cs typeface="Calibri" charset="0"/>
-                      </a:endParaRPr>
-                    </a:p>
-                  </a:txBody>
-                  <a:tcPr marL="91440" marR="91440" marT="45720" marB="45720">
-                    <a:lnL w="2540" cap="flat" cmpd="sng" algn="ctr">
-                      <a:solidFill>
-                        <a:srgbClr val="EEEEEE"/>
-                      </a:solidFill>
-                      <a:prstDash val="solid"/>
-                      <a:round/>
-                      <a:headEnd type="none" w="med" len="med"/>
-                      <a:tailEnd type="none" w="med" len="med"/>
-                    </a:lnL>
-                    <a:lnR w="2540" cap="flat" cmpd="sng" algn="ctr">
-                      <a:solidFill>
-                        <a:srgbClr val="EEEEEE"/>
-                      </a:solidFill>
-                      <a:prstDash val="solid"/>
-                      <a:round/>
-                      <a:headEnd type="none" w="med" len="med"/>
-                      <a:tailEnd type="none" w="med" len="med"/>
-                    </a:lnR>
-                    <a:lnT w="2540" cap="flat" cmpd="sng" algn="ctr">
-                      <a:solidFill>
-                        <a:srgbClr val="EEEEEE"/>
-                      </a:solidFill>
-                      <a:prstDash val="solid"/>
-                      <a:round/>
-                      <a:headEnd type="none" w="med" len="med"/>
-                      <a:tailEnd type="none" w="med" len="med"/>
-                    </a:lnT>
-                    <a:lnB w="2540" cap="flat" cmpd="sng" algn="ctr">
-                      <a:solidFill>
-                        <a:srgbClr val="EEEEEE"/>
-                      </a:solidFill>
-                      <a:prstDash val="solid"/>
-                      <a:round/>
-                      <a:headEnd type="none" w="med" len="med"/>
-                      <a:tailEnd type="none" w="med" len="med"/>
-                    </a:lnB>
-                  </a:tcPr>
-                </a:tc>
-              </a:tr>
-              <a:tr h="123444">
-                <a:tc>
-                  <a:txBody>
-                    <a:bodyPr/>
-                    <a:lstStyle/>
-                    <a:p>
-                      <a:pPr algn="l" indent="0" marL="0">
-                        <a:buNone/>
-                      </a:pPr>
-                      <a:endParaRPr lang="en-US" sz="500" dirty="0">
-                        <a:latin typeface="Calibri" charset="0"/>
-                        <a:ea typeface="Calibri" charset="0"/>
-                        <a:cs typeface="Calibri" charset="0"/>
-                      </a:endParaRPr>
-                    </a:p>
-                  </a:txBody>
-                  <a:tcPr marL="91440" marR="91440" marT="45720" marB="45720">
-                    <a:lnL w="2540" cap="flat" cmpd="sng" algn="ctr">
-                      <a:solidFill>
-                        <a:srgbClr val="EEEEEE"/>
-                      </a:solidFill>
-                      <a:prstDash val="solid"/>
-                      <a:round/>
-                      <a:headEnd type="none" w="med" len="med"/>
-                      <a:tailEnd type="none" w="med" len="med"/>
-                    </a:lnL>
-                    <a:lnR w="2540" cap="flat" cmpd="sng" algn="ctr">
-                      <a:solidFill>
-                        <a:srgbClr val="EEEEEE"/>
-                      </a:solidFill>
-                      <a:prstDash val="solid"/>
-                      <a:round/>
-                      <a:headEnd type="none" w="med" len="med"/>
-                      <a:tailEnd type="none" w="med" len="med"/>
-                    </a:lnR>
-                    <a:lnT w="2540" cap="flat" cmpd="sng" algn="ctr">
-                      <a:solidFill>
-                        <a:srgbClr val="EEEEEE"/>
-                      </a:solidFill>
-                      <a:prstDash val="solid"/>
-                      <a:round/>
-                      <a:headEnd type="none" w="med" len="med"/>
-                      <a:tailEnd type="none" w="med" len="med"/>
-                    </a:lnT>
-                    <a:lnB w="2540" cap="flat" cmpd="sng" algn="ctr">
-                      <a:solidFill>
-                        <a:srgbClr val="EEEEEE"/>
-                      </a:solidFill>
-                      <a:prstDash val="solid"/>
-                      <a:round/>
-                      <a:headEnd type="none" w="med" len="med"/>
-                      <a:tailEnd type="none" w="med" len="med"/>
-                    </a:lnB>
-                  </a:tcPr>
-                </a:tc>
-                <a:tc>
-                  <a:txBody>
-                    <a:bodyPr/>
-                    <a:lstStyle/>
-                    <a:p>
-                      <a:pPr algn="l" indent="0" marL="0">
-                        <a:buNone/>
-                      </a:pPr>
-                      <a:r>
-                        <a:rPr lang="en-US" sz="500" dirty="0">
-                          <a:solidFill>
-                            <a:srgbClr val="000000"/>
-                          </a:solidFill>
-                          <a:latin typeface="Calibri" pitchFamily="34" charset="0"/>
-                          <a:ea typeface="Calibri" pitchFamily="34" charset="-122"/>
-                          <a:cs typeface="Calibri" pitchFamily="34" charset="-120"/>
-                        </a:rPr>
-                        <a:t>FIP LIQUIDEZ Plus</a:t>
-                      </a:r>
-                      <a:endParaRPr lang="en-US" sz="500" dirty="0">
-                        <a:latin typeface="Calibri" charset="0"/>
-                        <a:ea typeface="Calibri" charset="0"/>
-                        <a:cs typeface="Calibri" charset="0"/>
-                      </a:endParaRPr>
-                    </a:p>
-                  </a:txBody>
-                  <a:tcPr marL="91440" marR="91440" marT="45720" marB="45720">
-                    <a:lnL w="2540" cap="flat" cmpd="sng" algn="ctr">
-                      <a:solidFill>
-                        <a:srgbClr val="EEEEEE"/>
-                      </a:solidFill>
-                      <a:prstDash val="solid"/>
-                      <a:round/>
-                      <a:headEnd type="none" w="med" len="med"/>
-                      <a:tailEnd type="none" w="med" len="med"/>
-                    </a:lnL>
-                    <a:lnR w="2540" cap="flat" cmpd="sng" algn="ctr">
-                      <a:solidFill>
-                        <a:srgbClr val="EEEEEE"/>
-                      </a:solidFill>
-                      <a:prstDash val="solid"/>
-                      <a:round/>
-                      <a:headEnd type="none" w="med" len="med"/>
-                      <a:tailEnd type="none" w="med" len="med"/>
-                    </a:lnR>
-                    <a:lnT w="2540" cap="flat" cmpd="sng" algn="ctr">
-                      <a:solidFill>
-                        <a:srgbClr val="EEEEEE"/>
-                      </a:solidFill>
-                      <a:prstDash val="solid"/>
-                      <a:round/>
-                      <a:headEnd type="none" w="med" len="med"/>
-                      <a:tailEnd type="none" w="med" len="med"/>
-                    </a:lnT>
-                    <a:lnB w="2540" cap="flat" cmpd="sng" algn="ctr">
-                      <a:solidFill>
-                        <a:srgbClr val="EEEEEE"/>
-                      </a:solidFill>
-                      <a:prstDash val="solid"/>
-                      <a:round/>
-                      <a:headEnd type="none" w="med" len="med"/>
-                      <a:tailEnd type="none" w="med" len="med"/>
-                    </a:lnB>
-                  </a:tcPr>
-                </a:tc>
-                <a:tc>
-                  <a:txBody>
-                    <a:bodyPr/>
-                    <a:lstStyle/>
-                    <a:p>
-                      <a:pPr algn="ctr" indent="0" marL="0">
-                        <a:buNone/>
-                      </a:pPr>
-                      <a:r>
-                        <a:rPr lang="en-US" sz="500" dirty="0">
-                          <a:solidFill>
-                            <a:srgbClr val="000000"/>
-                          </a:solidFill>
-                          <a:latin typeface="Calibri" pitchFamily="34" charset="0"/>
-                          <a:ea typeface="Calibri" pitchFamily="34" charset="-122"/>
-                          <a:cs typeface="Calibri" pitchFamily="34" charset="-120"/>
-                        </a:rPr>
-                        <a:t>0.00%</a:t>
-                      </a:r>
-                      <a:endParaRPr lang="en-US" sz="500" dirty="0">
-                        <a:latin typeface="Calibri" charset="0"/>
-                        <a:ea typeface="Calibri" charset="0"/>
-                        <a:cs typeface="Calibri" charset="0"/>
-                      </a:endParaRPr>
-                    </a:p>
-                  </a:txBody>
-                  <a:tcPr marL="91440" marR="91440" marT="45720" marB="45720">
-                    <a:lnL w="2540" cap="flat" cmpd="sng" algn="ctr">
-                      <a:solidFill>
-                        <a:srgbClr val="EEEEEE"/>
-                      </a:solidFill>
-                      <a:prstDash val="solid"/>
-                      <a:round/>
-                      <a:headEnd type="none" w="med" len="med"/>
-                      <a:tailEnd type="none" w="med" len="med"/>
-                    </a:lnL>
-                    <a:lnR w="2540" cap="flat" cmpd="sng" algn="ctr">
-                      <a:solidFill>
-                        <a:srgbClr val="EEEEEE"/>
-                      </a:solidFill>
-                      <a:prstDash val="solid"/>
-                      <a:round/>
-                      <a:headEnd type="none" w="med" len="med"/>
-                      <a:tailEnd type="none" w="med" len="med"/>
-                    </a:lnR>
-                    <a:lnT w="2540" cap="flat" cmpd="sng" algn="ctr">
-                      <a:solidFill>
-                        <a:srgbClr val="EEEEEE"/>
-                      </a:solidFill>
-                      <a:prstDash val="solid"/>
-                      <a:round/>
-                      <a:headEnd type="none" w="med" len="med"/>
-                      <a:tailEnd type="none" w="med" len="med"/>
-                    </a:lnT>
-                    <a:lnB w="2540" cap="flat" cmpd="sng" algn="ctr">
-                      <a:solidFill>
-                        <a:srgbClr val="EEEEEE"/>
-                      </a:solidFill>
-                      <a:prstDash val="solid"/>
-                      <a:round/>
-                      <a:headEnd type="none" w="med" len="med"/>
-                      <a:tailEnd type="none" w="med" len="med"/>
-                    </a:lnB>
-                  </a:tcPr>
-                </a:tc>
-                <a:tc>
-                  <a:txBody>
-                    <a:bodyPr/>
-                    <a:lstStyle/>
-                    <a:p>
-                      <a:pPr algn="ctr" indent="0" marL="0">
-                        <a:buNone/>
-                      </a:pPr>
-                      <a:r>
-                        <a:rPr lang="en-US" sz="500" dirty="0">
-                          <a:solidFill>
-                            <a:srgbClr val="000000"/>
-                          </a:solidFill>
-                          <a:latin typeface="Calibri" pitchFamily="34" charset="0"/>
-                          <a:ea typeface="Calibri" pitchFamily="34" charset="-122"/>
-                          <a:cs typeface="Calibri" pitchFamily="34" charset="-120"/>
-                        </a:rPr>
-                        <a:t>0.00%</a:t>
-                      </a:r>
-                      <a:endParaRPr lang="en-US" sz="500" dirty="0">
-                        <a:latin typeface="Calibri" charset="0"/>
-                        <a:ea typeface="Calibri" charset="0"/>
-                        <a:cs typeface="Calibri" charset="0"/>
-                      </a:endParaRPr>
-                    </a:p>
-                  </a:txBody>
-                  <a:tcPr marL="91440" marR="91440" marT="45720" marB="45720">
-                    <a:lnL w="2540" cap="flat" cmpd="sng" algn="ctr">
-                      <a:solidFill>
-                        <a:srgbClr val="EEEEEE"/>
-                      </a:solidFill>
-                      <a:prstDash val="solid"/>
-                      <a:round/>
-                      <a:headEnd type="none" w="med" len="med"/>
-                      <a:tailEnd type="none" w="med" len="med"/>
-                    </a:lnL>
-                    <a:lnR w="2540" cap="flat" cmpd="sng" algn="ctr">
-                      <a:solidFill>
-                        <a:srgbClr val="EEEEEE"/>
-                      </a:solidFill>
-                      <a:prstDash val="solid"/>
-                      <a:round/>
-                      <a:headEnd type="none" w="med" len="med"/>
-                      <a:tailEnd type="none" w="med" len="med"/>
-                    </a:lnR>
-                    <a:lnT w="2540" cap="flat" cmpd="sng" algn="ctr">
-                      <a:solidFill>
-                        <a:srgbClr val="EEEEEE"/>
-                      </a:solidFill>
-                      <a:prstDash val="solid"/>
-                      <a:round/>
-                      <a:headEnd type="none" w="med" len="med"/>
-                      <a:tailEnd type="none" w="med" len="med"/>
-                    </a:lnT>
-                    <a:lnB w="2540" cap="flat" cmpd="sng" algn="ctr">
-                      <a:solidFill>
-                        <a:srgbClr val="EEEEEE"/>
-                      </a:solidFill>
-                      <a:prstDash val="solid"/>
-                      <a:round/>
-                      <a:headEnd type="none" w="med" len="med"/>
-                      <a:tailEnd type="none" w="med" len="med"/>
-                    </a:lnB>
-                  </a:tcPr>
-                </a:tc>
-                <a:tc>
-                  <a:txBody>
-                    <a:bodyPr/>
-                    <a:lstStyle/>
-                    <a:p>
-                      <a:pPr algn="ctr" indent="0" marL="0">
-                        <a:buNone/>
-                      </a:pPr>
-                      <a:r>
-                        <a:rPr lang="en-US" sz="500" dirty="0">
-                          <a:solidFill>
-                            <a:srgbClr val="000000"/>
-                          </a:solidFill>
-                          <a:latin typeface="Calibri" pitchFamily="34" charset="0"/>
-                          <a:ea typeface="Calibri" pitchFamily="34" charset="-122"/>
-                          <a:cs typeface="Calibri" pitchFamily="34" charset="-120"/>
-                        </a:rPr>
-                        <a:t>0.01%</a:t>
-                      </a:r>
-                      <a:endParaRPr lang="en-US" sz="500" dirty="0">
-                        <a:latin typeface="Calibri" charset="0"/>
-                        <a:ea typeface="Calibri" charset="0"/>
-                        <a:cs typeface="Calibri" charset="0"/>
-                      </a:endParaRPr>
-                    </a:p>
-                  </a:txBody>
-                  <a:tcPr marL="91440" marR="91440" marT="45720" marB="45720">
-                    <a:lnL w="2540" cap="flat" cmpd="sng" algn="ctr">
-                      <a:solidFill>
-                        <a:srgbClr val="EEEEEE"/>
-                      </a:solidFill>
-                      <a:prstDash val="solid"/>
-                      <a:round/>
-                      <a:headEnd type="none" w="med" len="med"/>
-                      <a:tailEnd type="none" w="med" len="med"/>
-                    </a:lnL>
-                    <a:lnR w="2540" cap="flat" cmpd="sng" algn="ctr">
-                      <a:solidFill>
-                        <a:srgbClr val="EEEEEE"/>
-                      </a:solidFill>
-                      <a:prstDash val="solid"/>
-                      <a:round/>
-                      <a:headEnd type="none" w="med" len="med"/>
-                      <a:tailEnd type="none" w="med" len="med"/>
-                    </a:lnR>
-                    <a:lnT w="2540" cap="flat" cmpd="sng" algn="ctr">
-                      <a:solidFill>
-                        <a:srgbClr val="EEEEEE"/>
-                      </a:solidFill>
-                      <a:prstDash val="solid"/>
-                      <a:round/>
-                      <a:headEnd type="none" w="med" len="med"/>
-                      <a:tailEnd type="none" w="med" len="med"/>
-                    </a:lnT>
-                    <a:lnB w="2540" cap="flat" cmpd="sng" algn="ctr">
-                      <a:solidFill>
-                        <a:srgbClr val="EEEEEE"/>
-                      </a:solidFill>
-                      <a:prstDash val="solid"/>
-                      <a:round/>
-                      <a:headEnd type="none" w="med" len="med"/>
-                      <a:tailEnd type="none" w="med" len="med"/>
-                    </a:lnB>
-                  </a:tcPr>
-                </a:tc>
-                <a:tc>
-                  <a:txBody>
-                    <a:bodyPr/>
-                    <a:lstStyle/>
-                    <a:p>
-                      <a:pPr algn="ctr" indent="0" marL="0">
-                        <a:buNone/>
-                      </a:pPr>
-                      <a:r>
-                        <a:rPr lang="en-US" sz="500" dirty="0">
-                          <a:solidFill>
-                            <a:srgbClr val="000000"/>
-                          </a:solidFill>
-                          <a:latin typeface="Calibri" pitchFamily="34" charset="0"/>
-                          <a:ea typeface="Calibri" pitchFamily="34" charset="-122"/>
-                          <a:cs typeface="Calibri" pitchFamily="34" charset="-120"/>
-                        </a:rPr>
-                        <a:t>0.01%</a:t>
-                      </a:r>
-                      <a:endParaRPr lang="en-US" sz="500" dirty="0">
-                        <a:latin typeface="Calibri" charset="0"/>
-                        <a:ea typeface="Calibri" charset="0"/>
-                        <a:cs typeface="Calibri" charset="0"/>
-                      </a:endParaRPr>
-                    </a:p>
-                  </a:txBody>
-                  <a:tcPr marL="91440" marR="91440" marT="45720" marB="45720">
-                    <a:lnL w="2540" cap="flat" cmpd="sng" algn="ctr">
-                      <a:solidFill>
-                        <a:srgbClr val="EEEEEE"/>
-                      </a:solidFill>
-                      <a:prstDash val="solid"/>
-                      <a:round/>
-                      <a:headEnd type="none" w="med" len="med"/>
-                      <a:tailEnd type="none" w="med" len="med"/>
-                    </a:lnL>
-                    <a:lnR w="2540" cap="flat" cmpd="sng" algn="ctr">
-                      <a:solidFill>
-                        <a:srgbClr val="EEEEEE"/>
-                      </a:solidFill>
-                      <a:prstDash val="solid"/>
-                      <a:round/>
-                      <a:headEnd type="none" w="med" len="med"/>
-                      <a:tailEnd type="none" w="med" len="med"/>
-                    </a:lnR>
-                    <a:lnT w="2540" cap="flat" cmpd="sng" algn="ctr">
-                      <a:solidFill>
-                        <a:srgbClr val="EEEEEE"/>
-                      </a:solidFill>
-                      <a:prstDash val="solid"/>
-                      <a:round/>
-                      <a:headEnd type="none" w="med" len="med"/>
-                      <a:tailEnd type="none" w="med" len="med"/>
-                    </a:lnT>
-                    <a:lnB w="2540" cap="flat" cmpd="sng" algn="ctr">
-                      <a:solidFill>
-                        <a:srgbClr val="EEEEEE"/>
-                      </a:solidFill>
-                      <a:prstDash val="solid"/>
-                      <a:round/>
-                      <a:headEnd type="none" w="med" len="med"/>
-                      <a:tailEnd type="none" w="med" len="med"/>
-                    </a:lnB>
-                  </a:tcPr>
-                </a:tc>
-                <a:tc>
-                  <a:txBody>
-                    <a:bodyPr/>
-                    <a:lstStyle/>
-                    <a:p>
-                      <a:pPr algn="ctr" indent="0" marL="0">
-                        <a:buNone/>
-                      </a:pPr>
-                      <a:r>
-                        <a:rPr lang="en-US" sz="500" dirty="0">
-                          <a:solidFill>
-                            <a:srgbClr val="000000"/>
-                          </a:solidFill>
-                          <a:latin typeface="Calibri" pitchFamily="34" charset="0"/>
-                          <a:ea typeface="Calibri" pitchFamily="34" charset="-122"/>
-                          <a:cs typeface="Calibri" pitchFamily="34" charset="-120"/>
-                        </a:rPr>
-                        <a:t>0.01%</a:t>
-                      </a:r>
-                      <a:endParaRPr lang="en-US" sz="500" dirty="0">
-                        <a:latin typeface="Calibri" charset="0"/>
-                        <a:ea typeface="Calibri" charset="0"/>
-                        <a:cs typeface="Calibri" charset="0"/>
-                      </a:endParaRPr>
-                    </a:p>
-                  </a:txBody>
-                  <a:tcPr marL="91440" marR="91440" marT="45720" marB="45720">
-                    <a:lnL w="2540" cap="flat" cmpd="sng" algn="ctr">
-                      <a:solidFill>
-                        <a:srgbClr val="EEEEEE"/>
-                      </a:solidFill>
-                      <a:prstDash val="solid"/>
-                      <a:round/>
-                      <a:headEnd type="none" w="med" len="med"/>
-                      <a:tailEnd type="none" w="med" len="med"/>
-                    </a:lnL>
-                    <a:lnR w="2540" cap="flat" cmpd="sng" algn="ctr">
-                      <a:solidFill>
-                        <a:srgbClr val="EEEEEE"/>
-                      </a:solidFill>
-                      <a:prstDash val="solid"/>
-                      <a:round/>
-                      <a:headEnd type="none" w="med" len="med"/>
-                      <a:tailEnd type="none" w="med" len="med"/>
-                    </a:lnR>
-                    <a:lnT w="2540" cap="flat" cmpd="sng" algn="ctr">
-                      <a:solidFill>
-                        <a:srgbClr val="EEEEEE"/>
-                      </a:solidFill>
-                      <a:prstDash val="solid"/>
-                      <a:round/>
-                      <a:headEnd type="none" w="med" len="med"/>
-                      <a:tailEnd type="none" w="med" len="med"/>
-                    </a:lnT>
-                    <a:lnB w="2540" cap="flat" cmpd="sng" algn="ctr">
-                      <a:solidFill>
-                        <a:srgbClr val="EEEEEE"/>
-                      </a:solidFill>
-                      <a:prstDash val="solid"/>
-                      <a:round/>
-                      <a:headEnd type="none" w="med" len="med"/>
-                      <a:tailEnd type="none" w="med" len="med"/>
-                    </a:lnB>
-                  </a:tcPr>
-                </a:tc>
-                <a:tc>
-                  <a:txBody>
-                    <a:bodyPr/>
-                    <a:lstStyle/>
-                    <a:p>
-                      <a:pPr algn="ctr" indent="0" marL="0">
-                        <a:buNone/>
-                      </a:pPr>
-                      <a:r>
-                        <a:rPr lang="en-US" sz="500" dirty="0">
-                          <a:solidFill>
-                            <a:srgbClr val="000000"/>
-                          </a:solidFill>
-                          <a:latin typeface="Calibri" pitchFamily="34" charset="0"/>
-                          <a:ea typeface="Calibri" pitchFamily="34" charset="-122"/>
-                          <a:cs typeface="Calibri" pitchFamily="34" charset="-120"/>
-                        </a:rPr>
-                        <a:t>0.01%</a:t>
-                      </a:r>
-                      <a:endParaRPr lang="en-US" sz="500" dirty="0">
-                        <a:latin typeface="Calibri" charset="0"/>
-                        <a:ea typeface="Calibri" charset="0"/>
-                        <a:cs typeface="Calibri" charset="0"/>
-                      </a:endParaRPr>
-                    </a:p>
-                  </a:txBody>
-                  <a:tcPr marL="91440" marR="91440" marT="45720" marB="45720">
-                    <a:lnL w="2540" cap="flat" cmpd="sng" algn="ctr">
-                      <a:solidFill>
-                        <a:srgbClr val="EEEEEE"/>
-                      </a:solidFill>
-                      <a:prstDash val="solid"/>
-                      <a:round/>
-                      <a:headEnd type="none" w="med" len="med"/>
-                      <a:tailEnd type="none" w="med" len="med"/>
-                    </a:lnL>
-                    <a:lnR w="2540" cap="flat" cmpd="sng" algn="ctr">
-                      <a:solidFill>
-                        <a:srgbClr val="EEEEEE"/>
-                      </a:solidFill>
-                      <a:prstDash val="solid"/>
-                      <a:round/>
-                      <a:headEnd type="none" w="med" len="med"/>
-                      <a:tailEnd type="none" w="med" len="med"/>
-                    </a:lnR>
-                    <a:lnT w="2540" cap="flat" cmpd="sng" algn="ctr">
-                      <a:solidFill>
-                        <a:srgbClr val="EEEEEE"/>
-                      </a:solidFill>
-                      <a:prstDash val="solid"/>
-                      <a:round/>
-                      <a:headEnd type="none" w="med" len="med"/>
-                      <a:tailEnd type="none" w="med" len="med"/>
-                    </a:lnT>
-                    <a:lnB w="2540" cap="flat" cmpd="sng" algn="ctr">
-                      <a:solidFill>
-                        <a:srgbClr val="EEEEEE"/>
-                      </a:solidFill>
-                      <a:prstDash val="solid"/>
-                      <a:round/>
-                      <a:headEnd type="none" w="med" len="med"/>
-                      <a:tailEnd type="none" w="med" len="med"/>
-                    </a:lnB>
-                  </a:tcPr>
-                </a:tc>
-                <a:tc>
-                  <a:txBody>
-                    <a:bodyPr/>
-                    <a:lstStyle/>
-                    <a:p>
-                      <a:pPr algn="ctr" indent="0" marL="0">
-                        <a:buNone/>
-                      </a:pPr>
-                      <a:r>
-                        <a:rPr lang="en-US" sz="500" dirty="0">
-                          <a:solidFill>
-                            <a:srgbClr val="000000"/>
-                          </a:solidFill>
-                          <a:latin typeface="Calibri" pitchFamily="34" charset="0"/>
-                          <a:ea typeface="Calibri" pitchFamily="34" charset="-122"/>
-                          <a:cs typeface="Calibri" pitchFamily="34" charset="-120"/>
-                        </a:rPr>
-                        <a:t>0.01%</a:t>
+                        <a:t>0.58%</a:t>
                       </a:r>
                       <a:endParaRPr lang="en-US" sz="500" dirty="0">
                         <a:latin typeface="Calibri" charset="0"/>
@@ -14653,7 +14653,7 @@
                           <a:ea typeface="Calibri" pitchFamily="34" charset="-122"/>
                           <a:cs typeface="Calibri" pitchFamily="34" charset="-120"/>
                         </a:rPr>
-                        <a:t>3.12%</a:t>
+                        <a:t>7.14%</a:t>
                       </a:r>
                       <a:endParaRPr lang="en-US" sz="500" dirty="0">
                         <a:latin typeface="Calibri" charset="0"/>

--- a/folletos/2026-04/pptx/FIP_VANTRUST_LIQUIDEZ_PLUS.pptx
+++ b/folletos/2026-04/pptx/FIP_VANTRUST_LIQUIDEZ_PLUS.pptx
@@ -3113,7 +3113,7 @@
                 <a:ea typeface="Calibri" pitchFamily="34" charset="-122"/>
                 <a:cs typeface="Calibri" pitchFamily="34" charset="-120"/>
               </a:rPr>
-              <a:t>prueba CLP</a:t>
+              <a:t>prueba 13 CLP</a:t>
             </a:r>
             <a:endParaRPr lang="en-US" sz="800" dirty="0"/>
           </a:p>

--- a/folletos/2026-04/pptx/FIP_VANTRUST_LIQUIDEZ_PLUS.pptx
+++ b/folletos/2026-04/pptx/FIP_VANTRUST_LIQUIDEZ_PLUS.pptx
@@ -189,38 +189,125 @@
           </c:marker>
           <c:cat>
             <c:multiLvlStrRef>
-              <c:f>Sheet1!$A$2:$A$11</c:f>
+              <c:f>Sheet1!$A$2:$A$40</c:f>
               <c:multiLvlStrCache>
-                <c:ptCount val="10"/>
+                <c:ptCount val="39"/>
                 <c:lvl>
                   <c:pt idx="0">
+                    <c:v>Feb 2023</c:v>
+                  </c:pt>
+                  <c:pt idx="1">
+                    <c:v>Mar 2023</c:v>
+                  </c:pt>
+                  <c:pt idx="2">
+                    <c:v>Apr 2023</c:v>
+                  </c:pt>
+                  <c:pt idx="3">
+                    <c:v>May 2023</c:v>
+                  </c:pt>
+                  <c:pt idx="4">
+                    <c:v>Jun 2023</c:v>
+                  </c:pt>
+                  <c:pt idx="5">
+                    <c:v>Jul 2023</c:v>
+                  </c:pt>
+                  <c:pt idx="6">
+                    <c:v>Aug 2023</c:v>
+                  </c:pt>
+                  <c:pt idx="7">
+                    <c:v>Sep 2023</c:v>
+                  </c:pt>
+                  <c:pt idx="8">
+                    <c:v>Oct 2023</c:v>
+                  </c:pt>
+                  <c:pt idx="9">
+                    <c:v>Nov 2023</c:v>
+                  </c:pt>
+                  <c:pt idx="10">
+                    <c:v>Dec 2023</c:v>
+                  </c:pt>
+                  <c:pt idx="11">
+                    <c:v>Jan 2024</c:v>
+                  </c:pt>
+                  <c:pt idx="12">
+                    <c:v>Feb 2024</c:v>
+                  </c:pt>
+                  <c:pt idx="13">
+                    <c:v>Mar 2024</c:v>
+                  </c:pt>
+                  <c:pt idx="14">
+                    <c:v>Apr 2024</c:v>
+                  </c:pt>
+                  <c:pt idx="15">
+                    <c:v>May 2024</c:v>
+                  </c:pt>
+                  <c:pt idx="16">
+                    <c:v>Jun 2024</c:v>
+                  </c:pt>
+                  <c:pt idx="17">
+                    <c:v>Jul 2024</c:v>
+                  </c:pt>
+                  <c:pt idx="18">
+                    <c:v>Aug 2024</c:v>
+                  </c:pt>
+                  <c:pt idx="19">
+                    <c:v>Sep 2024</c:v>
+                  </c:pt>
+                  <c:pt idx="20">
+                    <c:v>Oct 2024</c:v>
+                  </c:pt>
+                  <c:pt idx="21">
+                    <c:v>Nov 2024</c:v>
+                  </c:pt>
+                  <c:pt idx="22">
+                    <c:v>Dec 2024</c:v>
+                  </c:pt>
+                  <c:pt idx="23">
+                    <c:v>Jan 2025</c:v>
+                  </c:pt>
+                  <c:pt idx="24">
+                    <c:v>Feb 2025</c:v>
+                  </c:pt>
+                  <c:pt idx="25">
+                    <c:v>Mar 2025</c:v>
+                  </c:pt>
+                  <c:pt idx="26">
+                    <c:v>Apr 2025</c:v>
+                  </c:pt>
+                  <c:pt idx="27">
+                    <c:v>May 2025</c:v>
+                  </c:pt>
+                  <c:pt idx="28">
+                    <c:v>Jun 2025</c:v>
+                  </c:pt>
+                  <c:pt idx="29">
                     <c:v>Jul 2025</c:v>
                   </c:pt>
-                  <c:pt idx="1">
+                  <c:pt idx="30">
                     <c:v>Aug 2025</c:v>
                   </c:pt>
-                  <c:pt idx="2">
+                  <c:pt idx="31">
                     <c:v>Sep 2025</c:v>
                   </c:pt>
-                  <c:pt idx="3">
+                  <c:pt idx="32">
                     <c:v>Oct 2025</c:v>
                   </c:pt>
-                  <c:pt idx="4">
+                  <c:pt idx="33">
                     <c:v>Nov 2025</c:v>
                   </c:pt>
-                  <c:pt idx="5">
+                  <c:pt idx="34">
                     <c:v>Dec 2025</c:v>
                   </c:pt>
-                  <c:pt idx="6">
+                  <c:pt idx="35">
                     <c:v>Jan 2026</c:v>
                   </c:pt>
-                  <c:pt idx="7">
+                  <c:pt idx="36">
                     <c:v>Feb 2026</c:v>
                   </c:pt>
-                  <c:pt idx="8">
+                  <c:pt idx="37">
                     <c:v>Mar 2026</c:v>
                   </c:pt>
-                  <c:pt idx="9">
+                  <c:pt idx="38">
                     <c:v>Apr 2026</c:v>
                   </c:pt>
                 </c:lvl>
@@ -229,39 +316,126 @@
           </c:cat>
           <c:val>
             <c:numRef>
-              <c:f>Sheet1!$B$2:$B$11</c:f>
+              <c:f>Sheet1!$B$2:$B$40</c:f>
               <c:numCache>
                 <c:formatCode>General</c:formatCode>
-                <c:ptCount val="10"/>
+                <c:ptCount val="39"/>
                 <c:pt idx="0">
                   <c:v>100</c:v>
                 </c:pt>
                 <c:pt idx="1">
-                  <c:v>100.4</c:v>
+                  <c:v>100.97</c:v>
                 </c:pt>
                 <c:pt idx="2">
-                  <c:v>100.79</c:v>
+                  <c:v>101.86</c:v>
                 </c:pt>
                 <c:pt idx="3">
-                  <c:v>101.19</c:v>
+                  <c:v>102.92</c:v>
                 </c:pt>
                 <c:pt idx="4">
-                  <c:v>101.59</c:v>
+                  <c:v>103.88</c:v>
                 </c:pt>
                 <c:pt idx="5">
-                  <c:v>101.98</c:v>
+                  <c:v>104.9</c:v>
                 </c:pt>
                 <c:pt idx="6">
-                  <c:v>102.37</c:v>
+                  <c:v>105.83</c:v>
                 </c:pt>
                 <c:pt idx="7">
-                  <c:v>102.75</c:v>
+                  <c:v>106.65</c:v>
                 </c:pt>
                 <c:pt idx="8">
-                  <c:v>103.14</c:v>
+                  <c:v>107.55</c:v>
                 </c:pt>
                 <c:pt idx="9">
-                  <c:v>103.52</c:v>
+                  <c:v>108.36</c:v>
+                </c:pt>
+                <c:pt idx="10">
+                  <c:v>109.13</c:v>
+                </c:pt>
+                <c:pt idx="11">
+                  <c:v>109.93</c:v>
+                </c:pt>
+                <c:pt idx="12">
+                  <c:v>110.6</c:v>
+                </c:pt>
+                <c:pt idx="13">
+                  <c:v>111.23</c:v>
+                </c:pt>
+                <c:pt idx="14">
+                  <c:v>111.91</c:v>
+                </c:pt>
+                <c:pt idx="15">
+                  <c:v>112.52</c:v>
+                </c:pt>
+                <c:pt idx="16">
+                  <c:v>113.04</c:v>
+                </c:pt>
+                <c:pt idx="17">
+                  <c:v>113.64</c:v>
+                </c:pt>
+                <c:pt idx="18">
+                  <c:v>114.19</c:v>
+                </c:pt>
+                <c:pt idx="19">
+                  <c:v>114.73</c:v>
+                </c:pt>
+                <c:pt idx="20">
+                  <c:v>115.25</c:v>
+                </c:pt>
+                <c:pt idx="21">
+                  <c:v>115.75</c:v>
+                </c:pt>
+                <c:pt idx="22">
+                  <c:v>116.27</c:v>
+                </c:pt>
+                <c:pt idx="23">
+                  <c:v>116.79</c:v>
+                </c:pt>
+                <c:pt idx="24">
+                  <c:v>117.24</c:v>
+                </c:pt>
+                <c:pt idx="25">
+                  <c:v>117.75</c:v>
+                </c:pt>
+                <c:pt idx="26">
+                  <c:v>118.24</c:v>
+                </c:pt>
+                <c:pt idx="27">
+                  <c:v>118.73</c:v>
+                </c:pt>
+                <c:pt idx="28">
+                  <c:v>119.25</c:v>
+                </c:pt>
+                <c:pt idx="29">
+                  <c:v>119.76</c:v>
+                </c:pt>
+                <c:pt idx="30">
+                  <c:v>120.22</c:v>
+                </c:pt>
+                <c:pt idx="31">
+                  <c:v>120.73</c:v>
+                </c:pt>
+                <c:pt idx="32">
+                  <c:v>121.21</c:v>
+                </c:pt>
+                <c:pt idx="33">
+                  <c:v>121.67</c:v>
+                </c:pt>
+                <c:pt idx="34">
+                  <c:v>122.17</c:v>
+                </c:pt>
+                <c:pt idx="35">
+                  <c:v>122.65</c:v>
+                </c:pt>
+                <c:pt idx="36">
+                  <c:v>123.09</c:v>
+                </c:pt>
+                <c:pt idx="37">
+                  <c:v>123.57</c:v>
+                </c:pt>
+                <c:pt idx="38">
+                  <c:v>124.04</c:v>
                 </c:pt>
               </c:numCache>
             </c:numRef>
@@ -339,38 +513,125 @@
           </c:marker>
           <c:cat>
             <c:multiLvlStrRef>
-              <c:f>Sheet1!$A$2:$A$11</c:f>
+              <c:f>Sheet1!$A$2:$A$40</c:f>
               <c:multiLvlStrCache>
-                <c:ptCount val="10"/>
+                <c:ptCount val="39"/>
                 <c:lvl>
                   <c:pt idx="0">
+                    <c:v>Feb 2023</c:v>
+                  </c:pt>
+                  <c:pt idx="1">
+                    <c:v>Mar 2023</c:v>
+                  </c:pt>
+                  <c:pt idx="2">
+                    <c:v>Apr 2023</c:v>
+                  </c:pt>
+                  <c:pt idx="3">
+                    <c:v>May 2023</c:v>
+                  </c:pt>
+                  <c:pt idx="4">
+                    <c:v>Jun 2023</c:v>
+                  </c:pt>
+                  <c:pt idx="5">
+                    <c:v>Jul 2023</c:v>
+                  </c:pt>
+                  <c:pt idx="6">
+                    <c:v>Aug 2023</c:v>
+                  </c:pt>
+                  <c:pt idx="7">
+                    <c:v>Sep 2023</c:v>
+                  </c:pt>
+                  <c:pt idx="8">
+                    <c:v>Oct 2023</c:v>
+                  </c:pt>
+                  <c:pt idx="9">
+                    <c:v>Nov 2023</c:v>
+                  </c:pt>
+                  <c:pt idx="10">
+                    <c:v>Dec 2023</c:v>
+                  </c:pt>
+                  <c:pt idx="11">
+                    <c:v>Jan 2024</c:v>
+                  </c:pt>
+                  <c:pt idx="12">
+                    <c:v>Feb 2024</c:v>
+                  </c:pt>
+                  <c:pt idx="13">
+                    <c:v>Mar 2024</c:v>
+                  </c:pt>
+                  <c:pt idx="14">
+                    <c:v>Apr 2024</c:v>
+                  </c:pt>
+                  <c:pt idx="15">
+                    <c:v>May 2024</c:v>
+                  </c:pt>
+                  <c:pt idx="16">
+                    <c:v>Jun 2024</c:v>
+                  </c:pt>
+                  <c:pt idx="17">
+                    <c:v>Jul 2024</c:v>
+                  </c:pt>
+                  <c:pt idx="18">
+                    <c:v>Aug 2024</c:v>
+                  </c:pt>
+                  <c:pt idx="19">
+                    <c:v>Sep 2024</c:v>
+                  </c:pt>
+                  <c:pt idx="20">
+                    <c:v>Oct 2024</c:v>
+                  </c:pt>
+                  <c:pt idx="21">
+                    <c:v>Nov 2024</c:v>
+                  </c:pt>
+                  <c:pt idx="22">
+                    <c:v>Dec 2024</c:v>
+                  </c:pt>
+                  <c:pt idx="23">
+                    <c:v>Jan 2025</c:v>
+                  </c:pt>
+                  <c:pt idx="24">
+                    <c:v>Feb 2025</c:v>
+                  </c:pt>
+                  <c:pt idx="25">
+                    <c:v>Mar 2025</c:v>
+                  </c:pt>
+                  <c:pt idx="26">
+                    <c:v>Apr 2025</c:v>
+                  </c:pt>
+                  <c:pt idx="27">
+                    <c:v>May 2025</c:v>
+                  </c:pt>
+                  <c:pt idx="28">
+                    <c:v>Jun 2025</c:v>
+                  </c:pt>
+                  <c:pt idx="29">
                     <c:v>Jul 2025</c:v>
                   </c:pt>
-                  <c:pt idx="1">
+                  <c:pt idx="30">
                     <c:v>Aug 2025</c:v>
                   </c:pt>
-                  <c:pt idx="2">
+                  <c:pt idx="31">
                     <c:v>Sep 2025</c:v>
                   </c:pt>
-                  <c:pt idx="3">
+                  <c:pt idx="32">
                     <c:v>Oct 2025</c:v>
                   </c:pt>
-                  <c:pt idx="4">
+                  <c:pt idx="33">
                     <c:v>Nov 2025</c:v>
                   </c:pt>
-                  <c:pt idx="5">
+                  <c:pt idx="34">
                     <c:v>Dec 2025</c:v>
                   </c:pt>
-                  <c:pt idx="6">
+                  <c:pt idx="35">
                     <c:v>Jan 2026</c:v>
                   </c:pt>
-                  <c:pt idx="7">
+                  <c:pt idx="36">
                     <c:v>Feb 2026</c:v>
                   </c:pt>
-                  <c:pt idx="8">
+                  <c:pt idx="37">
                     <c:v>Mar 2026</c:v>
                   </c:pt>
-                  <c:pt idx="9">
+                  <c:pt idx="38">
                     <c:v>Apr 2026</c:v>
                   </c:pt>
                 </c:lvl>
@@ -379,39 +640,126 @@
           </c:cat>
           <c:val>
             <c:numRef>
-              <c:f>Sheet1!$C$2:$C$11</c:f>
+              <c:f>Sheet1!$C$2:$C$40</c:f>
               <c:numCache>
                 <c:formatCode>General</c:formatCode>
-                <c:ptCount val="10"/>
+                <c:ptCount val="39"/>
                 <c:pt idx="0">
                   <c:v>100</c:v>
                 </c:pt>
                 <c:pt idx="1">
-                  <c:v>100.63</c:v>
+                  <c:v>103.01</c:v>
                 </c:pt>
                 <c:pt idx="2">
-                  <c:v>101.23</c:v>
+                  <c:v>104.14</c:v>
                 </c:pt>
                 <c:pt idx="3">
-                  <c:v>101.84</c:v>
+                  <c:v>105.3</c:v>
                 </c:pt>
                 <c:pt idx="4">
-                  <c:v>102.45</c:v>
+                  <c:v>106.39</c:v>
                 </c:pt>
                 <c:pt idx="5">
-                  <c:v>103.08</c:v>
+                  <c:v>107.52</c:v>
                 </c:pt>
                 <c:pt idx="6">
-                  <c:v>103.71</c:v>
+                  <c:v>108.57</c:v>
                 </c:pt>
                 <c:pt idx="7">
-                  <c:v>104.32</c:v>
+                  <c:v>109.57</c:v>
                 </c:pt>
                 <c:pt idx="8">
-                  <c:v>104.97</c:v>
+                  <c:v>110.56</c:v>
                 </c:pt>
                 <c:pt idx="9">
-                  <c:v>105.62</c:v>
+                  <c:v>111.49</c:v>
+                </c:pt>
+                <c:pt idx="10">
+                  <c:v>112.45</c:v>
+                </c:pt>
+                <c:pt idx="11">
+                  <c:v>113.43</c:v>
+                </c:pt>
+                <c:pt idx="12">
+                  <c:v>114.2</c:v>
+                </c:pt>
+                <c:pt idx="13">
+                  <c:v>114.92</c:v>
+                </c:pt>
+                <c:pt idx="14">
+                  <c:v>115.69</c:v>
+                </c:pt>
+                <c:pt idx="15">
+                  <c:v>116.45</c:v>
+                </c:pt>
+                <c:pt idx="16">
+                  <c:v>117.14</c:v>
+                </c:pt>
+                <c:pt idx="17">
+                  <c:v>117.77</c:v>
+                </c:pt>
+                <c:pt idx="18">
+                  <c:v>118.42</c:v>
+                </c:pt>
+                <c:pt idx="19">
+                  <c:v>119</c:v>
+                </c:pt>
+                <c:pt idx="20">
+                  <c:v>119.56</c:v>
+                </c:pt>
+                <c:pt idx="21">
+                  <c:v>120.09</c:v>
+                </c:pt>
+                <c:pt idx="22">
+                  <c:v>120.56</c:v>
+                </c:pt>
+                <c:pt idx="23">
+                  <c:v>121.07</c:v>
+                </c:pt>
+                <c:pt idx="24">
+                  <c:v>121.66</c:v>
+                </c:pt>
+                <c:pt idx="25">
+                  <c:v>122.27</c:v>
+                </c:pt>
+                <c:pt idx="26">
+                  <c:v>123.11</c:v>
+                </c:pt>
+                <c:pt idx="27">
+                  <c:v>123.84</c:v>
+                </c:pt>
+                <c:pt idx="28">
+                  <c:v>124.58</c:v>
+                </c:pt>
+                <c:pt idx="29">
+                  <c:v>125.31</c:v>
+                </c:pt>
+                <c:pt idx="30">
+                  <c:v>126.07</c:v>
+                </c:pt>
+                <c:pt idx="31">
+                  <c:v>126.81</c:v>
+                </c:pt>
+                <c:pt idx="32">
+                  <c:v>127.56</c:v>
+                </c:pt>
+                <c:pt idx="33">
+                  <c:v>128.3</c:v>
+                </c:pt>
+                <c:pt idx="34">
+                  <c:v>129.08</c:v>
+                </c:pt>
+                <c:pt idx="35">
+                  <c:v>129.85</c:v>
+                </c:pt>
+                <c:pt idx="36">
+                  <c:v>130.59</c:v>
+                </c:pt>
+                <c:pt idx="37">
+                  <c:v>131.39</c:v>
+                </c:pt>
+                <c:pt idx="38">
+                  <c:v>132.18</c:v>
                 </c:pt>
               </c:numCache>
             </c:numRef>
@@ -489,38 +837,125 @@
           </c:marker>
           <c:cat>
             <c:multiLvlStrRef>
-              <c:f>Sheet1!$A$2:$A$11</c:f>
+              <c:f>Sheet1!$A$2:$A$40</c:f>
               <c:multiLvlStrCache>
-                <c:ptCount val="10"/>
+                <c:ptCount val="39"/>
                 <c:lvl>
                   <c:pt idx="0">
+                    <c:v>Feb 2023</c:v>
+                  </c:pt>
+                  <c:pt idx="1">
+                    <c:v>Mar 2023</c:v>
+                  </c:pt>
+                  <c:pt idx="2">
+                    <c:v>Apr 2023</c:v>
+                  </c:pt>
+                  <c:pt idx="3">
+                    <c:v>May 2023</c:v>
+                  </c:pt>
+                  <c:pt idx="4">
+                    <c:v>Jun 2023</c:v>
+                  </c:pt>
+                  <c:pt idx="5">
+                    <c:v>Jul 2023</c:v>
+                  </c:pt>
+                  <c:pt idx="6">
+                    <c:v>Aug 2023</c:v>
+                  </c:pt>
+                  <c:pt idx="7">
+                    <c:v>Sep 2023</c:v>
+                  </c:pt>
+                  <c:pt idx="8">
+                    <c:v>Oct 2023</c:v>
+                  </c:pt>
+                  <c:pt idx="9">
+                    <c:v>Nov 2023</c:v>
+                  </c:pt>
+                  <c:pt idx="10">
+                    <c:v>Dec 2023</c:v>
+                  </c:pt>
+                  <c:pt idx="11">
+                    <c:v>Jan 2024</c:v>
+                  </c:pt>
+                  <c:pt idx="12">
+                    <c:v>Feb 2024</c:v>
+                  </c:pt>
+                  <c:pt idx="13">
+                    <c:v>Mar 2024</c:v>
+                  </c:pt>
+                  <c:pt idx="14">
+                    <c:v>Apr 2024</c:v>
+                  </c:pt>
+                  <c:pt idx="15">
+                    <c:v>May 2024</c:v>
+                  </c:pt>
+                  <c:pt idx="16">
+                    <c:v>Jun 2024</c:v>
+                  </c:pt>
+                  <c:pt idx="17">
+                    <c:v>Jul 2024</c:v>
+                  </c:pt>
+                  <c:pt idx="18">
+                    <c:v>Aug 2024</c:v>
+                  </c:pt>
+                  <c:pt idx="19">
+                    <c:v>Sep 2024</c:v>
+                  </c:pt>
+                  <c:pt idx="20">
+                    <c:v>Oct 2024</c:v>
+                  </c:pt>
+                  <c:pt idx="21">
+                    <c:v>Nov 2024</c:v>
+                  </c:pt>
+                  <c:pt idx="22">
+                    <c:v>Dec 2024</c:v>
+                  </c:pt>
+                  <c:pt idx="23">
+                    <c:v>Jan 2025</c:v>
+                  </c:pt>
+                  <c:pt idx="24">
+                    <c:v>Feb 2025</c:v>
+                  </c:pt>
+                  <c:pt idx="25">
+                    <c:v>Mar 2025</c:v>
+                  </c:pt>
+                  <c:pt idx="26">
+                    <c:v>Apr 2025</c:v>
+                  </c:pt>
+                  <c:pt idx="27">
+                    <c:v>May 2025</c:v>
+                  </c:pt>
+                  <c:pt idx="28">
+                    <c:v>Jun 2025</c:v>
+                  </c:pt>
+                  <c:pt idx="29">
                     <c:v>Jul 2025</c:v>
                   </c:pt>
-                  <c:pt idx="1">
+                  <c:pt idx="30">
                     <c:v>Aug 2025</c:v>
                   </c:pt>
-                  <c:pt idx="2">
+                  <c:pt idx="31">
                     <c:v>Sep 2025</c:v>
                   </c:pt>
-                  <c:pt idx="3">
+                  <c:pt idx="32">
                     <c:v>Oct 2025</c:v>
                   </c:pt>
-                  <c:pt idx="4">
+                  <c:pt idx="33">
                     <c:v>Nov 2025</c:v>
                   </c:pt>
-                  <c:pt idx="5">
+                  <c:pt idx="34">
                     <c:v>Dec 2025</c:v>
                   </c:pt>
-                  <c:pt idx="6">
+                  <c:pt idx="35">
                     <c:v>Jan 2026</c:v>
                   </c:pt>
-                  <c:pt idx="7">
+                  <c:pt idx="36">
                     <c:v>Feb 2026</c:v>
                   </c:pt>
-                  <c:pt idx="8">
+                  <c:pt idx="37">
                     <c:v>Mar 2026</c:v>
                   </c:pt>
-                  <c:pt idx="9">
+                  <c:pt idx="38">
                     <c:v>Apr 2026</c:v>
                   </c:pt>
                 </c:lvl>
@@ -529,39 +964,126 @@
           </c:cat>
           <c:val>
             <c:numRef>
-              <c:f>Sheet1!$D$2:$D$11</c:f>
+              <c:f>Sheet1!$D$2:$D$40</c:f>
               <c:numCache>
                 <c:formatCode>General</c:formatCode>
-                <c:ptCount val="10"/>
+                <c:ptCount val="39"/>
                 <c:pt idx="0">
                   <c:v>100</c:v>
                 </c:pt>
                 <c:pt idx="1">
-                  <c:v>100.3</c:v>
+                  <c:v>100.82</c:v>
                 </c:pt>
                 <c:pt idx="2">
-                  <c:v>100.58</c:v>
+                  <c:v>101.57</c:v>
                 </c:pt>
                 <c:pt idx="3">
-                  <c:v>100.87</c:v>
+                  <c:v>102.47</c:v>
                 </c:pt>
                 <c:pt idx="4">
-                  <c:v>101.15</c:v>
+                  <c:v>103.29</c:v>
                 </c:pt>
                 <c:pt idx="5">
-                  <c:v>101.71</c:v>
+                  <c:v>104.14</c:v>
                 </c:pt>
                 <c:pt idx="6">
-                  <c:v>101.71</c:v>
+                  <c:v>104.93</c:v>
                 </c:pt>
                 <c:pt idx="7">
-                  <c:v>101.96</c:v>
+                  <c:v>105.64</c:v>
                 </c:pt>
                 <c:pt idx="8">
-                  <c:v>102.23</c:v>
+                  <c:v>106.35</c:v>
                 </c:pt>
                 <c:pt idx="9">
-                  <c:v>102.5</c:v>
+                  <c:v>107</c:v>
+                </c:pt>
+                <c:pt idx="10">
+                  <c:v>107.65</c:v>
+                </c:pt>
+                <c:pt idx="11">
+                  <c:v>108.29</c:v>
+                </c:pt>
+                <c:pt idx="12">
+                  <c:v>108.84</c:v>
+                </c:pt>
+                <c:pt idx="13">
+                  <c:v>109.32</c:v>
+                </c:pt>
+                <c:pt idx="14">
+                  <c:v>109.84</c:v>
+                </c:pt>
+                <c:pt idx="15">
+                  <c:v>110.29</c:v>
+                </c:pt>
+                <c:pt idx="16">
+                  <c:v>110.7</c:v>
+                </c:pt>
+                <c:pt idx="17">
+                  <c:v>111.1</c:v>
+                </c:pt>
+                <c:pt idx="18">
+                  <c:v>111.5</c:v>
+                </c:pt>
+                <c:pt idx="19">
+                  <c:v>111.88</c:v>
+                </c:pt>
+                <c:pt idx="20">
+                  <c:v>112.26</c:v>
+                </c:pt>
+                <c:pt idx="21">
+                  <c:v>112.62</c:v>
+                </c:pt>
+                <c:pt idx="22">
+                  <c:v>112.99</c:v>
+                </c:pt>
+                <c:pt idx="23">
+                  <c:v>113.33</c:v>
+                </c:pt>
+                <c:pt idx="24">
+                  <c:v>113.64</c:v>
+                </c:pt>
+                <c:pt idx="25">
+                  <c:v>113.99</c:v>
+                </c:pt>
+                <c:pt idx="26">
+                  <c:v>114.33</c:v>
+                </c:pt>
+                <c:pt idx="27">
+                  <c:v>114.68</c:v>
+                </c:pt>
+                <c:pt idx="28">
+                  <c:v>115.02</c:v>
+                </c:pt>
+                <c:pt idx="29">
+                  <c:v>115.36</c:v>
+                </c:pt>
+                <c:pt idx="30">
+                  <c:v>115.71</c:v>
+                </c:pt>
+                <c:pt idx="31">
+                  <c:v>116.03</c:v>
+                </c:pt>
+                <c:pt idx="32">
+                  <c:v>116.36</c:v>
+                </c:pt>
+                <c:pt idx="33">
+                  <c:v>116.69</c:v>
+                </c:pt>
+                <c:pt idx="34">
+                  <c:v>117.02</c:v>
+                </c:pt>
+                <c:pt idx="35">
+                  <c:v>117.34</c:v>
+                </c:pt>
+                <c:pt idx="36">
+                  <c:v>117.62</c:v>
+                </c:pt>
+                <c:pt idx="37">
+                  <c:v>117.94</c:v>
+                </c:pt>
+                <c:pt idx="38">
+                  <c:v>118.25</c:v>
                 </c:pt>
               </c:numCache>
             </c:numRef>
@@ -637,7 +1159,7 @@
         <c:auto val="1"/>
         <c:lblAlgn val="ctr"/>
         <c:noMultiLvlLbl val="1"/>
-        <c:tickLblSkip val="1"/>
+        <c:tickLblSkip val="3"/>
       </c:catAx>
       <c:valAx>
         <c:axId val="2094734552"/>
@@ -3113,7 +3635,7 @@
                 <a:ea typeface="Calibri" pitchFamily="34" charset="-122"/>
                 <a:cs typeface="Calibri" pitchFamily="34" charset="-120"/>
               </a:rPr>
-              <a:t>prueba 13 CLP</a:t>
+              <a:t>prueba CLP</a:t>
             </a:r>
             <a:endParaRPr lang="en-US" sz="800" dirty="0"/>
           </a:p>
@@ -3783,7 +4305,7 @@
                           <a:ea typeface="Calibri" pitchFamily="34" charset="-122"/>
                           <a:cs typeface="Calibri" pitchFamily="34" charset="-120"/>
                         </a:rPr>
-                        <a:t>0.37%</a:t>
+                        <a:t>0.38%</a:t>
                       </a:r>
                       <a:endParaRPr lang="en-US" sz="750" dirty="0">
                         <a:latin typeface="Calibri" charset="0"/>
@@ -3919,7 +4441,7 @@
                           <a:ea typeface="Calibri" pitchFamily="34" charset="-122"/>
                           <a:cs typeface="Calibri" pitchFamily="34" charset="-120"/>
                         </a:rPr>
-                        <a:t>2.30%</a:t>
+                        <a:t>2.33%</a:t>
                       </a:r>
                       <a:endParaRPr lang="en-US" sz="750" dirty="0">
                         <a:latin typeface="Calibri" charset="0"/>
@@ -3987,7 +4509,7 @@
                           <a:ea typeface="Calibri" pitchFamily="34" charset="-122"/>
                           <a:cs typeface="Calibri" pitchFamily="34" charset="-120"/>
                         </a:rPr>
-                        <a:t>4.82%</a:t>
+                        <a:t>4.90%</a:t>
                       </a:r>
                       <a:endParaRPr lang="en-US" sz="750" dirty="0">
                         <a:latin typeface="Calibri" charset="0"/>
@@ -4603,7 +5125,7 @@
                           <a:ea typeface="Calibri" pitchFamily="34" charset="-122"/>
                           <a:cs typeface="Calibri" pitchFamily="34" charset="-120"/>
                         </a:rPr>
-                        <a:t>0.62%</a:t>
+                        <a:t>0.60%</a:t>
                       </a:r>
                       <a:endParaRPr lang="en-US" sz="750" dirty="0">
                         <a:latin typeface="Calibri" charset="0"/>
@@ -4671,7 +5193,7 @@
                           <a:ea typeface="Calibri" pitchFamily="34" charset="-122"/>
                           <a:cs typeface="Calibri" pitchFamily="34" charset="-120"/>
                         </a:rPr>
-                        <a:t>1.84%</a:t>
+                        <a:t>1.79%</a:t>
                       </a:r>
                       <a:endParaRPr lang="en-US" sz="750" dirty="0">
                         <a:latin typeface="Calibri" charset="0"/>
@@ -4739,7 +5261,7 @@
                           <a:ea typeface="Calibri" pitchFamily="34" charset="-122"/>
                           <a:cs typeface="Calibri" pitchFamily="34" charset="-120"/>
                         </a:rPr>
-                        <a:t>3.70%</a:t>
+                        <a:t>3.62%</a:t>
                       </a:r>
                       <a:endParaRPr lang="en-US" sz="750" dirty="0">
                         <a:latin typeface="Calibri" charset="0"/>
@@ -4807,7 +5329,7 @@
                           <a:ea typeface="Calibri" pitchFamily="34" charset="-122"/>
                           <a:cs typeface="Calibri" pitchFamily="34" charset="-120"/>
                         </a:rPr>
-                        <a:t>—</a:t>
+                        <a:t>7.36%</a:t>
                       </a:r>
                       <a:endParaRPr lang="en-US" sz="750" dirty="0">
                         <a:latin typeface="Calibri" charset="0"/>
@@ -4875,7 +5397,7 @@
                           <a:ea typeface="Calibri" pitchFamily="34" charset="-122"/>
                           <a:cs typeface="Calibri" pitchFamily="34" charset="-120"/>
                         </a:rPr>
-                        <a:t>5.51%</a:t>
+                        <a:t>5.38%</a:t>
                       </a:r>
                       <a:endParaRPr lang="en-US" sz="750" dirty="0">
                         <a:latin typeface="Calibri" charset="0"/>
@@ -5017,20 +5539,20 @@
               <a:tblPr/>
               <a:tblGrid>
                 <a:gridCol w="201168"/>
-                <a:gridCol w="822960"/>
-                <a:gridCol w="246888"/>
-                <a:gridCol w="246888"/>
-                <a:gridCol w="246888"/>
-                <a:gridCol w="246888"/>
-                <a:gridCol w="246888"/>
-                <a:gridCol w="246888"/>
-                <a:gridCol w="246888"/>
-                <a:gridCol w="246888"/>
-                <a:gridCol w="246888"/>
-                <a:gridCol w="246888"/>
-                <a:gridCol w="246888"/>
-                <a:gridCol w="246888"/>
-                <a:gridCol w="283464"/>
+                <a:gridCol w="804672"/>
+                <a:gridCol w="292608"/>
+                <a:gridCol w="292608"/>
+                <a:gridCol w="292608"/>
+                <a:gridCol w="292608"/>
+                <a:gridCol w="292608"/>
+                <a:gridCol w="292608"/>
+                <a:gridCol w="292608"/>
+                <a:gridCol w="292608"/>
+                <a:gridCol w="292608"/>
+                <a:gridCol w="292608"/>
+                <a:gridCol w="292608"/>
+                <a:gridCol w="292608"/>
+                <a:gridCol w="301752"/>
               </a:tblGrid>
               <a:tr h="123444">
                 <a:tc>
@@ -6169,6 +6691,298 @@
                       <a:pPr algn="ctr" indent="0" marL="0">
                         <a:buNone/>
                       </a:pPr>
+                      <a:endParaRPr lang="en-US" sz="500" dirty="0">
+                        <a:latin typeface="Calibri" charset="0"/>
+                        <a:ea typeface="Calibri" charset="0"/>
+                        <a:cs typeface="Calibri" charset="0"/>
+                      </a:endParaRPr>
+                    </a:p>
+                  </a:txBody>
+                  <a:tcPr marL="91440" marR="91440" marT="45720" marB="45720">
+                    <a:lnL w="2540" cap="flat" cmpd="sng" algn="ctr">
+                      <a:solidFill>
+                        <a:srgbClr val="EEEEEE"/>
+                      </a:solidFill>
+                      <a:prstDash val="solid"/>
+                      <a:round/>
+                      <a:headEnd type="none" w="med" len="med"/>
+                      <a:tailEnd type="none" w="med" len="med"/>
+                    </a:lnL>
+                    <a:lnR w="2540" cap="flat" cmpd="sng" algn="ctr">
+                      <a:solidFill>
+                        <a:srgbClr val="EEEEEE"/>
+                      </a:solidFill>
+                      <a:prstDash val="solid"/>
+                      <a:round/>
+                      <a:headEnd type="none" w="med" len="med"/>
+                      <a:tailEnd type="none" w="med" len="med"/>
+                    </a:lnR>
+                    <a:lnT w="2540" cap="flat" cmpd="sng" algn="ctr">
+                      <a:solidFill>
+                        <a:srgbClr val="EEEEEE"/>
+                      </a:solidFill>
+                      <a:prstDash val="solid"/>
+                      <a:round/>
+                      <a:headEnd type="none" w="med" len="med"/>
+                      <a:tailEnd type="none" w="med" len="med"/>
+                    </a:lnT>
+                    <a:lnB w="2540" cap="flat" cmpd="sng" algn="ctr">
+                      <a:solidFill>
+                        <a:srgbClr val="EEEEEE"/>
+                      </a:solidFill>
+                      <a:prstDash val="solid"/>
+                      <a:round/>
+                      <a:headEnd type="none" w="med" len="med"/>
+                      <a:tailEnd type="none" w="med" len="med"/>
+                    </a:lnB>
+                  </a:tcPr>
+                </a:tc>
+                <a:tc>
+                  <a:txBody>
+                    <a:bodyPr/>
+                    <a:lstStyle/>
+                    <a:p>
+                      <a:pPr algn="ctr" indent="0" marL="0">
+                        <a:buNone/>
+                      </a:pPr>
+                      <a:endParaRPr lang="en-US" sz="500" dirty="0">
+                        <a:latin typeface="Calibri" charset="0"/>
+                        <a:ea typeface="Calibri" charset="0"/>
+                        <a:cs typeface="Calibri" charset="0"/>
+                      </a:endParaRPr>
+                    </a:p>
+                  </a:txBody>
+                  <a:tcPr marL="91440" marR="91440" marT="45720" marB="45720">
+                    <a:lnL w="2540" cap="flat" cmpd="sng" algn="ctr">
+                      <a:solidFill>
+                        <a:srgbClr val="EEEEEE"/>
+                      </a:solidFill>
+                      <a:prstDash val="solid"/>
+                      <a:round/>
+                      <a:headEnd type="none" w="med" len="med"/>
+                      <a:tailEnd type="none" w="med" len="med"/>
+                    </a:lnL>
+                    <a:lnR w="2540" cap="flat" cmpd="sng" algn="ctr">
+                      <a:solidFill>
+                        <a:srgbClr val="EEEEEE"/>
+                      </a:solidFill>
+                      <a:prstDash val="solid"/>
+                      <a:round/>
+                      <a:headEnd type="none" w="med" len="med"/>
+                      <a:tailEnd type="none" w="med" len="med"/>
+                    </a:lnR>
+                    <a:lnT w="2540" cap="flat" cmpd="sng" algn="ctr">
+                      <a:solidFill>
+                        <a:srgbClr val="EEEEEE"/>
+                      </a:solidFill>
+                      <a:prstDash val="solid"/>
+                      <a:round/>
+                      <a:headEnd type="none" w="med" len="med"/>
+                      <a:tailEnd type="none" w="med" len="med"/>
+                    </a:lnT>
+                    <a:lnB w="2540" cap="flat" cmpd="sng" algn="ctr">
+                      <a:solidFill>
+                        <a:srgbClr val="EEEEEE"/>
+                      </a:solidFill>
+                      <a:prstDash val="solid"/>
+                      <a:round/>
+                      <a:headEnd type="none" w="med" len="med"/>
+                      <a:tailEnd type="none" w="med" len="med"/>
+                    </a:lnB>
+                  </a:tcPr>
+                </a:tc>
+                <a:tc>
+                  <a:txBody>
+                    <a:bodyPr/>
+                    <a:lstStyle/>
+                    <a:p>
+                      <a:pPr algn="ctr" indent="0" marL="0">
+                        <a:buNone/>
+                      </a:pPr>
+                      <a:endParaRPr lang="en-US" sz="500" dirty="0">
+                        <a:latin typeface="Calibri" charset="0"/>
+                        <a:ea typeface="Calibri" charset="0"/>
+                        <a:cs typeface="Calibri" charset="0"/>
+                      </a:endParaRPr>
+                    </a:p>
+                  </a:txBody>
+                  <a:tcPr marL="91440" marR="91440" marT="45720" marB="45720">
+                    <a:lnL w="2540" cap="flat" cmpd="sng" algn="ctr">
+                      <a:solidFill>
+                        <a:srgbClr val="EEEEEE"/>
+                      </a:solidFill>
+                      <a:prstDash val="solid"/>
+                      <a:round/>
+                      <a:headEnd type="none" w="med" len="med"/>
+                      <a:tailEnd type="none" w="med" len="med"/>
+                    </a:lnL>
+                    <a:lnR w="2540" cap="flat" cmpd="sng" algn="ctr">
+                      <a:solidFill>
+                        <a:srgbClr val="EEEEEE"/>
+                      </a:solidFill>
+                      <a:prstDash val="solid"/>
+                      <a:round/>
+                      <a:headEnd type="none" w="med" len="med"/>
+                      <a:tailEnd type="none" w="med" len="med"/>
+                    </a:lnR>
+                    <a:lnT w="2540" cap="flat" cmpd="sng" algn="ctr">
+                      <a:solidFill>
+                        <a:srgbClr val="EEEEEE"/>
+                      </a:solidFill>
+                      <a:prstDash val="solid"/>
+                      <a:round/>
+                      <a:headEnd type="none" w="med" len="med"/>
+                      <a:tailEnd type="none" w="med" len="med"/>
+                    </a:lnT>
+                    <a:lnB w="2540" cap="flat" cmpd="sng" algn="ctr">
+                      <a:solidFill>
+                        <a:srgbClr val="EEEEEE"/>
+                      </a:solidFill>
+                      <a:prstDash val="solid"/>
+                      <a:round/>
+                      <a:headEnd type="none" w="med" len="med"/>
+                      <a:tailEnd type="none" w="med" len="med"/>
+                    </a:lnB>
+                  </a:tcPr>
+                </a:tc>
+                <a:tc>
+                  <a:txBody>
+                    <a:bodyPr/>
+                    <a:lstStyle/>
+                    <a:p>
+                      <a:pPr algn="ctr" indent="0" marL="0">
+                        <a:buNone/>
+                      </a:pPr>
+                      <a:r>
+                        <a:rPr lang="en-US" sz="500" dirty="0">
+                          <a:solidFill>
+                            <a:srgbClr val="777777"/>
+                          </a:solidFill>
+                          <a:latin typeface="Calibri" pitchFamily="34" charset="0"/>
+                          <a:ea typeface="Calibri" pitchFamily="34" charset="-122"/>
+                          <a:cs typeface="Calibri" pitchFamily="34" charset="-120"/>
+                        </a:rPr>
+                        <a:t>0.88%</a:t>
+                      </a:r>
+                      <a:endParaRPr lang="en-US" sz="500" dirty="0">
+                        <a:latin typeface="Calibri" charset="0"/>
+                        <a:ea typeface="Calibri" charset="0"/>
+                        <a:cs typeface="Calibri" charset="0"/>
+                      </a:endParaRPr>
+                    </a:p>
+                  </a:txBody>
+                  <a:tcPr marL="91440" marR="91440" marT="45720" marB="45720">
+                    <a:lnL w="2540" cap="flat" cmpd="sng" algn="ctr">
+                      <a:solidFill>
+                        <a:srgbClr val="EEEEEE"/>
+                      </a:solidFill>
+                      <a:prstDash val="solid"/>
+                      <a:round/>
+                      <a:headEnd type="none" w="med" len="med"/>
+                      <a:tailEnd type="none" w="med" len="med"/>
+                    </a:lnL>
+                    <a:lnR w="2540" cap="flat" cmpd="sng" algn="ctr">
+                      <a:solidFill>
+                        <a:srgbClr val="EEEEEE"/>
+                      </a:solidFill>
+                      <a:prstDash val="solid"/>
+                      <a:round/>
+                      <a:headEnd type="none" w="med" len="med"/>
+                      <a:tailEnd type="none" w="med" len="med"/>
+                    </a:lnR>
+                    <a:lnT w="2540" cap="flat" cmpd="sng" algn="ctr">
+                      <a:solidFill>
+                        <a:srgbClr val="EEEEEE"/>
+                      </a:solidFill>
+                      <a:prstDash val="solid"/>
+                      <a:round/>
+                      <a:headEnd type="none" w="med" len="med"/>
+                      <a:tailEnd type="none" w="med" len="med"/>
+                    </a:lnT>
+                    <a:lnB w="2540" cap="flat" cmpd="sng" algn="ctr">
+                      <a:solidFill>
+                        <a:srgbClr val="EEEEEE"/>
+                      </a:solidFill>
+                      <a:prstDash val="solid"/>
+                      <a:round/>
+                      <a:headEnd type="none" w="med" len="med"/>
+                      <a:tailEnd type="none" w="med" len="med"/>
+                    </a:lnB>
+                  </a:tcPr>
+                </a:tc>
+                <a:tc>
+                  <a:txBody>
+                    <a:bodyPr/>
+                    <a:lstStyle/>
+                    <a:p>
+                      <a:pPr algn="ctr" indent="0" marL="0">
+                        <a:buNone/>
+                      </a:pPr>
+                      <a:r>
+                        <a:rPr lang="en-US" sz="500" dirty="0">
+                          <a:solidFill>
+                            <a:srgbClr val="777777"/>
+                          </a:solidFill>
+                          <a:latin typeface="Calibri" pitchFamily="34" charset="0"/>
+                          <a:ea typeface="Calibri" pitchFamily="34" charset="-122"/>
+                          <a:cs typeface="Calibri" pitchFamily="34" charset="-120"/>
+                        </a:rPr>
+                        <a:t>1.04%</a:t>
+                      </a:r>
+                      <a:endParaRPr lang="en-US" sz="500" dirty="0">
+                        <a:latin typeface="Calibri" charset="0"/>
+                        <a:ea typeface="Calibri" charset="0"/>
+                        <a:cs typeface="Calibri" charset="0"/>
+                      </a:endParaRPr>
+                    </a:p>
+                  </a:txBody>
+                  <a:tcPr marL="91440" marR="91440" marT="45720" marB="45720">
+                    <a:lnL w="2540" cap="flat" cmpd="sng" algn="ctr">
+                      <a:solidFill>
+                        <a:srgbClr val="EEEEEE"/>
+                      </a:solidFill>
+                      <a:prstDash val="solid"/>
+                      <a:round/>
+                      <a:headEnd type="none" w="med" len="med"/>
+                      <a:tailEnd type="none" w="med" len="med"/>
+                    </a:lnL>
+                    <a:lnR w="2540" cap="flat" cmpd="sng" algn="ctr">
+                      <a:solidFill>
+                        <a:srgbClr val="EEEEEE"/>
+                      </a:solidFill>
+                      <a:prstDash val="solid"/>
+                      <a:round/>
+                      <a:headEnd type="none" w="med" len="med"/>
+                      <a:tailEnd type="none" w="med" len="med"/>
+                    </a:lnR>
+                    <a:lnT w="2540" cap="flat" cmpd="sng" algn="ctr">
+                      <a:solidFill>
+                        <a:srgbClr val="EEEEEE"/>
+                      </a:solidFill>
+                      <a:prstDash val="solid"/>
+                      <a:round/>
+                      <a:headEnd type="none" w="med" len="med"/>
+                      <a:tailEnd type="none" w="med" len="med"/>
+                    </a:lnT>
+                    <a:lnB w="2540" cap="flat" cmpd="sng" algn="ctr">
+                      <a:solidFill>
+                        <a:srgbClr val="EEEEEE"/>
+                      </a:solidFill>
+                      <a:prstDash val="solid"/>
+                      <a:round/>
+                      <a:headEnd type="none" w="med" len="med"/>
+                      <a:tailEnd type="none" w="med" len="med"/>
+                    </a:lnB>
+                  </a:tcPr>
+                </a:tc>
+                <a:tc>
+                  <a:txBody>
+                    <a:bodyPr/>
+                    <a:lstStyle/>
+                    <a:p>
+                      <a:pPr algn="ctr" indent="0" marL="0">
+                        <a:buNone/>
+                      </a:pPr>
                       <a:r>
                         <a:rPr lang="en-US" sz="500" dirty="0">
                           <a:solidFill>
@@ -6243,7 +7057,7 @@
                           <a:ea typeface="Calibri" pitchFamily="34" charset="-122"/>
                           <a:cs typeface="Calibri" pitchFamily="34" charset="-120"/>
                         </a:rPr>
-                        <a:t>0.94%</a:t>
+                        <a:t>0.97%</a:t>
                       </a:r>
                       <a:endParaRPr lang="en-US" sz="500" dirty="0">
                         <a:latin typeface="Calibri" charset="0"/>
@@ -6308,7 +7122,7 @@
                           <a:ea typeface="Calibri" pitchFamily="34" charset="-122"/>
                           <a:cs typeface="Calibri" pitchFamily="34" charset="-120"/>
                         </a:rPr>
-                        <a:t>0.94%</a:t>
+                        <a:t>0.89%</a:t>
                       </a:r>
                       <a:endParaRPr lang="en-US" sz="500" dirty="0">
                         <a:latin typeface="Calibri" charset="0"/>
@@ -6373,202 +7187,7 @@
                           <a:ea typeface="Calibri" pitchFamily="34" charset="-122"/>
                           <a:cs typeface="Calibri" pitchFamily="34" charset="-120"/>
                         </a:rPr>
-                        <a:t>0.94%</a:t>
-                      </a:r>
-                      <a:endParaRPr lang="en-US" sz="500" dirty="0">
-                        <a:latin typeface="Calibri" charset="0"/>
-                        <a:ea typeface="Calibri" charset="0"/>
-                        <a:cs typeface="Calibri" charset="0"/>
-                      </a:endParaRPr>
-                    </a:p>
-                  </a:txBody>
-                  <a:tcPr marL="91440" marR="91440" marT="45720" marB="45720">
-                    <a:lnL w="2540" cap="flat" cmpd="sng" algn="ctr">
-                      <a:solidFill>
-                        <a:srgbClr val="EEEEEE"/>
-                      </a:solidFill>
-                      <a:prstDash val="solid"/>
-                      <a:round/>
-                      <a:headEnd type="none" w="med" len="med"/>
-                      <a:tailEnd type="none" w="med" len="med"/>
-                    </a:lnL>
-                    <a:lnR w="2540" cap="flat" cmpd="sng" algn="ctr">
-                      <a:solidFill>
-                        <a:srgbClr val="EEEEEE"/>
-                      </a:solidFill>
-                      <a:prstDash val="solid"/>
-                      <a:round/>
-                      <a:headEnd type="none" w="med" len="med"/>
-                      <a:tailEnd type="none" w="med" len="med"/>
-                    </a:lnR>
-                    <a:lnT w="2540" cap="flat" cmpd="sng" algn="ctr">
-                      <a:solidFill>
-                        <a:srgbClr val="EEEEEE"/>
-                      </a:solidFill>
-                      <a:prstDash val="solid"/>
-                      <a:round/>
-                      <a:headEnd type="none" w="med" len="med"/>
-                      <a:tailEnd type="none" w="med" len="med"/>
-                    </a:lnT>
-                    <a:lnB w="2540" cap="flat" cmpd="sng" algn="ctr">
-                      <a:solidFill>
-                        <a:srgbClr val="EEEEEE"/>
-                      </a:solidFill>
-                      <a:prstDash val="solid"/>
-                      <a:round/>
-                      <a:headEnd type="none" w="med" len="med"/>
-                      <a:tailEnd type="none" w="med" len="med"/>
-                    </a:lnB>
-                  </a:tcPr>
-                </a:tc>
-                <a:tc>
-                  <a:txBody>
-                    <a:bodyPr/>
-                    <a:lstStyle/>
-                    <a:p>
-                      <a:pPr algn="ctr" indent="0" marL="0">
-                        <a:buNone/>
-                      </a:pPr>
-                      <a:r>
-                        <a:rPr lang="en-US" sz="500" dirty="0">
-                          <a:solidFill>
-                            <a:srgbClr val="777777"/>
-                          </a:solidFill>
-                          <a:latin typeface="Calibri" pitchFamily="34" charset="0"/>
-                          <a:ea typeface="Calibri" pitchFamily="34" charset="-122"/>
-                          <a:cs typeface="Calibri" pitchFamily="34" charset="-120"/>
-                        </a:rPr>
-                        <a:t>0.94%</a:t>
-                      </a:r>
-                      <a:endParaRPr lang="en-US" sz="500" dirty="0">
-                        <a:latin typeface="Calibri" charset="0"/>
-                        <a:ea typeface="Calibri" charset="0"/>
-                        <a:cs typeface="Calibri" charset="0"/>
-                      </a:endParaRPr>
-                    </a:p>
-                  </a:txBody>
-                  <a:tcPr marL="91440" marR="91440" marT="45720" marB="45720">
-                    <a:lnL w="2540" cap="flat" cmpd="sng" algn="ctr">
-                      <a:solidFill>
-                        <a:srgbClr val="EEEEEE"/>
-                      </a:solidFill>
-                      <a:prstDash val="solid"/>
-                      <a:round/>
-                      <a:headEnd type="none" w="med" len="med"/>
-                      <a:tailEnd type="none" w="med" len="med"/>
-                    </a:lnL>
-                    <a:lnR w="2540" cap="flat" cmpd="sng" algn="ctr">
-                      <a:solidFill>
-                        <a:srgbClr val="EEEEEE"/>
-                      </a:solidFill>
-                      <a:prstDash val="solid"/>
-                      <a:round/>
-                      <a:headEnd type="none" w="med" len="med"/>
-                      <a:tailEnd type="none" w="med" len="med"/>
-                    </a:lnR>
-                    <a:lnT w="2540" cap="flat" cmpd="sng" algn="ctr">
-                      <a:solidFill>
-                        <a:srgbClr val="EEEEEE"/>
-                      </a:solidFill>
-                      <a:prstDash val="solid"/>
-                      <a:round/>
-                      <a:headEnd type="none" w="med" len="med"/>
-                      <a:tailEnd type="none" w="med" len="med"/>
-                    </a:lnT>
-                    <a:lnB w="2540" cap="flat" cmpd="sng" algn="ctr">
-                      <a:solidFill>
-                        <a:srgbClr val="EEEEEE"/>
-                      </a:solidFill>
-                      <a:prstDash val="solid"/>
-                      <a:round/>
-                      <a:headEnd type="none" w="med" len="med"/>
-                      <a:tailEnd type="none" w="med" len="med"/>
-                    </a:lnB>
-                  </a:tcPr>
-                </a:tc>
-                <a:tc>
-                  <a:txBody>
-                    <a:bodyPr/>
-                    <a:lstStyle/>
-                    <a:p>
-                      <a:pPr algn="ctr" indent="0" marL="0">
-                        <a:buNone/>
-                      </a:pPr>
-                      <a:r>
-                        <a:rPr lang="en-US" sz="500" dirty="0">
-                          <a:solidFill>
-                            <a:srgbClr val="777777"/>
-                          </a:solidFill>
-                          <a:latin typeface="Calibri" pitchFamily="34" charset="0"/>
-                          <a:ea typeface="Calibri" pitchFamily="34" charset="-122"/>
-                          <a:cs typeface="Calibri" pitchFamily="34" charset="-120"/>
-                        </a:rPr>
-                        <a:t>0.94%</a:t>
-                      </a:r>
-                      <a:endParaRPr lang="en-US" sz="500" dirty="0">
-                        <a:latin typeface="Calibri" charset="0"/>
-                        <a:ea typeface="Calibri" charset="0"/>
-                        <a:cs typeface="Calibri" charset="0"/>
-                      </a:endParaRPr>
-                    </a:p>
-                  </a:txBody>
-                  <a:tcPr marL="91440" marR="91440" marT="45720" marB="45720">
-                    <a:lnL w="2540" cap="flat" cmpd="sng" algn="ctr">
-                      <a:solidFill>
-                        <a:srgbClr val="EEEEEE"/>
-                      </a:solidFill>
-                      <a:prstDash val="solid"/>
-                      <a:round/>
-                      <a:headEnd type="none" w="med" len="med"/>
-                      <a:tailEnd type="none" w="med" len="med"/>
-                    </a:lnL>
-                    <a:lnR w="2540" cap="flat" cmpd="sng" algn="ctr">
-                      <a:solidFill>
-                        <a:srgbClr val="EEEEEE"/>
-                      </a:solidFill>
-                      <a:prstDash val="solid"/>
-                      <a:round/>
-                      <a:headEnd type="none" w="med" len="med"/>
-                      <a:tailEnd type="none" w="med" len="med"/>
-                    </a:lnR>
-                    <a:lnT w="2540" cap="flat" cmpd="sng" algn="ctr">
-                      <a:solidFill>
-                        <a:srgbClr val="EEEEEE"/>
-                      </a:solidFill>
-                      <a:prstDash val="solid"/>
-                      <a:round/>
-                      <a:headEnd type="none" w="med" len="med"/>
-                      <a:tailEnd type="none" w="med" len="med"/>
-                    </a:lnT>
-                    <a:lnB w="2540" cap="flat" cmpd="sng" algn="ctr">
-                      <a:solidFill>
-                        <a:srgbClr val="EEEEEE"/>
-                      </a:solidFill>
-                      <a:prstDash val="solid"/>
-                      <a:round/>
-                      <a:headEnd type="none" w="med" len="med"/>
-                      <a:tailEnd type="none" w="med" len="med"/>
-                    </a:lnB>
-                  </a:tcPr>
-                </a:tc>
-                <a:tc>
-                  <a:txBody>
-                    <a:bodyPr/>
-                    <a:lstStyle/>
-                    <a:p>
-                      <a:pPr algn="ctr" indent="0" marL="0">
-                        <a:buNone/>
-                      </a:pPr>
-                      <a:r>
-                        <a:rPr lang="en-US" sz="500" dirty="0">
-                          <a:solidFill>
-                            <a:srgbClr val="777777"/>
-                          </a:solidFill>
-                          <a:latin typeface="Calibri" pitchFamily="34" charset="0"/>
-                          <a:ea typeface="Calibri" pitchFamily="34" charset="-122"/>
-                          <a:cs typeface="Calibri" pitchFamily="34" charset="-120"/>
-                        </a:rPr>
-                        <a:t>0.93%</a:t>
+                        <a:t>0.78%</a:t>
                       </a:r>
                       <a:endParaRPr lang="en-US" sz="500" dirty="0">
                         <a:latin typeface="Calibri" charset="0"/>
@@ -6698,7 +7317,7 @@
                           <a:ea typeface="Calibri" pitchFamily="34" charset="-122"/>
                           <a:cs typeface="Calibri" pitchFamily="34" charset="-120"/>
                         </a:rPr>
-                        <a:t>0.80%</a:t>
+                        <a:t>0.75%</a:t>
                       </a:r>
                       <a:endParaRPr lang="en-US" sz="500" dirty="0">
                         <a:latin typeface="Calibri" charset="0"/>
@@ -6763,137 +7382,7 @@
                           <a:ea typeface="Calibri" pitchFamily="34" charset="-122"/>
                           <a:cs typeface="Calibri" pitchFamily="34" charset="-120"/>
                         </a:rPr>
-                        <a:t>0.79%</a:t>
-                      </a:r>
-                      <a:endParaRPr lang="en-US" sz="500" dirty="0">
-                        <a:latin typeface="Calibri" charset="0"/>
-                        <a:ea typeface="Calibri" charset="0"/>
-                        <a:cs typeface="Calibri" charset="0"/>
-                      </a:endParaRPr>
-                    </a:p>
-                  </a:txBody>
-                  <a:tcPr marL="91440" marR="91440" marT="45720" marB="45720">
-                    <a:lnL w="2540" cap="flat" cmpd="sng" algn="ctr">
-                      <a:solidFill>
-                        <a:srgbClr val="EEEEEE"/>
-                      </a:solidFill>
-                      <a:prstDash val="solid"/>
-                      <a:round/>
-                      <a:headEnd type="none" w="med" len="med"/>
-                      <a:tailEnd type="none" w="med" len="med"/>
-                    </a:lnL>
-                    <a:lnR w="2540" cap="flat" cmpd="sng" algn="ctr">
-                      <a:solidFill>
-                        <a:srgbClr val="EEEEEE"/>
-                      </a:solidFill>
-                      <a:prstDash val="solid"/>
-                      <a:round/>
-                      <a:headEnd type="none" w="med" len="med"/>
-                      <a:tailEnd type="none" w="med" len="med"/>
-                    </a:lnR>
-                    <a:lnT w="2540" cap="flat" cmpd="sng" algn="ctr">
-                      <a:solidFill>
-                        <a:srgbClr val="EEEEEE"/>
-                      </a:solidFill>
-                      <a:prstDash val="solid"/>
-                      <a:round/>
-                      <a:headEnd type="none" w="med" len="med"/>
-                      <a:tailEnd type="none" w="med" len="med"/>
-                    </a:lnT>
-                    <a:lnB w="2540" cap="flat" cmpd="sng" algn="ctr">
-                      <a:solidFill>
-                        <a:srgbClr val="EEEEEE"/>
-                      </a:solidFill>
-                      <a:prstDash val="solid"/>
-                      <a:round/>
-                      <a:headEnd type="none" w="med" len="med"/>
-                      <a:tailEnd type="none" w="med" len="med"/>
-                    </a:lnB>
-                  </a:tcPr>
-                </a:tc>
-                <a:tc>
-                  <a:txBody>
-                    <a:bodyPr/>
-                    <a:lstStyle/>
-                    <a:p>
-                      <a:pPr algn="ctr" indent="0" marL="0">
-                        <a:buNone/>
-                      </a:pPr>
-                      <a:r>
-                        <a:rPr lang="en-US" sz="500" dirty="0">
-                          <a:solidFill>
-                            <a:srgbClr val="777777"/>
-                          </a:solidFill>
-                          <a:latin typeface="Calibri" pitchFamily="34" charset="0"/>
-                          <a:ea typeface="Calibri" pitchFamily="34" charset="-122"/>
-                          <a:cs typeface="Calibri" pitchFamily="34" charset="-120"/>
-                        </a:rPr>
-                        <a:t>0.75%</a:t>
-                      </a:r>
-                      <a:endParaRPr lang="en-US" sz="500" dirty="0">
-                        <a:latin typeface="Calibri" charset="0"/>
-                        <a:ea typeface="Calibri" charset="0"/>
-                        <a:cs typeface="Calibri" charset="0"/>
-                      </a:endParaRPr>
-                    </a:p>
-                  </a:txBody>
-                  <a:tcPr marL="91440" marR="91440" marT="45720" marB="45720">
-                    <a:lnL w="2540" cap="flat" cmpd="sng" algn="ctr">
-                      <a:solidFill>
-                        <a:srgbClr val="EEEEEE"/>
-                      </a:solidFill>
-                      <a:prstDash val="solid"/>
-                      <a:round/>
-                      <a:headEnd type="none" w="med" len="med"/>
-                      <a:tailEnd type="none" w="med" len="med"/>
-                    </a:lnL>
-                    <a:lnR w="2540" cap="flat" cmpd="sng" algn="ctr">
-                      <a:solidFill>
-                        <a:srgbClr val="EEEEEE"/>
-                      </a:solidFill>
-                      <a:prstDash val="solid"/>
-                      <a:round/>
-                      <a:headEnd type="none" w="med" len="med"/>
-                      <a:tailEnd type="none" w="med" len="med"/>
-                    </a:lnR>
-                    <a:lnT w="2540" cap="flat" cmpd="sng" algn="ctr">
-                      <a:solidFill>
-                        <a:srgbClr val="EEEEEE"/>
-                      </a:solidFill>
-                      <a:prstDash val="solid"/>
-                      <a:round/>
-                      <a:headEnd type="none" w="med" len="med"/>
-                      <a:tailEnd type="none" w="med" len="med"/>
-                    </a:lnT>
-                    <a:lnB w="2540" cap="flat" cmpd="sng" algn="ctr">
-                      <a:solidFill>
-                        <a:srgbClr val="EEEEEE"/>
-                      </a:solidFill>
-                      <a:prstDash val="solid"/>
-                      <a:round/>
-                      <a:headEnd type="none" w="med" len="med"/>
-                      <a:tailEnd type="none" w="med" len="med"/>
-                    </a:lnB>
-                  </a:tcPr>
-                </a:tc>
-                <a:tc>
-                  <a:txBody>
-                    <a:bodyPr/>
-                    <a:lstStyle/>
-                    <a:p>
-                      <a:pPr algn="ctr" indent="0" marL="0">
-                        <a:buNone/>
-                      </a:pPr>
-                      <a:r>
-                        <a:rPr lang="en-US" sz="500" dirty="0">
-                          <a:solidFill>
-                            <a:srgbClr val="777777"/>
-                          </a:solidFill>
-                          <a:latin typeface="Calibri" pitchFamily="34" charset="0"/>
-                          <a:ea typeface="Calibri" pitchFamily="34" charset="-122"/>
-                          <a:cs typeface="Calibri" pitchFamily="34" charset="-120"/>
-                        </a:rPr>
-                        <a:t>0.73%</a:t>
+                        <a:t>0.71%</a:t>
                       </a:r>
                       <a:endParaRPr lang="en-US" sz="500" dirty="0">
                         <a:latin typeface="Calibri" charset="0"/>
@@ -6958,7 +7447,7 @@
                           <a:ea typeface="Calibri" pitchFamily="34" charset="-122"/>
                           <a:cs typeface="Calibri" pitchFamily="34" charset="-120"/>
                         </a:rPr>
-                        <a:t>11.00%</a:t>
+                        <a:t>11.19%</a:t>
                       </a:r>
                       <a:endParaRPr lang="en-US" sz="500" dirty="0">
                         <a:latin typeface="Calibri" charset="0"/>
@@ -7135,17 +7624,6 @@
                       <a:pPr algn="ctr" indent="0" marL="0">
                         <a:buNone/>
                       </a:pPr>
-                      <a:r>
-                        <a:rPr lang="en-US" sz="500" dirty="0">
-                          <a:solidFill>
-                            <a:srgbClr val="999999"/>
-                          </a:solidFill>
-                          <a:latin typeface="Calibri" pitchFamily="34" charset="0"/>
-                          <a:ea typeface="Calibri" pitchFamily="34" charset="-122"/>
-                          <a:cs typeface="Calibri" pitchFamily="34" charset="-120"/>
-                        </a:rPr>
-                        <a:t>0.00%</a:t>
-                      </a:r>
                       <a:endParaRPr lang="en-US" sz="500" dirty="0">
                         <a:latin typeface="Calibri" charset="0"/>
                         <a:ea typeface="Calibri" charset="0"/>
@@ -7837,7 +8315,7 @@
                           <a:ea typeface="Calibri" pitchFamily="34" charset="-122"/>
                           <a:cs typeface="Calibri" pitchFamily="34" charset="-120"/>
                         </a:rPr>
-                        <a:t>7.49%</a:t>
+                        <a:t>0.61%</a:t>
                       </a:r>
                       <a:endParaRPr lang="en-US" sz="500" dirty="0">
                         <a:latin typeface="Calibri" charset="0"/>
@@ -7902,7 +8380,7 @@
                           <a:ea typeface="Calibri" pitchFamily="34" charset="-122"/>
                           <a:cs typeface="Calibri" pitchFamily="34" charset="-120"/>
                         </a:rPr>
-                        <a:t>14.07%</a:t>
+                        <a:t>9.36%</a:t>
                       </a:r>
                       <a:endParaRPr lang="en-US" sz="500" dirty="0">
                         <a:latin typeface="Calibri" charset="0"/>
@@ -8835,7 +9313,7 @@
                           <a:ea typeface="Calibri" pitchFamily="34" charset="-122"/>
                           <a:cs typeface="Calibri" pitchFamily="34" charset="-120"/>
                         </a:rPr>
-                        <a:t>9.17%</a:t>
+                        <a:t>12.23%</a:t>
                       </a:r>
                       <a:endParaRPr lang="en-US" sz="500" dirty="0">
                         <a:latin typeface="Calibri" charset="0"/>
@@ -9032,7 +9510,7 @@
                           <a:ea typeface="Calibri" pitchFamily="34" charset="-122"/>
                           <a:cs typeface="Calibri" pitchFamily="34" charset="-120"/>
                         </a:rPr>
-                        <a:t>0.69%</a:t>
+                        <a:t>0.74%</a:t>
                       </a:r>
                       <a:endParaRPr lang="en-US" sz="500" dirty="0">
                         <a:latin typeface="Calibri" charset="0"/>
@@ -9097,7 +9575,7 @@
                           <a:ea typeface="Calibri" pitchFamily="34" charset="-122"/>
                           <a:cs typeface="Calibri" pitchFamily="34" charset="-120"/>
                         </a:rPr>
-                        <a:t>0.60%</a:t>
+                        <a:t>0.61%</a:t>
                       </a:r>
                       <a:endParaRPr lang="en-US" sz="500" dirty="0">
                         <a:latin typeface="Calibri" charset="0"/>
@@ -9162,7 +9640,72 @@
                           <a:ea typeface="Calibri" pitchFamily="34" charset="-122"/>
                           <a:cs typeface="Calibri" pitchFamily="34" charset="-120"/>
                         </a:rPr>
-                        <a:t>0.60%</a:t>
+                        <a:t>0.56%</a:t>
+                      </a:r>
+                      <a:endParaRPr lang="en-US" sz="500" dirty="0">
+                        <a:latin typeface="Calibri" charset="0"/>
+                        <a:ea typeface="Calibri" charset="0"/>
+                        <a:cs typeface="Calibri" charset="0"/>
+                      </a:endParaRPr>
+                    </a:p>
+                  </a:txBody>
+                  <a:tcPr marL="91440" marR="91440" marT="45720" marB="45720">
+                    <a:lnL w="2540" cap="flat" cmpd="sng" algn="ctr">
+                      <a:solidFill>
+                        <a:srgbClr val="EEEEEE"/>
+                      </a:solidFill>
+                      <a:prstDash val="solid"/>
+                      <a:round/>
+                      <a:headEnd type="none" w="med" len="med"/>
+                      <a:tailEnd type="none" w="med" len="med"/>
+                    </a:lnL>
+                    <a:lnR w="2540" cap="flat" cmpd="sng" algn="ctr">
+                      <a:solidFill>
+                        <a:srgbClr val="EEEEEE"/>
+                      </a:solidFill>
+                      <a:prstDash val="solid"/>
+                      <a:round/>
+                      <a:headEnd type="none" w="med" len="med"/>
+                      <a:tailEnd type="none" w="med" len="med"/>
+                    </a:lnR>
+                    <a:lnT w="2540" cap="flat" cmpd="sng" algn="ctr">
+                      <a:solidFill>
+                        <a:srgbClr val="EEEEEE"/>
+                      </a:solidFill>
+                      <a:prstDash val="solid"/>
+                      <a:round/>
+                      <a:headEnd type="none" w="med" len="med"/>
+                      <a:tailEnd type="none" w="med" len="med"/>
+                    </a:lnT>
+                    <a:lnB w="2540" cap="flat" cmpd="sng" algn="ctr">
+                      <a:solidFill>
+                        <a:srgbClr val="EEEEEE"/>
+                      </a:solidFill>
+                      <a:prstDash val="solid"/>
+                      <a:round/>
+                      <a:headEnd type="none" w="med" len="med"/>
+                      <a:tailEnd type="none" w="med" len="med"/>
+                    </a:lnB>
+                  </a:tcPr>
+                </a:tc>
+                <a:tc>
+                  <a:txBody>
+                    <a:bodyPr/>
+                    <a:lstStyle/>
+                    <a:p>
+                      <a:pPr algn="ctr" indent="0" marL="0">
+                        <a:buNone/>
+                      </a:pPr>
+                      <a:r>
+                        <a:rPr lang="en-US" sz="500" dirty="0">
+                          <a:solidFill>
+                            <a:srgbClr val="777777"/>
+                          </a:solidFill>
+                          <a:latin typeface="Calibri" pitchFamily="34" charset="0"/>
+                          <a:ea typeface="Calibri" pitchFamily="34" charset="-122"/>
+                          <a:cs typeface="Calibri" pitchFamily="34" charset="-120"/>
+                        </a:rPr>
+                        <a:t>0.61%</a:t>
                       </a:r>
                       <a:endParaRPr lang="en-US" sz="500" dirty="0">
                         <a:latin typeface="Calibri" charset="0"/>
@@ -9292,7 +9835,7 @@
                           <a:ea typeface="Calibri" pitchFamily="34" charset="-122"/>
                           <a:cs typeface="Calibri" pitchFamily="34" charset="-120"/>
                         </a:rPr>
-                        <a:t>0.53%</a:t>
+                        <a:t>0.46%</a:t>
                       </a:r>
                       <a:endParaRPr lang="en-US" sz="500" dirty="0">
                         <a:latin typeface="Calibri" charset="0"/>
@@ -9357,7 +9900,7 @@
                           <a:ea typeface="Calibri" pitchFamily="34" charset="-122"/>
                           <a:cs typeface="Calibri" pitchFamily="34" charset="-120"/>
                         </a:rPr>
-                        <a:t>0.49%</a:t>
+                        <a:t>0.53%</a:t>
                       </a:r>
                       <a:endParaRPr lang="en-US" sz="500" dirty="0">
                         <a:latin typeface="Calibri" charset="0"/>
@@ -9552,7 +10095,2266 @@
                           <a:ea typeface="Calibri" pitchFamily="34" charset="-122"/>
                           <a:cs typeface="Calibri" pitchFamily="34" charset="-120"/>
                         </a:rPr>
+                        <a:t>0.45%</a:t>
+                      </a:r>
+                      <a:endParaRPr lang="en-US" sz="500" dirty="0">
+                        <a:latin typeface="Calibri" charset="0"/>
+                        <a:ea typeface="Calibri" charset="0"/>
+                        <a:cs typeface="Calibri" charset="0"/>
+                      </a:endParaRPr>
+                    </a:p>
+                  </a:txBody>
+                  <a:tcPr marL="91440" marR="91440" marT="45720" marB="45720">
+                    <a:lnL w="2540" cap="flat" cmpd="sng" algn="ctr">
+                      <a:solidFill>
+                        <a:srgbClr val="EEEEEE"/>
+                      </a:solidFill>
+                      <a:prstDash val="solid"/>
+                      <a:round/>
+                      <a:headEnd type="none" w="med" len="med"/>
+                      <a:tailEnd type="none" w="med" len="med"/>
+                    </a:lnL>
+                    <a:lnR w="2540" cap="flat" cmpd="sng" algn="ctr">
+                      <a:solidFill>
+                        <a:srgbClr val="EEEEEE"/>
+                      </a:solidFill>
+                      <a:prstDash val="solid"/>
+                      <a:round/>
+                      <a:headEnd type="none" w="med" len="med"/>
+                      <a:tailEnd type="none" w="med" len="med"/>
+                    </a:lnR>
+                    <a:lnT w="2540" cap="flat" cmpd="sng" algn="ctr">
+                      <a:solidFill>
+                        <a:srgbClr val="EEEEEE"/>
+                      </a:solidFill>
+                      <a:prstDash val="solid"/>
+                      <a:round/>
+                      <a:headEnd type="none" w="med" len="med"/>
+                      <a:tailEnd type="none" w="med" len="med"/>
+                    </a:lnT>
+                    <a:lnB w="2540" cap="flat" cmpd="sng" algn="ctr">
+                      <a:solidFill>
+                        <a:srgbClr val="EEEEEE"/>
+                      </a:solidFill>
+                      <a:prstDash val="solid"/>
+                      <a:round/>
+                      <a:headEnd type="none" w="med" len="med"/>
+                      <a:tailEnd type="none" w="med" len="med"/>
+                    </a:lnB>
+                  </a:tcPr>
+                </a:tc>
+                <a:tc>
+                  <a:txBody>
+                    <a:bodyPr/>
+                    <a:lstStyle/>
+                    <a:p>
+                      <a:pPr algn="ctr" indent="0" marL="0">
+                        <a:buNone/>
+                      </a:pPr>
+                      <a:r>
+                        <a:rPr lang="en-US" sz="500" dirty="0">
+                          <a:solidFill>
+                            <a:srgbClr val="777777"/>
+                          </a:solidFill>
+                          <a:latin typeface="Calibri" pitchFamily="34" charset="0"/>
+                          <a:ea typeface="Calibri" pitchFamily="34" charset="-122"/>
+                          <a:cs typeface="Calibri" pitchFamily="34" charset="-120"/>
+                        </a:rPr>
+                        <a:t>0.44%</a:t>
+                      </a:r>
+                      <a:endParaRPr lang="en-US" sz="500" dirty="0">
+                        <a:latin typeface="Calibri" charset="0"/>
+                        <a:ea typeface="Calibri" charset="0"/>
+                        <a:cs typeface="Calibri" charset="0"/>
+                      </a:endParaRPr>
+                    </a:p>
+                  </a:txBody>
+                  <a:tcPr marL="91440" marR="91440" marT="45720" marB="45720">
+                    <a:lnL w="2540" cap="flat" cmpd="sng" algn="ctr">
+                      <a:solidFill>
+                        <a:srgbClr val="EEEEEE"/>
+                      </a:solidFill>
+                      <a:prstDash val="solid"/>
+                      <a:round/>
+                      <a:headEnd type="none" w="med" len="med"/>
+                      <a:tailEnd type="none" w="med" len="med"/>
+                    </a:lnL>
+                    <a:lnR w="2540" cap="flat" cmpd="sng" algn="ctr">
+                      <a:solidFill>
+                        <a:srgbClr val="EEEEEE"/>
+                      </a:solidFill>
+                      <a:prstDash val="solid"/>
+                      <a:round/>
+                      <a:headEnd type="none" w="med" len="med"/>
+                      <a:tailEnd type="none" w="med" len="med"/>
+                    </a:lnR>
+                    <a:lnT w="2540" cap="flat" cmpd="sng" algn="ctr">
+                      <a:solidFill>
+                        <a:srgbClr val="EEEEEE"/>
+                      </a:solidFill>
+                      <a:prstDash val="solid"/>
+                      <a:round/>
+                      <a:headEnd type="none" w="med" len="med"/>
+                      <a:tailEnd type="none" w="med" len="med"/>
+                    </a:lnT>
+                    <a:lnB w="2540" cap="flat" cmpd="sng" algn="ctr">
+                      <a:solidFill>
+                        <a:srgbClr val="EEEEEE"/>
+                      </a:solidFill>
+                      <a:prstDash val="solid"/>
+                      <a:round/>
+                      <a:headEnd type="none" w="med" len="med"/>
+                      <a:tailEnd type="none" w="med" len="med"/>
+                    </a:lnB>
+                  </a:tcPr>
+                </a:tc>
+                <a:tc>
+                  <a:txBody>
+                    <a:bodyPr/>
+                    <a:lstStyle/>
+                    <a:p>
+                      <a:pPr algn="ctr" indent="0" marL="0">
+                        <a:buNone/>
+                      </a:pPr>
+                      <a:r>
+                        <a:rPr lang="en-US" sz="500" dirty="0">
+                          <a:solidFill>
+                            <a:srgbClr val="777777"/>
+                          </a:solidFill>
+                          <a:latin typeface="Calibri" pitchFamily="34" charset="0"/>
+                          <a:ea typeface="Calibri" pitchFamily="34" charset="-122"/>
+                          <a:cs typeface="Calibri" pitchFamily="34" charset="-120"/>
+                        </a:rPr>
+                        <a:t>0.44%</a:t>
+                      </a:r>
+                      <a:endParaRPr lang="en-US" sz="500" dirty="0">
+                        <a:latin typeface="Calibri" charset="0"/>
+                        <a:ea typeface="Calibri" charset="0"/>
+                        <a:cs typeface="Calibri" charset="0"/>
+                      </a:endParaRPr>
+                    </a:p>
+                  </a:txBody>
+                  <a:tcPr marL="91440" marR="91440" marT="45720" marB="45720">
+                    <a:lnL w="2540" cap="flat" cmpd="sng" algn="ctr">
+                      <a:solidFill>
+                        <a:srgbClr val="EEEEEE"/>
+                      </a:solidFill>
+                      <a:prstDash val="solid"/>
+                      <a:round/>
+                      <a:headEnd type="none" w="med" len="med"/>
+                      <a:tailEnd type="none" w="med" len="med"/>
+                    </a:lnL>
+                    <a:lnR w="2540" cap="flat" cmpd="sng" algn="ctr">
+                      <a:solidFill>
+                        <a:srgbClr val="EEEEEE"/>
+                      </a:solidFill>
+                      <a:prstDash val="solid"/>
+                      <a:round/>
+                      <a:headEnd type="none" w="med" len="med"/>
+                      <a:tailEnd type="none" w="med" len="med"/>
+                    </a:lnR>
+                    <a:lnT w="2540" cap="flat" cmpd="sng" algn="ctr">
+                      <a:solidFill>
+                        <a:srgbClr val="EEEEEE"/>
+                      </a:solidFill>
+                      <a:prstDash val="solid"/>
+                      <a:round/>
+                      <a:headEnd type="none" w="med" len="med"/>
+                      <a:tailEnd type="none" w="med" len="med"/>
+                    </a:lnT>
+                    <a:lnB w="2540" cap="flat" cmpd="sng" algn="ctr">
+                      <a:solidFill>
+                        <a:srgbClr val="EEEEEE"/>
+                      </a:solidFill>
+                      <a:prstDash val="solid"/>
+                      <a:round/>
+                      <a:headEnd type="none" w="med" len="med"/>
+                      <a:tailEnd type="none" w="med" len="med"/>
+                    </a:lnB>
+                  </a:tcPr>
+                </a:tc>
+                <a:tc>
+                  <a:txBody>
+                    <a:bodyPr/>
+                    <a:lstStyle/>
+                    <a:p>
+                      <a:pPr algn="ctr" indent="0" marL="0">
+                        <a:buNone/>
+                      </a:pPr>
+                      <a:r>
+                        <a:rPr lang="en-US" sz="500" b="1" dirty="0">
+                          <a:solidFill>
+                            <a:srgbClr val="777777"/>
+                          </a:solidFill>
+                          <a:latin typeface="Calibri" pitchFamily="34" charset="0"/>
+                          <a:ea typeface="Calibri" pitchFamily="34" charset="-122"/>
+                          <a:cs typeface="Calibri" pitchFamily="34" charset="-120"/>
+                        </a:rPr>
+                        <a:t>6.54%</a:t>
+                      </a:r>
+                      <a:endParaRPr lang="en-US" sz="500" dirty="0">
+                        <a:latin typeface="Calibri" charset="0"/>
+                        <a:ea typeface="Calibri" charset="0"/>
+                        <a:cs typeface="Calibri" charset="0"/>
+                      </a:endParaRPr>
+                    </a:p>
+                  </a:txBody>
+                  <a:tcPr marL="91440" marR="91440" marT="45720" marB="45720">
+                    <a:lnL w="2540" cap="flat" cmpd="sng" algn="ctr">
+                      <a:solidFill>
+                        <a:srgbClr val="EEEEEE"/>
+                      </a:solidFill>
+                      <a:prstDash val="solid"/>
+                      <a:round/>
+                      <a:headEnd type="none" w="med" len="med"/>
+                      <a:tailEnd type="none" w="med" len="med"/>
+                    </a:lnL>
+                    <a:lnR w="2540" cap="flat" cmpd="sng" algn="ctr">
+                      <a:solidFill>
+                        <a:srgbClr val="EEEEEE"/>
+                      </a:solidFill>
+                      <a:prstDash val="solid"/>
+                      <a:round/>
+                      <a:headEnd type="none" w="med" len="med"/>
+                      <a:tailEnd type="none" w="med" len="med"/>
+                    </a:lnR>
+                    <a:lnT w="2540" cap="flat" cmpd="sng" algn="ctr">
+                      <a:solidFill>
+                        <a:srgbClr val="EEEEEE"/>
+                      </a:solidFill>
+                      <a:prstDash val="solid"/>
+                      <a:round/>
+                      <a:headEnd type="none" w="med" len="med"/>
+                      <a:tailEnd type="none" w="med" len="med"/>
+                    </a:lnT>
+                    <a:lnB w="2540" cap="flat" cmpd="sng" algn="ctr">
+                      <a:solidFill>
+                        <a:srgbClr val="EEEEEE"/>
+                      </a:solidFill>
+                      <a:prstDash val="solid"/>
+                      <a:round/>
+                      <a:headEnd type="none" w="med" len="med"/>
+                      <a:tailEnd type="none" w="med" len="med"/>
+                    </a:lnB>
+                  </a:tcPr>
+                </a:tc>
+              </a:tr>
+              <a:tr h="123444">
+                <a:tc>
+                  <a:txBody>
+                    <a:bodyPr/>
+                    <a:lstStyle/>
+                    <a:p>
+                      <a:pPr algn="l" indent="0" marL="0">
+                        <a:buNone/>
+                      </a:pPr>
+                      <a:endParaRPr lang="en-US" sz="500" dirty="0">
+                        <a:latin typeface="Calibri" charset="0"/>
+                        <a:ea typeface="Calibri" charset="0"/>
+                        <a:cs typeface="Calibri" charset="0"/>
+                      </a:endParaRPr>
+                    </a:p>
+                  </a:txBody>
+                  <a:tcPr marL="91440" marR="91440" marT="45720" marB="45720">
+                    <a:lnL w="2540" cap="flat" cmpd="sng" algn="ctr">
+                      <a:solidFill>
+                        <a:srgbClr val="EEEEEE"/>
+                      </a:solidFill>
+                      <a:prstDash val="solid"/>
+                      <a:round/>
+                      <a:headEnd type="none" w="med" len="med"/>
+                      <a:tailEnd type="none" w="med" len="med"/>
+                    </a:lnL>
+                    <a:lnR w="2540" cap="flat" cmpd="sng" algn="ctr">
+                      <a:solidFill>
+                        <a:srgbClr val="EEEEEE"/>
+                      </a:solidFill>
+                      <a:prstDash val="solid"/>
+                      <a:round/>
+                      <a:headEnd type="none" w="med" len="med"/>
+                      <a:tailEnd type="none" w="med" len="med"/>
+                    </a:lnR>
+                    <a:lnT w="2540" cap="flat" cmpd="sng" algn="ctr">
+                      <a:solidFill>
+                        <a:srgbClr val="EEEEEE"/>
+                      </a:solidFill>
+                      <a:prstDash val="solid"/>
+                      <a:round/>
+                      <a:headEnd type="none" w="med" len="med"/>
+                      <a:tailEnd type="none" w="med" len="med"/>
+                    </a:lnT>
+                    <a:lnB w="2540" cap="flat" cmpd="sng" algn="ctr">
+                      <a:solidFill>
+                        <a:srgbClr val="EEEEEE"/>
+                      </a:solidFill>
+                      <a:prstDash val="solid"/>
+                      <a:round/>
+                      <a:headEnd type="none" w="med" len="med"/>
+                      <a:tailEnd type="none" w="med" len="med"/>
+                    </a:lnB>
+                  </a:tcPr>
+                </a:tc>
+                <a:tc>
+                  <a:txBody>
+                    <a:bodyPr/>
+                    <a:lstStyle/>
+                    <a:p>
+                      <a:pPr algn="l" indent="0" marL="0">
+                        <a:buNone/>
+                      </a:pPr>
+                      <a:r>
+                        <a:rPr lang="en-US" sz="500" dirty="0">
+                          <a:solidFill>
+                            <a:srgbClr val="999999"/>
+                          </a:solidFill>
+                          <a:latin typeface="Calibri" pitchFamily="34" charset="0"/>
+                          <a:ea typeface="Calibri" pitchFamily="34" charset="-122"/>
+                          <a:cs typeface="Calibri" pitchFamily="34" charset="-120"/>
+                        </a:rPr>
+                        <a:t>Competencia</a:t>
+                      </a:r>
+                      <a:endParaRPr lang="en-US" sz="500" dirty="0">
+                        <a:latin typeface="Calibri" charset="0"/>
+                        <a:ea typeface="Calibri" charset="0"/>
+                        <a:cs typeface="Calibri" charset="0"/>
+                      </a:endParaRPr>
+                    </a:p>
+                  </a:txBody>
+                  <a:tcPr marL="91440" marR="91440" marT="45720" marB="45720">
+                    <a:lnL w="2540" cap="flat" cmpd="sng" algn="ctr">
+                      <a:solidFill>
+                        <a:srgbClr val="EEEEEE"/>
+                      </a:solidFill>
+                      <a:prstDash val="solid"/>
+                      <a:round/>
+                      <a:headEnd type="none" w="med" len="med"/>
+                      <a:tailEnd type="none" w="med" len="med"/>
+                    </a:lnL>
+                    <a:lnR w="2540" cap="flat" cmpd="sng" algn="ctr">
+                      <a:solidFill>
+                        <a:srgbClr val="EEEEEE"/>
+                      </a:solidFill>
+                      <a:prstDash val="solid"/>
+                      <a:round/>
+                      <a:headEnd type="none" w="med" len="med"/>
+                      <a:tailEnd type="none" w="med" len="med"/>
+                    </a:lnR>
+                    <a:lnT w="2540" cap="flat" cmpd="sng" algn="ctr">
+                      <a:solidFill>
+                        <a:srgbClr val="EEEEEE"/>
+                      </a:solidFill>
+                      <a:prstDash val="solid"/>
+                      <a:round/>
+                      <a:headEnd type="none" w="med" len="med"/>
+                      <a:tailEnd type="none" w="med" len="med"/>
+                    </a:lnT>
+                    <a:lnB w="2540" cap="flat" cmpd="sng" algn="ctr">
+                      <a:solidFill>
+                        <a:srgbClr val="EEEEEE"/>
+                      </a:solidFill>
+                      <a:prstDash val="solid"/>
+                      <a:round/>
+                      <a:headEnd type="none" w="med" len="med"/>
+                      <a:tailEnd type="none" w="med" len="med"/>
+                    </a:lnB>
+                  </a:tcPr>
+                </a:tc>
+                <a:tc>
+                  <a:txBody>
+                    <a:bodyPr/>
+                    <a:lstStyle/>
+                    <a:p>
+                      <a:pPr algn="ctr" indent="0" marL="0">
+                        <a:buNone/>
+                      </a:pPr>
+                      <a:r>
+                        <a:rPr lang="en-US" sz="500" dirty="0">
+                          <a:solidFill>
+                            <a:srgbClr val="999999"/>
+                          </a:solidFill>
+                          <a:latin typeface="Calibri" pitchFamily="34" charset="0"/>
+                          <a:ea typeface="Calibri" pitchFamily="34" charset="-122"/>
+                          <a:cs typeface="Calibri" pitchFamily="34" charset="-120"/>
+                        </a:rPr>
+                        <a:t>0.59%</a:t>
+                      </a:r>
+                      <a:endParaRPr lang="en-US" sz="500" dirty="0">
+                        <a:latin typeface="Calibri" charset="0"/>
+                        <a:ea typeface="Calibri" charset="0"/>
+                        <a:cs typeface="Calibri" charset="0"/>
+                      </a:endParaRPr>
+                    </a:p>
+                  </a:txBody>
+                  <a:tcPr marL="91440" marR="91440" marT="45720" marB="45720">
+                    <a:lnL w="2540" cap="flat" cmpd="sng" algn="ctr">
+                      <a:solidFill>
+                        <a:srgbClr val="EEEEEE"/>
+                      </a:solidFill>
+                      <a:prstDash val="solid"/>
+                      <a:round/>
+                      <a:headEnd type="none" w="med" len="med"/>
+                      <a:tailEnd type="none" w="med" len="med"/>
+                    </a:lnL>
+                    <a:lnR w="2540" cap="flat" cmpd="sng" algn="ctr">
+                      <a:solidFill>
+                        <a:srgbClr val="EEEEEE"/>
+                      </a:solidFill>
+                      <a:prstDash val="solid"/>
+                      <a:round/>
+                      <a:headEnd type="none" w="med" len="med"/>
+                      <a:tailEnd type="none" w="med" len="med"/>
+                    </a:lnR>
+                    <a:lnT w="2540" cap="flat" cmpd="sng" algn="ctr">
+                      <a:solidFill>
+                        <a:srgbClr val="EEEEEE"/>
+                      </a:solidFill>
+                      <a:prstDash val="solid"/>
+                      <a:round/>
+                      <a:headEnd type="none" w="med" len="med"/>
+                      <a:tailEnd type="none" w="med" len="med"/>
+                    </a:lnT>
+                    <a:lnB w="2540" cap="flat" cmpd="sng" algn="ctr">
+                      <a:solidFill>
+                        <a:srgbClr val="EEEEEE"/>
+                      </a:solidFill>
+                      <a:prstDash val="solid"/>
+                      <a:round/>
+                      <a:headEnd type="none" w="med" len="med"/>
+                      <a:tailEnd type="none" w="med" len="med"/>
+                    </a:lnB>
+                  </a:tcPr>
+                </a:tc>
+                <a:tc>
+                  <a:txBody>
+                    <a:bodyPr/>
+                    <a:lstStyle/>
+                    <a:p>
+                      <a:pPr algn="ctr" indent="0" marL="0">
+                        <a:buNone/>
+                      </a:pPr>
+                      <a:r>
+                        <a:rPr lang="en-US" sz="500" dirty="0">
+                          <a:solidFill>
+                            <a:srgbClr val="999999"/>
+                          </a:solidFill>
+                          <a:latin typeface="Calibri" pitchFamily="34" charset="0"/>
+                          <a:ea typeface="Calibri" pitchFamily="34" charset="-122"/>
+                          <a:cs typeface="Calibri" pitchFamily="34" charset="-120"/>
+                        </a:rPr>
+                        <a:t>0.51%</a:t>
+                      </a:r>
+                      <a:endParaRPr lang="en-US" sz="500" dirty="0">
+                        <a:latin typeface="Calibri" charset="0"/>
+                        <a:ea typeface="Calibri" charset="0"/>
+                        <a:cs typeface="Calibri" charset="0"/>
+                      </a:endParaRPr>
+                    </a:p>
+                  </a:txBody>
+                  <a:tcPr marL="91440" marR="91440" marT="45720" marB="45720">
+                    <a:lnL w="2540" cap="flat" cmpd="sng" algn="ctr">
+                      <a:solidFill>
+                        <a:srgbClr val="EEEEEE"/>
+                      </a:solidFill>
+                      <a:prstDash val="solid"/>
+                      <a:round/>
+                      <a:headEnd type="none" w="med" len="med"/>
+                      <a:tailEnd type="none" w="med" len="med"/>
+                    </a:lnL>
+                    <a:lnR w="2540" cap="flat" cmpd="sng" algn="ctr">
+                      <a:solidFill>
+                        <a:srgbClr val="EEEEEE"/>
+                      </a:solidFill>
+                      <a:prstDash val="solid"/>
+                      <a:round/>
+                      <a:headEnd type="none" w="med" len="med"/>
+                      <a:tailEnd type="none" w="med" len="med"/>
+                    </a:lnR>
+                    <a:lnT w="2540" cap="flat" cmpd="sng" algn="ctr">
+                      <a:solidFill>
+                        <a:srgbClr val="EEEEEE"/>
+                      </a:solidFill>
+                      <a:prstDash val="solid"/>
+                      <a:round/>
+                      <a:headEnd type="none" w="med" len="med"/>
+                      <a:tailEnd type="none" w="med" len="med"/>
+                    </a:lnT>
+                    <a:lnB w="2540" cap="flat" cmpd="sng" algn="ctr">
+                      <a:solidFill>
+                        <a:srgbClr val="EEEEEE"/>
+                      </a:solidFill>
+                      <a:prstDash val="solid"/>
+                      <a:round/>
+                      <a:headEnd type="none" w="med" len="med"/>
+                      <a:tailEnd type="none" w="med" len="med"/>
+                    </a:lnB>
+                  </a:tcPr>
+                </a:tc>
+                <a:tc>
+                  <a:txBody>
+                    <a:bodyPr/>
+                    <a:lstStyle/>
+                    <a:p>
+                      <a:pPr algn="ctr" indent="0" marL="0">
+                        <a:buNone/>
+                      </a:pPr>
+                      <a:r>
+                        <a:rPr lang="en-US" sz="500" dirty="0">
+                          <a:solidFill>
+                            <a:srgbClr val="999999"/>
+                          </a:solidFill>
+                          <a:latin typeface="Calibri" pitchFamily="34" charset="0"/>
+                          <a:ea typeface="Calibri" pitchFamily="34" charset="-122"/>
+                          <a:cs typeface="Calibri" pitchFamily="34" charset="-120"/>
+                        </a:rPr>
+                        <a:t>0.45%</a:t>
+                      </a:r>
+                      <a:endParaRPr lang="en-US" sz="500" dirty="0">
+                        <a:latin typeface="Calibri" charset="0"/>
+                        <a:ea typeface="Calibri" charset="0"/>
+                        <a:cs typeface="Calibri" charset="0"/>
+                      </a:endParaRPr>
+                    </a:p>
+                  </a:txBody>
+                  <a:tcPr marL="91440" marR="91440" marT="45720" marB="45720">
+                    <a:lnL w="2540" cap="flat" cmpd="sng" algn="ctr">
+                      <a:solidFill>
+                        <a:srgbClr val="EEEEEE"/>
+                      </a:solidFill>
+                      <a:prstDash val="solid"/>
+                      <a:round/>
+                      <a:headEnd type="none" w="med" len="med"/>
+                      <a:tailEnd type="none" w="med" len="med"/>
+                    </a:lnL>
+                    <a:lnR w="2540" cap="flat" cmpd="sng" algn="ctr">
+                      <a:solidFill>
+                        <a:srgbClr val="EEEEEE"/>
+                      </a:solidFill>
+                      <a:prstDash val="solid"/>
+                      <a:round/>
+                      <a:headEnd type="none" w="med" len="med"/>
+                      <a:tailEnd type="none" w="med" len="med"/>
+                    </a:lnR>
+                    <a:lnT w="2540" cap="flat" cmpd="sng" algn="ctr">
+                      <a:solidFill>
+                        <a:srgbClr val="EEEEEE"/>
+                      </a:solidFill>
+                      <a:prstDash val="solid"/>
+                      <a:round/>
+                      <a:headEnd type="none" w="med" len="med"/>
+                      <a:tailEnd type="none" w="med" len="med"/>
+                    </a:lnT>
+                    <a:lnB w="2540" cap="flat" cmpd="sng" algn="ctr">
+                      <a:solidFill>
+                        <a:srgbClr val="EEEEEE"/>
+                      </a:solidFill>
+                      <a:prstDash val="solid"/>
+                      <a:round/>
+                      <a:headEnd type="none" w="med" len="med"/>
+                      <a:tailEnd type="none" w="med" len="med"/>
+                    </a:lnB>
+                  </a:tcPr>
+                </a:tc>
+                <a:tc>
+                  <a:txBody>
+                    <a:bodyPr/>
+                    <a:lstStyle/>
+                    <a:p>
+                      <a:pPr algn="ctr" indent="0" marL="0">
+                        <a:buNone/>
+                      </a:pPr>
+                      <a:r>
+                        <a:rPr lang="en-US" sz="500" dirty="0">
+                          <a:solidFill>
+                            <a:srgbClr val="999999"/>
+                          </a:solidFill>
+                          <a:latin typeface="Calibri" pitchFamily="34" charset="0"/>
+                          <a:ea typeface="Calibri" pitchFamily="34" charset="-122"/>
+                          <a:cs typeface="Calibri" pitchFamily="34" charset="-120"/>
+                        </a:rPr>
+                        <a:t>0.47%</a:t>
+                      </a:r>
+                      <a:endParaRPr lang="en-US" sz="500" dirty="0">
+                        <a:latin typeface="Calibri" charset="0"/>
+                        <a:ea typeface="Calibri" charset="0"/>
+                        <a:cs typeface="Calibri" charset="0"/>
+                      </a:endParaRPr>
+                    </a:p>
+                  </a:txBody>
+                  <a:tcPr marL="91440" marR="91440" marT="45720" marB="45720">
+                    <a:lnL w="2540" cap="flat" cmpd="sng" algn="ctr">
+                      <a:solidFill>
+                        <a:srgbClr val="EEEEEE"/>
+                      </a:solidFill>
+                      <a:prstDash val="solid"/>
+                      <a:round/>
+                      <a:headEnd type="none" w="med" len="med"/>
+                      <a:tailEnd type="none" w="med" len="med"/>
+                    </a:lnL>
+                    <a:lnR w="2540" cap="flat" cmpd="sng" algn="ctr">
+                      <a:solidFill>
+                        <a:srgbClr val="EEEEEE"/>
+                      </a:solidFill>
+                      <a:prstDash val="solid"/>
+                      <a:round/>
+                      <a:headEnd type="none" w="med" len="med"/>
+                      <a:tailEnd type="none" w="med" len="med"/>
+                    </a:lnR>
+                    <a:lnT w="2540" cap="flat" cmpd="sng" algn="ctr">
+                      <a:solidFill>
+                        <a:srgbClr val="EEEEEE"/>
+                      </a:solidFill>
+                      <a:prstDash val="solid"/>
+                      <a:round/>
+                      <a:headEnd type="none" w="med" len="med"/>
+                      <a:tailEnd type="none" w="med" len="med"/>
+                    </a:lnT>
+                    <a:lnB w="2540" cap="flat" cmpd="sng" algn="ctr">
+                      <a:solidFill>
+                        <a:srgbClr val="EEEEEE"/>
+                      </a:solidFill>
+                      <a:prstDash val="solid"/>
+                      <a:round/>
+                      <a:headEnd type="none" w="med" len="med"/>
+                      <a:tailEnd type="none" w="med" len="med"/>
+                    </a:lnB>
+                  </a:tcPr>
+                </a:tc>
+                <a:tc>
+                  <a:txBody>
+                    <a:bodyPr/>
+                    <a:lstStyle/>
+                    <a:p>
+                      <a:pPr algn="ctr" indent="0" marL="0">
+                        <a:buNone/>
+                      </a:pPr>
+                      <a:r>
+                        <a:rPr lang="en-US" sz="500" dirty="0">
+                          <a:solidFill>
+                            <a:srgbClr val="999999"/>
+                          </a:solidFill>
+                          <a:latin typeface="Calibri" pitchFamily="34" charset="0"/>
+                          <a:ea typeface="Calibri" pitchFamily="34" charset="-122"/>
+                          <a:cs typeface="Calibri" pitchFamily="34" charset="-120"/>
+                        </a:rPr>
+                        <a:t>0.42%</a:t>
+                      </a:r>
+                      <a:endParaRPr lang="en-US" sz="500" dirty="0">
+                        <a:latin typeface="Calibri" charset="0"/>
+                        <a:ea typeface="Calibri" charset="0"/>
+                        <a:cs typeface="Calibri" charset="0"/>
+                      </a:endParaRPr>
+                    </a:p>
+                  </a:txBody>
+                  <a:tcPr marL="91440" marR="91440" marT="45720" marB="45720">
+                    <a:lnL w="2540" cap="flat" cmpd="sng" algn="ctr">
+                      <a:solidFill>
+                        <a:srgbClr val="EEEEEE"/>
+                      </a:solidFill>
+                      <a:prstDash val="solid"/>
+                      <a:round/>
+                      <a:headEnd type="none" w="med" len="med"/>
+                      <a:tailEnd type="none" w="med" len="med"/>
+                    </a:lnL>
+                    <a:lnR w="2540" cap="flat" cmpd="sng" algn="ctr">
+                      <a:solidFill>
+                        <a:srgbClr val="EEEEEE"/>
+                      </a:solidFill>
+                      <a:prstDash val="solid"/>
+                      <a:round/>
+                      <a:headEnd type="none" w="med" len="med"/>
+                      <a:tailEnd type="none" w="med" len="med"/>
+                    </a:lnR>
+                    <a:lnT w="2540" cap="flat" cmpd="sng" algn="ctr">
+                      <a:solidFill>
+                        <a:srgbClr val="EEEEEE"/>
+                      </a:solidFill>
+                      <a:prstDash val="solid"/>
+                      <a:round/>
+                      <a:headEnd type="none" w="med" len="med"/>
+                      <a:tailEnd type="none" w="med" len="med"/>
+                    </a:lnT>
+                    <a:lnB w="2540" cap="flat" cmpd="sng" algn="ctr">
+                      <a:solidFill>
+                        <a:srgbClr val="EEEEEE"/>
+                      </a:solidFill>
+                      <a:prstDash val="solid"/>
+                      <a:round/>
+                      <a:headEnd type="none" w="med" len="med"/>
+                      <a:tailEnd type="none" w="med" len="med"/>
+                    </a:lnB>
+                  </a:tcPr>
+                </a:tc>
+                <a:tc>
+                  <a:txBody>
+                    <a:bodyPr/>
+                    <a:lstStyle/>
+                    <a:p>
+                      <a:pPr algn="ctr" indent="0" marL="0">
+                        <a:buNone/>
+                      </a:pPr>
+                      <a:r>
+                        <a:rPr lang="en-US" sz="500" dirty="0">
+                          <a:solidFill>
+                            <a:srgbClr val="999999"/>
+                          </a:solidFill>
+                          <a:latin typeface="Calibri" pitchFamily="34" charset="0"/>
+                          <a:ea typeface="Calibri" pitchFamily="34" charset="-122"/>
+                          <a:cs typeface="Calibri" pitchFamily="34" charset="-120"/>
+                        </a:rPr>
+                        <a:t>0.37%</a:t>
+                      </a:r>
+                      <a:endParaRPr lang="en-US" sz="500" dirty="0">
+                        <a:latin typeface="Calibri" charset="0"/>
+                        <a:ea typeface="Calibri" charset="0"/>
+                        <a:cs typeface="Calibri" charset="0"/>
+                      </a:endParaRPr>
+                    </a:p>
+                  </a:txBody>
+                  <a:tcPr marL="91440" marR="91440" marT="45720" marB="45720">
+                    <a:lnL w="2540" cap="flat" cmpd="sng" algn="ctr">
+                      <a:solidFill>
+                        <a:srgbClr val="EEEEEE"/>
+                      </a:solidFill>
+                      <a:prstDash val="solid"/>
+                      <a:round/>
+                      <a:headEnd type="none" w="med" len="med"/>
+                      <a:tailEnd type="none" w="med" len="med"/>
+                    </a:lnL>
+                    <a:lnR w="2540" cap="flat" cmpd="sng" algn="ctr">
+                      <a:solidFill>
+                        <a:srgbClr val="EEEEEE"/>
+                      </a:solidFill>
+                      <a:prstDash val="solid"/>
+                      <a:round/>
+                      <a:headEnd type="none" w="med" len="med"/>
+                      <a:tailEnd type="none" w="med" len="med"/>
+                    </a:lnR>
+                    <a:lnT w="2540" cap="flat" cmpd="sng" algn="ctr">
+                      <a:solidFill>
+                        <a:srgbClr val="EEEEEE"/>
+                      </a:solidFill>
+                      <a:prstDash val="solid"/>
+                      <a:round/>
+                      <a:headEnd type="none" w="med" len="med"/>
+                      <a:tailEnd type="none" w="med" len="med"/>
+                    </a:lnT>
+                    <a:lnB w="2540" cap="flat" cmpd="sng" algn="ctr">
+                      <a:solidFill>
+                        <a:srgbClr val="EEEEEE"/>
+                      </a:solidFill>
+                      <a:prstDash val="solid"/>
+                      <a:round/>
+                      <a:headEnd type="none" w="med" len="med"/>
+                      <a:tailEnd type="none" w="med" len="med"/>
+                    </a:lnB>
+                  </a:tcPr>
+                </a:tc>
+                <a:tc>
+                  <a:txBody>
+                    <a:bodyPr/>
+                    <a:lstStyle/>
+                    <a:p>
+                      <a:pPr algn="ctr" indent="0" marL="0">
+                        <a:buNone/>
+                      </a:pPr>
+                      <a:r>
+                        <a:rPr lang="en-US" sz="500" dirty="0">
+                          <a:solidFill>
+                            <a:srgbClr val="999999"/>
+                          </a:solidFill>
+                          <a:latin typeface="Calibri" pitchFamily="34" charset="0"/>
+                          <a:ea typeface="Calibri" pitchFamily="34" charset="-122"/>
+                          <a:cs typeface="Calibri" pitchFamily="34" charset="-120"/>
+                        </a:rPr>
+                        <a:t>0.36%</a:t>
+                      </a:r>
+                      <a:endParaRPr lang="en-US" sz="500" dirty="0">
+                        <a:latin typeface="Calibri" charset="0"/>
+                        <a:ea typeface="Calibri" charset="0"/>
+                        <a:cs typeface="Calibri" charset="0"/>
+                      </a:endParaRPr>
+                    </a:p>
+                  </a:txBody>
+                  <a:tcPr marL="91440" marR="91440" marT="45720" marB="45720">
+                    <a:lnL w="2540" cap="flat" cmpd="sng" algn="ctr">
+                      <a:solidFill>
+                        <a:srgbClr val="EEEEEE"/>
+                      </a:solidFill>
+                      <a:prstDash val="solid"/>
+                      <a:round/>
+                      <a:headEnd type="none" w="med" len="med"/>
+                      <a:tailEnd type="none" w="med" len="med"/>
+                    </a:lnL>
+                    <a:lnR w="2540" cap="flat" cmpd="sng" algn="ctr">
+                      <a:solidFill>
+                        <a:srgbClr val="EEEEEE"/>
+                      </a:solidFill>
+                      <a:prstDash val="solid"/>
+                      <a:round/>
+                      <a:headEnd type="none" w="med" len="med"/>
+                      <a:tailEnd type="none" w="med" len="med"/>
+                    </a:lnR>
+                    <a:lnT w="2540" cap="flat" cmpd="sng" algn="ctr">
+                      <a:solidFill>
+                        <a:srgbClr val="EEEEEE"/>
+                      </a:solidFill>
+                      <a:prstDash val="solid"/>
+                      <a:round/>
+                      <a:headEnd type="none" w="med" len="med"/>
+                      <a:tailEnd type="none" w="med" len="med"/>
+                    </a:lnT>
+                    <a:lnB w="2540" cap="flat" cmpd="sng" algn="ctr">
+                      <a:solidFill>
+                        <a:srgbClr val="EEEEEE"/>
+                      </a:solidFill>
+                      <a:prstDash val="solid"/>
+                      <a:round/>
+                      <a:headEnd type="none" w="med" len="med"/>
+                      <a:tailEnd type="none" w="med" len="med"/>
+                    </a:lnB>
+                  </a:tcPr>
+                </a:tc>
+                <a:tc>
+                  <a:txBody>
+                    <a:bodyPr/>
+                    <a:lstStyle/>
+                    <a:p>
+                      <a:pPr algn="ctr" indent="0" marL="0">
+                        <a:buNone/>
+                      </a:pPr>
+                      <a:r>
+                        <a:rPr lang="en-US" sz="500" dirty="0">
+                          <a:solidFill>
+                            <a:srgbClr val="999999"/>
+                          </a:solidFill>
+                          <a:latin typeface="Calibri" pitchFamily="34" charset="0"/>
+                          <a:ea typeface="Calibri" pitchFamily="34" charset="-122"/>
+                          <a:cs typeface="Calibri" pitchFamily="34" charset="-120"/>
+                        </a:rPr>
+                        <a:t>0.36%</a:t>
+                      </a:r>
+                      <a:endParaRPr lang="en-US" sz="500" dirty="0">
+                        <a:latin typeface="Calibri" charset="0"/>
+                        <a:ea typeface="Calibri" charset="0"/>
+                        <a:cs typeface="Calibri" charset="0"/>
+                      </a:endParaRPr>
+                    </a:p>
+                  </a:txBody>
+                  <a:tcPr marL="91440" marR="91440" marT="45720" marB="45720">
+                    <a:lnL w="2540" cap="flat" cmpd="sng" algn="ctr">
+                      <a:solidFill>
+                        <a:srgbClr val="EEEEEE"/>
+                      </a:solidFill>
+                      <a:prstDash val="solid"/>
+                      <a:round/>
+                      <a:headEnd type="none" w="med" len="med"/>
+                      <a:tailEnd type="none" w="med" len="med"/>
+                    </a:lnL>
+                    <a:lnR w="2540" cap="flat" cmpd="sng" algn="ctr">
+                      <a:solidFill>
+                        <a:srgbClr val="EEEEEE"/>
+                      </a:solidFill>
+                      <a:prstDash val="solid"/>
+                      <a:round/>
+                      <a:headEnd type="none" w="med" len="med"/>
+                      <a:tailEnd type="none" w="med" len="med"/>
+                    </a:lnR>
+                    <a:lnT w="2540" cap="flat" cmpd="sng" algn="ctr">
+                      <a:solidFill>
+                        <a:srgbClr val="EEEEEE"/>
+                      </a:solidFill>
+                      <a:prstDash val="solid"/>
+                      <a:round/>
+                      <a:headEnd type="none" w="med" len="med"/>
+                      <a:tailEnd type="none" w="med" len="med"/>
+                    </a:lnT>
+                    <a:lnB w="2540" cap="flat" cmpd="sng" algn="ctr">
+                      <a:solidFill>
+                        <a:srgbClr val="EEEEEE"/>
+                      </a:solidFill>
+                      <a:prstDash val="solid"/>
+                      <a:round/>
+                      <a:headEnd type="none" w="med" len="med"/>
+                      <a:tailEnd type="none" w="med" len="med"/>
+                    </a:lnB>
+                  </a:tcPr>
+                </a:tc>
+                <a:tc>
+                  <a:txBody>
+                    <a:bodyPr/>
+                    <a:lstStyle/>
+                    <a:p>
+                      <a:pPr algn="ctr" indent="0" marL="0">
+                        <a:buNone/>
+                      </a:pPr>
+                      <a:r>
+                        <a:rPr lang="en-US" sz="500" dirty="0">
+                          <a:solidFill>
+                            <a:srgbClr val="999999"/>
+                          </a:solidFill>
+                          <a:latin typeface="Calibri" pitchFamily="34" charset="0"/>
+                          <a:ea typeface="Calibri" pitchFamily="34" charset="-122"/>
+                          <a:cs typeface="Calibri" pitchFamily="34" charset="-120"/>
+                        </a:rPr>
+                        <a:t>0.34%</a:t>
+                      </a:r>
+                      <a:endParaRPr lang="en-US" sz="500" dirty="0">
+                        <a:latin typeface="Calibri" charset="0"/>
+                        <a:ea typeface="Calibri" charset="0"/>
+                        <a:cs typeface="Calibri" charset="0"/>
+                      </a:endParaRPr>
+                    </a:p>
+                  </a:txBody>
+                  <a:tcPr marL="91440" marR="91440" marT="45720" marB="45720">
+                    <a:lnL w="2540" cap="flat" cmpd="sng" algn="ctr">
+                      <a:solidFill>
+                        <a:srgbClr val="EEEEEE"/>
+                      </a:solidFill>
+                      <a:prstDash val="solid"/>
+                      <a:round/>
+                      <a:headEnd type="none" w="med" len="med"/>
+                      <a:tailEnd type="none" w="med" len="med"/>
+                    </a:lnL>
+                    <a:lnR w="2540" cap="flat" cmpd="sng" algn="ctr">
+                      <a:solidFill>
+                        <a:srgbClr val="EEEEEE"/>
+                      </a:solidFill>
+                      <a:prstDash val="solid"/>
+                      <a:round/>
+                      <a:headEnd type="none" w="med" len="med"/>
+                      <a:tailEnd type="none" w="med" len="med"/>
+                    </a:lnR>
+                    <a:lnT w="2540" cap="flat" cmpd="sng" algn="ctr">
+                      <a:solidFill>
+                        <a:srgbClr val="EEEEEE"/>
+                      </a:solidFill>
+                      <a:prstDash val="solid"/>
+                      <a:round/>
+                      <a:headEnd type="none" w="med" len="med"/>
+                      <a:tailEnd type="none" w="med" len="med"/>
+                    </a:lnT>
+                    <a:lnB w="2540" cap="flat" cmpd="sng" algn="ctr">
+                      <a:solidFill>
+                        <a:srgbClr val="EEEEEE"/>
+                      </a:solidFill>
+                      <a:prstDash val="solid"/>
+                      <a:round/>
+                      <a:headEnd type="none" w="med" len="med"/>
+                      <a:tailEnd type="none" w="med" len="med"/>
+                    </a:lnB>
+                  </a:tcPr>
+                </a:tc>
+                <a:tc>
+                  <a:txBody>
+                    <a:bodyPr/>
+                    <a:lstStyle/>
+                    <a:p>
+                      <a:pPr algn="ctr" indent="0" marL="0">
+                        <a:buNone/>
+                      </a:pPr>
+                      <a:r>
+                        <a:rPr lang="en-US" sz="500" dirty="0">
+                          <a:solidFill>
+                            <a:srgbClr val="999999"/>
+                          </a:solidFill>
+                          <a:latin typeface="Calibri" pitchFamily="34" charset="0"/>
+                          <a:ea typeface="Calibri" pitchFamily="34" charset="-122"/>
+                          <a:cs typeface="Calibri" pitchFamily="34" charset="-120"/>
+                        </a:rPr>
+                        <a:t>0.34%</a:t>
+                      </a:r>
+                      <a:endParaRPr lang="en-US" sz="500" dirty="0">
+                        <a:latin typeface="Calibri" charset="0"/>
+                        <a:ea typeface="Calibri" charset="0"/>
+                        <a:cs typeface="Calibri" charset="0"/>
+                      </a:endParaRPr>
+                    </a:p>
+                  </a:txBody>
+                  <a:tcPr marL="91440" marR="91440" marT="45720" marB="45720">
+                    <a:lnL w="2540" cap="flat" cmpd="sng" algn="ctr">
+                      <a:solidFill>
+                        <a:srgbClr val="EEEEEE"/>
+                      </a:solidFill>
+                      <a:prstDash val="solid"/>
+                      <a:round/>
+                      <a:headEnd type="none" w="med" len="med"/>
+                      <a:tailEnd type="none" w="med" len="med"/>
+                    </a:lnL>
+                    <a:lnR w="2540" cap="flat" cmpd="sng" algn="ctr">
+                      <a:solidFill>
+                        <a:srgbClr val="EEEEEE"/>
+                      </a:solidFill>
+                      <a:prstDash val="solid"/>
+                      <a:round/>
+                      <a:headEnd type="none" w="med" len="med"/>
+                      <a:tailEnd type="none" w="med" len="med"/>
+                    </a:lnR>
+                    <a:lnT w="2540" cap="flat" cmpd="sng" algn="ctr">
+                      <a:solidFill>
+                        <a:srgbClr val="EEEEEE"/>
+                      </a:solidFill>
+                      <a:prstDash val="solid"/>
+                      <a:round/>
+                      <a:headEnd type="none" w="med" len="med"/>
+                      <a:tailEnd type="none" w="med" len="med"/>
+                    </a:lnT>
+                    <a:lnB w="2540" cap="flat" cmpd="sng" algn="ctr">
+                      <a:solidFill>
+                        <a:srgbClr val="EEEEEE"/>
+                      </a:solidFill>
+                      <a:prstDash val="solid"/>
+                      <a:round/>
+                      <a:headEnd type="none" w="med" len="med"/>
+                      <a:tailEnd type="none" w="med" len="med"/>
+                    </a:lnB>
+                  </a:tcPr>
+                </a:tc>
+                <a:tc>
+                  <a:txBody>
+                    <a:bodyPr/>
+                    <a:lstStyle/>
+                    <a:p>
+                      <a:pPr algn="ctr" indent="0" marL="0">
+                        <a:buNone/>
+                      </a:pPr>
+                      <a:r>
+                        <a:rPr lang="en-US" sz="500" dirty="0">
+                          <a:solidFill>
+                            <a:srgbClr val="999999"/>
+                          </a:solidFill>
+                          <a:latin typeface="Calibri" pitchFamily="34" charset="0"/>
+                          <a:ea typeface="Calibri" pitchFamily="34" charset="-122"/>
+                          <a:cs typeface="Calibri" pitchFamily="34" charset="-120"/>
+                        </a:rPr>
+                        <a:t>0.32%</a:t>
+                      </a:r>
+                      <a:endParaRPr lang="en-US" sz="500" dirty="0">
+                        <a:latin typeface="Calibri" charset="0"/>
+                        <a:ea typeface="Calibri" charset="0"/>
+                        <a:cs typeface="Calibri" charset="0"/>
+                      </a:endParaRPr>
+                    </a:p>
+                  </a:txBody>
+                  <a:tcPr marL="91440" marR="91440" marT="45720" marB="45720">
+                    <a:lnL w="2540" cap="flat" cmpd="sng" algn="ctr">
+                      <a:solidFill>
+                        <a:srgbClr val="EEEEEE"/>
+                      </a:solidFill>
+                      <a:prstDash val="solid"/>
+                      <a:round/>
+                      <a:headEnd type="none" w="med" len="med"/>
+                      <a:tailEnd type="none" w="med" len="med"/>
+                    </a:lnL>
+                    <a:lnR w="2540" cap="flat" cmpd="sng" algn="ctr">
+                      <a:solidFill>
+                        <a:srgbClr val="EEEEEE"/>
+                      </a:solidFill>
+                      <a:prstDash val="solid"/>
+                      <a:round/>
+                      <a:headEnd type="none" w="med" len="med"/>
+                      <a:tailEnd type="none" w="med" len="med"/>
+                    </a:lnR>
+                    <a:lnT w="2540" cap="flat" cmpd="sng" algn="ctr">
+                      <a:solidFill>
+                        <a:srgbClr val="EEEEEE"/>
+                      </a:solidFill>
+                      <a:prstDash val="solid"/>
+                      <a:round/>
+                      <a:headEnd type="none" w="med" len="med"/>
+                      <a:tailEnd type="none" w="med" len="med"/>
+                    </a:lnT>
+                    <a:lnB w="2540" cap="flat" cmpd="sng" algn="ctr">
+                      <a:solidFill>
+                        <a:srgbClr val="EEEEEE"/>
+                      </a:solidFill>
+                      <a:prstDash val="solid"/>
+                      <a:round/>
+                      <a:headEnd type="none" w="med" len="med"/>
+                      <a:tailEnd type="none" w="med" len="med"/>
+                    </a:lnB>
+                  </a:tcPr>
+                </a:tc>
+                <a:tc>
+                  <a:txBody>
+                    <a:bodyPr/>
+                    <a:lstStyle/>
+                    <a:p>
+                      <a:pPr algn="ctr" indent="0" marL="0">
+                        <a:buNone/>
+                      </a:pPr>
+                      <a:r>
+                        <a:rPr lang="en-US" sz="500" dirty="0">
+                          <a:solidFill>
+                            <a:srgbClr val="999999"/>
+                          </a:solidFill>
+                          <a:latin typeface="Calibri" pitchFamily="34" charset="0"/>
+                          <a:ea typeface="Calibri" pitchFamily="34" charset="-122"/>
+                          <a:cs typeface="Calibri" pitchFamily="34" charset="-120"/>
+                        </a:rPr>
+                        <a:t>0.32%</a:t>
+                      </a:r>
+                      <a:endParaRPr lang="en-US" sz="500" dirty="0">
+                        <a:latin typeface="Calibri" charset="0"/>
+                        <a:ea typeface="Calibri" charset="0"/>
+                        <a:cs typeface="Calibri" charset="0"/>
+                      </a:endParaRPr>
+                    </a:p>
+                  </a:txBody>
+                  <a:tcPr marL="91440" marR="91440" marT="45720" marB="45720">
+                    <a:lnL w="2540" cap="flat" cmpd="sng" algn="ctr">
+                      <a:solidFill>
+                        <a:srgbClr val="EEEEEE"/>
+                      </a:solidFill>
+                      <a:prstDash val="solid"/>
+                      <a:round/>
+                      <a:headEnd type="none" w="med" len="med"/>
+                      <a:tailEnd type="none" w="med" len="med"/>
+                    </a:lnL>
+                    <a:lnR w="2540" cap="flat" cmpd="sng" algn="ctr">
+                      <a:solidFill>
+                        <a:srgbClr val="EEEEEE"/>
+                      </a:solidFill>
+                      <a:prstDash val="solid"/>
+                      <a:round/>
+                      <a:headEnd type="none" w="med" len="med"/>
+                      <a:tailEnd type="none" w="med" len="med"/>
+                    </a:lnR>
+                    <a:lnT w="2540" cap="flat" cmpd="sng" algn="ctr">
+                      <a:solidFill>
+                        <a:srgbClr val="EEEEEE"/>
+                      </a:solidFill>
+                      <a:prstDash val="solid"/>
+                      <a:round/>
+                      <a:headEnd type="none" w="med" len="med"/>
+                      <a:tailEnd type="none" w="med" len="med"/>
+                    </a:lnT>
+                    <a:lnB w="2540" cap="flat" cmpd="sng" algn="ctr">
+                      <a:solidFill>
+                        <a:srgbClr val="EEEEEE"/>
+                      </a:solidFill>
+                      <a:prstDash val="solid"/>
+                      <a:round/>
+                      <a:headEnd type="none" w="med" len="med"/>
+                      <a:tailEnd type="none" w="med" len="med"/>
+                    </a:lnB>
+                  </a:tcPr>
+                </a:tc>
+                <a:tc>
+                  <a:txBody>
+                    <a:bodyPr/>
+                    <a:lstStyle/>
+                    <a:p>
+                      <a:pPr algn="ctr" indent="0" marL="0">
+                        <a:buNone/>
+                      </a:pPr>
+                      <a:r>
+                        <a:rPr lang="en-US" sz="500" b="1" dirty="0">
+                          <a:solidFill>
+                            <a:srgbClr val="999999"/>
+                          </a:solidFill>
+                          <a:latin typeface="Calibri" pitchFamily="34" charset="0"/>
+                          <a:ea typeface="Calibri" pitchFamily="34" charset="-122"/>
+                          <a:cs typeface="Calibri" pitchFamily="34" charset="-120"/>
+                        </a:rPr>
+                        <a:t>4.95%</a:t>
+                      </a:r>
+                      <a:endParaRPr lang="en-US" sz="500" dirty="0">
+                        <a:latin typeface="Calibri" charset="0"/>
+                        <a:ea typeface="Calibri" charset="0"/>
+                        <a:cs typeface="Calibri" charset="0"/>
+                      </a:endParaRPr>
+                    </a:p>
+                  </a:txBody>
+                  <a:tcPr marL="91440" marR="91440" marT="45720" marB="45720">
+                    <a:lnL w="2540" cap="flat" cmpd="sng" algn="ctr">
+                      <a:solidFill>
+                        <a:srgbClr val="EEEEEE"/>
+                      </a:solidFill>
+                      <a:prstDash val="solid"/>
+                      <a:round/>
+                      <a:headEnd type="none" w="med" len="med"/>
+                      <a:tailEnd type="none" w="med" len="med"/>
+                    </a:lnL>
+                    <a:lnR w="2540" cap="flat" cmpd="sng" algn="ctr">
+                      <a:solidFill>
+                        <a:srgbClr val="EEEEEE"/>
+                      </a:solidFill>
+                      <a:prstDash val="solid"/>
+                      <a:round/>
+                      <a:headEnd type="none" w="med" len="med"/>
+                      <a:tailEnd type="none" w="med" len="med"/>
+                    </a:lnR>
+                    <a:lnT w="2540" cap="flat" cmpd="sng" algn="ctr">
+                      <a:solidFill>
+                        <a:srgbClr val="EEEEEE"/>
+                      </a:solidFill>
+                      <a:prstDash val="solid"/>
+                      <a:round/>
+                      <a:headEnd type="none" w="med" len="med"/>
+                      <a:tailEnd type="none" w="med" len="med"/>
+                    </a:lnT>
+                    <a:lnB w="2540" cap="flat" cmpd="sng" algn="ctr">
+                      <a:solidFill>
+                        <a:srgbClr val="EEEEEE"/>
+                      </a:solidFill>
+                      <a:prstDash val="solid"/>
+                      <a:round/>
+                      <a:headEnd type="none" w="med" len="med"/>
+                      <a:tailEnd type="none" w="med" len="med"/>
+                    </a:lnB>
+                  </a:tcPr>
+                </a:tc>
+              </a:tr>
+              <a:tr h="123444">
+                <a:tc>
+                  <a:txBody>
+                    <a:bodyPr/>
+                    <a:lstStyle/>
+                    <a:p>
+                      <a:pPr algn="l" indent="0" marL="0">
+                        <a:buNone/>
+                      </a:pPr>
+                      <a:endParaRPr lang="en-US" sz="500" dirty="0">
+                        <a:latin typeface="Calibri" charset="0"/>
+                        <a:ea typeface="Calibri" charset="0"/>
+                        <a:cs typeface="Calibri" charset="0"/>
+                      </a:endParaRPr>
+                    </a:p>
+                  </a:txBody>
+                  <a:tcPr marL="91440" marR="91440" marT="45720" marB="45720">
+                    <a:lnL w="2540" cap="flat" cmpd="sng" algn="ctr">
+                      <a:solidFill>
+                        <a:srgbClr val="EEEEEE"/>
+                      </a:solidFill>
+                      <a:prstDash val="solid"/>
+                      <a:round/>
+                      <a:headEnd type="none" w="med" len="med"/>
+                      <a:tailEnd type="none" w="med" len="med"/>
+                    </a:lnL>
+                    <a:lnR w="2540" cap="flat" cmpd="sng" algn="ctr">
+                      <a:solidFill>
+                        <a:srgbClr val="EEEEEE"/>
+                      </a:solidFill>
+                      <a:prstDash val="solid"/>
+                      <a:round/>
+                      <a:headEnd type="none" w="med" len="med"/>
+                      <a:tailEnd type="none" w="med" len="med"/>
+                    </a:lnR>
+                    <a:lnT w="2540" cap="flat" cmpd="sng" algn="ctr">
+                      <a:solidFill>
+                        <a:srgbClr val="EEEEEE"/>
+                      </a:solidFill>
+                      <a:prstDash val="solid"/>
+                      <a:round/>
+                      <a:headEnd type="none" w="med" len="med"/>
+                      <a:tailEnd type="none" w="med" len="med"/>
+                    </a:lnT>
+                    <a:lnB w="2540" cap="flat" cmpd="sng" algn="ctr">
+                      <a:solidFill>
+                        <a:srgbClr val="EEEEEE"/>
+                      </a:solidFill>
+                      <a:prstDash val="solid"/>
+                      <a:round/>
+                      <a:headEnd type="none" w="med" len="med"/>
+                      <a:tailEnd type="none" w="med" len="med"/>
+                    </a:lnB>
+                  </a:tcPr>
+                </a:tc>
+                <a:tc>
+                  <a:txBody>
+                    <a:bodyPr/>
+                    <a:lstStyle/>
+                    <a:p>
+                      <a:pPr algn="l" indent="0" marL="0">
+                        <a:buNone/>
+                      </a:pPr>
+                      <a:r>
+                        <a:rPr lang="en-US" sz="500" dirty="0">
+                          <a:solidFill>
+                            <a:srgbClr val="000000"/>
+                          </a:solidFill>
+                          <a:latin typeface="Calibri" pitchFamily="34" charset="0"/>
+                          <a:ea typeface="Calibri" pitchFamily="34" charset="-122"/>
+                          <a:cs typeface="Calibri" pitchFamily="34" charset="-120"/>
+                        </a:rPr>
+                        <a:t>FIP LIQUIDEZ Plus</a:t>
+                      </a:r>
+                      <a:endParaRPr lang="en-US" sz="500" dirty="0">
+                        <a:latin typeface="Calibri" charset="0"/>
+                        <a:ea typeface="Calibri" charset="0"/>
+                        <a:cs typeface="Calibri" charset="0"/>
+                      </a:endParaRPr>
+                    </a:p>
+                  </a:txBody>
+                  <a:tcPr marL="91440" marR="91440" marT="45720" marB="45720">
+                    <a:lnL w="2540" cap="flat" cmpd="sng" algn="ctr">
+                      <a:solidFill>
+                        <a:srgbClr val="EEEEEE"/>
+                      </a:solidFill>
+                      <a:prstDash val="solid"/>
+                      <a:round/>
+                      <a:headEnd type="none" w="med" len="med"/>
+                      <a:tailEnd type="none" w="med" len="med"/>
+                    </a:lnL>
+                    <a:lnR w="2540" cap="flat" cmpd="sng" algn="ctr">
+                      <a:solidFill>
+                        <a:srgbClr val="EEEEEE"/>
+                      </a:solidFill>
+                      <a:prstDash val="solid"/>
+                      <a:round/>
+                      <a:headEnd type="none" w="med" len="med"/>
+                      <a:tailEnd type="none" w="med" len="med"/>
+                    </a:lnR>
+                    <a:lnT w="2540" cap="flat" cmpd="sng" algn="ctr">
+                      <a:solidFill>
+                        <a:srgbClr val="EEEEEE"/>
+                      </a:solidFill>
+                      <a:prstDash val="solid"/>
+                      <a:round/>
+                      <a:headEnd type="none" w="med" len="med"/>
+                      <a:tailEnd type="none" w="med" len="med"/>
+                    </a:lnT>
+                    <a:lnB w="2540" cap="flat" cmpd="sng" algn="ctr">
+                      <a:solidFill>
+                        <a:srgbClr val="EEEEEE"/>
+                      </a:solidFill>
+                      <a:prstDash val="solid"/>
+                      <a:round/>
+                      <a:headEnd type="none" w="med" len="med"/>
+                      <a:tailEnd type="none" w="med" len="med"/>
+                    </a:lnB>
+                  </a:tcPr>
+                </a:tc>
+                <a:tc>
+                  <a:txBody>
+                    <a:bodyPr/>
+                    <a:lstStyle/>
+                    <a:p>
+                      <a:pPr algn="ctr" indent="0" marL="0">
+                        <a:buNone/>
+                      </a:pPr>
+                      <a:r>
+                        <a:rPr lang="en-US" sz="500" dirty="0">
+                          <a:solidFill>
+                            <a:srgbClr val="000000"/>
+                          </a:solidFill>
+                          <a:latin typeface="Calibri" pitchFamily="34" charset="0"/>
+                          <a:ea typeface="Calibri" pitchFamily="34" charset="-122"/>
+                          <a:cs typeface="Calibri" pitchFamily="34" charset="-120"/>
+                        </a:rPr>
+                        <a:t>0.87%</a:t>
+                      </a:r>
+                      <a:endParaRPr lang="en-US" sz="500" dirty="0">
+                        <a:latin typeface="Calibri" charset="0"/>
+                        <a:ea typeface="Calibri" charset="0"/>
+                        <a:cs typeface="Calibri" charset="0"/>
+                      </a:endParaRPr>
+                    </a:p>
+                  </a:txBody>
+                  <a:tcPr marL="91440" marR="91440" marT="45720" marB="45720">
+                    <a:lnL w="2540" cap="flat" cmpd="sng" algn="ctr">
+                      <a:solidFill>
+                        <a:srgbClr val="EEEEEE"/>
+                      </a:solidFill>
+                      <a:prstDash val="solid"/>
+                      <a:round/>
+                      <a:headEnd type="none" w="med" len="med"/>
+                      <a:tailEnd type="none" w="med" len="med"/>
+                    </a:lnL>
+                    <a:lnR w="2540" cap="flat" cmpd="sng" algn="ctr">
+                      <a:solidFill>
+                        <a:srgbClr val="EEEEEE"/>
+                      </a:solidFill>
+                      <a:prstDash val="solid"/>
+                      <a:round/>
+                      <a:headEnd type="none" w="med" len="med"/>
+                      <a:tailEnd type="none" w="med" len="med"/>
+                    </a:lnR>
+                    <a:lnT w="2540" cap="flat" cmpd="sng" algn="ctr">
+                      <a:solidFill>
+                        <a:srgbClr val="EEEEEE"/>
+                      </a:solidFill>
+                      <a:prstDash val="solid"/>
+                      <a:round/>
+                      <a:headEnd type="none" w="med" len="med"/>
+                      <a:tailEnd type="none" w="med" len="med"/>
+                    </a:lnT>
+                    <a:lnB w="2540" cap="flat" cmpd="sng" algn="ctr">
+                      <a:solidFill>
+                        <a:srgbClr val="EEEEEE"/>
+                      </a:solidFill>
+                      <a:prstDash val="solid"/>
+                      <a:round/>
+                      <a:headEnd type="none" w="med" len="med"/>
+                      <a:tailEnd type="none" w="med" len="med"/>
+                    </a:lnB>
+                  </a:tcPr>
+                </a:tc>
+                <a:tc>
+                  <a:txBody>
+                    <a:bodyPr/>
+                    <a:lstStyle/>
+                    <a:p>
+                      <a:pPr algn="ctr" indent="0" marL="0">
+                        <a:buNone/>
+                      </a:pPr>
+                      <a:r>
+                        <a:rPr lang="en-US" sz="500" dirty="0">
+                          <a:solidFill>
+                            <a:srgbClr val="000000"/>
+                          </a:solidFill>
+                          <a:latin typeface="Calibri" pitchFamily="34" charset="0"/>
+                          <a:ea typeface="Calibri" pitchFamily="34" charset="-122"/>
+                          <a:cs typeface="Calibri" pitchFamily="34" charset="-120"/>
+                        </a:rPr>
+                        <a:t>0.68%</a:t>
+                      </a:r>
+                      <a:endParaRPr lang="en-US" sz="500" dirty="0">
+                        <a:latin typeface="Calibri" charset="0"/>
+                        <a:ea typeface="Calibri" charset="0"/>
+                        <a:cs typeface="Calibri" charset="0"/>
+                      </a:endParaRPr>
+                    </a:p>
+                  </a:txBody>
+                  <a:tcPr marL="91440" marR="91440" marT="45720" marB="45720">
+                    <a:lnL w="2540" cap="flat" cmpd="sng" algn="ctr">
+                      <a:solidFill>
+                        <a:srgbClr val="EEEEEE"/>
+                      </a:solidFill>
+                      <a:prstDash val="solid"/>
+                      <a:round/>
+                      <a:headEnd type="none" w="med" len="med"/>
+                      <a:tailEnd type="none" w="med" len="med"/>
+                    </a:lnL>
+                    <a:lnR w="2540" cap="flat" cmpd="sng" algn="ctr">
+                      <a:solidFill>
+                        <a:srgbClr val="EEEEEE"/>
+                      </a:solidFill>
+                      <a:prstDash val="solid"/>
+                      <a:round/>
+                      <a:headEnd type="none" w="med" len="med"/>
+                      <a:tailEnd type="none" w="med" len="med"/>
+                    </a:lnR>
+                    <a:lnT w="2540" cap="flat" cmpd="sng" algn="ctr">
+                      <a:solidFill>
+                        <a:srgbClr val="EEEEEE"/>
+                      </a:solidFill>
+                      <a:prstDash val="solid"/>
+                      <a:round/>
+                      <a:headEnd type="none" w="med" len="med"/>
+                      <a:tailEnd type="none" w="med" len="med"/>
+                    </a:lnT>
+                    <a:lnB w="2540" cap="flat" cmpd="sng" algn="ctr">
+                      <a:solidFill>
+                        <a:srgbClr val="EEEEEE"/>
+                      </a:solidFill>
+                      <a:prstDash val="solid"/>
+                      <a:round/>
+                      <a:headEnd type="none" w="med" len="med"/>
+                      <a:tailEnd type="none" w="med" len="med"/>
+                    </a:lnB>
+                  </a:tcPr>
+                </a:tc>
+                <a:tc>
+                  <a:txBody>
+                    <a:bodyPr/>
+                    <a:lstStyle/>
+                    <a:p>
+                      <a:pPr algn="ctr" indent="0" marL="0">
+                        <a:buNone/>
+                      </a:pPr>
+                      <a:r>
+                        <a:rPr lang="en-US" sz="500" dirty="0">
+                          <a:solidFill>
+                            <a:srgbClr val="000000"/>
+                          </a:solidFill>
+                          <a:latin typeface="Calibri" pitchFamily="34" charset="0"/>
+                          <a:ea typeface="Calibri" pitchFamily="34" charset="-122"/>
+                          <a:cs typeface="Calibri" pitchFamily="34" charset="-120"/>
+                        </a:rPr>
+                        <a:t>0.63%</a:t>
+                      </a:r>
+                      <a:endParaRPr lang="en-US" sz="500" dirty="0">
+                        <a:latin typeface="Calibri" charset="0"/>
+                        <a:ea typeface="Calibri" charset="0"/>
+                        <a:cs typeface="Calibri" charset="0"/>
+                      </a:endParaRPr>
+                    </a:p>
+                  </a:txBody>
+                  <a:tcPr marL="91440" marR="91440" marT="45720" marB="45720">
+                    <a:lnL w="2540" cap="flat" cmpd="sng" algn="ctr">
+                      <a:solidFill>
+                        <a:srgbClr val="EEEEEE"/>
+                      </a:solidFill>
+                      <a:prstDash val="solid"/>
+                      <a:round/>
+                      <a:headEnd type="none" w="med" len="med"/>
+                      <a:tailEnd type="none" w="med" len="med"/>
+                    </a:lnL>
+                    <a:lnR w="2540" cap="flat" cmpd="sng" algn="ctr">
+                      <a:solidFill>
+                        <a:srgbClr val="EEEEEE"/>
+                      </a:solidFill>
+                      <a:prstDash val="solid"/>
+                      <a:round/>
+                      <a:headEnd type="none" w="med" len="med"/>
+                      <a:tailEnd type="none" w="med" len="med"/>
+                    </a:lnR>
+                    <a:lnT w="2540" cap="flat" cmpd="sng" algn="ctr">
+                      <a:solidFill>
+                        <a:srgbClr val="EEEEEE"/>
+                      </a:solidFill>
+                      <a:prstDash val="solid"/>
+                      <a:round/>
+                      <a:headEnd type="none" w="med" len="med"/>
+                      <a:tailEnd type="none" w="med" len="med"/>
+                    </a:lnT>
+                    <a:lnB w="2540" cap="flat" cmpd="sng" algn="ctr">
+                      <a:solidFill>
+                        <a:srgbClr val="EEEEEE"/>
+                      </a:solidFill>
+                      <a:prstDash val="solid"/>
+                      <a:round/>
+                      <a:headEnd type="none" w="med" len="med"/>
+                      <a:tailEnd type="none" w="med" len="med"/>
+                    </a:lnB>
+                  </a:tcPr>
+                </a:tc>
+                <a:tc>
+                  <a:txBody>
+                    <a:bodyPr/>
+                    <a:lstStyle/>
+                    <a:p>
+                      <a:pPr algn="ctr" indent="0" marL="0">
+                        <a:buNone/>
+                      </a:pPr>
+                      <a:r>
+                        <a:rPr lang="en-US" sz="500" dirty="0">
+                          <a:solidFill>
+                            <a:srgbClr val="000000"/>
+                          </a:solidFill>
+                          <a:latin typeface="Calibri" pitchFamily="34" charset="0"/>
+                          <a:ea typeface="Calibri" pitchFamily="34" charset="-122"/>
+                          <a:cs typeface="Calibri" pitchFamily="34" charset="-120"/>
+                        </a:rPr>
+                        <a:t>0.67%</a:t>
+                      </a:r>
+                      <a:endParaRPr lang="en-US" sz="500" dirty="0">
+                        <a:latin typeface="Calibri" charset="0"/>
+                        <a:ea typeface="Calibri" charset="0"/>
+                        <a:cs typeface="Calibri" charset="0"/>
+                      </a:endParaRPr>
+                    </a:p>
+                  </a:txBody>
+                  <a:tcPr marL="91440" marR="91440" marT="45720" marB="45720">
+                    <a:lnL w="2540" cap="flat" cmpd="sng" algn="ctr">
+                      <a:solidFill>
+                        <a:srgbClr val="EEEEEE"/>
+                      </a:solidFill>
+                      <a:prstDash val="solid"/>
+                      <a:round/>
+                      <a:headEnd type="none" w="med" len="med"/>
+                      <a:tailEnd type="none" w="med" len="med"/>
+                    </a:lnL>
+                    <a:lnR w="2540" cap="flat" cmpd="sng" algn="ctr">
+                      <a:solidFill>
+                        <a:srgbClr val="EEEEEE"/>
+                      </a:solidFill>
+                      <a:prstDash val="solid"/>
+                      <a:round/>
+                      <a:headEnd type="none" w="med" len="med"/>
+                      <a:tailEnd type="none" w="med" len="med"/>
+                    </a:lnR>
+                    <a:lnT w="2540" cap="flat" cmpd="sng" algn="ctr">
+                      <a:solidFill>
+                        <a:srgbClr val="EEEEEE"/>
+                      </a:solidFill>
+                      <a:prstDash val="solid"/>
+                      <a:round/>
+                      <a:headEnd type="none" w="med" len="med"/>
+                      <a:tailEnd type="none" w="med" len="med"/>
+                    </a:lnT>
+                    <a:lnB w="2540" cap="flat" cmpd="sng" algn="ctr">
+                      <a:solidFill>
+                        <a:srgbClr val="EEEEEE"/>
+                      </a:solidFill>
+                      <a:prstDash val="solid"/>
+                      <a:round/>
+                      <a:headEnd type="none" w="med" len="med"/>
+                      <a:tailEnd type="none" w="med" len="med"/>
+                    </a:lnB>
+                  </a:tcPr>
+                </a:tc>
+                <a:tc>
+                  <a:txBody>
+                    <a:bodyPr/>
+                    <a:lstStyle/>
+                    <a:p>
+                      <a:pPr algn="ctr" indent="0" marL="0">
+                        <a:buNone/>
+                      </a:pPr>
+                      <a:r>
+                        <a:rPr lang="en-US" sz="500" dirty="0">
+                          <a:solidFill>
+                            <a:srgbClr val="000000"/>
+                          </a:solidFill>
+                          <a:latin typeface="Calibri" pitchFamily="34" charset="0"/>
+                          <a:ea typeface="Calibri" pitchFamily="34" charset="-122"/>
+                          <a:cs typeface="Calibri" pitchFamily="34" charset="-120"/>
+                        </a:rPr>
+                        <a:t>0.65%</a:t>
+                      </a:r>
+                      <a:endParaRPr lang="en-US" sz="500" dirty="0">
+                        <a:latin typeface="Calibri" charset="0"/>
+                        <a:ea typeface="Calibri" charset="0"/>
+                        <a:cs typeface="Calibri" charset="0"/>
+                      </a:endParaRPr>
+                    </a:p>
+                  </a:txBody>
+                  <a:tcPr marL="91440" marR="91440" marT="45720" marB="45720">
+                    <a:lnL w="2540" cap="flat" cmpd="sng" algn="ctr">
+                      <a:solidFill>
+                        <a:srgbClr val="EEEEEE"/>
+                      </a:solidFill>
+                      <a:prstDash val="solid"/>
+                      <a:round/>
+                      <a:headEnd type="none" w="med" len="med"/>
+                      <a:tailEnd type="none" w="med" len="med"/>
+                    </a:lnL>
+                    <a:lnR w="2540" cap="flat" cmpd="sng" algn="ctr">
+                      <a:solidFill>
+                        <a:srgbClr val="EEEEEE"/>
+                      </a:solidFill>
+                      <a:prstDash val="solid"/>
+                      <a:round/>
+                      <a:headEnd type="none" w="med" len="med"/>
+                      <a:tailEnd type="none" w="med" len="med"/>
+                    </a:lnR>
+                    <a:lnT w="2540" cap="flat" cmpd="sng" algn="ctr">
+                      <a:solidFill>
+                        <a:srgbClr val="EEEEEE"/>
+                      </a:solidFill>
+                      <a:prstDash val="solid"/>
+                      <a:round/>
+                      <a:headEnd type="none" w="med" len="med"/>
+                      <a:tailEnd type="none" w="med" len="med"/>
+                    </a:lnT>
+                    <a:lnB w="2540" cap="flat" cmpd="sng" algn="ctr">
+                      <a:solidFill>
+                        <a:srgbClr val="EEEEEE"/>
+                      </a:solidFill>
+                      <a:prstDash val="solid"/>
+                      <a:round/>
+                      <a:headEnd type="none" w="med" len="med"/>
+                      <a:tailEnd type="none" w="med" len="med"/>
+                    </a:lnB>
+                  </a:tcPr>
+                </a:tc>
+                <a:tc>
+                  <a:txBody>
+                    <a:bodyPr/>
+                    <a:lstStyle/>
+                    <a:p>
+                      <a:pPr algn="ctr" indent="0" marL="0">
+                        <a:buNone/>
+                      </a:pPr>
+                      <a:r>
+                        <a:rPr lang="en-US" sz="500" dirty="0">
+                          <a:solidFill>
+                            <a:srgbClr val="000000"/>
+                          </a:solidFill>
+                          <a:latin typeface="Calibri" pitchFamily="34" charset="0"/>
+                          <a:ea typeface="Calibri" pitchFamily="34" charset="-122"/>
+                          <a:cs typeface="Calibri" pitchFamily="34" charset="-120"/>
+                        </a:rPr>
+                        <a:t>0.59%</a:t>
+                      </a:r>
+                      <a:endParaRPr lang="en-US" sz="500" dirty="0">
+                        <a:latin typeface="Calibri" charset="0"/>
+                        <a:ea typeface="Calibri" charset="0"/>
+                        <a:cs typeface="Calibri" charset="0"/>
+                      </a:endParaRPr>
+                    </a:p>
+                  </a:txBody>
+                  <a:tcPr marL="91440" marR="91440" marT="45720" marB="45720">
+                    <a:lnL w="2540" cap="flat" cmpd="sng" algn="ctr">
+                      <a:solidFill>
+                        <a:srgbClr val="EEEEEE"/>
+                      </a:solidFill>
+                      <a:prstDash val="solid"/>
+                      <a:round/>
+                      <a:headEnd type="none" w="med" len="med"/>
+                      <a:tailEnd type="none" w="med" len="med"/>
+                    </a:lnL>
+                    <a:lnR w="2540" cap="flat" cmpd="sng" algn="ctr">
+                      <a:solidFill>
+                        <a:srgbClr val="EEEEEE"/>
+                      </a:solidFill>
+                      <a:prstDash val="solid"/>
+                      <a:round/>
+                      <a:headEnd type="none" w="med" len="med"/>
+                      <a:tailEnd type="none" w="med" len="med"/>
+                    </a:lnR>
+                    <a:lnT w="2540" cap="flat" cmpd="sng" algn="ctr">
+                      <a:solidFill>
+                        <a:srgbClr val="EEEEEE"/>
+                      </a:solidFill>
+                      <a:prstDash val="solid"/>
+                      <a:round/>
+                      <a:headEnd type="none" w="med" len="med"/>
+                      <a:tailEnd type="none" w="med" len="med"/>
+                    </a:lnT>
+                    <a:lnB w="2540" cap="flat" cmpd="sng" algn="ctr">
+                      <a:solidFill>
+                        <a:srgbClr val="EEEEEE"/>
+                      </a:solidFill>
+                      <a:prstDash val="solid"/>
+                      <a:round/>
+                      <a:headEnd type="none" w="med" len="med"/>
+                      <a:tailEnd type="none" w="med" len="med"/>
+                    </a:lnB>
+                  </a:tcPr>
+                </a:tc>
+                <a:tc>
+                  <a:txBody>
+                    <a:bodyPr/>
+                    <a:lstStyle/>
+                    <a:p>
+                      <a:pPr algn="ctr" indent="0" marL="0">
+                        <a:buNone/>
+                      </a:pPr>
+                      <a:r>
+                        <a:rPr lang="en-US" sz="500" dirty="0">
+                          <a:solidFill>
+                            <a:srgbClr val="000000"/>
+                          </a:solidFill>
+                          <a:latin typeface="Calibri" pitchFamily="34" charset="0"/>
+                          <a:ea typeface="Calibri" pitchFamily="34" charset="-122"/>
+                          <a:cs typeface="Calibri" pitchFamily="34" charset="-120"/>
+                        </a:rPr>
+                        <a:t>0.54%</a:t>
+                      </a:r>
+                      <a:endParaRPr lang="en-US" sz="500" dirty="0">
+                        <a:latin typeface="Calibri" charset="0"/>
+                        <a:ea typeface="Calibri" charset="0"/>
+                        <a:cs typeface="Calibri" charset="0"/>
+                      </a:endParaRPr>
+                    </a:p>
+                  </a:txBody>
+                  <a:tcPr marL="91440" marR="91440" marT="45720" marB="45720">
+                    <a:lnL w="2540" cap="flat" cmpd="sng" algn="ctr">
+                      <a:solidFill>
+                        <a:srgbClr val="EEEEEE"/>
+                      </a:solidFill>
+                      <a:prstDash val="solid"/>
+                      <a:round/>
+                      <a:headEnd type="none" w="med" len="med"/>
+                      <a:tailEnd type="none" w="med" len="med"/>
+                    </a:lnL>
+                    <a:lnR w="2540" cap="flat" cmpd="sng" algn="ctr">
+                      <a:solidFill>
+                        <a:srgbClr val="EEEEEE"/>
+                      </a:solidFill>
+                      <a:prstDash val="solid"/>
+                      <a:round/>
+                      <a:headEnd type="none" w="med" len="med"/>
+                      <a:tailEnd type="none" w="med" len="med"/>
+                    </a:lnR>
+                    <a:lnT w="2540" cap="flat" cmpd="sng" algn="ctr">
+                      <a:solidFill>
+                        <a:srgbClr val="EEEEEE"/>
+                      </a:solidFill>
+                      <a:prstDash val="solid"/>
+                      <a:round/>
+                      <a:headEnd type="none" w="med" len="med"/>
+                      <a:tailEnd type="none" w="med" len="med"/>
+                    </a:lnT>
+                    <a:lnB w="2540" cap="flat" cmpd="sng" algn="ctr">
+                      <a:solidFill>
+                        <a:srgbClr val="EEEEEE"/>
+                      </a:solidFill>
+                      <a:prstDash val="solid"/>
+                      <a:round/>
+                      <a:headEnd type="none" w="med" len="med"/>
+                      <a:tailEnd type="none" w="med" len="med"/>
+                    </a:lnB>
+                  </a:tcPr>
+                </a:tc>
+                <a:tc>
+                  <a:txBody>
+                    <a:bodyPr/>
+                    <a:lstStyle/>
+                    <a:p>
+                      <a:pPr algn="ctr" indent="0" marL="0">
+                        <a:buNone/>
+                      </a:pPr>
+                      <a:r>
+                        <a:rPr lang="en-US" sz="500" dirty="0">
+                          <a:solidFill>
+                            <a:srgbClr val="000000"/>
+                          </a:solidFill>
+                          <a:latin typeface="Calibri" pitchFamily="34" charset="0"/>
+                          <a:ea typeface="Calibri" pitchFamily="34" charset="-122"/>
+                          <a:cs typeface="Calibri" pitchFamily="34" charset="-120"/>
+                        </a:rPr>
+                        <a:t>0.55%</a:t>
+                      </a:r>
+                      <a:endParaRPr lang="en-US" sz="500" dirty="0">
+                        <a:latin typeface="Calibri" charset="0"/>
+                        <a:ea typeface="Calibri" charset="0"/>
+                        <a:cs typeface="Calibri" charset="0"/>
+                      </a:endParaRPr>
+                    </a:p>
+                  </a:txBody>
+                  <a:tcPr marL="91440" marR="91440" marT="45720" marB="45720">
+                    <a:lnL w="2540" cap="flat" cmpd="sng" algn="ctr">
+                      <a:solidFill>
+                        <a:srgbClr val="EEEEEE"/>
+                      </a:solidFill>
+                      <a:prstDash val="solid"/>
+                      <a:round/>
+                      <a:headEnd type="none" w="med" len="med"/>
+                      <a:tailEnd type="none" w="med" len="med"/>
+                    </a:lnL>
+                    <a:lnR w="2540" cap="flat" cmpd="sng" algn="ctr">
+                      <a:solidFill>
+                        <a:srgbClr val="EEEEEE"/>
+                      </a:solidFill>
+                      <a:prstDash val="solid"/>
+                      <a:round/>
+                      <a:headEnd type="none" w="med" len="med"/>
+                      <a:tailEnd type="none" w="med" len="med"/>
+                    </a:lnR>
+                    <a:lnT w="2540" cap="flat" cmpd="sng" algn="ctr">
+                      <a:solidFill>
+                        <a:srgbClr val="EEEEEE"/>
+                      </a:solidFill>
+                      <a:prstDash val="solid"/>
+                      <a:round/>
+                      <a:headEnd type="none" w="med" len="med"/>
+                      <a:tailEnd type="none" w="med" len="med"/>
+                    </a:lnT>
+                    <a:lnB w="2540" cap="flat" cmpd="sng" algn="ctr">
+                      <a:solidFill>
+                        <a:srgbClr val="EEEEEE"/>
+                      </a:solidFill>
+                      <a:prstDash val="solid"/>
+                      <a:round/>
+                      <a:headEnd type="none" w="med" len="med"/>
+                      <a:tailEnd type="none" w="med" len="med"/>
+                    </a:lnB>
+                  </a:tcPr>
+                </a:tc>
+                <a:tc>
+                  <a:txBody>
+                    <a:bodyPr/>
+                    <a:lstStyle/>
+                    <a:p>
+                      <a:pPr algn="ctr" indent="0" marL="0">
+                        <a:buNone/>
+                      </a:pPr>
+                      <a:r>
+                        <a:rPr lang="en-US" sz="500" dirty="0">
+                          <a:solidFill>
+                            <a:srgbClr val="000000"/>
+                          </a:solidFill>
+                          <a:latin typeface="Calibri" pitchFamily="34" charset="0"/>
+                          <a:ea typeface="Calibri" pitchFamily="34" charset="-122"/>
+                          <a:cs typeface="Calibri" pitchFamily="34" charset="-120"/>
+                        </a:rPr>
+                        <a:t>0.50%</a:t>
+                      </a:r>
+                      <a:endParaRPr lang="en-US" sz="500" dirty="0">
+                        <a:latin typeface="Calibri" charset="0"/>
+                        <a:ea typeface="Calibri" charset="0"/>
+                        <a:cs typeface="Calibri" charset="0"/>
+                      </a:endParaRPr>
+                    </a:p>
+                  </a:txBody>
+                  <a:tcPr marL="91440" marR="91440" marT="45720" marB="45720">
+                    <a:lnL w="2540" cap="flat" cmpd="sng" algn="ctr">
+                      <a:solidFill>
+                        <a:srgbClr val="EEEEEE"/>
+                      </a:solidFill>
+                      <a:prstDash val="solid"/>
+                      <a:round/>
+                      <a:headEnd type="none" w="med" len="med"/>
+                      <a:tailEnd type="none" w="med" len="med"/>
+                    </a:lnL>
+                    <a:lnR w="2540" cap="flat" cmpd="sng" algn="ctr">
+                      <a:solidFill>
+                        <a:srgbClr val="EEEEEE"/>
+                      </a:solidFill>
+                      <a:prstDash val="solid"/>
+                      <a:round/>
+                      <a:headEnd type="none" w="med" len="med"/>
+                      <a:tailEnd type="none" w="med" len="med"/>
+                    </a:lnR>
+                    <a:lnT w="2540" cap="flat" cmpd="sng" algn="ctr">
+                      <a:solidFill>
+                        <a:srgbClr val="EEEEEE"/>
+                      </a:solidFill>
+                      <a:prstDash val="solid"/>
+                      <a:round/>
+                      <a:headEnd type="none" w="med" len="med"/>
+                      <a:tailEnd type="none" w="med" len="med"/>
+                    </a:lnT>
+                    <a:lnB w="2540" cap="flat" cmpd="sng" algn="ctr">
+                      <a:solidFill>
+                        <a:srgbClr val="EEEEEE"/>
+                      </a:solidFill>
+                      <a:prstDash val="solid"/>
+                      <a:round/>
+                      <a:headEnd type="none" w="med" len="med"/>
+                      <a:tailEnd type="none" w="med" len="med"/>
+                    </a:lnB>
+                  </a:tcPr>
+                </a:tc>
+                <a:tc>
+                  <a:txBody>
+                    <a:bodyPr/>
+                    <a:lstStyle/>
+                    <a:p>
+                      <a:pPr algn="ctr" indent="0" marL="0">
+                        <a:buNone/>
+                      </a:pPr>
+                      <a:r>
+                        <a:rPr lang="en-US" sz="500" dirty="0">
+                          <a:solidFill>
+                            <a:srgbClr val="000000"/>
+                          </a:solidFill>
+                          <a:latin typeface="Calibri" pitchFamily="34" charset="0"/>
+                          <a:ea typeface="Calibri" pitchFamily="34" charset="-122"/>
+                          <a:cs typeface="Calibri" pitchFamily="34" charset="-120"/>
+                        </a:rPr>
                         <a:t>0.46%</a:t>
+                      </a:r>
+                      <a:endParaRPr lang="en-US" sz="500" dirty="0">
+                        <a:latin typeface="Calibri" charset="0"/>
+                        <a:ea typeface="Calibri" charset="0"/>
+                        <a:cs typeface="Calibri" charset="0"/>
+                      </a:endParaRPr>
+                    </a:p>
+                  </a:txBody>
+                  <a:tcPr marL="91440" marR="91440" marT="45720" marB="45720">
+                    <a:lnL w="2540" cap="flat" cmpd="sng" algn="ctr">
+                      <a:solidFill>
+                        <a:srgbClr val="EEEEEE"/>
+                      </a:solidFill>
+                      <a:prstDash val="solid"/>
+                      <a:round/>
+                      <a:headEnd type="none" w="med" len="med"/>
+                      <a:tailEnd type="none" w="med" len="med"/>
+                    </a:lnL>
+                    <a:lnR w="2540" cap="flat" cmpd="sng" algn="ctr">
+                      <a:solidFill>
+                        <a:srgbClr val="EEEEEE"/>
+                      </a:solidFill>
+                      <a:prstDash val="solid"/>
+                      <a:round/>
+                      <a:headEnd type="none" w="med" len="med"/>
+                      <a:tailEnd type="none" w="med" len="med"/>
+                    </a:lnR>
+                    <a:lnT w="2540" cap="flat" cmpd="sng" algn="ctr">
+                      <a:solidFill>
+                        <a:srgbClr val="EEEEEE"/>
+                      </a:solidFill>
+                      <a:prstDash val="solid"/>
+                      <a:round/>
+                      <a:headEnd type="none" w="med" len="med"/>
+                      <a:tailEnd type="none" w="med" len="med"/>
+                    </a:lnT>
+                    <a:lnB w="2540" cap="flat" cmpd="sng" algn="ctr">
+                      <a:solidFill>
+                        <a:srgbClr val="EEEEEE"/>
+                      </a:solidFill>
+                      <a:prstDash val="solid"/>
+                      <a:round/>
+                      <a:headEnd type="none" w="med" len="med"/>
+                      <a:tailEnd type="none" w="med" len="med"/>
+                    </a:lnB>
+                  </a:tcPr>
+                </a:tc>
+                <a:tc>
+                  <a:txBody>
+                    <a:bodyPr/>
+                    <a:lstStyle/>
+                    <a:p>
+                      <a:pPr algn="ctr" indent="0" marL="0">
+                        <a:buNone/>
+                      </a:pPr>
+                      <a:r>
+                        <a:rPr lang="en-US" sz="500" dirty="0">
+                          <a:solidFill>
+                            <a:srgbClr val="000000"/>
+                          </a:solidFill>
+                          <a:latin typeface="Calibri" pitchFamily="34" charset="0"/>
+                          <a:ea typeface="Calibri" pitchFamily="34" charset="-122"/>
+                          <a:cs typeface="Calibri" pitchFamily="34" charset="-120"/>
+                        </a:rPr>
+                        <a:t>0.45%</a:t>
+                      </a:r>
+                      <a:endParaRPr lang="en-US" sz="500" dirty="0">
+                        <a:latin typeface="Calibri" charset="0"/>
+                        <a:ea typeface="Calibri" charset="0"/>
+                        <a:cs typeface="Calibri" charset="0"/>
+                      </a:endParaRPr>
+                    </a:p>
+                  </a:txBody>
+                  <a:tcPr marL="91440" marR="91440" marT="45720" marB="45720">
+                    <a:lnL w="2540" cap="flat" cmpd="sng" algn="ctr">
+                      <a:solidFill>
+                        <a:srgbClr val="EEEEEE"/>
+                      </a:solidFill>
+                      <a:prstDash val="solid"/>
+                      <a:round/>
+                      <a:headEnd type="none" w="med" len="med"/>
+                      <a:tailEnd type="none" w="med" len="med"/>
+                    </a:lnL>
+                    <a:lnR w="2540" cap="flat" cmpd="sng" algn="ctr">
+                      <a:solidFill>
+                        <a:srgbClr val="EEEEEE"/>
+                      </a:solidFill>
+                      <a:prstDash val="solid"/>
+                      <a:round/>
+                      <a:headEnd type="none" w="med" len="med"/>
+                      <a:tailEnd type="none" w="med" len="med"/>
+                    </a:lnR>
+                    <a:lnT w="2540" cap="flat" cmpd="sng" algn="ctr">
+                      <a:solidFill>
+                        <a:srgbClr val="EEEEEE"/>
+                      </a:solidFill>
+                      <a:prstDash val="solid"/>
+                      <a:round/>
+                      <a:headEnd type="none" w="med" len="med"/>
+                      <a:tailEnd type="none" w="med" len="med"/>
+                    </a:lnT>
+                    <a:lnB w="2540" cap="flat" cmpd="sng" algn="ctr">
+                      <a:solidFill>
+                        <a:srgbClr val="EEEEEE"/>
+                      </a:solidFill>
+                      <a:prstDash val="solid"/>
+                      <a:round/>
+                      <a:headEnd type="none" w="med" len="med"/>
+                      <a:tailEnd type="none" w="med" len="med"/>
+                    </a:lnB>
+                  </a:tcPr>
+                </a:tc>
+                <a:tc>
+                  <a:txBody>
+                    <a:bodyPr/>
+                    <a:lstStyle/>
+                    <a:p>
+                      <a:pPr algn="ctr" indent="0" marL="0">
+                        <a:buNone/>
+                      </a:pPr>
+                      <a:r>
+                        <a:rPr lang="en-US" sz="500" dirty="0">
+                          <a:solidFill>
+                            <a:srgbClr val="000000"/>
+                          </a:solidFill>
+                          <a:latin typeface="Calibri" pitchFamily="34" charset="0"/>
+                          <a:ea typeface="Calibri" pitchFamily="34" charset="-122"/>
+                          <a:cs typeface="Calibri" pitchFamily="34" charset="-120"/>
+                        </a:rPr>
+                        <a:t>0.39%</a:t>
+                      </a:r>
+                      <a:endParaRPr lang="en-US" sz="500" dirty="0">
+                        <a:latin typeface="Calibri" charset="0"/>
+                        <a:ea typeface="Calibri" charset="0"/>
+                        <a:cs typeface="Calibri" charset="0"/>
+                      </a:endParaRPr>
+                    </a:p>
+                  </a:txBody>
+                  <a:tcPr marL="91440" marR="91440" marT="45720" marB="45720">
+                    <a:lnL w="2540" cap="flat" cmpd="sng" algn="ctr">
+                      <a:solidFill>
+                        <a:srgbClr val="EEEEEE"/>
+                      </a:solidFill>
+                      <a:prstDash val="solid"/>
+                      <a:round/>
+                      <a:headEnd type="none" w="med" len="med"/>
+                      <a:tailEnd type="none" w="med" len="med"/>
+                    </a:lnL>
+                    <a:lnR w="2540" cap="flat" cmpd="sng" algn="ctr">
+                      <a:solidFill>
+                        <a:srgbClr val="EEEEEE"/>
+                      </a:solidFill>
+                      <a:prstDash val="solid"/>
+                      <a:round/>
+                      <a:headEnd type="none" w="med" len="med"/>
+                      <a:tailEnd type="none" w="med" len="med"/>
+                    </a:lnR>
+                    <a:lnT w="2540" cap="flat" cmpd="sng" algn="ctr">
+                      <a:solidFill>
+                        <a:srgbClr val="EEEEEE"/>
+                      </a:solidFill>
+                      <a:prstDash val="solid"/>
+                      <a:round/>
+                      <a:headEnd type="none" w="med" len="med"/>
+                      <a:tailEnd type="none" w="med" len="med"/>
+                    </a:lnT>
+                    <a:lnB w="2540" cap="flat" cmpd="sng" algn="ctr">
+                      <a:solidFill>
+                        <a:srgbClr val="EEEEEE"/>
+                      </a:solidFill>
+                      <a:prstDash val="solid"/>
+                      <a:round/>
+                      <a:headEnd type="none" w="med" len="med"/>
+                      <a:tailEnd type="none" w="med" len="med"/>
+                    </a:lnB>
+                  </a:tcPr>
+                </a:tc>
+                <a:tc>
+                  <a:txBody>
+                    <a:bodyPr/>
+                    <a:lstStyle/>
+                    <a:p>
+                      <a:pPr algn="ctr" indent="0" marL="0">
+                        <a:buNone/>
+                      </a:pPr>
+                      <a:r>
+                        <a:rPr lang="en-US" sz="500" b="1" dirty="0">
+                          <a:solidFill>
+                            <a:srgbClr val="000000"/>
+                          </a:solidFill>
+                          <a:latin typeface="Calibri" pitchFamily="34" charset="0"/>
+                          <a:ea typeface="Calibri" pitchFamily="34" charset="-122"/>
+                          <a:cs typeface="Calibri" pitchFamily="34" charset="-120"/>
+                        </a:rPr>
+                        <a:t>7.21%</a:t>
+                      </a:r>
+                      <a:endParaRPr lang="en-US" sz="500" dirty="0">
+                        <a:latin typeface="Calibri" charset="0"/>
+                        <a:ea typeface="Calibri" charset="0"/>
+                        <a:cs typeface="Calibri" charset="0"/>
+                      </a:endParaRPr>
+                    </a:p>
+                  </a:txBody>
+                  <a:tcPr marL="91440" marR="91440" marT="45720" marB="45720">
+                    <a:lnL w="2540" cap="flat" cmpd="sng" algn="ctr">
+                      <a:solidFill>
+                        <a:srgbClr val="EEEEEE"/>
+                      </a:solidFill>
+                      <a:prstDash val="solid"/>
+                      <a:round/>
+                      <a:headEnd type="none" w="med" len="med"/>
+                      <a:tailEnd type="none" w="med" len="med"/>
+                    </a:lnL>
+                    <a:lnR w="2540" cap="flat" cmpd="sng" algn="ctr">
+                      <a:solidFill>
+                        <a:srgbClr val="EEEEEE"/>
+                      </a:solidFill>
+                      <a:prstDash val="solid"/>
+                      <a:round/>
+                      <a:headEnd type="none" w="med" len="med"/>
+                      <a:tailEnd type="none" w="med" len="med"/>
+                    </a:lnR>
+                    <a:lnT w="2540" cap="flat" cmpd="sng" algn="ctr">
+                      <a:solidFill>
+                        <a:srgbClr val="EEEEEE"/>
+                      </a:solidFill>
+                      <a:prstDash val="solid"/>
+                      <a:round/>
+                      <a:headEnd type="none" w="med" len="med"/>
+                      <a:tailEnd type="none" w="med" len="med"/>
+                    </a:lnT>
+                    <a:lnB w="2540" cap="flat" cmpd="sng" algn="ctr">
+                      <a:solidFill>
+                        <a:srgbClr val="EEEEEE"/>
+                      </a:solidFill>
+                      <a:prstDash val="solid"/>
+                      <a:round/>
+                      <a:headEnd type="none" w="med" len="med"/>
+                      <a:tailEnd type="none" w="med" len="med"/>
+                    </a:lnB>
+                  </a:tcPr>
+                </a:tc>
+              </a:tr>
+              <a:tr h="123444">
+                <a:tc>
+                  <a:txBody>
+                    <a:bodyPr/>
+                    <a:lstStyle/>
+                    <a:p>
+                      <a:pPr algn="l" indent="0" marL="0">
+                        <a:buNone/>
+                      </a:pPr>
+                      <a:r>
+                        <a:rPr lang="en-US" sz="500" b="1" dirty="0">
+                          <a:solidFill>
+                            <a:srgbClr val="000000"/>
+                          </a:solidFill>
+                          <a:latin typeface="Calibri" pitchFamily="34" charset="0"/>
+                          <a:ea typeface="Calibri" pitchFamily="34" charset="-122"/>
+                          <a:cs typeface="Calibri" pitchFamily="34" charset="-120"/>
+                        </a:rPr>
+                        <a:t>2025</a:t>
+                      </a:r>
+                      <a:endParaRPr lang="en-US" sz="500" dirty="0">
+                        <a:latin typeface="Calibri" charset="0"/>
+                        <a:ea typeface="Calibri" charset="0"/>
+                        <a:cs typeface="Calibri" charset="0"/>
+                      </a:endParaRPr>
+                    </a:p>
+                  </a:txBody>
+                  <a:tcPr marL="91440" marR="91440" marT="45720" marB="45720">
+                    <a:lnL w="2540" cap="flat" cmpd="sng" algn="ctr">
+                      <a:solidFill>
+                        <a:srgbClr val="EEEEEE"/>
+                      </a:solidFill>
+                      <a:prstDash val="solid"/>
+                      <a:round/>
+                      <a:headEnd type="none" w="med" len="med"/>
+                      <a:tailEnd type="none" w="med" len="med"/>
+                    </a:lnL>
+                    <a:lnR w="2540" cap="flat" cmpd="sng" algn="ctr">
+                      <a:solidFill>
+                        <a:srgbClr val="EEEEEE"/>
+                      </a:solidFill>
+                      <a:prstDash val="solid"/>
+                      <a:round/>
+                      <a:headEnd type="none" w="med" len="med"/>
+                      <a:tailEnd type="none" w="med" len="med"/>
+                    </a:lnR>
+                    <a:lnT w="2540" cap="flat" cmpd="sng" algn="ctr">
+                      <a:solidFill>
+                        <a:srgbClr val="EEEEEE"/>
+                      </a:solidFill>
+                      <a:prstDash val="solid"/>
+                      <a:round/>
+                      <a:headEnd type="none" w="med" len="med"/>
+                      <a:tailEnd type="none" w="med" len="med"/>
+                    </a:lnT>
+                    <a:lnB w="2540" cap="flat" cmpd="sng" algn="ctr">
+                      <a:solidFill>
+                        <a:srgbClr val="EEEEEE"/>
+                      </a:solidFill>
+                      <a:prstDash val="solid"/>
+                      <a:round/>
+                      <a:headEnd type="none" w="med" len="med"/>
+                      <a:tailEnd type="none" w="med" len="med"/>
+                    </a:lnB>
+                  </a:tcPr>
+                </a:tc>
+                <a:tc>
+                  <a:txBody>
+                    <a:bodyPr/>
+                    <a:lstStyle/>
+                    <a:p>
+                      <a:pPr algn="l" indent="0" marL="0">
+                        <a:buNone/>
+                      </a:pPr>
+                      <a:r>
+                        <a:rPr lang="en-US" sz="500" dirty="0">
+                          <a:solidFill>
+                            <a:srgbClr val="777777"/>
+                          </a:solidFill>
+                          <a:latin typeface="Calibri" pitchFamily="34" charset="0"/>
+                          <a:ea typeface="Calibri" pitchFamily="34" charset="-122"/>
+                          <a:cs typeface="Calibri" pitchFamily="34" charset="-120"/>
+                        </a:rPr>
+                        <a:t>ICP</a:t>
                       </a:r>
                       <a:endParaRPr lang="en-US" sz="500" dirty="0">
                         <a:latin typeface="Calibri" charset="0"/>
@@ -9682,7 +12484,7 @@
                           <a:ea typeface="Calibri" pitchFamily="34" charset="-122"/>
                           <a:cs typeface="Calibri" pitchFamily="34" charset="-120"/>
                         </a:rPr>
-                        <a:t>0.44%</a:t>
+                        <a:t>0.39%</a:t>
                       </a:r>
                       <a:endParaRPr lang="en-US" sz="500" dirty="0">
                         <a:latin typeface="Calibri" charset="0"/>
@@ -9804,6 +12606,591 @@
                         <a:buNone/>
                       </a:pPr>
                       <a:r>
+                        <a:rPr lang="en-US" sz="500" dirty="0">
+                          <a:solidFill>
+                            <a:srgbClr val="777777"/>
+                          </a:solidFill>
+                          <a:latin typeface="Calibri" pitchFamily="34" charset="0"/>
+                          <a:ea typeface="Calibri" pitchFamily="34" charset="-122"/>
+                          <a:cs typeface="Calibri" pitchFamily="34" charset="-120"/>
+                        </a:rPr>
+                        <a:t>0.42%</a:t>
+                      </a:r>
+                      <a:endParaRPr lang="en-US" sz="500" dirty="0">
+                        <a:latin typeface="Calibri" charset="0"/>
+                        <a:ea typeface="Calibri" charset="0"/>
+                        <a:cs typeface="Calibri" charset="0"/>
+                      </a:endParaRPr>
+                    </a:p>
+                  </a:txBody>
+                  <a:tcPr marL="91440" marR="91440" marT="45720" marB="45720">
+                    <a:lnL w="2540" cap="flat" cmpd="sng" algn="ctr">
+                      <a:solidFill>
+                        <a:srgbClr val="EEEEEE"/>
+                      </a:solidFill>
+                      <a:prstDash val="solid"/>
+                      <a:round/>
+                      <a:headEnd type="none" w="med" len="med"/>
+                      <a:tailEnd type="none" w="med" len="med"/>
+                    </a:lnL>
+                    <a:lnR w="2540" cap="flat" cmpd="sng" algn="ctr">
+                      <a:solidFill>
+                        <a:srgbClr val="EEEEEE"/>
+                      </a:solidFill>
+                      <a:prstDash val="solid"/>
+                      <a:round/>
+                      <a:headEnd type="none" w="med" len="med"/>
+                      <a:tailEnd type="none" w="med" len="med"/>
+                    </a:lnR>
+                    <a:lnT w="2540" cap="flat" cmpd="sng" algn="ctr">
+                      <a:solidFill>
+                        <a:srgbClr val="EEEEEE"/>
+                      </a:solidFill>
+                      <a:prstDash val="solid"/>
+                      <a:round/>
+                      <a:headEnd type="none" w="med" len="med"/>
+                      <a:tailEnd type="none" w="med" len="med"/>
+                    </a:lnT>
+                    <a:lnB w="2540" cap="flat" cmpd="sng" algn="ctr">
+                      <a:solidFill>
+                        <a:srgbClr val="EEEEEE"/>
+                      </a:solidFill>
+                      <a:prstDash val="solid"/>
+                      <a:round/>
+                      <a:headEnd type="none" w="med" len="med"/>
+                      <a:tailEnd type="none" w="med" len="med"/>
+                    </a:lnB>
+                  </a:tcPr>
+                </a:tc>
+                <a:tc>
+                  <a:txBody>
+                    <a:bodyPr/>
+                    <a:lstStyle/>
+                    <a:p>
+                      <a:pPr algn="ctr" indent="0" marL="0">
+                        <a:buNone/>
+                      </a:pPr>
+                      <a:r>
+                        <a:rPr lang="en-US" sz="500" dirty="0">
+                          <a:solidFill>
+                            <a:srgbClr val="777777"/>
+                          </a:solidFill>
+                          <a:latin typeface="Calibri" pitchFamily="34" charset="0"/>
+                          <a:ea typeface="Calibri" pitchFamily="34" charset="-122"/>
+                          <a:cs typeface="Calibri" pitchFamily="34" charset="-120"/>
+                        </a:rPr>
+                        <a:t>0.42%</a:t>
+                      </a:r>
+                      <a:endParaRPr lang="en-US" sz="500" dirty="0">
+                        <a:latin typeface="Calibri" charset="0"/>
+                        <a:ea typeface="Calibri" charset="0"/>
+                        <a:cs typeface="Calibri" charset="0"/>
+                      </a:endParaRPr>
+                    </a:p>
+                  </a:txBody>
+                  <a:tcPr marL="91440" marR="91440" marT="45720" marB="45720">
+                    <a:lnL w="2540" cap="flat" cmpd="sng" algn="ctr">
+                      <a:solidFill>
+                        <a:srgbClr val="EEEEEE"/>
+                      </a:solidFill>
+                      <a:prstDash val="solid"/>
+                      <a:round/>
+                      <a:headEnd type="none" w="med" len="med"/>
+                      <a:tailEnd type="none" w="med" len="med"/>
+                    </a:lnL>
+                    <a:lnR w="2540" cap="flat" cmpd="sng" algn="ctr">
+                      <a:solidFill>
+                        <a:srgbClr val="EEEEEE"/>
+                      </a:solidFill>
+                      <a:prstDash val="solid"/>
+                      <a:round/>
+                      <a:headEnd type="none" w="med" len="med"/>
+                      <a:tailEnd type="none" w="med" len="med"/>
+                    </a:lnR>
+                    <a:lnT w="2540" cap="flat" cmpd="sng" algn="ctr">
+                      <a:solidFill>
+                        <a:srgbClr val="EEEEEE"/>
+                      </a:solidFill>
+                      <a:prstDash val="solid"/>
+                      <a:round/>
+                      <a:headEnd type="none" w="med" len="med"/>
+                      <a:tailEnd type="none" w="med" len="med"/>
+                    </a:lnT>
+                    <a:lnB w="2540" cap="flat" cmpd="sng" algn="ctr">
+                      <a:solidFill>
+                        <a:srgbClr val="EEEEEE"/>
+                      </a:solidFill>
+                      <a:prstDash val="solid"/>
+                      <a:round/>
+                      <a:headEnd type="none" w="med" len="med"/>
+                      <a:tailEnd type="none" w="med" len="med"/>
+                    </a:lnB>
+                  </a:tcPr>
+                </a:tc>
+                <a:tc>
+                  <a:txBody>
+                    <a:bodyPr/>
+                    <a:lstStyle/>
+                    <a:p>
+                      <a:pPr algn="ctr" indent="0" marL="0">
+                        <a:buNone/>
+                      </a:pPr>
+                      <a:r>
+                        <a:rPr lang="en-US" sz="500" dirty="0">
+                          <a:solidFill>
+                            <a:srgbClr val="777777"/>
+                          </a:solidFill>
+                          <a:latin typeface="Calibri" pitchFamily="34" charset="0"/>
+                          <a:ea typeface="Calibri" pitchFamily="34" charset="-122"/>
+                          <a:cs typeface="Calibri" pitchFamily="34" charset="-120"/>
+                        </a:rPr>
+                        <a:t>0.43%</a:t>
+                      </a:r>
+                      <a:endParaRPr lang="en-US" sz="500" dirty="0">
+                        <a:latin typeface="Calibri" charset="0"/>
+                        <a:ea typeface="Calibri" charset="0"/>
+                        <a:cs typeface="Calibri" charset="0"/>
+                      </a:endParaRPr>
+                    </a:p>
+                  </a:txBody>
+                  <a:tcPr marL="91440" marR="91440" marT="45720" marB="45720">
+                    <a:lnL w="2540" cap="flat" cmpd="sng" algn="ctr">
+                      <a:solidFill>
+                        <a:srgbClr val="EEEEEE"/>
+                      </a:solidFill>
+                      <a:prstDash val="solid"/>
+                      <a:round/>
+                      <a:headEnd type="none" w="med" len="med"/>
+                      <a:tailEnd type="none" w="med" len="med"/>
+                    </a:lnL>
+                    <a:lnR w="2540" cap="flat" cmpd="sng" algn="ctr">
+                      <a:solidFill>
+                        <a:srgbClr val="EEEEEE"/>
+                      </a:solidFill>
+                      <a:prstDash val="solid"/>
+                      <a:round/>
+                      <a:headEnd type="none" w="med" len="med"/>
+                      <a:tailEnd type="none" w="med" len="med"/>
+                    </a:lnR>
+                    <a:lnT w="2540" cap="flat" cmpd="sng" algn="ctr">
+                      <a:solidFill>
+                        <a:srgbClr val="EEEEEE"/>
+                      </a:solidFill>
+                      <a:prstDash val="solid"/>
+                      <a:round/>
+                      <a:headEnd type="none" w="med" len="med"/>
+                      <a:tailEnd type="none" w="med" len="med"/>
+                    </a:lnT>
+                    <a:lnB w="2540" cap="flat" cmpd="sng" algn="ctr">
+                      <a:solidFill>
+                        <a:srgbClr val="EEEEEE"/>
+                      </a:solidFill>
+                      <a:prstDash val="solid"/>
+                      <a:round/>
+                      <a:headEnd type="none" w="med" len="med"/>
+                      <a:tailEnd type="none" w="med" len="med"/>
+                    </a:lnB>
+                  </a:tcPr>
+                </a:tc>
+                <a:tc>
+                  <a:txBody>
+                    <a:bodyPr/>
+                    <a:lstStyle/>
+                    <a:p>
+                      <a:pPr algn="ctr" indent="0" marL="0">
+                        <a:buNone/>
+                      </a:pPr>
+                      <a:r>
+                        <a:rPr lang="en-US" sz="500" dirty="0">
+                          <a:solidFill>
+                            <a:srgbClr val="777777"/>
+                          </a:solidFill>
+                          <a:latin typeface="Calibri" pitchFamily="34" charset="0"/>
+                          <a:ea typeface="Calibri" pitchFamily="34" charset="-122"/>
+                          <a:cs typeface="Calibri" pitchFamily="34" charset="-120"/>
+                        </a:rPr>
+                        <a:t>0.43%</a:t>
+                      </a:r>
+                      <a:endParaRPr lang="en-US" sz="500" dirty="0">
+                        <a:latin typeface="Calibri" charset="0"/>
+                        <a:ea typeface="Calibri" charset="0"/>
+                        <a:cs typeface="Calibri" charset="0"/>
+                      </a:endParaRPr>
+                    </a:p>
+                  </a:txBody>
+                  <a:tcPr marL="91440" marR="91440" marT="45720" marB="45720">
+                    <a:lnL w="2540" cap="flat" cmpd="sng" algn="ctr">
+                      <a:solidFill>
+                        <a:srgbClr val="EEEEEE"/>
+                      </a:solidFill>
+                      <a:prstDash val="solid"/>
+                      <a:round/>
+                      <a:headEnd type="none" w="med" len="med"/>
+                      <a:tailEnd type="none" w="med" len="med"/>
+                    </a:lnL>
+                    <a:lnR w="2540" cap="flat" cmpd="sng" algn="ctr">
+                      <a:solidFill>
+                        <a:srgbClr val="EEEEEE"/>
+                      </a:solidFill>
+                      <a:prstDash val="solid"/>
+                      <a:round/>
+                      <a:headEnd type="none" w="med" len="med"/>
+                      <a:tailEnd type="none" w="med" len="med"/>
+                    </a:lnR>
+                    <a:lnT w="2540" cap="flat" cmpd="sng" algn="ctr">
+                      <a:solidFill>
+                        <a:srgbClr val="EEEEEE"/>
+                      </a:solidFill>
+                      <a:prstDash val="solid"/>
+                      <a:round/>
+                      <a:headEnd type="none" w="med" len="med"/>
+                      <a:tailEnd type="none" w="med" len="med"/>
+                    </a:lnT>
+                    <a:lnB w="2540" cap="flat" cmpd="sng" algn="ctr">
+                      <a:solidFill>
+                        <a:srgbClr val="EEEEEE"/>
+                      </a:solidFill>
+                      <a:prstDash val="solid"/>
+                      <a:round/>
+                      <a:headEnd type="none" w="med" len="med"/>
+                      <a:tailEnd type="none" w="med" len="med"/>
+                    </a:lnB>
+                  </a:tcPr>
+                </a:tc>
+                <a:tc>
+                  <a:txBody>
+                    <a:bodyPr/>
+                    <a:lstStyle/>
+                    <a:p>
+                      <a:pPr algn="ctr" indent="0" marL="0">
+                        <a:buNone/>
+                      </a:pPr>
+                      <a:r>
+                        <a:rPr lang="en-US" sz="500" dirty="0">
+                          <a:solidFill>
+                            <a:srgbClr val="777777"/>
+                          </a:solidFill>
+                          <a:latin typeface="Calibri" pitchFamily="34" charset="0"/>
+                          <a:ea typeface="Calibri" pitchFamily="34" charset="-122"/>
+                          <a:cs typeface="Calibri" pitchFamily="34" charset="-120"/>
+                        </a:rPr>
+                        <a:t>0.38%</a:t>
+                      </a:r>
+                      <a:endParaRPr lang="en-US" sz="500" dirty="0">
+                        <a:latin typeface="Calibri" charset="0"/>
+                        <a:ea typeface="Calibri" charset="0"/>
+                        <a:cs typeface="Calibri" charset="0"/>
+                      </a:endParaRPr>
+                    </a:p>
+                  </a:txBody>
+                  <a:tcPr marL="91440" marR="91440" marT="45720" marB="45720">
+                    <a:lnL w="2540" cap="flat" cmpd="sng" algn="ctr">
+                      <a:solidFill>
+                        <a:srgbClr val="EEEEEE"/>
+                      </a:solidFill>
+                      <a:prstDash val="solid"/>
+                      <a:round/>
+                      <a:headEnd type="none" w="med" len="med"/>
+                      <a:tailEnd type="none" w="med" len="med"/>
+                    </a:lnL>
+                    <a:lnR w="2540" cap="flat" cmpd="sng" algn="ctr">
+                      <a:solidFill>
+                        <a:srgbClr val="EEEEEE"/>
+                      </a:solidFill>
+                      <a:prstDash val="solid"/>
+                      <a:round/>
+                      <a:headEnd type="none" w="med" len="med"/>
+                      <a:tailEnd type="none" w="med" len="med"/>
+                    </a:lnR>
+                    <a:lnT w="2540" cap="flat" cmpd="sng" algn="ctr">
+                      <a:solidFill>
+                        <a:srgbClr val="EEEEEE"/>
+                      </a:solidFill>
+                      <a:prstDash val="solid"/>
+                      <a:round/>
+                      <a:headEnd type="none" w="med" len="med"/>
+                      <a:tailEnd type="none" w="med" len="med"/>
+                    </a:lnT>
+                    <a:lnB w="2540" cap="flat" cmpd="sng" algn="ctr">
+                      <a:solidFill>
+                        <a:srgbClr val="EEEEEE"/>
+                      </a:solidFill>
+                      <a:prstDash val="solid"/>
+                      <a:round/>
+                      <a:headEnd type="none" w="med" len="med"/>
+                      <a:tailEnd type="none" w="med" len="med"/>
+                    </a:lnB>
+                  </a:tcPr>
+                </a:tc>
+                <a:tc>
+                  <a:txBody>
+                    <a:bodyPr/>
+                    <a:lstStyle/>
+                    <a:p>
+                      <a:pPr algn="ctr" indent="0" marL="0">
+                        <a:buNone/>
+                      </a:pPr>
+                      <a:r>
+                        <a:rPr lang="en-US" sz="500" dirty="0">
+                          <a:solidFill>
+                            <a:srgbClr val="777777"/>
+                          </a:solidFill>
+                          <a:latin typeface="Calibri" pitchFamily="34" charset="0"/>
+                          <a:ea typeface="Calibri" pitchFamily="34" charset="-122"/>
+                          <a:cs typeface="Calibri" pitchFamily="34" charset="-120"/>
+                        </a:rPr>
+                        <a:t>0.42%</a:t>
+                      </a:r>
+                      <a:endParaRPr lang="en-US" sz="500" dirty="0">
+                        <a:latin typeface="Calibri" charset="0"/>
+                        <a:ea typeface="Calibri" charset="0"/>
+                        <a:cs typeface="Calibri" charset="0"/>
+                      </a:endParaRPr>
+                    </a:p>
+                  </a:txBody>
+                  <a:tcPr marL="91440" marR="91440" marT="45720" marB="45720">
+                    <a:lnL w="2540" cap="flat" cmpd="sng" algn="ctr">
+                      <a:solidFill>
+                        <a:srgbClr val="EEEEEE"/>
+                      </a:solidFill>
+                      <a:prstDash val="solid"/>
+                      <a:round/>
+                      <a:headEnd type="none" w="med" len="med"/>
+                      <a:tailEnd type="none" w="med" len="med"/>
+                    </a:lnL>
+                    <a:lnR w="2540" cap="flat" cmpd="sng" algn="ctr">
+                      <a:solidFill>
+                        <a:srgbClr val="EEEEEE"/>
+                      </a:solidFill>
+                      <a:prstDash val="solid"/>
+                      <a:round/>
+                      <a:headEnd type="none" w="med" len="med"/>
+                      <a:tailEnd type="none" w="med" len="med"/>
+                    </a:lnR>
+                    <a:lnT w="2540" cap="flat" cmpd="sng" algn="ctr">
+                      <a:solidFill>
+                        <a:srgbClr val="EEEEEE"/>
+                      </a:solidFill>
+                      <a:prstDash val="solid"/>
+                      <a:round/>
+                      <a:headEnd type="none" w="med" len="med"/>
+                      <a:tailEnd type="none" w="med" len="med"/>
+                    </a:lnT>
+                    <a:lnB w="2540" cap="flat" cmpd="sng" algn="ctr">
+                      <a:solidFill>
+                        <a:srgbClr val="EEEEEE"/>
+                      </a:solidFill>
+                      <a:prstDash val="solid"/>
+                      <a:round/>
+                      <a:headEnd type="none" w="med" len="med"/>
+                      <a:tailEnd type="none" w="med" len="med"/>
+                    </a:lnB>
+                  </a:tcPr>
+                </a:tc>
+                <a:tc>
+                  <a:txBody>
+                    <a:bodyPr/>
+                    <a:lstStyle/>
+                    <a:p>
+                      <a:pPr algn="ctr" indent="0" marL="0">
+                        <a:buNone/>
+                      </a:pPr>
+                      <a:r>
+                        <a:rPr lang="en-US" sz="500" dirty="0">
+                          <a:solidFill>
+                            <a:srgbClr val="777777"/>
+                          </a:solidFill>
+                          <a:latin typeface="Calibri" pitchFamily="34" charset="0"/>
+                          <a:ea typeface="Calibri" pitchFamily="34" charset="-122"/>
+                          <a:cs typeface="Calibri" pitchFamily="34" charset="-120"/>
+                        </a:rPr>
+                        <a:t>0.40%</a:t>
+                      </a:r>
+                      <a:endParaRPr lang="en-US" sz="500" dirty="0">
+                        <a:latin typeface="Calibri" charset="0"/>
+                        <a:ea typeface="Calibri" charset="0"/>
+                        <a:cs typeface="Calibri" charset="0"/>
+                      </a:endParaRPr>
+                    </a:p>
+                  </a:txBody>
+                  <a:tcPr marL="91440" marR="91440" marT="45720" marB="45720">
+                    <a:lnL w="2540" cap="flat" cmpd="sng" algn="ctr">
+                      <a:solidFill>
+                        <a:srgbClr val="EEEEEE"/>
+                      </a:solidFill>
+                      <a:prstDash val="solid"/>
+                      <a:round/>
+                      <a:headEnd type="none" w="med" len="med"/>
+                      <a:tailEnd type="none" w="med" len="med"/>
+                    </a:lnL>
+                    <a:lnR w="2540" cap="flat" cmpd="sng" algn="ctr">
+                      <a:solidFill>
+                        <a:srgbClr val="EEEEEE"/>
+                      </a:solidFill>
+                      <a:prstDash val="solid"/>
+                      <a:round/>
+                      <a:headEnd type="none" w="med" len="med"/>
+                      <a:tailEnd type="none" w="med" len="med"/>
+                    </a:lnR>
+                    <a:lnT w="2540" cap="flat" cmpd="sng" algn="ctr">
+                      <a:solidFill>
+                        <a:srgbClr val="EEEEEE"/>
+                      </a:solidFill>
+                      <a:prstDash val="solid"/>
+                      <a:round/>
+                      <a:headEnd type="none" w="med" len="med"/>
+                      <a:tailEnd type="none" w="med" len="med"/>
+                    </a:lnT>
+                    <a:lnB w="2540" cap="flat" cmpd="sng" algn="ctr">
+                      <a:solidFill>
+                        <a:srgbClr val="EEEEEE"/>
+                      </a:solidFill>
+                      <a:prstDash val="solid"/>
+                      <a:round/>
+                      <a:headEnd type="none" w="med" len="med"/>
+                      <a:tailEnd type="none" w="med" len="med"/>
+                    </a:lnB>
+                  </a:tcPr>
+                </a:tc>
+                <a:tc>
+                  <a:txBody>
+                    <a:bodyPr/>
+                    <a:lstStyle/>
+                    <a:p>
+                      <a:pPr algn="ctr" indent="0" marL="0">
+                        <a:buNone/>
+                      </a:pPr>
+                      <a:r>
+                        <a:rPr lang="en-US" sz="500" dirty="0">
+                          <a:solidFill>
+                            <a:srgbClr val="777777"/>
+                          </a:solidFill>
+                          <a:latin typeface="Calibri" pitchFamily="34" charset="0"/>
+                          <a:ea typeface="Calibri" pitchFamily="34" charset="-122"/>
+                          <a:cs typeface="Calibri" pitchFamily="34" charset="-120"/>
+                        </a:rPr>
+                        <a:t>0.38%</a:t>
+                      </a:r>
+                      <a:endParaRPr lang="en-US" sz="500" dirty="0">
+                        <a:latin typeface="Calibri" charset="0"/>
+                        <a:ea typeface="Calibri" charset="0"/>
+                        <a:cs typeface="Calibri" charset="0"/>
+                      </a:endParaRPr>
+                    </a:p>
+                  </a:txBody>
+                  <a:tcPr marL="91440" marR="91440" marT="45720" marB="45720">
+                    <a:lnL w="2540" cap="flat" cmpd="sng" algn="ctr">
+                      <a:solidFill>
+                        <a:srgbClr val="EEEEEE"/>
+                      </a:solidFill>
+                      <a:prstDash val="solid"/>
+                      <a:round/>
+                      <a:headEnd type="none" w="med" len="med"/>
+                      <a:tailEnd type="none" w="med" len="med"/>
+                    </a:lnL>
+                    <a:lnR w="2540" cap="flat" cmpd="sng" algn="ctr">
+                      <a:solidFill>
+                        <a:srgbClr val="EEEEEE"/>
+                      </a:solidFill>
+                      <a:prstDash val="solid"/>
+                      <a:round/>
+                      <a:headEnd type="none" w="med" len="med"/>
+                      <a:tailEnd type="none" w="med" len="med"/>
+                    </a:lnR>
+                    <a:lnT w="2540" cap="flat" cmpd="sng" algn="ctr">
+                      <a:solidFill>
+                        <a:srgbClr val="EEEEEE"/>
+                      </a:solidFill>
+                      <a:prstDash val="solid"/>
+                      <a:round/>
+                      <a:headEnd type="none" w="med" len="med"/>
+                      <a:tailEnd type="none" w="med" len="med"/>
+                    </a:lnT>
+                    <a:lnB w="2540" cap="flat" cmpd="sng" algn="ctr">
+                      <a:solidFill>
+                        <a:srgbClr val="EEEEEE"/>
+                      </a:solidFill>
+                      <a:prstDash val="solid"/>
+                      <a:round/>
+                      <a:headEnd type="none" w="med" len="med"/>
+                      <a:tailEnd type="none" w="med" len="med"/>
+                    </a:lnB>
+                  </a:tcPr>
+                </a:tc>
+                <a:tc>
+                  <a:txBody>
+                    <a:bodyPr/>
+                    <a:lstStyle/>
+                    <a:p>
+                      <a:pPr algn="ctr" indent="0" marL="0">
+                        <a:buNone/>
+                      </a:pPr>
+                      <a:r>
+                        <a:rPr lang="en-US" sz="500" dirty="0">
+                          <a:solidFill>
+                            <a:srgbClr val="777777"/>
+                          </a:solidFill>
+                          <a:latin typeface="Calibri" pitchFamily="34" charset="0"/>
+                          <a:ea typeface="Calibri" pitchFamily="34" charset="-122"/>
+                          <a:cs typeface="Calibri" pitchFamily="34" charset="-120"/>
+                        </a:rPr>
+                        <a:t>0.41%</a:t>
+                      </a:r>
+                      <a:endParaRPr lang="en-US" sz="500" dirty="0">
+                        <a:latin typeface="Calibri" charset="0"/>
+                        <a:ea typeface="Calibri" charset="0"/>
+                        <a:cs typeface="Calibri" charset="0"/>
+                      </a:endParaRPr>
+                    </a:p>
+                  </a:txBody>
+                  <a:tcPr marL="91440" marR="91440" marT="45720" marB="45720">
+                    <a:lnL w="2540" cap="flat" cmpd="sng" algn="ctr">
+                      <a:solidFill>
+                        <a:srgbClr val="EEEEEE"/>
+                      </a:solidFill>
+                      <a:prstDash val="solid"/>
+                      <a:round/>
+                      <a:headEnd type="none" w="med" len="med"/>
+                      <a:tailEnd type="none" w="med" len="med"/>
+                    </a:lnL>
+                    <a:lnR w="2540" cap="flat" cmpd="sng" algn="ctr">
+                      <a:solidFill>
+                        <a:srgbClr val="EEEEEE"/>
+                      </a:solidFill>
+                      <a:prstDash val="solid"/>
+                      <a:round/>
+                      <a:headEnd type="none" w="med" len="med"/>
+                      <a:tailEnd type="none" w="med" len="med"/>
+                    </a:lnR>
+                    <a:lnT w="2540" cap="flat" cmpd="sng" algn="ctr">
+                      <a:solidFill>
+                        <a:srgbClr val="EEEEEE"/>
+                      </a:solidFill>
+                      <a:prstDash val="solid"/>
+                      <a:round/>
+                      <a:headEnd type="none" w="med" len="med"/>
+                      <a:tailEnd type="none" w="med" len="med"/>
+                    </a:lnT>
+                    <a:lnB w="2540" cap="flat" cmpd="sng" algn="ctr">
+                      <a:solidFill>
+                        <a:srgbClr val="EEEEEE"/>
+                      </a:solidFill>
+                      <a:prstDash val="solid"/>
+                      <a:round/>
+                      <a:headEnd type="none" w="med" len="med"/>
+                      <a:tailEnd type="none" w="med" len="med"/>
+                    </a:lnB>
+                  </a:tcPr>
+                </a:tc>
+                <a:tc>
+                  <a:txBody>
+                    <a:bodyPr/>
+                    <a:lstStyle/>
+                    <a:p>
+                      <a:pPr algn="ctr" indent="0" marL="0">
+                        <a:buNone/>
+                      </a:pPr>
+                      <a:r>
                         <a:rPr lang="en-US" sz="500" b="1" dirty="0">
                           <a:solidFill>
                             <a:srgbClr val="777777"/>
@@ -9812,7 +13199,7 @@
                           <a:ea typeface="Calibri" pitchFamily="34" charset="-122"/>
                           <a:cs typeface="Calibri" pitchFamily="34" charset="-120"/>
                         </a:rPr>
-                        <a:t>6.38%</a:t>
+                        <a:t>4.61%</a:t>
                       </a:r>
                       <a:endParaRPr lang="en-US" sz="500" dirty="0">
                         <a:latin typeface="Calibri" charset="0"/>
@@ -9998,7 +13385,7 @@
                           <a:ea typeface="Calibri" pitchFamily="34" charset="-122"/>
                           <a:cs typeface="Calibri" pitchFamily="34" charset="-120"/>
                         </a:rPr>
-                        <a:t>0.00%</a:t>
+                        <a:t>0.30%</a:t>
                       </a:r>
                       <a:endParaRPr lang="en-US" sz="500" dirty="0">
                         <a:latin typeface="Calibri" charset="0"/>
@@ -10063,7 +13450,7 @@
                           <a:ea typeface="Calibri" pitchFamily="34" charset="-122"/>
                           <a:cs typeface="Calibri" pitchFamily="34" charset="-120"/>
                         </a:rPr>
-                        <a:t>0.51%</a:t>
+                        <a:t>0.28%</a:t>
                       </a:r>
                       <a:endParaRPr lang="en-US" sz="500" dirty="0">
                         <a:latin typeface="Calibri" charset="0"/>
@@ -10128,7 +13515,7 @@
                           <a:ea typeface="Calibri" pitchFamily="34" charset="-122"/>
                           <a:cs typeface="Calibri" pitchFamily="34" charset="-120"/>
                         </a:rPr>
-                        <a:t>0.45%</a:t>
+                        <a:t>0.31%</a:t>
                       </a:r>
                       <a:endParaRPr lang="en-US" sz="500" dirty="0">
                         <a:latin typeface="Calibri" charset="0"/>
@@ -10193,7 +13580,7 @@
                           <a:ea typeface="Calibri" pitchFamily="34" charset="-122"/>
                           <a:cs typeface="Calibri" pitchFamily="34" charset="-120"/>
                         </a:rPr>
-                        <a:t>0.47%</a:t>
+                        <a:t>0.30%</a:t>
                       </a:r>
                       <a:endParaRPr lang="en-US" sz="500" dirty="0">
                         <a:latin typeface="Calibri" charset="0"/>
@@ -10258,7 +13645,7 @@
                           <a:ea typeface="Calibri" pitchFamily="34" charset="-122"/>
                           <a:cs typeface="Calibri" pitchFamily="34" charset="-120"/>
                         </a:rPr>
-                        <a:t>0.42%</a:t>
+                        <a:t>0.31%</a:t>
                       </a:r>
                       <a:endParaRPr lang="en-US" sz="500" dirty="0">
                         <a:latin typeface="Calibri" charset="0"/>
@@ -10323,7 +13710,7 @@
                           <a:ea typeface="Calibri" pitchFamily="34" charset="-122"/>
                           <a:cs typeface="Calibri" pitchFamily="34" charset="-120"/>
                         </a:rPr>
-                        <a:t>0.37%</a:t>
+                        <a:t>0.30%</a:t>
                       </a:r>
                       <a:endParaRPr lang="en-US" sz="500" dirty="0">
                         <a:latin typeface="Calibri" charset="0"/>
@@ -10388,7 +13775,7 @@
                           <a:ea typeface="Calibri" pitchFamily="34" charset="-122"/>
                           <a:cs typeface="Calibri" pitchFamily="34" charset="-120"/>
                         </a:rPr>
-                        <a:t>0.36%</a:t>
+                        <a:t>0.30%</a:t>
                       </a:r>
                       <a:endParaRPr lang="en-US" sz="500" dirty="0">
                         <a:latin typeface="Calibri" charset="0"/>
@@ -10453,7 +13840,7 @@
                           <a:ea typeface="Calibri" pitchFamily="34" charset="-122"/>
                           <a:cs typeface="Calibri" pitchFamily="34" charset="-120"/>
                         </a:rPr>
-                        <a:t>0.36%</a:t>
+                        <a:t>0.30%</a:t>
                       </a:r>
                       <a:endParaRPr lang="en-US" sz="500" dirty="0">
                         <a:latin typeface="Calibri" charset="0"/>
@@ -10518,7 +13905,7 @@
                           <a:ea typeface="Calibri" pitchFamily="34" charset="-122"/>
                           <a:cs typeface="Calibri" pitchFamily="34" charset="-120"/>
                         </a:rPr>
-                        <a:t>0.34%</a:t>
+                        <a:t>0.28%</a:t>
                       </a:r>
                       <a:endParaRPr lang="en-US" sz="500" dirty="0">
                         <a:latin typeface="Calibri" charset="0"/>
@@ -10583,7 +13970,7 @@
                           <a:ea typeface="Calibri" pitchFamily="34" charset="-122"/>
                           <a:cs typeface="Calibri" pitchFamily="34" charset="-120"/>
                         </a:rPr>
-                        <a:t>0.34%</a:t>
+                        <a:t>0.29%</a:t>
                       </a:r>
                       <a:endParaRPr lang="en-US" sz="500" dirty="0">
                         <a:latin typeface="Calibri" charset="0"/>
@@ -10648,7 +14035,7 @@
                           <a:ea typeface="Calibri" pitchFamily="34" charset="-122"/>
                           <a:cs typeface="Calibri" pitchFamily="34" charset="-120"/>
                         </a:rPr>
-                        <a:t>0.32%</a:t>
+                        <a:t>0.28%</a:t>
                       </a:r>
                       <a:endParaRPr lang="en-US" sz="500" dirty="0">
                         <a:latin typeface="Calibri" charset="0"/>
@@ -10713,7 +14100,7 @@
                           <a:ea typeface="Calibri" pitchFamily="34" charset="-122"/>
                           <a:cs typeface="Calibri" pitchFamily="34" charset="-120"/>
                         </a:rPr>
-                        <a:t>-2.99%</a:t>
+                        <a:t>0.28%</a:t>
                       </a:r>
                       <a:endParaRPr lang="en-US" sz="500" dirty="0">
                         <a:latin typeface="Calibri" charset="0"/>
@@ -10778,7 +14165,7 @@
                           <a:ea typeface="Calibri" pitchFamily="34" charset="-122"/>
                           <a:cs typeface="Calibri" pitchFamily="34" charset="-120"/>
                         </a:rPr>
-                        <a:t>0.90%</a:t>
+                        <a:t>3.26%</a:t>
                       </a:r>
                       <a:endParaRPr lang="en-US" sz="500" dirty="0">
                         <a:latin typeface="Calibri" charset="0"/>
@@ -10964,7 +14351,137 @@
                           <a:ea typeface="Calibri" pitchFamily="34" charset="-122"/>
                           <a:cs typeface="Calibri" pitchFamily="34" charset="-120"/>
                         </a:rPr>
-                        <a:t>0.87%</a:t>
+                        <a:t>0.43%</a:t>
+                      </a:r>
+                      <a:endParaRPr lang="en-US" sz="500" dirty="0">
+                        <a:latin typeface="Calibri" charset="0"/>
+                        <a:ea typeface="Calibri" charset="0"/>
+                        <a:cs typeface="Calibri" charset="0"/>
+                      </a:endParaRPr>
+                    </a:p>
+                  </a:txBody>
+                  <a:tcPr marL="91440" marR="91440" marT="45720" marB="45720">
+                    <a:lnL w="2540" cap="flat" cmpd="sng" algn="ctr">
+                      <a:solidFill>
+                        <a:srgbClr val="EEEEEE"/>
+                      </a:solidFill>
+                      <a:prstDash val="solid"/>
+                      <a:round/>
+                      <a:headEnd type="none" w="med" len="med"/>
+                      <a:tailEnd type="none" w="med" len="med"/>
+                    </a:lnL>
+                    <a:lnR w="2540" cap="flat" cmpd="sng" algn="ctr">
+                      <a:solidFill>
+                        <a:srgbClr val="EEEEEE"/>
+                      </a:solidFill>
+                      <a:prstDash val="solid"/>
+                      <a:round/>
+                      <a:headEnd type="none" w="med" len="med"/>
+                      <a:tailEnd type="none" w="med" len="med"/>
+                    </a:lnR>
+                    <a:lnT w="2540" cap="flat" cmpd="sng" algn="ctr">
+                      <a:solidFill>
+                        <a:srgbClr val="EEEEEE"/>
+                      </a:solidFill>
+                      <a:prstDash val="solid"/>
+                      <a:round/>
+                      <a:headEnd type="none" w="med" len="med"/>
+                      <a:tailEnd type="none" w="med" len="med"/>
+                    </a:lnT>
+                    <a:lnB w="2540" cap="flat" cmpd="sng" algn="ctr">
+                      <a:solidFill>
+                        <a:srgbClr val="EEEEEE"/>
+                      </a:solidFill>
+                      <a:prstDash val="solid"/>
+                      <a:round/>
+                      <a:headEnd type="none" w="med" len="med"/>
+                      <a:tailEnd type="none" w="med" len="med"/>
+                    </a:lnB>
+                  </a:tcPr>
+                </a:tc>
+                <a:tc>
+                  <a:txBody>
+                    <a:bodyPr/>
+                    <a:lstStyle/>
+                    <a:p>
+                      <a:pPr algn="ctr" indent="0" marL="0">
+                        <a:buNone/>
+                      </a:pPr>
+                      <a:r>
+                        <a:rPr lang="en-US" sz="500" dirty="0">
+                          <a:solidFill>
+                            <a:srgbClr val="000000"/>
+                          </a:solidFill>
+                          <a:latin typeface="Calibri" pitchFamily="34" charset="0"/>
+                          <a:ea typeface="Calibri" pitchFamily="34" charset="-122"/>
+                          <a:cs typeface="Calibri" pitchFamily="34" charset="-120"/>
+                        </a:rPr>
+                        <a:t>0.49%</a:t>
+                      </a:r>
+                      <a:endParaRPr lang="en-US" sz="500" dirty="0">
+                        <a:latin typeface="Calibri" charset="0"/>
+                        <a:ea typeface="Calibri" charset="0"/>
+                        <a:cs typeface="Calibri" charset="0"/>
+                      </a:endParaRPr>
+                    </a:p>
+                  </a:txBody>
+                  <a:tcPr marL="91440" marR="91440" marT="45720" marB="45720">
+                    <a:lnL w="2540" cap="flat" cmpd="sng" algn="ctr">
+                      <a:solidFill>
+                        <a:srgbClr val="EEEEEE"/>
+                      </a:solidFill>
+                      <a:prstDash val="solid"/>
+                      <a:round/>
+                      <a:headEnd type="none" w="med" len="med"/>
+                      <a:tailEnd type="none" w="med" len="med"/>
+                    </a:lnL>
+                    <a:lnR w="2540" cap="flat" cmpd="sng" algn="ctr">
+                      <a:solidFill>
+                        <a:srgbClr val="EEEEEE"/>
+                      </a:solidFill>
+                      <a:prstDash val="solid"/>
+                      <a:round/>
+                      <a:headEnd type="none" w="med" len="med"/>
+                      <a:tailEnd type="none" w="med" len="med"/>
+                    </a:lnR>
+                    <a:lnT w="2540" cap="flat" cmpd="sng" algn="ctr">
+                      <a:solidFill>
+                        <a:srgbClr val="EEEEEE"/>
+                      </a:solidFill>
+                      <a:prstDash val="solid"/>
+                      <a:round/>
+                      <a:headEnd type="none" w="med" len="med"/>
+                      <a:tailEnd type="none" w="med" len="med"/>
+                    </a:lnT>
+                    <a:lnB w="2540" cap="flat" cmpd="sng" algn="ctr">
+                      <a:solidFill>
+                        <a:srgbClr val="EEEEEE"/>
+                      </a:solidFill>
+                      <a:prstDash val="solid"/>
+                      <a:round/>
+                      <a:headEnd type="none" w="med" len="med"/>
+                      <a:tailEnd type="none" w="med" len="med"/>
+                    </a:lnB>
+                  </a:tcPr>
+                </a:tc>
+                <a:tc>
+                  <a:txBody>
+                    <a:bodyPr/>
+                    <a:lstStyle/>
+                    <a:p>
+                      <a:pPr algn="ctr" indent="0" marL="0">
+                        <a:buNone/>
+                      </a:pPr>
+                      <a:r>
+                        <a:rPr lang="en-US" sz="500" dirty="0">
+                          <a:solidFill>
+                            <a:srgbClr val="000000"/>
+                          </a:solidFill>
+                          <a:latin typeface="Calibri" pitchFamily="34" charset="0"/>
+                          <a:ea typeface="Calibri" pitchFamily="34" charset="-122"/>
+                          <a:cs typeface="Calibri" pitchFamily="34" charset="-120"/>
+                        </a:rPr>
+                        <a:t>0.50%</a:t>
                       </a:r>
                       <a:endParaRPr lang="en-US" sz="500" dirty="0">
                         <a:latin typeface="Calibri" charset="0"/>
@@ -11094,7 +14611,7 @@
                           <a:ea typeface="Calibri" pitchFamily="34" charset="-122"/>
                           <a:cs typeface="Calibri" pitchFamily="34" charset="-120"/>
                         </a:rPr>
-                        <a:t>0.63%</a:t>
+                        <a:t>0.59%</a:t>
                       </a:r>
                       <a:endParaRPr lang="en-US" sz="500" dirty="0">
                         <a:latin typeface="Calibri" charset="0"/>
@@ -11159,7 +14676,7 @@
                           <a:ea typeface="Calibri" pitchFamily="34" charset="-122"/>
                           <a:cs typeface="Calibri" pitchFamily="34" charset="-120"/>
                         </a:rPr>
-                        <a:t>0.67%</a:t>
+                        <a:t>0.60%</a:t>
                       </a:r>
                       <a:endParaRPr lang="en-US" sz="500" dirty="0">
                         <a:latin typeface="Calibri" charset="0"/>
@@ -11224,7 +14741,137 @@
                           <a:ea typeface="Calibri" pitchFamily="34" charset="-122"/>
                           <a:cs typeface="Calibri" pitchFamily="34" charset="-120"/>
                         </a:rPr>
-                        <a:t>0.65%</a:t>
+                        <a:t>0.58%</a:t>
+                      </a:r>
+                      <a:endParaRPr lang="en-US" sz="500" dirty="0">
+                        <a:latin typeface="Calibri" charset="0"/>
+                        <a:ea typeface="Calibri" charset="0"/>
+                        <a:cs typeface="Calibri" charset="0"/>
+                      </a:endParaRPr>
+                    </a:p>
+                  </a:txBody>
+                  <a:tcPr marL="91440" marR="91440" marT="45720" marB="45720">
+                    <a:lnL w="2540" cap="flat" cmpd="sng" algn="ctr">
+                      <a:solidFill>
+                        <a:srgbClr val="EEEEEE"/>
+                      </a:solidFill>
+                      <a:prstDash val="solid"/>
+                      <a:round/>
+                      <a:headEnd type="none" w="med" len="med"/>
+                      <a:tailEnd type="none" w="med" len="med"/>
+                    </a:lnL>
+                    <a:lnR w="2540" cap="flat" cmpd="sng" algn="ctr">
+                      <a:solidFill>
+                        <a:srgbClr val="EEEEEE"/>
+                      </a:solidFill>
+                      <a:prstDash val="solid"/>
+                      <a:round/>
+                      <a:headEnd type="none" w="med" len="med"/>
+                      <a:tailEnd type="none" w="med" len="med"/>
+                    </a:lnR>
+                    <a:lnT w="2540" cap="flat" cmpd="sng" algn="ctr">
+                      <a:solidFill>
+                        <a:srgbClr val="EEEEEE"/>
+                      </a:solidFill>
+                      <a:prstDash val="solid"/>
+                      <a:round/>
+                      <a:headEnd type="none" w="med" len="med"/>
+                      <a:tailEnd type="none" w="med" len="med"/>
+                    </a:lnT>
+                    <a:lnB w="2540" cap="flat" cmpd="sng" algn="ctr">
+                      <a:solidFill>
+                        <a:srgbClr val="EEEEEE"/>
+                      </a:solidFill>
+                      <a:prstDash val="solid"/>
+                      <a:round/>
+                      <a:headEnd type="none" w="med" len="med"/>
+                      <a:tailEnd type="none" w="med" len="med"/>
+                    </a:lnB>
+                  </a:tcPr>
+                </a:tc>
+                <a:tc>
+                  <a:txBody>
+                    <a:bodyPr/>
+                    <a:lstStyle/>
+                    <a:p>
+                      <a:pPr algn="ctr" indent="0" marL="0">
+                        <a:buNone/>
+                      </a:pPr>
+                      <a:r>
+                        <a:rPr lang="en-US" sz="500" dirty="0">
+                          <a:solidFill>
+                            <a:srgbClr val="000000"/>
+                          </a:solidFill>
+                          <a:latin typeface="Calibri" pitchFamily="34" charset="0"/>
+                          <a:ea typeface="Calibri" pitchFamily="34" charset="-122"/>
+                          <a:cs typeface="Calibri" pitchFamily="34" charset="-120"/>
+                        </a:rPr>
+                        <a:t>0.61%</a:t>
+                      </a:r>
+                      <a:endParaRPr lang="en-US" sz="500" dirty="0">
+                        <a:latin typeface="Calibri" charset="0"/>
+                        <a:ea typeface="Calibri" charset="0"/>
+                        <a:cs typeface="Calibri" charset="0"/>
+                      </a:endParaRPr>
+                    </a:p>
+                  </a:txBody>
+                  <a:tcPr marL="91440" marR="91440" marT="45720" marB="45720">
+                    <a:lnL w="2540" cap="flat" cmpd="sng" algn="ctr">
+                      <a:solidFill>
+                        <a:srgbClr val="EEEEEE"/>
+                      </a:solidFill>
+                      <a:prstDash val="solid"/>
+                      <a:round/>
+                      <a:headEnd type="none" w="med" len="med"/>
+                      <a:tailEnd type="none" w="med" len="med"/>
+                    </a:lnL>
+                    <a:lnR w="2540" cap="flat" cmpd="sng" algn="ctr">
+                      <a:solidFill>
+                        <a:srgbClr val="EEEEEE"/>
+                      </a:solidFill>
+                      <a:prstDash val="solid"/>
+                      <a:round/>
+                      <a:headEnd type="none" w="med" len="med"/>
+                      <a:tailEnd type="none" w="med" len="med"/>
+                    </a:lnR>
+                    <a:lnT w="2540" cap="flat" cmpd="sng" algn="ctr">
+                      <a:solidFill>
+                        <a:srgbClr val="EEEEEE"/>
+                      </a:solidFill>
+                      <a:prstDash val="solid"/>
+                      <a:round/>
+                      <a:headEnd type="none" w="med" len="med"/>
+                      <a:tailEnd type="none" w="med" len="med"/>
+                    </a:lnT>
+                    <a:lnB w="2540" cap="flat" cmpd="sng" algn="ctr">
+                      <a:solidFill>
+                        <a:srgbClr val="EEEEEE"/>
+                      </a:solidFill>
+                      <a:prstDash val="solid"/>
+                      <a:round/>
+                      <a:headEnd type="none" w="med" len="med"/>
+                      <a:tailEnd type="none" w="med" len="med"/>
+                    </a:lnB>
+                  </a:tcPr>
+                </a:tc>
+                <a:tc>
+                  <a:txBody>
+                    <a:bodyPr/>
+                    <a:lstStyle/>
+                    <a:p>
+                      <a:pPr algn="ctr" indent="0" marL="0">
+                        <a:buNone/>
+                      </a:pPr>
+                      <a:r>
+                        <a:rPr lang="en-US" sz="500" dirty="0">
+                          <a:solidFill>
+                            <a:srgbClr val="000000"/>
+                          </a:solidFill>
+                          <a:latin typeface="Calibri" pitchFamily="34" charset="0"/>
+                          <a:ea typeface="Calibri" pitchFamily="34" charset="-122"/>
+                          <a:cs typeface="Calibri" pitchFamily="34" charset="-120"/>
+                        </a:rPr>
+                        <a:t>0.58%</a:t>
                       </a:r>
                       <a:endParaRPr lang="en-US" sz="500" dirty="0">
                         <a:latin typeface="Calibri" charset="0"/>
@@ -11354,7 +15001,7 @@
                           <a:ea typeface="Calibri" pitchFamily="34" charset="-122"/>
                           <a:cs typeface="Calibri" pitchFamily="34" charset="-120"/>
                         </a:rPr>
-                        <a:t>0.54%</a:t>
+                        <a:t>0.58%</a:t>
                       </a:r>
                       <a:endParaRPr lang="en-US" sz="500" dirty="0">
                         <a:latin typeface="Calibri" charset="0"/>
@@ -11419,267 +15066,7 @@
                           <a:ea typeface="Calibri" pitchFamily="34" charset="-122"/>
                           <a:cs typeface="Calibri" pitchFamily="34" charset="-120"/>
                         </a:rPr>
-                        <a:t>0.55%</a:t>
-                      </a:r>
-                      <a:endParaRPr lang="en-US" sz="500" dirty="0">
-                        <a:latin typeface="Calibri" charset="0"/>
-                        <a:ea typeface="Calibri" charset="0"/>
-                        <a:cs typeface="Calibri" charset="0"/>
-                      </a:endParaRPr>
-                    </a:p>
-                  </a:txBody>
-                  <a:tcPr marL="91440" marR="91440" marT="45720" marB="45720">
-                    <a:lnL w="2540" cap="flat" cmpd="sng" algn="ctr">
-                      <a:solidFill>
-                        <a:srgbClr val="EEEEEE"/>
-                      </a:solidFill>
-                      <a:prstDash val="solid"/>
-                      <a:round/>
-                      <a:headEnd type="none" w="med" len="med"/>
-                      <a:tailEnd type="none" w="med" len="med"/>
-                    </a:lnL>
-                    <a:lnR w="2540" cap="flat" cmpd="sng" algn="ctr">
-                      <a:solidFill>
-                        <a:srgbClr val="EEEEEE"/>
-                      </a:solidFill>
-                      <a:prstDash val="solid"/>
-                      <a:round/>
-                      <a:headEnd type="none" w="med" len="med"/>
-                      <a:tailEnd type="none" w="med" len="med"/>
-                    </a:lnR>
-                    <a:lnT w="2540" cap="flat" cmpd="sng" algn="ctr">
-                      <a:solidFill>
-                        <a:srgbClr val="EEEEEE"/>
-                      </a:solidFill>
-                      <a:prstDash val="solid"/>
-                      <a:round/>
-                      <a:headEnd type="none" w="med" len="med"/>
-                      <a:tailEnd type="none" w="med" len="med"/>
-                    </a:lnT>
-                    <a:lnB w="2540" cap="flat" cmpd="sng" algn="ctr">
-                      <a:solidFill>
-                        <a:srgbClr val="EEEEEE"/>
-                      </a:solidFill>
-                      <a:prstDash val="solid"/>
-                      <a:round/>
-                      <a:headEnd type="none" w="med" len="med"/>
-                      <a:tailEnd type="none" w="med" len="med"/>
-                    </a:lnB>
-                  </a:tcPr>
-                </a:tc>
-                <a:tc>
-                  <a:txBody>
-                    <a:bodyPr/>
-                    <a:lstStyle/>
-                    <a:p>
-                      <a:pPr algn="ctr" indent="0" marL="0">
-                        <a:buNone/>
-                      </a:pPr>
-                      <a:r>
-                        <a:rPr lang="en-US" sz="500" dirty="0">
-                          <a:solidFill>
-                            <a:srgbClr val="000000"/>
-                          </a:solidFill>
-                          <a:latin typeface="Calibri" pitchFamily="34" charset="0"/>
-                          <a:ea typeface="Calibri" pitchFamily="34" charset="-122"/>
-                          <a:cs typeface="Calibri" pitchFamily="34" charset="-120"/>
-                        </a:rPr>
-                        <a:t>0.50%</a:t>
-                      </a:r>
-                      <a:endParaRPr lang="en-US" sz="500" dirty="0">
-                        <a:latin typeface="Calibri" charset="0"/>
-                        <a:ea typeface="Calibri" charset="0"/>
-                        <a:cs typeface="Calibri" charset="0"/>
-                      </a:endParaRPr>
-                    </a:p>
-                  </a:txBody>
-                  <a:tcPr marL="91440" marR="91440" marT="45720" marB="45720">
-                    <a:lnL w="2540" cap="flat" cmpd="sng" algn="ctr">
-                      <a:solidFill>
-                        <a:srgbClr val="EEEEEE"/>
-                      </a:solidFill>
-                      <a:prstDash val="solid"/>
-                      <a:round/>
-                      <a:headEnd type="none" w="med" len="med"/>
-                      <a:tailEnd type="none" w="med" len="med"/>
-                    </a:lnL>
-                    <a:lnR w="2540" cap="flat" cmpd="sng" algn="ctr">
-                      <a:solidFill>
-                        <a:srgbClr val="EEEEEE"/>
-                      </a:solidFill>
-                      <a:prstDash val="solid"/>
-                      <a:round/>
-                      <a:headEnd type="none" w="med" len="med"/>
-                      <a:tailEnd type="none" w="med" len="med"/>
-                    </a:lnR>
-                    <a:lnT w="2540" cap="flat" cmpd="sng" algn="ctr">
-                      <a:solidFill>
-                        <a:srgbClr val="EEEEEE"/>
-                      </a:solidFill>
-                      <a:prstDash val="solid"/>
-                      <a:round/>
-                      <a:headEnd type="none" w="med" len="med"/>
-                      <a:tailEnd type="none" w="med" len="med"/>
-                    </a:lnT>
-                    <a:lnB w="2540" cap="flat" cmpd="sng" algn="ctr">
-                      <a:solidFill>
-                        <a:srgbClr val="EEEEEE"/>
-                      </a:solidFill>
-                      <a:prstDash val="solid"/>
-                      <a:round/>
-                      <a:headEnd type="none" w="med" len="med"/>
-                      <a:tailEnd type="none" w="med" len="med"/>
-                    </a:lnB>
-                  </a:tcPr>
-                </a:tc>
-                <a:tc>
-                  <a:txBody>
-                    <a:bodyPr/>
-                    <a:lstStyle/>
-                    <a:p>
-                      <a:pPr algn="ctr" indent="0" marL="0">
-                        <a:buNone/>
-                      </a:pPr>
-                      <a:r>
-                        <a:rPr lang="en-US" sz="500" dirty="0">
-                          <a:solidFill>
-                            <a:srgbClr val="000000"/>
-                          </a:solidFill>
-                          <a:latin typeface="Calibri" pitchFamily="34" charset="0"/>
-                          <a:ea typeface="Calibri" pitchFamily="34" charset="-122"/>
-                          <a:cs typeface="Calibri" pitchFamily="34" charset="-120"/>
-                        </a:rPr>
-                        <a:t>0.46%</a:t>
-                      </a:r>
-                      <a:endParaRPr lang="en-US" sz="500" dirty="0">
-                        <a:latin typeface="Calibri" charset="0"/>
-                        <a:ea typeface="Calibri" charset="0"/>
-                        <a:cs typeface="Calibri" charset="0"/>
-                      </a:endParaRPr>
-                    </a:p>
-                  </a:txBody>
-                  <a:tcPr marL="91440" marR="91440" marT="45720" marB="45720">
-                    <a:lnL w="2540" cap="flat" cmpd="sng" algn="ctr">
-                      <a:solidFill>
-                        <a:srgbClr val="EEEEEE"/>
-                      </a:solidFill>
-                      <a:prstDash val="solid"/>
-                      <a:round/>
-                      <a:headEnd type="none" w="med" len="med"/>
-                      <a:tailEnd type="none" w="med" len="med"/>
-                    </a:lnL>
-                    <a:lnR w="2540" cap="flat" cmpd="sng" algn="ctr">
-                      <a:solidFill>
-                        <a:srgbClr val="EEEEEE"/>
-                      </a:solidFill>
-                      <a:prstDash val="solid"/>
-                      <a:round/>
-                      <a:headEnd type="none" w="med" len="med"/>
-                      <a:tailEnd type="none" w="med" len="med"/>
-                    </a:lnR>
-                    <a:lnT w="2540" cap="flat" cmpd="sng" algn="ctr">
-                      <a:solidFill>
-                        <a:srgbClr val="EEEEEE"/>
-                      </a:solidFill>
-                      <a:prstDash val="solid"/>
-                      <a:round/>
-                      <a:headEnd type="none" w="med" len="med"/>
-                      <a:tailEnd type="none" w="med" len="med"/>
-                    </a:lnT>
-                    <a:lnB w="2540" cap="flat" cmpd="sng" algn="ctr">
-                      <a:solidFill>
-                        <a:srgbClr val="EEEEEE"/>
-                      </a:solidFill>
-                      <a:prstDash val="solid"/>
-                      <a:round/>
-                      <a:headEnd type="none" w="med" len="med"/>
-                      <a:tailEnd type="none" w="med" len="med"/>
-                    </a:lnB>
-                  </a:tcPr>
-                </a:tc>
-                <a:tc>
-                  <a:txBody>
-                    <a:bodyPr/>
-                    <a:lstStyle/>
-                    <a:p>
-                      <a:pPr algn="ctr" indent="0" marL="0">
-                        <a:buNone/>
-                      </a:pPr>
-                      <a:r>
-                        <a:rPr lang="en-US" sz="500" dirty="0">
-                          <a:solidFill>
-                            <a:srgbClr val="000000"/>
-                          </a:solidFill>
-                          <a:latin typeface="Calibri" pitchFamily="34" charset="0"/>
-                          <a:ea typeface="Calibri" pitchFamily="34" charset="-122"/>
-                          <a:cs typeface="Calibri" pitchFamily="34" charset="-120"/>
-                        </a:rPr>
-                        <a:t>0.45%</a:t>
-                      </a:r>
-                      <a:endParaRPr lang="en-US" sz="500" dirty="0">
-                        <a:latin typeface="Calibri" charset="0"/>
-                        <a:ea typeface="Calibri" charset="0"/>
-                        <a:cs typeface="Calibri" charset="0"/>
-                      </a:endParaRPr>
-                    </a:p>
-                  </a:txBody>
-                  <a:tcPr marL="91440" marR="91440" marT="45720" marB="45720">
-                    <a:lnL w="2540" cap="flat" cmpd="sng" algn="ctr">
-                      <a:solidFill>
-                        <a:srgbClr val="EEEEEE"/>
-                      </a:solidFill>
-                      <a:prstDash val="solid"/>
-                      <a:round/>
-                      <a:headEnd type="none" w="med" len="med"/>
-                      <a:tailEnd type="none" w="med" len="med"/>
-                    </a:lnL>
-                    <a:lnR w="2540" cap="flat" cmpd="sng" algn="ctr">
-                      <a:solidFill>
-                        <a:srgbClr val="EEEEEE"/>
-                      </a:solidFill>
-                      <a:prstDash val="solid"/>
-                      <a:round/>
-                      <a:headEnd type="none" w="med" len="med"/>
-                      <a:tailEnd type="none" w="med" len="med"/>
-                    </a:lnR>
-                    <a:lnT w="2540" cap="flat" cmpd="sng" algn="ctr">
-                      <a:solidFill>
-                        <a:srgbClr val="EEEEEE"/>
-                      </a:solidFill>
-                      <a:prstDash val="solid"/>
-                      <a:round/>
-                      <a:headEnd type="none" w="med" len="med"/>
-                      <a:tailEnd type="none" w="med" len="med"/>
-                    </a:lnT>
-                    <a:lnB w="2540" cap="flat" cmpd="sng" algn="ctr">
-                      <a:solidFill>
-                        <a:srgbClr val="EEEEEE"/>
-                      </a:solidFill>
-                      <a:prstDash val="solid"/>
-                      <a:round/>
-                      <a:headEnd type="none" w="med" len="med"/>
-                      <a:tailEnd type="none" w="med" len="med"/>
-                    </a:lnB>
-                  </a:tcPr>
-                </a:tc>
-                <a:tc>
-                  <a:txBody>
-                    <a:bodyPr/>
-                    <a:lstStyle/>
-                    <a:p>
-                      <a:pPr algn="ctr" indent="0" marL="0">
-                        <a:buNone/>
-                      </a:pPr>
-                      <a:r>
-                        <a:rPr lang="en-US" sz="500" dirty="0">
-                          <a:solidFill>
-                            <a:srgbClr val="000000"/>
-                          </a:solidFill>
-                          <a:latin typeface="Calibri" pitchFamily="34" charset="0"/>
-                          <a:ea typeface="Calibri" pitchFamily="34" charset="-122"/>
-                          <a:cs typeface="Calibri" pitchFamily="34" charset="-120"/>
-                        </a:rPr>
-                        <a:t>0.39%</a:t>
+                        <a:t>0.60%</a:t>
                       </a:r>
                       <a:endParaRPr lang="en-US" sz="500" dirty="0">
                         <a:latin typeface="Calibri" charset="0"/>
@@ -11744,7 +15131,7 @@
                           <a:ea typeface="Calibri" pitchFamily="34" charset="-122"/>
                           <a:cs typeface="Calibri" pitchFamily="34" charset="-120"/>
                         </a:rPr>
-                        <a:t>7.21%</a:t>
+                        <a:t>6.61%</a:t>
                       </a:r>
                       <a:endParaRPr lang="en-US" sz="500" dirty="0">
                         <a:latin typeface="Calibri" charset="0"/>
@@ -11811,7 +15198,7 @@
                           <a:ea typeface="Calibri" pitchFamily="34" charset="-122"/>
                           <a:cs typeface="Calibri" pitchFamily="34" charset="-120"/>
                         </a:rPr>
-                        <a:t>2025</a:t>
+                        <a:t>2026</a:t>
                       </a:r>
                       <a:endParaRPr lang="en-US" sz="500" dirty="0">
                         <a:latin typeface="Calibri" charset="0"/>
@@ -11941,7 +15328,7 @@
                           <a:ea typeface="Calibri" pitchFamily="34" charset="-122"/>
                           <a:cs typeface="Calibri" pitchFamily="34" charset="-120"/>
                         </a:rPr>
-                        <a:t>0.42%</a:t>
+                        <a:t>0.39%</a:t>
                       </a:r>
                       <a:endParaRPr lang="en-US" sz="500" dirty="0">
                         <a:latin typeface="Calibri" charset="0"/>
@@ -12006,592 +15393,7 @@
                           <a:ea typeface="Calibri" pitchFamily="34" charset="-122"/>
                           <a:cs typeface="Calibri" pitchFamily="34" charset="-120"/>
                         </a:rPr>
-                        <a:t>0.42%</a:t>
-                      </a:r>
-                      <a:endParaRPr lang="en-US" sz="500" dirty="0">
-                        <a:latin typeface="Calibri" charset="0"/>
-                        <a:ea typeface="Calibri" charset="0"/>
-                        <a:cs typeface="Calibri" charset="0"/>
-                      </a:endParaRPr>
-                    </a:p>
-                  </a:txBody>
-                  <a:tcPr marL="91440" marR="91440" marT="45720" marB="45720">
-                    <a:lnL w="2540" cap="flat" cmpd="sng" algn="ctr">
-                      <a:solidFill>
-                        <a:srgbClr val="EEEEEE"/>
-                      </a:solidFill>
-                      <a:prstDash val="solid"/>
-                      <a:round/>
-                      <a:headEnd type="none" w="med" len="med"/>
-                      <a:tailEnd type="none" w="med" len="med"/>
-                    </a:lnL>
-                    <a:lnR w="2540" cap="flat" cmpd="sng" algn="ctr">
-                      <a:solidFill>
-                        <a:srgbClr val="EEEEEE"/>
-                      </a:solidFill>
-                      <a:prstDash val="solid"/>
-                      <a:round/>
-                      <a:headEnd type="none" w="med" len="med"/>
-                      <a:tailEnd type="none" w="med" len="med"/>
-                    </a:lnR>
-                    <a:lnT w="2540" cap="flat" cmpd="sng" algn="ctr">
-                      <a:solidFill>
-                        <a:srgbClr val="EEEEEE"/>
-                      </a:solidFill>
-                      <a:prstDash val="solid"/>
-                      <a:round/>
-                      <a:headEnd type="none" w="med" len="med"/>
-                      <a:tailEnd type="none" w="med" len="med"/>
-                    </a:lnT>
-                    <a:lnB w="2540" cap="flat" cmpd="sng" algn="ctr">
-                      <a:solidFill>
-                        <a:srgbClr val="EEEEEE"/>
-                      </a:solidFill>
-                      <a:prstDash val="solid"/>
-                      <a:round/>
-                      <a:headEnd type="none" w="med" len="med"/>
-                      <a:tailEnd type="none" w="med" len="med"/>
-                    </a:lnB>
-                  </a:tcPr>
-                </a:tc>
-                <a:tc>
-                  <a:txBody>
-                    <a:bodyPr/>
-                    <a:lstStyle/>
-                    <a:p>
-                      <a:pPr algn="ctr" indent="0" marL="0">
-                        <a:buNone/>
-                      </a:pPr>
-                      <a:r>
-                        <a:rPr lang="en-US" sz="500" dirty="0">
-                          <a:solidFill>
-                            <a:srgbClr val="777777"/>
-                          </a:solidFill>
-                          <a:latin typeface="Calibri" pitchFamily="34" charset="0"/>
-                          <a:ea typeface="Calibri" pitchFamily="34" charset="-122"/>
-                          <a:cs typeface="Calibri" pitchFamily="34" charset="-120"/>
-                        </a:rPr>
-                        <a:t>0.42%</a:t>
-                      </a:r>
-                      <a:endParaRPr lang="en-US" sz="500" dirty="0">
-                        <a:latin typeface="Calibri" charset="0"/>
-                        <a:ea typeface="Calibri" charset="0"/>
-                        <a:cs typeface="Calibri" charset="0"/>
-                      </a:endParaRPr>
-                    </a:p>
-                  </a:txBody>
-                  <a:tcPr marL="91440" marR="91440" marT="45720" marB="45720">
-                    <a:lnL w="2540" cap="flat" cmpd="sng" algn="ctr">
-                      <a:solidFill>
-                        <a:srgbClr val="EEEEEE"/>
-                      </a:solidFill>
-                      <a:prstDash val="solid"/>
-                      <a:round/>
-                      <a:headEnd type="none" w="med" len="med"/>
-                      <a:tailEnd type="none" w="med" len="med"/>
-                    </a:lnL>
-                    <a:lnR w="2540" cap="flat" cmpd="sng" algn="ctr">
-                      <a:solidFill>
-                        <a:srgbClr val="EEEEEE"/>
-                      </a:solidFill>
-                      <a:prstDash val="solid"/>
-                      <a:round/>
-                      <a:headEnd type="none" w="med" len="med"/>
-                      <a:tailEnd type="none" w="med" len="med"/>
-                    </a:lnR>
-                    <a:lnT w="2540" cap="flat" cmpd="sng" algn="ctr">
-                      <a:solidFill>
-                        <a:srgbClr val="EEEEEE"/>
-                      </a:solidFill>
-                      <a:prstDash val="solid"/>
-                      <a:round/>
-                      <a:headEnd type="none" w="med" len="med"/>
-                      <a:tailEnd type="none" w="med" len="med"/>
-                    </a:lnT>
-                    <a:lnB w="2540" cap="flat" cmpd="sng" algn="ctr">
-                      <a:solidFill>
-                        <a:srgbClr val="EEEEEE"/>
-                      </a:solidFill>
-                      <a:prstDash val="solid"/>
-                      <a:round/>
-                      <a:headEnd type="none" w="med" len="med"/>
-                      <a:tailEnd type="none" w="med" len="med"/>
-                    </a:lnB>
-                  </a:tcPr>
-                </a:tc>
-                <a:tc>
-                  <a:txBody>
-                    <a:bodyPr/>
-                    <a:lstStyle/>
-                    <a:p>
-                      <a:pPr algn="ctr" indent="0" marL="0">
-                        <a:buNone/>
-                      </a:pPr>
-                      <a:r>
-                        <a:rPr lang="en-US" sz="500" dirty="0">
-                          <a:solidFill>
-                            <a:srgbClr val="777777"/>
-                          </a:solidFill>
-                          <a:latin typeface="Calibri" pitchFamily="34" charset="0"/>
-                          <a:ea typeface="Calibri" pitchFamily="34" charset="-122"/>
-                          <a:cs typeface="Calibri" pitchFamily="34" charset="-120"/>
-                        </a:rPr>
-                        <a:t>0.42%</a:t>
-                      </a:r>
-                      <a:endParaRPr lang="en-US" sz="500" dirty="0">
-                        <a:latin typeface="Calibri" charset="0"/>
-                        <a:ea typeface="Calibri" charset="0"/>
-                        <a:cs typeface="Calibri" charset="0"/>
-                      </a:endParaRPr>
-                    </a:p>
-                  </a:txBody>
-                  <a:tcPr marL="91440" marR="91440" marT="45720" marB="45720">
-                    <a:lnL w="2540" cap="flat" cmpd="sng" algn="ctr">
-                      <a:solidFill>
-                        <a:srgbClr val="EEEEEE"/>
-                      </a:solidFill>
-                      <a:prstDash val="solid"/>
-                      <a:round/>
-                      <a:headEnd type="none" w="med" len="med"/>
-                      <a:tailEnd type="none" w="med" len="med"/>
-                    </a:lnL>
-                    <a:lnR w="2540" cap="flat" cmpd="sng" algn="ctr">
-                      <a:solidFill>
-                        <a:srgbClr val="EEEEEE"/>
-                      </a:solidFill>
-                      <a:prstDash val="solid"/>
-                      <a:round/>
-                      <a:headEnd type="none" w="med" len="med"/>
-                      <a:tailEnd type="none" w="med" len="med"/>
-                    </a:lnR>
-                    <a:lnT w="2540" cap="flat" cmpd="sng" algn="ctr">
-                      <a:solidFill>
-                        <a:srgbClr val="EEEEEE"/>
-                      </a:solidFill>
-                      <a:prstDash val="solid"/>
-                      <a:round/>
-                      <a:headEnd type="none" w="med" len="med"/>
-                      <a:tailEnd type="none" w="med" len="med"/>
-                    </a:lnT>
-                    <a:lnB w="2540" cap="flat" cmpd="sng" algn="ctr">
-                      <a:solidFill>
-                        <a:srgbClr val="EEEEEE"/>
-                      </a:solidFill>
-                      <a:prstDash val="solid"/>
-                      <a:round/>
-                      <a:headEnd type="none" w="med" len="med"/>
-                      <a:tailEnd type="none" w="med" len="med"/>
-                    </a:lnB>
-                  </a:tcPr>
-                </a:tc>
-                <a:tc>
-                  <a:txBody>
-                    <a:bodyPr/>
-                    <a:lstStyle/>
-                    <a:p>
-                      <a:pPr algn="ctr" indent="0" marL="0">
-                        <a:buNone/>
-                      </a:pPr>
-                      <a:r>
-                        <a:rPr lang="en-US" sz="500" dirty="0">
-                          <a:solidFill>
-                            <a:srgbClr val="777777"/>
-                          </a:solidFill>
-                          <a:latin typeface="Calibri" pitchFamily="34" charset="0"/>
-                          <a:ea typeface="Calibri" pitchFamily="34" charset="-122"/>
-                          <a:cs typeface="Calibri" pitchFamily="34" charset="-120"/>
-                        </a:rPr>
-                        <a:t>0.42%</a:t>
-                      </a:r>
-                      <a:endParaRPr lang="en-US" sz="500" dirty="0">
-                        <a:latin typeface="Calibri" charset="0"/>
-                        <a:ea typeface="Calibri" charset="0"/>
-                        <a:cs typeface="Calibri" charset="0"/>
-                      </a:endParaRPr>
-                    </a:p>
-                  </a:txBody>
-                  <a:tcPr marL="91440" marR="91440" marT="45720" marB="45720">
-                    <a:lnL w="2540" cap="flat" cmpd="sng" algn="ctr">
-                      <a:solidFill>
-                        <a:srgbClr val="EEEEEE"/>
-                      </a:solidFill>
-                      <a:prstDash val="solid"/>
-                      <a:round/>
-                      <a:headEnd type="none" w="med" len="med"/>
-                      <a:tailEnd type="none" w="med" len="med"/>
-                    </a:lnL>
-                    <a:lnR w="2540" cap="flat" cmpd="sng" algn="ctr">
-                      <a:solidFill>
-                        <a:srgbClr val="EEEEEE"/>
-                      </a:solidFill>
-                      <a:prstDash val="solid"/>
-                      <a:round/>
-                      <a:headEnd type="none" w="med" len="med"/>
-                      <a:tailEnd type="none" w="med" len="med"/>
-                    </a:lnR>
-                    <a:lnT w="2540" cap="flat" cmpd="sng" algn="ctr">
-                      <a:solidFill>
-                        <a:srgbClr val="EEEEEE"/>
-                      </a:solidFill>
-                      <a:prstDash val="solid"/>
-                      <a:round/>
-                      <a:headEnd type="none" w="med" len="med"/>
-                      <a:tailEnd type="none" w="med" len="med"/>
-                    </a:lnT>
-                    <a:lnB w="2540" cap="flat" cmpd="sng" algn="ctr">
-                      <a:solidFill>
-                        <a:srgbClr val="EEEEEE"/>
-                      </a:solidFill>
-                      <a:prstDash val="solid"/>
-                      <a:round/>
-                      <a:headEnd type="none" w="med" len="med"/>
-                      <a:tailEnd type="none" w="med" len="med"/>
-                    </a:lnB>
-                  </a:tcPr>
-                </a:tc>
-                <a:tc>
-                  <a:txBody>
-                    <a:bodyPr/>
-                    <a:lstStyle/>
-                    <a:p>
-                      <a:pPr algn="ctr" indent="0" marL="0">
-                        <a:buNone/>
-                      </a:pPr>
-                      <a:r>
-                        <a:rPr lang="en-US" sz="500" dirty="0">
-                          <a:solidFill>
-                            <a:srgbClr val="777777"/>
-                          </a:solidFill>
-                          <a:latin typeface="Calibri" pitchFamily="34" charset="0"/>
-                          <a:ea typeface="Calibri" pitchFamily="34" charset="-122"/>
-                          <a:cs typeface="Calibri" pitchFamily="34" charset="-120"/>
-                        </a:rPr>
-                        <a:t>0.42%</a:t>
-                      </a:r>
-                      <a:endParaRPr lang="en-US" sz="500" dirty="0">
-                        <a:latin typeface="Calibri" charset="0"/>
-                        <a:ea typeface="Calibri" charset="0"/>
-                        <a:cs typeface="Calibri" charset="0"/>
-                      </a:endParaRPr>
-                    </a:p>
-                  </a:txBody>
-                  <a:tcPr marL="91440" marR="91440" marT="45720" marB="45720">
-                    <a:lnL w="2540" cap="flat" cmpd="sng" algn="ctr">
-                      <a:solidFill>
-                        <a:srgbClr val="EEEEEE"/>
-                      </a:solidFill>
-                      <a:prstDash val="solid"/>
-                      <a:round/>
-                      <a:headEnd type="none" w="med" len="med"/>
-                      <a:tailEnd type="none" w="med" len="med"/>
-                    </a:lnL>
-                    <a:lnR w="2540" cap="flat" cmpd="sng" algn="ctr">
-                      <a:solidFill>
-                        <a:srgbClr val="EEEEEE"/>
-                      </a:solidFill>
-                      <a:prstDash val="solid"/>
-                      <a:round/>
-                      <a:headEnd type="none" w="med" len="med"/>
-                      <a:tailEnd type="none" w="med" len="med"/>
-                    </a:lnR>
-                    <a:lnT w="2540" cap="flat" cmpd="sng" algn="ctr">
-                      <a:solidFill>
-                        <a:srgbClr val="EEEEEE"/>
-                      </a:solidFill>
-                      <a:prstDash val="solid"/>
-                      <a:round/>
-                      <a:headEnd type="none" w="med" len="med"/>
-                      <a:tailEnd type="none" w="med" len="med"/>
-                    </a:lnT>
-                    <a:lnB w="2540" cap="flat" cmpd="sng" algn="ctr">
-                      <a:solidFill>
-                        <a:srgbClr val="EEEEEE"/>
-                      </a:solidFill>
-                      <a:prstDash val="solid"/>
-                      <a:round/>
-                      <a:headEnd type="none" w="med" len="med"/>
-                      <a:tailEnd type="none" w="med" len="med"/>
-                    </a:lnB>
-                  </a:tcPr>
-                </a:tc>
-                <a:tc>
-                  <a:txBody>
-                    <a:bodyPr/>
-                    <a:lstStyle/>
-                    <a:p>
-                      <a:pPr algn="ctr" indent="0" marL="0">
-                        <a:buNone/>
-                      </a:pPr>
-                      <a:r>
-                        <a:rPr lang="en-US" sz="500" dirty="0">
-                          <a:solidFill>
-                            <a:srgbClr val="777777"/>
-                          </a:solidFill>
-                          <a:latin typeface="Calibri" pitchFamily="34" charset="0"/>
-                          <a:ea typeface="Calibri" pitchFamily="34" charset="-122"/>
-                          <a:cs typeface="Calibri" pitchFamily="34" charset="-120"/>
-                        </a:rPr>
-                        <a:t>0.41%</a:t>
-                      </a:r>
-                      <a:endParaRPr lang="en-US" sz="500" dirty="0">
-                        <a:latin typeface="Calibri" charset="0"/>
-                        <a:ea typeface="Calibri" charset="0"/>
-                        <a:cs typeface="Calibri" charset="0"/>
-                      </a:endParaRPr>
-                    </a:p>
-                  </a:txBody>
-                  <a:tcPr marL="91440" marR="91440" marT="45720" marB="45720">
-                    <a:lnL w="2540" cap="flat" cmpd="sng" algn="ctr">
-                      <a:solidFill>
-                        <a:srgbClr val="EEEEEE"/>
-                      </a:solidFill>
-                      <a:prstDash val="solid"/>
-                      <a:round/>
-                      <a:headEnd type="none" w="med" len="med"/>
-                      <a:tailEnd type="none" w="med" len="med"/>
-                    </a:lnL>
-                    <a:lnR w="2540" cap="flat" cmpd="sng" algn="ctr">
-                      <a:solidFill>
-                        <a:srgbClr val="EEEEEE"/>
-                      </a:solidFill>
-                      <a:prstDash val="solid"/>
-                      <a:round/>
-                      <a:headEnd type="none" w="med" len="med"/>
-                      <a:tailEnd type="none" w="med" len="med"/>
-                    </a:lnR>
-                    <a:lnT w="2540" cap="flat" cmpd="sng" algn="ctr">
-                      <a:solidFill>
-                        <a:srgbClr val="EEEEEE"/>
-                      </a:solidFill>
-                      <a:prstDash val="solid"/>
-                      <a:round/>
-                      <a:headEnd type="none" w="med" len="med"/>
-                      <a:tailEnd type="none" w="med" len="med"/>
-                    </a:lnT>
-                    <a:lnB w="2540" cap="flat" cmpd="sng" algn="ctr">
-                      <a:solidFill>
-                        <a:srgbClr val="EEEEEE"/>
-                      </a:solidFill>
-                      <a:prstDash val="solid"/>
-                      <a:round/>
-                      <a:headEnd type="none" w="med" len="med"/>
-                      <a:tailEnd type="none" w="med" len="med"/>
-                    </a:lnB>
-                  </a:tcPr>
-                </a:tc>
-                <a:tc>
-                  <a:txBody>
-                    <a:bodyPr/>
-                    <a:lstStyle/>
-                    <a:p>
-                      <a:pPr algn="ctr" indent="0" marL="0">
-                        <a:buNone/>
-                      </a:pPr>
-                      <a:r>
-                        <a:rPr lang="en-US" sz="500" dirty="0">
-                          <a:solidFill>
-                            <a:srgbClr val="777777"/>
-                          </a:solidFill>
-                          <a:latin typeface="Calibri" pitchFamily="34" charset="0"/>
-                          <a:ea typeface="Calibri" pitchFamily="34" charset="-122"/>
-                          <a:cs typeface="Calibri" pitchFamily="34" charset="-120"/>
-                        </a:rPr>
-                        <a:t>0.40%</a:t>
-                      </a:r>
-                      <a:endParaRPr lang="en-US" sz="500" dirty="0">
-                        <a:latin typeface="Calibri" charset="0"/>
-                        <a:ea typeface="Calibri" charset="0"/>
-                        <a:cs typeface="Calibri" charset="0"/>
-                      </a:endParaRPr>
-                    </a:p>
-                  </a:txBody>
-                  <a:tcPr marL="91440" marR="91440" marT="45720" marB="45720">
-                    <a:lnL w="2540" cap="flat" cmpd="sng" algn="ctr">
-                      <a:solidFill>
-                        <a:srgbClr val="EEEEEE"/>
-                      </a:solidFill>
-                      <a:prstDash val="solid"/>
-                      <a:round/>
-                      <a:headEnd type="none" w="med" len="med"/>
-                      <a:tailEnd type="none" w="med" len="med"/>
-                    </a:lnL>
-                    <a:lnR w="2540" cap="flat" cmpd="sng" algn="ctr">
-                      <a:solidFill>
-                        <a:srgbClr val="EEEEEE"/>
-                      </a:solidFill>
-                      <a:prstDash val="solid"/>
-                      <a:round/>
-                      <a:headEnd type="none" w="med" len="med"/>
-                      <a:tailEnd type="none" w="med" len="med"/>
-                    </a:lnR>
-                    <a:lnT w="2540" cap="flat" cmpd="sng" algn="ctr">
-                      <a:solidFill>
-                        <a:srgbClr val="EEEEEE"/>
-                      </a:solidFill>
-                      <a:prstDash val="solid"/>
-                      <a:round/>
-                      <a:headEnd type="none" w="med" len="med"/>
-                      <a:tailEnd type="none" w="med" len="med"/>
-                    </a:lnT>
-                    <a:lnB w="2540" cap="flat" cmpd="sng" algn="ctr">
-                      <a:solidFill>
-                        <a:srgbClr val="EEEEEE"/>
-                      </a:solidFill>
-                      <a:prstDash val="solid"/>
-                      <a:round/>
-                      <a:headEnd type="none" w="med" len="med"/>
-                      <a:tailEnd type="none" w="med" len="med"/>
-                    </a:lnB>
-                  </a:tcPr>
-                </a:tc>
-                <a:tc>
-                  <a:txBody>
-                    <a:bodyPr/>
-                    <a:lstStyle/>
-                    <a:p>
-                      <a:pPr algn="ctr" indent="0" marL="0">
-                        <a:buNone/>
-                      </a:pPr>
-                      <a:r>
-                        <a:rPr lang="en-US" sz="500" dirty="0">
-                          <a:solidFill>
-                            <a:srgbClr val="777777"/>
-                          </a:solidFill>
-                          <a:latin typeface="Calibri" pitchFamily="34" charset="0"/>
-                          <a:ea typeface="Calibri" pitchFamily="34" charset="-122"/>
-                          <a:cs typeface="Calibri" pitchFamily="34" charset="-120"/>
-                        </a:rPr>
-                        <a:t>0.40%</a:t>
-                      </a:r>
-                      <a:endParaRPr lang="en-US" sz="500" dirty="0">
-                        <a:latin typeface="Calibri" charset="0"/>
-                        <a:ea typeface="Calibri" charset="0"/>
-                        <a:cs typeface="Calibri" charset="0"/>
-                      </a:endParaRPr>
-                    </a:p>
-                  </a:txBody>
-                  <a:tcPr marL="91440" marR="91440" marT="45720" marB="45720">
-                    <a:lnL w="2540" cap="flat" cmpd="sng" algn="ctr">
-                      <a:solidFill>
-                        <a:srgbClr val="EEEEEE"/>
-                      </a:solidFill>
-                      <a:prstDash val="solid"/>
-                      <a:round/>
-                      <a:headEnd type="none" w="med" len="med"/>
-                      <a:tailEnd type="none" w="med" len="med"/>
-                    </a:lnL>
-                    <a:lnR w="2540" cap="flat" cmpd="sng" algn="ctr">
-                      <a:solidFill>
-                        <a:srgbClr val="EEEEEE"/>
-                      </a:solidFill>
-                      <a:prstDash val="solid"/>
-                      <a:round/>
-                      <a:headEnd type="none" w="med" len="med"/>
-                      <a:tailEnd type="none" w="med" len="med"/>
-                    </a:lnR>
-                    <a:lnT w="2540" cap="flat" cmpd="sng" algn="ctr">
-                      <a:solidFill>
-                        <a:srgbClr val="EEEEEE"/>
-                      </a:solidFill>
-                      <a:prstDash val="solid"/>
-                      <a:round/>
-                      <a:headEnd type="none" w="med" len="med"/>
-                      <a:tailEnd type="none" w="med" len="med"/>
-                    </a:lnT>
-                    <a:lnB w="2540" cap="flat" cmpd="sng" algn="ctr">
-                      <a:solidFill>
-                        <a:srgbClr val="EEEEEE"/>
-                      </a:solidFill>
-                      <a:prstDash val="solid"/>
-                      <a:round/>
-                      <a:headEnd type="none" w="med" len="med"/>
-                      <a:tailEnd type="none" w="med" len="med"/>
-                    </a:lnB>
-                  </a:tcPr>
-                </a:tc>
-                <a:tc>
-                  <a:txBody>
-                    <a:bodyPr/>
-                    <a:lstStyle/>
-                    <a:p>
-                      <a:pPr algn="ctr" indent="0" marL="0">
-                        <a:buNone/>
-                      </a:pPr>
-                      <a:r>
-                        <a:rPr lang="en-US" sz="500" dirty="0">
-                          <a:solidFill>
-                            <a:srgbClr val="777777"/>
-                          </a:solidFill>
-                          <a:latin typeface="Calibri" pitchFamily="34" charset="0"/>
-                          <a:ea typeface="Calibri" pitchFamily="34" charset="-122"/>
-                          <a:cs typeface="Calibri" pitchFamily="34" charset="-120"/>
-                        </a:rPr>
-                        <a:t>0.40%</a:t>
-                      </a:r>
-                      <a:endParaRPr lang="en-US" sz="500" dirty="0">
-                        <a:latin typeface="Calibri" charset="0"/>
-                        <a:ea typeface="Calibri" charset="0"/>
-                        <a:cs typeface="Calibri" charset="0"/>
-                      </a:endParaRPr>
-                    </a:p>
-                  </a:txBody>
-                  <a:tcPr marL="91440" marR="91440" marT="45720" marB="45720">
-                    <a:lnL w="2540" cap="flat" cmpd="sng" algn="ctr">
-                      <a:solidFill>
-                        <a:srgbClr val="EEEEEE"/>
-                      </a:solidFill>
-                      <a:prstDash val="solid"/>
-                      <a:round/>
-                      <a:headEnd type="none" w="med" len="med"/>
-                      <a:tailEnd type="none" w="med" len="med"/>
-                    </a:lnL>
-                    <a:lnR w="2540" cap="flat" cmpd="sng" algn="ctr">
-                      <a:solidFill>
-                        <a:srgbClr val="EEEEEE"/>
-                      </a:solidFill>
-                      <a:prstDash val="solid"/>
-                      <a:round/>
-                      <a:headEnd type="none" w="med" len="med"/>
-                      <a:tailEnd type="none" w="med" len="med"/>
-                    </a:lnR>
-                    <a:lnT w="2540" cap="flat" cmpd="sng" algn="ctr">
-                      <a:solidFill>
-                        <a:srgbClr val="EEEEEE"/>
-                      </a:solidFill>
-                      <a:prstDash val="solid"/>
-                      <a:round/>
-                      <a:headEnd type="none" w="med" len="med"/>
-                      <a:tailEnd type="none" w="med" len="med"/>
-                    </a:lnT>
-                    <a:lnB w="2540" cap="flat" cmpd="sng" algn="ctr">
-                      <a:solidFill>
-                        <a:srgbClr val="EEEEEE"/>
-                      </a:solidFill>
-                      <a:prstDash val="solid"/>
-                      <a:round/>
-                      <a:headEnd type="none" w="med" len="med"/>
-                      <a:tailEnd type="none" w="med" len="med"/>
-                    </a:lnB>
-                  </a:tcPr>
-                </a:tc>
-                <a:tc>
-                  <a:txBody>
-                    <a:bodyPr/>
-                    <a:lstStyle/>
-                    <a:p>
-                      <a:pPr algn="ctr" indent="0" marL="0">
-                        <a:buNone/>
-                      </a:pPr>
-                      <a:r>
-                        <a:rPr lang="en-US" sz="500" dirty="0">
-                          <a:solidFill>
-                            <a:srgbClr val="777777"/>
-                          </a:solidFill>
-                          <a:latin typeface="Calibri" pitchFamily="34" charset="0"/>
-                          <a:ea typeface="Calibri" pitchFamily="34" charset="-122"/>
-                          <a:cs typeface="Calibri" pitchFamily="34" charset="-120"/>
-                        </a:rPr>
-                        <a:t>0.40%</a:t>
+                        <a:t>0.36%</a:t>
                       </a:r>
                       <a:endParaRPr lang="en-US" sz="500" dirty="0">
                         <a:latin typeface="Calibri" charset="0"/>
@@ -12713,6 +15515,503 @@
                         <a:buNone/>
                       </a:pPr>
                       <a:r>
+                        <a:rPr lang="en-US" sz="500" dirty="0">
+                          <a:solidFill>
+                            <a:srgbClr val="777777"/>
+                          </a:solidFill>
+                          <a:latin typeface="Calibri" pitchFamily="34" charset="0"/>
+                          <a:ea typeface="Calibri" pitchFamily="34" charset="-122"/>
+                          <a:cs typeface="Calibri" pitchFamily="34" charset="-120"/>
+                        </a:rPr>
+                        <a:t>0.38%</a:t>
+                      </a:r>
+                      <a:endParaRPr lang="en-US" sz="500" dirty="0">
+                        <a:latin typeface="Calibri" charset="0"/>
+                        <a:ea typeface="Calibri" charset="0"/>
+                        <a:cs typeface="Calibri" charset="0"/>
+                      </a:endParaRPr>
+                    </a:p>
+                  </a:txBody>
+                  <a:tcPr marL="91440" marR="91440" marT="45720" marB="45720">
+                    <a:lnL w="2540" cap="flat" cmpd="sng" algn="ctr">
+                      <a:solidFill>
+                        <a:srgbClr val="EEEEEE"/>
+                      </a:solidFill>
+                      <a:prstDash val="solid"/>
+                      <a:round/>
+                      <a:headEnd type="none" w="med" len="med"/>
+                      <a:tailEnd type="none" w="med" len="med"/>
+                    </a:lnL>
+                    <a:lnR w="2540" cap="flat" cmpd="sng" algn="ctr">
+                      <a:solidFill>
+                        <a:srgbClr val="EEEEEE"/>
+                      </a:solidFill>
+                      <a:prstDash val="solid"/>
+                      <a:round/>
+                      <a:headEnd type="none" w="med" len="med"/>
+                      <a:tailEnd type="none" w="med" len="med"/>
+                    </a:lnR>
+                    <a:lnT w="2540" cap="flat" cmpd="sng" algn="ctr">
+                      <a:solidFill>
+                        <a:srgbClr val="EEEEEE"/>
+                      </a:solidFill>
+                      <a:prstDash val="solid"/>
+                      <a:round/>
+                      <a:headEnd type="none" w="med" len="med"/>
+                      <a:tailEnd type="none" w="med" len="med"/>
+                    </a:lnT>
+                    <a:lnB w="2540" cap="flat" cmpd="sng" algn="ctr">
+                      <a:solidFill>
+                        <a:srgbClr val="EEEEEE"/>
+                      </a:solidFill>
+                      <a:prstDash val="solid"/>
+                      <a:round/>
+                      <a:headEnd type="none" w="med" len="med"/>
+                      <a:tailEnd type="none" w="med" len="med"/>
+                    </a:lnB>
+                  </a:tcPr>
+                </a:tc>
+                <a:tc>
+                  <a:txBody>
+                    <a:bodyPr/>
+                    <a:lstStyle/>
+                    <a:p>
+                      <a:pPr algn="ctr" indent="0" marL="0">
+                        <a:buNone/>
+                      </a:pPr>
+                      <a:endParaRPr lang="en-US" sz="500" dirty="0">
+                        <a:latin typeface="Calibri" charset="0"/>
+                        <a:ea typeface="Calibri" charset="0"/>
+                        <a:cs typeface="Calibri" charset="0"/>
+                      </a:endParaRPr>
+                    </a:p>
+                  </a:txBody>
+                  <a:tcPr marL="91440" marR="91440" marT="45720" marB="45720">
+                    <a:lnL w="2540" cap="flat" cmpd="sng" algn="ctr">
+                      <a:solidFill>
+                        <a:srgbClr val="EEEEEE"/>
+                      </a:solidFill>
+                      <a:prstDash val="solid"/>
+                      <a:round/>
+                      <a:headEnd type="none" w="med" len="med"/>
+                      <a:tailEnd type="none" w="med" len="med"/>
+                    </a:lnL>
+                    <a:lnR w="2540" cap="flat" cmpd="sng" algn="ctr">
+                      <a:solidFill>
+                        <a:srgbClr val="EEEEEE"/>
+                      </a:solidFill>
+                      <a:prstDash val="solid"/>
+                      <a:round/>
+                      <a:headEnd type="none" w="med" len="med"/>
+                      <a:tailEnd type="none" w="med" len="med"/>
+                    </a:lnR>
+                    <a:lnT w="2540" cap="flat" cmpd="sng" algn="ctr">
+                      <a:solidFill>
+                        <a:srgbClr val="EEEEEE"/>
+                      </a:solidFill>
+                      <a:prstDash val="solid"/>
+                      <a:round/>
+                      <a:headEnd type="none" w="med" len="med"/>
+                      <a:tailEnd type="none" w="med" len="med"/>
+                    </a:lnT>
+                    <a:lnB w="2540" cap="flat" cmpd="sng" algn="ctr">
+                      <a:solidFill>
+                        <a:srgbClr val="EEEEEE"/>
+                      </a:solidFill>
+                      <a:prstDash val="solid"/>
+                      <a:round/>
+                      <a:headEnd type="none" w="med" len="med"/>
+                      <a:tailEnd type="none" w="med" len="med"/>
+                    </a:lnB>
+                  </a:tcPr>
+                </a:tc>
+                <a:tc>
+                  <a:txBody>
+                    <a:bodyPr/>
+                    <a:lstStyle/>
+                    <a:p>
+                      <a:pPr algn="ctr" indent="0" marL="0">
+                        <a:buNone/>
+                      </a:pPr>
+                      <a:endParaRPr lang="en-US" sz="500" dirty="0">
+                        <a:latin typeface="Calibri" charset="0"/>
+                        <a:ea typeface="Calibri" charset="0"/>
+                        <a:cs typeface="Calibri" charset="0"/>
+                      </a:endParaRPr>
+                    </a:p>
+                  </a:txBody>
+                  <a:tcPr marL="91440" marR="91440" marT="45720" marB="45720">
+                    <a:lnL w="2540" cap="flat" cmpd="sng" algn="ctr">
+                      <a:solidFill>
+                        <a:srgbClr val="EEEEEE"/>
+                      </a:solidFill>
+                      <a:prstDash val="solid"/>
+                      <a:round/>
+                      <a:headEnd type="none" w="med" len="med"/>
+                      <a:tailEnd type="none" w="med" len="med"/>
+                    </a:lnL>
+                    <a:lnR w="2540" cap="flat" cmpd="sng" algn="ctr">
+                      <a:solidFill>
+                        <a:srgbClr val="EEEEEE"/>
+                      </a:solidFill>
+                      <a:prstDash val="solid"/>
+                      <a:round/>
+                      <a:headEnd type="none" w="med" len="med"/>
+                      <a:tailEnd type="none" w="med" len="med"/>
+                    </a:lnR>
+                    <a:lnT w="2540" cap="flat" cmpd="sng" algn="ctr">
+                      <a:solidFill>
+                        <a:srgbClr val="EEEEEE"/>
+                      </a:solidFill>
+                      <a:prstDash val="solid"/>
+                      <a:round/>
+                      <a:headEnd type="none" w="med" len="med"/>
+                      <a:tailEnd type="none" w="med" len="med"/>
+                    </a:lnT>
+                    <a:lnB w="2540" cap="flat" cmpd="sng" algn="ctr">
+                      <a:solidFill>
+                        <a:srgbClr val="EEEEEE"/>
+                      </a:solidFill>
+                      <a:prstDash val="solid"/>
+                      <a:round/>
+                      <a:headEnd type="none" w="med" len="med"/>
+                      <a:tailEnd type="none" w="med" len="med"/>
+                    </a:lnB>
+                  </a:tcPr>
+                </a:tc>
+                <a:tc>
+                  <a:txBody>
+                    <a:bodyPr/>
+                    <a:lstStyle/>
+                    <a:p>
+                      <a:pPr algn="ctr" indent="0" marL="0">
+                        <a:buNone/>
+                      </a:pPr>
+                      <a:endParaRPr lang="en-US" sz="500" dirty="0">
+                        <a:latin typeface="Calibri" charset="0"/>
+                        <a:ea typeface="Calibri" charset="0"/>
+                        <a:cs typeface="Calibri" charset="0"/>
+                      </a:endParaRPr>
+                    </a:p>
+                  </a:txBody>
+                  <a:tcPr marL="91440" marR="91440" marT="45720" marB="45720">
+                    <a:lnL w="2540" cap="flat" cmpd="sng" algn="ctr">
+                      <a:solidFill>
+                        <a:srgbClr val="EEEEEE"/>
+                      </a:solidFill>
+                      <a:prstDash val="solid"/>
+                      <a:round/>
+                      <a:headEnd type="none" w="med" len="med"/>
+                      <a:tailEnd type="none" w="med" len="med"/>
+                    </a:lnL>
+                    <a:lnR w="2540" cap="flat" cmpd="sng" algn="ctr">
+                      <a:solidFill>
+                        <a:srgbClr val="EEEEEE"/>
+                      </a:solidFill>
+                      <a:prstDash val="solid"/>
+                      <a:round/>
+                      <a:headEnd type="none" w="med" len="med"/>
+                      <a:tailEnd type="none" w="med" len="med"/>
+                    </a:lnR>
+                    <a:lnT w="2540" cap="flat" cmpd="sng" algn="ctr">
+                      <a:solidFill>
+                        <a:srgbClr val="EEEEEE"/>
+                      </a:solidFill>
+                      <a:prstDash val="solid"/>
+                      <a:round/>
+                      <a:headEnd type="none" w="med" len="med"/>
+                      <a:tailEnd type="none" w="med" len="med"/>
+                    </a:lnT>
+                    <a:lnB w="2540" cap="flat" cmpd="sng" algn="ctr">
+                      <a:solidFill>
+                        <a:srgbClr val="EEEEEE"/>
+                      </a:solidFill>
+                      <a:prstDash val="solid"/>
+                      <a:round/>
+                      <a:headEnd type="none" w="med" len="med"/>
+                      <a:tailEnd type="none" w="med" len="med"/>
+                    </a:lnB>
+                  </a:tcPr>
+                </a:tc>
+                <a:tc>
+                  <a:txBody>
+                    <a:bodyPr/>
+                    <a:lstStyle/>
+                    <a:p>
+                      <a:pPr algn="ctr" indent="0" marL="0">
+                        <a:buNone/>
+                      </a:pPr>
+                      <a:endParaRPr lang="en-US" sz="500" dirty="0">
+                        <a:latin typeface="Calibri" charset="0"/>
+                        <a:ea typeface="Calibri" charset="0"/>
+                        <a:cs typeface="Calibri" charset="0"/>
+                      </a:endParaRPr>
+                    </a:p>
+                  </a:txBody>
+                  <a:tcPr marL="91440" marR="91440" marT="45720" marB="45720">
+                    <a:lnL w="2540" cap="flat" cmpd="sng" algn="ctr">
+                      <a:solidFill>
+                        <a:srgbClr val="EEEEEE"/>
+                      </a:solidFill>
+                      <a:prstDash val="solid"/>
+                      <a:round/>
+                      <a:headEnd type="none" w="med" len="med"/>
+                      <a:tailEnd type="none" w="med" len="med"/>
+                    </a:lnL>
+                    <a:lnR w="2540" cap="flat" cmpd="sng" algn="ctr">
+                      <a:solidFill>
+                        <a:srgbClr val="EEEEEE"/>
+                      </a:solidFill>
+                      <a:prstDash val="solid"/>
+                      <a:round/>
+                      <a:headEnd type="none" w="med" len="med"/>
+                      <a:tailEnd type="none" w="med" len="med"/>
+                    </a:lnR>
+                    <a:lnT w="2540" cap="flat" cmpd="sng" algn="ctr">
+                      <a:solidFill>
+                        <a:srgbClr val="EEEEEE"/>
+                      </a:solidFill>
+                      <a:prstDash val="solid"/>
+                      <a:round/>
+                      <a:headEnd type="none" w="med" len="med"/>
+                      <a:tailEnd type="none" w="med" len="med"/>
+                    </a:lnT>
+                    <a:lnB w="2540" cap="flat" cmpd="sng" algn="ctr">
+                      <a:solidFill>
+                        <a:srgbClr val="EEEEEE"/>
+                      </a:solidFill>
+                      <a:prstDash val="solid"/>
+                      <a:round/>
+                      <a:headEnd type="none" w="med" len="med"/>
+                      <a:tailEnd type="none" w="med" len="med"/>
+                    </a:lnB>
+                  </a:tcPr>
+                </a:tc>
+                <a:tc>
+                  <a:txBody>
+                    <a:bodyPr/>
+                    <a:lstStyle/>
+                    <a:p>
+                      <a:pPr algn="ctr" indent="0" marL="0">
+                        <a:buNone/>
+                      </a:pPr>
+                      <a:endParaRPr lang="en-US" sz="500" dirty="0">
+                        <a:latin typeface="Calibri" charset="0"/>
+                        <a:ea typeface="Calibri" charset="0"/>
+                        <a:cs typeface="Calibri" charset="0"/>
+                      </a:endParaRPr>
+                    </a:p>
+                  </a:txBody>
+                  <a:tcPr marL="91440" marR="91440" marT="45720" marB="45720">
+                    <a:lnL w="2540" cap="flat" cmpd="sng" algn="ctr">
+                      <a:solidFill>
+                        <a:srgbClr val="EEEEEE"/>
+                      </a:solidFill>
+                      <a:prstDash val="solid"/>
+                      <a:round/>
+                      <a:headEnd type="none" w="med" len="med"/>
+                      <a:tailEnd type="none" w="med" len="med"/>
+                    </a:lnL>
+                    <a:lnR w="2540" cap="flat" cmpd="sng" algn="ctr">
+                      <a:solidFill>
+                        <a:srgbClr val="EEEEEE"/>
+                      </a:solidFill>
+                      <a:prstDash val="solid"/>
+                      <a:round/>
+                      <a:headEnd type="none" w="med" len="med"/>
+                      <a:tailEnd type="none" w="med" len="med"/>
+                    </a:lnR>
+                    <a:lnT w="2540" cap="flat" cmpd="sng" algn="ctr">
+                      <a:solidFill>
+                        <a:srgbClr val="EEEEEE"/>
+                      </a:solidFill>
+                      <a:prstDash val="solid"/>
+                      <a:round/>
+                      <a:headEnd type="none" w="med" len="med"/>
+                      <a:tailEnd type="none" w="med" len="med"/>
+                    </a:lnT>
+                    <a:lnB w="2540" cap="flat" cmpd="sng" algn="ctr">
+                      <a:solidFill>
+                        <a:srgbClr val="EEEEEE"/>
+                      </a:solidFill>
+                      <a:prstDash val="solid"/>
+                      <a:round/>
+                      <a:headEnd type="none" w="med" len="med"/>
+                      <a:tailEnd type="none" w="med" len="med"/>
+                    </a:lnB>
+                  </a:tcPr>
+                </a:tc>
+                <a:tc>
+                  <a:txBody>
+                    <a:bodyPr/>
+                    <a:lstStyle/>
+                    <a:p>
+                      <a:pPr algn="ctr" indent="0" marL="0">
+                        <a:buNone/>
+                      </a:pPr>
+                      <a:endParaRPr lang="en-US" sz="500" dirty="0">
+                        <a:latin typeface="Calibri" charset="0"/>
+                        <a:ea typeface="Calibri" charset="0"/>
+                        <a:cs typeface="Calibri" charset="0"/>
+                      </a:endParaRPr>
+                    </a:p>
+                  </a:txBody>
+                  <a:tcPr marL="91440" marR="91440" marT="45720" marB="45720">
+                    <a:lnL w="2540" cap="flat" cmpd="sng" algn="ctr">
+                      <a:solidFill>
+                        <a:srgbClr val="EEEEEE"/>
+                      </a:solidFill>
+                      <a:prstDash val="solid"/>
+                      <a:round/>
+                      <a:headEnd type="none" w="med" len="med"/>
+                      <a:tailEnd type="none" w="med" len="med"/>
+                    </a:lnL>
+                    <a:lnR w="2540" cap="flat" cmpd="sng" algn="ctr">
+                      <a:solidFill>
+                        <a:srgbClr val="EEEEEE"/>
+                      </a:solidFill>
+                      <a:prstDash val="solid"/>
+                      <a:round/>
+                      <a:headEnd type="none" w="med" len="med"/>
+                      <a:tailEnd type="none" w="med" len="med"/>
+                    </a:lnR>
+                    <a:lnT w="2540" cap="flat" cmpd="sng" algn="ctr">
+                      <a:solidFill>
+                        <a:srgbClr val="EEEEEE"/>
+                      </a:solidFill>
+                      <a:prstDash val="solid"/>
+                      <a:round/>
+                      <a:headEnd type="none" w="med" len="med"/>
+                      <a:tailEnd type="none" w="med" len="med"/>
+                    </a:lnT>
+                    <a:lnB w="2540" cap="flat" cmpd="sng" algn="ctr">
+                      <a:solidFill>
+                        <a:srgbClr val="EEEEEE"/>
+                      </a:solidFill>
+                      <a:prstDash val="solid"/>
+                      <a:round/>
+                      <a:headEnd type="none" w="med" len="med"/>
+                      <a:tailEnd type="none" w="med" len="med"/>
+                    </a:lnB>
+                  </a:tcPr>
+                </a:tc>
+                <a:tc>
+                  <a:txBody>
+                    <a:bodyPr/>
+                    <a:lstStyle/>
+                    <a:p>
+                      <a:pPr algn="ctr" indent="0" marL="0">
+                        <a:buNone/>
+                      </a:pPr>
+                      <a:endParaRPr lang="en-US" sz="500" dirty="0">
+                        <a:latin typeface="Calibri" charset="0"/>
+                        <a:ea typeface="Calibri" charset="0"/>
+                        <a:cs typeface="Calibri" charset="0"/>
+                      </a:endParaRPr>
+                    </a:p>
+                  </a:txBody>
+                  <a:tcPr marL="91440" marR="91440" marT="45720" marB="45720">
+                    <a:lnL w="2540" cap="flat" cmpd="sng" algn="ctr">
+                      <a:solidFill>
+                        <a:srgbClr val="EEEEEE"/>
+                      </a:solidFill>
+                      <a:prstDash val="solid"/>
+                      <a:round/>
+                      <a:headEnd type="none" w="med" len="med"/>
+                      <a:tailEnd type="none" w="med" len="med"/>
+                    </a:lnL>
+                    <a:lnR w="2540" cap="flat" cmpd="sng" algn="ctr">
+                      <a:solidFill>
+                        <a:srgbClr val="EEEEEE"/>
+                      </a:solidFill>
+                      <a:prstDash val="solid"/>
+                      <a:round/>
+                      <a:headEnd type="none" w="med" len="med"/>
+                      <a:tailEnd type="none" w="med" len="med"/>
+                    </a:lnR>
+                    <a:lnT w="2540" cap="flat" cmpd="sng" algn="ctr">
+                      <a:solidFill>
+                        <a:srgbClr val="EEEEEE"/>
+                      </a:solidFill>
+                      <a:prstDash val="solid"/>
+                      <a:round/>
+                      <a:headEnd type="none" w="med" len="med"/>
+                      <a:tailEnd type="none" w="med" len="med"/>
+                    </a:lnT>
+                    <a:lnB w="2540" cap="flat" cmpd="sng" algn="ctr">
+                      <a:solidFill>
+                        <a:srgbClr val="EEEEEE"/>
+                      </a:solidFill>
+                      <a:prstDash val="solid"/>
+                      <a:round/>
+                      <a:headEnd type="none" w="med" len="med"/>
+                      <a:tailEnd type="none" w="med" len="med"/>
+                    </a:lnB>
+                  </a:tcPr>
+                </a:tc>
+                <a:tc>
+                  <a:txBody>
+                    <a:bodyPr/>
+                    <a:lstStyle/>
+                    <a:p>
+                      <a:pPr algn="ctr" indent="0" marL="0">
+                        <a:buNone/>
+                      </a:pPr>
+                      <a:endParaRPr lang="en-US" sz="500" dirty="0">
+                        <a:latin typeface="Calibri" charset="0"/>
+                        <a:ea typeface="Calibri" charset="0"/>
+                        <a:cs typeface="Calibri" charset="0"/>
+                      </a:endParaRPr>
+                    </a:p>
+                  </a:txBody>
+                  <a:tcPr marL="91440" marR="91440" marT="45720" marB="45720">
+                    <a:lnL w="2540" cap="flat" cmpd="sng" algn="ctr">
+                      <a:solidFill>
+                        <a:srgbClr val="EEEEEE"/>
+                      </a:solidFill>
+                      <a:prstDash val="solid"/>
+                      <a:round/>
+                      <a:headEnd type="none" w="med" len="med"/>
+                      <a:tailEnd type="none" w="med" len="med"/>
+                    </a:lnL>
+                    <a:lnR w="2540" cap="flat" cmpd="sng" algn="ctr">
+                      <a:solidFill>
+                        <a:srgbClr val="EEEEEE"/>
+                      </a:solidFill>
+                      <a:prstDash val="solid"/>
+                      <a:round/>
+                      <a:headEnd type="none" w="med" len="med"/>
+                      <a:tailEnd type="none" w="med" len="med"/>
+                    </a:lnR>
+                    <a:lnT w="2540" cap="flat" cmpd="sng" algn="ctr">
+                      <a:solidFill>
+                        <a:srgbClr val="EEEEEE"/>
+                      </a:solidFill>
+                      <a:prstDash val="solid"/>
+                      <a:round/>
+                      <a:headEnd type="none" w="med" len="med"/>
+                      <a:tailEnd type="none" w="med" len="med"/>
+                    </a:lnT>
+                    <a:lnB w="2540" cap="flat" cmpd="sng" algn="ctr">
+                      <a:solidFill>
+                        <a:srgbClr val="EEEEEE"/>
+                      </a:solidFill>
+                      <a:prstDash val="solid"/>
+                      <a:round/>
+                      <a:headEnd type="none" w="med" len="med"/>
+                      <a:tailEnd type="none" w="med" len="med"/>
+                    </a:lnB>
+                  </a:tcPr>
+                </a:tc>
+                <a:tc>
+                  <a:txBody>
+                    <a:bodyPr/>
+                    <a:lstStyle/>
+                    <a:p>
+                      <a:pPr algn="ctr" indent="0" marL="0">
+                        <a:buNone/>
+                      </a:pPr>
+                      <a:r>
                         <a:rPr lang="en-US" sz="500" b="1" dirty="0">
                           <a:solidFill>
                             <a:srgbClr val="777777"/>
@@ -12721,7 +16020,7 @@
                           <a:ea typeface="Calibri" pitchFamily="34" charset="-122"/>
                           <a:cs typeface="Calibri" pitchFamily="34" charset="-120"/>
                         </a:rPr>
-                        <a:t>4.99%</a:t>
+                        <a:t>3.39%</a:t>
                       </a:r>
                       <a:endParaRPr lang="en-US" sz="500" dirty="0">
                         <a:latin typeface="Calibri" charset="0"/>
@@ -12907,7 +16206,7 @@
                           <a:ea typeface="Calibri" pitchFamily="34" charset="-122"/>
                           <a:cs typeface="Calibri" pitchFamily="34" charset="-120"/>
                         </a:rPr>
-                        <a:t>0.00%</a:t>
+                        <a:t>0.27%</a:t>
                       </a:r>
                       <a:endParaRPr lang="en-US" sz="500" dirty="0">
                         <a:latin typeface="Calibri" charset="0"/>
@@ -12972,7 +16271,7 @@
                           <a:ea typeface="Calibri" pitchFamily="34" charset="-122"/>
                           <a:cs typeface="Calibri" pitchFamily="34" charset="-120"/>
                         </a:rPr>
-                        <a:t>0.28%</a:t>
+                        <a:t>0.24%</a:t>
                       </a:r>
                       <a:endParaRPr lang="en-US" sz="500" dirty="0">
                         <a:latin typeface="Calibri" charset="0"/>
@@ -13037,7 +16336,7 @@
                           <a:ea typeface="Calibri" pitchFamily="34" charset="-122"/>
                           <a:cs typeface="Calibri" pitchFamily="34" charset="-120"/>
                         </a:rPr>
-                        <a:t>0.31%</a:t>
+                        <a:t>0.27%</a:t>
                       </a:r>
                       <a:endParaRPr lang="en-US" sz="500" dirty="0">
                         <a:latin typeface="Calibri" charset="0"/>
@@ -13102,7 +16401,7 @@
                           <a:ea typeface="Calibri" pitchFamily="34" charset="-122"/>
                           <a:cs typeface="Calibri" pitchFamily="34" charset="-120"/>
                         </a:rPr>
-                        <a:t>0.30%</a:t>
+                        <a:t>0.26%</a:t>
                       </a:r>
                       <a:endParaRPr lang="en-US" sz="500" dirty="0">
                         <a:latin typeface="Calibri" charset="0"/>
@@ -13158,17 +16457,6 @@
                       <a:pPr algn="ctr" indent="0" marL="0">
                         <a:buNone/>
                       </a:pPr>
-                      <a:r>
-                        <a:rPr lang="en-US" sz="500" dirty="0">
-                          <a:solidFill>
-                            <a:srgbClr val="999999"/>
-                          </a:solidFill>
-                          <a:latin typeface="Calibri" pitchFamily="34" charset="0"/>
-                          <a:ea typeface="Calibri" pitchFamily="34" charset="-122"/>
-                          <a:cs typeface="Calibri" pitchFamily="34" charset="-120"/>
-                        </a:rPr>
-                        <a:t>0.31%</a:t>
-                      </a:r>
                       <a:endParaRPr lang="en-US" sz="500" dirty="0">
                         <a:latin typeface="Calibri" charset="0"/>
                         <a:ea typeface="Calibri" charset="0"/>
@@ -13223,17 +16511,6 @@
                       <a:pPr algn="ctr" indent="0" marL="0">
                         <a:buNone/>
                       </a:pPr>
-                      <a:r>
-                        <a:rPr lang="en-US" sz="500" dirty="0">
-                          <a:solidFill>
-                            <a:srgbClr val="999999"/>
-                          </a:solidFill>
-                          <a:latin typeface="Calibri" pitchFamily="34" charset="0"/>
-                          <a:ea typeface="Calibri" pitchFamily="34" charset="-122"/>
-                          <a:cs typeface="Calibri" pitchFamily="34" charset="-120"/>
-                        </a:rPr>
-                        <a:t>0.30%</a:t>
-                      </a:r>
                       <a:endParaRPr lang="en-US" sz="500" dirty="0">
                         <a:latin typeface="Calibri" charset="0"/>
                         <a:ea typeface="Calibri" charset="0"/>
@@ -13288,17 +16565,6 @@
                       <a:pPr algn="ctr" indent="0" marL="0">
                         <a:buNone/>
                       </a:pPr>
-                      <a:r>
-                        <a:rPr lang="en-US" sz="500" dirty="0">
-                          <a:solidFill>
-                            <a:srgbClr val="999999"/>
-                          </a:solidFill>
-                          <a:latin typeface="Calibri" pitchFamily="34" charset="0"/>
-                          <a:ea typeface="Calibri" pitchFamily="34" charset="-122"/>
-                          <a:cs typeface="Calibri" pitchFamily="34" charset="-120"/>
-                        </a:rPr>
-                        <a:t>0.30%</a:t>
-                      </a:r>
                       <a:endParaRPr lang="en-US" sz="500" dirty="0">
                         <a:latin typeface="Calibri" charset="0"/>
                         <a:ea typeface="Calibri" charset="0"/>
@@ -13353,17 +16619,6 @@
                       <a:pPr algn="ctr" indent="0" marL="0">
                         <a:buNone/>
                       </a:pPr>
-                      <a:r>
-                        <a:rPr lang="en-US" sz="500" dirty="0">
-                          <a:solidFill>
-                            <a:srgbClr val="999999"/>
-                          </a:solidFill>
-                          <a:latin typeface="Calibri" pitchFamily="34" charset="0"/>
-                          <a:ea typeface="Calibri" pitchFamily="34" charset="-122"/>
-                          <a:cs typeface="Calibri" pitchFamily="34" charset="-120"/>
-                        </a:rPr>
-                        <a:t>0.30%</a:t>
-                      </a:r>
                       <a:endParaRPr lang="en-US" sz="500" dirty="0">
                         <a:latin typeface="Calibri" charset="0"/>
                         <a:ea typeface="Calibri" charset="0"/>
@@ -13418,17 +16673,6 @@
                       <a:pPr algn="ctr" indent="0" marL="0">
                         <a:buNone/>
                       </a:pPr>
-                      <a:r>
-                        <a:rPr lang="en-US" sz="500" dirty="0">
-                          <a:solidFill>
-                            <a:srgbClr val="999999"/>
-                          </a:solidFill>
-                          <a:latin typeface="Calibri" pitchFamily="34" charset="0"/>
-                          <a:ea typeface="Calibri" pitchFamily="34" charset="-122"/>
-                          <a:cs typeface="Calibri" pitchFamily="34" charset="-120"/>
-                        </a:rPr>
-                        <a:t>0.28%</a:t>
-                      </a:r>
                       <a:endParaRPr lang="en-US" sz="500" dirty="0">
                         <a:latin typeface="Calibri" charset="0"/>
                         <a:ea typeface="Calibri" charset="0"/>
@@ -13483,17 +16727,6 @@
                       <a:pPr algn="ctr" indent="0" marL="0">
                         <a:buNone/>
                       </a:pPr>
-                      <a:r>
-                        <a:rPr lang="en-US" sz="500" dirty="0">
-                          <a:solidFill>
-                            <a:srgbClr val="999999"/>
-                          </a:solidFill>
-                          <a:latin typeface="Calibri" pitchFamily="34" charset="0"/>
-                          <a:ea typeface="Calibri" pitchFamily="34" charset="-122"/>
-                          <a:cs typeface="Calibri" pitchFamily="34" charset="-120"/>
-                        </a:rPr>
-                        <a:t>0.29%</a:t>
-                      </a:r>
                       <a:endParaRPr lang="en-US" sz="500" dirty="0">
                         <a:latin typeface="Calibri" charset="0"/>
                         <a:ea typeface="Calibri" charset="0"/>
@@ -13548,17 +16781,6 @@
                       <a:pPr algn="ctr" indent="0" marL="0">
                         <a:buNone/>
                       </a:pPr>
-                      <a:r>
-                        <a:rPr lang="en-US" sz="500" dirty="0">
-                          <a:solidFill>
-                            <a:srgbClr val="999999"/>
-                          </a:solidFill>
-                          <a:latin typeface="Calibri" pitchFamily="34" charset="0"/>
-                          <a:ea typeface="Calibri" pitchFamily="34" charset="-122"/>
-                          <a:cs typeface="Calibri" pitchFamily="34" charset="-120"/>
-                        </a:rPr>
-                        <a:t>0.28%</a:t>
-                      </a:r>
                       <a:endParaRPr lang="en-US" sz="500" dirty="0">
                         <a:latin typeface="Calibri" charset="0"/>
                         <a:ea typeface="Calibri" charset="0"/>
@@ -13613,17 +16835,6 @@
                       <a:pPr algn="ctr" indent="0" marL="0">
                         <a:buNone/>
                       </a:pPr>
-                      <a:r>
-                        <a:rPr lang="en-US" sz="500" dirty="0">
-                          <a:solidFill>
-                            <a:srgbClr val="999999"/>
-                          </a:solidFill>
-                          <a:latin typeface="Calibri" pitchFamily="34" charset="0"/>
-                          <a:ea typeface="Calibri" pitchFamily="34" charset="-122"/>
-                          <a:cs typeface="Calibri" pitchFamily="34" charset="-120"/>
-                        </a:rPr>
-                        <a:t>0.56%</a:t>
-                      </a:r>
                       <a:endParaRPr lang="en-US" sz="500" dirty="0">
                         <a:latin typeface="Calibri" charset="0"/>
                         <a:ea typeface="Calibri" charset="0"/>
@@ -13687,7 +16898,7 @@
                           <a:ea typeface="Calibri" pitchFamily="34" charset="-122"/>
                           <a:cs typeface="Calibri" pitchFamily="34" charset="-120"/>
                         </a:rPr>
-                        <a:t>3.54%</a:t>
+                        <a:t>2.32%</a:t>
                       </a:r>
                       <a:endParaRPr lang="en-US" sz="500" dirty="0">
                         <a:latin typeface="Calibri" charset="0"/>
@@ -13873,7 +17084,7 @@
                           <a:ea typeface="Calibri" pitchFamily="34" charset="-122"/>
                           <a:cs typeface="Calibri" pitchFamily="34" charset="-120"/>
                         </a:rPr>
-                        <a:t>0.43%</a:t>
+                        <a:t>0.60%</a:t>
                       </a:r>
                       <a:endParaRPr lang="en-US" sz="500" dirty="0">
                         <a:latin typeface="Calibri" charset="0"/>
@@ -13938,462 +17149,7 @@
                           <a:ea typeface="Calibri" pitchFamily="34" charset="-122"/>
                           <a:cs typeface="Calibri" pitchFamily="34" charset="-120"/>
                         </a:rPr>
-                        <a:t>0.49%</a:t>
-                      </a:r>
-                      <a:endParaRPr lang="en-US" sz="500" dirty="0">
-                        <a:latin typeface="Calibri" charset="0"/>
-                        <a:ea typeface="Calibri" charset="0"/>
-                        <a:cs typeface="Calibri" charset="0"/>
-                      </a:endParaRPr>
-                    </a:p>
-                  </a:txBody>
-                  <a:tcPr marL="91440" marR="91440" marT="45720" marB="45720">
-                    <a:lnL w="2540" cap="flat" cmpd="sng" algn="ctr">
-                      <a:solidFill>
-                        <a:srgbClr val="EEEEEE"/>
-                      </a:solidFill>
-                      <a:prstDash val="solid"/>
-                      <a:round/>
-                      <a:headEnd type="none" w="med" len="med"/>
-                      <a:tailEnd type="none" w="med" len="med"/>
-                    </a:lnL>
-                    <a:lnR w="2540" cap="flat" cmpd="sng" algn="ctr">
-                      <a:solidFill>
-                        <a:srgbClr val="EEEEEE"/>
-                      </a:solidFill>
-                      <a:prstDash val="solid"/>
-                      <a:round/>
-                      <a:headEnd type="none" w="med" len="med"/>
-                      <a:tailEnd type="none" w="med" len="med"/>
-                    </a:lnR>
-                    <a:lnT w="2540" cap="flat" cmpd="sng" algn="ctr">
-                      <a:solidFill>
-                        <a:srgbClr val="EEEEEE"/>
-                      </a:solidFill>
-                      <a:prstDash val="solid"/>
-                      <a:round/>
-                      <a:headEnd type="none" w="med" len="med"/>
-                      <a:tailEnd type="none" w="med" len="med"/>
-                    </a:lnT>
-                    <a:lnB w="2540" cap="flat" cmpd="sng" algn="ctr">
-                      <a:solidFill>
-                        <a:srgbClr val="EEEEEE"/>
-                      </a:solidFill>
-                      <a:prstDash val="solid"/>
-                      <a:round/>
-                      <a:headEnd type="none" w="med" len="med"/>
-                      <a:tailEnd type="none" w="med" len="med"/>
-                    </a:lnB>
-                  </a:tcPr>
-                </a:tc>
-                <a:tc>
-                  <a:txBody>
-                    <a:bodyPr/>
-                    <a:lstStyle/>
-                    <a:p>
-                      <a:pPr algn="ctr" indent="0" marL="0">
-                        <a:buNone/>
-                      </a:pPr>
-                      <a:r>
-                        <a:rPr lang="en-US" sz="500" dirty="0">
-                          <a:solidFill>
-                            <a:srgbClr val="000000"/>
-                          </a:solidFill>
-                          <a:latin typeface="Calibri" pitchFamily="34" charset="0"/>
-                          <a:ea typeface="Calibri" pitchFamily="34" charset="-122"/>
-                          <a:cs typeface="Calibri" pitchFamily="34" charset="-120"/>
-                        </a:rPr>
-                        <a:t>0.50%</a:t>
-                      </a:r>
-                      <a:endParaRPr lang="en-US" sz="500" dirty="0">
-                        <a:latin typeface="Calibri" charset="0"/>
-                        <a:ea typeface="Calibri" charset="0"/>
-                        <a:cs typeface="Calibri" charset="0"/>
-                      </a:endParaRPr>
-                    </a:p>
-                  </a:txBody>
-                  <a:tcPr marL="91440" marR="91440" marT="45720" marB="45720">
-                    <a:lnL w="2540" cap="flat" cmpd="sng" algn="ctr">
-                      <a:solidFill>
-                        <a:srgbClr val="EEEEEE"/>
-                      </a:solidFill>
-                      <a:prstDash val="solid"/>
-                      <a:round/>
-                      <a:headEnd type="none" w="med" len="med"/>
-                      <a:tailEnd type="none" w="med" len="med"/>
-                    </a:lnL>
-                    <a:lnR w="2540" cap="flat" cmpd="sng" algn="ctr">
-                      <a:solidFill>
-                        <a:srgbClr val="EEEEEE"/>
-                      </a:solidFill>
-                      <a:prstDash val="solid"/>
-                      <a:round/>
-                      <a:headEnd type="none" w="med" len="med"/>
-                      <a:tailEnd type="none" w="med" len="med"/>
-                    </a:lnR>
-                    <a:lnT w="2540" cap="flat" cmpd="sng" algn="ctr">
-                      <a:solidFill>
-                        <a:srgbClr val="EEEEEE"/>
-                      </a:solidFill>
-                      <a:prstDash val="solid"/>
-                      <a:round/>
-                      <a:headEnd type="none" w="med" len="med"/>
-                      <a:tailEnd type="none" w="med" len="med"/>
-                    </a:lnT>
-                    <a:lnB w="2540" cap="flat" cmpd="sng" algn="ctr">
-                      <a:solidFill>
-                        <a:srgbClr val="EEEEEE"/>
-                      </a:solidFill>
-                      <a:prstDash val="solid"/>
-                      <a:round/>
-                      <a:headEnd type="none" w="med" len="med"/>
-                      <a:tailEnd type="none" w="med" len="med"/>
-                    </a:lnB>
-                  </a:tcPr>
-                </a:tc>
-                <a:tc>
-                  <a:txBody>
-                    <a:bodyPr/>
-                    <a:lstStyle/>
-                    <a:p>
-                      <a:pPr algn="ctr" indent="0" marL="0">
-                        <a:buNone/>
-                      </a:pPr>
-                      <a:r>
-                        <a:rPr lang="en-US" sz="500" dirty="0">
-                          <a:solidFill>
-                            <a:srgbClr val="000000"/>
-                          </a:solidFill>
-                          <a:latin typeface="Calibri" pitchFamily="34" charset="0"/>
-                          <a:ea typeface="Calibri" pitchFamily="34" charset="-122"/>
-                          <a:cs typeface="Calibri" pitchFamily="34" charset="-120"/>
-                        </a:rPr>
-                        <a:t>0.68%</a:t>
-                      </a:r>
-                      <a:endParaRPr lang="en-US" sz="500" dirty="0">
-                        <a:latin typeface="Calibri" charset="0"/>
-                        <a:ea typeface="Calibri" charset="0"/>
-                        <a:cs typeface="Calibri" charset="0"/>
-                      </a:endParaRPr>
-                    </a:p>
-                  </a:txBody>
-                  <a:tcPr marL="91440" marR="91440" marT="45720" marB="45720">
-                    <a:lnL w="2540" cap="flat" cmpd="sng" algn="ctr">
-                      <a:solidFill>
-                        <a:srgbClr val="EEEEEE"/>
-                      </a:solidFill>
-                      <a:prstDash val="solid"/>
-                      <a:round/>
-                      <a:headEnd type="none" w="med" len="med"/>
-                      <a:tailEnd type="none" w="med" len="med"/>
-                    </a:lnL>
-                    <a:lnR w="2540" cap="flat" cmpd="sng" algn="ctr">
-                      <a:solidFill>
-                        <a:srgbClr val="EEEEEE"/>
-                      </a:solidFill>
-                      <a:prstDash val="solid"/>
-                      <a:round/>
-                      <a:headEnd type="none" w="med" len="med"/>
-                      <a:tailEnd type="none" w="med" len="med"/>
-                    </a:lnR>
-                    <a:lnT w="2540" cap="flat" cmpd="sng" algn="ctr">
-                      <a:solidFill>
-                        <a:srgbClr val="EEEEEE"/>
-                      </a:solidFill>
-                      <a:prstDash val="solid"/>
-                      <a:round/>
-                      <a:headEnd type="none" w="med" len="med"/>
-                      <a:tailEnd type="none" w="med" len="med"/>
-                    </a:lnT>
-                    <a:lnB w="2540" cap="flat" cmpd="sng" algn="ctr">
-                      <a:solidFill>
-                        <a:srgbClr val="EEEEEE"/>
-                      </a:solidFill>
-                      <a:prstDash val="solid"/>
-                      <a:round/>
-                      <a:headEnd type="none" w="med" len="med"/>
-                      <a:tailEnd type="none" w="med" len="med"/>
-                    </a:lnB>
-                  </a:tcPr>
-                </a:tc>
-                <a:tc>
-                  <a:txBody>
-                    <a:bodyPr/>
-                    <a:lstStyle/>
-                    <a:p>
-                      <a:pPr algn="ctr" indent="0" marL="0">
-                        <a:buNone/>
-                      </a:pPr>
-                      <a:r>
-                        <a:rPr lang="en-US" sz="500" dirty="0">
-                          <a:solidFill>
-                            <a:srgbClr val="000000"/>
-                          </a:solidFill>
-                          <a:latin typeface="Calibri" pitchFamily="34" charset="0"/>
-                          <a:ea typeface="Calibri" pitchFamily="34" charset="-122"/>
-                          <a:cs typeface="Calibri" pitchFamily="34" charset="-120"/>
-                        </a:rPr>
-                        <a:t>0.59%</a:t>
-                      </a:r>
-                      <a:endParaRPr lang="en-US" sz="500" dirty="0">
-                        <a:latin typeface="Calibri" charset="0"/>
-                        <a:ea typeface="Calibri" charset="0"/>
-                        <a:cs typeface="Calibri" charset="0"/>
-                      </a:endParaRPr>
-                    </a:p>
-                  </a:txBody>
-                  <a:tcPr marL="91440" marR="91440" marT="45720" marB="45720">
-                    <a:lnL w="2540" cap="flat" cmpd="sng" algn="ctr">
-                      <a:solidFill>
-                        <a:srgbClr val="EEEEEE"/>
-                      </a:solidFill>
-                      <a:prstDash val="solid"/>
-                      <a:round/>
-                      <a:headEnd type="none" w="med" len="med"/>
-                      <a:tailEnd type="none" w="med" len="med"/>
-                    </a:lnL>
-                    <a:lnR w="2540" cap="flat" cmpd="sng" algn="ctr">
-                      <a:solidFill>
-                        <a:srgbClr val="EEEEEE"/>
-                      </a:solidFill>
-                      <a:prstDash val="solid"/>
-                      <a:round/>
-                      <a:headEnd type="none" w="med" len="med"/>
-                      <a:tailEnd type="none" w="med" len="med"/>
-                    </a:lnR>
-                    <a:lnT w="2540" cap="flat" cmpd="sng" algn="ctr">
-                      <a:solidFill>
-                        <a:srgbClr val="EEEEEE"/>
-                      </a:solidFill>
-                      <a:prstDash val="solid"/>
-                      <a:round/>
-                      <a:headEnd type="none" w="med" len="med"/>
-                      <a:tailEnd type="none" w="med" len="med"/>
-                    </a:lnT>
-                    <a:lnB w="2540" cap="flat" cmpd="sng" algn="ctr">
-                      <a:solidFill>
-                        <a:srgbClr val="EEEEEE"/>
-                      </a:solidFill>
-                      <a:prstDash val="solid"/>
-                      <a:round/>
-                      <a:headEnd type="none" w="med" len="med"/>
-                      <a:tailEnd type="none" w="med" len="med"/>
-                    </a:lnB>
-                  </a:tcPr>
-                </a:tc>
-                <a:tc>
-                  <a:txBody>
-                    <a:bodyPr/>
-                    <a:lstStyle/>
-                    <a:p>
-                      <a:pPr algn="ctr" indent="0" marL="0">
-                        <a:buNone/>
-                      </a:pPr>
-                      <a:r>
-                        <a:rPr lang="en-US" sz="500" dirty="0">
-                          <a:solidFill>
-                            <a:srgbClr val="000000"/>
-                          </a:solidFill>
-                          <a:latin typeface="Calibri" pitchFamily="34" charset="0"/>
-                          <a:ea typeface="Calibri" pitchFamily="34" charset="-122"/>
-                          <a:cs typeface="Calibri" pitchFamily="34" charset="-120"/>
-                        </a:rPr>
-                        <a:t>0.60%</a:t>
-                      </a:r>
-                      <a:endParaRPr lang="en-US" sz="500" dirty="0">
-                        <a:latin typeface="Calibri" charset="0"/>
-                        <a:ea typeface="Calibri" charset="0"/>
-                        <a:cs typeface="Calibri" charset="0"/>
-                      </a:endParaRPr>
-                    </a:p>
-                  </a:txBody>
-                  <a:tcPr marL="91440" marR="91440" marT="45720" marB="45720">
-                    <a:lnL w="2540" cap="flat" cmpd="sng" algn="ctr">
-                      <a:solidFill>
-                        <a:srgbClr val="EEEEEE"/>
-                      </a:solidFill>
-                      <a:prstDash val="solid"/>
-                      <a:round/>
-                      <a:headEnd type="none" w="med" len="med"/>
-                      <a:tailEnd type="none" w="med" len="med"/>
-                    </a:lnL>
-                    <a:lnR w="2540" cap="flat" cmpd="sng" algn="ctr">
-                      <a:solidFill>
-                        <a:srgbClr val="EEEEEE"/>
-                      </a:solidFill>
-                      <a:prstDash val="solid"/>
-                      <a:round/>
-                      <a:headEnd type="none" w="med" len="med"/>
-                      <a:tailEnd type="none" w="med" len="med"/>
-                    </a:lnR>
-                    <a:lnT w="2540" cap="flat" cmpd="sng" algn="ctr">
-                      <a:solidFill>
-                        <a:srgbClr val="EEEEEE"/>
-                      </a:solidFill>
-                      <a:prstDash val="solid"/>
-                      <a:round/>
-                      <a:headEnd type="none" w="med" len="med"/>
-                      <a:tailEnd type="none" w="med" len="med"/>
-                    </a:lnT>
-                    <a:lnB w="2540" cap="flat" cmpd="sng" algn="ctr">
-                      <a:solidFill>
-                        <a:srgbClr val="EEEEEE"/>
-                      </a:solidFill>
-                      <a:prstDash val="solid"/>
-                      <a:round/>
-                      <a:headEnd type="none" w="med" len="med"/>
-                      <a:tailEnd type="none" w="med" len="med"/>
-                    </a:lnB>
-                  </a:tcPr>
-                </a:tc>
-                <a:tc>
-                  <a:txBody>
-                    <a:bodyPr/>
-                    <a:lstStyle/>
-                    <a:p>
-                      <a:pPr algn="ctr" indent="0" marL="0">
-                        <a:buNone/>
-                      </a:pPr>
-                      <a:r>
-                        <a:rPr lang="en-US" sz="500" dirty="0">
-                          <a:solidFill>
-                            <a:srgbClr val="000000"/>
-                          </a:solidFill>
-                          <a:latin typeface="Calibri" pitchFamily="34" charset="0"/>
-                          <a:ea typeface="Calibri" pitchFamily="34" charset="-122"/>
-                          <a:cs typeface="Calibri" pitchFamily="34" charset="-120"/>
-                        </a:rPr>
-                        <a:t>0.58%</a:t>
-                      </a:r>
-                      <a:endParaRPr lang="en-US" sz="500" dirty="0">
-                        <a:latin typeface="Calibri" charset="0"/>
-                        <a:ea typeface="Calibri" charset="0"/>
-                        <a:cs typeface="Calibri" charset="0"/>
-                      </a:endParaRPr>
-                    </a:p>
-                  </a:txBody>
-                  <a:tcPr marL="91440" marR="91440" marT="45720" marB="45720">
-                    <a:lnL w="2540" cap="flat" cmpd="sng" algn="ctr">
-                      <a:solidFill>
-                        <a:srgbClr val="EEEEEE"/>
-                      </a:solidFill>
-                      <a:prstDash val="solid"/>
-                      <a:round/>
-                      <a:headEnd type="none" w="med" len="med"/>
-                      <a:tailEnd type="none" w="med" len="med"/>
-                    </a:lnL>
-                    <a:lnR w="2540" cap="flat" cmpd="sng" algn="ctr">
-                      <a:solidFill>
-                        <a:srgbClr val="EEEEEE"/>
-                      </a:solidFill>
-                      <a:prstDash val="solid"/>
-                      <a:round/>
-                      <a:headEnd type="none" w="med" len="med"/>
-                      <a:tailEnd type="none" w="med" len="med"/>
-                    </a:lnR>
-                    <a:lnT w="2540" cap="flat" cmpd="sng" algn="ctr">
-                      <a:solidFill>
-                        <a:srgbClr val="EEEEEE"/>
-                      </a:solidFill>
-                      <a:prstDash val="solid"/>
-                      <a:round/>
-                      <a:headEnd type="none" w="med" len="med"/>
-                      <a:tailEnd type="none" w="med" len="med"/>
-                    </a:lnT>
-                    <a:lnB w="2540" cap="flat" cmpd="sng" algn="ctr">
-                      <a:solidFill>
-                        <a:srgbClr val="EEEEEE"/>
-                      </a:solidFill>
-                      <a:prstDash val="solid"/>
-                      <a:round/>
-                      <a:headEnd type="none" w="med" len="med"/>
-                      <a:tailEnd type="none" w="med" len="med"/>
-                    </a:lnB>
-                  </a:tcPr>
-                </a:tc>
-                <a:tc>
-                  <a:txBody>
-                    <a:bodyPr/>
-                    <a:lstStyle/>
-                    <a:p>
-                      <a:pPr algn="ctr" indent="0" marL="0">
-                        <a:buNone/>
-                      </a:pPr>
-                      <a:r>
-                        <a:rPr lang="en-US" sz="500" dirty="0">
-                          <a:solidFill>
-                            <a:srgbClr val="000000"/>
-                          </a:solidFill>
-                          <a:latin typeface="Calibri" pitchFamily="34" charset="0"/>
-                          <a:ea typeface="Calibri" pitchFamily="34" charset="-122"/>
-                          <a:cs typeface="Calibri" pitchFamily="34" charset="-120"/>
-                        </a:rPr>
-                        <a:t>0.63%</a:t>
-                      </a:r>
-                      <a:endParaRPr lang="en-US" sz="500" dirty="0">
-                        <a:latin typeface="Calibri" charset="0"/>
-                        <a:ea typeface="Calibri" charset="0"/>
-                        <a:cs typeface="Calibri" charset="0"/>
-                      </a:endParaRPr>
-                    </a:p>
-                  </a:txBody>
-                  <a:tcPr marL="91440" marR="91440" marT="45720" marB="45720">
-                    <a:lnL w="2540" cap="flat" cmpd="sng" algn="ctr">
-                      <a:solidFill>
-                        <a:srgbClr val="EEEEEE"/>
-                      </a:solidFill>
-                      <a:prstDash val="solid"/>
-                      <a:round/>
-                      <a:headEnd type="none" w="med" len="med"/>
-                      <a:tailEnd type="none" w="med" len="med"/>
-                    </a:lnL>
-                    <a:lnR w="2540" cap="flat" cmpd="sng" algn="ctr">
-                      <a:solidFill>
-                        <a:srgbClr val="EEEEEE"/>
-                      </a:solidFill>
-                      <a:prstDash val="solid"/>
-                      <a:round/>
-                      <a:headEnd type="none" w="med" len="med"/>
-                      <a:tailEnd type="none" w="med" len="med"/>
-                    </a:lnR>
-                    <a:lnT w="2540" cap="flat" cmpd="sng" algn="ctr">
-                      <a:solidFill>
-                        <a:srgbClr val="EEEEEE"/>
-                      </a:solidFill>
-                      <a:prstDash val="solid"/>
-                      <a:round/>
-                      <a:headEnd type="none" w="med" len="med"/>
-                      <a:tailEnd type="none" w="med" len="med"/>
-                    </a:lnT>
-                    <a:lnB w="2540" cap="flat" cmpd="sng" algn="ctr">
-                      <a:solidFill>
-                        <a:srgbClr val="EEEEEE"/>
-                      </a:solidFill>
-                      <a:prstDash val="solid"/>
-                      <a:round/>
-                      <a:headEnd type="none" w="med" len="med"/>
-                      <a:tailEnd type="none" w="med" len="med"/>
-                    </a:lnB>
-                  </a:tcPr>
-                </a:tc>
-                <a:tc>
-                  <a:txBody>
-                    <a:bodyPr/>
-                    <a:lstStyle/>
-                    <a:p>
-                      <a:pPr algn="ctr" indent="0" marL="0">
-                        <a:buNone/>
-                      </a:pPr>
-                      <a:r>
-                        <a:rPr lang="en-US" sz="500" dirty="0">
-                          <a:solidFill>
-                            <a:srgbClr val="000000"/>
-                          </a:solidFill>
-                          <a:latin typeface="Calibri" pitchFamily="34" charset="0"/>
-                          <a:ea typeface="Calibri" pitchFamily="34" charset="-122"/>
-                          <a:cs typeface="Calibri" pitchFamily="34" charset="-120"/>
-                        </a:rPr>
-                        <a:t>0.60%</a:t>
+                        <a:t>0.57%</a:t>
                       </a:r>
                       <a:endParaRPr lang="en-US" sz="500" dirty="0">
                         <a:latin typeface="Calibri" charset="0"/>
@@ -14524,2284 +17280,6 @@
                           <a:cs typeface="Calibri" pitchFamily="34" charset="-120"/>
                         </a:rPr>
                         <a:t>0.60%</a:t>
-                      </a:r>
-                      <a:endParaRPr lang="en-US" sz="500" dirty="0">
-                        <a:latin typeface="Calibri" charset="0"/>
-                        <a:ea typeface="Calibri" charset="0"/>
-                        <a:cs typeface="Calibri" charset="0"/>
-                      </a:endParaRPr>
-                    </a:p>
-                  </a:txBody>
-                  <a:tcPr marL="91440" marR="91440" marT="45720" marB="45720">
-                    <a:lnL w="2540" cap="flat" cmpd="sng" algn="ctr">
-                      <a:solidFill>
-                        <a:srgbClr val="EEEEEE"/>
-                      </a:solidFill>
-                      <a:prstDash val="solid"/>
-                      <a:round/>
-                      <a:headEnd type="none" w="med" len="med"/>
-                      <a:tailEnd type="none" w="med" len="med"/>
-                    </a:lnL>
-                    <a:lnR w="2540" cap="flat" cmpd="sng" algn="ctr">
-                      <a:solidFill>
-                        <a:srgbClr val="EEEEEE"/>
-                      </a:solidFill>
-                      <a:prstDash val="solid"/>
-                      <a:round/>
-                      <a:headEnd type="none" w="med" len="med"/>
-                      <a:tailEnd type="none" w="med" len="med"/>
-                    </a:lnR>
-                    <a:lnT w="2540" cap="flat" cmpd="sng" algn="ctr">
-                      <a:solidFill>
-                        <a:srgbClr val="EEEEEE"/>
-                      </a:solidFill>
-                      <a:prstDash val="solid"/>
-                      <a:round/>
-                      <a:headEnd type="none" w="med" len="med"/>
-                      <a:tailEnd type="none" w="med" len="med"/>
-                    </a:lnT>
-                    <a:lnB w="2540" cap="flat" cmpd="sng" algn="ctr">
-                      <a:solidFill>
-                        <a:srgbClr val="EEEEEE"/>
-                      </a:solidFill>
-                      <a:prstDash val="solid"/>
-                      <a:round/>
-                      <a:headEnd type="none" w="med" len="med"/>
-                      <a:tailEnd type="none" w="med" len="med"/>
-                    </a:lnB>
-                  </a:tcPr>
-                </a:tc>
-                <a:tc>
-                  <a:txBody>
-                    <a:bodyPr/>
-                    <a:lstStyle/>
-                    <a:p>
-                      <a:pPr algn="ctr" indent="0" marL="0">
-                        <a:buNone/>
-                      </a:pPr>
-                      <a:r>
-                        <a:rPr lang="en-US" sz="500" dirty="0">
-                          <a:solidFill>
-                            <a:srgbClr val="000000"/>
-                          </a:solidFill>
-                          <a:latin typeface="Calibri" pitchFamily="34" charset="0"/>
-                          <a:ea typeface="Calibri" pitchFamily="34" charset="-122"/>
-                          <a:cs typeface="Calibri" pitchFamily="34" charset="-120"/>
-                        </a:rPr>
-                        <a:t>0.62%</a:t>
-                      </a:r>
-                      <a:endParaRPr lang="en-US" sz="500" dirty="0">
-                        <a:latin typeface="Calibri" charset="0"/>
-                        <a:ea typeface="Calibri" charset="0"/>
-                        <a:cs typeface="Calibri" charset="0"/>
-                      </a:endParaRPr>
-                    </a:p>
-                  </a:txBody>
-                  <a:tcPr marL="91440" marR="91440" marT="45720" marB="45720">
-                    <a:lnL w="2540" cap="flat" cmpd="sng" algn="ctr">
-                      <a:solidFill>
-                        <a:srgbClr val="EEEEEE"/>
-                      </a:solidFill>
-                      <a:prstDash val="solid"/>
-                      <a:round/>
-                      <a:headEnd type="none" w="med" len="med"/>
-                      <a:tailEnd type="none" w="med" len="med"/>
-                    </a:lnL>
-                    <a:lnR w="2540" cap="flat" cmpd="sng" algn="ctr">
-                      <a:solidFill>
-                        <a:srgbClr val="EEEEEE"/>
-                      </a:solidFill>
-                      <a:prstDash val="solid"/>
-                      <a:round/>
-                      <a:headEnd type="none" w="med" len="med"/>
-                      <a:tailEnd type="none" w="med" len="med"/>
-                    </a:lnR>
-                    <a:lnT w="2540" cap="flat" cmpd="sng" algn="ctr">
-                      <a:solidFill>
-                        <a:srgbClr val="EEEEEE"/>
-                      </a:solidFill>
-                      <a:prstDash val="solid"/>
-                      <a:round/>
-                      <a:headEnd type="none" w="med" len="med"/>
-                      <a:tailEnd type="none" w="med" len="med"/>
-                    </a:lnT>
-                    <a:lnB w="2540" cap="flat" cmpd="sng" algn="ctr">
-                      <a:solidFill>
-                        <a:srgbClr val="EEEEEE"/>
-                      </a:solidFill>
-                      <a:prstDash val="solid"/>
-                      <a:round/>
-                      <a:headEnd type="none" w="med" len="med"/>
-                      <a:tailEnd type="none" w="med" len="med"/>
-                    </a:lnB>
-                  </a:tcPr>
-                </a:tc>
-                <a:tc>
-                  <a:txBody>
-                    <a:bodyPr/>
-                    <a:lstStyle/>
-                    <a:p>
-                      <a:pPr algn="ctr" indent="0" marL="0">
-                        <a:buNone/>
-                      </a:pPr>
-                      <a:r>
-                        <a:rPr lang="en-US" sz="500" b="1" dirty="0">
-                          <a:solidFill>
-                            <a:srgbClr val="000000"/>
-                          </a:solidFill>
-                          <a:latin typeface="Calibri" pitchFamily="34" charset="0"/>
-                          <a:ea typeface="Calibri" pitchFamily="34" charset="-122"/>
-                          <a:cs typeface="Calibri" pitchFamily="34" charset="-120"/>
-                        </a:rPr>
-                        <a:t>7.14%</a:t>
-                      </a:r>
-                      <a:endParaRPr lang="en-US" sz="500" dirty="0">
-                        <a:latin typeface="Calibri" charset="0"/>
-                        <a:ea typeface="Calibri" charset="0"/>
-                        <a:cs typeface="Calibri" charset="0"/>
-                      </a:endParaRPr>
-                    </a:p>
-                  </a:txBody>
-                  <a:tcPr marL="91440" marR="91440" marT="45720" marB="45720">
-                    <a:lnL w="2540" cap="flat" cmpd="sng" algn="ctr">
-                      <a:solidFill>
-                        <a:srgbClr val="EEEEEE"/>
-                      </a:solidFill>
-                      <a:prstDash val="solid"/>
-                      <a:round/>
-                      <a:headEnd type="none" w="med" len="med"/>
-                      <a:tailEnd type="none" w="med" len="med"/>
-                    </a:lnL>
-                    <a:lnR w="2540" cap="flat" cmpd="sng" algn="ctr">
-                      <a:solidFill>
-                        <a:srgbClr val="EEEEEE"/>
-                      </a:solidFill>
-                      <a:prstDash val="solid"/>
-                      <a:round/>
-                      <a:headEnd type="none" w="med" len="med"/>
-                      <a:tailEnd type="none" w="med" len="med"/>
-                    </a:lnR>
-                    <a:lnT w="2540" cap="flat" cmpd="sng" algn="ctr">
-                      <a:solidFill>
-                        <a:srgbClr val="EEEEEE"/>
-                      </a:solidFill>
-                      <a:prstDash val="solid"/>
-                      <a:round/>
-                      <a:headEnd type="none" w="med" len="med"/>
-                      <a:tailEnd type="none" w="med" len="med"/>
-                    </a:lnT>
-                    <a:lnB w="2540" cap="flat" cmpd="sng" algn="ctr">
-                      <a:solidFill>
-                        <a:srgbClr val="EEEEEE"/>
-                      </a:solidFill>
-                      <a:prstDash val="solid"/>
-                      <a:round/>
-                      <a:headEnd type="none" w="med" len="med"/>
-                      <a:tailEnd type="none" w="med" len="med"/>
-                    </a:lnB>
-                  </a:tcPr>
-                </a:tc>
-              </a:tr>
-              <a:tr h="123444">
-                <a:tc>
-                  <a:txBody>
-                    <a:bodyPr/>
-                    <a:lstStyle/>
-                    <a:p>
-                      <a:pPr algn="l" indent="0" marL="0">
-                        <a:buNone/>
-                      </a:pPr>
-                      <a:r>
-                        <a:rPr lang="en-US" sz="500" b="1" dirty="0">
-                          <a:solidFill>
-                            <a:srgbClr val="000000"/>
-                          </a:solidFill>
-                          <a:latin typeface="Calibri" pitchFamily="34" charset="0"/>
-                          <a:ea typeface="Calibri" pitchFamily="34" charset="-122"/>
-                          <a:cs typeface="Calibri" pitchFamily="34" charset="-120"/>
-                        </a:rPr>
-                        <a:t>2026</a:t>
-                      </a:r>
-                      <a:endParaRPr lang="en-US" sz="500" dirty="0">
-                        <a:latin typeface="Calibri" charset="0"/>
-                        <a:ea typeface="Calibri" charset="0"/>
-                        <a:cs typeface="Calibri" charset="0"/>
-                      </a:endParaRPr>
-                    </a:p>
-                  </a:txBody>
-                  <a:tcPr marL="91440" marR="91440" marT="45720" marB="45720">
-                    <a:lnL w="2540" cap="flat" cmpd="sng" algn="ctr">
-                      <a:solidFill>
-                        <a:srgbClr val="EEEEEE"/>
-                      </a:solidFill>
-                      <a:prstDash val="solid"/>
-                      <a:round/>
-                      <a:headEnd type="none" w="med" len="med"/>
-                      <a:tailEnd type="none" w="med" len="med"/>
-                    </a:lnL>
-                    <a:lnR w="2540" cap="flat" cmpd="sng" algn="ctr">
-                      <a:solidFill>
-                        <a:srgbClr val="EEEEEE"/>
-                      </a:solidFill>
-                      <a:prstDash val="solid"/>
-                      <a:round/>
-                      <a:headEnd type="none" w="med" len="med"/>
-                      <a:tailEnd type="none" w="med" len="med"/>
-                    </a:lnR>
-                    <a:lnT w="2540" cap="flat" cmpd="sng" algn="ctr">
-                      <a:solidFill>
-                        <a:srgbClr val="EEEEEE"/>
-                      </a:solidFill>
-                      <a:prstDash val="solid"/>
-                      <a:round/>
-                      <a:headEnd type="none" w="med" len="med"/>
-                      <a:tailEnd type="none" w="med" len="med"/>
-                    </a:lnT>
-                    <a:lnB w="2540" cap="flat" cmpd="sng" algn="ctr">
-                      <a:solidFill>
-                        <a:srgbClr val="EEEEEE"/>
-                      </a:solidFill>
-                      <a:prstDash val="solid"/>
-                      <a:round/>
-                      <a:headEnd type="none" w="med" len="med"/>
-                      <a:tailEnd type="none" w="med" len="med"/>
-                    </a:lnB>
-                  </a:tcPr>
-                </a:tc>
-                <a:tc>
-                  <a:txBody>
-                    <a:bodyPr/>
-                    <a:lstStyle/>
-                    <a:p>
-                      <a:pPr algn="l" indent="0" marL="0">
-                        <a:buNone/>
-                      </a:pPr>
-                      <a:r>
-                        <a:rPr lang="en-US" sz="500" dirty="0">
-                          <a:solidFill>
-                            <a:srgbClr val="777777"/>
-                          </a:solidFill>
-                          <a:latin typeface="Calibri" pitchFamily="34" charset="0"/>
-                          <a:ea typeface="Calibri" pitchFamily="34" charset="-122"/>
-                          <a:cs typeface="Calibri" pitchFamily="34" charset="-120"/>
-                        </a:rPr>
-                        <a:t>ICP</a:t>
-                      </a:r>
-                      <a:endParaRPr lang="en-US" sz="500" dirty="0">
-                        <a:latin typeface="Calibri" charset="0"/>
-                        <a:ea typeface="Calibri" charset="0"/>
-                        <a:cs typeface="Calibri" charset="0"/>
-                      </a:endParaRPr>
-                    </a:p>
-                  </a:txBody>
-                  <a:tcPr marL="91440" marR="91440" marT="45720" marB="45720">
-                    <a:lnL w="2540" cap="flat" cmpd="sng" algn="ctr">
-                      <a:solidFill>
-                        <a:srgbClr val="EEEEEE"/>
-                      </a:solidFill>
-                      <a:prstDash val="solid"/>
-                      <a:round/>
-                      <a:headEnd type="none" w="med" len="med"/>
-                      <a:tailEnd type="none" w="med" len="med"/>
-                    </a:lnL>
-                    <a:lnR w="2540" cap="flat" cmpd="sng" algn="ctr">
-                      <a:solidFill>
-                        <a:srgbClr val="EEEEEE"/>
-                      </a:solidFill>
-                      <a:prstDash val="solid"/>
-                      <a:round/>
-                      <a:headEnd type="none" w="med" len="med"/>
-                      <a:tailEnd type="none" w="med" len="med"/>
-                    </a:lnR>
-                    <a:lnT w="2540" cap="flat" cmpd="sng" algn="ctr">
-                      <a:solidFill>
-                        <a:srgbClr val="EEEEEE"/>
-                      </a:solidFill>
-                      <a:prstDash val="solid"/>
-                      <a:round/>
-                      <a:headEnd type="none" w="med" len="med"/>
-                      <a:tailEnd type="none" w="med" len="med"/>
-                    </a:lnT>
-                    <a:lnB w="2540" cap="flat" cmpd="sng" algn="ctr">
-                      <a:solidFill>
-                        <a:srgbClr val="EEEEEE"/>
-                      </a:solidFill>
-                      <a:prstDash val="solid"/>
-                      <a:round/>
-                      <a:headEnd type="none" w="med" len="med"/>
-                      <a:tailEnd type="none" w="med" len="med"/>
-                    </a:lnB>
-                  </a:tcPr>
-                </a:tc>
-                <a:tc>
-                  <a:txBody>
-                    <a:bodyPr/>
-                    <a:lstStyle/>
-                    <a:p>
-                      <a:pPr algn="ctr" indent="0" marL="0">
-                        <a:buNone/>
-                      </a:pPr>
-                      <a:r>
-                        <a:rPr lang="en-US" sz="500" dirty="0">
-                          <a:solidFill>
-                            <a:srgbClr val="777777"/>
-                          </a:solidFill>
-                          <a:latin typeface="Calibri" pitchFamily="34" charset="0"/>
-                          <a:ea typeface="Calibri" pitchFamily="34" charset="-122"/>
-                          <a:cs typeface="Calibri" pitchFamily="34" charset="-120"/>
-                        </a:rPr>
-                        <a:t>0.37%</a:t>
-                      </a:r>
-                      <a:endParaRPr lang="en-US" sz="500" dirty="0">
-                        <a:latin typeface="Calibri" charset="0"/>
-                        <a:ea typeface="Calibri" charset="0"/>
-                        <a:cs typeface="Calibri" charset="0"/>
-                      </a:endParaRPr>
-                    </a:p>
-                  </a:txBody>
-                  <a:tcPr marL="91440" marR="91440" marT="45720" marB="45720">
-                    <a:lnL w="2540" cap="flat" cmpd="sng" algn="ctr">
-                      <a:solidFill>
-                        <a:srgbClr val="EEEEEE"/>
-                      </a:solidFill>
-                      <a:prstDash val="solid"/>
-                      <a:round/>
-                      <a:headEnd type="none" w="med" len="med"/>
-                      <a:tailEnd type="none" w="med" len="med"/>
-                    </a:lnL>
-                    <a:lnR w="2540" cap="flat" cmpd="sng" algn="ctr">
-                      <a:solidFill>
-                        <a:srgbClr val="EEEEEE"/>
-                      </a:solidFill>
-                      <a:prstDash val="solid"/>
-                      <a:round/>
-                      <a:headEnd type="none" w="med" len="med"/>
-                      <a:tailEnd type="none" w="med" len="med"/>
-                    </a:lnR>
-                    <a:lnT w="2540" cap="flat" cmpd="sng" algn="ctr">
-                      <a:solidFill>
-                        <a:srgbClr val="EEEEEE"/>
-                      </a:solidFill>
-                      <a:prstDash val="solid"/>
-                      <a:round/>
-                      <a:headEnd type="none" w="med" len="med"/>
-                      <a:tailEnd type="none" w="med" len="med"/>
-                    </a:lnT>
-                    <a:lnB w="2540" cap="flat" cmpd="sng" algn="ctr">
-                      <a:solidFill>
-                        <a:srgbClr val="EEEEEE"/>
-                      </a:solidFill>
-                      <a:prstDash val="solid"/>
-                      <a:round/>
-                      <a:headEnd type="none" w="med" len="med"/>
-                      <a:tailEnd type="none" w="med" len="med"/>
-                    </a:lnB>
-                  </a:tcPr>
-                </a:tc>
-                <a:tc>
-                  <a:txBody>
-                    <a:bodyPr/>
-                    <a:lstStyle/>
-                    <a:p>
-                      <a:pPr algn="ctr" indent="0" marL="0">
-                        <a:buNone/>
-                      </a:pPr>
-                      <a:r>
-                        <a:rPr lang="en-US" sz="500" dirty="0">
-                          <a:solidFill>
-                            <a:srgbClr val="777777"/>
-                          </a:solidFill>
-                          <a:latin typeface="Calibri" pitchFamily="34" charset="0"/>
-                          <a:ea typeface="Calibri" pitchFamily="34" charset="-122"/>
-                          <a:cs typeface="Calibri" pitchFamily="34" charset="-120"/>
-                        </a:rPr>
-                        <a:t>0.37%</a:t>
-                      </a:r>
-                      <a:endParaRPr lang="en-US" sz="500" dirty="0">
-                        <a:latin typeface="Calibri" charset="0"/>
-                        <a:ea typeface="Calibri" charset="0"/>
-                        <a:cs typeface="Calibri" charset="0"/>
-                      </a:endParaRPr>
-                    </a:p>
-                  </a:txBody>
-                  <a:tcPr marL="91440" marR="91440" marT="45720" marB="45720">
-                    <a:lnL w="2540" cap="flat" cmpd="sng" algn="ctr">
-                      <a:solidFill>
-                        <a:srgbClr val="EEEEEE"/>
-                      </a:solidFill>
-                      <a:prstDash val="solid"/>
-                      <a:round/>
-                      <a:headEnd type="none" w="med" len="med"/>
-                      <a:tailEnd type="none" w="med" len="med"/>
-                    </a:lnL>
-                    <a:lnR w="2540" cap="flat" cmpd="sng" algn="ctr">
-                      <a:solidFill>
-                        <a:srgbClr val="EEEEEE"/>
-                      </a:solidFill>
-                      <a:prstDash val="solid"/>
-                      <a:round/>
-                      <a:headEnd type="none" w="med" len="med"/>
-                      <a:tailEnd type="none" w="med" len="med"/>
-                    </a:lnR>
-                    <a:lnT w="2540" cap="flat" cmpd="sng" algn="ctr">
-                      <a:solidFill>
-                        <a:srgbClr val="EEEEEE"/>
-                      </a:solidFill>
-                      <a:prstDash val="solid"/>
-                      <a:round/>
-                      <a:headEnd type="none" w="med" len="med"/>
-                      <a:tailEnd type="none" w="med" len="med"/>
-                    </a:lnT>
-                    <a:lnB w="2540" cap="flat" cmpd="sng" algn="ctr">
-                      <a:solidFill>
-                        <a:srgbClr val="EEEEEE"/>
-                      </a:solidFill>
-                      <a:prstDash val="solid"/>
-                      <a:round/>
-                      <a:headEnd type="none" w="med" len="med"/>
-                      <a:tailEnd type="none" w="med" len="med"/>
-                    </a:lnB>
-                  </a:tcPr>
-                </a:tc>
-                <a:tc>
-                  <a:txBody>
-                    <a:bodyPr/>
-                    <a:lstStyle/>
-                    <a:p>
-                      <a:pPr algn="ctr" indent="0" marL="0">
-                        <a:buNone/>
-                      </a:pPr>
-                      <a:r>
-                        <a:rPr lang="en-US" sz="500" dirty="0">
-                          <a:solidFill>
-                            <a:srgbClr val="777777"/>
-                          </a:solidFill>
-                          <a:latin typeface="Calibri" pitchFamily="34" charset="0"/>
-                          <a:ea typeface="Calibri" pitchFamily="34" charset="-122"/>
-                          <a:cs typeface="Calibri" pitchFamily="34" charset="-120"/>
-                        </a:rPr>
-                        <a:t>0.37%</a:t>
-                      </a:r>
-                      <a:endParaRPr lang="en-US" sz="500" dirty="0">
-                        <a:latin typeface="Calibri" charset="0"/>
-                        <a:ea typeface="Calibri" charset="0"/>
-                        <a:cs typeface="Calibri" charset="0"/>
-                      </a:endParaRPr>
-                    </a:p>
-                  </a:txBody>
-                  <a:tcPr marL="91440" marR="91440" marT="45720" marB="45720">
-                    <a:lnL w="2540" cap="flat" cmpd="sng" algn="ctr">
-                      <a:solidFill>
-                        <a:srgbClr val="EEEEEE"/>
-                      </a:solidFill>
-                      <a:prstDash val="solid"/>
-                      <a:round/>
-                      <a:headEnd type="none" w="med" len="med"/>
-                      <a:tailEnd type="none" w="med" len="med"/>
-                    </a:lnL>
-                    <a:lnR w="2540" cap="flat" cmpd="sng" algn="ctr">
-                      <a:solidFill>
-                        <a:srgbClr val="EEEEEE"/>
-                      </a:solidFill>
-                      <a:prstDash val="solid"/>
-                      <a:round/>
-                      <a:headEnd type="none" w="med" len="med"/>
-                      <a:tailEnd type="none" w="med" len="med"/>
-                    </a:lnR>
-                    <a:lnT w="2540" cap="flat" cmpd="sng" algn="ctr">
-                      <a:solidFill>
-                        <a:srgbClr val="EEEEEE"/>
-                      </a:solidFill>
-                      <a:prstDash val="solid"/>
-                      <a:round/>
-                      <a:headEnd type="none" w="med" len="med"/>
-                      <a:tailEnd type="none" w="med" len="med"/>
-                    </a:lnT>
-                    <a:lnB w="2540" cap="flat" cmpd="sng" algn="ctr">
-                      <a:solidFill>
-                        <a:srgbClr val="EEEEEE"/>
-                      </a:solidFill>
-                      <a:prstDash val="solid"/>
-                      <a:round/>
-                      <a:headEnd type="none" w="med" len="med"/>
-                      <a:tailEnd type="none" w="med" len="med"/>
-                    </a:lnB>
-                  </a:tcPr>
-                </a:tc>
-                <a:tc>
-                  <a:txBody>
-                    <a:bodyPr/>
-                    <a:lstStyle/>
-                    <a:p>
-                      <a:pPr algn="ctr" indent="0" marL="0">
-                        <a:buNone/>
-                      </a:pPr>
-                      <a:r>
-                        <a:rPr lang="en-US" sz="500" dirty="0">
-                          <a:solidFill>
-                            <a:srgbClr val="777777"/>
-                          </a:solidFill>
-                          <a:latin typeface="Calibri" pitchFamily="34" charset="0"/>
-                          <a:ea typeface="Calibri" pitchFamily="34" charset="-122"/>
-                          <a:cs typeface="Calibri" pitchFamily="34" charset="-120"/>
-                        </a:rPr>
-                        <a:t>0.37%</a:t>
-                      </a:r>
-                      <a:endParaRPr lang="en-US" sz="500" dirty="0">
-                        <a:latin typeface="Calibri" charset="0"/>
-                        <a:ea typeface="Calibri" charset="0"/>
-                        <a:cs typeface="Calibri" charset="0"/>
-                      </a:endParaRPr>
-                    </a:p>
-                  </a:txBody>
-                  <a:tcPr marL="91440" marR="91440" marT="45720" marB="45720">
-                    <a:lnL w="2540" cap="flat" cmpd="sng" algn="ctr">
-                      <a:solidFill>
-                        <a:srgbClr val="EEEEEE"/>
-                      </a:solidFill>
-                      <a:prstDash val="solid"/>
-                      <a:round/>
-                      <a:headEnd type="none" w="med" len="med"/>
-                      <a:tailEnd type="none" w="med" len="med"/>
-                    </a:lnL>
-                    <a:lnR w="2540" cap="flat" cmpd="sng" algn="ctr">
-                      <a:solidFill>
-                        <a:srgbClr val="EEEEEE"/>
-                      </a:solidFill>
-                      <a:prstDash val="solid"/>
-                      <a:round/>
-                      <a:headEnd type="none" w="med" len="med"/>
-                      <a:tailEnd type="none" w="med" len="med"/>
-                    </a:lnR>
-                    <a:lnT w="2540" cap="flat" cmpd="sng" algn="ctr">
-                      <a:solidFill>
-                        <a:srgbClr val="EEEEEE"/>
-                      </a:solidFill>
-                      <a:prstDash val="solid"/>
-                      <a:round/>
-                      <a:headEnd type="none" w="med" len="med"/>
-                      <a:tailEnd type="none" w="med" len="med"/>
-                    </a:lnT>
-                    <a:lnB w="2540" cap="flat" cmpd="sng" algn="ctr">
-                      <a:solidFill>
-                        <a:srgbClr val="EEEEEE"/>
-                      </a:solidFill>
-                      <a:prstDash val="solid"/>
-                      <a:round/>
-                      <a:headEnd type="none" w="med" len="med"/>
-                      <a:tailEnd type="none" w="med" len="med"/>
-                    </a:lnB>
-                  </a:tcPr>
-                </a:tc>
-                <a:tc>
-                  <a:txBody>
-                    <a:bodyPr/>
-                    <a:lstStyle/>
-                    <a:p>
-                      <a:pPr algn="ctr" indent="0" marL="0">
-                        <a:buNone/>
-                      </a:pPr>
-                      <a:endParaRPr lang="en-US" sz="500" dirty="0">
-                        <a:latin typeface="Calibri" charset="0"/>
-                        <a:ea typeface="Calibri" charset="0"/>
-                        <a:cs typeface="Calibri" charset="0"/>
-                      </a:endParaRPr>
-                    </a:p>
-                  </a:txBody>
-                  <a:tcPr marL="91440" marR="91440" marT="45720" marB="45720">
-                    <a:lnL w="2540" cap="flat" cmpd="sng" algn="ctr">
-                      <a:solidFill>
-                        <a:srgbClr val="EEEEEE"/>
-                      </a:solidFill>
-                      <a:prstDash val="solid"/>
-                      <a:round/>
-                      <a:headEnd type="none" w="med" len="med"/>
-                      <a:tailEnd type="none" w="med" len="med"/>
-                    </a:lnL>
-                    <a:lnR w="2540" cap="flat" cmpd="sng" algn="ctr">
-                      <a:solidFill>
-                        <a:srgbClr val="EEEEEE"/>
-                      </a:solidFill>
-                      <a:prstDash val="solid"/>
-                      <a:round/>
-                      <a:headEnd type="none" w="med" len="med"/>
-                      <a:tailEnd type="none" w="med" len="med"/>
-                    </a:lnR>
-                    <a:lnT w="2540" cap="flat" cmpd="sng" algn="ctr">
-                      <a:solidFill>
-                        <a:srgbClr val="EEEEEE"/>
-                      </a:solidFill>
-                      <a:prstDash val="solid"/>
-                      <a:round/>
-                      <a:headEnd type="none" w="med" len="med"/>
-                      <a:tailEnd type="none" w="med" len="med"/>
-                    </a:lnT>
-                    <a:lnB w="2540" cap="flat" cmpd="sng" algn="ctr">
-                      <a:solidFill>
-                        <a:srgbClr val="EEEEEE"/>
-                      </a:solidFill>
-                      <a:prstDash val="solid"/>
-                      <a:round/>
-                      <a:headEnd type="none" w="med" len="med"/>
-                      <a:tailEnd type="none" w="med" len="med"/>
-                    </a:lnB>
-                  </a:tcPr>
-                </a:tc>
-                <a:tc>
-                  <a:txBody>
-                    <a:bodyPr/>
-                    <a:lstStyle/>
-                    <a:p>
-                      <a:pPr algn="ctr" indent="0" marL="0">
-                        <a:buNone/>
-                      </a:pPr>
-                      <a:endParaRPr lang="en-US" sz="500" dirty="0">
-                        <a:latin typeface="Calibri" charset="0"/>
-                        <a:ea typeface="Calibri" charset="0"/>
-                        <a:cs typeface="Calibri" charset="0"/>
-                      </a:endParaRPr>
-                    </a:p>
-                  </a:txBody>
-                  <a:tcPr marL="91440" marR="91440" marT="45720" marB="45720">
-                    <a:lnL w="2540" cap="flat" cmpd="sng" algn="ctr">
-                      <a:solidFill>
-                        <a:srgbClr val="EEEEEE"/>
-                      </a:solidFill>
-                      <a:prstDash val="solid"/>
-                      <a:round/>
-                      <a:headEnd type="none" w="med" len="med"/>
-                      <a:tailEnd type="none" w="med" len="med"/>
-                    </a:lnL>
-                    <a:lnR w="2540" cap="flat" cmpd="sng" algn="ctr">
-                      <a:solidFill>
-                        <a:srgbClr val="EEEEEE"/>
-                      </a:solidFill>
-                      <a:prstDash val="solid"/>
-                      <a:round/>
-                      <a:headEnd type="none" w="med" len="med"/>
-                      <a:tailEnd type="none" w="med" len="med"/>
-                    </a:lnR>
-                    <a:lnT w="2540" cap="flat" cmpd="sng" algn="ctr">
-                      <a:solidFill>
-                        <a:srgbClr val="EEEEEE"/>
-                      </a:solidFill>
-                      <a:prstDash val="solid"/>
-                      <a:round/>
-                      <a:headEnd type="none" w="med" len="med"/>
-                      <a:tailEnd type="none" w="med" len="med"/>
-                    </a:lnT>
-                    <a:lnB w="2540" cap="flat" cmpd="sng" algn="ctr">
-                      <a:solidFill>
-                        <a:srgbClr val="EEEEEE"/>
-                      </a:solidFill>
-                      <a:prstDash val="solid"/>
-                      <a:round/>
-                      <a:headEnd type="none" w="med" len="med"/>
-                      <a:tailEnd type="none" w="med" len="med"/>
-                    </a:lnB>
-                  </a:tcPr>
-                </a:tc>
-                <a:tc>
-                  <a:txBody>
-                    <a:bodyPr/>
-                    <a:lstStyle/>
-                    <a:p>
-                      <a:pPr algn="ctr" indent="0" marL="0">
-                        <a:buNone/>
-                      </a:pPr>
-                      <a:endParaRPr lang="en-US" sz="500" dirty="0">
-                        <a:latin typeface="Calibri" charset="0"/>
-                        <a:ea typeface="Calibri" charset="0"/>
-                        <a:cs typeface="Calibri" charset="0"/>
-                      </a:endParaRPr>
-                    </a:p>
-                  </a:txBody>
-                  <a:tcPr marL="91440" marR="91440" marT="45720" marB="45720">
-                    <a:lnL w="2540" cap="flat" cmpd="sng" algn="ctr">
-                      <a:solidFill>
-                        <a:srgbClr val="EEEEEE"/>
-                      </a:solidFill>
-                      <a:prstDash val="solid"/>
-                      <a:round/>
-                      <a:headEnd type="none" w="med" len="med"/>
-                      <a:tailEnd type="none" w="med" len="med"/>
-                    </a:lnL>
-                    <a:lnR w="2540" cap="flat" cmpd="sng" algn="ctr">
-                      <a:solidFill>
-                        <a:srgbClr val="EEEEEE"/>
-                      </a:solidFill>
-                      <a:prstDash val="solid"/>
-                      <a:round/>
-                      <a:headEnd type="none" w="med" len="med"/>
-                      <a:tailEnd type="none" w="med" len="med"/>
-                    </a:lnR>
-                    <a:lnT w="2540" cap="flat" cmpd="sng" algn="ctr">
-                      <a:solidFill>
-                        <a:srgbClr val="EEEEEE"/>
-                      </a:solidFill>
-                      <a:prstDash val="solid"/>
-                      <a:round/>
-                      <a:headEnd type="none" w="med" len="med"/>
-                      <a:tailEnd type="none" w="med" len="med"/>
-                    </a:lnT>
-                    <a:lnB w="2540" cap="flat" cmpd="sng" algn="ctr">
-                      <a:solidFill>
-                        <a:srgbClr val="EEEEEE"/>
-                      </a:solidFill>
-                      <a:prstDash val="solid"/>
-                      <a:round/>
-                      <a:headEnd type="none" w="med" len="med"/>
-                      <a:tailEnd type="none" w="med" len="med"/>
-                    </a:lnB>
-                  </a:tcPr>
-                </a:tc>
-                <a:tc>
-                  <a:txBody>
-                    <a:bodyPr/>
-                    <a:lstStyle/>
-                    <a:p>
-                      <a:pPr algn="ctr" indent="0" marL="0">
-                        <a:buNone/>
-                      </a:pPr>
-                      <a:endParaRPr lang="en-US" sz="500" dirty="0">
-                        <a:latin typeface="Calibri" charset="0"/>
-                        <a:ea typeface="Calibri" charset="0"/>
-                        <a:cs typeface="Calibri" charset="0"/>
-                      </a:endParaRPr>
-                    </a:p>
-                  </a:txBody>
-                  <a:tcPr marL="91440" marR="91440" marT="45720" marB="45720">
-                    <a:lnL w="2540" cap="flat" cmpd="sng" algn="ctr">
-                      <a:solidFill>
-                        <a:srgbClr val="EEEEEE"/>
-                      </a:solidFill>
-                      <a:prstDash val="solid"/>
-                      <a:round/>
-                      <a:headEnd type="none" w="med" len="med"/>
-                      <a:tailEnd type="none" w="med" len="med"/>
-                    </a:lnL>
-                    <a:lnR w="2540" cap="flat" cmpd="sng" algn="ctr">
-                      <a:solidFill>
-                        <a:srgbClr val="EEEEEE"/>
-                      </a:solidFill>
-                      <a:prstDash val="solid"/>
-                      <a:round/>
-                      <a:headEnd type="none" w="med" len="med"/>
-                      <a:tailEnd type="none" w="med" len="med"/>
-                    </a:lnR>
-                    <a:lnT w="2540" cap="flat" cmpd="sng" algn="ctr">
-                      <a:solidFill>
-                        <a:srgbClr val="EEEEEE"/>
-                      </a:solidFill>
-                      <a:prstDash val="solid"/>
-                      <a:round/>
-                      <a:headEnd type="none" w="med" len="med"/>
-                      <a:tailEnd type="none" w="med" len="med"/>
-                    </a:lnT>
-                    <a:lnB w="2540" cap="flat" cmpd="sng" algn="ctr">
-                      <a:solidFill>
-                        <a:srgbClr val="EEEEEE"/>
-                      </a:solidFill>
-                      <a:prstDash val="solid"/>
-                      <a:round/>
-                      <a:headEnd type="none" w="med" len="med"/>
-                      <a:tailEnd type="none" w="med" len="med"/>
-                    </a:lnB>
-                  </a:tcPr>
-                </a:tc>
-                <a:tc>
-                  <a:txBody>
-                    <a:bodyPr/>
-                    <a:lstStyle/>
-                    <a:p>
-                      <a:pPr algn="ctr" indent="0" marL="0">
-                        <a:buNone/>
-                      </a:pPr>
-                      <a:endParaRPr lang="en-US" sz="500" dirty="0">
-                        <a:latin typeface="Calibri" charset="0"/>
-                        <a:ea typeface="Calibri" charset="0"/>
-                        <a:cs typeface="Calibri" charset="0"/>
-                      </a:endParaRPr>
-                    </a:p>
-                  </a:txBody>
-                  <a:tcPr marL="91440" marR="91440" marT="45720" marB="45720">
-                    <a:lnL w="2540" cap="flat" cmpd="sng" algn="ctr">
-                      <a:solidFill>
-                        <a:srgbClr val="EEEEEE"/>
-                      </a:solidFill>
-                      <a:prstDash val="solid"/>
-                      <a:round/>
-                      <a:headEnd type="none" w="med" len="med"/>
-                      <a:tailEnd type="none" w="med" len="med"/>
-                    </a:lnL>
-                    <a:lnR w="2540" cap="flat" cmpd="sng" algn="ctr">
-                      <a:solidFill>
-                        <a:srgbClr val="EEEEEE"/>
-                      </a:solidFill>
-                      <a:prstDash val="solid"/>
-                      <a:round/>
-                      <a:headEnd type="none" w="med" len="med"/>
-                      <a:tailEnd type="none" w="med" len="med"/>
-                    </a:lnR>
-                    <a:lnT w="2540" cap="flat" cmpd="sng" algn="ctr">
-                      <a:solidFill>
-                        <a:srgbClr val="EEEEEE"/>
-                      </a:solidFill>
-                      <a:prstDash val="solid"/>
-                      <a:round/>
-                      <a:headEnd type="none" w="med" len="med"/>
-                      <a:tailEnd type="none" w="med" len="med"/>
-                    </a:lnT>
-                    <a:lnB w="2540" cap="flat" cmpd="sng" algn="ctr">
-                      <a:solidFill>
-                        <a:srgbClr val="EEEEEE"/>
-                      </a:solidFill>
-                      <a:prstDash val="solid"/>
-                      <a:round/>
-                      <a:headEnd type="none" w="med" len="med"/>
-                      <a:tailEnd type="none" w="med" len="med"/>
-                    </a:lnB>
-                  </a:tcPr>
-                </a:tc>
-                <a:tc>
-                  <a:txBody>
-                    <a:bodyPr/>
-                    <a:lstStyle/>
-                    <a:p>
-                      <a:pPr algn="ctr" indent="0" marL="0">
-                        <a:buNone/>
-                      </a:pPr>
-                      <a:endParaRPr lang="en-US" sz="500" dirty="0">
-                        <a:latin typeface="Calibri" charset="0"/>
-                        <a:ea typeface="Calibri" charset="0"/>
-                        <a:cs typeface="Calibri" charset="0"/>
-                      </a:endParaRPr>
-                    </a:p>
-                  </a:txBody>
-                  <a:tcPr marL="91440" marR="91440" marT="45720" marB="45720">
-                    <a:lnL w="2540" cap="flat" cmpd="sng" algn="ctr">
-                      <a:solidFill>
-                        <a:srgbClr val="EEEEEE"/>
-                      </a:solidFill>
-                      <a:prstDash val="solid"/>
-                      <a:round/>
-                      <a:headEnd type="none" w="med" len="med"/>
-                      <a:tailEnd type="none" w="med" len="med"/>
-                    </a:lnL>
-                    <a:lnR w="2540" cap="flat" cmpd="sng" algn="ctr">
-                      <a:solidFill>
-                        <a:srgbClr val="EEEEEE"/>
-                      </a:solidFill>
-                      <a:prstDash val="solid"/>
-                      <a:round/>
-                      <a:headEnd type="none" w="med" len="med"/>
-                      <a:tailEnd type="none" w="med" len="med"/>
-                    </a:lnR>
-                    <a:lnT w="2540" cap="flat" cmpd="sng" algn="ctr">
-                      <a:solidFill>
-                        <a:srgbClr val="EEEEEE"/>
-                      </a:solidFill>
-                      <a:prstDash val="solid"/>
-                      <a:round/>
-                      <a:headEnd type="none" w="med" len="med"/>
-                      <a:tailEnd type="none" w="med" len="med"/>
-                    </a:lnT>
-                    <a:lnB w="2540" cap="flat" cmpd="sng" algn="ctr">
-                      <a:solidFill>
-                        <a:srgbClr val="EEEEEE"/>
-                      </a:solidFill>
-                      <a:prstDash val="solid"/>
-                      <a:round/>
-                      <a:headEnd type="none" w="med" len="med"/>
-                      <a:tailEnd type="none" w="med" len="med"/>
-                    </a:lnB>
-                  </a:tcPr>
-                </a:tc>
-                <a:tc>
-                  <a:txBody>
-                    <a:bodyPr/>
-                    <a:lstStyle/>
-                    <a:p>
-                      <a:pPr algn="ctr" indent="0" marL="0">
-                        <a:buNone/>
-                      </a:pPr>
-                      <a:endParaRPr lang="en-US" sz="500" dirty="0">
-                        <a:latin typeface="Calibri" charset="0"/>
-                        <a:ea typeface="Calibri" charset="0"/>
-                        <a:cs typeface="Calibri" charset="0"/>
-                      </a:endParaRPr>
-                    </a:p>
-                  </a:txBody>
-                  <a:tcPr marL="91440" marR="91440" marT="45720" marB="45720">
-                    <a:lnL w="2540" cap="flat" cmpd="sng" algn="ctr">
-                      <a:solidFill>
-                        <a:srgbClr val="EEEEEE"/>
-                      </a:solidFill>
-                      <a:prstDash val="solid"/>
-                      <a:round/>
-                      <a:headEnd type="none" w="med" len="med"/>
-                      <a:tailEnd type="none" w="med" len="med"/>
-                    </a:lnL>
-                    <a:lnR w="2540" cap="flat" cmpd="sng" algn="ctr">
-                      <a:solidFill>
-                        <a:srgbClr val="EEEEEE"/>
-                      </a:solidFill>
-                      <a:prstDash val="solid"/>
-                      <a:round/>
-                      <a:headEnd type="none" w="med" len="med"/>
-                      <a:tailEnd type="none" w="med" len="med"/>
-                    </a:lnR>
-                    <a:lnT w="2540" cap="flat" cmpd="sng" algn="ctr">
-                      <a:solidFill>
-                        <a:srgbClr val="EEEEEE"/>
-                      </a:solidFill>
-                      <a:prstDash val="solid"/>
-                      <a:round/>
-                      <a:headEnd type="none" w="med" len="med"/>
-                      <a:tailEnd type="none" w="med" len="med"/>
-                    </a:lnT>
-                    <a:lnB w="2540" cap="flat" cmpd="sng" algn="ctr">
-                      <a:solidFill>
-                        <a:srgbClr val="EEEEEE"/>
-                      </a:solidFill>
-                      <a:prstDash val="solid"/>
-                      <a:round/>
-                      <a:headEnd type="none" w="med" len="med"/>
-                      <a:tailEnd type="none" w="med" len="med"/>
-                    </a:lnB>
-                  </a:tcPr>
-                </a:tc>
-                <a:tc>
-                  <a:txBody>
-                    <a:bodyPr/>
-                    <a:lstStyle/>
-                    <a:p>
-                      <a:pPr algn="ctr" indent="0" marL="0">
-                        <a:buNone/>
-                      </a:pPr>
-                      <a:endParaRPr lang="en-US" sz="500" dirty="0">
-                        <a:latin typeface="Calibri" charset="0"/>
-                        <a:ea typeface="Calibri" charset="0"/>
-                        <a:cs typeface="Calibri" charset="0"/>
-                      </a:endParaRPr>
-                    </a:p>
-                  </a:txBody>
-                  <a:tcPr marL="91440" marR="91440" marT="45720" marB="45720">
-                    <a:lnL w="2540" cap="flat" cmpd="sng" algn="ctr">
-                      <a:solidFill>
-                        <a:srgbClr val="EEEEEE"/>
-                      </a:solidFill>
-                      <a:prstDash val="solid"/>
-                      <a:round/>
-                      <a:headEnd type="none" w="med" len="med"/>
-                      <a:tailEnd type="none" w="med" len="med"/>
-                    </a:lnL>
-                    <a:lnR w="2540" cap="flat" cmpd="sng" algn="ctr">
-                      <a:solidFill>
-                        <a:srgbClr val="EEEEEE"/>
-                      </a:solidFill>
-                      <a:prstDash val="solid"/>
-                      <a:round/>
-                      <a:headEnd type="none" w="med" len="med"/>
-                      <a:tailEnd type="none" w="med" len="med"/>
-                    </a:lnR>
-                    <a:lnT w="2540" cap="flat" cmpd="sng" algn="ctr">
-                      <a:solidFill>
-                        <a:srgbClr val="EEEEEE"/>
-                      </a:solidFill>
-                      <a:prstDash val="solid"/>
-                      <a:round/>
-                      <a:headEnd type="none" w="med" len="med"/>
-                      <a:tailEnd type="none" w="med" len="med"/>
-                    </a:lnT>
-                    <a:lnB w="2540" cap="flat" cmpd="sng" algn="ctr">
-                      <a:solidFill>
-                        <a:srgbClr val="EEEEEE"/>
-                      </a:solidFill>
-                      <a:prstDash val="solid"/>
-                      <a:round/>
-                      <a:headEnd type="none" w="med" len="med"/>
-                      <a:tailEnd type="none" w="med" len="med"/>
-                    </a:lnB>
-                  </a:tcPr>
-                </a:tc>
-                <a:tc>
-                  <a:txBody>
-                    <a:bodyPr/>
-                    <a:lstStyle/>
-                    <a:p>
-                      <a:pPr algn="ctr" indent="0" marL="0">
-                        <a:buNone/>
-                      </a:pPr>
-                      <a:r>
-                        <a:rPr lang="en-US" sz="500" b="1" dirty="0">
-                          <a:solidFill>
-                            <a:srgbClr val="777777"/>
-                          </a:solidFill>
-                          <a:latin typeface="Calibri" pitchFamily="34" charset="0"/>
-                          <a:ea typeface="Calibri" pitchFamily="34" charset="-122"/>
-                          <a:cs typeface="Calibri" pitchFamily="34" charset="-120"/>
-                        </a:rPr>
-                        <a:t>3.39%</a:t>
-                      </a:r>
-                      <a:endParaRPr lang="en-US" sz="500" dirty="0">
-                        <a:latin typeface="Calibri" charset="0"/>
-                        <a:ea typeface="Calibri" charset="0"/>
-                        <a:cs typeface="Calibri" charset="0"/>
-                      </a:endParaRPr>
-                    </a:p>
-                  </a:txBody>
-                  <a:tcPr marL="91440" marR="91440" marT="45720" marB="45720">
-                    <a:lnL w="2540" cap="flat" cmpd="sng" algn="ctr">
-                      <a:solidFill>
-                        <a:srgbClr val="EEEEEE"/>
-                      </a:solidFill>
-                      <a:prstDash val="solid"/>
-                      <a:round/>
-                      <a:headEnd type="none" w="med" len="med"/>
-                      <a:tailEnd type="none" w="med" len="med"/>
-                    </a:lnL>
-                    <a:lnR w="2540" cap="flat" cmpd="sng" algn="ctr">
-                      <a:solidFill>
-                        <a:srgbClr val="EEEEEE"/>
-                      </a:solidFill>
-                      <a:prstDash val="solid"/>
-                      <a:round/>
-                      <a:headEnd type="none" w="med" len="med"/>
-                      <a:tailEnd type="none" w="med" len="med"/>
-                    </a:lnR>
-                    <a:lnT w="2540" cap="flat" cmpd="sng" algn="ctr">
-                      <a:solidFill>
-                        <a:srgbClr val="EEEEEE"/>
-                      </a:solidFill>
-                      <a:prstDash val="solid"/>
-                      <a:round/>
-                      <a:headEnd type="none" w="med" len="med"/>
-                      <a:tailEnd type="none" w="med" len="med"/>
-                    </a:lnT>
-                    <a:lnB w="2540" cap="flat" cmpd="sng" algn="ctr">
-                      <a:solidFill>
-                        <a:srgbClr val="EEEEEE"/>
-                      </a:solidFill>
-                      <a:prstDash val="solid"/>
-                      <a:round/>
-                      <a:headEnd type="none" w="med" len="med"/>
-                      <a:tailEnd type="none" w="med" len="med"/>
-                    </a:lnB>
-                  </a:tcPr>
-                </a:tc>
-              </a:tr>
-              <a:tr h="123444">
-                <a:tc>
-                  <a:txBody>
-                    <a:bodyPr/>
-                    <a:lstStyle/>
-                    <a:p>
-                      <a:pPr algn="l" indent="0" marL="0">
-                        <a:buNone/>
-                      </a:pPr>
-                      <a:endParaRPr lang="en-US" sz="500" dirty="0">
-                        <a:latin typeface="Calibri" charset="0"/>
-                        <a:ea typeface="Calibri" charset="0"/>
-                        <a:cs typeface="Calibri" charset="0"/>
-                      </a:endParaRPr>
-                    </a:p>
-                  </a:txBody>
-                  <a:tcPr marL="91440" marR="91440" marT="45720" marB="45720">
-                    <a:lnL w="2540" cap="flat" cmpd="sng" algn="ctr">
-                      <a:solidFill>
-                        <a:srgbClr val="EEEEEE"/>
-                      </a:solidFill>
-                      <a:prstDash val="solid"/>
-                      <a:round/>
-                      <a:headEnd type="none" w="med" len="med"/>
-                      <a:tailEnd type="none" w="med" len="med"/>
-                    </a:lnL>
-                    <a:lnR w="2540" cap="flat" cmpd="sng" algn="ctr">
-                      <a:solidFill>
-                        <a:srgbClr val="EEEEEE"/>
-                      </a:solidFill>
-                      <a:prstDash val="solid"/>
-                      <a:round/>
-                      <a:headEnd type="none" w="med" len="med"/>
-                      <a:tailEnd type="none" w="med" len="med"/>
-                    </a:lnR>
-                    <a:lnT w="2540" cap="flat" cmpd="sng" algn="ctr">
-                      <a:solidFill>
-                        <a:srgbClr val="EEEEEE"/>
-                      </a:solidFill>
-                      <a:prstDash val="solid"/>
-                      <a:round/>
-                      <a:headEnd type="none" w="med" len="med"/>
-                      <a:tailEnd type="none" w="med" len="med"/>
-                    </a:lnT>
-                    <a:lnB w="2540" cap="flat" cmpd="sng" algn="ctr">
-                      <a:solidFill>
-                        <a:srgbClr val="EEEEEE"/>
-                      </a:solidFill>
-                      <a:prstDash val="solid"/>
-                      <a:round/>
-                      <a:headEnd type="none" w="med" len="med"/>
-                      <a:tailEnd type="none" w="med" len="med"/>
-                    </a:lnB>
-                  </a:tcPr>
-                </a:tc>
-                <a:tc>
-                  <a:txBody>
-                    <a:bodyPr/>
-                    <a:lstStyle/>
-                    <a:p>
-                      <a:pPr algn="l" indent="0" marL="0">
-                        <a:buNone/>
-                      </a:pPr>
-                      <a:r>
-                        <a:rPr lang="en-US" sz="500" dirty="0">
-                          <a:solidFill>
-                            <a:srgbClr val="999999"/>
-                          </a:solidFill>
-                          <a:latin typeface="Calibri" pitchFamily="34" charset="0"/>
-                          <a:ea typeface="Calibri" pitchFamily="34" charset="-122"/>
-                          <a:cs typeface="Calibri" pitchFamily="34" charset="-120"/>
-                        </a:rPr>
-                        <a:t>Competencia</a:t>
-                      </a:r>
-                      <a:endParaRPr lang="en-US" sz="500" dirty="0">
-                        <a:latin typeface="Calibri" charset="0"/>
-                        <a:ea typeface="Calibri" charset="0"/>
-                        <a:cs typeface="Calibri" charset="0"/>
-                      </a:endParaRPr>
-                    </a:p>
-                  </a:txBody>
-                  <a:tcPr marL="91440" marR="91440" marT="45720" marB="45720">
-                    <a:lnL w="2540" cap="flat" cmpd="sng" algn="ctr">
-                      <a:solidFill>
-                        <a:srgbClr val="EEEEEE"/>
-                      </a:solidFill>
-                      <a:prstDash val="solid"/>
-                      <a:round/>
-                      <a:headEnd type="none" w="med" len="med"/>
-                      <a:tailEnd type="none" w="med" len="med"/>
-                    </a:lnL>
-                    <a:lnR w="2540" cap="flat" cmpd="sng" algn="ctr">
-                      <a:solidFill>
-                        <a:srgbClr val="EEEEEE"/>
-                      </a:solidFill>
-                      <a:prstDash val="solid"/>
-                      <a:round/>
-                      <a:headEnd type="none" w="med" len="med"/>
-                      <a:tailEnd type="none" w="med" len="med"/>
-                    </a:lnR>
-                    <a:lnT w="2540" cap="flat" cmpd="sng" algn="ctr">
-                      <a:solidFill>
-                        <a:srgbClr val="EEEEEE"/>
-                      </a:solidFill>
-                      <a:prstDash val="solid"/>
-                      <a:round/>
-                      <a:headEnd type="none" w="med" len="med"/>
-                      <a:tailEnd type="none" w="med" len="med"/>
-                    </a:lnT>
-                    <a:lnB w="2540" cap="flat" cmpd="sng" algn="ctr">
-                      <a:solidFill>
-                        <a:srgbClr val="EEEEEE"/>
-                      </a:solidFill>
-                      <a:prstDash val="solid"/>
-                      <a:round/>
-                      <a:headEnd type="none" w="med" len="med"/>
-                      <a:tailEnd type="none" w="med" len="med"/>
-                    </a:lnB>
-                  </a:tcPr>
-                </a:tc>
-                <a:tc>
-                  <a:txBody>
-                    <a:bodyPr/>
-                    <a:lstStyle/>
-                    <a:p>
-                      <a:pPr algn="ctr" indent="0" marL="0">
-                        <a:buNone/>
-                      </a:pPr>
-                      <a:r>
-                        <a:rPr lang="en-US" sz="500" dirty="0">
-                          <a:solidFill>
-                            <a:srgbClr val="999999"/>
-                          </a:solidFill>
-                          <a:latin typeface="Calibri" pitchFamily="34" charset="0"/>
-                          <a:ea typeface="Calibri" pitchFamily="34" charset="-122"/>
-                          <a:cs typeface="Calibri" pitchFamily="34" charset="-120"/>
-                        </a:rPr>
-                        <a:t>0.00%</a:t>
-                      </a:r>
-                      <a:endParaRPr lang="en-US" sz="500" dirty="0">
-                        <a:latin typeface="Calibri" charset="0"/>
-                        <a:ea typeface="Calibri" charset="0"/>
-                        <a:cs typeface="Calibri" charset="0"/>
-                      </a:endParaRPr>
-                    </a:p>
-                  </a:txBody>
-                  <a:tcPr marL="91440" marR="91440" marT="45720" marB="45720">
-                    <a:lnL w="2540" cap="flat" cmpd="sng" algn="ctr">
-                      <a:solidFill>
-                        <a:srgbClr val="EEEEEE"/>
-                      </a:solidFill>
-                      <a:prstDash val="solid"/>
-                      <a:round/>
-                      <a:headEnd type="none" w="med" len="med"/>
-                      <a:tailEnd type="none" w="med" len="med"/>
-                    </a:lnL>
-                    <a:lnR w="2540" cap="flat" cmpd="sng" algn="ctr">
-                      <a:solidFill>
-                        <a:srgbClr val="EEEEEE"/>
-                      </a:solidFill>
-                      <a:prstDash val="solid"/>
-                      <a:round/>
-                      <a:headEnd type="none" w="med" len="med"/>
-                      <a:tailEnd type="none" w="med" len="med"/>
-                    </a:lnR>
-                    <a:lnT w="2540" cap="flat" cmpd="sng" algn="ctr">
-                      <a:solidFill>
-                        <a:srgbClr val="EEEEEE"/>
-                      </a:solidFill>
-                      <a:prstDash val="solid"/>
-                      <a:round/>
-                      <a:headEnd type="none" w="med" len="med"/>
-                      <a:tailEnd type="none" w="med" len="med"/>
-                    </a:lnT>
-                    <a:lnB w="2540" cap="flat" cmpd="sng" algn="ctr">
-                      <a:solidFill>
-                        <a:srgbClr val="EEEEEE"/>
-                      </a:solidFill>
-                      <a:prstDash val="solid"/>
-                      <a:round/>
-                      <a:headEnd type="none" w="med" len="med"/>
-                      <a:tailEnd type="none" w="med" len="med"/>
-                    </a:lnB>
-                  </a:tcPr>
-                </a:tc>
-                <a:tc>
-                  <a:txBody>
-                    <a:bodyPr/>
-                    <a:lstStyle/>
-                    <a:p>
-                      <a:pPr algn="ctr" indent="0" marL="0">
-                        <a:buNone/>
-                      </a:pPr>
-                      <a:r>
-                        <a:rPr lang="en-US" sz="500" dirty="0">
-                          <a:solidFill>
-                            <a:srgbClr val="999999"/>
-                          </a:solidFill>
-                          <a:latin typeface="Calibri" pitchFamily="34" charset="0"/>
-                          <a:ea typeface="Calibri" pitchFamily="34" charset="-122"/>
-                          <a:cs typeface="Calibri" pitchFamily="34" charset="-120"/>
-                        </a:rPr>
-                        <a:t>0.24%</a:t>
-                      </a:r>
-                      <a:endParaRPr lang="en-US" sz="500" dirty="0">
-                        <a:latin typeface="Calibri" charset="0"/>
-                        <a:ea typeface="Calibri" charset="0"/>
-                        <a:cs typeface="Calibri" charset="0"/>
-                      </a:endParaRPr>
-                    </a:p>
-                  </a:txBody>
-                  <a:tcPr marL="91440" marR="91440" marT="45720" marB="45720">
-                    <a:lnL w="2540" cap="flat" cmpd="sng" algn="ctr">
-                      <a:solidFill>
-                        <a:srgbClr val="EEEEEE"/>
-                      </a:solidFill>
-                      <a:prstDash val="solid"/>
-                      <a:round/>
-                      <a:headEnd type="none" w="med" len="med"/>
-                      <a:tailEnd type="none" w="med" len="med"/>
-                    </a:lnL>
-                    <a:lnR w="2540" cap="flat" cmpd="sng" algn="ctr">
-                      <a:solidFill>
-                        <a:srgbClr val="EEEEEE"/>
-                      </a:solidFill>
-                      <a:prstDash val="solid"/>
-                      <a:round/>
-                      <a:headEnd type="none" w="med" len="med"/>
-                      <a:tailEnd type="none" w="med" len="med"/>
-                    </a:lnR>
-                    <a:lnT w="2540" cap="flat" cmpd="sng" algn="ctr">
-                      <a:solidFill>
-                        <a:srgbClr val="EEEEEE"/>
-                      </a:solidFill>
-                      <a:prstDash val="solid"/>
-                      <a:round/>
-                      <a:headEnd type="none" w="med" len="med"/>
-                      <a:tailEnd type="none" w="med" len="med"/>
-                    </a:lnT>
-                    <a:lnB w="2540" cap="flat" cmpd="sng" algn="ctr">
-                      <a:solidFill>
-                        <a:srgbClr val="EEEEEE"/>
-                      </a:solidFill>
-                      <a:prstDash val="solid"/>
-                      <a:round/>
-                      <a:headEnd type="none" w="med" len="med"/>
-                      <a:tailEnd type="none" w="med" len="med"/>
-                    </a:lnB>
-                  </a:tcPr>
-                </a:tc>
-                <a:tc>
-                  <a:txBody>
-                    <a:bodyPr/>
-                    <a:lstStyle/>
-                    <a:p>
-                      <a:pPr algn="ctr" indent="0" marL="0">
-                        <a:buNone/>
-                      </a:pPr>
-                      <a:r>
-                        <a:rPr lang="en-US" sz="500" dirty="0">
-                          <a:solidFill>
-                            <a:srgbClr val="999999"/>
-                          </a:solidFill>
-                          <a:latin typeface="Calibri" pitchFamily="34" charset="0"/>
-                          <a:ea typeface="Calibri" pitchFamily="34" charset="-122"/>
-                          <a:cs typeface="Calibri" pitchFamily="34" charset="-120"/>
-                        </a:rPr>
-                        <a:t>0.27%</a:t>
-                      </a:r>
-                      <a:endParaRPr lang="en-US" sz="500" dirty="0">
-                        <a:latin typeface="Calibri" charset="0"/>
-                        <a:ea typeface="Calibri" charset="0"/>
-                        <a:cs typeface="Calibri" charset="0"/>
-                      </a:endParaRPr>
-                    </a:p>
-                  </a:txBody>
-                  <a:tcPr marL="91440" marR="91440" marT="45720" marB="45720">
-                    <a:lnL w="2540" cap="flat" cmpd="sng" algn="ctr">
-                      <a:solidFill>
-                        <a:srgbClr val="EEEEEE"/>
-                      </a:solidFill>
-                      <a:prstDash val="solid"/>
-                      <a:round/>
-                      <a:headEnd type="none" w="med" len="med"/>
-                      <a:tailEnd type="none" w="med" len="med"/>
-                    </a:lnL>
-                    <a:lnR w="2540" cap="flat" cmpd="sng" algn="ctr">
-                      <a:solidFill>
-                        <a:srgbClr val="EEEEEE"/>
-                      </a:solidFill>
-                      <a:prstDash val="solid"/>
-                      <a:round/>
-                      <a:headEnd type="none" w="med" len="med"/>
-                      <a:tailEnd type="none" w="med" len="med"/>
-                    </a:lnR>
-                    <a:lnT w="2540" cap="flat" cmpd="sng" algn="ctr">
-                      <a:solidFill>
-                        <a:srgbClr val="EEEEEE"/>
-                      </a:solidFill>
-                      <a:prstDash val="solid"/>
-                      <a:round/>
-                      <a:headEnd type="none" w="med" len="med"/>
-                      <a:tailEnd type="none" w="med" len="med"/>
-                    </a:lnT>
-                    <a:lnB w="2540" cap="flat" cmpd="sng" algn="ctr">
-                      <a:solidFill>
-                        <a:srgbClr val="EEEEEE"/>
-                      </a:solidFill>
-                      <a:prstDash val="solid"/>
-                      <a:round/>
-                      <a:headEnd type="none" w="med" len="med"/>
-                      <a:tailEnd type="none" w="med" len="med"/>
-                    </a:lnB>
-                  </a:tcPr>
-                </a:tc>
-                <a:tc>
-                  <a:txBody>
-                    <a:bodyPr/>
-                    <a:lstStyle/>
-                    <a:p>
-                      <a:pPr algn="ctr" indent="0" marL="0">
-                        <a:buNone/>
-                      </a:pPr>
-                      <a:r>
-                        <a:rPr lang="en-US" sz="500" dirty="0">
-                          <a:solidFill>
-                            <a:srgbClr val="999999"/>
-                          </a:solidFill>
-                          <a:latin typeface="Calibri" pitchFamily="34" charset="0"/>
-                          <a:ea typeface="Calibri" pitchFamily="34" charset="-122"/>
-                          <a:cs typeface="Calibri" pitchFamily="34" charset="-120"/>
-                        </a:rPr>
-                        <a:t>0.26%</a:t>
-                      </a:r>
-                      <a:endParaRPr lang="en-US" sz="500" dirty="0">
-                        <a:latin typeface="Calibri" charset="0"/>
-                        <a:ea typeface="Calibri" charset="0"/>
-                        <a:cs typeface="Calibri" charset="0"/>
-                      </a:endParaRPr>
-                    </a:p>
-                  </a:txBody>
-                  <a:tcPr marL="91440" marR="91440" marT="45720" marB="45720">
-                    <a:lnL w="2540" cap="flat" cmpd="sng" algn="ctr">
-                      <a:solidFill>
-                        <a:srgbClr val="EEEEEE"/>
-                      </a:solidFill>
-                      <a:prstDash val="solid"/>
-                      <a:round/>
-                      <a:headEnd type="none" w="med" len="med"/>
-                      <a:tailEnd type="none" w="med" len="med"/>
-                    </a:lnL>
-                    <a:lnR w="2540" cap="flat" cmpd="sng" algn="ctr">
-                      <a:solidFill>
-                        <a:srgbClr val="EEEEEE"/>
-                      </a:solidFill>
-                      <a:prstDash val="solid"/>
-                      <a:round/>
-                      <a:headEnd type="none" w="med" len="med"/>
-                      <a:tailEnd type="none" w="med" len="med"/>
-                    </a:lnR>
-                    <a:lnT w="2540" cap="flat" cmpd="sng" algn="ctr">
-                      <a:solidFill>
-                        <a:srgbClr val="EEEEEE"/>
-                      </a:solidFill>
-                      <a:prstDash val="solid"/>
-                      <a:round/>
-                      <a:headEnd type="none" w="med" len="med"/>
-                      <a:tailEnd type="none" w="med" len="med"/>
-                    </a:lnT>
-                    <a:lnB w="2540" cap="flat" cmpd="sng" algn="ctr">
-                      <a:solidFill>
-                        <a:srgbClr val="EEEEEE"/>
-                      </a:solidFill>
-                      <a:prstDash val="solid"/>
-                      <a:round/>
-                      <a:headEnd type="none" w="med" len="med"/>
-                      <a:tailEnd type="none" w="med" len="med"/>
-                    </a:lnB>
-                  </a:tcPr>
-                </a:tc>
-                <a:tc>
-                  <a:txBody>
-                    <a:bodyPr/>
-                    <a:lstStyle/>
-                    <a:p>
-                      <a:pPr algn="ctr" indent="0" marL="0">
-                        <a:buNone/>
-                      </a:pPr>
-                      <a:endParaRPr lang="en-US" sz="500" dirty="0">
-                        <a:latin typeface="Calibri" charset="0"/>
-                        <a:ea typeface="Calibri" charset="0"/>
-                        <a:cs typeface="Calibri" charset="0"/>
-                      </a:endParaRPr>
-                    </a:p>
-                  </a:txBody>
-                  <a:tcPr marL="91440" marR="91440" marT="45720" marB="45720">
-                    <a:lnL w="2540" cap="flat" cmpd="sng" algn="ctr">
-                      <a:solidFill>
-                        <a:srgbClr val="EEEEEE"/>
-                      </a:solidFill>
-                      <a:prstDash val="solid"/>
-                      <a:round/>
-                      <a:headEnd type="none" w="med" len="med"/>
-                      <a:tailEnd type="none" w="med" len="med"/>
-                    </a:lnL>
-                    <a:lnR w="2540" cap="flat" cmpd="sng" algn="ctr">
-                      <a:solidFill>
-                        <a:srgbClr val="EEEEEE"/>
-                      </a:solidFill>
-                      <a:prstDash val="solid"/>
-                      <a:round/>
-                      <a:headEnd type="none" w="med" len="med"/>
-                      <a:tailEnd type="none" w="med" len="med"/>
-                    </a:lnR>
-                    <a:lnT w="2540" cap="flat" cmpd="sng" algn="ctr">
-                      <a:solidFill>
-                        <a:srgbClr val="EEEEEE"/>
-                      </a:solidFill>
-                      <a:prstDash val="solid"/>
-                      <a:round/>
-                      <a:headEnd type="none" w="med" len="med"/>
-                      <a:tailEnd type="none" w="med" len="med"/>
-                    </a:lnT>
-                    <a:lnB w="2540" cap="flat" cmpd="sng" algn="ctr">
-                      <a:solidFill>
-                        <a:srgbClr val="EEEEEE"/>
-                      </a:solidFill>
-                      <a:prstDash val="solid"/>
-                      <a:round/>
-                      <a:headEnd type="none" w="med" len="med"/>
-                      <a:tailEnd type="none" w="med" len="med"/>
-                    </a:lnB>
-                  </a:tcPr>
-                </a:tc>
-                <a:tc>
-                  <a:txBody>
-                    <a:bodyPr/>
-                    <a:lstStyle/>
-                    <a:p>
-                      <a:pPr algn="ctr" indent="0" marL="0">
-                        <a:buNone/>
-                      </a:pPr>
-                      <a:endParaRPr lang="en-US" sz="500" dirty="0">
-                        <a:latin typeface="Calibri" charset="0"/>
-                        <a:ea typeface="Calibri" charset="0"/>
-                        <a:cs typeface="Calibri" charset="0"/>
-                      </a:endParaRPr>
-                    </a:p>
-                  </a:txBody>
-                  <a:tcPr marL="91440" marR="91440" marT="45720" marB="45720">
-                    <a:lnL w="2540" cap="flat" cmpd="sng" algn="ctr">
-                      <a:solidFill>
-                        <a:srgbClr val="EEEEEE"/>
-                      </a:solidFill>
-                      <a:prstDash val="solid"/>
-                      <a:round/>
-                      <a:headEnd type="none" w="med" len="med"/>
-                      <a:tailEnd type="none" w="med" len="med"/>
-                    </a:lnL>
-                    <a:lnR w="2540" cap="flat" cmpd="sng" algn="ctr">
-                      <a:solidFill>
-                        <a:srgbClr val="EEEEEE"/>
-                      </a:solidFill>
-                      <a:prstDash val="solid"/>
-                      <a:round/>
-                      <a:headEnd type="none" w="med" len="med"/>
-                      <a:tailEnd type="none" w="med" len="med"/>
-                    </a:lnR>
-                    <a:lnT w="2540" cap="flat" cmpd="sng" algn="ctr">
-                      <a:solidFill>
-                        <a:srgbClr val="EEEEEE"/>
-                      </a:solidFill>
-                      <a:prstDash val="solid"/>
-                      <a:round/>
-                      <a:headEnd type="none" w="med" len="med"/>
-                      <a:tailEnd type="none" w="med" len="med"/>
-                    </a:lnT>
-                    <a:lnB w="2540" cap="flat" cmpd="sng" algn="ctr">
-                      <a:solidFill>
-                        <a:srgbClr val="EEEEEE"/>
-                      </a:solidFill>
-                      <a:prstDash val="solid"/>
-                      <a:round/>
-                      <a:headEnd type="none" w="med" len="med"/>
-                      <a:tailEnd type="none" w="med" len="med"/>
-                    </a:lnB>
-                  </a:tcPr>
-                </a:tc>
-                <a:tc>
-                  <a:txBody>
-                    <a:bodyPr/>
-                    <a:lstStyle/>
-                    <a:p>
-                      <a:pPr algn="ctr" indent="0" marL="0">
-                        <a:buNone/>
-                      </a:pPr>
-                      <a:endParaRPr lang="en-US" sz="500" dirty="0">
-                        <a:latin typeface="Calibri" charset="0"/>
-                        <a:ea typeface="Calibri" charset="0"/>
-                        <a:cs typeface="Calibri" charset="0"/>
-                      </a:endParaRPr>
-                    </a:p>
-                  </a:txBody>
-                  <a:tcPr marL="91440" marR="91440" marT="45720" marB="45720">
-                    <a:lnL w="2540" cap="flat" cmpd="sng" algn="ctr">
-                      <a:solidFill>
-                        <a:srgbClr val="EEEEEE"/>
-                      </a:solidFill>
-                      <a:prstDash val="solid"/>
-                      <a:round/>
-                      <a:headEnd type="none" w="med" len="med"/>
-                      <a:tailEnd type="none" w="med" len="med"/>
-                    </a:lnL>
-                    <a:lnR w="2540" cap="flat" cmpd="sng" algn="ctr">
-                      <a:solidFill>
-                        <a:srgbClr val="EEEEEE"/>
-                      </a:solidFill>
-                      <a:prstDash val="solid"/>
-                      <a:round/>
-                      <a:headEnd type="none" w="med" len="med"/>
-                      <a:tailEnd type="none" w="med" len="med"/>
-                    </a:lnR>
-                    <a:lnT w="2540" cap="flat" cmpd="sng" algn="ctr">
-                      <a:solidFill>
-                        <a:srgbClr val="EEEEEE"/>
-                      </a:solidFill>
-                      <a:prstDash val="solid"/>
-                      <a:round/>
-                      <a:headEnd type="none" w="med" len="med"/>
-                      <a:tailEnd type="none" w="med" len="med"/>
-                    </a:lnT>
-                    <a:lnB w="2540" cap="flat" cmpd="sng" algn="ctr">
-                      <a:solidFill>
-                        <a:srgbClr val="EEEEEE"/>
-                      </a:solidFill>
-                      <a:prstDash val="solid"/>
-                      <a:round/>
-                      <a:headEnd type="none" w="med" len="med"/>
-                      <a:tailEnd type="none" w="med" len="med"/>
-                    </a:lnB>
-                  </a:tcPr>
-                </a:tc>
-                <a:tc>
-                  <a:txBody>
-                    <a:bodyPr/>
-                    <a:lstStyle/>
-                    <a:p>
-                      <a:pPr algn="ctr" indent="0" marL="0">
-                        <a:buNone/>
-                      </a:pPr>
-                      <a:endParaRPr lang="en-US" sz="500" dirty="0">
-                        <a:latin typeface="Calibri" charset="0"/>
-                        <a:ea typeface="Calibri" charset="0"/>
-                        <a:cs typeface="Calibri" charset="0"/>
-                      </a:endParaRPr>
-                    </a:p>
-                  </a:txBody>
-                  <a:tcPr marL="91440" marR="91440" marT="45720" marB="45720">
-                    <a:lnL w="2540" cap="flat" cmpd="sng" algn="ctr">
-                      <a:solidFill>
-                        <a:srgbClr val="EEEEEE"/>
-                      </a:solidFill>
-                      <a:prstDash val="solid"/>
-                      <a:round/>
-                      <a:headEnd type="none" w="med" len="med"/>
-                      <a:tailEnd type="none" w="med" len="med"/>
-                    </a:lnL>
-                    <a:lnR w="2540" cap="flat" cmpd="sng" algn="ctr">
-                      <a:solidFill>
-                        <a:srgbClr val="EEEEEE"/>
-                      </a:solidFill>
-                      <a:prstDash val="solid"/>
-                      <a:round/>
-                      <a:headEnd type="none" w="med" len="med"/>
-                      <a:tailEnd type="none" w="med" len="med"/>
-                    </a:lnR>
-                    <a:lnT w="2540" cap="flat" cmpd="sng" algn="ctr">
-                      <a:solidFill>
-                        <a:srgbClr val="EEEEEE"/>
-                      </a:solidFill>
-                      <a:prstDash val="solid"/>
-                      <a:round/>
-                      <a:headEnd type="none" w="med" len="med"/>
-                      <a:tailEnd type="none" w="med" len="med"/>
-                    </a:lnT>
-                    <a:lnB w="2540" cap="flat" cmpd="sng" algn="ctr">
-                      <a:solidFill>
-                        <a:srgbClr val="EEEEEE"/>
-                      </a:solidFill>
-                      <a:prstDash val="solid"/>
-                      <a:round/>
-                      <a:headEnd type="none" w="med" len="med"/>
-                      <a:tailEnd type="none" w="med" len="med"/>
-                    </a:lnB>
-                  </a:tcPr>
-                </a:tc>
-                <a:tc>
-                  <a:txBody>
-                    <a:bodyPr/>
-                    <a:lstStyle/>
-                    <a:p>
-                      <a:pPr algn="ctr" indent="0" marL="0">
-                        <a:buNone/>
-                      </a:pPr>
-                      <a:endParaRPr lang="en-US" sz="500" dirty="0">
-                        <a:latin typeface="Calibri" charset="0"/>
-                        <a:ea typeface="Calibri" charset="0"/>
-                        <a:cs typeface="Calibri" charset="0"/>
-                      </a:endParaRPr>
-                    </a:p>
-                  </a:txBody>
-                  <a:tcPr marL="91440" marR="91440" marT="45720" marB="45720">
-                    <a:lnL w="2540" cap="flat" cmpd="sng" algn="ctr">
-                      <a:solidFill>
-                        <a:srgbClr val="EEEEEE"/>
-                      </a:solidFill>
-                      <a:prstDash val="solid"/>
-                      <a:round/>
-                      <a:headEnd type="none" w="med" len="med"/>
-                      <a:tailEnd type="none" w="med" len="med"/>
-                    </a:lnL>
-                    <a:lnR w="2540" cap="flat" cmpd="sng" algn="ctr">
-                      <a:solidFill>
-                        <a:srgbClr val="EEEEEE"/>
-                      </a:solidFill>
-                      <a:prstDash val="solid"/>
-                      <a:round/>
-                      <a:headEnd type="none" w="med" len="med"/>
-                      <a:tailEnd type="none" w="med" len="med"/>
-                    </a:lnR>
-                    <a:lnT w="2540" cap="flat" cmpd="sng" algn="ctr">
-                      <a:solidFill>
-                        <a:srgbClr val="EEEEEE"/>
-                      </a:solidFill>
-                      <a:prstDash val="solid"/>
-                      <a:round/>
-                      <a:headEnd type="none" w="med" len="med"/>
-                      <a:tailEnd type="none" w="med" len="med"/>
-                    </a:lnT>
-                    <a:lnB w="2540" cap="flat" cmpd="sng" algn="ctr">
-                      <a:solidFill>
-                        <a:srgbClr val="EEEEEE"/>
-                      </a:solidFill>
-                      <a:prstDash val="solid"/>
-                      <a:round/>
-                      <a:headEnd type="none" w="med" len="med"/>
-                      <a:tailEnd type="none" w="med" len="med"/>
-                    </a:lnB>
-                  </a:tcPr>
-                </a:tc>
-                <a:tc>
-                  <a:txBody>
-                    <a:bodyPr/>
-                    <a:lstStyle/>
-                    <a:p>
-                      <a:pPr algn="ctr" indent="0" marL="0">
-                        <a:buNone/>
-                      </a:pPr>
-                      <a:endParaRPr lang="en-US" sz="500" dirty="0">
-                        <a:latin typeface="Calibri" charset="0"/>
-                        <a:ea typeface="Calibri" charset="0"/>
-                        <a:cs typeface="Calibri" charset="0"/>
-                      </a:endParaRPr>
-                    </a:p>
-                  </a:txBody>
-                  <a:tcPr marL="91440" marR="91440" marT="45720" marB="45720">
-                    <a:lnL w="2540" cap="flat" cmpd="sng" algn="ctr">
-                      <a:solidFill>
-                        <a:srgbClr val="EEEEEE"/>
-                      </a:solidFill>
-                      <a:prstDash val="solid"/>
-                      <a:round/>
-                      <a:headEnd type="none" w="med" len="med"/>
-                      <a:tailEnd type="none" w="med" len="med"/>
-                    </a:lnL>
-                    <a:lnR w="2540" cap="flat" cmpd="sng" algn="ctr">
-                      <a:solidFill>
-                        <a:srgbClr val="EEEEEE"/>
-                      </a:solidFill>
-                      <a:prstDash val="solid"/>
-                      <a:round/>
-                      <a:headEnd type="none" w="med" len="med"/>
-                      <a:tailEnd type="none" w="med" len="med"/>
-                    </a:lnR>
-                    <a:lnT w="2540" cap="flat" cmpd="sng" algn="ctr">
-                      <a:solidFill>
-                        <a:srgbClr val="EEEEEE"/>
-                      </a:solidFill>
-                      <a:prstDash val="solid"/>
-                      <a:round/>
-                      <a:headEnd type="none" w="med" len="med"/>
-                      <a:tailEnd type="none" w="med" len="med"/>
-                    </a:lnT>
-                    <a:lnB w="2540" cap="flat" cmpd="sng" algn="ctr">
-                      <a:solidFill>
-                        <a:srgbClr val="EEEEEE"/>
-                      </a:solidFill>
-                      <a:prstDash val="solid"/>
-                      <a:round/>
-                      <a:headEnd type="none" w="med" len="med"/>
-                      <a:tailEnd type="none" w="med" len="med"/>
-                    </a:lnB>
-                  </a:tcPr>
-                </a:tc>
-                <a:tc>
-                  <a:txBody>
-                    <a:bodyPr/>
-                    <a:lstStyle/>
-                    <a:p>
-                      <a:pPr algn="ctr" indent="0" marL="0">
-                        <a:buNone/>
-                      </a:pPr>
-                      <a:endParaRPr lang="en-US" sz="500" dirty="0">
-                        <a:latin typeface="Calibri" charset="0"/>
-                        <a:ea typeface="Calibri" charset="0"/>
-                        <a:cs typeface="Calibri" charset="0"/>
-                      </a:endParaRPr>
-                    </a:p>
-                  </a:txBody>
-                  <a:tcPr marL="91440" marR="91440" marT="45720" marB="45720">
-                    <a:lnL w="2540" cap="flat" cmpd="sng" algn="ctr">
-                      <a:solidFill>
-                        <a:srgbClr val="EEEEEE"/>
-                      </a:solidFill>
-                      <a:prstDash val="solid"/>
-                      <a:round/>
-                      <a:headEnd type="none" w="med" len="med"/>
-                      <a:tailEnd type="none" w="med" len="med"/>
-                    </a:lnL>
-                    <a:lnR w="2540" cap="flat" cmpd="sng" algn="ctr">
-                      <a:solidFill>
-                        <a:srgbClr val="EEEEEE"/>
-                      </a:solidFill>
-                      <a:prstDash val="solid"/>
-                      <a:round/>
-                      <a:headEnd type="none" w="med" len="med"/>
-                      <a:tailEnd type="none" w="med" len="med"/>
-                    </a:lnR>
-                    <a:lnT w="2540" cap="flat" cmpd="sng" algn="ctr">
-                      <a:solidFill>
-                        <a:srgbClr val="EEEEEE"/>
-                      </a:solidFill>
-                      <a:prstDash val="solid"/>
-                      <a:round/>
-                      <a:headEnd type="none" w="med" len="med"/>
-                      <a:tailEnd type="none" w="med" len="med"/>
-                    </a:lnT>
-                    <a:lnB w="2540" cap="flat" cmpd="sng" algn="ctr">
-                      <a:solidFill>
-                        <a:srgbClr val="EEEEEE"/>
-                      </a:solidFill>
-                      <a:prstDash val="solid"/>
-                      <a:round/>
-                      <a:headEnd type="none" w="med" len="med"/>
-                      <a:tailEnd type="none" w="med" len="med"/>
-                    </a:lnB>
-                  </a:tcPr>
-                </a:tc>
-                <a:tc>
-                  <a:txBody>
-                    <a:bodyPr/>
-                    <a:lstStyle/>
-                    <a:p>
-                      <a:pPr algn="ctr" indent="0" marL="0">
-                        <a:buNone/>
-                      </a:pPr>
-                      <a:endParaRPr lang="en-US" sz="500" dirty="0">
-                        <a:latin typeface="Calibri" charset="0"/>
-                        <a:ea typeface="Calibri" charset="0"/>
-                        <a:cs typeface="Calibri" charset="0"/>
-                      </a:endParaRPr>
-                    </a:p>
-                  </a:txBody>
-                  <a:tcPr marL="91440" marR="91440" marT="45720" marB="45720">
-                    <a:lnL w="2540" cap="flat" cmpd="sng" algn="ctr">
-                      <a:solidFill>
-                        <a:srgbClr val="EEEEEE"/>
-                      </a:solidFill>
-                      <a:prstDash val="solid"/>
-                      <a:round/>
-                      <a:headEnd type="none" w="med" len="med"/>
-                      <a:tailEnd type="none" w="med" len="med"/>
-                    </a:lnL>
-                    <a:lnR w="2540" cap="flat" cmpd="sng" algn="ctr">
-                      <a:solidFill>
-                        <a:srgbClr val="EEEEEE"/>
-                      </a:solidFill>
-                      <a:prstDash val="solid"/>
-                      <a:round/>
-                      <a:headEnd type="none" w="med" len="med"/>
-                      <a:tailEnd type="none" w="med" len="med"/>
-                    </a:lnR>
-                    <a:lnT w="2540" cap="flat" cmpd="sng" algn="ctr">
-                      <a:solidFill>
-                        <a:srgbClr val="EEEEEE"/>
-                      </a:solidFill>
-                      <a:prstDash val="solid"/>
-                      <a:round/>
-                      <a:headEnd type="none" w="med" len="med"/>
-                      <a:tailEnd type="none" w="med" len="med"/>
-                    </a:lnT>
-                    <a:lnB w="2540" cap="flat" cmpd="sng" algn="ctr">
-                      <a:solidFill>
-                        <a:srgbClr val="EEEEEE"/>
-                      </a:solidFill>
-                      <a:prstDash val="solid"/>
-                      <a:round/>
-                      <a:headEnd type="none" w="med" len="med"/>
-                      <a:tailEnd type="none" w="med" len="med"/>
-                    </a:lnB>
-                  </a:tcPr>
-                </a:tc>
-                <a:tc>
-                  <a:txBody>
-                    <a:bodyPr/>
-                    <a:lstStyle/>
-                    <a:p>
-                      <a:pPr algn="ctr" indent="0" marL="0">
-                        <a:buNone/>
-                      </a:pPr>
-                      <a:r>
-                        <a:rPr lang="en-US" sz="500" b="1" dirty="0">
-                          <a:solidFill>
-                            <a:srgbClr val="999999"/>
-                          </a:solidFill>
-                          <a:latin typeface="Calibri" pitchFamily="34" charset="0"/>
-                          <a:ea typeface="Calibri" pitchFamily="34" charset="-122"/>
-                          <a:cs typeface="Calibri" pitchFamily="34" charset="-120"/>
-                        </a:rPr>
-                        <a:t>2.32%</a:t>
-                      </a:r>
-                      <a:endParaRPr lang="en-US" sz="500" dirty="0">
-                        <a:latin typeface="Calibri" charset="0"/>
-                        <a:ea typeface="Calibri" charset="0"/>
-                        <a:cs typeface="Calibri" charset="0"/>
-                      </a:endParaRPr>
-                    </a:p>
-                  </a:txBody>
-                  <a:tcPr marL="91440" marR="91440" marT="45720" marB="45720">
-                    <a:lnL w="2540" cap="flat" cmpd="sng" algn="ctr">
-                      <a:solidFill>
-                        <a:srgbClr val="EEEEEE"/>
-                      </a:solidFill>
-                      <a:prstDash val="solid"/>
-                      <a:round/>
-                      <a:headEnd type="none" w="med" len="med"/>
-                      <a:tailEnd type="none" w="med" len="med"/>
-                    </a:lnL>
-                    <a:lnR w="2540" cap="flat" cmpd="sng" algn="ctr">
-                      <a:solidFill>
-                        <a:srgbClr val="EEEEEE"/>
-                      </a:solidFill>
-                      <a:prstDash val="solid"/>
-                      <a:round/>
-                      <a:headEnd type="none" w="med" len="med"/>
-                      <a:tailEnd type="none" w="med" len="med"/>
-                    </a:lnR>
-                    <a:lnT w="2540" cap="flat" cmpd="sng" algn="ctr">
-                      <a:solidFill>
-                        <a:srgbClr val="EEEEEE"/>
-                      </a:solidFill>
-                      <a:prstDash val="solid"/>
-                      <a:round/>
-                      <a:headEnd type="none" w="med" len="med"/>
-                      <a:tailEnd type="none" w="med" len="med"/>
-                    </a:lnT>
-                    <a:lnB w="2540" cap="flat" cmpd="sng" algn="ctr">
-                      <a:solidFill>
-                        <a:srgbClr val="EEEEEE"/>
-                      </a:solidFill>
-                      <a:prstDash val="solid"/>
-                      <a:round/>
-                      <a:headEnd type="none" w="med" len="med"/>
-                      <a:tailEnd type="none" w="med" len="med"/>
-                    </a:lnB>
-                  </a:tcPr>
-                </a:tc>
-              </a:tr>
-              <a:tr h="123444">
-                <a:tc>
-                  <a:txBody>
-                    <a:bodyPr/>
-                    <a:lstStyle/>
-                    <a:p>
-                      <a:pPr algn="l" indent="0" marL="0">
-                        <a:buNone/>
-                      </a:pPr>
-                      <a:endParaRPr lang="en-US" sz="500" dirty="0">
-                        <a:latin typeface="Calibri" charset="0"/>
-                        <a:ea typeface="Calibri" charset="0"/>
-                        <a:cs typeface="Calibri" charset="0"/>
-                      </a:endParaRPr>
-                    </a:p>
-                  </a:txBody>
-                  <a:tcPr marL="91440" marR="91440" marT="45720" marB="45720">
-                    <a:lnL w="2540" cap="flat" cmpd="sng" algn="ctr">
-                      <a:solidFill>
-                        <a:srgbClr val="EEEEEE"/>
-                      </a:solidFill>
-                      <a:prstDash val="solid"/>
-                      <a:round/>
-                      <a:headEnd type="none" w="med" len="med"/>
-                      <a:tailEnd type="none" w="med" len="med"/>
-                    </a:lnL>
-                    <a:lnR w="2540" cap="flat" cmpd="sng" algn="ctr">
-                      <a:solidFill>
-                        <a:srgbClr val="EEEEEE"/>
-                      </a:solidFill>
-                      <a:prstDash val="solid"/>
-                      <a:round/>
-                      <a:headEnd type="none" w="med" len="med"/>
-                      <a:tailEnd type="none" w="med" len="med"/>
-                    </a:lnR>
-                    <a:lnT w="2540" cap="flat" cmpd="sng" algn="ctr">
-                      <a:solidFill>
-                        <a:srgbClr val="EEEEEE"/>
-                      </a:solidFill>
-                      <a:prstDash val="solid"/>
-                      <a:round/>
-                      <a:headEnd type="none" w="med" len="med"/>
-                      <a:tailEnd type="none" w="med" len="med"/>
-                    </a:lnT>
-                    <a:lnB w="2540" cap="flat" cmpd="sng" algn="ctr">
-                      <a:solidFill>
-                        <a:srgbClr val="EEEEEE"/>
-                      </a:solidFill>
-                      <a:prstDash val="solid"/>
-                      <a:round/>
-                      <a:headEnd type="none" w="med" len="med"/>
-                      <a:tailEnd type="none" w="med" len="med"/>
-                    </a:lnB>
-                  </a:tcPr>
-                </a:tc>
-                <a:tc>
-                  <a:txBody>
-                    <a:bodyPr/>
-                    <a:lstStyle/>
-                    <a:p>
-                      <a:pPr algn="l" indent="0" marL="0">
-                        <a:buNone/>
-                      </a:pPr>
-                      <a:r>
-                        <a:rPr lang="en-US" sz="500" dirty="0">
-                          <a:solidFill>
-                            <a:srgbClr val="000000"/>
-                          </a:solidFill>
-                          <a:latin typeface="Calibri" pitchFamily="34" charset="0"/>
-                          <a:ea typeface="Calibri" pitchFamily="34" charset="-122"/>
-                          <a:cs typeface="Calibri" pitchFamily="34" charset="-120"/>
-                        </a:rPr>
-                        <a:t>FIP LIQUIDEZ Plus</a:t>
-                      </a:r>
-                      <a:endParaRPr lang="en-US" sz="500" dirty="0">
-                        <a:latin typeface="Calibri" charset="0"/>
-                        <a:ea typeface="Calibri" charset="0"/>
-                        <a:cs typeface="Calibri" charset="0"/>
-                      </a:endParaRPr>
-                    </a:p>
-                  </a:txBody>
-                  <a:tcPr marL="91440" marR="91440" marT="45720" marB="45720">
-                    <a:lnL w="2540" cap="flat" cmpd="sng" algn="ctr">
-                      <a:solidFill>
-                        <a:srgbClr val="EEEEEE"/>
-                      </a:solidFill>
-                      <a:prstDash val="solid"/>
-                      <a:round/>
-                      <a:headEnd type="none" w="med" len="med"/>
-                      <a:tailEnd type="none" w="med" len="med"/>
-                    </a:lnL>
-                    <a:lnR w="2540" cap="flat" cmpd="sng" algn="ctr">
-                      <a:solidFill>
-                        <a:srgbClr val="EEEEEE"/>
-                      </a:solidFill>
-                      <a:prstDash val="solid"/>
-                      <a:round/>
-                      <a:headEnd type="none" w="med" len="med"/>
-                      <a:tailEnd type="none" w="med" len="med"/>
-                    </a:lnR>
-                    <a:lnT w="2540" cap="flat" cmpd="sng" algn="ctr">
-                      <a:solidFill>
-                        <a:srgbClr val="EEEEEE"/>
-                      </a:solidFill>
-                      <a:prstDash val="solid"/>
-                      <a:round/>
-                      <a:headEnd type="none" w="med" len="med"/>
-                      <a:tailEnd type="none" w="med" len="med"/>
-                    </a:lnT>
-                    <a:lnB w="2540" cap="flat" cmpd="sng" algn="ctr">
-                      <a:solidFill>
-                        <a:srgbClr val="EEEEEE"/>
-                      </a:solidFill>
-                      <a:prstDash val="solid"/>
-                      <a:round/>
-                      <a:headEnd type="none" w="med" len="med"/>
-                      <a:tailEnd type="none" w="med" len="med"/>
-                    </a:lnB>
-                  </a:tcPr>
-                </a:tc>
-                <a:tc>
-                  <a:txBody>
-                    <a:bodyPr/>
-                    <a:lstStyle/>
-                    <a:p>
-                      <a:pPr algn="ctr" indent="0" marL="0">
-                        <a:buNone/>
-                      </a:pPr>
-                      <a:r>
-                        <a:rPr lang="en-US" sz="500" dirty="0">
-                          <a:solidFill>
-                            <a:srgbClr val="000000"/>
-                          </a:solidFill>
-                          <a:latin typeface="Calibri" pitchFamily="34" charset="0"/>
-                          <a:ea typeface="Calibri" pitchFamily="34" charset="-122"/>
-                          <a:cs typeface="Calibri" pitchFamily="34" charset="-120"/>
-                        </a:rPr>
-                        <a:t>0.61%</a:t>
-                      </a:r>
-                      <a:endParaRPr lang="en-US" sz="500" dirty="0">
-                        <a:latin typeface="Calibri" charset="0"/>
-                        <a:ea typeface="Calibri" charset="0"/>
-                        <a:cs typeface="Calibri" charset="0"/>
-                      </a:endParaRPr>
-                    </a:p>
-                  </a:txBody>
-                  <a:tcPr marL="91440" marR="91440" marT="45720" marB="45720">
-                    <a:lnL w="2540" cap="flat" cmpd="sng" algn="ctr">
-                      <a:solidFill>
-                        <a:srgbClr val="EEEEEE"/>
-                      </a:solidFill>
-                      <a:prstDash val="solid"/>
-                      <a:round/>
-                      <a:headEnd type="none" w="med" len="med"/>
-                      <a:tailEnd type="none" w="med" len="med"/>
-                    </a:lnL>
-                    <a:lnR w="2540" cap="flat" cmpd="sng" algn="ctr">
-                      <a:solidFill>
-                        <a:srgbClr val="EEEEEE"/>
-                      </a:solidFill>
-                      <a:prstDash val="solid"/>
-                      <a:round/>
-                      <a:headEnd type="none" w="med" len="med"/>
-                      <a:tailEnd type="none" w="med" len="med"/>
-                    </a:lnR>
-                    <a:lnT w="2540" cap="flat" cmpd="sng" algn="ctr">
-                      <a:solidFill>
-                        <a:srgbClr val="EEEEEE"/>
-                      </a:solidFill>
-                      <a:prstDash val="solid"/>
-                      <a:round/>
-                      <a:headEnd type="none" w="med" len="med"/>
-                      <a:tailEnd type="none" w="med" len="med"/>
-                    </a:lnT>
-                    <a:lnB w="2540" cap="flat" cmpd="sng" algn="ctr">
-                      <a:solidFill>
-                        <a:srgbClr val="EEEEEE"/>
-                      </a:solidFill>
-                      <a:prstDash val="solid"/>
-                      <a:round/>
-                      <a:headEnd type="none" w="med" len="med"/>
-                      <a:tailEnd type="none" w="med" len="med"/>
-                    </a:lnB>
-                  </a:tcPr>
-                </a:tc>
-                <a:tc>
-                  <a:txBody>
-                    <a:bodyPr/>
-                    <a:lstStyle/>
-                    <a:p>
-                      <a:pPr algn="ctr" indent="0" marL="0">
-                        <a:buNone/>
-                      </a:pPr>
-                      <a:r>
-                        <a:rPr lang="en-US" sz="500" dirty="0">
-                          <a:solidFill>
-                            <a:srgbClr val="000000"/>
-                          </a:solidFill>
-                          <a:latin typeface="Calibri" pitchFamily="34" charset="0"/>
-                          <a:ea typeface="Calibri" pitchFamily="34" charset="-122"/>
-                          <a:cs typeface="Calibri" pitchFamily="34" charset="-120"/>
-                        </a:rPr>
-                        <a:t>0.58%</a:t>
-                      </a:r>
-                      <a:endParaRPr lang="en-US" sz="500" dirty="0">
-                        <a:latin typeface="Calibri" charset="0"/>
-                        <a:ea typeface="Calibri" charset="0"/>
-                        <a:cs typeface="Calibri" charset="0"/>
-                      </a:endParaRPr>
-                    </a:p>
-                  </a:txBody>
-                  <a:tcPr marL="91440" marR="91440" marT="45720" marB="45720">
-                    <a:lnL w="2540" cap="flat" cmpd="sng" algn="ctr">
-                      <a:solidFill>
-                        <a:srgbClr val="EEEEEE"/>
-                      </a:solidFill>
-                      <a:prstDash val="solid"/>
-                      <a:round/>
-                      <a:headEnd type="none" w="med" len="med"/>
-                      <a:tailEnd type="none" w="med" len="med"/>
-                    </a:lnL>
-                    <a:lnR w="2540" cap="flat" cmpd="sng" algn="ctr">
-                      <a:solidFill>
-                        <a:srgbClr val="EEEEEE"/>
-                      </a:solidFill>
-                      <a:prstDash val="solid"/>
-                      <a:round/>
-                      <a:headEnd type="none" w="med" len="med"/>
-                      <a:tailEnd type="none" w="med" len="med"/>
-                    </a:lnR>
-                    <a:lnT w="2540" cap="flat" cmpd="sng" algn="ctr">
-                      <a:solidFill>
-                        <a:srgbClr val="EEEEEE"/>
-                      </a:solidFill>
-                      <a:prstDash val="solid"/>
-                      <a:round/>
-                      <a:headEnd type="none" w="med" len="med"/>
-                      <a:tailEnd type="none" w="med" len="med"/>
-                    </a:lnT>
-                    <a:lnB w="2540" cap="flat" cmpd="sng" algn="ctr">
-                      <a:solidFill>
-                        <a:srgbClr val="EEEEEE"/>
-                      </a:solidFill>
-                      <a:prstDash val="solid"/>
-                      <a:round/>
-                      <a:headEnd type="none" w="med" len="med"/>
-                      <a:tailEnd type="none" w="med" len="med"/>
-                    </a:lnB>
-                  </a:tcPr>
-                </a:tc>
-                <a:tc>
-                  <a:txBody>
-                    <a:bodyPr/>
-                    <a:lstStyle/>
-                    <a:p>
-                      <a:pPr algn="ctr" indent="0" marL="0">
-                        <a:buNone/>
-                      </a:pPr>
-                      <a:r>
-                        <a:rPr lang="en-US" sz="500" dirty="0">
-                          <a:solidFill>
-                            <a:srgbClr val="000000"/>
-                          </a:solidFill>
-                          <a:latin typeface="Calibri" pitchFamily="34" charset="0"/>
-                          <a:ea typeface="Calibri" pitchFamily="34" charset="-122"/>
-                          <a:cs typeface="Calibri" pitchFamily="34" charset="-120"/>
-                        </a:rPr>
-                        <a:t>0.62%</a:t>
-                      </a:r>
-                      <a:endParaRPr lang="en-US" sz="500" dirty="0">
-                        <a:latin typeface="Calibri" charset="0"/>
-                        <a:ea typeface="Calibri" charset="0"/>
-                        <a:cs typeface="Calibri" charset="0"/>
-                      </a:endParaRPr>
-                    </a:p>
-                  </a:txBody>
-                  <a:tcPr marL="91440" marR="91440" marT="45720" marB="45720">
-                    <a:lnL w="2540" cap="flat" cmpd="sng" algn="ctr">
-                      <a:solidFill>
-                        <a:srgbClr val="EEEEEE"/>
-                      </a:solidFill>
-                      <a:prstDash val="solid"/>
-                      <a:round/>
-                      <a:headEnd type="none" w="med" len="med"/>
-                      <a:tailEnd type="none" w="med" len="med"/>
-                    </a:lnL>
-                    <a:lnR w="2540" cap="flat" cmpd="sng" algn="ctr">
-                      <a:solidFill>
-                        <a:srgbClr val="EEEEEE"/>
-                      </a:solidFill>
-                      <a:prstDash val="solid"/>
-                      <a:round/>
-                      <a:headEnd type="none" w="med" len="med"/>
-                      <a:tailEnd type="none" w="med" len="med"/>
-                    </a:lnR>
-                    <a:lnT w="2540" cap="flat" cmpd="sng" algn="ctr">
-                      <a:solidFill>
-                        <a:srgbClr val="EEEEEE"/>
-                      </a:solidFill>
-                      <a:prstDash val="solid"/>
-                      <a:round/>
-                      <a:headEnd type="none" w="med" len="med"/>
-                      <a:tailEnd type="none" w="med" len="med"/>
-                    </a:lnT>
-                    <a:lnB w="2540" cap="flat" cmpd="sng" algn="ctr">
-                      <a:solidFill>
-                        <a:srgbClr val="EEEEEE"/>
-                      </a:solidFill>
-                      <a:prstDash val="solid"/>
-                      <a:round/>
-                      <a:headEnd type="none" w="med" len="med"/>
-                      <a:tailEnd type="none" w="med" len="med"/>
-                    </a:lnB>
-                  </a:tcPr>
-                </a:tc>
-                <a:tc>
-                  <a:txBody>
-                    <a:bodyPr/>
-                    <a:lstStyle/>
-                    <a:p>
-                      <a:pPr algn="ctr" indent="0" marL="0">
-                        <a:buNone/>
-                      </a:pPr>
-                      <a:r>
-                        <a:rPr lang="en-US" sz="500" dirty="0">
-                          <a:solidFill>
-                            <a:srgbClr val="000000"/>
-                          </a:solidFill>
-                          <a:latin typeface="Calibri" pitchFamily="34" charset="0"/>
-                          <a:ea typeface="Calibri" pitchFamily="34" charset="-122"/>
-                          <a:cs typeface="Calibri" pitchFamily="34" charset="-120"/>
-                        </a:rPr>
-                        <a:t>0.62%</a:t>
                       </a:r>
                       <a:endParaRPr lang="en-US" sz="500" dirty="0">
                         <a:latin typeface="Calibri" charset="0"/>

--- a/folletos/2026-04/pptx/FIP_VANTRUST_LIQUIDEZ_PLUS.pptx
+++ b/folletos/2026-04/pptx/FIP_VANTRUST_LIQUIDEZ_PLUS.pptx
@@ -3635,7 +3635,7 @@
                 <a:ea typeface="Calibri" pitchFamily="34" charset="-122"/>
                 <a:cs typeface="Calibri" pitchFamily="34" charset="-120"/>
               </a:rPr>
-              <a:t>prueba CLP</a:t>
+              <a:t>prueba 13 CLP</a:t>
             </a:r>
             <a:endParaRPr lang="en-US" sz="800" dirty="0"/>
           </a:p>

--- a/folletos/2026-04/pptx/FIP_VANTRUST_LIQUIDEZ_PLUS.pptx
+++ b/folletos/2026-04/pptx/FIP_VANTRUST_LIQUIDEZ_PLUS.pptx
@@ -435,7 +435,7 @@
                   <c:v>123.57</c:v>
                 </c:pt>
                 <c:pt idx="38">
-                  <c:v>124.04</c:v>
+                  <c:v>92.14</c:v>
                 </c:pt>
               </c:numCache>
             </c:numRef>
@@ -1083,7 +1083,7 @@
                   <c:v>117.94</c:v>
                 </c:pt>
                 <c:pt idx="38">
-                  <c:v>118.25</c:v>
+                  <c:v/>
                 </c:pt>
               </c:numCache>
             </c:numRef>
@@ -1165,7 +1165,7 @@
         <c:axId val="2094734552"/>
         <c:scaling>
           <c:orientation val="minMax"/>
-          <c:min val="97"/>
+          <c:min val="89"/>
         </c:scaling>
         <c:delete val="0"/>
         <c:axPos val="l"/>
@@ -3635,7 +3635,7 @@
                 <a:ea typeface="Calibri" pitchFamily="34" charset="-122"/>
                 <a:cs typeface="Calibri" pitchFamily="34" charset="-120"/>
               </a:rPr>
-              <a:t>prueba 13 CLP</a:t>
+              <a:t>prueba CLP</a:t>
             </a:r>
             <a:endParaRPr lang="en-US" sz="800" dirty="0"/>
           </a:p>
@@ -4305,7 +4305,7 @@
                           <a:ea typeface="Calibri" pitchFamily="34" charset="-122"/>
                           <a:cs typeface="Calibri" pitchFamily="34" charset="-120"/>
                         </a:rPr>
-                        <a:t>0.38%</a:t>
+                        <a:t>-25.44%</a:t>
                       </a:r>
                       <a:endParaRPr lang="en-US" sz="750" dirty="0">
                         <a:latin typeface="Calibri" charset="0"/>
@@ -4373,7 +4373,7 @@
                           <a:ea typeface="Calibri" pitchFamily="34" charset="-122"/>
                           <a:cs typeface="Calibri" pitchFamily="34" charset="-120"/>
                         </a:rPr>
-                        <a:t>1.13%</a:t>
+                        <a:t>-24.88%</a:t>
                       </a:r>
                       <a:endParaRPr lang="en-US" sz="750" dirty="0">
                         <a:latin typeface="Calibri" charset="0"/>
@@ -4441,7 +4441,7 @@
                           <a:ea typeface="Calibri" pitchFamily="34" charset="-122"/>
                           <a:cs typeface="Calibri" pitchFamily="34" charset="-120"/>
                         </a:rPr>
-                        <a:t>2.33%</a:t>
+                        <a:t>-23.98%</a:t>
                       </a:r>
                       <a:endParaRPr lang="en-US" sz="750" dirty="0">
                         <a:latin typeface="Calibri" charset="0"/>
@@ -4509,7 +4509,7 @@
                           <a:ea typeface="Calibri" pitchFamily="34" charset="-122"/>
                           <a:cs typeface="Calibri" pitchFamily="34" charset="-120"/>
                         </a:rPr>
-                        <a:t>4.90%</a:t>
+                        <a:t>-22.07%</a:t>
                       </a:r>
                       <a:endParaRPr lang="en-US" sz="750" dirty="0">
                         <a:latin typeface="Calibri" charset="0"/>
@@ -4577,7 +4577,7 @@
                           <a:ea typeface="Calibri" pitchFamily="34" charset="-122"/>
                           <a:cs typeface="Calibri" pitchFamily="34" charset="-120"/>
                         </a:rPr>
-                        <a:t>3.39%</a:t>
+                        <a:t>-74.63%</a:t>
                       </a:r>
                       <a:endParaRPr lang="en-US" sz="750" dirty="0">
                         <a:latin typeface="Calibri" charset="0"/>
@@ -4715,7 +4715,7 @@
                           <a:ea typeface="Calibri" pitchFamily="34" charset="-122"/>
                           <a:cs typeface="Calibri" pitchFamily="34" charset="-120"/>
                         </a:rPr>
-                        <a:t>0.26%</a:t>
+                        <a:t>-100.00%</a:t>
                       </a:r>
                       <a:endParaRPr lang="en-US" sz="750" dirty="0">
                         <a:latin typeface="Calibri" charset="0"/>
@@ -4783,7 +4783,7 @@
                           <a:ea typeface="Calibri" pitchFamily="34" charset="-122"/>
                           <a:cs typeface="Calibri" pitchFamily="34" charset="-120"/>
                         </a:rPr>
-                        <a:t>0.77%</a:t>
+                        <a:t>-100.00%</a:t>
                       </a:r>
                       <a:endParaRPr lang="en-US" sz="750" dirty="0">
                         <a:latin typeface="Calibri" charset="0"/>
@@ -4851,7 +4851,7 @@
                           <a:ea typeface="Calibri" pitchFamily="34" charset="-122"/>
                           <a:cs typeface="Calibri" pitchFamily="34" charset="-120"/>
                         </a:rPr>
-                        <a:t>1.62%</a:t>
+                        <a:t>-100.00%</a:t>
                       </a:r>
                       <a:endParaRPr lang="en-US" sz="750" dirty="0">
                         <a:latin typeface="Calibri" charset="0"/>
@@ -4919,7 +4919,7 @@
                           <a:ea typeface="Calibri" pitchFamily="34" charset="-122"/>
                           <a:cs typeface="Calibri" pitchFamily="34" charset="-120"/>
                         </a:rPr>
-                        <a:t>3.43%</a:t>
+                        <a:t>-100.00%</a:t>
                       </a:r>
                       <a:endParaRPr lang="en-US" sz="750" dirty="0">
                         <a:latin typeface="Calibri" charset="0"/>
@@ -4987,7 +4987,7 @@
                           <a:ea typeface="Calibri" pitchFamily="34" charset="-122"/>
                           <a:cs typeface="Calibri" pitchFamily="34" charset="-120"/>
                         </a:rPr>
-                        <a:t>2.32%</a:t>
+                        <a:t>-300.00%</a:t>
                       </a:r>
                       <a:endParaRPr lang="en-US" sz="750" dirty="0">
                         <a:latin typeface="Calibri" charset="0"/>
@@ -15523,7 +15523,7 @@
                           <a:ea typeface="Calibri" pitchFamily="34" charset="-122"/>
                           <a:cs typeface="Calibri" pitchFamily="34" charset="-120"/>
                         </a:rPr>
-                        <a:t>0.38%</a:t>
+                        <a:t>-25.44%</a:t>
                       </a:r>
                       <a:endParaRPr lang="en-US" sz="500" dirty="0">
                         <a:latin typeface="Calibri" charset="0"/>
@@ -16020,7 +16020,7 @@
                           <a:ea typeface="Calibri" pitchFamily="34" charset="-122"/>
                           <a:cs typeface="Calibri" pitchFamily="34" charset="-120"/>
                         </a:rPr>
-                        <a:t>3.39%</a:t>
+                        <a:t>-74.63%</a:t>
                       </a:r>
                       <a:endParaRPr lang="en-US" sz="500" dirty="0">
                         <a:latin typeface="Calibri" charset="0"/>
@@ -16401,7 +16401,7 @@
                           <a:ea typeface="Calibri" pitchFamily="34" charset="-122"/>
                           <a:cs typeface="Calibri" pitchFamily="34" charset="-120"/>
                         </a:rPr>
-                        <a:t>0.26%</a:t>
+                        <a:t>-100.00%</a:t>
                       </a:r>
                       <a:endParaRPr lang="en-US" sz="500" dirty="0">
                         <a:latin typeface="Calibri" charset="0"/>
@@ -16898,7 +16898,7 @@
                           <a:ea typeface="Calibri" pitchFamily="34" charset="-122"/>
                           <a:cs typeface="Calibri" pitchFamily="34" charset="-120"/>
                         </a:rPr>
-                        <a:t>2.32%</a:t>
+                        <a:t>-300.00%</a:t>
                       </a:r>
                       <a:endParaRPr lang="en-US" sz="500" dirty="0">
                         <a:latin typeface="Calibri" charset="0"/>

--- a/folletos/2026-04/pptx/FIP_VANTRUST_LIQUIDEZ_PLUS.pptx
+++ b/folletos/2026-04/pptx/FIP_VANTRUST_LIQUIDEZ_PLUS.pptx
@@ -3635,7 +3635,7 @@
                 <a:ea typeface="Calibri" pitchFamily="34" charset="-122"/>
                 <a:cs typeface="Calibri" pitchFamily="34" charset="-120"/>
               </a:rPr>
-              <a:t>prueba CLP</a:t>
+              <a:t>prueba 14 CLP</a:t>
             </a:r>
             <a:endParaRPr lang="en-US" sz="800" dirty="0"/>
           </a:p>
